--- a/downloads/presentations/modules/int-100.pptx
+++ b/downloads/presentations/modules/int-100.pptx
@@ -3967,13 +3967,11 @@
             </a:avLst>
           </a:prstGeom>
           <a:solidFill>
-            <a:srgbClr val="FFFFFF">
-              <a:alpha val="88000"/>
-            </a:srgbClr>
+            <a:srgbClr val="FFFFFF"/>
           </a:solidFill>
           <a:ln w="12700">
             <a:solidFill>
-              <a:srgbClr val="D6E8F2"/>
+              <a:srgbClr val="B9D7E6"/>
             </a:solidFill>
             <a:prstDash val="solid"/>
           </a:ln>
@@ -3981,119 +3979,98 @@
       </p:sp>
       <p:sp>
         <p:nvSpPr>
-          <p:cNvPr id="14" name="Shape 12"/>
-          <p:cNvSpPr/>
-          <p:nvPr/>
-        </p:nvSpPr>
-        <p:spPr>
-          <a:xfrm>
-            <a:off x="8074152" y="3291840"/>
-            <a:ext cx="2596896" cy="749808"/>
-          </a:xfrm>
-          <a:prstGeom prst="rect">
-            <a:avLst/>
-          </a:prstGeom>
-          <a:solidFill>
-            <a:srgbClr val="EAF6F8"/>
-          </a:solidFill>
-          <a:ln w="12700">
-            <a:solidFill>
-              <a:srgbClr val="8ABBD8"/>
-            </a:solidFill>
-            <a:prstDash val="solid"/>
-          </a:ln>
-        </p:spPr>
-      </p:sp>
-      <p:sp>
-        <p:nvSpPr>
-          <p:cNvPr id="15" name="Shape 13"/>
-          <p:cNvSpPr/>
-          <p:nvPr/>
-        </p:nvSpPr>
-        <p:spPr>
-          <a:xfrm>
-            <a:off x="8202168" y="3721608"/>
-            <a:ext cx="2340864" cy="0"/>
-          </a:xfrm>
-          <a:prstGeom prst="line">
-            <a:avLst/>
-          </a:prstGeom>
-          <a:noFill/>
-          <a:ln w="19050">
-            <a:solidFill>
-              <a:srgbClr val="0068B7"/>
-            </a:solidFill>
-            <a:prstDash val="solid"/>
-          </a:ln>
-        </p:spPr>
+          <p:cNvPr id="14" name="Text 12"/>
+          <p:cNvSpPr/>
+          <p:nvPr/>
+        </p:nvSpPr>
+        <p:spPr>
+          <a:xfrm>
+            <a:off x="7799832" y="2935224"/>
+            <a:ext cx="3145536" cy="256032"/>
+          </a:xfrm>
+          <a:prstGeom prst="rect">
+            <a:avLst/>
+          </a:prstGeom>
+          <a:noFill/>
+          <a:ln/>
+        </p:spPr>
+        <p:txBody>
+          <a:bodyPr wrap="square" lIns="0" tIns="0" rIns="0" bIns="0" rtlCol="0" anchor="ctr"/>
+          <a:lstStyle/>
+          <a:p>
+            <a:pPr indent="0" marL="0">
+              <a:buNone/>
+            </a:pPr>
+            <a:r>
+              <a:rPr lang="en-US" sz="1300" b="1" dirty="0">
+                <a:solidFill>
+                  <a:srgbClr val="0068B7"/>
+                </a:solidFill>
+                <a:latin typeface="Aptos" pitchFamily="34" charset="0"/>
+                <a:ea typeface="Aptos" pitchFamily="34" charset="-122"/>
+                <a:cs typeface="Aptos" pitchFamily="34" charset="-120"/>
+              </a:rPr>
+              <a:t>Concept checkpoints</a:t>
+            </a:r>
+            <a:endParaRPr lang="en-US" sz="1300" dirty="0"/>
+          </a:p>
+        </p:txBody>
+      </p:sp>
+      <p:sp>
+        <p:nvSpPr>
+          <p:cNvPr id="15" name="Text 13"/>
+          <p:cNvSpPr/>
+          <p:nvPr/>
+        </p:nvSpPr>
+        <p:spPr>
+          <a:xfrm>
+            <a:off x="7818120" y="3300984"/>
+            <a:ext cx="3090672" cy="877824"/>
+          </a:xfrm>
+          <a:prstGeom prst="rect">
+            <a:avLst/>
+          </a:prstGeom>
+          <a:noFill/>
+          <a:ln/>
+        </p:spPr>
+        <p:txBody>
+          <a:bodyPr wrap="square" lIns="254" tIns="254" rIns="254" bIns="254" rtlCol="0" anchor="t">
+            <a:normAutofit/>
+          </a:bodyPr>
+          <a:lstStyle/>
+          <a:p>
+            <a:r>
+              <a:rPr lang="en-US" sz="1380" dirty="0">
+                <a:solidFill>
+                  <a:srgbClr val="17364A"/>
+                </a:solidFill>
+                <a:latin typeface="Aptos" pitchFamily="34" charset="0"/>
+                <a:ea typeface="Aptos" pitchFamily="34" charset="-122"/>
+                <a:cs typeface="Aptos" pitchFamily="34" charset="-120"/>
+              </a:rPr>
+              <a:t>What AI Means for Public Health: Artificial intelligence is a family of methods that.</a:t>
+            </a:r>
+            <a:endParaRPr lang="en-US" sz="1380" dirty="0"/>
+          </a:p>
+          <a:p>
+            <a:r>
+              <a:rPr lang="en-US" sz="1380" dirty="0">
+                <a:solidFill>
+                  <a:srgbClr val="17364A"/>
+                </a:solidFill>
+                <a:latin typeface="Aptos" pitchFamily="34" charset="0"/>
+                <a:ea typeface="Aptos" pitchFamily="34" charset="-122"/>
+                <a:cs typeface="Aptos" pitchFamily="34" charset="-120"/>
+              </a:rPr>
+              <a:t>For public health agencies, the most consequential near-term branches are generative AI.</a:t>
+            </a:r>
+            <a:endParaRPr lang="en-US" sz="1380" dirty="0"/>
+          </a:p>
+        </p:txBody>
       </p:sp>
       <p:sp>
         <p:nvSpPr>
           <p:cNvPr id="16" name="Shape 14"/>
-          <p:cNvSpPr/>
-          <p:nvPr/>
-        </p:nvSpPr>
-        <p:spPr>
-          <a:xfrm>
-            <a:off x="9198864" y="4206240"/>
-            <a:ext cx="347472" cy="347472"/>
-          </a:xfrm>
-          <a:prstGeom prst="ellipse">
-            <a:avLst/>
-          </a:prstGeom>
-          <a:solidFill>
-            <a:srgbClr val="2F8A28"/>
-          </a:solidFill>
-          <a:ln w="12700">
-            <a:solidFill>
-              <a:srgbClr val="2F8A28"/>
-            </a:solidFill>
-            <a:prstDash val="solid"/>
-          </a:ln>
-        </p:spPr>
-      </p:sp>
-      <p:sp>
-        <p:nvSpPr>
-          <p:cNvPr id="17" name="Text 15"/>
-          <p:cNvSpPr/>
-          <p:nvPr/>
-        </p:nvSpPr>
-        <p:spPr>
-          <a:xfrm>
-            <a:off x="7909560" y="3977640"/>
-            <a:ext cx="2926080" cy="182880"/>
-          </a:xfrm>
-          <a:prstGeom prst="rect">
-            <a:avLst/>
-          </a:prstGeom>
-          <a:noFill/>
-          <a:ln/>
-        </p:spPr>
-        <p:txBody>
-          <a:bodyPr wrap="square" lIns="0" tIns="0" rIns="0" bIns="0" rtlCol="0" anchor="ctr"/>
-          <a:lstStyle/>
-          <a:p>
-            <a:pPr algn="ctr" indent="0" marL="0">
-              <a:buNone/>
-            </a:pPr>
-            <a:r>
-              <a:rPr lang="en-US" sz="1000" dirty="0">
-                <a:solidFill>
-                  <a:srgbClr val="003A63"/>
-                </a:solidFill>
-                <a:latin typeface="Aptos" pitchFamily="34" charset="0"/>
-                <a:ea typeface="Aptos" pitchFamily="34" charset="-122"/>
-                <a:cs typeface="Aptos" pitchFamily="34" charset="-120"/>
-              </a:rPr>
-              <a:t>Concept to action</a:t>
-            </a:r>
-            <a:endParaRPr lang="en-US" sz="1000" dirty="0"/>
-          </a:p>
-        </p:txBody>
-      </p:sp>
-      <p:sp>
-        <p:nvSpPr>
-          <p:cNvPr id="18" name="Shape 16"/>
           <p:cNvSpPr/>
           <p:nvPr/>
         </p:nvSpPr>
@@ -4120,7 +4097,7 @@
       </p:sp>
       <p:sp>
         <p:nvSpPr>
-          <p:cNvPr id="19" name="Text 17"/>
+          <p:cNvPr id="17" name="Text 15"/>
           <p:cNvSpPr/>
           <p:nvPr/>
         </p:nvSpPr>
@@ -4159,7 +4136,7 @@
       </p:sp>
       <p:sp>
         <p:nvSpPr>
-          <p:cNvPr id="20" name="Text 18"/>
+          <p:cNvPr id="18" name="Text 16"/>
           <p:cNvSpPr/>
           <p:nvPr/>
         </p:nvSpPr>
@@ -4667,13 +4644,11 @@
             </a:avLst>
           </a:prstGeom>
           <a:solidFill>
-            <a:srgbClr val="FFFFFF">
-              <a:alpha val="88000"/>
-            </a:srgbClr>
+            <a:srgbClr val="FFFFFF"/>
           </a:solidFill>
           <a:ln w="12700">
             <a:solidFill>
-              <a:srgbClr val="D6E8F2"/>
+              <a:srgbClr val="B9D7E6"/>
             </a:solidFill>
             <a:prstDash val="solid"/>
           </a:ln>
@@ -4681,119 +4656,112 @@
       </p:sp>
       <p:sp>
         <p:nvSpPr>
-          <p:cNvPr id="14" name="Shape 12"/>
-          <p:cNvSpPr/>
-          <p:nvPr/>
-        </p:nvSpPr>
-        <p:spPr>
-          <a:xfrm>
-            <a:off x="8074152" y="3291840"/>
-            <a:ext cx="2596896" cy="749808"/>
-          </a:xfrm>
-          <a:prstGeom prst="rect">
-            <a:avLst/>
-          </a:prstGeom>
-          <a:solidFill>
-            <a:srgbClr val="EAF6F8"/>
-          </a:solidFill>
-          <a:ln w="12700">
-            <a:solidFill>
-              <a:srgbClr val="8ABBD8"/>
-            </a:solidFill>
-            <a:prstDash val="solid"/>
-          </a:ln>
-        </p:spPr>
-      </p:sp>
-      <p:sp>
-        <p:nvSpPr>
-          <p:cNvPr id="15" name="Shape 13"/>
-          <p:cNvSpPr/>
-          <p:nvPr/>
-        </p:nvSpPr>
-        <p:spPr>
-          <a:xfrm>
-            <a:off x="8202168" y="3721608"/>
-            <a:ext cx="2340864" cy="0"/>
-          </a:xfrm>
-          <a:prstGeom prst="line">
-            <a:avLst/>
-          </a:prstGeom>
-          <a:noFill/>
-          <a:ln w="19050">
-            <a:solidFill>
-              <a:srgbClr val="0068B7"/>
-            </a:solidFill>
-            <a:prstDash val="solid"/>
-          </a:ln>
-        </p:spPr>
+          <p:cNvPr id="14" name="Text 12"/>
+          <p:cNvSpPr/>
+          <p:nvPr/>
+        </p:nvSpPr>
+        <p:spPr>
+          <a:xfrm>
+            <a:off x="7799832" y="2935224"/>
+            <a:ext cx="3145536" cy="256032"/>
+          </a:xfrm>
+          <a:prstGeom prst="rect">
+            <a:avLst/>
+          </a:prstGeom>
+          <a:noFill/>
+          <a:ln/>
+        </p:spPr>
+        <p:txBody>
+          <a:bodyPr wrap="square" lIns="0" tIns="0" rIns="0" bIns="0" rtlCol="0" anchor="ctr"/>
+          <a:lstStyle/>
+          <a:p>
+            <a:pPr indent="0" marL="0">
+              <a:buNone/>
+            </a:pPr>
+            <a:r>
+              <a:rPr lang="en-US" sz="1300" b="1" dirty="0">
+                <a:solidFill>
+                  <a:srgbClr val="0068B7"/>
+                </a:solidFill>
+                <a:latin typeface="Aptos" pitchFamily="34" charset="0"/>
+                <a:ea typeface="Aptos" pitchFamily="34" charset="-122"/>
+                <a:cs typeface="Aptos" pitchFamily="34" charset="-120"/>
+              </a:rPr>
+              <a:t>Concept checkpoints</a:t>
+            </a:r>
+            <a:endParaRPr lang="en-US" sz="1300" dirty="0"/>
+          </a:p>
+        </p:txBody>
+      </p:sp>
+      <p:sp>
+        <p:nvSpPr>
+          <p:cNvPr id="15" name="Text 13"/>
+          <p:cNvSpPr/>
+          <p:nvPr/>
+        </p:nvSpPr>
+        <p:spPr>
+          <a:xfrm>
+            <a:off x="7818120" y="3300984"/>
+            <a:ext cx="3090672" cy="877824"/>
+          </a:xfrm>
+          <a:prstGeom prst="rect">
+            <a:avLst/>
+          </a:prstGeom>
+          <a:noFill/>
+          <a:ln/>
+        </p:spPr>
+        <p:txBody>
+          <a:bodyPr wrap="square" lIns="254" tIns="254" rIns="254" bIns="254" rtlCol="0" anchor="t">
+            <a:normAutofit/>
+          </a:bodyPr>
+          <a:lstStyle/>
+          <a:p>
+            <a:r>
+              <a:rPr lang="en-US" sz="1380" dirty="0">
+                <a:solidFill>
+                  <a:srgbClr val="17364A"/>
+                </a:solidFill>
+                <a:latin typeface="Aptos" pitchFamily="34" charset="0"/>
+                <a:ea typeface="Aptos" pitchFamily="34" charset="-122"/>
+                <a:cs typeface="Aptos" pitchFamily="34" charset="-120"/>
+              </a:rPr>
+              <a:t>In public health, AI may appear as predictive analytics, classification, natural-language.</a:t>
+            </a:r>
+            <a:endParaRPr lang="en-US" sz="1380" dirty="0"/>
+          </a:p>
+          <a:p>
+            <a:r>
+              <a:rPr lang="en-US" sz="1380" dirty="0">
+                <a:solidFill>
+                  <a:srgbClr val="17364A"/>
+                </a:solidFill>
+                <a:latin typeface="Aptos" pitchFamily="34" charset="0"/>
+                <a:ea typeface="Aptos" pitchFamily="34" charset="-122"/>
+                <a:cs typeface="Aptos" pitchFamily="34" charset="-120"/>
+              </a:rPr>
+              <a:t>You need to recognize these differences because each capability has different risks, data.</a:t>
+            </a:r>
+            <a:endParaRPr lang="en-US" sz="1380" dirty="0"/>
+          </a:p>
+          <a:p>
+            <a:r>
+              <a:rPr lang="en-US" sz="1380" dirty="0">
+                <a:solidFill>
+                  <a:srgbClr val="17364A"/>
+                </a:solidFill>
+                <a:latin typeface="Aptos" pitchFamily="34" charset="0"/>
+                <a:ea typeface="Aptos" pitchFamily="34" charset="-122"/>
+                <a:cs typeface="Aptos" pitchFamily="34" charset="-120"/>
+              </a:rPr>
+              <a:t>A shared foundation also helps departments avoid technology-first decisions.</a:t>
+            </a:r>
+            <a:endParaRPr lang="en-US" sz="1380" dirty="0"/>
+          </a:p>
+        </p:txBody>
       </p:sp>
       <p:sp>
         <p:nvSpPr>
           <p:cNvPr id="16" name="Shape 14"/>
-          <p:cNvSpPr/>
-          <p:nvPr/>
-        </p:nvSpPr>
-        <p:spPr>
-          <a:xfrm>
-            <a:off x="9198864" y="4206240"/>
-            <a:ext cx="347472" cy="347472"/>
-          </a:xfrm>
-          <a:prstGeom prst="ellipse">
-            <a:avLst/>
-          </a:prstGeom>
-          <a:solidFill>
-            <a:srgbClr val="2F8A28"/>
-          </a:solidFill>
-          <a:ln w="12700">
-            <a:solidFill>
-              <a:srgbClr val="2F8A28"/>
-            </a:solidFill>
-            <a:prstDash val="solid"/>
-          </a:ln>
-        </p:spPr>
-      </p:sp>
-      <p:sp>
-        <p:nvSpPr>
-          <p:cNvPr id="17" name="Text 15"/>
-          <p:cNvSpPr/>
-          <p:nvPr/>
-        </p:nvSpPr>
-        <p:spPr>
-          <a:xfrm>
-            <a:off x="7909560" y="3977640"/>
-            <a:ext cx="2926080" cy="182880"/>
-          </a:xfrm>
-          <a:prstGeom prst="rect">
-            <a:avLst/>
-          </a:prstGeom>
-          <a:noFill/>
-          <a:ln/>
-        </p:spPr>
-        <p:txBody>
-          <a:bodyPr wrap="square" lIns="0" tIns="0" rIns="0" bIns="0" rtlCol="0" anchor="ctr"/>
-          <a:lstStyle/>
-          <a:p>
-            <a:pPr algn="ctr" indent="0" marL="0">
-              <a:buNone/>
-            </a:pPr>
-            <a:r>
-              <a:rPr lang="en-US" sz="1000" dirty="0">
-                <a:solidFill>
-                  <a:srgbClr val="003A63"/>
-                </a:solidFill>
-                <a:latin typeface="Aptos" pitchFamily="34" charset="0"/>
-                <a:ea typeface="Aptos" pitchFamily="34" charset="-122"/>
-                <a:cs typeface="Aptos" pitchFamily="34" charset="-120"/>
-              </a:rPr>
-              <a:t>Concept to action</a:t>
-            </a:r>
-            <a:endParaRPr lang="en-US" sz="1000" dirty="0"/>
-          </a:p>
-        </p:txBody>
-      </p:sp>
-      <p:sp>
-        <p:nvSpPr>
-          <p:cNvPr id="18" name="Shape 16"/>
           <p:cNvSpPr/>
           <p:nvPr/>
         </p:nvSpPr>
@@ -4820,7 +4788,7 @@
       </p:sp>
       <p:sp>
         <p:nvSpPr>
-          <p:cNvPr id="19" name="Text 17"/>
+          <p:cNvPr id="17" name="Text 15"/>
           <p:cNvSpPr/>
           <p:nvPr/>
         </p:nvSpPr>
@@ -4859,7 +4827,7 @@
       </p:sp>
       <p:sp>
         <p:nvSpPr>
-          <p:cNvPr id="20" name="Text 18"/>
+          <p:cNvPr id="18" name="Text 16"/>
           <p:cNvSpPr/>
           <p:nvPr/>
         </p:nvSpPr>
@@ -5367,13 +5335,11 @@
             </a:avLst>
           </a:prstGeom>
           <a:solidFill>
-            <a:srgbClr val="FFFFFF">
-              <a:alpha val="88000"/>
-            </a:srgbClr>
+            <a:srgbClr val="FFFFFF"/>
           </a:solidFill>
           <a:ln w="12700">
             <a:solidFill>
-              <a:srgbClr val="D6E8F2"/>
+              <a:srgbClr val="B9D7E6"/>
             </a:solidFill>
             <a:prstDash val="solid"/>
           </a:ln>
@@ -5381,119 +5347,112 @@
       </p:sp>
       <p:sp>
         <p:nvSpPr>
-          <p:cNvPr id="14" name="Shape 12"/>
-          <p:cNvSpPr/>
-          <p:nvPr/>
-        </p:nvSpPr>
-        <p:spPr>
-          <a:xfrm>
-            <a:off x="8074152" y="3291840"/>
-            <a:ext cx="2596896" cy="749808"/>
-          </a:xfrm>
-          <a:prstGeom prst="rect">
-            <a:avLst/>
-          </a:prstGeom>
-          <a:solidFill>
-            <a:srgbClr val="EAF6F8"/>
-          </a:solidFill>
-          <a:ln w="12700">
-            <a:solidFill>
-              <a:srgbClr val="8ABBD8"/>
-            </a:solidFill>
-            <a:prstDash val="solid"/>
-          </a:ln>
-        </p:spPr>
-      </p:sp>
-      <p:sp>
-        <p:nvSpPr>
-          <p:cNvPr id="15" name="Shape 13"/>
-          <p:cNvSpPr/>
-          <p:nvPr/>
-        </p:nvSpPr>
-        <p:spPr>
-          <a:xfrm>
-            <a:off x="8202168" y="3721608"/>
-            <a:ext cx="2340864" cy="0"/>
-          </a:xfrm>
-          <a:prstGeom prst="line">
-            <a:avLst/>
-          </a:prstGeom>
-          <a:noFill/>
-          <a:ln w="19050">
-            <a:solidFill>
-              <a:srgbClr val="0068B7"/>
-            </a:solidFill>
-            <a:prstDash val="solid"/>
-          </a:ln>
-        </p:spPr>
+          <p:cNvPr id="14" name="Text 12"/>
+          <p:cNvSpPr/>
+          <p:nvPr/>
+        </p:nvSpPr>
+        <p:spPr>
+          <a:xfrm>
+            <a:off x="7799832" y="2935224"/>
+            <a:ext cx="3145536" cy="256032"/>
+          </a:xfrm>
+          <a:prstGeom prst="rect">
+            <a:avLst/>
+          </a:prstGeom>
+          <a:noFill/>
+          <a:ln/>
+        </p:spPr>
+        <p:txBody>
+          <a:bodyPr wrap="square" lIns="0" tIns="0" rIns="0" bIns="0" rtlCol="0" anchor="ctr"/>
+          <a:lstStyle/>
+          <a:p>
+            <a:pPr indent="0" marL="0">
+              <a:buNone/>
+            </a:pPr>
+            <a:r>
+              <a:rPr lang="en-US" sz="1300" b="1" dirty="0">
+                <a:solidFill>
+                  <a:srgbClr val="0068B7"/>
+                </a:solidFill>
+                <a:latin typeface="Aptos" pitchFamily="34" charset="0"/>
+                <a:ea typeface="Aptos" pitchFamily="34" charset="-122"/>
+                <a:cs typeface="Aptos" pitchFamily="34" charset="-120"/>
+              </a:rPr>
+              <a:t>Concept checkpoints</a:t>
+            </a:r>
+            <a:endParaRPr lang="en-US" sz="1300" dirty="0"/>
+          </a:p>
+        </p:txBody>
+      </p:sp>
+      <p:sp>
+        <p:nvSpPr>
+          <p:cNvPr id="15" name="Text 13"/>
+          <p:cNvSpPr/>
+          <p:nvPr/>
+        </p:nvSpPr>
+        <p:spPr>
+          <a:xfrm>
+            <a:off x="7818120" y="3300984"/>
+            <a:ext cx="3090672" cy="877824"/>
+          </a:xfrm>
+          <a:prstGeom prst="rect">
+            <a:avLst/>
+          </a:prstGeom>
+          <a:noFill/>
+          <a:ln/>
+        </p:spPr>
+        <p:txBody>
+          <a:bodyPr wrap="square" lIns="254" tIns="254" rIns="254" bIns="254" rtlCol="0" anchor="t">
+            <a:normAutofit/>
+          </a:bodyPr>
+          <a:lstStyle/>
+          <a:p>
+            <a:r>
+              <a:rPr lang="en-US" sz="1380" dirty="0">
+                <a:solidFill>
+                  <a:srgbClr val="17364A"/>
+                </a:solidFill>
+                <a:latin typeface="Aptos" pitchFamily="34" charset="0"/>
+                <a:ea typeface="Aptos" pitchFamily="34" charset="-122"/>
+                <a:cs typeface="Aptos" pitchFamily="34" charset="-120"/>
+              </a:rPr>
+              <a:t>AI is not one technology or one product category.</a:t>
+            </a:r>
+            <a:endParaRPr lang="en-US" sz="1380" dirty="0"/>
+          </a:p>
+          <a:p>
+            <a:r>
+              <a:rPr lang="en-US" sz="1380" dirty="0">
+                <a:solidFill>
+                  <a:srgbClr val="17364A"/>
+                </a:solidFill>
+                <a:latin typeface="Aptos" pitchFamily="34" charset="0"/>
+                <a:ea typeface="Aptos" pitchFamily="34" charset="-122"/>
+                <a:cs typeface="Aptos" pitchFamily="34" charset="-120"/>
+              </a:rPr>
+              <a:t>In public health, the word AI may refer to predictive models, classification tools,.</a:t>
+            </a:r>
+            <a:endParaRPr lang="en-US" sz="1380" dirty="0"/>
+          </a:p>
+          <a:p>
+            <a:r>
+              <a:rPr lang="en-US" sz="1380" dirty="0">
+                <a:solidFill>
+                  <a:srgbClr val="17364A"/>
+                </a:solidFill>
+                <a:latin typeface="Aptos" pitchFamily="34" charset="0"/>
+                <a:ea typeface="Aptos" pitchFamily="34" charset="-122"/>
+                <a:cs typeface="Aptos" pitchFamily="34" charset="-120"/>
+              </a:rPr>
+              <a:t>Treating these as interchangeable can lead to poor procurement choices, weak safeguards,.</a:t>
+            </a:r>
+            <a:endParaRPr lang="en-US" sz="1380" dirty="0"/>
+          </a:p>
+        </p:txBody>
       </p:sp>
       <p:sp>
         <p:nvSpPr>
           <p:cNvPr id="16" name="Shape 14"/>
-          <p:cNvSpPr/>
-          <p:nvPr/>
-        </p:nvSpPr>
-        <p:spPr>
-          <a:xfrm>
-            <a:off x="9198864" y="4206240"/>
-            <a:ext cx="347472" cy="347472"/>
-          </a:xfrm>
-          <a:prstGeom prst="ellipse">
-            <a:avLst/>
-          </a:prstGeom>
-          <a:solidFill>
-            <a:srgbClr val="2F8A28"/>
-          </a:solidFill>
-          <a:ln w="12700">
-            <a:solidFill>
-              <a:srgbClr val="2F8A28"/>
-            </a:solidFill>
-            <a:prstDash val="solid"/>
-          </a:ln>
-        </p:spPr>
-      </p:sp>
-      <p:sp>
-        <p:nvSpPr>
-          <p:cNvPr id="17" name="Text 15"/>
-          <p:cNvSpPr/>
-          <p:nvPr/>
-        </p:nvSpPr>
-        <p:spPr>
-          <a:xfrm>
-            <a:off x="7909560" y="3977640"/>
-            <a:ext cx="2926080" cy="182880"/>
-          </a:xfrm>
-          <a:prstGeom prst="rect">
-            <a:avLst/>
-          </a:prstGeom>
-          <a:noFill/>
-          <a:ln/>
-        </p:spPr>
-        <p:txBody>
-          <a:bodyPr wrap="square" lIns="0" tIns="0" rIns="0" bIns="0" rtlCol="0" anchor="ctr"/>
-          <a:lstStyle/>
-          <a:p>
-            <a:pPr algn="ctr" indent="0" marL="0">
-              <a:buNone/>
-            </a:pPr>
-            <a:r>
-              <a:rPr lang="en-US" sz="1000" dirty="0">
-                <a:solidFill>
-                  <a:srgbClr val="003A63"/>
-                </a:solidFill>
-                <a:latin typeface="Aptos" pitchFamily="34" charset="0"/>
-                <a:ea typeface="Aptos" pitchFamily="34" charset="-122"/>
-                <a:cs typeface="Aptos" pitchFamily="34" charset="-120"/>
-              </a:rPr>
-              <a:t>Concept to action</a:t>
-            </a:r>
-            <a:endParaRPr lang="en-US" sz="1000" dirty="0"/>
-          </a:p>
-        </p:txBody>
-      </p:sp>
-      <p:sp>
-        <p:nvSpPr>
-          <p:cNvPr id="18" name="Shape 16"/>
           <p:cNvSpPr/>
           <p:nvPr/>
         </p:nvSpPr>
@@ -5520,7 +5479,7 @@
       </p:sp>
       <p:sp>
         <p:nvSpPr>
-          <p:cNvPr id="19" name="Text 17"/>
+          <p:cNvPr id="17" name="Text 15"/>
           <p:cNvSpPr/>
           <p:nvPr/>
         </p:nvSpPr>
@@ -5559,7 +5518,7 @@
       </p:sp>
       <p:sp>
         <p:nvSpPr>
-          <p:cNvPr id="20" name="Text 18"/>
+          <p:cNvPr id="18" name="Text 16"/>
           <p:cNvSpPr/>
           <p:nvPr/>
         </p:nvSpPr>
@@ -6067,13 +6026,11 @@
             </a:avLst>
           </a:prstGeom>
           <a:solidFill>
-            <a:srgbClr val="FFFFFF">
-              <a:alpha val="88000"/>
-            </a:srgbClr>
+            <a:srgbClr val="FFFFFF"/>
           </a:solidFill>
           <a:ln w="12700">
             <a:solidFill>
-              <a:srgbClr val="D6E8F2"/>
+              <a:srgbClr val="B9D7E6"/>
             </a:solidFill>
             <a:prstDash val="solid"/>
           </a:ln>
@@ -6081,119 +6038,112 @@
       </p:sp>
       <p:sp>
         <p:nvSpPr>
-          <p:cNvPr id="14" name="Shape 12"/>
-          <p:cNvSpPr/>
-          <p:nvPr/>
-        </p:nvSpPr>
-        <p:spPr>
-          <a:xfrm>
-            <a:off x="8074152" y="3291840"/>
-            <a:ext cx="2596896" cy="749808"/>
-          </a:xfrm>
-          <a:prstGeom prst="rect">
-            <a:avLst/>
-          </a:prstGeom>
-          <a:solidFill>
-            <a:srgbClr val="EAF6F8"/>
-          </a:solidFill>
-          <a:ln w="12700">
-            <a:solidFill>
-              <a:srgbClr val="8ABBD8"/>
-            </a:solidFill>
-            <a:prstDash val="solid"/>
-          </a:ln>
-        </p:spPr>
-      </p:sp>
-      <p:sp>
-        <p:nvSpPr>
-          <p:cNvPr id="15" name="Shape 13"/>
-          <p:cNvSpPr/>
-          <p:nvPr/>
-        </p:nvSpPr>
-        <p:spPr>
-          <a:xfrm>
-            <a:off x="8202168" y="3721608"/>
-            <a:ext cx="2340864" cy="0"/>
-          </a:xfrm>
-          <a:prstGeom prst="line">
-            <a:avLst/>
-          </a:prstGeom>
-          <a:noFill/>
-          <a:ln w="19050">
-            <a:solidFill>
-              <a:srgbClr val="0068B7"/>
-            </a:solidFill>
-            <a:prstDash val="solid"/>
-          </a:ln>
-        </p:spPr>
+          <p:cNvPr id="14" name="Text 12"/>
+          <p:cNvSpPr/>
+          <p:nvPr/>
+        </p:nvSpPr>
+        <p:spPr>
+          <a:xfrm>
+            <a:off x="7799832" y="2935224"/>
+            <a:ext cx="3145536" cy="256032"/>
+          </a:xfrm>
+          <a:prstGeom prst="rect">
+            <a:avLst/>
+          </a:prstGeom>
+          <a:noFill/>
+          <a:ln/>
+        </p:spPr>
+        <p:txBody>
+          <a:bodyPr wrap="square" lIns="0" tIns="0" rIns="0" bIns="0" rtlCol="0" anchor="ctr"/>
+          <a:lstStyle/>
+          <a:p>
+            <a:pPr indent="0" marL="0">
+              <a:buNone/>
+            </a:pPr>
+            <a:r>
+              <a:rPr lang="en-US" sz="1300" b="1" dirty="0">
+                <a:solidFill>
+                  <a:srgbClr val="0068B7"/>
+                </a:solidFill>
+                <a:latin typeface="Aptos" pitchFamily="34" charset="0"/>
+                <a:ea typeface="Aptos" pitchFamily="34" charset="-122"/>
+                <a:cs typeface="Aptos" pitchFamily="34" charset="-120"/>
+              </a:rPr>
+              <a:t>Concept checkpoints</a:t>
+            </a:r>
+            <a:endParaRPr lang="en-US" sz="1300" dirty="0"/>
+          </a:p>
+        </p:txBody>
+      </p:sp>
+      <p:sp>
+        <p:nvSpPr>
+          <p:cNvPr id="15" name="Text 13"/>
+          <p:cNvSpPr/>
+          <p:nvPr/>
+        </p:nvSpPr>
+        <p:spPr>
+          <a:xfrm>
+            <a:off x="7818120" y="3300984"/>
+            <a:ext cx="3090672" cy="877824"/>
+          </a:xfrm>
+          <a:prstGeom prst="rect">
+            <a:avLst/>
+          </a:prstGeom>
+          <a:noFill/>
+          <a:ln/>
+        </p:spPr>
+        <p:txBody>
+          <a:bodyPr wrap="square" lIns="254" tIns="254" rIns="254" bIns="254" rtlCol="0" anchor="t">
+            <a:normAutofit/>
+          </a:bodyPr>
+          <a:lstStyle/>
+          <a:p>
+            <a:r>
+              <a:rPr lang="en-US" sz="1380" dirty="0">
+                <a:solidFill>
+                  <a:srgbClr val="17364A"/>
+                </a:solidFill>
+                <a:latin typeface="Aptos" pitchFamily="34" charset="0"/>
+                <a:ea typeface="Aptos" pitchFamily="34" charset="-122"/>
+                <a:cs typeface="Aptos" pitchFamily="34" charset="-120"/>
+              </a:rPr>
+              <a:t>Some AI systems classify records, some detect patterns, some predict possible outcomes,.</a:t>
+            </a:r>
+            <a:endParaRPr lang="en-US" sz="1380" dirty="0"/>
+          </a:p>
+          <a:p>
+            <a:r>
+              <a:rPr lang="en-US" sz="1380" dirty="0">
+                <a:solidFill>
+                  <a:srgbClr val="17364A"/>
+                </a:solidFill>
+                <a:latin typeface="Aptos" pitchFamily="34" charset="0"/>
+                <a:ea typeface="Aptos" pitchFamily="34" charset="-122"/>
+                <a:cs typeface="Aptos" pitchFamily="34" charset="-120"/>
+              </a:rPr>
+              <a:t>This distinction matters because each capability has different data requirements, error.</a:t>
+            </a:r>
+            <a:endParaRPr lang="en-US" sz="1380" dirty="0"/>
+          </a:p>
+          <a:p>
+            <a:r>
+              <a:rPr lang="en-US" sz="1380" dirty="0">
+                <a:solidFill>
+                  <a:srgbClr val="17364A"/>
+                </a:solidFill>
+                <a:latin typeface="Aptos" pitchFamily="34" charset="0"/>
+                <a:ea typeface="Aptos" pitchFamily="34" charset="-122"/>
+                <a:cs typeface="Aptos" pitchFamily="34" charset="-120"/>
+              </a:rPr>
+              <a:t>A responsible public health discussion starts by naming what kind of AI support is being.</a:t>
+            </a:r>
+            <a:endParaRPr lang="en-US" sz="1380" dirty="0"/>
+          </a:p>
+        </p:txBody>
       </p:sp>
       <p:sp>
         <p:nvSpPr>
           <p:cNvPr id="16" name="Shape 14"/>
-          <p:cNvSpPr/>
-          <p:nvPr/>
-        </p:nvSpPr>
-        <p:spPr>
-          <a:xfrm>
-            <a:off x="9198864" y="4206240"/>
-            <a:ext cx="347472" cy="347472"/>
-          </a:xfrm>
-          <a:prstGeom prst="ellipse">
-            <a:avLst/>
-          </a:prstGeom>
-          <a:solidFill>
-            <a:srgbClr val="2F8A28"/>
-          </a:solidFill>
-          <a:ln w="12700">
-            <a:solidFill>
-              <a:srgbClr val="2F8A28"/>
-            </a:solidFill>
-            <a:prstDash val="solid"/>
-          </a:ln>
-        </p:spPr>
-      </p:sp>
-      <p:sp>
-        <p:nvSpPr>
-          <p:cNvPr id="17" name="Text 15"/>
-          <p:cNvSpPr/>
-          <p:nvPr/>
-        </p:nvSpPr>
-        <p:spPr>
-          <a:xfrm>
-            <a:off x="7909560" y="3977640"/>
-            <a:ext cx="2926080" cy="182880"/>
-          </a:xfrm>
-          <a:prstGeom prst="rect">
-            <a:avLst/>
-          </a:prstGeom>
-          <a:noFill/>
-          <a:ln/>
-        </p:spPr>
-        <p:txBody>
-          <a:bodyPr wrap="square" lIns="0" tIns="0" rIns="0" bIns="0" rtlCol="0" anchor="ctr"/>
-          <a:lstStyle/>
-          <a:p>
-            <a:pPr algn="ctr" indent="0" marL="0">
-              <a:buNone/>
-            </a:pPr>
-            <a:r>
-              <a:rPr lang="en-US" sz="1000" dirty="0">
-                <a:solidFill>
-                  <a:srgbClr val="003A63"/>
-                </a:solidFill>
-                <a:latin typeface="Aptos" pitchFamily="34" charset="0"/>
-                <a:ea typeface="Aptos" pitchFamily="34" charset="-122"/>
-                <a:cs typeface="Aptos" pitchFamily="34" charset="-120"/>
-              </a:rPr>
-              <a:t>Concept to action</a:t>
-            </a:r>
-            <a:endParaRPr lang="en-US" sz="1000" dirty="0"/>
-          </a:p>
-        </p:txBody>
-      </p:sp>
-      <p:sp>
-        <p:nvSpPr>
-          <p:cNvPr id="18" name="Shape 16"/>
           <p:cNvSpPr/>
           <p:nvPr/>
         </p:nvSpPr>
@@ -6220,7 +6170,7 @@
       </p:sp>
       <p:sp>
         <p:nvSpPr>
-          <p:cNvPr id="19" name="Text 17"/>
+          <p:cNvPr id="17" name="Text 15"/>
           <p:cNvSpPr/>
           <p:nvPr/>
         </p:nvSpPr>
@@ -6259,7 +6209,7 @@
       </p:sp>
       <p:sp>
         <p:nvSpPr>
-          <p:cNvPr id="20" name="Text 18"/>
+          <p:cNvPr id="18" name="Text 16"/>
           <p:cNvSpPr/>
           <p:nvPr/>
         </p:nvSpPr>
@@ -6767,13 +6717,11 @@
             </a:avLst>
           </a:prstGeom>
           <a:solidFill>
-            <a:srgbClr val="FFFFFF">
-              <a:alpha val="88000"/>
-            </a:srgbClr>
+            <a:srgbClr val="FFFFFF"/>
           </a:solidFill>
           <a:ln w="12700">
             <a:solidFill>
-              <a:srgbClr val="D6E8F2"/>
+              <a:srgbClr val="B9D7E6"/>
             </a:solidFill>
             <a:prstDash val="solid"/>
           </a:ln>
@@ -6781,119 +6729,112 @@
       </p:sp>
       <p:sp>
         <p:nvSpPr>
-          <p:cNvPr id="14" name="Shape 12"/>
-          <p:cNvSpPr/>
-          <p:nvPr/>
-        </p:nvSpPr>
-        <p:spPr>
-          <a:xfrm>
-            <a:off x="8074152" y="3291840"/>
-            <a:ext cx="2596896" cy="749808"/>
-          </a:xfrm>
-          <a:prstGeom prst="rect">
-            <a:avLst/>
-          </a:prstGeom>
-          <a:solidFill>
-            <a:srgbClr val="EAF6F8"/>
-          </a:solidFill>
-          <a:ln w="12700">
-            <a:solidFill>
-              <a:srgbClr val="8ABBD8"/>
-            </a:solidFill>
-            <a:prstDash val="solid"/>
-          </a:ln>
-        </p:spPr>
-      </p:sp>
-      <p:sp>
-        <p:nvSpPr>
-          <p:cNvPr id="15" name="Shape 13"/>
-          <p:cNvSpPr/>
-          <p:nvPr/>
-        </p:nvSpPr>
-        <p:spPr>
-          <a:xfrm>
-            <a:off x="8202168" y="3721608"/>
-            <a:ext cx="2340864" cy="0"/>
-          </a:xfrm>
-          <a:prstGeom prst="line">
-            <a:avLst/>
-          </a:prstGeom>
-          <a:noFill/>
-          <a:ln w="19050">
-            <a:solidFill>
-              <a:srgbClr val="0068B7"/>
-            </a:solidFill>
-            <a:prstDash val="solid"/>
-          </a:ln>
-        </p:spPr>
+          <p:cNvPr id="14" name="Text 12"/>
+          <p:cNvSpPr/>
+          <p:nvPr/>
+        </p:nvSpPr>
+        <p:spPr>
+          <a:xfrm>
+            <a:off x="7799832" y="2935224"/>
+            <a:ext cx="3145536" cy="256032"/>
+          </a:xfrm>
+          <a:prstGeom prst="rect">
+            <a:avLst/>
+          </a:prstGeom>
+          <a:noFill/>
+          <a:ln/>
+        </p:spPr>
+        <p:txBody>
+          <a:bodyPr wrap="square" lIns="0" tIns="0" rIns="0" bIns="0" rtlCol="0" anchor="ctr"/>
+          <a:lstStyle/>
+          <a:p>
+            <a:pPr indent="0" marL="0">
+              <a:buNone/>
+            </a:pPr>
+            <a:r>
+              <a:rPr lang="en-US" sz="1300" b="1" dirty="0">
+                <a:solidFill>
+                  <a:srgbClr val="0068B7"/>
+                </a:solidFill>
+                <a:latin typeface="Aptos" pitchFamily="34" charset="0"/>
+                <a:ea typeface="Aptos" pitchFamily="34" charset="-122"/>
+                <a:cs typeface="Aptos" pitchFamily="34" charset="-120"/>
+              </a:rPr>
+              <a:t>Concept checkpoints</a:t>
+            </a:r>
+            <a:endParaRPr lang="en-US" sz="1300" dirty="0"/>
+          </a:p>
+        </p:txBody>
+      </p:sp>
+      <p:sp>
+        <p:nvSpPr>
+          <p:cNvPr id="15" name="Text 13"/>
+          <p:cNvSpPr/>
+          <p:nvPr/>
+        </p:nvSpPr>
+        <p:spPr>
+          <a:xfrm>
+            <a:off x="7818120" y="3300984"/>
+            <a:ext cx="3090672" cy="877824"/>
+          </a:xfrm>
+          <a:prstGeom prst="rect">
+            <a:avLst/>
+          </a:prstGeom>
+          <a:noFill/>
+          <a:ln/>
+        </p:spPr>
+        <p:txBody>
+          <a:bodyPr wrap="square" lIns="254" tIns="254" rIns="254" bIns="254" rtlCol="0" anchor="t">
+            <a:normAutofit/>
+          </a:bodyPr>
+          <a:lstStyle/>
+          <a:p>
+            <a:r>
+              <a:rPr lang="en-US" sz="1380" dirty="0">
+                <a:solidFill>
+                  <a:srgbClr val="17364A"/>
+                </a:solidFill>
+                <a:latin typeface="Aptos" pitchFamily="34" charset="0"/>
+                <a:ea typeface="Aptos" pitchFamily="34" charset="-122"/>
+                <a:cs typeface="Aptos" pitchFamily="34" charset="-120"/>
+              </a:rPr>
+              <a:t>Instead of relying only on a model's general training, the system retrieves relevant.</a:t>
+            </a:r>
+            <a:endParaRPr lang="en-US" sz="1380" dirty="0"/>
+          </a:p>
+          <a:p>
+            <a:r>
+              <a:rPr lang="en-US" sz="1380" dirty="0">
+                <a:solidFill>
+                  <a:srgbClr val="17364A"/>
+                </a:solidFill>
+                <a:latin typeface="Aptos" pitchFamily="34" charset="0"/>
+                <a:ea typeface="Aptos" pitchFamily="34" charset="-122"/>
+                <a:cs typeface="Aptos" pitchFamily="34" charset="-120"/>
+              </a:rPr>
+              <a:t>This approach can be useful for policy summaries, inspection documentation, program.</a:t>
+            </a:r>
+            <a:endParaRPr lang="en-US" sz="1380" dirty="0"/>
+          </a:p>
+          <a:p>
+            <a:r>
+              <a:rPr lang="en-US" sz="1380" dirty="0">
+                <a:solidFill>
+                  <a:srgbClr val="17364A"/>
+                </a:solidFill>
+                <a:latin typeface="Aptos" pitchFamily="34" charset="0"/>
+                <a:ea typeface="Aptos" pitchFamily="34" charset="-122"/>
+                <a:cs typeface="Aptos" pitchFamily="34" charset="-120"/>
+              </a:rPr>
+              <a:t>It still requires review because retrieval can miss important context, select the wrong.</a:t>
+            </a:r>
+            <a:endParaRPr lang="en-US" sz="1380" dirty="0"/>
+          </a:p>
+        </p:txBody>
       </p:sp>
       <p:sp>
         <p:nvSpPr>
           <p:cNvPr id="16" name="Shape 14"/>
-          <p:cNvSpPr/>
-          <p:nvPr/>
-        </p:nvSpPr>
-        <p:spPr>
-          <a:xfrm>
-            <a:off x="9198864" y="4206240"/>
-            <a:ext cx="347472" cy="347472"/>
-          </a:xfrm>
-          <a:prstGeom prst="ellipse">
-            <a:avLst/>
-          </a:prstGeom>
-          <a:solidFill>
-            <a:srgbClr val="2F8A28"/>
-          </a:solidFill>
-          <a:ln w="12700">
-            <a:solidFill>
-              <a:srgbClr val="2F8A28"/>
-            </a:solidFill>
-            <a:prstDash val="solid"/>
-          </a:ln>
-        </p:spPr>
-      </p:sp>
-      <p:sp>
-        <p:nvSpPr>
-          <p:cNvPr id="17" name="Text 15"/>
-          <p:cNvSpPr/>
-          <p:nvPr/>
-        </p:nvSpPr>
-        <p:spPr>
-          <a:xfrm>
-            <a:off x="7909560" y="3977640"/>
-            <a:ext cx="2926080" cy="182880"/>
-          </a:xfrm>
-          <a:prstGeom prst="rect">
-            <a:avLst/>
-          </a:prstGeom>
-          <a:noFill/>
-          <a:ln/>
-        </p:spPr>
-        <p:txBody>
-          <a:bodyPr wrap="square" lIns="0" tIns="0" rIns="0" bIns="0" rtlCol="0" anchor="ctr"/>
-          <a:lstStyle/>
-          <a:p>
-            <a:pPr algn="ctr" indent="0" marL="0">
-              <a:buNone/>
-            </a:pPr>
-            <a:r>
-              <a:rPr lang="en-US" sz="1000" dirty="0">
-                <a:solidFill>
-                  <a:srgbClr val="003A63"/>
-                </a:solidFill>
-                <a:latin typeface="Aptos" pitchFamily="34" charset="0"/>
-                <a:ea typeface="Aptos" pitchFamily="34" charset="-122"/>
-                <a:cs typeface="Aptos" pitchFamily="34" charset="-120"/>
-              </a:rPr>
-              <a:t>Concept to action</a:t>
-            </a:r>
-            <a:endParaRPr lang="en-US" sz="1000" dirty="0"/>
-          </a:p>
-        </p:txBody>
-      </p:sp>
-      <p:sp>
-        <p:nvSpPr>
-          <p:cNvPr id="18" name="Shape 16"/>
           <p:cNvSpPr/>
           <p:nvPr/>
         </p:nvSpPr>
@@ -6920,7 +6861,7 @@
       </p:sp>
       <p:sp>
         <p:nvSpPr>
-          <p:cNvPr id="19" name="Text 17"/>
+          <p:cNvPr id="17" name="Text 15"/>
           <p:cNvSpPr/>
           <p:nvPr/>
         </p:nvSpPr>
@@ -6959,7 +6900,7 @@
       </p:sp>
       <p:sp>
         <p:nvSpPr>
-          <p:cNvPr id="20" name="Text 18"/>
+          <p:cNvPr id="18" name="Text 16"/>
           <p:cNvSpPr/>
           <p:nvPr/>
         </p:nvSpPr>
@@ -7467,13 +7408,11 @@
             </a:avLst>
           </a:prstGeom>
           <a:solidFill>
-            <a:srgbClr val="FFFFFF">
-              <a:alpha val="88000"/>
-            </a:srgbClr>
+            <a:srgbClr val="FFFFFF"/>
           </a:solidFill>
           <a:ln w="12700">
             <a:solidFill>
-              <a:srgbClr val="D6E8F2"/>
+              <a:srgbClr val="B9D7E6"/>
             </a:solidFill>
             <a:prstDash val="solid"/>
           </a:ln>
@@ -7481,119 +7420,112 @@
       </p:sp>
       <p:sp>
         <p:nvSpPr>
-          <p:cNvPr id="14" name="Shape 12"/>
-          <p:cNvSpPr/>
-          <p:nvPr/>
-        </p:nvSpPr>
-        <p:spPr>
-          <a:xfrm>
-            <a:off x="8074152" y="3291840"/>
-            <a:ext cx="2596896" cy="749808"/>
-          </a:xfrm>
-          <a:prstGeom prst="rect">
-            <a:avLst/>
-          </a:prstGeom>
-          <a:solidFill>
-            <a:srgbClr val="EAF6F8"/>
-          </a:solidFill>
-          <a:ln w="12700">
-            <a:solidFill>
-              <a:srgbClr val="8ABBD8"/>
-            </a:solidFill>
-            <a:prstDash val="solid"/>
-          </a:ln>
-        </p:spPr>
-      </p:sp>
-      <p:sp>
-        <p:nvSpPr>
-          <p:cNvPr id="15" name="Shape 13"/>
-          <p:cNvSpPr/>
-          <p:nvPr/>
-        </p:nvSpPr>
-        <p:spPr>
-          <a:xfrm>
-            <a:off x="8202168" y="3721608"/>
-            <a:ext cx="2340864" cy="0"/>
-          </a:xfrm>
-          <a:prstGeom prst="line">
-            <a:avLst/>
-          </a:prstGeom>
-          <a:noFill/>
-          <a:ln w="19050">
-            <a:solidFill>
-              <a:srgbClr val="0068B7"/>
-            </a:solidFill>
-            <a:prstDash val="solid"/>
-          </a:ln>
-        </p:spPr>
+          <p:cNvPr id="14" name="Text 12"/>
+          <p:cNvSpPr/>
+          <p:nvPr/>
+        </p:nvSpPr>
+        <p:spPr>
+          <a:xfrm>
+            <a:off x="7799832" y="2935224"/>
+            <a:ext cx="3145536" cy="256032"/>
+          </a:xfrm>
+          <a:prstGeom prst="rect">
+            <a:avLst/>
+          </a:prstGeom>
+          <a:noFill/>
+          <a:ln/>
+        </p:spPr>
+        <p:txBody>
+          <a:bodyPr wrap="square" lIns="0" tIns="0" rIns="0" bIns="0" rtlCol="0" anchor="ctr"/>
+          <a:lstStyle/>
+          <a:p>
+            <a:pPr indent="0" marL="0">
+              <a:buNone/>
+            </a:pPr>
+            <a:r>
+              <a:rPr lang="en-US" sz="1300" b="1" dirty="0">
+                <a:solidFill>
+                  <a:srgbClr val="0068B7"/>
+                </a:solidFill>
+                <a:latin typeface="Aptos" pitchFamily="34" charset="0"/>
+                <a:ea typeface="Aptos" pitchFamily="34" charset="-122"/>
+                <a:cs typeface="Aptos" pitchFamily="34" charset="-120"/>
+              </a:rPr>
+              <a:t>Concept checkpoints</a:t>
+            </a:r>
+            <a:endParaRPr lang="en-US" sz="1300" dirty="0"/>
+          </a:p>
+        </p:txBody>
+      </p:sp>
+      <p:sp>
+        <p:nvSpPr>
+          <p:cNvPr id="15" name="Text 13"/>
+          <p:cNvSpPr/>
+          <p:nvPr/>
+        </p:nvSpPr>
+        <p:spPr>
+          <a:xfrm>
+            <a:off x="7818120" y="3300984"/>
+            <a:ext cx="3090672" cy="877824"/>
+          </a:xfrm>
+          <a:prstGeom prst="rect">
+            <a:avLst/>
+          </a:prstGeom>
+          <a:noFill/>
+          <a:ln/>
+        </p:spPr>
+        <p:txBody>
+          <a:bodyPr wrap="square" lIns="254" tIns="254" rIns="254" bIns="254" rtlCol="0" anchor="t">
+            <a:normAutofit/>
+          </a:bodyPr>
+          <a:lstStyle/>
+          <a:p>
+            <a:r>
+              <a:rPr lang="en-US" sz="1380" dirty="0">
+                <a:solidFill>
+                  <a:srgbClr val="17364A"/>
+                </a:solidFill>
+                <a:latin typeface="Aptos" pitchFamily="34" charset="0"/>
+                <a:ea typeface="Aptos" pitchFamily="34" charset="-122"/>
+                <a:cs typeface="Aptos" pitchFamily="34" charset="-120"/>
+              </a:rPr>
+              <a:t>Informal use can include staff drafting emails or public messages with consumer AI tools,.</a:t>
+            </a:r>
+            <a:endParaRPr lang="en-US" sz="1380" dirty="0"/>
+          </a:p>
+          <a:p>
+            <a:r>
+              <a:rPr lang="en-US" sz="1380" dirty="0">
+                <a:solidFill>
+                  <a:srgbClr val="17364A"/>
+                </a:solidFill>
+                <a:latin typeface="Aptos" pitchFamily="34" charset="0"/>
+                <a:ea typeface="Aptos" pitchFamily="34" charset="-122"/>
+                <a:cs typeface="Aptos" pitchFamily="34" charset="-120"/>
+              </a:rPr>
+              <a:t>Its purpose is to understand what is already happening, where sensitive data may be.</a:t>
+            </a:r>
+            <a:endParaRPr lang="en-US" sz="1380" dirty="0"/>
+          </a:p>
+          <a:p>
+            <a:r>
+              <a:rPr lang="en-US" sz="1380" dirty="0">
+                <a:solidFill>
+                  <a:srgbClr val="17364A"/>
+                </a:solidFill>
+                <a:latin typeface="Aptos" pitchFamily="34" charset="0"/>
+                <a:ea typeface="Aptos" pitchFamily="34" charset="-122"/>
+                <a:cs typeface="Aptos" pitchFamily="34" charset="-120"/>
+              </a:rPr>
+              <a:t>A common vocabulary helps different roles evaluate the same workflow together.</a:t>
+            </a:r>
+            <a:endParaRPr lang="en-US" sz="1380" dirty="0"/>
+          </a:p>
+        </p:txBody>
       </p:sp>
       <p:sp>
         <p:nvSpPr>
           <p:cNvPr id="16" name="Shape 14"/>
-          <p:cNvSpPr/>
-          <p:nvPr/>
-        </p:nvSpPr>
-        <p:spPr>
-          <a:xfrm>
-            <a:off x="9198864" y="4206240"/>
-            <a:ext cx="347472" cy="347472"/>
-          </a:xfrm>
-          <a:prstGeom prst="ellipse">
-            <a:avLst/>
-          </a:prstGeom>
-          <a:solidFill>
-            <a:srgbClr val="2F8A28"/>
-          </a:solidFill>
-          <a:ln w="12700">
-            <a:solidFill>
-              <a:srgbClr val="2F8A28"/>
-            </a:solidFill>
-            <a:prstDash val="solid"/>
-          </a:ln>
-        </p:spPr>
-      </p:sp>
-      <p:sp>
-        <p:nvSpPr>
-          <p:cNvPr id="17" name="Text 15"/>
-          <p:cNvSpPr/>
-          <p:nvPr/>
-        </p:nvSpPr>
-        <p:spPr>
-          <a:xfrm>
-            <a:off x="7909560" y="3977640"/>
-            <a:ext cx="2926080" cy="182880"/>
-          </a:xfrm>
-          <a:prstGeom prst="rect">
-            <a:avLst/>
-          </a:prstGeom>
-          <a:noFill/>
-          <a:ln/>
-        </p:spPr>
-        <p:txBody>
-          <a:bodyPr wrap="square" lIns="0" tIns="0" rIns="0" bIns="0" rtlCol="0" anchor="ctr"/>
-          <a:lstStyle/>
-          <a:p>
-            <a:pPr algn="ctr" indent="0" marL="0">
-              <a:buNone/>
-            </a:pPr>
-            <a:r>
-              <a:rPr lang="en-US" sz="1000" dirty="0">
-                <a:solidFill>
-                  <a:srgbClr val="003A63"/>
-                </a:solidFill>
-                <a:latin typeface="Aptos" pitchFamily="34" charset="0"/>
-                <a:ea typeface="Aptos" pitchFamily="34" charset="-122"/>
-                <a:cs typeface="Aptos" pitchFamily="34" charset="-120"/>
-              </a:rPr>
-              <a:t>Concept to action</a:t>
-            </a:r>
-            <a:endParaRPr lang="en-US" sz="1000" dirty="0"/>
-          </a:p>
-        </p:txBody>
-      </p:sp>
-      <p:sp>
-        <p:nvSpPr>
-          <p:cNvPr id="18" name="Shape 16"/>
           <p:cNvSpPr/>
           <p:nvPr/>
         </p:nvSpPr>
@@ -7620,7 +7552,7 @@
       </p:sp>
       <p:sp>
         <p:nvSpPr>
-          <p:cNvPr id="19" name="Text 17"/>
+          <p:cNvPr id="17" name="Text 15"/>
           <p:cNvSpPr/>
           <p:nvPr/>
         </p:nvSpPr>
@@ -7659,7 +7591,7 @@
       </p:sp>
       <p:sp>
         <p:nvSpPr>
-          <p:cNvPr id="20" name="Text 18"/>
+          <p:cNvPr id="18" name="Text 16"/>
           <p:cNvSpPr/>
           <p:nvPr/>
         </p:nvSpPr>
@@ -8167,13 +8099,11 @@
             </a:avLst>
           </a:prstGeom>
           <a:solidFill>
-            <a:srgbClr val="FFFFFF">
-              <a:alpha val="88000"/>
-            </a:srgbClr>
+            <a:srgbClr val="FFFFFF"/>
           </a:solidFill>
           <a:ln w="12700">
             <a:solidFill>
-              <a:srgbClr val="D6E8F2"/>
+              <a:srgbClr val="B9D7E6"/>
             </a:solidFill>
             <a:prstDash val="solid"/>
           </a:ln>
@@ -8181,30 +8111,42 @@
       </p:sp>
       <p:sp>
         <p:nvSpPr>
-          <p:cNvPr id="14" name="Shape 12"/>
-          <p:cNvSpPr/>
-          <p:nvPr/>
-        </p:nvSpPr>
-        <p:spPr>
-          <a:xfrm>
-            <a:off x="7927848" y="3319272"/>
-            <a:ext cx="792480" cy="749808"/>
-          </a:xfrm>
-          <a:prstGeom prst="roundRect">
-            <a:avLst>
-              <a:gd name="adj" fmla="val 14634"/>
-            </a:avLst>
-          </a:prstGeom>
-          <a:solidFill>
-            <a:srgbClr val="0068B7"/>
-          </a:solidFill>
-          <a:ln w="12700">
-            <a:solidFill>
-              <a:srgbClr val="0068B7"/>
-            </a:solidFill>
-            <a:prstDash val="solid"/>
-          </a:ln>
-        </p:spPr>
+          <p:cNvPr id="14" name="Text 12"/>
+          <p:cNvSpPr/>
+          <p:nvPr/>
+        </p:nvSpPr>
+        <p:spPr>
+          <a:xfrm>
+            <a:off x="7799832" y="2935224"/>
+            <a:ext cx="3145536" cy="256032"/>
+          </a:xfrm>
+          <a:prstGeom prst="rect">
+            <a:avLst/>
+          </a:prstGeom>
+          <a:noFill/>
+          <a:ln/>
+        </p:spPr>
+        <p:txBody>
+          <a:bodyPr wrap="square" lIns="0" tIns="0" rIns="0" bIns="0" rtlCol="0" anchor="ctr"/>
+          <a:lstStyle/>
+          <a:p>
+            <a:pPr indent="0" marL="0">
+              <a:buNone/>
+            </a:pPr>
+            <a:r>
+              <a:rPr lang="en-US" sz="1300" b="1" dirty="0">
+                <a:solidFill>
+                  <a:srgbClr val="0068B7"/>
+                </a:solidFill>
+                <a:latin typeface="Aptos" pitchFamily="34" charset="0"/>
+                <a:ea typeface="Aptos" pitchFamily="34" charset="-122"/>
+                <a:cs typeface="Aptos" pitchFamily="34" charset="-120"/>
+              </a:rPr>
+              <a:t>Concept checkpoints</a:t>
+            </a:r>
+            <a:endParaRPr lang="en-US" sz="1300" dirty="0"/>
+          </a:p>
+        </p:txBody>
       </p:sp>
       <p:sp>
         <p:nvSpPr>
@@ -8214,240 +8156,67 @@
         </p:nvSpPr>
         <p:spPr>
           <a:xfrm>
-            <a:off x="8001000" y="3511296"/>
-            <a:ext cx="646176" cy="310896"/>
-          </a:xfrm>
-          <a:prstGeom prst="rect">
-            <a:avLst/>
-          </a:prstGeom>
-          <a:noFill/>
-          <a:ln/>
-        </p:spPr>
-        <p:txBody>
-          <a:bodyPr wrap="square" lIns="0" tIns="0" rIns="0" bIns="0" rtlCol="0" anchor="ctr">
+            <a:off x="7818120" y="3300984"/>
+            <a:ext cx="3090672" cy="877824"/>
+          </a:xfrm>
+          <a:prstGeom prst="rect">
+            <a:avLst/>
+          </a:prstGeom>
+          <a:noFill/>
+          <a:ln/>
+        </p:spPr>
+        <p:txBody>
+          <a:bodyPr wrap="square" lIns="254" tIns="254" rIns="254" bIns="254" rtlCol="0" anchor="t">
             <a:normAutofit/>
           </a:bodyPr>
           <a:lstStyle/>
           <a:p>
-            <a:pPr algn="ctr" indent="0" marL="0">
-              <a:buNone/>
-            </a:pPr>
-            <a:r>
-              <a:rPr lang="en-US" sz="1500" b="1" dirty="0">
-                <a:solidFill>
-                  <a:srgbClr val="FFFFFF"/>
-                </a:solidFill>
-                <a:latin typeface="Aptos" pitchFamily="34" charset="0"/>
-                <a:ea typeface="Aptos" pitchFamily="34" charset="-122"/>
-                <a:cs typeface="Aptos" pitchFamily="34" charset="-120"/>
-              </a:rPr>
-              <a:t>Plan</a:t>
-            </a:r>
-            <a:endParaRPr lang="en-US" sz="1500" dirty="0"/>
+            <a:r>
+              <a:rPr lang="en-US" sz="1380" dirty="0">
+                <a:solidFill>
+                  <a:srgbClr val="17364A"/>
+                </a:solidFill>
+                <a:latin typeface="Aptos" pitchFamily="34" charset="0"/>
+                <a:ea typeface="Aptos" pitchFamily="34" charset="-122"/>
+                <a:cs typeface="Aptos" pitchFamily="34" charset="-120"/>
+              </a:rPr>
+              <a:t>Before any AI project begins, confirm the purpose of the use, the data involved, the.</a:t>
+            </a:r>
+            <a:endParaRPr lang="en-US" sz="1380" dirty="0"/>
+          </a:p>
+          <a:p>
+            <a:r>
+              <a:rPr lang="en-US" sz="1380" dirty="0">
+                <a:solidFill>
+                  <a:srgbClr val="17364A"/>
+                </a:solidFill>
+                <a:latin typeface="Aptos" pitchFamily="34" charset="0"/>
+                <a:ea typeface="Aptos" pitchFamily="34" charset="-122"/>
+                <a:cs typeface="Aptos" pitchFamily="34" charset="-120"/>
+              </a:rPr>
+              <a:t>If the department cannot explain what the AI will do and how people will review it, the.</a:t>
+            </a:r>
+            <a:endParaRPr lang="en-US" sz="1380" dirty="0"/>
+          </a:p>
+          <a:p>
+            <a:r>
+              <a:rPr lang="en-US" sz="1380" dirty="0">
+                <a:solidFill>
+                  <a:srgbClr val="17364A"/>
+                </a:solidFill>
+                <a:latin typeface="Aptos" pitchFamily="34" charset="0"/>
+                <a:ea typeface="Aptos" pitchFamily="34" charset="-122"/>
+                <a:cs typeface="Aptos" pitchFamily="34" charset="-120"/>
+              </a:rPr>
+              <a:t>Document what the AI is allowed to do and what decisions remain with qualified public.</a:t>
+            </a:r>
+            <a:endParaRPr lang="en-US" sz="1380" dirty="0"/>
           </a:p>
         </p:txBody>
       </p:sp>
       <p:sp>
         <p:nvSpPr>
           <p:cNvPr id="16" name="Shape 14"/>
-          <p:cNvSpPr/>
-          <p:nvPr/>
-        </p:nvSpPr>
-        <p:spPr>
-          <a:xfrm>
-            <a:off x="8976360" y="3319272"/>
-            <a:ext cx="792480" cy="749808"/>
-          </a:xfrm>
-          <a:prstGeom prst="roundRect">
-            <a:avLst>
-              <a:gd name="adj" fmla="val 14634"/>
-            </a:avLst>
-          </a:prstGeom>
-          <a:solidFill>
-            <a:srgbClr val="2F8A28"/>
-          </a:solidFill>
-          <a:ln w="12700">
-            <a:solidFill>
-              <a:srgbClr val="2F8A28"/>
-            </a:solidFill>
-            <a:prstDash val="solid"/>
-          </a:ln>
-        </p:spPr>
-      </p:sp>
-      <p:sp>
-        <p:nvSpPr>
-          <p:cNvPr id="17" name="Text 15"/>
-          <p:cNvSpPr/>
-          <p:nvPr/>
-        </p:nvSpPr>
-        <p:spPr>
-          <a:xfrm>
-            <a:off x="9049512" y="3511296"/>
-            <a:ext cx="646176" cy="310896"/>
-          </a:xfrm>
-          <a:prstGeom prst="rect">
-            <a:avLst/>
-          </a:prstGeom>
-          <a:noFill/>
-          <a:ln/>
-        </p:spPr>
-        <p:txBody>
-          <a:bodyPr wrap="square" lIns="0" tIns="0" rIns="0" bIns="0" rtlCol="0" anchor="ctr">
-            <a:normAutofit/>
-          </a:bodyPr>
-          <a:lstStyle/>
-          <a:p>
-            <a:pPr algn="ctr" indent="0" marL="0">
-              <a:buNone/>
-            </a:pPr>
-            <a:r>
-              <a:rPr lang="en-US" sz="1500" b="1" dirty="0">
-                <a:solidFill>
-                  <a:srgbClr val="FFFFFF"/>
-                </a:solidFill>
-                <a:latin typeface="Aptos" pitchFamily="34" charset="0"/>
-                <a:ea typeface="Aptos" pitchFamily="34" charset="-122"/>
-                <a:cs typeface="Aptos" pitchFamily="34" charset="-120"/>
-              </a:rPr>
-              <a:t>Do</a:t>
-            </a:r>
-            <a:endParaRPr lang="en-US" sz="1500" dirty="0"/>
-          </a:p>
-        </p:txBody>
-      </p:sp>
-      <p:sp>
-        <p:nvSpPr>
-          <p:cNvPr id="18" name="Shape 16"/>
-          <p:cNvSpPr/>
-          <p:nvPr/>
-        </p:nvSpPr>
-        <p:spPr>
-          <a:xfrm>
-            <a:off x="10024872" y="3319272"/>
-            <a:ext cx="792480" cy="749808"/>
-          </a:xfrm>
-          <a:prstGeom prst="roundRect">
-            <a:avLst>
-              <a:gd name="adj" fmla="val 14634"/>
-            </a:avLst>
-          </a:prstGeom>
-          <a:solidFill>
-            <a:srgbClr val="D69A2D"/>
-          </a:solidFill>
-          <a:ln w="12700">
-            <a:solidFill>
-              <a:srgbClr val="D69A2D"/>
-            </a:solidFill>
-            <a:prstDash val="solid"/>
-          </a:ln>
-        </p:spPr>
-      </p:sp>
-      <p:sp>
-        <p:nvSpPr>
-          <p:cNvPr id="19" name="Text 17"/>
-          <p:cNvSpPr/>
-          <p:nvPr/>
-        </p:nvSpPr>
-        <p:spPr>
-          <a:xfrm>
-            <a:off x="10098024" y="3511296"/>
-            <a:ext cx="646176" cy="310896"/>
-          </a:xfrm>
-          <a:prstGeom prst="rect">
-            <a:avLst/>
-          </a:prstGeom>
-          <a:noFill/>
-          <a:ln/>
-        </p:spPr>
-        <p:txBody>
-          <a:bodyPr wrap="square" lIns="0" tIns="0" rIns="0" bIns="0" rtlCol="0" anchor="ctr">
-            <a:normAutofit/>
-          </a:bodyPr>
-          <a:lstStyle/>
-          <a:p>
-            <a:pPr algn="ctr" indent="0" marL="0">
-              <a:buNone/>
-            </a:pPr>
-            <a:r>
-              <a:rPr lang="en-US" sz="1500" b="1" dirty="0">
-                <a:solidFill>
-                  <a:srgbClr val="FFFFFF"/>
-                </a:solidFill>
-                <a:latin typeface="Aptos" pitchFamily="34" charset="0"/>
-                <a:ea typeface="Aptos" pitchFamily="34" charset="-122"/>
-                <a:cs typeface="Aptos" pitchFamily="34" charset="-120"/>
-              </a:rPr>
-              <a:t>Review</a:t>
-            </a:r>
-            <a:endParaRPr lang="en-US" sz="1500" dirty="0"/>
-          </a:p>
-        </p:txBody>
-      </p:sp>
-      <p:sp>
-        <p:nvSpPr>
-          <p:cNvPr id="20" name="Shape 18"/>
-          <p:cNvSpPr/>
-          <p:nvPr/>
-        </p:nvSpPr>
-        <p:spPr>
-          <a:xfrm>
-            <a:off x="8293608" y="4389120"/>
-            <a:ext cx="2157984" cy="0"/>
-          </a:xfrm>
-          <a:prstGeom prst="line">
-            <a:avLst/>
-          </a:prstGeom>
-          <a:noFill/>
-          <a:ln w="25400">
-            <a:solidFill>
-              <a:srgbClr val="8ABBD8"/>
-            </a:solidFill>
-            <a:prstDash val="solid"/>
-          </a:ln>
-        </p:spPr>
-      </p:sp>
-      <p:sp>
-        <p:nvSpPr>
-          <p:cNvPr id="21" name="Text 19"/>
-          <p:cNvSpPr/>
-          <p:nvPr/>
-        </p:nvSpPr>
-        <p:spPr>
-          <a:xfrm>
-            <a:off x="7909560" y="3977640"/>
-            <a:ext cx="2926080" cy="182880"/>
-          </a:xfrm>
-          <a:prstGeom prst="rect">
-            <a:avLst/>
-          </a:prstGeom>
-          <a:noFill/>
-          <a:ln/>
-        </p:spPr>
-        <p:txBody>
-          <a:bodyPr wrap="square" lIns="0" tIns="0" rIns="0" bIns="0" rtlCol="0" anchor="ctr"/>
-          <a:lstStyle/>
-          <a:p>
-            <a:pPr algn="ctr" indent="0" marL="0">
-              <a:buNone/>
-            </a:pPr>
-            <a:r>
-              <a:rPr lang="en-US" sz="1000" dirty="0">
-                <a:solidFill>
-                  <a:srgbClr val="003A63"/>
-                </a:solidFill>
-                <a:latin typeface="Aptos" pitchFamily="34" charset="0"/>
-                <a:ea typeface="Aptos" pitchFamily="34" charset="-122"/>
-                <a:cs typeface="Aptos" pitchFamily="34" charset="-120"/>
-              </a:rPr>
-              <a:t>Dependencies visible</a:t>
-            </a:r>
-            <a:endParaRPr lang="en-US" sz="1000" dirty="0"/>
-          </a:p>
-        </p:txBody>
-      </p:sp>
-      <p:sp>
-        <p:nvSpPr>
-          <p:cNvPr id="22" name="Shape 20"/>
           <p:cNvSpPr/>
           <p:nvPr/>
         </p:nvSpPr>
@@ -8474,7 +8243,7 @@
       </p:sp>
       <p:sp>
         <p:nvSpPr>
-          <p:cNvPr id="23" name="Text 21"/>
+          <p:cNvPr id="17" name="Text 15"/>
           <p:cNvSpPr/>
           <p:nvPr/>
         </p:nvSpPr>
@@ -8513,7 +8282,7 @@
       </p:sp>
       <p:sp>
         <p:nvSpPr>
-          <p:cNvPr id="24" name="Text 22"/>
+          <p:cNvPr id="18" name="Text 16"/>
           <p:cNvSpPr/>
           <p:nvPr/>
         </p:nvSpPr>
@@ -9007,13 +8776,11 @@
             </a:avLst>
           </a:prstGeom>
           <a:solidFill>
-            <a:srgbClr val="FFFFFF">
-              <a:alpha val="88000"/>
-            </a:srgbClr>
+            <a:srgbClr val="FFFFFF"/>
           </a:solidFill>
           <a:ln w="12700">
             <a:solidFill>
-              <a:srgbClr val="D6E8F2"/>
+              <a:srgbClr val="B9D7E6"/>
             </a:solidFill>
             <a:prstDash val="solid"/>
           </a:ln>
@@ -9021,119 +8788,98 @@
       </p:sp>
       <p:sp>
         <p:nvSpPr>
-          <p:cNvPr id="14" name="Shape 12"/>
-          <p:cNvSpPr/>
-          <p:nvPr/>
-        </p:nvSpPr>
-        <p:spPr>
-          <a:xfrm>
-            <a:off x="8074152" y="3291840"/>
-            <a:ext cx="2596896" cy="749808"/>
-          </a:xfrm>
-          <a:prstGeom prst="rect">
-            <a:avLst/>
-          </a:prstGeom>
-          <a:solidFill>
-            <a:srgbClr val="EAF6F8"/>
-          </a:solidFill>
-          <a:ln w="12700">
-            <a:solidFill>
-              <a:srgbClr val="8ABBD8"/>
-            </a:solidFill>
-            <a:prstDash val="solid"/>
-          </a:ln>
-        </p:spPr>
-      </p:sp>
-      <p:sp>
-        <p:nvSpPr>
-          <p:cNvPr id="15" name="Shape 13"/>
-          <p:cNvSpPr/>
-          <p:nvPr/>
-        </p:nvSpPr>
-        <p:spPr>
-          <a:xfrm>
-            <a:off x="8202168" y="3721608"/>
-            <a:ext cx="2340864" cy="0"/>
-          </a:xfrm>
-          <a:prstGeom prst="line">
-            <a:avLst/>
-          </a:prstGeom>
-          <a:noFill/>
-          <a:ln w="19050">
-            <a:solidFill>
-              <a:srgbClr val="0068B7"/>
-            </a:solidFill>
-            <a:prstDash val="solid"/>
-          </a:ln>
-        </p:spPr>
+          <p:cNvPr id="14" name="Text 12"/>
+          <p:cNvSpPr/>
+          <p:nvPr/>
+        </p:nvSpPr>
+        <p:spPr>
+          <a:xfrm>
+            <a:off x="7799832" y="2935224"/>
+            <a:ext cx="3145536" cy="256032"/>
+          </a:xfrm>
+          <a:prstGeom prst="rect">
+            <a:avLst/>
+          </a:prstGeom>
+          <a:noFill/>
+          <a:ln/>
+        </p:spPr>
+        <p:txBody>
+          <a:bodyPr wrap="square" lIns="0" tIns="0" rIns="0" bIns="0" rtlCol="0" anchor="ctr"/>
+          <a:lstStyle/>
+          <a:p>
+            <a:pPr indent="0" marL="0">
+              <a:buNone/>
+            </a:pPr>
+            <a:r>
+              <a:rPr lang="en-US" sz="1300" b="1" dirty="0">
+                <a:solidFill>
+                  <a:srgbClr val="0068B7"/>
+                </a:solidFill>
+                <a:latin typeface="Aptos" pitchFamily="34" charset="0"/>
+                <a:ea typeface="Aptos" pitchFamily="34" charset="-122"/>
+                <a:cs typeface="Aptos" pitchFamily="34" charset="-120"/>
+              </a:rPr>
+              <a:t>Concept checkpoints</a:t>
+            </a:r>
+            <a:endParaRPr lang="en-US" sz="1300" dirty="0"/>
+          </a:p>
+        </p:txBody>
+      </p:sp>
+      <p:sp>
+        <p:nvSpPr>
+          <p:cNvPr id="15" name="Text 13"/>
+          <p:cNvSpPr/>
+          <p:nvPr/>
+        </p:nvSpPr>
+        <p:spPr>
+          <a:xfrm>
+            <a:off x="7818120" y="3300984"/>
+            <a:ext cx="3090672" cy="877824"/>
+          </a:xfrm>
+          <a:prstGeom prst="rect">
+            <a:avLst/>
+          </a:prstGeom>
+          <a:noFill/>
+          <a:ln/>
+        </p:spPr>
+        <p:txBody>
+          <a:bodyPr wrap="square" lIns="254" tIns="254" rIns="254" bIns="254" rtlCol="0" anchor="t">
+            <a:normAutofit/>
+          </a:bodyPr>
+          <a:lstStyle/>
+          <a:p>
+            <a:r>
+              <a:rPr lang="en-US" sz="1380" dirty="0">
+                <a:solidFill>
+                  <a:srgbClr val="17364A"/>
+                </a:solidFill>
+                <a:latin typeface="Aptos" pitchFamily="34" charset="0"/>
+                <a:ea typeface="Aptos" pitchFamily="34" charset="-122"/>
+                <a:cs typeface="Aptos" pitchFamily="34" charset="-120"/>
+              </a:rPr>
+              <a:t>Understanding what these systems can and cannot do is the starting point for responsible.</a:t>
+            </a:r>
+            <a:endParaRPr lang="en-US" sz="1380" dirty="0"/>
+          </a:p>
+          <a:p>
+            <a:r>
+              <a:rPr lang="en-US" sz="1380" dirty="0">
+                <a:solidFill>
+                  <a:srgbClr val="17364A"/>
+                </a:solidFill>
+                <a:latin typeface="Aptos" pitchFamily="34" charset="0"/>
+                <a:ea typeface="Aptos" pitchFamily="34" charset="-122"/>
+                <a:cs typeface="Aptos" pitchFamily="34" charset="-120"/>
+              </a:rPr>
+              <a:t>Agencies need a shared vocabulary before they can set guardrails, evaluate vendors, select.</a:t>
+            </a:r>
+            <a:endParaRPr lang="en-US" sz="1380" dirty="0"/>
+          </a:p>
+        </p:txBody>
       </p:sp>
       <p:sp>
         <p:nvSpPr>
           <p:cNvPr id="16" name="Shape 14"/>
-          <p:cNvSpPr/>
-          <p:nvPr/>
-        </p:nvSpPr>
-        <p:spPr>
-          <a:xfrm>
-            <a:off x="9198864" y="4206240"/>
-            <a:ext cx="347472" cy="347472"/>
-          </a:xfrm>
-          <a:prstGeom prst="ellipse">
-            <a:avLst/>
-          </a:prstGeom>
-          <a:solidFill>
-            <a:srgbClr val="2F8A28"/>
-          </a:solidFill>
-          <a:ln w="12700">
-            <a:solidFill>
-              <a:srgbClr val="2F8A28"/>
-            </a:solidFill>
-            <a:prstDash val="solid"/>
-          </a:ln>
-        </p:spPr>
-      </p:sp>
-      <p:sp>
-        <p:nvSpPr>
-          <p:cNvPr id="17" name="Text 15"/>
-          <p:cNvSpPr/>
-          <p:nvPr/>
-        </p:nvSpPr>
-        <p:spPr>
-          <a:xfrm>
-            <a:off x="7909560" y="3977640"/>
-            <a:ext cx="2926080" cy="182880"/>
-          </a:xfrm>
-          <a:prstGeom prst="rect">
-            <a:avLst/>
-          </a:prstGeom>
-          <a:noFill/>
-          <a:ln/>
-        </p:spPr>
-        <p:txBody>
-          <a:bodyPr wrap="square" lIns="0" tIns="0" rIns="0" bIns="0" rtlCol="0" anchor="ctr"/>
-          <a:lstStyle/>
-          <a:p>
-            <a:pPr algn="ctr" indent="0" marL="0">
-              <a:buNone/>
-            </a:pPr>
-            <a:r>
-              <a:rPr lang="en-US" sz="1000" dirty="0">
-                <a:solidFill>
-                  <a:srgbClr val="003A63"/>
-                </a:solidFill>
-                <a:latin typeface="Aptos" pitchFamily="34" charset="0"/>
-                <a:ea typeface="Aptos" pitchFamily="34" charset="-122"/>
-                <a:cs typeface="Aptos" pitchFamily="34" charset="-120"/>
-              </a:rPr>
-              <a:t>Concept to action</a:t>
-            </a:r>
-            <a:endParaRPr lang="en-US" sz="1000" dirty="0"/>
-          </a:p>
-        </p:txBody>
-      </p:sp>
-      <p:sp>
-        <p:nvSpPr>
-          <p:cNvPr id="18" name="Shape 16"/>
           <p:cNvSpPr/>
           <p:nvPr/>
         </p:nvSpPr>
@@ -9160,7 +8906,7 @@
       </p:sp>
       <p:sp>
         <p:nvSpPr>
-          <p:cNvPr id="19" name="Text 17"/>
+          <p:cNvPr id="17" name="Text 15"/>
           <p:cNvSpPr/>
           <p:nvPr/>
         </p:nvSpPr>
@@ -9199,7 +8945,7 @@
       </p:sp>
       <p:sp>
         <p:nvSpPr>
-          <p:cNvPr id="20" name="Text 18"/>
+          <p:cNvPr id="18" name="Text 16"/>
           <p:cNvSpPr/>
           <p:nvPr/>
         </p:nvSpPr>
@@ -9693,13 +9439,11 @@
             </a:avLst>
           </a:prstGeom>
           <a:solidFill>
-            <a:srgbClr val="FFFFFF">
-              <a:alpha val="88000"/>
-            </a:srgbClr>
+            <a:srgbClr val="FFFFFF"/>
           </a:solidFill>
           <a:ln w="12700">
             <a:solidFill>
-              <a:srgbClr val="D6E8F2"/>
+              <a:srgbClr val="B9D7E6"/>
             </a:solidFill>
             <a:prstDash val="solid"/>
           </a:ln>
@@ -9707,119 +9451,98 @@
       </p:sp>
       <p:sp>
         <p:nvSpPr>
-          <p:cNvPr id="14" name="Shape 12"/>
-          <p:cNvSpPr/>
-          <p:nvPr/>
-        </p:nvSpPr>
-        <p:spPr>
-          <a:xfrm>
-            <a:off x="8074152" y="3291840"/>
-            <a:ext cx="2596896" cy="749808"/>
-          </a:xfrm>
-          <a:prstGeom prst="rect">
-            <a:avLst/>
-          </a:prstGeom>
-          <a:solidFill>
-            <a:srgbClr val="EAF6F8"/>
-          </a:solidFill>
-          <a:ln w="12700">
-            <a:solidFill>
-              <a:srgbClr val="8ABBD8"/>
-            </a:solidFill>
-            <a:prstDash val="solid"/>
-          </a:ln>
-        </p:spPr>
-      </p:sp>
-      <p:sp>
-        <p:nvSpPr>
-          <p:cNvPr id="15" name="Shape 13"/>
-          <p:cNvSpPr/>
-          <p:nvPr/>
-        </p:nvSpPr>
-        <p:spPr>
-          <a:xfrm>
-            <a:off x="8202168" y="3721608"/>
-            <a:ext cx="2340864" cy="0"/>
-          </a:xfrm>
-          <a:prstGeom prst="line">
-            <a:avLst/>
-          </a:prstGeom>
-          <a:noFill/>
-          <a:ln w="19050">
-            <a:solidFill>
-              <a:srgbClr val="0068B7"/>
-            </a:solidFill>
-            <a:prstDash val="solid"/>
-          </a:ln>
-        </p:spPr>
+          <p:cNvPr id="14" name="Text 12"/>
+          <p:cNvSpPr/>
+          <p:nvPr/>
+        </p:nvSpPr>
+        <p:spPr>
+          <a:xfrm>
+            <a:off x="7799832" y="2935224"/>
+            <a:ext cx="3145536" cy="256032"/>
+          </a:xfrm>
+          <a:prstGeom prst="rect">
+            <a:avLst/>
+          </a:prstGeom>
+          <a:noFill/>
+          <a:ln/>
+        </p:spPr>
+        <p:txBody>
+          <a:bodyPr wrap="square" lIns="0" tIns="0" rIns="0" bIns="0" rtlCol="0" anchor="ctr"/>
+          <a:lstStyle/>
+          <a:p>
+            <a:pPr indent="0" marL="0">
+              <a:buNone/>
+            </a:pPr>
+            <a:r>
+              <a:rPr lang="en-US" sz="1300" b="1" dirty="0">
+                <a:solidFill>
+                  <a:srgbClr val="0068B7"/>
+                </a:solidFill>
+                <a:latin typeface="Aptos" pitchFamily="34" charset="0"/>
+                <a:ea typeface="Aptos" pitchFamily="34" charset="-122"/>
+                <a:cs typeface="Aptos" pitchFamily="34" charset="-120"/>
+              </a:rPr>
+              <a:t>Concept checkpoints</a:t>
+            </a:r>
+            <a:endParaRPr lang="en-US" sz="1300" dirty="0"/>
+          </a:p>
+        </p:txBody>
+      </p:sp>
+      <p:sp>
+        <p:nvSpPr>
+          <p:cNvPr id="15" name="Text 13"/>
+          <p:cNvSpPr/>
+          <p:nvPr/>
+        </p:nvSpPr>
+        <p:spPr>
+          <a:xfrm>
+            <a:off x="7818120" y="3300984"/>
+            <a:ext cx="3090672" cy="877824"/>
+          </a:xfrm>
+          <a:prstGeom prst="rect">
+            <a:avLst/>
+          </a:prstGeom>
+          <a:noFill/>
+          <a:ln/>
+        </p:spPr>
+        <p:txBody>
+          <a:bodyPr wrap="square" lIns="254" tIns="254" rIns="254" bIns="254" rtlCol="0" anchor="t">
+            <a:normAutofit/>
+          </a:bodyPr>
+          <a:lstStyle/>
+          <a:p>
+            <a:r>
+              <a:rPr lang="en-US" sz="1380" dirty="0">
+                <a:solidFill>
+                  <a:srgbClr val="17364A"/>
+                </a:solidFill>
+                <a:latin typeface="Aptos" pitchFamily="34" charset="0"/>
+                <a:ea typeface="Aptos" pitchFamily="34" charset="-122"/>
+                <a:cs typeface="Aptos" pitchFamily="34" charset="-120"/>
+              </a:rPr>
+              <a:t>Deep Research is an agentic research capability that can plan a multi-step search, gather.</a:t>
+            </a:r>
+            <a:endParaRPr lang="en-US" sz="1380" dirty="0"/>
+          </a:p>
+          <a:p>
+            <a:r>
+              <a:rPr lang="en-US" sz="1380" dirty="0">
+                <a:solidFill>
+                  <a:srgbClr val="17364A"/>
+                </a:solidFill>
+                <a:latin typeface="Aptos" pitchFamily="34" charset="0"/>
+                <a:ea typeface="Aptos" pitchFamily="34" charset="-122"/>
+                <a:cs typeface="Aptos" pitchFamily="34" charset="-120"/>
+              </a:rPr>
+              <a:t>It can help with literature scans, policy scans, funding reviews, and comparative program.</a:t>
+            </a:r>
+            <a:endParaRPr lang="en-US" sz="1380" dirty="0"/>
+          </a:p>
+        </p:txBody>
       </p:sp>
       <p:sp>
         <p:nvSpPr>
           <p:cNvPr id="16" name="Shape 14"/>
-          <p:cNvSpPr/>
-          <p:nvPr/>
-        </p:nvSpPr>
-        <p:spPr>
-          <a:xfrm>
-            <a:off x="9198864" y="4206240"/>
-            <a:ext cx="347472" cy="347472"/>
-          </a:xfrm>
-          <a:prstGeom prst="ellipse">
-            <a:avLst/>
-          </a:prstGeom>
-          <a:solidFill>
-            <a:srgbClr val="2F8A28"/>
-          </a:solidFill>
-          <a:ln w="12700">
-            <a:solidFill>
-              <a:srgbClr val="2F8A28"/>
-            </a:solidFill>
-            <a:prstDash val="solid"/>
-          </a:ln>
-        </p:spPr>
-      </p:sp>
-      <p:sp>
-        <p:nvSpPr>
-          <p:cNvPr id="17" name="Text 15"/>
-          <p:cNvSpPr/>
-          <p:nvPr/>
-        </p:nvSpPr>
-        <p:spPr>
-          <a:xfrm>
-            <a:off x="7909560" y="3977640"/>
-            <a:ext cx="2926080" cy="182880"/>
-          </a:xfrm>
-          <a:prstGeom prst="rect">
-            <a:avLst/>
-          </a:prstGeom>
-          <a:noFill/>
-          <a:ln/>
-        </p:spPr>
-        <p:txBody>
-          <a:bodyPr wrap="square" lIns="0" tIns="0" rIns="0" bIns="0" rtlCol="0" anchor="ctr"/>
-          <a:lstStyle/>
-          <a:p>
-            <a:pPr algn="ctr" indent="0" marL="0">
-              <a:buNone/>
-            </a:pPr>
-            <a:r>
-              <a:rPr lang="en-US" sz="1000" dirty="0">
-                <a:solidFill>
-                  <a:srgbClr val="003A63"/>
-                </a:solidFill>
-                <a:latin typeface="Aptos" pitchFamily="34" charset="0"/>
-                <a:ea typeface="Aptos" pitchFamily="34" charset="-122"/>
-                <a:cs typeface="Aptos" pitchFamily="34" charset="-120"/>
-              </a:rPr>
-              <a:t>Concept to action</a:t>
-            </a:r>
-            <a:endParaRPr lang="en-US" sz="1000" dirty="0"/>
-          </a:p>
-        </p:txBody>
-      </p:sp>
-      <p:sp>
-        <p:nvSpPr>
-          <p:cNvPr id="18" name="Shape 16"/>
           <p:cNvSpPr/>
           <p:nvPr/>
         </p:nvSpPr>
@@ -9846,7 +9569,7 @@
       </p:sp>
       <p:sp>
         <p:nvSpPr>
-          <p:cNvPr id="19" name="Text 17"/>
+          <p:cNvPr id="17" name="Text 15"/>
           <p:cNvSpPr/>
           <p:nvPr/>
         </p:nvSpPr>
@@ -9885,7 +9608,7 @@
       </p:sp>
       <p:sp>
         <p:nvSpPr>
-          <p:cNvPr id="20" name="Text 18"/>
+          <p:cNvPr id="18" name="Text 16"/>
           <p:cNvSpPr/>
           <p:nvPr/>
         </p:nvSpPr>
@@ -10379,13 +10102,11 @@
             </a:avLst>
           </a:prstGeom>
           <a:solidFill>
-            <a:srgbClr val="FFFFFF">
-              <a:alpha val="88000"/>
-            </a:srgbClr>
+            <a:srgbClr val="FFFFFF"/>
           </a:solidFill>
           <a:ln w="12700">
             <a:solidFill>
-              <a:srgbClr val="D6E8F2"/>
+              <a:srgbClr val="B9D7E6"/>
             </a:solidFill>
             <a:prstDash val="solid"/>
           </a:ln>
@@ -10393,119 +10114,98 @@
       </p:sp>
       <p:sp>
         <p:nvSpPr>
-          <p:cNvPr id="14" name="Shape 12"/>
-          <p:cNvSpPr/>
-          <p:nvPr/>
-        </p:nvSpPr>
-        <p:spPr>
-          <a:xfrm>
-            <a:off x="8074152" y="3291840"/>
-            <a:ext cx="2596896" cy="749808"/>
-          </a:xfrm>
-          <a:prstGeom prst="rect">
-            <a:avLst/>
-          </a:prstGeom>
-          <a:solidFill>
-            <a:srgbClr val="EAF6F8"/>
-          </a:solidFill>
-          <a:ln w="12700">
-            <a:solidFill>
-              <a:srgbClr val="8ABBD8"/>
-            </a:solidFill>
-            <a:prstDash val="solid"/>
-          </a:ln>
-        </p:spPr>
-      </p:sp>
-      <p:sp>
-        <p:nvSpPr>
-          <p:cNvPr id="15" name="Shape 13"/>
-          <p:cNvSpPr/>
-          <p:nvPr/>
-        </p:nvSpPr>
-        <p:spPr>
-          <a:xfrm>
-            <a:off x="8202168" y="3721608"/>
-            <a:ext cx="2340864" cy="0"/>
-          </a:xfrm>
-          <a:prstGeom prst="line">
-            <a:avLst/>
-          </a:prstGeom>
-          <a:noFill/>
-          <a:ln w="19050">
-            <a:solidFill>
-              <a:srgbClr val="0068B7"/>
-            </a:solidFill>
-            <a:prstDash val="solid"/>
-          </a:ln>
-        </p:spPr>
+          <p:cNvPr id="14" name="Text 12"/>
+          <p:cNvSpPr/>
+          <p:nvPr/>
+        </p:nvSpPr>
+        <p:spPr>
+          <a:xfrm>
+            <a:off x="7799832" y="2935224"/>
+            <a:ext cx="3145536" cy="256032"/>
+          </a:xfrm>
+          <a:prstGeom prst="rect">
+            <a:avLst/>
+          </a:prstGeom>
+          <a:noFill/>
+          <a:ln/>
+        </p:spPr>
+        <p:txBody>
+          <a:bodyPr wrap="square" lIns="0" tIns="0" rIns="0" bIns="0" rtlCol="0" anchor="ctr"/>
+          <a:lstStyle/>
+          <a:p>
+            <a:pPr indent="0" marL="0">
+              <a:buNone/>
+            </a:pPr>
+            <a:r>
+              <a:rPr lang="en-US" sz="1300" b="1" dirty="0">
+                <a:solidFill>
+                  <a:srgbClr val="0068B7"/>
+                </a:solidFill>
+                <a:latin typeface="Aptos" pitchFamily="34" charset="0"/>
+                <a:ea typeface="Aptos" pitchFamily="34" charset="-122"/>
+                <a:cs typeface="Aptos" pitchFamily="34" charset="-120"/>
+              </a:rPr>
+              <a:t>Concept checkpoints</a:t>
+            </a:r>
+            <a:endParaRPr lang="en-US" sz="1300" dirty="0"/>
+          </a:p>
+        </p:txBody>
+      </p:sp>
+      <p:sp>
+        <p:nvSpPr>
+          <p:cNvPr id="15" name="Text 13"/>
+          <p:cNvSpPr/>
+          <p:nvPr/>
+        </p:nvSpPr>
+        <p:spPr>
+          <a:xfrm>
+            <a:off x="7818120" y="3300984"/>
+            <a:ext cx="3090672" cy="877824"/>
+          </a:xfrm>
+          <a:prstGeom prst="rect">
+            <a:avLst/>
+          </a:prstGeom>
+          <a:noFill/>
+          <a:ln/>
+        </p:spPr>
+        <p:txBody>
+          <a:bodyPr wrap="square" lIns="254" tIns="254" rIns="254" bIns="254" rtlCol="0" anchor="t">
+            <a:normAutofit/>
+          </a:bodyPr>
+          <a:lstStyle/>
+          <a:p>
+            <a:r>
+              <a:rPr lang="en-US" sz="1380" dirty="0">
+                <a:solidFill>
+                  <a:srgbClr val="17364A"/>
+                </a:solidFill>
+                <a:latin typeface="Aptos" pitchFamily="34" charset="0"/>
+                <a:ea typeface="Aptos" pitchFamily="34" charset="-122"/>
+                <a:cs typeface="Aptos" pitchFamily="34" charset="-120"/>
+              </a:rPr>
+              <a:t>Use the linked plays to decide who should be involved, what decisions need to be made, and.</a:t>
+            </a:r>
+            <a:endParaRPr lang="en-US" sz="1380" dirty="0"/>
+          </a:p>
+          <a:p>
+            <a:r>
+              <a:rPr lang="en-US" sz="1380" dirty="0">
+                <a:solidFill>
+                  <a:srgbClr val="17364A"/>
+                </a:solidFill>
+                <a:latin typeface="Aptos" pitchFamily="34" charset="0"/>
+                <a:ea typeface="Aptos" pitchFamily="34" charset="-122"/>
+                <a:cs typeface="Aptos" pitchFamily="34" charset="-120"/>
+              </a:rPr>
+              <a:t>Use the linked tools to turn the concept into an agency artifact that can be saved,.</a:t>
+            </a:r>
+            <a:endParaRPr lang="en-US" sz="1380" dirty="0"/>
+          </a:p>
+        </p:txBody>
       </p:sp>
       <p:sp>
         <p:nvSpPr>
           <p:cNvPr id="16" name="Shape 14"/>
-          <p:cNvSpPr/>
-          <p:nvPr/>
-        </p:nvSpPr>
-        <p:spPr>
-          <a:xfrm>
-            <a:off x="9198864" y="4206240"/>
-            <a:ext cx="347472" cy="347472"/>
-          </a:xfrm>
-          <a:prstGeom prst="ellipse">
-            <a:avLst/>
-          </a:prstGeom>
-          <a:solidFill>
-            <a:srgbClr val="2F8A28"/>
-          </a:solidFill>
-          <a:ln w="12700">
-            <a:solidFill>
-              <a:srgbClr val="2F8A28"/>
-            </a:solidFill>
-            <a:prstDash val="solid"/>
-          </a:ln>
-        </p:spPr>
-      </p:sp>
-      <p:sp>
-        <p:nvSpPr>
-          <p:cNvPr id="17" name="Text 15"/>
-          <p:cNvSpPr/>
-          <p:nvPr/>
-        </p:nvSpPr>
-        <p:spPr>
-          <a:xfrm>
-            <a:off x="7909560" y="3977640"/>
-            <a:ext cx="2926080" cy="182880"/>
-          </a:xfrm>
-          <a:prstGeom prst="rect">
-            <a:avLst/>
-          </a:prstGeom>
-          <a:noFill/>
-          <a:ln/>
-        </p:spPr>
-        <p:txBody>
-          <a:bodyPr wrap="square" lIns="0" tIns="0" rIns="0" bIns="0" rtlCol="0" anchor="ctr"/>
-          <a:lstStyle/>
-          <a:p>
-            <a:pPr algn="ctr" indent="0" marL="0">
-              <a:buNone/>
-            </a:pPr>
-            <a:r>
-              <a:rPr lang="en-US" sz="1000" dirty="0">
-                <a:solidFill>
-                  <a:srgbClr val="003A63"/>
-                </a:solidFill>
-                <a:latin typeface="Aptos" pitchFamily="34" charset="0"/>
-                <a:ea typeface="Aptos" pitchFamily="34" charset="-122"/>
-                <a:cs typeface="Aptos" pitchFamily="34" charset="-120"/>
-              </a:rPr>
-              <a:t>Concept to action</a:t>
-            </a:r>
-            <a:endParaRPr lang="en-US" sz="1000" dirty="0"/>
-          </a:p>
-        </p:txBody>
-      </p:sp>
-      <p:sp>
-        <p:nvSpPr>
-          <p:cNvPr id="18" name="Shape 16"/>
           <p:cNvSpPr/>
           <p:nvPr/>
         </p:nvSpPr>
@@ -10532,7 +10232,7 @@
       </p:sp>
       <p:sp>
         <p:nvSpPr>
-          <p:cNvPr id="19" name="Text 17"/>
+          <p:cNvPr id="17" name="Text 15"/>
           <p:cNvSpPr/>
           <p:nvPr/>
         </p:nvSpPr>
@@ -10571,7 +10271,7 @@
       </p:sp>
       <p:sp>
         <p:nvSpPr>
-          <p:cNvPr id="20" name="Text 18"/>
+          <p:cNvPr id="18" name="Text 16"/>
           <p:cNvSpPr/>
           <p:nvPr/>
         </p:nvSpPr>
@@ -11073,20 +10773,20 @@
         </p:nvSpPr>
         <p:spPr>
           <a:xfrm>
-            <a:off x="7635240" y="3730752"/>
-            <a:ext cx="1033272" cy="749808"/>
+            <a:off x="7909560" y="3675888"/>
+            <a:ext cx="3154680" cy="1691640"/>
           </a:xfrm>
           <a:prstGeom prst="roundRect">
             <a:avLst>
-              <a:gd name="adj" fmla="val 14634"/>
+              <a:gd name="adj" fmla="val 6486"/>
             </a:avLst>
           </a:prstGeom>
           <a:solidFill>
-            <a:srgbClr val="0068B7"/>
+            <a:srgbClr val="FFFFFF"/>
           </a:solidFill>
           <a:ln w="12700">
             <a:solidFill>
-              <a:srgbClr val="0068B7"/>
+              <a:srgbClr val="B9D7E6"/>
             </a:solidFill>
             <a:prstDash val="solid"/>
           </a:ln>
@@ -11100,172 +10800,100 @@
         </p:nvSpPr>
         <p:spPr>
           <a:xfrm>
-            <a:off x="7708392" y="3922776"/>
-            <a:ext cx="886968" cy="310896"/>
-          </a:xfrm>
-          <a:prstGeom prst="rect">
-            <a:avLst/>
-          </a:prstGeom>
-          <a:noFill/>
-          <a:ln/>
-        </p:spPr>
-        <p:txBody>
-          <a:bodyPr wrap="square" lIns="0" tIns="0" rIns="0" bIns="0" rtlCol="0" anchor="ctr">
+            <a:off x="8074152" y="3822192"/>
+            <a:ext cx="2825496" cy="256032"/>
+          </a:xfrm>
+          <a:prstGeom prst="rect">
+            <a:avLst/>
+          </a:prstGeom>
+          <a:noFill/>
+          <a:ln/>
+        </p:spPr>
+        <p:txBody>
+          <a:bodyPr wrap="square" lIns="0" tIns="0" rIns="0" bIns="0" rtlCol="0" anchor="ctr"/>
+          <a:lstStyle/>
+          <a:p>
+            <a:pPr indent="0" marL="0">
+              <a:buNone/>
+            </a:pPr>
+            <a:r>
+              <a:rPr lang="en-US" sz="1300" b="1" dirty="0">
+                <a:solidFill>
+                  <a:srgbClr val="0068B7"/>
+                </a:solidFill>
+                <a:latin typeface="Aptos" pitchFamily="34" charset="0"/>
+                <a:ea typeface="Aptos" pitchFamily="34" charset="-122"/>
+                <a:cs typeface="Aptos" pitchFamily="34" charset="-120"/>
+              </a:rPr>
+              <a:t>Learning sequence</a:t>
+            </a:r>
+            <a:endParaRPr lang="en-US" sz="1300" dirty="0"/>
+          </a:p>
+        </p:txBody>
+      </p:sp>
+      <p:sp>
+        <p:nvSpPr>
+          <p:cNvPr id="15" name="Text 13"/>
+          <p:cNvSpPr/>
+          <p:nvPr/>
+        </p:nvSpPr>
+        <p:spPr>
+          <a:xfrm>
+            <a:off x="8092440" y="4187952"/>
+            <a:ext cx="2770632" cy="1033272"/>
+          </a:xfrm>
+          <a:prstGeom prst="rect">
+            <a:avLst/>
+          </a:prstGeom>
+          <a:noFill/>
+          <a:ln/>
+        </p:spPr>
+        <p:txBody>
+          <a:bodyPr wrap="square" lIns="254" tIns="254" rIns="254" bIns="254" rtlCol="0" anchor="t">
             <a:normAutofit/>
           </a:bodyPr>
           <a:lstStyle/>
           <a:p>
-            <a:pPr algn="ctr" indent="0" marL="0">
-              <a:buNone/>
-            </a:pPr>
-            <a:r>
-              <a:rPr lang="en-US" sz="1500" b="1" dirty="0">
-                <a:solidFill>
-                  <a:srgbClr val="FFFFFF"/>
-                </a:solidFill>
-                <a:latin typeface="Aptos" pitchFamily="34" charset="0"/>
-                <a:ea typeface="Aptos" pitchFamily="34" charset="-122"/>
-                <a:cs typeface="Aptos" pitchFamily="34" charset="-120"/>
-              </a:rPr>
-              <a:t>Learn</a:t>
-            </a:r>
-            <a:endParaRPr lang="en-US" sz="1500" dirty="0"/>
-          </a:p>
-        </p:txBody>
-      </p:sp>
-      <p:sp>
-        <p:nvSpPr>
-          <p:cNvPr id="15" name="Shape 13"/>
-          <p:cNvSpPr/>
-          <p:nvPr/>
-        </p:nvSpPr>
-        <p:spPr>
-          <a:xfrm>
-            <a:off x="8924544" y="3730752"/>
-            <a:ext cx="1033272" cy="749808"/>
-          </a:xfrm>
-          <a:prstGeom prst="roundRect">
-            <a:avLst>
-              <a:gd name="adj" fmla="val 14634"/>
-            </a:avLst>
-          </a:prstGeom>
-          <a:solidFill>
-            <a:srgbClr val="2F8A28"/>
-          </a:solidFill>
-          <a:ln w="12700">
-            <a:solidFill>
-              <a:srgbClr val="2F8A28"/>
-            </a:solidFill>
-            <a:prstDash val="solid"/>
-          </a:ln>
-        </p:spPr>
-      </p:sp>
-      <p:sp>
-        <p:nvSpPr>
-          <p:cNvPr id="16" name="Text 14"/>
-          <p:cNvSpPr/>
-          <p:nvPr/>
-        </p:nvSpPr>
-        <p:spPr>
-          <a:xfrm>
-            <a:off x="8997696" y="3922776"/>
-            <a:ext cx="886968" cy="310896"/>
-          </a:xfrm>
-          <a:prstGeom prst="rect">
-            <a:avLst/>
-          </a:prstGeom>
-          <a:noFill/>
-          <a:ln/>
-        </p:spPr>
-        <p:txBody>
-          <a:bodyPr wrap="square" lIns="0" tIns="0" rIns="0" bIns="0" rtlCol="0" anchor="ctr">
-            <a:normAutofit/>
-          </a:bodyPr>
-          <a:lstStyle/>
-          <a:p>
-            <a:pPr algn="ctr" indent="0" marL="0">
-              <a:buNone/>
-            </a:pPr>
-            <a:r>
-              <a:rPr lang="en-US" sz="1500" b="1" dirty="0">
-                <a:solidFill>
-                  <a:srgbClr val="FFFFFF"/>
-                </a:solidFill>
-                <a:latin typeface="Aptos" pitchFamily="34" charset="0"/>
-                <a:ea typeface="Aptos" pitchFamily="34" charset="-122"/>
-                <a:cs typeface="Aptos" pitchFamily="34" charset="-120"/>
-              </a:rPr>
-              <a:t>Apply</a:t>
-            </a:r>
-            <a:endParaRPr lang="en-US" sz="1500" dirty="0"/>
-          </a:p>
-        </p:txBody>
-      </p:sp>
-      <p:sp>
-        <p:nvSpPr>
-          <p:cNvPr id="17" name="Shape 15"/>
-          <p:cNvSpPr/>
-          <p:nvPr/>
-        </p:nvSpPr>
-        <p:spPr>
-          <a:xfrm>
-            <a:off x="10213848" y="3730752"/>
-            <a:ext cx="1033272" cy="749808"/>
-          </a:xfrm>
-          <a:prstGeom prst="roundRect">
-            <a:avLst>
-              <a:gd name="adj" fmla="val 14634"/>
-            </a:avLst>
-          </a:prstGeom>
-          <a:solidFill>
-            <a:srgbClr val="6A4CA3"/>
-          </a:solidFill>
-          <a:ln w="12700">
-            <a:solidFill>
-              <a:srgbClr val="6A4CA3"/>
-            </a:solidFill>
-            <a:prstDash val="solid"/>
-          </a:ln>
-        </p:spPr>
-      </p:sp>
-      <p:sp>
-        <p:nvSpPr>
-          <p:cNvPr id="18" name="Text 16"/>
-          <p:cNvSpPr/>
-          <p:nvPr/>
-        </p:nvSpPr>
-        <p:spPr>
-          <a:xfrm>
-            <a:off x="10287000" y="3922776"/>
-            <a:ext cx="886968" cy="310896"/>
-          </a:xfrm>
-          <a:prstGeom prst="rect">
-            <a:avLst/>
-          </a:prstGeom>
-          <a:noFill/>
-          <a:ln/>
-        </p:spPr>
-        <p:txBody>
-          <a:bodyPr wrap="square" lIns="0" tIns="0" rIns="0" bIns="0" rtlCol="0" anchor="ctr">
-            <a:normAutofit/>
-          </a:bodyPr>
-          <a:lstStyle/>
-          <a:p>
-            <a:pPr algn="ctr" indent="0" marL="0">
-              <a:buNone/>
-            </a:pPr>
-            <a:r>
-              <a:rPr lang="en-US" sz="1500" b="1" dirty="0">
-                <a:solidFill>
-                  <a:srgbClr val="FFFFFF"/>
-                </a:solidFill>
-                <a:latin typeface="Aptos" pitchFamily="34" charset="0"/>
-                <a:ea typeface="Aptos" pitchFamily="34" charset="-122"/>
-                <a:cs typeface="Aptos" pitchFamily="34" charset="-120"/>
-              </a:rPr>
-              <a:t>Document</a:t>
-            </a:r>
-            <a:endParaRPr lang="en-US" sz="1500" dirty="0"/>
+            <a:r>
+              <a:rPr lang="en-US" sz="1380" dirty="0">
+                <a:solidFill>
+                  <a:srgbClr val="17364A"/>
+                </a:solidFill>
+                <a:latin typeface="Aptos" pitchFamily="34" charset="0"/>
+                <a:ea typeface="Aptos" pitchFamily="34" charset="-122"/>
+                <a:cs typeface="Aptos" pitchFamily="34" charset="-120"/>
+              </a:rPr>
+              <a:t>Read the module for shared vocabulary and context.</a:t>
+            </a:r>
+            <a:endParaRPr lang="en-US" sz="1380" dirty="0"/>
+          </a:p>
+          <a:p>
+            <a:r>
+              <a:rPr lang="en-US" sz="1380" dirty="0">
+                <a:solidFill>
+                  <a:srgbClr val="17364A"/>
+                </a:solidFill>
+                <a:latin typeface="Aptos" pitchFamily="34" charset="0"/>
+                <a:ea typeface="Aptos" pitchFamily="34" charset="-122"/>
+                <a:cs typeface="Aptos" pitchFamily="34" charset="-120"/>
+              </a:rPr>
+              <a:t>Complete the practical exercise to apply the concept.</a:t>
+            </a:r>
+            <a:endParaRPr lang="en-US" sz="1380" dirty="0"/>
+          </a:p>
+          <a:p>
+            <a:r>
+              <a:rPr lang="en-US" sz="1380" dirty="0">
+                <a:solidFill>
+                  <a:srgbClr val="17364A"/>
+                </a:solidFill>
+                <a:latin typeface="Aptos" pitchFamily="34" charset="0"/>
+                <a:ea typeface="Aptos" pitchFamily="34" charset="-122"/>
+                <a:cs typeface="Aptos" pitchFamily="34" charset="-120"/>
+              </a:rPr>
+              <a:t>Use the notes and references for deeper review.</a:t>
+            </a:r>
+            <a:endParaRPr lang="en-US" sz="1380" dirty="0"/>
           </a:p>
         </p:txBody>
       </p:sp>
@@ -11710,13 +11338,11 @@
             </a:avLst>
           </a:prstGeom>
           <a:solidFill>
-            <a:srgbClr val="FFFFFF">
-              <a:alpha val="88000"/>
-            </a:srgbClr>
+            <a:srgbClr val="FFFFFF"/>
           </a:solidFill>
           <a:ln w="12700">
             <a:solidFill>
-              <a:srgbClr val="D6E8F2"/>
+              <a:srgbClr val="B9D7E6"/>
             </a:solidFill>
             <a:prstDash val="solid"/>
           </a:ln>
@@ -11724,26 +11350,42 @@
       </p:sp>
       <p:sp>
         <p:nvSpPr>
-          <p:cNvPr id="14" name="Shape 12"/>
-          <p:cNvSpPr/>
-          <p:nvPr/>
-        </p:nvSpPr>
-        <p:spPr>
-          <a:xfrm>
-            <a:off x="8046720" y="3108960"/>
-            <a:ext cx="2651760" cy="896112"/>
-          </a:xfrm>
-          <a:prstGeom prst="arc">
-            <a:avLst/>
-          </a:prstGeom>
-          <a:noFill/>
-          <a:ln w="25400">
-            <a:solidFill>
-              <a:srgbClr val="0068B7"/>
-            </a:solidFill>
-            <a:prstDash val="solid"/>
-          </a:ln>
-        </p:spPr>
+          <p:cNvPr id="14" name="Text 12"/>
+          <p:cNvSpPr/>
+          <p:nvPr/>
+        </p:nvSpPr>
+        <p:spPr>
+          <a:xfrm>
+            <a:off x="7799832" y="2935224"/>
+            <a:ext cx="3145536" cy="256032"/>
+          </a:xfrm>
+          <a:prstGeom prst="rect">
+            <a:avLst/>
+          </a:prstGeom>
+          <a:noFill/>
+          <a:ln/>
+        </p:spPr>
+        <p:txBody>
+          <a:bodyPr wrap="square" lIns="0" tIns="0" rIns="0" bIns="0" rtlCol="0" anchor="ctr"/>
+          <a:lstStyle/>
+          <a:p>
+            <a:pPr indent="0" marL="0">
+              <a:buNone/>
+            </a:pPr>
+            <a:r>
+              <a:rPr lang="en-US" sz="1300" b="1" dirty="0">
+                <a:solidFill>
+                  <a:srgbClr val="0068B7"/>
+                </a:solidFill>
+                <a:latin typeface="Aptos" pitchFamily="34" charset="0"/>
+                <a:ea typeface="Aptos" pitchFamily="34" charset="-122"/>
+                <a:cs typeface="Aptos" pitchFamily="34" charset="-120"/>
+              </a:rPr>
+              <a:t>Concept checkpoints</a:t>
+            </a:r>
+            <a:endParaRPr lang="en-US" sz="1300" dirty="0"/>
+          </a:p>
+        </p:txBody>
       </p:sp>
       <p:sp>
         <p:nvSpPr>
@@ -11753,102 +11395,39 @@
         </p:nvSpPr>
         <p:spPr>
           <a:xfrm>
-            <a:off x="7909560" y="3099816"/>
-            <a:ext cx="2926080" cy="256032"/>
-          </a:xfrm>
-          <a:prstGeom prst="rect">
-            <a:avLst/>
-          </a:prstGeom>
-          <a:noFill/>
-          <a:ln/>
-        </p:spPr>
-        <p:txBody>
-          <a:bodyPr wrap="square" lIns="0" tIns="0" rIns="0" bIns="0" rtlCol="0" anchor="ctr"/>
-          <a:lstStyle/>
-          <a:p>
-            <a:pPr algn="ctr" indent="0" marL="0">
-              <a:buNone/>
-            </a:pPr>
-            <a:r>
-              <a:rPr lang="en-US" sz="1500" b="1" dirty="0">
-                <a:solidFill>
-                  <a:srgbClr val="003A63"/>
-                </a:solidFill>
-                <a:latin typeface="Aptos" pitchFamily="34" charset="0"/>
-                <a:ea typeface="Aptos" pitchFamily="34" charset="-122"/>
-                <a:cs typeface="Aptos" pitchFamily="34" charset="-120"/>
-              </a:rPr>
-              <a:t>Risk</a:t>
-            </a:r>
-            <a:endParaRPr lang="en-US" sz="1500" dirty="0"/>
+            <a:off x="7818120" y="3300984"/>
+            <a:ext cx="3090672" cy="877824"/>
+          </a:xfrm>
+          <a:prstGeom prst="rect">
+            <a:avLst/>
+          </a:prstGeom>
+          <a:noFill/>
+          <a:ln/>
+        </p:spPr>
+        <p:txBody>
+          <a:bodyPr wrap="square" lIns="254" tIns="254" rIns="254" bIns="254" rtlCol="0" anchor="t">
+            <a:normAutofit/>
+          </a:bodyPr>
+          <a:lstStyle/>
+          <a:p>
+            <a:r>
+              <a:rPr lang="en-US" sz="1380" dirty="0">
+                <a:solidFill>
+                  <a:srgbClr val="17364A"/>
+                </a:solidFill>
+                <a:latin typeface="Aptos" pitchFamily="34" charset="0"/>
+                <a:ea typeface="Aptos" pitchFamily="34" charset="-122"/>
+                <a:cs typeface="Aptos" pitchFamily="34" charset="-120"/>
+              </a:rPr>
+              <a:t>Do not treat AI as a single tool or assume one model fits every public health task.</a:t>
+            </a:r>
+            <a:endParaRPr lang="en-US" sz="1380" dirty="0"/>
           </a:p>
         </p:txBody>
       </p:sp>
       <p:sp>
         <p:nvSpPr>
           <p:cNvPr id="16" name="Shape 14"/>
-          <p:cNvSpPr/>
-          <p:nvPr/>
-        </p:nvSpPr>
-        <p:spPr>
-          <a:xfrm>
-            <a:off x="8366760" y="3639312"/>
-            <a:ext cx="2011680" cy="0"/>
-          </a:xfrm>
-          <a:prstGeom prst="line">
-            <a:avLst/>
-          </a:prstGeom>
-          <a:noFill/>
-          <a:ln w="63500">
-            <a:solidFill>
-              <a:srgbClr val="2F8A28"/>
-            </a:solidFill>
-            <a:prstDash val="solid"/>
-          </a:ln>
-        </p:spPr>
-      </p:sp>
-      <p:sp>
-        <p:nvSpPr>
-          <p:cNvPr id="17" name="Text 15"/>
-          <p:cNvSpPr/>
-          <p:nvPr/>
-        </p:nvSpPr>
-        <p:spPr>
-          <a:xfrm>
-            <a:off x="7909560" y="3849624"/>
-            <a:ext cx="2926080" cy="164592"/>
-          </a:xfrm>
-          <a:prstGeom prst="rect">
-            <a:avLst/>
-          </a:prstGeom>
-          <a:noFill/>
-          <a:ln/>
-        </p:spPr>
-        <p:txBody>
-          <a:bodyPr wrap="square" lIns="0" tIns="0" rIns="0" bIns="0" rtlCol="0" anchor="ctr"/>
-          <a:lstStyle/>
-          <a:p>
-            <a:pPr algn="ctr" indent="0" marL="0">
-              <a:buNone/>
-            </a:pPr>
-            <a:r>
-              <a:rPr lang="en-US" sz="900" dirty="0">
-                <a:solidFill>
-                  <a:srgbClr val="003A63"/>
-                </a:solidFill>
-                <a:latin typeface="Aptos" pitchFamily="34" charset="0"/>
-                <a:ea typeface="Aptos" pitchFamily="34" charset="-122"/>
-                <a:cs typeface="Aptos" pitchFamily="34" charset="-120"/>
-              </a:rPr>
-              <a:t>Human review</a:t>
-            </a:r>
-            <a:endParaRPr lang="en-US" sz="900" dirty="0"/>
-          </a:p>
-        </p:txBody>
-      </p:sp>
-      <p:sp>
-        <p:nvSpPr>
-          <p:cNvPr id="18" name="Shape 16"/>
           <p:cNvSpPr/>
           <p:nvPr/>
         </p:nvSpPr>
@@ -11875,7 +11454,7 @@
       </p:sp>
       <p:sp>
         <p:nvSpPr>
-          <p:cNvPr id="19" name="Text 17"/>
+          <p:cNvPr id="17" name="Text 15"/>
           <p:cNvSpPr/>
           <p:nvPr/>
         </p:nvSpPr>
@@ -11914,7 +11493,7 @@
       </p:sp>
       <p:sp>
         <p:nvSpPr>
-          <p:cNvPr id="20" name="Text 18"/>
+          <p:cNvPr id="18" name="Text 16"/>
           <p:cNvSpPr/>
           <p:nvPr/>
         </p:nvSpPr>
@@ -12408,13 +11987,11 @@
             </a:avLst>
           </a:prstGeom>
           <a:solidFill>
-            <a:srgbClr val="FFFFFF">
-              <a:alpha val="88000"/>
-            </a:srgbClr>
+            <a:srgbClr val="FFFFFF"/>
           </a:solidFill>
           <a:ln w="12700">
             <a:solidFill>
-              <a:srgbClr val="D6E8F2"/>
+              <a:srgbClr val="B9D7E6"/>
             </a:solidFill>
             <a:prstDash val="solid"/>
           </a:ln>
@@ -12422,119 +11999,98 @@
       </p:sp>
       <p:sp>
         <p:nvSpPr>
-          <p:cNvPr id="14" name="Shape 12"/>
-          <p:cNvSpPr/>
-          <p:nvPr/>
-        </p:nvSpPr>
-        <p:spPr>
-          <a:xfrm>
-            <a:off x="8074152" y="3291840"/>
-            <a:ext cx="2596896" cy="749808"/>
-          </a:xfrm>
-          <a:prstGeom prst="rect">
-            <a:avLst/>
-          </a:prstGeom>
-          <a:solidFill>
-            <a:srgbClr val="EAF6F8"/>
-          </a:solidFill>
-          <a:ln w="12700">
-            <a:solidFill>
-              <a:srgbClr val="8ABBD8"/>
-            </a:solidFill>
-            <a:prstDash val="solid"/>
-          </a:ln>
-        </p:spPr>
-      </p:sp>
-      <p:sp>
-        <p:nvSpPr>
-          <p:cNvPr id="15" name="Shape 13"/>
-          <p:cNvSpPr/>
-          <p:nvPr/>
-        </p:nvSpPr>
-        <p:spPr>
-          <a:xfrm>
-            <a:off x="8202168" y="3721608"/>
-            <a:ext cx="2340864" cy="0"/>
-          </a:xfrm>
-          <a:prstGeom prst="line">
-            <a:avLst/>
-          </a:prstGeom>
-          <a:noFill/>
-          <a:ln w="19050">
-            <a:solidFill>
-              <a:srgbClr val="0068B7"/>
-            </a:solidFill>
-            <a:prstDash val="solid"/>
-          </a:ln>
-        </p:spPr>
+          <p:cNvPr id="14" name="Text 12"/>
+          <p:cNvSpPr/>
+          <p:nvPr/>
+        </p:nvSpPr>
+        <p:spPr>
+          <a:xfrm>
+            <a:off x="7799832" y="2935224"/>
+            <a:ext cx="3145536" cy="256032"/>
+          </a:xfrm>
+          <a:prstGeom prst="rect">
+            <a:avLst/>
+          </a:prstGeom>
+          <a:noFill/>
+          <a:ln/>
+        </p:spPr>
+        <p:txBody>
+          <a:bodyPr wrap="square" lIns="0" tIns="0" rIns="0" bIns="0" rtlCol="0" anchor="ctr"/>
+          <a:lstStyle/>
+          <a:p>
+            <a:pPr indent="0" marL="0">
+              <a:buNone/>
+            </a:pPr>
+            <a:r>
+              <a:rPr lang="en-US" sz="1300" b="1" dirty="0">
+                <a:solidFill>
+                  <a:srgbClr val="0068B7"/>
+                </a:solidFill>
+                <a:latin typeface="Aptos" pitchFamily="34" charset="0"/>
+                <a:ea typeface="Aptos" pitchFamily="34" charset="-122"/>
+                <a:cs typeface="Aptos" pitchFamily="34" charset="-120"/>
+              </a:rPr>
+              <a:t>Concept checkpoints</a:t>
+            </a:r>
+            <a:endParaRPr lang="en-US" sz="1300" dirty="0"/>
+          </a:p>
+        </p:txBody>
+      </p:sp>
+      <p:sp>
+        <p:nvSpPr>
+          <p:cNvPr id="15" name="Text 13"/>
+          <p:cNvSpPr/>
+          <p:nvPr/>
+        </p:nvSpPr>
+        <p:spPr>
+          <a:xfrm>
+            <a:off x="7818120" y="3300984"/>
+            <a:ext cx="3090672" cy="877824"/>
+          </a:xfrm>
+          <a:prstGeom prst="rect">
+            <a:avLst/>
+          </a:prstGeom>
+          <a:noFill/>
+          <a:ln/>
+        </p:spPr>
+        <p:txBody>
+          <a:bodyPr wrap="square" lIns="254" tIns="254" rIns="254" bIns="254" rtlCol="0" anchor="t">
+            <a:normAutofit/>
+          </a:bodyPr>
+          <a:lstStyle/>
+          <a:p>
+            <a:r>
+              <a:rPr lang="en-US" sz="1380" dirty="0">
+                <a:solidFill>
+                  <a:srgbClr val="17364A"/>
+                </a:solidFill>
+                <a:latin typeface="Aptos" pitchFamily="34" charset="0"/>
+                <a:ea typeface="Aptos" pitchFamily="34" charset="-122"/>
+                <a:cs typeface="Aptos" pitchFamily="34" charset="-120"/>
+              </a:rPr>
+              <a:t>A shared AI vocabulary prevents agencies from approving tools before they understand the.</a:t>
+            </a:r>
+            <a:endParaRPr lang="en-US" sz="1380" dirty="0"/>
+          </a:p>
+          <a:p>
+            <a:r>
+              <a:rPr lang="en-US" sz="1380" dirty="0">
+                <a:solidFill>
+                  <a:srgbClr val="17364A"/>
+                </a:solidFill>
+                <a:latin typeface="Aptos" pitchFamily="34" charset="0"/>
+                <a:ea typeface="Aptos" pitchFamily="34" charset="-122"/>
+                <a:cs typeface="Aptos" pitchFamily="34" charset="-120"/>
+              </a:rPr>
+              <a:t>This is especially important for STLT public health departments because AI may enter.</a:t>
+            </a:r>
+            <a:endParaRPr lang="en-US" sz="1380" dirty="0"/>
+          </a:p>
+        </p:txBody>
       </p:sp>
       <p:sp>
         <p:nvSpPr>
           <p:cNvPr id="16" name="Shape 14"/>
-          <p:cNvSpPr/>
-          <p:nvPr/>
-        </p:nvSpPr>
-        <p:spPr>
-          <a:xfrm>
-            <a:off x="9198864" y="4206240"/>
-            <a:ext cx="347472" cy="347472"/>
-          </a:xfrm>
-          <a:prstGeom prst="ellipse">
-            <a:avLst/>
-          </a:prstGeom>
-          <a:solidFill>
-            <a:srgbClr val="2F8A28"/>
-          </a:solidFill>
-          <a:ln w="12700">
-            <a:solidFill>
-              <a:srgbClr val="2F8A28"/>
-            </a:solidFill>
-            <a:prstDash val="solid"/>
-          </a:ln>
-        </p:spPr>
-      </p:sp>
-      <p:sp>
-        <p:nvSpPr>
-          <p:cNvPr id="17" name="Text 15"/>
-          <p:cNvSpPr/>
-          <p:nvPr/>
-        </p:nvSpPr>
-        <p:spPr>
-          <a:xfrm>
-            <a:off x="7909560" y="3977640"/>
-            <a:ext cx="2926080" cy="182880"/>
-          </a:xfrm>
-          <a:prstGeom prst="rect">
-            <a:avLst/>
-          </a:prstGeom>
-          <a:noFill/>
-          <a:ln/>
-        </p:spPr>
-        <p:txBody>
-          <a:bodyPr wrap="square" lIns="0" tIns="0" rIns="0" bIns="0" rtlCol="0" anchor="ctr"/>
-          <a:lstStyle/>
-          <a:p>
-            <a:pPr algn="ctr" indent="0" marL="0">
-              <a:buNone/>
-            </a:pPr>
-            <a:r>
-              <a:rPr lang="en-US" sz="1000" dirty="0">
-                <a:solidFill>
-                  <a:srgbClr val="003A63"/>
-                </a:solidFill>
-                <a:latin typeface="Aptos" pitchFamily="34" charset="0"/>
-                <a:ea typeface="Aptos" pitchFamily="34" charset="-122"/>
-                <a:cs typeface="Aptos" pitchFamily="34" charset="-120"/>
-              </a:rPr>
-              <a:t>Concept to action</a:t>
-            </a:r>
-            <a:endParaRPr lang="en-US" sz="1000" dirty="0"/>
-          </a:p>
-        </p:txBody>
-      </p:sp>
-      <p:sp>
-        <p:nvSpPr>
-          <p:cNvPr id="18" name="Shape 16"/>
           <p:cNvSpPr/>
           <p:nvPr/>
         </p:nvSpPr>
@@ -12561,7 +12117,7 @@
       </p:sp>
       <p:sp>
         <p:nvSpPr>
-          <p:cNvPr id="19" name="Text 17"/>
+          <p:cNvPr id="17" name="Text 15"/>
           <p:cNvSpPr/>
           <p:nvPr/>
         </p:nvSpPr>
@@ -12600,7 +12156,7 @@
       </p:sp>
       <p:sp>
         <p:nvSpPr>
-          <p:cNvPr id="20" name="Text 18"/>
+          <p:cNvPr id="18" name="Text 16"/>
           <p:cNvSpPr/>
           <p:nvPr/>
         </p:nvSpPr>
@@ -13108,13 +12664,11 @@
             </a:avLst>
           </a:prstGeom>
           <a:solidFill>
-            <a:srgbClr val="FFFFFF">
-              <a:alpha val="88000"/>
-            </a:srgbClr>
+            <a:srgbClr val="FFFFFF"/>
           </a:solidFill>
           <a:ln w="12700">
             <a:solidFill>
-              <a:srgbClr val="D6E8F2"/>
+              <a:srgbClr val="B9D7E6"/>
             </a:solidFill>
             <a:prstDash val="solid"/>
           </a:ln>
@@ -13122,119 +12676,112 @@
       </p:sp>
       <p:sp>
         <p:nvSpPr>
-          <p:cNvPr id="14" name="Shape 12"/>
-          <p:cNvSpPr/>
-          <p:nvPr/>
-        </p:nvSpPr>
-        <p:spPr>
-          <a:xfrm>
-            <a:off x="8074152" y="3291840"/>
-            <a:ext cx="2596896" cy="749808"/>
-          </a:xfrm>
-          <a:prstGeom prst="rect">
-            <a:avLst/>
-          </a:prstGeom>
-          <a:solidFill>
-            <a:srgbClr val="EAF6F8"/>
-          </a:solidFill>
-          <a:ln w="12700">
-            <a:solidFill>
-              <a:srgbClr val="8ABBD8"/>
-            </a:solidFill>
-            <a:prstDash val="solid"/>
-          </a:ln>
-        </p:spPr>
-      </p:sp>
-      <p:sp>
-        <p:nvSpPr>
-          <p:cNvPr id="15" name="Shape 13"/>
-          <p:cNvSpPr/>
-          <p:nvPr/>
-        </p:nvSpPr>
-        <p:spPr>
-          <a:xfrm>
-            <a:off x="8202168" y="3721608"/>
-            <a:ext cx="2340864" cy="0"/>
-          </a:xfrm>
-          <a:prstGeom prst="line">
-            <a:avLst/>
-          </a:prstGeom>
-          <a:noFill/>
-          <a:ln w="19050">
-            <a:solidFill>
-              <a:srgbClr val="0068B7"/>
-            </a:solidFill>
-            <a:prstDash val="solid"/>
-          </a:ln>
-        </p:spPr>
+          <p:cNvPr id="14" name="Text 12"/>
+          <p:cNvSpPr/>
+          <p:nvPr/>
+        </p:nvSpPr>
+        <p:spPr>
+          <a:xfrm>
+            <a:off x="7799832" y="2935224"/>
+            <a:ext cx="3145536" cy="256032"/>
+          </a:xfrm>
+          <a:prstGeom prst="rect">
+            <a:avLst/>
+          </a:prstGeom>
+          <a:noFill/>
+          <a:ln/>
+        </p:spPr>
+        <p:txBody>
+          <a:bodyPr wrap="square" lIns="0" tIns="0" rIns="0" bIns="0" rtlCol="0" anchor="ctr"/>
+          <a:lstStyle/>
+          <a:p>
+            <a:pPr indent="0" marL="0">
+              <a:buNone/>
+            </a:pPr>
+            <a:r>
+              <a:rPr lang="en-US" sz="1300" b="1" dirty="0">
+                <a:solidFill>
+                  <a:srgbClr val="0068B7"/>
+                </a:solidFill>
+                <a:latin typeface="Aptos" pitchFamily="34" charset="0"/>
+                <a:ea typeface="Aptos" pitchFamily="34" charset="-122"/>
+                <a:cs typeface="Aptos" pitchFamily="34" charset="-120"/>
+              </a:rPr>
+              <a:t>Concept checkpoints</a:t>
+            </a:r>
+            <a:endParaRPr lang="en-US" sz="1300" dirty="0"/>
+          </a:p>
+        </p:txBody>
+      </p:sp>
+      <p:sp>
+        <p:nvSpPr>
+          <p:cNvPr id="15" name="Text 13"/>
+          <p:cNvSpPr/>
+          <p:nvPr/>
+        </p:nvSpPr>
+        <p:spPr>
+          <a:xfrm>
+            <a:off x="7818120" y="3300984"/>
+            <a:ext cx="3090672" cy="877824"/>
+          </a:xfrm>
+          <a:prstGeom prst="rect">
+            <a:avLst/>
+          </a:prstGeom>
+          <a:noFill/>
+          <a:ln/>
+        </p:spPr>
+        <p:txBody>
+          <a:bodyPr wrap="square" lIns="254" tIns="254" rIns="254" bIns="254" rtlCol="0" anchor="t">
+            <a:normAutofit/>
+          </a:bodyPr>
+          <a:lstStyle/>
+          <a:p>
+            <a:r>
+              <a:rPr lang="en-US" sz="1380" dirty="0">
+                <a:solidFill>
+                  <a:srgbClr val="17364A"/>
+                </a:solidFill>
+                <a:latin typeface="Aptos" pitchFamily="34" charset="0"/>
+                <a:ea typeface="Aptos" pitchFamily="34" charset="-122"/>
+                <a:cs typeface="Aptos" pitchFamily="34" charset="-120"/>
+              </a:rPr>
+              <a:t>What AI tools or AI-enabled vendor products are already being used informally?</a:t>
+            </a:r>
+            <a:endParaRPr lang="en-US" sz="1380" dirty="0"/>
+          </a:p>
+          <a:p>
+            <a:r>
+              <a:rPr lang="en-US" sz="1380" dirty="0">
+                <a:solidFill>
+                  <a:srgbClr val="17364A"/>
+                </a:solidFill>
+                <a:latin typeface="Aptos" pitchFamily="34" charset="0"/>
+                <a:ea typeface="Aptos" pitchFamily="34" charset="-122"/>
+                <a:cs typeface="Aptos" pitchFamily="34" charset="-120"/>
+              </a:rPr>
+              <a:t>Which public health decisions should never be delegated to an AI system?</a:t>
+            </a:r>
+            <a:endParaRPr lang="en-US" sz="1380" dirty="0"/>
+          </a:p>
+          <a:p>
+            <a:r>
+              <a:rPr lang="en-US" sz="1380" dirty="0">
+                <a:solidFill>
+                  <a:srgbClr val="17364A"/>
+                </a:solidFill>
+                <a:latin typeface="Aptos" pitchFamily="34" charset="0"/>
+                <a:ea typeface="Aptos" pitchFamily="34" charset="-122"/>
+                <a:cs typeface="Aptos" pitchFamily="34" charset="-120"/>
+              </a:rPr>
+              <a:t>Who needs enough AI literacy to participate in governance, procurement, or implementation.</a:t>
+            </a:r>
+            <a:endParaRPr lang="en-US" sz="1380" dirty="0"/>
+          </a:p>
+        </p:txBody>
       </p:sp>
       <p:sp>
         <p:nvSpPr>
           <p:cNvPr id="16" name="Shape 14"/>
-          <p:cNvSpPr/>
-          <p:nvPr/>
-        </p:nvSpPr>
-        <p:spPr>
-          <a:xfrm>
-            <a:off x="9198864" y="4206240"/>
-            <a:ext cx="347472" cy="347472"/>
-          </a:xfrm>
-          <a:prstGeom prst="ellipse">
-            <a:avLst/>
-          </a:prstGeom>
-          <a:solidFill>
-            <a:srgbClr val="2F8A28"/>
-          </a:solidFill>
-          <a:ln w="12700">
-            <a:solidFill>
-              <a:srgbClr val="2F8A28"/>
-            </a:solidFill>
-            <a:prstDash val="solid"/>
-          </a:ln>
-        </p:spPr>
-      </p:sp>
-      <p:sp>
-        <p:nvSpPr>
-          <p:cNvPr id="17" name="Text 15"/>
-          <p:cNvSpPr/>
-          <p:nvPr/>
-        </p:nvSpPr>
-        <p:spPr>
-          <a:xfrm>
-            <a:off x="7909560" y="3977640"/>
-            <a:ext cx="2926080" cy="182880"/>
-          </a:xfrm>
-          <a:prstGeom prst="rect">
-            <a:avLst/>
-          </a:prstGeom>
-          <a:noFill/>
-          <a:ln/>
-        </p:spPr>
-        <p:txBody>
-          <a:bodyPr wrap="square" lIns="0" tIns="0" rIns="0" bIns="0" rtlCol="0" anchor="ctr"/>
-          <a:lstStyle/>
-          <a:p>
-            <a:pPr algn="ctr" indent="0" marL="0">
-              <a:buNone/>
-            </a:pPr>
-            <a:r>
-              <a:rPr lang="en-US" sz="1000" dirty="0">
-                <a:solidFill>
-                  <a:srgbClr val="003A63"/>
-                </a:solidFill>
-                <a:latin typeface="Aptos" pitchFamily="34" charset="0"/>
-                <a:ea typeface="Aptos" pitchFamily="34" charset="-122"/>
-                <a:cs typeface="Aptos" pitchFamily="34" charset="-120"/>
-              </a:rPr>
-              <a:t>Concept to action</a:t>
-            </a:r>
-            <a:endParaRPr lang="en-US" sz="1000" dirty="0"/>
-          </a:p>
-        </p:txBody>
-      </p:sp>
-      <p:sp>
-        <p:nvSpPr>
-          <p:cNvPr id="18" name="Shape 16"/>
           <p:cNvSpPr/>
           <p:nvPr/>
         </p:nvSpPr>
@@ -13261,7 +12808,7 @@
       </p:sp>
       <p:sp>
         <p:nvSpPr>
-          <p:cNvPr id="19" name="Text 17"/>
+          <p:cNvPr id="17" name="Text 15"/>
           <p:cNvSpPr/>
           <p:nvPr/>
         </p:nvSpPr>
@@ -13300,7 +12847,7 @@
       </p:sp>
       <p:sp>
         <p:nvSpPr>
-          <p:cNvPr id="20" name="Text 18"/>
+          <p:cNvPr id="18" name="Text 16"/>
           <p:cNvSpPr/>
           <p:nvPr/>
         </p:nvSpPr>
@@ -13808,13 +13355,11 @@
             </a:avLst>
           </a:prstGeom>
           <a:solidFill>
-            <a:srgbClr val="FFFFFF">
-              <a:alpha val="88000"/>
-            </a:srgbClr>
+            <a:srgbClr val="FFFFFF"/>
           </a:solidFill>
           <a:ln w="12700">
             <a:solidFill>
-              <a:srgbClr val="D6E8F2"/>
+              <a:srgbClr val="B9D7E6"/>
             </a:solidFill>
             <a:prstDash val="solid"/>
           </a:ln>
@@ -13822,119 +13367,98 @@
       </p:sp>
       <p:sp>
         <p:nvSpPr>
-          <p:cNvPr id="14" name="Shape 12"/>
-          <p:cNvSpPr/>
-          <p:nvPr/>
-        </p:nvSpPr>
-        <p:spPr>
-          <a:xfrm>
-            <a:off x="8074152" y="3291840"/>
-            <a:ext cx="2596896" cy="749808"/>
-          </a:xfrm>
-          <a:prstGeom prst="rect">
-            <a:avLst/>
-          </a:prstGeom>
-          <a:solidFill>
-            <a:srgbClr val="EAF6F8"/>
-          </a:solidFill>
-          <a:ln w="12700">
-            <a:solidFill>
-              <a:srgbClr val="8ABBD8"/>
-            </a:solidFill>
-            <a:prstDash val="solid"/>
-          </a:ln>
-        </p:spPr>
-      </p:sp>
-      <p:sp>
-        <p:nvSpPr>
-          <p:cNvPr id="15" name="Shape 13"/>
-          <p:cNvSpPr/>
-          <p:nvPr/>
-        </p:nvSpPr>
-        <p:spPr>
-          <a:xfrm>
-            <a:off x="8202168" y="3721608"/>
-            <a:ext cx="2340864" cy="0"/>
-          </a:xfrm>
-          <a:prstGeom prst="line">
-            <a:avLst/>
-          </a:prstGeom>
-          <a:noFill/>
-          <a:ln w="19050">
-            <a:solidFill>
-              <a:srgbClr val="0068B7"/>
-            </a:solidFill>
-            <a:prstDash val="solid"/>
-          </a:ln>
-        </p:spPr>
+          <p:cNvPr id="14" name="Text 12"/>
+          <p:cNvSpPr/>
+          <p:nvPr/>
+        </p:nvSpPr>
+        <p:spPr>
+          <a:xfrm>
+            <a:off x="7799832" y="2935224"/>
+            <a:ext cx="3145536" cy="256032"/>
+          </a:xfrm>
+          <a:prstGeom prst="rect">
+            <a:avLst/>
+          </a:prstGeom>
+          <a:noFill/>
+          <a:ln/>
+        </p:spPr>
+        <p:txBody>
+          <a:bodyPr wrap="square" lIns="0" tIns="0" rIns="0" bIns="0" rtlCol="0" anchor="ctr"/>
+          <a:lstStyle/>
+          <a:p>
+            <a:pPr indent="0" marL="0">
+              <a:buNone/>
+            </a:pPr>
+            <a:r>
+              <a:rPr lang="en-US" sz="1300" b="1" dirty="0">
+                <a:solidFill>
+                  <a:srgbClr val="0068B7"/>
+                </a:solidFill>
+                <a:latin typeface="Aptos" pitchFamily="34" charset="0"/>
+                <a:ea typeface="Aptos" pitchFamily="34" charset="-122"/>
+                <a:cs typeface="Aptos" pitchFamily="34" charset="-120"/>
+              </a:rPr>
+              <a:t>Concept checkpoints</a:t>
+            </a:r>
+            <a:endParaRPr lang="en-US" sz="1300" dirty="0"/>
+          </a:p>
+        </p:txBody>
+      </p:sp>
+      <p:sp>
+        <p:nvSpPr>
+          <p:cNvPr id="15" name="Text 13"/>
+          <p:cNvSpPr/>
+          <p:nvPr/>
+        </p:nvSpPr>
+        <p:spPr>
+          <a:xfrm>
+            <a:off x="7818120" y="3300984"/>
+            <a:ext cx="3090672" cy="877824"/>
+          </a:xfrm>
+          <a:prstGeom prst="rect">
+            <a:avLst/>
+          </a:prstGeom>
+          <a:noFill/>
+          <a:ln/>
+        </p:spPr>
+        <p:txBody>
+          <a:bodyPr wrap="square" lIns="254" tIns="254" rIns="254" bIns="254" rtlCol="0" anchor="t">
+            <a:normAutofit/>
+          </a:bodyPr>
+          <a:lstStyle/>
+          <a:p>
+            <a:r>
+              <a:rPr lang="en-US" sz="1380" dirty="0">
+                <a:solidFill>
+                  <a:srgbClr val="17364A"/>
+                </a:solidFill>
+                <a:latin typeface="Aptos" pitchFamily="34" charset="0"/>
+                <a:ea typeface="Aptos" pitchFamily="34" charset="-122"/>
+                <a:cs typeface="Aptos" pitchFamily="34" charset="-120"/>
+              </a:rPr>
+              <a:t>Ask each program area to list one current task that involves searching, summarizing,.</a:t>
+            </a:r>
+            <a:endParaRPr lang="en-US" sz="1380" dirty="0"/>
+          </a:p>
+          <a:p>
+            <a:r>
+              <a:rPr lang="en-US" sz="1380" dirty="0">
+                <a:solidFill>
+                  <a:srgbClr val="17364A"/>
+                </a:solidFill>
+                <a:latin typeface="Aptos" pitchFamily="34" charset="0"/>
+                <a:ea typeface="Aptos" pitchFamily="34" charset="-122"/>
+                <a:cs typeface="Aptos" pitchFamily="34" charset="-120"/>
+              </a:rPr>
+              <a:t>Expected assignment: Initial inventory of known or suspected AI use</a:t>
+            </a:r>
+            <a:endParaRPr lang="en-US" sz="1380" dirty="0"/>
+          </a:p>
+        </p:txBody>
       </p:sp>
       <p:sp>
         <p:nvSpPr>
           <p:cNvPr id="16" name="Shape 14"/>
-          <p:cNvSpPr/>
-          <p:nvPr/>
-        </p:nvSpPr>
-        <p:spPr>
-          <a:xfrm>
-            <a:off x="9198864" y="4206240"/>
-            <a:ext cx="347472" cy="347472"/>
-          </a:xfrm>
-          <a:prstGeom prst="ellipse">
-            <a:avLst/>
-          </a:prstGeom>
-          <a:solidFill>
-            <a:srgbClr val="2F8A28"/>
-          </a:solidFill>
-          <a:ln w="12700">
-            <a:solidFill>
-              <a:srgbClr val="2F8A28"/>
-            </a:solidFill>
-            <a:prstDash val="solid"/>
-          </a:ln>
-        </p:spPr>
-      </p:sp>
-      <p:sp>
-        <p:nvSpPr>
-          <p:cNvPr id="17" name="Text 15"/>
-          <p:cNvSpPr/>
-          <p:nvPr/>
-        </p:nvSpPr>
-        <p:spPr>
-          <a:xfrm>
-            <a:off x="7909560" y="3977640"/>
-            <a:ext cx="2926080" cy="182880"/>
-          </a:xfrm>
-          <a:prstGeom prst="rect">
-            <a:avLst/>
-          </a:prstGeom>
-          <a:noFill/>
-          <a:ln/>
-        </p:spPr>
-        <p:txBody>
-          <a:bodyPr wrap="square" lIns="0" tIns="0" rIns="0" bIns="0" rtlCol="0" anchor="ctr"/>
-          <a:lstStyle/>
-          <a:p>
-            <a:pPr algn="ctr" indent="0" marL="0">
-              <a:buNone/>
-            </a:pPr>
-            <a:r>
-              <a:rPr lang="en-US" sz="1000" dirty="0">
-                <a:solidFill>
-                  <a:srgbClr val="003A63"/>
-                </a:solidFill>
-                <a:latin typeface="Aptos" pitchFamily="34" charset="0"/>
-                <a:ea typeface="Aptos" pitchFamily="34" charset="-122"/>
-                <a:cs typeface="Aptos" pitchFamily="34" charset="-120"/>
-              </a:rPr>
-              <a:t>Concept to action</a:t>
-            </a:r>
-            <a:endParaRPr lang="en-US" sz="1000" dirty="0"/>
-          </a:p>
-        </p:txBody>
-      </p:sp>
-      <p:sp>
-        <p:nvSpPr>
-          <p:cNvPr id="18" name="Shape 16"/>
           <p:cNvSpPr/>
           <p:nvPr/>
         </p:nvSpPr>
@@ -13961,7 +13485,7 @@
       </p:sp>
       <p:sp>
         <p:nvSpPr>
-          <p:cNvPr id="19" name="Text 17"/>
+          <p:cNvPr id="17" name="Text 15"/>
           <p:cNvSpPr/>
           <p:nvPr/>
         </p:nvSpPr>
@@ -14000,7 +13524,7 @@
       </p:sp>
       <p:sp>
         <p:nvSpPr>
-          <p:cNvPr id="20" name="Text 18"/>
+          <p:cNvPr id="18" name="Text 16"/>
           <p:cNvSpPr/>
           <p:nvPr/>
         </p:nvSpPr>
@@ -14480,13 +14004,11 @@
             </a:avLst>
           </a:prstGeom>
           <a:solidFill>
-            <a:srgbClr val="FFFFFF">
-              <a:alpha val="88000"/>
-            </a:srgbClr>
+            <a:srgbClr val="FFFFFF"/>
           </a:solidFill>
           <a:ln w="12700">
             <a:solidFill>
-              <a:srgbClr val="D6E8F2"/>
+              <a:srgbClr val="B9D7E6"/>
             </a:solidFill>
             <a:prstDash val="solid"/>
           </a:ln>
@@ -14494,119 +14016,84 @@
       </p:sp>
       <p:sp>
         <p:nvSpPr>
-          <p:cNvPr id="14" name="Shape 12"/>
-          <p:cNvSpPr/>
-          <p:nvPr/>
-        </p:nvSpPr>
-        <p:spPr>
-          <a:xfrm>
-            <a:off x="8074152" y="3291840"/>
-            <a:ext cx="2596896" cy="749808"/>
-          </a:xfrm>
-          <a:prstGeom prst="rect">
-            <a:avLst/>
-          </a:prstGeom>
-          <a:solidFill>
-            <a:srgbClr val="EAF6F8"/>
-          </a:solidFill>
-          <a:ln w="12700">
-            <a:solidFill>
-              <a:srgbClr val="8ABBD8"/>
-            </a:solidFill>
-            <a:prstDash val="solid"/>
-          </a:ln>
-        </p:spPr>
-      </p:sp>
-      <p:sp>
-        <p:nvSpPr>
-          <p:cNvPr id="15" name="Shape 13"/>
-          <p:cNvSpPr/>
-          <p:nvPr/>
-        </p:nvSpPr>
-        <p:spPr>
-          <a:xfrm>
-            <a:off x="8202168" y="3721608"/>
-            <a:ext cx="2340864" cy="0"/>
-          </a:xfrm>
-          <a:prstGeom prst="line">
-            <a:avLst/>
-          </a:prstGeom>
-          <a:noFill/>
-          <a:ln w="19050">
-            <a:solidFill>
-              <a:srgbClr val="0068B7"/>
-            </a:solidFill>
-            <a:prstDash val="solid"/>
-          </a:ln>
-        </p:spPr>
+          <p:cNvPr id="14" name="Text 12"/>
+          <p:cNvSpPr/>
+          <p:nvPr/>
+        </p:nvSpPr>
+        <p:spPr>
+          <a:xfrm>
+            <a:off x="7799832" y="2935224"/>
+            <a:ext cx="3145536" cy="256032"/>
+          </a:xfrm>
+          <a:prstGeom prst="rect">
+            <a:avLst/>
+          </a:prstGeom>
+          <a:noFill/>
+          <a:ln/>
+        </p:spPr>
+        <p:txBody>
+          <a:bodyPr wrap="square" lIns="0" tIns="0" rIns="0" bIns="0" rtlCol="0" anchor="ctr"/>
+          <a:lstStyle/>
+          <a:p>
+            <a:pPr indent="0" marL="0">
+              <a:buNone/>
+            </a:pPr>
+            <a:r>
+              <a:rPr lang="en-US" sz="1300" b="1" dirty="0">
+                <a:solidFill>
+                  <a:srgbClr val="0068B7"/>
+                </a:solidFill>
+                <a:latin typeface="Aptos" pitchFamily="34" charset="0"/>
+                <a:ea typeface="Aptos" pitchFamily="34" charset="-122"/>
+                <a:cs typeface="Aptos" pitchFamily="34" charset="-120"/>
+              </a:rPr>
+              <a:t>Concept checkpoints</a:t>
+            </a:r>
+            <a:endParaRPr lang="en-US" sz="1300" dirty="0"/>
+          </a:p>
+        </p:txBody>
+      </p:sp>
+      <p:sp>
+        <p:nvSpPr>
+          <p:cNvPr id="15" name="Text 13"/>
+          <p:cNvSpPr/>
+          <p:nvPr/>
+        </p:nvSpPr>
+        <p:spPr>
+          <a:xfrm>
+            <a:off x="7818120" y="3300984"/>
+            <a:ext cx="3090672" cy="877824"/>
+          </a:xfrm>
+          <a:prstGeom prst="rect">
+            <a:avLst/>
+          </a:prstGeom>
+          <a:noFill/>
+          <a:ln/>
+        </p:spPr>
+        <p:txBody>
+          <a:bodyPr wrap="square" lIns="254" tIns="254" rIns="254" bIns="254" rtlCol="0" anchor="t">
+            <a:normAutofit/>
+          </a:bodyPr>
+          <a:lstStyle/>
+          <a:p>
+            <a:r>
+              <a:rPr lang="en-US" sz="1380" dirty="0">
+                <a:solidFill>
+                  <a:srgbClr val="17364A"/>
+                </a:solidFill>
+                <a:latin typeface="Aptos" pitchFamily="34" charset="0"/>
+                <a:ea typeface="Aptos" pitchFamily="34" charset="-122"/>
+                <a:cs typeface="Aptos" pitchFamily="34" charset="-120"/>
+              </a:rPr>
+              <a:t>Expected assignment: Draft list of decisions that require human accountability</a:t>
+            </a:r>
+            <a:endParaRPr lang="en-US" sz="1380" dirty="0"/>
+          </a:p>
+        </p:txBody>
       </p:sp>
       <p:sp>
         <p:nvSpPr>
           <p:cNvPr id="16" name="Shape 14"/>
-          <p:cNvSpPr/>
-          <p:nvPr/>
-        </p:nvSpPr>
-        <p:spPr>
-          <a:xfrm>
-            <a:off x="9198864" y="4206240"/>
-            <a:ext cx="347472" cy="347472"/>
-          </a:xfrm>
-          <a:prstGeom prst="ellipse">
-            <a:avLst/>
-          </a:prstGeom>
-          <a:solidFill>
-            <a:srgbClr val="2F8A28"/>
-          </a:solidFill>
-          <a:ln w="12700">
-            <a:solidFill>
-              <a:srgbClr val="2F8A28"/>
-            </a:solidFill>
-            <a:prstDash val="solid"/>
-          </a:ln>
-        </p:spPr>
-      </p:sp>
-      <p:sp>
-        <p:nvSpPr>
-          <p:cNvPr id="17" name="Text 15"/>
-          <p:cNvSpPr/>
-          <p:nvPr/>
-        </p:nvSpPr>
-        <p:spPr>
-          <a:xfrm>
-            <a:off x="7909560" y="3977640"/>
-            <a:ext cx="2926080" cy="182880"/>
-          </a:xfrm>
-          <a:prstGeom prst="rect">
-            <a:avLst/>
-          </a:prstGeom>
-          <a:noFill/>
-          <a:ln/>
-        </p:spPr>
-        <p:txBody>
-          <a:bodyPr wrap="square" lIns="0" tIns="0" rIns="0" bIns="0" rtlCol="0" anchor="ctr"/>
-          <a:lstStyle/>
-          <a:p>
-            <a:pPr algn="ctr" indent="0" marL="0">
-              <a:buNone/>
-            </a:pPr>
-            <a:r>
-              <a:rPr lang="en-US" sz="1000" dirty="0">
-                <a:solidFill>
-                  <a:srgbClr val="003A63"/>
-                </a:solidFill>
-                <a:latin typeface="Aptos" pitchFamily="34" charset="0"/>
-                <a:ea typeface="Aptos" pitchFamily="34" charset="-122"/>
-                <a:cs typeface="Aptos" pitchFamily="34" charset="-120"/>
-              </a:rPr>
-              <a:t>Concept to action</a:t>
-            </a:r>
-            <a:endParaRPr lang="en-US" sz="1000" dirty="0"/>
-          </a:p>
-        </p:txBody>
-      </p:sp>
-      <p:sp>
-        <p:nvSpPr>
-          <p:cNvPr id="18" name="Shape 16"/>
           <p:cNvSpPr/>
           <p:nvPr/>
         </p:nvSpPr>
@@ -14633,7 +14120,7 @@
       </p:sp>
       <p:sp>
         <p:nvSpPr>
-          <p:cNvPr id="19" name="Text 17"/>
+          <p:cNvPr id="17" name="Text 15"/>
           <p:cNvSpPr/>
           <p:nvPr/>
         </p:nvSpPr>
@@ -14672,7 +14159,7 @@
       </p:sp>
       <p:sp>
         <p:nvSpPr>
-          <p:cNvPr id="20" name="Text 18"/>
+          <p:cNvPr id="18" name="Text 16"/>
           <p:cNvSpPr/>
           <p:nvPr/>
         </p:nvSpPr>
@@ -15180,13 +14667,11 @@
             </a:avLst>
           </a:prstGeom>
           <a:solidFill>
-            <a:srgbClr val="FFFFFF">
-              <a:alpha val="88000"/>
-            </a:srgbClr>
+            <a:srgbClr val="FFFFFF"/>
           </a:solidFill>
           <a:ln w="12700">
             <a:solidFill>
-              <a:srgbClr val="D6E8F2"/>
+              <a:srgbClr val="B9D7E6"/>
             </a:solidFill>
             <a:prstDash val="solid"/>
           </a:ln>
@@ -15194,119 +14679,112 @@
       </p:sp>
       <p:sp>
         <p:nvSpPr>
-          <p:cNvPr id="14" name="Shape 12"/>
-          <p:cNvSpPr/>
-          <p:nvPr/>
-        </p:nvSpPr>
-        <p:spPr>
-          <a:xfrm>
-            <a:off x="8074152" y="3291840"/>
-            <a:ext cx="2596896" cy="749808"/>
-          </a:xfrm>
-          <a:prstGeom prst="rect">
-            <a:avLst/>
-          </a:prstGeom>
-          <a:solidFill>
-            <a:srgbClr val="EAF6F8"/>
-          </a:solidFill>
-          <a:ln w="12700">
-            <a:solidFill>
-              <a:srgbClr val="8ABBD8"/>
-            </a:solidFill>
-            <a:prstDash val="solid"/>
-          </a:ln>
-        </p:spPr>
-      </p:sp>
-      <p:sp>
-        <p:nvSpPr>
-          <p:cNvPr id="15" name="Shape 13"/>
-          <p:cNvSpPr/>
-          <p:nvPr/>
-        </p:nvSpPr>
-        <p:spPr>
-          <a:xfrm>
-            <a:off x="8202168" y="3721608"/>
-            <a:ext cx="2340864" cy="0"/>
-          </a:xfrm>
-          <a:prstGeom prst="line">
-            <a:avLst/>
-          </a:prstGeom>
-          <a:noFill/>
-          <a:ln w="19050">
-            <a:solidFill>
-              <a:srgbClr val="0068B7"/>
-            </a:solidFill>
-            <a:prstDash val="solid"/>
-          </a:ln>
-        </p:spPr>
+          <p:cNvPr id="14" name="Text 12"/>
+          <p:cNvSpPr/>
+          <p:nvPr/>
+        </p:nvSpPr>
+        <p:spPr>
+          <a:xfrm>
+            <a:off x="7799832" y="2935224"/>
+            <a:ext cx="3145536" cy="256032"/>
+          </a:xfrm>
+          <a:prstGeom prst="rect">
+            <a:avLst/>
+          </a:prstGeom>
+          <a:noFill/>
+          <a:ln/>
+        </p:spPr>
+        <p:txBody>
+          <a:bodyPr wrap="square" lIns="0" tIns="0" rIns="0" bIns="0" rtlCol="0" anchor="ctr"/>
+          <a:lstStyle/>
+          <a:p>
+            <a:pPr indent="0" marL="0">
+              <a:buNone/>
+            </a:pPr>
+            <a:r>
+              <a:rPr lang="en-US" sz="1300" b="1" dirty="0">
+                <a:solidFill>
+                  <a:srgbClr val="0068B7"/>
+                </a:solidFill>
+                <a:latin typeface="Aptos" pitchFamily="34" charset="0"/>
+                <a:ea typeface="Aptos" pitchFamily="34" charset="-122"/>
+                <a:cs typeface="Aptos" pitchFamily="34" charset="-120"/>
+              </a:rPr>
+              <a:t>Concept checkpoints</a:t>
+            </a:r>
+            <a:endParaRPr lang="en-US" sz="1300" dirty="0"/>
+          </a:p>
+        </p:txBody>
+      </p:sp>
+      <p:sp>
+        <p:nvSpPr>
+          <p:cNvPr id="15" name="Text 13"/>
+          <p:cNvSpPr/>
+          <p:nvPr/>
+        </p:nvSpPr>
+        <p:spPr>
+          <a:xfrm>
+            <a:off x="7818120" y="3300984"/>
+            <a:ext cx="3090672" cy="877824"/>
+          </a:xfrm>
+          <a:prstGeom prst="rect">
+            <a:avLst/>
+          </a:prstGeom>
+          <a:noFill/>
+          <a:ln/>
+        </p:spPr>
+        <p:txBody>
+          <a:bodyPr wrap="square" lIns="254" tIns="254" rIns="254" bIns="254" rtlCol="0" anchor="t">
+            <a:normAutofit/>
+          </a:bodyPr>
+          <a:lstStyle/>
+          <a:p>
+            <a:r>
+              <a:rPr lang="en-US" sz="1380" dirty="0">
+                <a:solidFill>
+                  <a:srgbClr val="17364A"/>
+                </a:solidFill>
+                <a:latin typeface="Aptos" pitchFamily="34" charset="0"/>
+                <a:ea typeface="Aptos" pitchFamily="34" charset="-122"/>
+                <a:cs typeface="Aptos" pitchFamily="34" charset="-120"/>
+              </a:rPr>
+              <a:t>1.</a:t>
+            </a:r>
+            <a:endParaRPr lang="en-US" sz="1380" dirty="0"/>
+          </a:p>
+          <a:p>
+            <a:r>
+              <a:rPr lang="en-US" sz="1380" dirty="0">
+                <a:solidFill>
+                  <a:srgbClr val="17364A"/>
+                </a:solidFill>
+                <a:latin typeface="Aptos" pitchFamily="34" charset="0"/>
+                <a:ea typeface="Aptos" pitchFamily="34" charset="-122"/>
+                <a:cs typeface="Aptos" pitchFamily="34" charset="-120"/>
+              </a:rPr>
+              <a:t>What is the most important first step after completing the Introduction to AI for Public.</a:t>
+            </a:r>
+            <a:endParaRPr lang="en-US" sz="1380" dirty="0"/>
+          </a:p>
+          <a:p>
+            <a:r>
+              <a:rPr lang="en-US" sz="1380" dirty="0">
+                <a:solidFill>
+                  <a:srgbClr val="17364A"/>
+                </a:solidFill>
+                <a:latin typeface="Aptos" pitchFamily="34" charset="0"/>
+                <a:ea typeface="Aptos" pitchFamily="34" charset="-122"/>
+                <a:cs typeface="Aptos" pitchFamily="34" charset="-120"/>
+              </a:rPr>
+              <a:t>2.</a:t>
+            </a:r>
+            <a:endParaRPr lang="en-US" sz="1380" dirty="0"/>
+          </a:p>
+        </p:txBody>
       </p:sp>
       <p:sp>
         <p:nvSpPr>
           <p:cNvPr id="16" name="Shape 14"/>
-          <p:cNvSpPr/>
-          <p:nvPr/>
-        </p:nvSpPr>
-        <p:spPr>
-          <a:xfrm>
-            <a:off x="9198864" y="4206240"/>
-            <a:ext cx="347472" cy="347472"/>
-          </a:xfrm>
-          <a:prstGeom prst="ellipse">
-            <a:avLst/>
-          </a:prstGeom>
-          <a:solidFill>
-            <a:srgbClr val="2F8A28"/>
-          </a:solidFill>
-          <a:ln w="12700">
-            <a:solidFill>
-              <a:srgbClr val="2F8A28"/>
-            </a:solidFill>
-            <a:prstDash val="solid"/>
-          </a:ln>
-        </p:spPr>
-      </p:sp>
-      <p:sp>
-        <p:nvSpPr>
-          <p:cNvPr id="17" name="Text 15"/>
-          <p:cNvSpPr/>
-          <p:nvPr/>
-        </p:nvSpPr>
-        <p:spPr>
-          <a:xfrm>
-            <a:off x="7909560" y="3977640"/>
-            <a:ext cx="2926080" cy="182880"/>
-          </a:xfrm>
-          <a:prstGeom prst="rect">
-            <a:avLst/>
-          </a:prstGeom>
-          <a:noFill/>
-          <a:ln/>
-        </p:spPr>
-        <p:txBody>
-          <a:bodyPr wrap="square" lIns="0" tIns="0" rIns="0" bIns="0" rtlCol="0" anchor="ctr"/>
-          <a:lstStyle/>
-          <a:p>
-            <a:pPr algn="ctr" indent="0" marL="0">
-              <a:buNone/>
-            </a:pPr>
-            <a:r>
-              <a:rPr lang="en-US" sz="1000" dirty="0">
-                <a:solidFill>
-                  <a:srgbClr val="003A63"/>
-                </a:solidFill>
-                <a:latin typeface="Aptos" pitchFamily="34" charset="0"/>
-                <a:ea typeface="Aptos" pitchFamily="34" charset="-122"/>
-                <a:cs typeface="Aptos" pitchFamily="34" charset="-120"/>
-              </a:rPr>
-              <a:t>Concept to action</a:t>
-            </a:r>
-            <a:endParaRPr lang="en-US" sz="1000" dirty="0"/>
-          </a:p>
-        </p:txBody>
-      </p:sp>
-      <p:sp>
-        <p:nvSpPr>
-          <p:cNvPr id="18" name="Shape 16"/>
           <p:cNvSpPr/>
           <p:nvPr/>
         </p:nvSpPr>
@@ -15333,7 +14811,7 @@
       </p:sp>
       <p:sp>
         <p:nvSpPr>
-          <p:cNvPr id="19" name="Text 17"/>
+          <p:cNvPr id="17" name="Text 15"/>
           <p:cNvSpPr/>
           <p:nvPr/>
         </p:nvSpPr>
@@ -15372,7 +14850,7 @@
       </p:sp>
       <p:sp>
         <p:nvSpPr>
-          <p:cNvPr id="20" name="Text 18"/>
+          <p:cNvPr id="18" name="Text 16"/>
           <p:cNvSpPr/>
           <p:nvPr/>
         </p:nvSpPr>
@@ -15880,13 +15358,11 @@
             </a:avLst>
           </a:prstGeom>
           <a:solidFill>
-            <a:srgbClr val="FFFFFF">
-              <a:alpha val="88000"/>
-            </a:srgbClr>
+            <a:srgbClr val="FFFFFF"/>
           </a:solidFill>
           <a:ln w="12700">
             <a:solidFill>
-              <a:srgbClr val="D6E8F2"/>
+              <a:srgbClr val="B9D7E6"/>
             </a:solidFill>
             <a:prstDash val="solid"/>
           </a:ln>
@@ -15894,119 +15370,112 @@
       </p:sp>
       <p:sp>
         <p:nvSpPr>
-          <p:cNvPr id="14" name="Shape 12"/>
-          <p:cNvSpPr/>
-          <p:nvPr/>
-        </p:nvSpPr>
-        <p:spPr>
-          <a:xfrm>
-            <a:off x="8074152" y="3291840"/>
-            <a:ext cx="2596896" cy="749808"/>
-          </a:xfrm>
-          <a:prstGeom prst="rect">
-            <a:avLst/>
-          </a:prstGeom>
-          <a:solidFill>
-            <a:srgbClr val="EAF6F8"/>
-          </a:solidFill>
-          <a:ln w="12700">
-            <a:solidFill>
-              <a:srgbClr val="8ABBD8"/>
-            </a:solidFill>
-            <a:prstDash val="solid"/>
-          </a:ln>
-        </p:spPr>
-      </p:sp>
-      <p:sp>
-        <p:nvSpPr>
-          <p:cNvPr id="15" name="Shape 13"/>
-          <p:cNvSpPr/>
-          <p:nvPr/>
-        </p:nvSpPr>
-        <p:spPr>
-          <a:xfrm>
-            <a:off x="8202168" y="3721608"/>
-            <a:ext cx="2340864" cy="0"/>
-          </a:xfrm>
-          <a:prstGeom prst="line">
-            <a:avLst/>
-          </a:prstGeom>
-          <a:noFill/>
-          <a:ln w="19050">
-            <a:solidFill>
-              <a:srgbClr val="0068B7"/>
-            </a:solidFill>
-            <a:prstDash val="solid"/>
-          </a:ln>
-        </p:spPr>
+          <p:cNvPr id="14" name="Text 12"/>
+          <p:cNvSpPr/>
+          <p:nvPr/>
+        </p:nvSpPr>
+        <p:spPr>
+          <a:xfrm>
+            <a:off x="7799832" y="2935224"/>
+            <a:ext cx="3145536" cy="256032"/>
+          </a:xfrm>
+          <a:prstGeom prst="rect">
+            <a:avLst/>
+          </a:prstGeom>
+          <a:noFill/>
+          <a:ln/>
+        </p:spPr>
+        <p:txBody>
+          <a:bodyPr wrap="square" lIns="0" tIns="0" rIns="0" bIns="0" rtlCol="0" anchor="ctr"/>
+          <a:lstStyle/>
+          <a:p>
+            <a:pPr indent="0" marL="0">
+              <a:buNone/>
+            </a:pPr>
+            <a:r>
+              <a:rPr lang="en-US" sz="1300" b="1" dirty="0">
+                <a:solidFill>
+                  <a:srgbClr val="0068B7"/>
+                </a:solidFill>
+                <a:latin typeface="Aptos" pitchFamily="34" charset="0"/>
+                <a:ea typeface="Aptos" pitchFamily="34" charset="-122"/>
+                <a:cs typeface="Aptos" pitchFamily="34" charset="-120"/>
+              </a:rPr>
+              <a:t>Concept checkpoints</a:t>
+            </a:r>
+            <a:endParaRPr lang="en-US" sz="1300" dirty="0"/>
+          </a:p>
+        </p:txBody>
+      </p:sp>
+      <p:sp>
+        <p:nvSpPr>
+          <p:cNvPr id="15" name="Text 13"/>
+          <p:cNvSpPr/>
+          <p:nvPr/>
+        </p:nvSpPr>
+        <p:spPr>
+          <a:xfrm>
+            <a:off x="7818120" y="3300984"/>
+            <a:ext cx="3090672" cy="877824"/>
+          </a:xfrm>
+          <a:prstGeom prst="rect">
+            <a:avLst/>
+          </a:prstGeom>
+          <a:noFill/>
+          <a:ln/>
+        </p:spPr>
+        <p:txBody>
+          <a:bodyPr wrap="square" lIns="254" tIns="254" rIns="254" bIns="254" rtlCol="0" anchor="t">
+            <a:normAutofit/>
+          </a:bodyPr>
+          <a:lstStyle/>
+          <a:p>
+            <a:r>
+              <a:rPr lang="en-US" sz="1380" dirty="0">
+                <a:solidFill>
+                  <a:srgbClr val="17364A"/>
+                </a:solidFill>
+                <a:latin typeface="Aptos" pitchFamily="34" charset="0"/>
+                <a:ea typeface="Aptos" pitchFamily="34" charset="-122"/>
+                <a:cs typeface="Aptos" pitchFamily="34" charset="-120"/>
+              </a:rPr>
+              <a:t>ASPPH AI Framework Report: Public health framing for responsible AI education, research,.</a:t>
+            </a:r>
+            <a:endParaRPr lang="en-US" sz="1380" dirty="0"/>
+          </a:p>
+          <a:p>
+            <a:r>
+              <a:rPr lang="en-US" sz="1380" dirty="0">
+                <a:solidFill>
+                  <a:srgbClr val="17364A"/>
+                </a:solidFill>
+                <a:latin typeface="Aptos" pitchFamily="34" charset="0"/>
+                <a:ea typeface="Aptos" pitchFamily="34" charset="-122"/>
+                <a:cs typeface="Aptos" pitchFamily="34" charset="-120"/>
+              </a:rPr>
+              <a:t>WHO: Ethics and governance of artificial intelligence for health: Health-sector principles.</a:t>
+            </a:r>
+            <a:endParaRPr lang="en-US" sz="1380" dirty="0"/>
+          </a:p>
+          <a:p>
+            <a:r>
+              <a:rPr lang="en-US" sz="1380" dirty="0">
+                <a:solidFill>
+                  <a:srgbClr val="17364A"/>
+                </a:solidFill>
+                <a:latin typeface="Aptos" pitchFamily="34" charset="0"/>
+                <a:ea typeface="Aptos" pitchFamily="34" charset="-122"/>
+                <a:cs typeface="Aptos" pitchFamily="34" charset="-120"/>
+              </a:rPr>
+              <a:t>NIH PubMed: Primary source for biomedical and public health literature searches..</a:t>
+            </a:r>
+            <a:endParaRPr lang="en-US" sz="1380" dirty="0"/>
+          </a:p>
+        </p:txBody>
       </p:sp>
       <p:sp>
         <p:nvSpPr>
           <p:cNvPr id="16" name="Shape 14"/>
-          <p:cNvSpPr/>
-          <p:nvPr/>
-        </p:nvSpPr>
-        <p:spPr>
-          <a:xfrm>
-            <a:off x="9198864" y="4206240"/>
-            <a:ext cx="347472" cy="347472"/>
-          </a:xfrm>
-          <a:prstGeom prst="ellipse">
-            <a:avLst/>
-          </a:prstGeom>
-          <a:solidFill>
-            <a:srgbClr val="2F8A28"/>
-          </a:solidFill>
-          <a:ln w="12700">
-            <a:solidFill>
-              <a:srgbClr val="2F8A28"/>
-            </a:solidFill>
-            <a:prstDash val="solid"/>
-          </a:ln>
-        </p:spPr>
-      </p:sp>
-      <p:sp>
-        <p:nvSpPr>
-          <p:cNvPr id="17" name="Text 15"/>
-          <p:cNvSpPr/>
-          <p:nvPr/>
-        </p:nvSpPr>
-        <p:spPr>
-          <a:xfrm>
-            <a:off x="7909560" y="3977640"/>
-            <a:ext cx="2926080" cy="182880"/>
-          </a:xfrm>
-          <a:prstGeom prst="rect">
-            <a:avLst/>
-          </a:prstGeom>
-          <a:noFill/>
-          <a:ln/>
-        </p:spPr>
-        <p:txBody>
-          <a:bodyPr wrap="square" lIns="0" tIns="0" rIns="0" bIns="0" rtlCol="0" anchor="ctr"/>
-          <a:lstStyle/>
-          <a:p>
-            <a:pPr algn="ctr" indent="0" marL="0">
-              <a:buNone/>
-            </a:pPr>
-            <a:r>
-              <a:rPr lang="en-US" sz="1000" dirty="0">
-                <a:solidFill>
-                  <a:srgbClr val="003A63"/>
-                </a:solidFill>
-                <a:latin typeface="Aptos" pitchFamily="34" charset="0"/>
-                <a:ea typeface="Aptos" pitchFamily="34" charset="-122"/>
-                <a:cs typeface="Aptos" pitchFamily="34" charset="-120"/>
-              </a:rPr>
-              <a:t>Concept to action</a:t>
-            </a:r>
-            <a:endParaRPr lang="en-US" sz="1000" dirty="0"/>
-          </a:p>
-        </p:txBody>
-      </p:sp>
-      <p:sp>
-        <p:nvSpPr>
-          <p:cNvPr id="18" name="Shape 16"/>
           <p:cNvSpPr/>
           <p:nvPr/>
         </p:nvSpPr>
@@ -16033,7 +15502,7 @@
       </p:sp>
       <p:sp>
         <p:nvSpPr>
-          <p:cNvPr id="19" name="Text 17"/>
+          <p:cNvPr id="17" name="Text 15"/>
           <p:cNvSpPr/>
           <p:nvPr/>
         </p:nvSpPr>
@@ -16072,7 +15541,7 @@
       </p:sp>
       <p:sp>
         <p:nvSpPr>
-          <p:cNvPr id="20" name="Text 18"/>
+          <p:cNvPr id="18" name="Text 16"/>
           <p:cNvSpPr/>
           <p:nvPr/>
         </p:nvSpPr>
@@ -16552,13 +16021,11 @@
             </a:avLst>
           </a:prstGeom>
           <a:solidFill>
-            <a:srgbClr val="FFFFFF">
-              <a:alpha val="88000"/>
-            </a:srgbClr>
+            <a:srgbClr val="FFFFFF"/>
           </a:solidFill>
           <a:ln w="12700">
             <a:solidFill>
-              <a:srgbClr val="D6E8F2"/>
+              <a:srgbClr val="B9D7E6"/>
             </a:solidFill>
             <a:prstDash val="solid"/>
           </a:ln>
@@ -16566,119 +16033,84 @@
       </p:sp>
       <p:sp>
         <p:nvSpPr>
-          <p:cNvPr id="14" name="Shape 12"/>
-          <p:cNvSpPr/>
-          <p:nvPr/>
-        </p:nvSpPr>
-        <p:spPr>
-          <a:xfrm>
-            <a:off x="8074152" y="3291840"/>
-            <a:ext cx="2596896" cy="749808"/>
-          </a:xfrm>
-          <a:prstGeom prst="rect">
-            <a:avLst/>
-          </a:prstGeom>
-          <a:solidFill>
-            <a:srgbClr val="EAF6F8"/>
-          </a:solidFill>
-          <a:ln w="12700">
-            <a:solidFill>
-              <a:srgbClr val="8ABBD8"/>
-            </a:solidFill>
-            <a:prstDash val="solid"/>
-          </a:ln>
-        </p:spPr>
-      </p:sp>
-      <p:sp>
-        <p:nvSpPr>
-          <p:cNvPr id="15" name="Shape 13"/>
-          <p:cNvSpPr/>
-          <p:nvPr/>
-        </p:nvSpPr>
-        <p:spPr>
-          <a:xfrm>
-            <a:off x="8202168" y="3721608"/>
-            <a:ext cx="2340864" cy="0"/>
-          </a:xfrm>
-          <a:prstGeom prst="line">
-            <a:avLst/>
-          </a:prstGeom>
-          <a:noFill/>
-          <a:ln w="19050">
-            <a:solidFill>
-              <a:srgbClr val="0068B7"/>
-            </a:solidFill>
-            <a:prstDash val="solid"/>
-          </a:ln>
-        </p:spPr>
+          <p:cNvPr id="14" name="Text 12"/>
+          <p:cNvSpPr/>
+          <p:nvPr/>
+        </p:nvSpPr>
+        <p:spPr>
+          <a:xfrm>
+            <a:off x="7799832" y="2935224"/>
+            <a:ext cx="3145536" cy="256032"/>
+          </a:xfrm>
+          <a:prstGeom prst="rect">
+            <a:avLst/>
+          </a:prstGeom>
+          <a:noFill/>
+          <a:ln/>
+        </p:spPr>
+        <p:txBody>
+          <a:bodyPr wrap="square" lIns="0" tIns="0" rIns="0" bIns="0" rtlCol="0" anchor="ctr"/>
+          <a:lstStyle/>
+          <a:p>
+            <a:pPr indent="0" marL="0">
+              <a:buNone/>
+            </a:pPr>
+            <a:r>
+              <a:rPr lang="en-US" sz="1300" b="1" dirty="0">
+                <a:solidFill>
+                  <a:srgbClr val="0068B7"/>
+                </a:solidFill>
+                <a:latin typeface="Aptos" pitchFamily="34" charset="0"/>
+                <a:ea typeface="Aptos" pitchFamily="34" charset="-122"/>
+                <a:cs typeface="Aptos" pitchFamily="34" charset="-120"/>
+              </a:rPr>
+              <a:t>Concept checkpoints</a:t>
+            </a:r>
+            <a:endParaRPr lang="en-US" sz="1300" dirty="0"/>
+          </a:p>
+        </p:txBody>
+      </p:sp>
+      <p:sp>
+        <p:nvSpPr>
+          <p:cNvPr id="15" name="Text 13"/>
+          <p:cNvSpPr/>
+          <p:nvPr/>
+        </p:nvSpPr>
+        <p:spPr>
+          <a:xfrm>
+            <a:off x="7818120" y="3300984"/>
+            <a:ext cx="3090672" cy="877824"/>
+          </a:xfrm>
+          <a:prstGeom prst="rect">
+            <a:avLst/>
+          </a:prstGeom>
+          <a:noFill/>
+          <a:ln/>
+        </p:spPr>
+        <p:txBody>
+          <a:bodyPr wrap="square" lIns="254" tIns="254" rIns="254" bIns="254" rtlCol="0" anchor="t">
+            <a:normAutofit/>
+          </a:bodyPr>
+          <a:lstStyle/>
+          <a:p>
+            <a:r>
+              <a:rPr lang="en-US" sz="1380" dirty="0">
+                <a:solidFill>
+                  <a:srgbClr val="17364A"/>
+                </a:solidFill>
+                <a:latin typeface="Aptos" pitchFamily="34" charset="0"/>
+                <a:ea typeface="Aptos" pitchFamily="34" charset="-122"/>
+                <a:cs typeface="Aptos" pitchFamily="34" charset="-120"/>
+              </a:rPr>
+              <a:t>ASPPH AI Framework Report: Framework language for responsible use of AI-supported research.</a:t>
+            </a:r>
+            <a:endParaRPr lang="en-US" sz="1380" dirty="0"/>
+          </a:p>
+        </p:txBody>
       </p:sp>
       <p:sp>
         <p:nvSpPr>
           <p:cNvPr id="16" name="Shape 14"/>
-          <p:cNvSpPr/>
-          <p:nvPr/>
-        </p:nvSpPr>
-        <p:spPr>
-          <a:xfrm>
-            <a:off x="9198864" y="4206240"/>
-            <a:ext cx="347472" cy="347472"/>
-          </a:xfrm>
-          <a:prstGeom prst="ellipse">
-            <a:avLst/>
-          </a:prstGeom>
-          <a:solidFill>
-            <a:srgbClr val="2F8A28"/>
-          </a:solidFill>
-          <a:ln w="12700">
-            <a:solidFill>
-              <a:srgbClr val="2F8A28"/>
-            </a:solidFill>
-            <a:prstDash val="solid"/>
-          </a:ln>
-        </p:spPr>
-      </p:sp>
-      <p:sp>
-        <p:nvSpPr>
-          <p:cNvPr id="17" name="Text 15"/>
-          <p:cNvSpPr/>
-          <p:nvPr/>
-        </p:nvSpPr>
-        <p:spPr>
-          <a:xfrm>
-            <a:off x="7909560" y="3977640"/>
-            <a:ext cx="2926080" cy="182880"/>
-          </a:xfrm>
-          <a:prstGeom prst="rect">
-            <a:avLst/>
-          </a:prstGeom>
-          <a:noFill/>
-          <a:ln/>
-        </p:spPr>
-        <p:txBody>
-          <a:bodyPr wrap="square" lIns="0" tIns="0" rIns="0" bIns="0" rtlCol="0" anchor="ctr"/>
-          <a:lstStyle/>
-          <a:p>
-            <a:pPr algn="ctr" indent="0" marL="0">
-              <a:buNone/>
-            </a:pPr>
-            <a:r>
-              <a:rPr lang="en-US" sz="1000" dirty="0">
-                <a:solidFill>
-                  <a:srgbClr val="003A63"/>
-                </a:solidFill>
-                <a:latin typeface="Aptos" pitchFamily="34" charset="0"/>
-                <a:ea typeface="Aptos" pitchFamily="34" charset="-122"/>
-                <a:cs typeface="Aptos" pitchFamily="34" charset="-120"/>
-              </a:rPr>
-              <a:t>Concept to action</a:t>
-            </a:r>
-            <a:endParaRPr lang="en-US" sz="1000" dirty="0"/>
-          </a:p>
-        </p:txBody>
-      </p:sp>
-      <p:sp>
-        <p:nvSpPr>
-          <p:cNvPr id="18" name="Shape 16"/>
           <p:cNvSpPr/>
           <p:nvPr/>
         </p:nvSpPr>
@@ -16705,7 +16137,7 @@
       </p:sp>
       <p:sp>
         <p:nvSpPr>
-          <p:cNvPr id="19" name="Text 17"/>
+          <p:cNvPr id="17" name="Text 15"/>
           <p:cNvSpPr/>
           <p:nvPr/>
         </p:nvSpPr>
@@ -16744,7 +16176,7 @@
       </p:sp>
       <p:sp>
         <p:nvSpPr>
-          <p:cNvPr id="20" name="Text 18"/>
+          <p:cNvPr id="18" name="Text 16"/>
           <p:cNvSpPr/>
           <p:nvPr/>
         </p:nvSpPr>
@@ -17243,20 +16675,20 @@
         </p:nvSpPr>
         <p:spPr>
           <a:xfrm>
-            <a:off x="7818120" y="3977640"/>
-            <a:ext cx="972312" cy="749808"/>
+            <a:off x="8046720" y="3794760"/>
+            <a:ext cx="3063240" cy="1600200"/>
           </a:xfrm>
           <a:prstGeom prst="roundRect">
             <a:avLst>
-              <a:gd name="adj" fmla="val 14634"/>
+              <a:gd name="adj" fmla="val 6857"/>
             </a:avLst>
           </a:prstGeom>
           <a:solidFill>
-            <a:srgbClr val="0068B7"/>
+            <a:srgbClr val="FFFFFF"/>
           </a:solidFill>
           <a:ln w="12700">
             <a:solidFill>
-              <a:srgbClr val="0068B7"/>
+              <a:srgbClr val="B9D7E6"/>
             </a:solidFill>
             <a:prstDash val="solid"/>
           </a:ln>
@@ -17270,172 +16702,100 @@
         </p:nvSpPr>
         <p:spPr>
           <a:xfrm>
-            <a:off x="7891272" y="4169664"/>
-            <a:ext cx="826008" cy="310896"/>
-          </a:xfrm>
-          <a:prstGeom prst="rect">
-            <a:avLst/>
-          </a:prstGeom>
-          <a:noFill/>
-          <a:ln/>
-        </p:spPr>
-        <p:txBody>
-          <a:bodyPr wrap="square" lIns="0" tIns="0" rIns="0" bIns="0" rtlCol="0" anchor="ctr">
+            <a:off x="8211312" y="3941064"/>
+            <a:ext cx="2734056" cy="256032"/>
+          </a:xfrm>
+          <a:prstGeom prst="rect">
+            <a:avLst/>
+          </a:prstGeom>
+          <a:noFill/>
+          <a:ln/>
+        </p:spPr>
+        <p:txBody>
+          <a:bodyPr wrap="square" lIns="0" tIns="0" rIns="0" bIns="0" rtlCol="0" anchor="ctr"/>
+          <a:lstStyle/>
+          <a:p>
+            <a:pPr indent="0" marL="0">
+              <a:buNone/>
+            </a:pPr>
+            <a:r>
+              <a:rPr lang="en-US" sz="1300" b="1" dirty="0">
+                <a:solidFill>
+                  <a:srgbClr val="0068B7"/>
+                </a:solidFill>
+                <a:latin typeface="Aptos" pitchFamily="34" charset="0"/>
+                <a:ea typeface="Aptos" pitchFamily="34" charset="-122"/>
+                <a:cs typeface="Aptos" pitchFamily="34" charset="-120"/>
+              </a:rPr>
+              <a:t>Use the play links to</a:t>
+            </a:r>
+            <a:endParaRPr lang="en-US" sz="1300" dirty="0"/>
+          </a:p>
+        </p:txBody>
+      </p:sp>
+      <p:sp>
+        <p:nvSpPr>
+          <p:cNvPr id="15" name="Text 13"/>
+          <p:cNvSpPr/>
+          <p:nvPr/>
+        </p:nvSpPr>
+        <p:spPr>
+          <a:xfrm>
+            <a:off x="8229600" y="4306824"/>
+            <a:ext cx="2679192" cy="941832"/>
+          </a:xfrm>
+          <a:prstGeom prst="rect">
+            <a:avLst/>
+          </a:prstGeom>
+          <a:noFill/>
+          <a:ln/>
+        </p:spPr>
+        <p:txBody>
+          <a:bodyPr wrap="square" lIns="254" tIns="254" rIns="254" bIns="254" rtlCol="0" anchor="t">
             <a:normAutofit/>
           </a:bodyPr>
           <a:lstStyle/>
           <a:p>
-            <a:pPr algn="ctr" indent="0" marL="0">
-              <a:buNone/>
-            </a:pPr>
-            <a:r>
-              <a:rPr lang="en-US" sz="1500" b="1" dirty="0">
-                <a:solidFill>
-                  <a:srgbClr val="FFFFFF"/>
-                </a:solidFill>
-                <a:latin typeface="Aptos" pitchFamily="34" charset="0"/>
-                <a:ea typeface="Aptos" pitchFamily="34" charset="-122"/>
-                <a:cs typeface="Aptos" pitchFamily="34" charset="-120"/>
-              </a:rPr>
-              <a:t>Lesson</a:t>
-            </a:r>
-            <a:endParaRPr lang="en-US" sz="1500" dirty="0"/>
-          </a:p>
-        </p:txBody>
-      </p:sp>
-      <p:sp>
-        <p:nvSpPr>
-          <p:cNvPr id="15" name="Shape 13"/>
-          <p:cNvSpPr/>
-          <p:nvPr/>
-        </p:nvSpPr>
-        <p:spPr>
-          <a:xfrm>
-            <a:off x="9046464" y="3977640"/>
-            <a:ext cx="972312" cy="749808"/>
-          </a:xfrm>
-          <a:prstGeom prst="roundRect">
-            <a:avLst>
-              <a:gd name="adj" fmla="val 14634"/>
-            </a:avLst>
-          </a:prstGeom>
-          <a:solidFill>
-            <a:srgbClr val="2F8A28"/>
-          </a:solidFill>
-          <a:ln w="12700">
-            <a:solidFill>
-              <a:srgbClr val="2F8A28"/>
-            </a:solidFill>
-            <a:prstDash val="solid"/>
-          </a:ln>
-        </p:spPr>
-      </p:sp>
-      <p:sp>
-        <p:nvSpPr>
-          <p:cNvPr id="16" name="Text 14"/>
-          <p:cNvSpPr/>
-          <p:nvPr/>
-        </p:nvSpPr>
-        <p:spPr>
-          <a:xfrm>
-            <a:off x="9119616" y="4169664"/>
-            <a:ext cx="826008" cy="310896"/>
-          </a:xfrm>
-          <a:prstGeom prst="rect">
-            <a:avLst/>
-          </a:prstGeom>
-          <a:noFill/>
-          <a:ln/>
-        </p:spPr>
-        <p:txBody>
-          <a:bodyPr wrap="square" lIns="0" tIns="0" rIns="0" bIns="0" rtlCol="0" anchor="ctr">
-            <a:normAutofit/>
-          </a:bodyPr>
-          <a:lstStyle/>
-          <a:p>
-            <a:pPr algn="ctr" indent="0" marL="0">
-              <a:buNone/>
-            </a:pPr>
-            <a:r>
-              <a:rPr lang="en-US" sz="1500" b="1" dirty="0">
-                <a:solidFill>
-                  <a:srgbClr val="FFFFFF"/>
-                </a:solidFill>
-                <a:latin typeface="Aptos" pitchFamily="34" charset="0"/>
-                <a:ea typeface="Aptos" pitchFamily="34" charset="-122"/>
-                <a:cs typeface="Aptos" pitchFamily="34" charset="-120"/>
-              </a:rPr>
-              <a:t>Plays</a:t>
-            </a:r>
-            <a:endParaRPr lang="en-US" sz="1500" dirty="0"/>
-          </a:p>
-        </p:txBody>
-      </p:sp>
-      <p:sp>
-        <p:nvSpPr>
-          <p:cNvPr id="17" name="Shape 15"/>
-          <p:cNvSpPr/>
-          <p:nvPr/>
-        </p:nvSpPr>
-        <p:spPr>
-          <a:xfrm>
-            <a:off x="10274808" y="3977640"/>
-            <a:ext cx="972312" cy="749808"/>
-          </a:xfrm>
-          <a:prstGeom prst="roundRect">
-            <a:avLst>
-              <a:gd name="adj" fmla="val 14634"/>
-            </a:avLst>
-          </a:prstGeom>
-          <a:solidFill>
-            <a:srgbClr val="6A4CA3"/>
-          </a:solidFill>
-          <a:ln w="12700">
-            <a:solidFill>
-              <a:srgbClr val="6A4CA3"/>
-            </a:solidFill>
-            <a:prstDash val="solid"/>
-          </a:ln>
-        </p:spPr>
-      </p:sp>
-      <p:sp>
-        <p:nvSpPr>
-          <p:cNvPr id="18" name="Text 16"/>
-          <p:cNvSpPr/>
-          <p:nvPr/>
-        </p:nvSpPr>
-        <p:spPr>
-          <a:xfrm>
-            <a:off x="10347960" y="4169664"/>
-            <a:ext cx="826008" cy="310896"/>
-          </a:xfrm>
-          <a:prstGeom prst="rect">
-            <a:avLst/>
-          </a:prstGeom>
-          <a:noFill/>
-          <a:ln/>
-        </p:spPr>
-        <p:txBody>
-          <a:bodyPr wrap="square" lIns="0" tIns="0" rIns="0" bIns="0" rtlCol="0" anchor="ctr">
-            <a:normAutofit/>
-          </a:bodyPr>
-          <a:lstStyle/>
-          <a:p>
-            <a:pPr algn="ctr" indent="0" marL="0">
-              <a:buNone/>
-            </a:pPr>
-            <a:r>
-              <a:rPr lang="en-US" sz="1500" b="1" dirty="0">
-                <a:solidFill>
-                  <a:srgbClr val="FFFFFF"/>
-                </a:solidFill>
-                <a:latin typeface="Aptos" pitchFamily="34" charset="0"/>
-                <a:ea typeface="Aptos" pitchFamily="34" charset="-122"/>
-                <a:cs typeface="Aptos" pitchFamily="34" charset="-120"/>
-              </a:rPr>
-              <a:t>Action</a:t>
-            </a:r>
-            <a:endParaRPr lang="en-US" sz="1500" dirty="0"/>
+            <a:r>
+              <a:rPr lang="en-US" sz="1380" dirty="0">
+                <a:solidFill>
+                  <a:srgbClr val="17364A"/>
+                </a:solidFill>
+                <a:latin typeface="Aptos" pitchFamily="34" charset="0"/>
+                <a:ea typeface="Aptos" pitchFamily="34" charset="-122"/>
+                <a:cs typeface="Aptos" pitchFamily="34" charset="-120"/>
+              </a:rPr>
+              <a:t>Locate the decision point in the playbook sequence.</a:t>
+            </a:r>
+            <a:endParaRPr lang="en-US" sz="1380" dirty="0"/>
+          </a:p>
+          <a:p>
+            <a:r>
+              <a:rPr lang="en-US" sz="1380" dirty="0">
+                <a:solidFill>
+                  <a:srgbClr val="17364A"/>
+                </a:solidFill>
+                <a:latin typeface="Aptos" pitchFamily="34" charset="0"/>
+                <a:ea typeface="Aptos" pitchFamily="34" charset="-122"/>
+                <a:cs typeface="Aptos" pitchFamily="34" charset="-120"/>
+              </a:rPr>
+              <a:t>Identify who should participate in the work.</a:t>
+            </a:r>
+            <a:endParaRPr lang="en-US" sz="1380" dirty="0"/>
+          </a:p>
+          <a:p>
+            <a:r>
+              <a:rPr lang="en-US" sz="1380" dirty="0">
+                <a:solidFill>
+                  <a:srgbClr val="17364A"/>
+                </a:solidFill>
+                <a:latin typeface="Aptos" pitchFamily="34" charset="0"/>
+                <a:ea typeface="Aptos" pitchFamily="34" charset="-122"/>
+                <a:cs typeface="Aptos" pitchFamily="34" charset="-120"/>
+              </a:rPr>
+              <a:t>Document the review, approval, or implementation step.</a:t>
+            </a:r>
+            <a:endParaRPr lang="en-US" sz="1380" dirty="0"/>
           </a:p>
         </p:txBody>
       </p:sp>
@@ -17885,20 +17245,20 @@
         </p:nvSpPr>
         <p:spPr>
           <a:xfrm>
-            <a:off x="7818120" y="3977640"/>
-            <a:ext cx="972312" cy="749808"/>
+            <a:off x="8046720" y="3794760"/>
+            <a:ext cx="3063240" cy="1600200"/>
           </a:xfrm>
           <a:prstGeom prst="roundRect">
             <a:avLst>
-              <a:gd name="adj" fmla="val 14634"/>
+              <a:gd name="adj" fmla="val 6857"/>
             </a:avLst>
           </a:prstGeom>
           <a:solidFill>
-            <a:srgbClr val="0068B7"/>
+            <a:srgbClr val="FFFFFF"/>
           </a:solidFill>
           <a:ln w="12700">
             <a:solidFill>
-              <a:srgbClr val="0068B7"/>
+              <a:srgbClr val="B9D7E6"/>
             </a:solidFill>
             <a:prstDash val="solid"/>
           </a:ln>
@@ -17912,172 +17272,100 @@
         </p:nvSpPr>
         <p:spPr>
           <a:xfrm>
-            <a:off x="7891272" y="4169664"/>
-            <a:ext cx="826008" cy="310896"/>
-          </a:xfrm>
-          <a:prstGeom prst="rect">
-            <a:avLst/>
-          </a:prstGeom>
-          <a:noFill/>
-          <a:ln/>
-        </p:spPr>
-        <p:txBody>
-          <a:bodyPr wrap="square" lIns="0" tIns="0" rIns="0" bIns="0" rtlCol="0" anchor="ctr">
+            <a:off x="8211312" y="3941064"/>
+            <a:ext cx="2734056" cy="256032"/>
+          </a:xfrm>
+          <a:prstGeom prst="rect">
+            <a:avLst/>
+          </a:prstGeom>
+          <a:noFill/>
+          <a:ln/>
+        </p:spPr>
+        <p:txBody>
+          <a:bodyPr wrap="square" lIns="0" tIns="0" rIns="0" bIns="0" rtlCol="0" anchor="ctr"/>
+          <a:lstStyle/>
+          <a:p>
+            <a:pPr indent="0" marL="0">
+              <a:buNone/>
+            </a:pPr>
+            <a:r>
+              <a:rPr lang="en-US" sz="1300" b="1" dirty="0">
+                <a:solidFill>
+                  <a:srgbClr val="0068B7"/>
+                </a:solidFill>
+                <a:latin typeface="Aptos" pitchFamily="34" charset="0"/>
+                <a:ea typeface="Aptos" pitchFamily="34" charset="-122"/>
+                <a:cs typeface="Aptos" pitchFamily="34" charset="-120"/>
+              </a:rPr>
+              <a:t>Tool selection cues</a:t>
+            </a:r>
+            <a:endParaRPr lang="en-US" sz="1300" dirty="0"/>
+          </a:p>
+        </p:txBody>
+      </p:sp>
+      <p:sp>
+        <p:nvSpPr>
+          <p:cNvPr id="15" name="Text 13"/>
+          <p:cNvSpPr/>
+          <p:nvPr/>
+        </p:nvSpPr>
+        <p:spPr>
+          <a:xfrm>
+            <a:off x="8229600" y="4306824"/>
+            <a:ext cx="2679192" cy="941832"/>
+          </a:xfrm>
+          <a:prstGeom prst="rect">
+            <a:avLst/>
+          </a:prstGeom>
+          <a:noFill/>
+          <a:ln/>
+        </p:spPr>
+        <p:txBody>
+          <a:bodyPr wrap="square" lIns="254" tIns="254" rIns="254" bIns="254" rtlCol="0" anchor="t">
             <a:normAutofit/>
           </a:bodyPr>
           <a:lstStyle/>
           <a:p>
-            <a:pPr algn="ctr" indent="0" marL="0">
-              <a:buNone/>
-            </a:pPr>
-            <a:r>
-              <a:rPr lang="en-US" sz="1500" b="1" dirty="0">
-                <a:solidFill>
-                  <a:srgbClr val="FFFFFF"/>
-                </a:solidFill>
-                <a:latin typeface="Aptos" pitchFamily="34" charset="0"/>
-                <a:ea typeface="Aptos" pitchFamily="34" charset="-122"/>
-                <a:cs typeface="Aptos" pitchFamily="34" charset="-120"/>
-              </a:rPr>
-              <a:t>Concept</a:t>
-            </a:r>
-            <a:endParaRPr lang="en-US" sz="1500" dirty="0"/>
-          </a:p>
-        </p:txBody>
-      </p:sp>
-      <p:sp>
-        <p:nvSpPr>
-          <p:cNvPr id="15" name="Shape 13"/>
-          <p:cNvSpPr/>
-          <p:nvPr/>
-        </p:nvSpPr>
-        <p:spPr>
-          <a:xfrm>
-            <a:off x="9046464" y="3977640"/>
-            <a:ext cx="972312" cy="749808"/>
-          </a:xfrm>
-          <a:prstGeom prst="roundRect">
-            <a:avLst>
-              <a:gd name="adj" fmla="val 14634"/>
-            </a:avLst>
-          </a:prstGeom>
-          <a:solidFill>
-            <a:srgbClr val="2F8A28"/>
-          </a:solidFill>
-          <a:ln w="12700">
-            <a:solidFill>
-              <a:srgbClr val="2F8A28"/>
-            </a:solidFill>
-            <a:prstDash val="solid"/>
-          </a:ln>
-        </p:spPr>
-      </p:sp>
-      <p:sp>
-        <p:nvSpPr>
-          <p:cNvPr id="16" name="Text 14"/>
-          <p:cNvSpPr/>
-          <p:nvPr/>
-        </p:nvSpPr>
-        <p:spPr>
-          <a:xfrm>
-            <a:off x="9119616" y="4169664"/>
-            <a:ext cx="826008" cy="310896"/>
-          </a:xfrm>
-          <a:prstGeom prst="rect">
-            <a:avLst/>
-          </a:prstGeom>
-          <a:noFill/>
-          <a:ln/>
-        </p:spPr>
-        <p:txBody>
-          <a:bodyPr wrap="square" lIns="0" tIns="0" rIns="0" bIns="0" rtlCol="0" anchor="ctr">
-            <a:normAutofit/>
-          </a:bodyPr>
-          <a:lstStyle/>
-          <a:p>
-            <a:pPr algn="ctr" indent="0" marL="0">
-              <a:buNone/>
-            </a:pPr>
-            <a:r>
-              <a:rPr lang="en-US" sz="1500" b="1" dirty="0">
-                <a:solidFill>
-                  <a:srgbClr val="FFFFFF"/>
-                </a:solidFill>
-                <a:latin typeface="Aptos" pitchFamily="34" charset="0"/>
-                <a:ea typeface="Aptos" pitchFamily="34" charset="-122"/>
-                <a:cs typeface="Aptos" pitchFamily="34" charset="-120"/>
-              </a:rPr>
-              <a:t>Tool</a:t>
-            </a:r>
-            <a:endParaRPr lang="en-US" sz="1500" dirty="0"/>
-          </a:p>
-        </p:txBody>
-      </p:sp>
-      <p:sp>
-        <p:nvSpPr>
-          <p:cNvPr id="17" name="Shape 15"/>
-          <p:cNvSpPr/>
-          <p:nvPr/>
-        </p:nvSpPr>
-        <p:spPr>
-          <a:xfrm>
-            <a:off x="10274808" y="3977640"/>
-            <a:ext cx="972312" cy="749808"/>
-          </a:xfrm>
-          <a:prstGeom prst="roundRect">
-            <a:avLst>
-              <a:gd name="adj" fmla="val 14634"/>
-            </a:avLst>
-          </a:prstGeom>
-          <a:solidFill>
-            <a:srgbClr val="D69A2D"/>
-          </a:solidFill>
-          <a:ln w="12700">
-            <a:solidFill>
-              <a:srgbClr val="D69A2D"/>
-            </a:solidFill>
-            <a:prstDash val="solid"/>
-          </a:ln>
-        </p:spPr>
-      </p:sp>
-      <p:sp>
-        <p:nvSpPr>
-          <p:cNvPr id="18" name="Text 16"/>
-          <p:cNvSpPr/>
-          <p:nvPr/>
-        </p:nvSpPr>
-        <p:spPr>
-          <a:xfrm>
-            <a:off x="10347960" y="4169664"/>
-            <a:ext cx="826008" cy="310896"/>
-          </a:xfrm>
-          <a:prstGeom prst="rect">
-            <a:avLst/>
-          </a:prstGeom>
-          <a:noFill/>
-          <a:ln/>
-        </p:spPr>
-        <p:txBody>
-          <a:bodyPr wrap="square" lIns="0" tIns="0" rIns="0" bIns="0" rtlCol="0" anchor="ctr">
-            <a:normAutofit/>
-          </a:bodyPr>
-          <a:lstStyle/>
-          <a:p>
-            <a:pPr algn="ctr" indent="0" marL="0">
-              <a:buNone/>
-            </a:pPr>
-            <a:r>
-              <a:rPr lang="en-US" sz="1500" b="1" dirty="0">
-                <a:solidFill>
-                  <a:srgbClr val="FFFFFF"/>
-                </a:solidFill>
-                <a:latin typeface="Aptos" pitchFamily="34" charset="0"/>
-                <a:ea typeface="Aptos" pitchFamily="34" charset="-122"/>
-                <a:cs typeface="Aptos" pitchFamily="34" charset="-120"/>
-              </a:rPr>
-              <a:t>Artifact</a:t>
-            </a:r>
-            <a:endParaRPr lang="en-US" sz="1500" dirty="0"/>
+            <a:r>
+              <a:rPr lang="en-US" sz="1380" dirty="0">
+                <a:solidFill>
+                  <a:srgbClr val="17364A"/>
+                </a:solidFill>
+                <a:latin typeface="Aptos" pitchFamily="34" charset="0"/>
+                <a:ea typeface="Aptos" pitchFamily="34" charset="-122"/>
+                <a:cs typeface="Aptos" pitchFamily="34" charset="-120"/>
+              </a:rPr>
+              <a:t>Use a tool when no comparable local process exists.</a:t>
+            </a:r>
+            <a:endParaRPr lang="en-US" sz="1380" dirty="0"/>
+          </a:p>
+          <a:p>
+            <a:r>
+              <a:rPr lang="en-US" sz="1380" dirty="0">
+                <a:solidFill>
+                  <a:srgbClr val="17364A"/>
+                </a:solidFill>
+                <a:latin typeface="Aptos" pitchFamily="34" charset="0"/>
+                <a:ea typeface="Aptos" pitchFamily="34" charset="-122"/>
+                <a:cs typeface="Aptos" pitchFamily="34" charset="-120"/>
+              </a:rPr>
+              <a:t>Adapt existing department templates when they already fit the purpose.</a:t>
+            </a:r>
+            <a:endParaRPr lang="en-US" sz="1380" dirty="0"/>
+          </a:p>
+          <a:p>
+            <a:r>
+              <a:rPr lang="en-US" sz="1380" dirty="0">
+                <a:solidFill>
+                  <a:srgbClr val="17364A"/>
+                </a:solidFill>
+                <a:latin typeface="Aptos" pitchFamily="34" charset="0"/>
+                <a:ea typeface="Aptos" pitchFamily="34" charset="-122"/>
+                <a:cs typeface="Aptos" pitchFamily="34" charset="-120"/>
+              </a:rPr>
+              <a:t>Save the completed artifact as evidence of the decision.</a:t>
+            </a:r>
+            <a:endParaRPr lang="en-US" sz="1380" dirty="0"/>
           </a:p>
         </p:txBody>
       </p:sp>
@@ -18550,13 +17838,11 @@
             </a:avLst>
           </a:prstGeom>
           <a:solidFill>
-            <a:srgbClr val="FFFFFF">
-              <a:alpha val="88000"/>
-            </a:srgbClr>
+            <a:srgbClr val="FFFFFF"/>
           </a:solidFill>
           <a:ln w="12700">
             <a:solidFill>
-              <a:srgbClr val="D6E8F2"/>
+              <a:srgbClr val="B9D7E6"/>
             </a:solidFill>
             <a:prstDash val="solid"/>
           </a:ln>
@@ -18564,119 +17850,112 @@
       </p:sp>
       <p:sp>
         <p:nvSpPr>
-          <p:cNvPr id="14" name="Shape 12"/>
-          <p:cNvSpPr/>
-          <p:nvPr/>
-        </p:nvSpPr>
-        <p:spPr>
-          <a:xfrm>
-            <a:off x="8074152" y="3291840"/>
-            <a:ext cx="2596896" cy="749808"/>
-          </a:xfrm>
-          <a:prstGeom prst="rect">
-            <a:avLst/>
-          </a:prstGeom>
-          <a:solidFill>
-            <a:srgbClr val="EAF6F8"/>
-          </a:solidFill>
-          <a:ln w="12700">
-            <a:solidFill>
-              <a:srgbClr val="8ABBD8"/>
-            </a:solidFill>
-            <a:prstDash val="solid"/>
-          </a:ln>
-        </p:spPr>
-      </p:sp>
-      <p:sp>
-        <p:nvSpPr>
-          <p:cNvPr id="15" name="Shape 13"/>
-          <p:cNvSpPr/>
-          <p:nvPr/>
-        </p:nvSpPr>
-        <p:spPr>
-          <a:xfrm>
-            <a:off x="8202168" y="3721608"/>
-            <a:ext cx="2340864" cy="0"/>
-          </a:xfrm>
-          <a:prstGeom prst="line">
-            <a:avLst/>
-          </a:prstGeom>
-          <a:noFill/>
-          <a:ln w="19050">
-            <a:solidFill>
-              <a:srgbClr val="0068B7"/>
-            </a:solidFill>
-            <a:prstDash val="solid"/>
-          </a:ln>
-        </p:spPr>
+          <p:cNvPr id="14" name="Text 12"/>
+          <p:cNvSpPr/>
+          <p:nvPr/>
+        </p:nvSpPr>
+        <p:spPr>
+          <a:xfrm>
+            <a:off x="7799832" y="2935224"/>
+            <a:ext cx="3145536" cy="256032"/>
+          </a:xfrm>
+          <a:prstGeom prst="rect">
+            <a:avLst/>
+          </a:prstGeom>
+          <a:noFill/>
+          <a:ln/>
+        </p:spPr>
+        <p:txBody>
+          <a:bodyPr wrap="square" lIns="0" tIns="0" rIns="0" bIns="0" rtlCol="0" anchor="ctr"/>
+          <a:lstStyle/>
+          <a:p>
+            <a:pPr indent="0" marL="0">
+              <a:buNone/>
+            </a:pPr>
+            <a:r>
+              <a:rPr lang="en-US" sz="1300" b="1" dirty="0">
+                <a:solidFill>
+                  <a:srgbClr val="0068B7"/>
+                </a:solidFill>
+                <a:latin typeface="Aptos" pitchFamily="34" charset="0"/>
+                <a:ea typeface="Aptos" pitchFamily="34" charset="-122"/>
+                <a:cs typeface="Aptos" pitchFamily="34" charset="-120"/>
+              </a:rPr>
+              <a:t>Concept checkpoints</a:t>
+            </a:r>
+            <a:endParaRPr lang="en-US" sz="1300" dirty="0"/>
+          </a:p>
+        </p:txBody>
+      </p:sp>
+      <p:sp>
+        <p:nvSpPr>
+          <p:cNvPr id="15" name="Text 13"/>
+          <p:cNvSpPr/>
+          <p:nvPr/>
+        </p:nvSpPr>
+        <p:spPr>
+          <a:xfrm>
+            <a:off x="7818120" y="3300984"/>
+            <a:ext cx="3090672" cy="877824"/>
+          </a:xfrm>
+          <a:prstGeom prst="rect">
+            <a:avLst/>
+          </a:prstGeom>
+          <a:noFill/>
+          <a:ln/>
+        </p:spPr>
+        <p:txBody>
+          <a:bodyPr wrap="square" lIns="254" tIns="254" rIns="254" bIns="254" rtlCol="0" anchor="t">
+            <a:normAutofit/>
+          </a:bodyPr>
+          <a:lstStyle/>
+          <a:p>
+            <a:r>
+              <a:rPr lang="en-US" sz="1380" dirty="0">
+                <a:solidFill>
+                  <a:srgbClr val="17364A"/>
+                </a:solidFill>
+                <a:latin typeface="Aptos" pitchFamily="34" charset="0"/>
+                <a:ea typeface="Aptos" pitchFamily="34" charset="-122"/>
+                <a:cs typeface="Aptos" pitchFamily="34" charset="-120"/>
+              </a:rPr>
+              <a:t>Identify where the concept affects AI planning, governance, procurement, implementation,.</a:t>
+            </a:r>
+            <a:endParaRPr lang="en-US" sz="1380" dirty="0"/>
+          </a:p>
+          <a:p>
+            <a:r>
+              <a:rPr lang="en-US" sz="1380" dirty="0">
+                <a:solidFill>
+                  <a:srgbClr val="17364A"/>
+                </a:solidFill>
+                <a:latin typeface="Aptos" pitchFamily="34" charset="0"/>
+                <a:ea typeface="Aptos" pitchFamily="34" charset="-122"/>
+                <a:cs typeface="Aptos" pitchFamily="34" charset="-120"/>
+              </a:rPr>
+              <a:t>Apply the concept to a concrete public health workflow using the linked plays, tools,.</a:t>
+            </a:r>
+            <a:endParaRPr lang="en-US" sz="1380" dirty="0"/>
+          </a:p>
+          <a:p>
+            <a:r>
+              <a:rPr lang="en-US" sz="1380" dirty="0">
+                <a:solidFill>
+                  <a:srgbClr val="17364A"/>
+                </a:solidFill>
+                <a:latin typeface="Aptos" pitchFamily="34" charset="0"/>
+                <a:ea typeface="Aptos" pitchFamily="34" charset="-122"/>
+                <a:cs typeface="Aptos" pitchFamily="34" charset="-120"/>
+              </a:rPr>
+              <a:t>Complete a practical activity that produces an artifact you can use in readiness.</a:t>
+            </a:r>
+            <a:endParaRPr lang="en-US" sz="1380" dirty="0"/>
+          </a:p>
+        </p:txBody>
       </p:sp>
       <p:sp>
         <p:nvSpPr>
           <p:cNvPr id="16" name="Shape 14"/>
-          <p:cNvSpPr/>
-          <p:nvPr/>
-        </p:nvSpPr>
-        <p:spPr>
-          <a:xfrm>
-            <a:off x="9198864" y="4206240"/>
-            <a:ext cx="347472" cy="347472"/>
-          </a:xfrm>
-          <a:prstGeom prst="ellipse">
-            <a:avLst/>
-          </a:prstGeom>
-          <a:solidFill>
-            <a:srgbClr val="2F8A28"/>
-          </a:solidFill>
-          <a:ln w="12700">
-            <a:solidFill>
-              <a:srgbClr val="2F8A28"/>
-            </a:solidFill>
-            <a:prstDash val="solid"/>
-          </a:ln>
-        </p:spPr>
-      </p:sp>
-      <p:sp>
-        <p:nvSpPr>
-          <p:cNvPr id="17" name="Text 15"/>
-          <p:cNvSpPr/>
-          <p:nvPr/>
-        </p:nvSpPr>
-        <p:spPr>
-          <a:xfrm>
-            <a:off x="7909560" y="3977640"/>
-            <a:ext cx="2926080" cy="182880"/>
-          </a:xfrm>
-          <a:prstGeom prst="rect">
-            <a:avLst/>
-          </a:prstGeom>
-          <a:noFill/>
-          <a:ln/>
-        </p:spPr>
-        <p:txBody>
-          <a:bodyPr wrap="square" lIns="0" tIns="0" rIns="0" bIns="0" rtlCol="0" anchor="ctr"/>
-          <a:lstStyle/>
-          <a:p>
-            <a:pPr algn="ctr" indent="0" marL="0">
-              <a:buNone/>
-            </a:pPr>
-            <a:r>
-              <a:rPr lang="en-US" sz="1000" dirty="0">
-                <a:solidFill>
-                  <a:srgbClr val="003A63"/>
-                </a:solidFill>
-                <a:latin typeface="Aptos" pitchFamily="34" charset="0"/>
-                <a:ea typeface="Aptos" pitchFamily="34" charset="-122"/>
-                <a:cs typeface="Aptos" pitchFamily="34" charset="-120"/>
-              </a:rPr>
-              <a:t>Concept to action</a:t>
-            </a:r>
-            <a:endParaRPr lang="en-US" sz="1000" dirty="0"/>
-          </a:p>
-        </p:txBody>
-      </p:sp>
-      <p:sp>
-        <p:nvSpPr>
-          <p:cNvPr id="18" name="Shape 16"/>
           <p:cNvSpPr/>
           <p:nvPr/>
         </p:nvSpPr>
@@ -18703,7 +17982,7 @@
       </p:sp>
       <p:sp>
         <p:nvSpPr>
-          <p:cNvPr id="19" name="Text 17"/>
+          <p:cNvPr id="17" name="Text 15"/>
           <p:cNvSpPr/>
           <p:nvPr/>
         </p:nvSpPr>
@@ -18742,7 +18021,7 @@
       </p:sp>
       <p:sp>
         <p:nvSpPr>
-          <p:cNvPr id="20" name="Text 18"/>
+          <p:cNvPr id="18" name="Text 16"/>
           <p:cNvSpPr/>
           <p:nvPr/>
         </p:nvSpPr>
@@ -19236,13 +18515,11 @@
             </a:avLst>
           </a:prstGeom>
           <a:solidFill>
-            <a:srgbClr val="FFFFFF">
-              <a:alpha val="88000"/>
-            </a:srgbClr>
+            <a:srgbClr val="FFFFFF"/>
           </a:solidFill>
           <a:ln w="12700">
             <a:solidFill>
-              <a:srgbClr val="D6E8F2"/>
+              <a:srgbClr val="B9D7E6"/>
             </a:solidFill>
             <a:prstDash val="solid"/>
           </a:ln>
@@ -19250,119 +18527,98 @@
       </p:sp>
       <p:sp>
         <p:nvSpPr>
-          <p:cNvPr id="14" name="Shape 12"/>
-          <p:cNvSpPr/>
-          <p:nvPr/>
-        </p:nvSpPr>
-        <p:spPr>
-          <a:xfrm>
-            <a:off x="8074152" y="3291840"/>
-            <a:ext cx="2596896" cy="749808"/>
-          </a:xfrm>
-          <a:prstGeom prst="rect">
-            <a:avLst/>
-          </a:prstGeom>
-          <a:solidFill>
-            <a:srgbClr val="EAF6F8"/>
-          </a:solidFill>
-          <a:ln w="12700">
-            <a:solidFill>
-              <a:srgbClr val="8ABBD8"/>
-            </a:solidFill>
-            <a:prstDash val="solid"/>
-          </a:ln>
-        </p:spPr>
-      </p:sp>
-      <p:sp>
-        <p:nvSpPr>
-          <p:cNvPr id="15" name="Shape 13"/>
-          <p:cNvSpPr/>
-          <p:nvPr/>
-        </p:nvSpPr>
-        <p:spPr>
-          <a:xfrm>
-            <a:off x="8202168" y="3721608"/>
-            <a:ext cx="2340864" cy="0"/>
-          </a:xfrm>
-          <a:prstGeom prst="line">
-            <a:avLst/>
-          </a:prstGeom>
-          <a:noFill/>
-          <a:ln w="19050">
-            <a:solidFill>
-              <a:srgbClr val="0068B7"/>
-            </a:solidFill>
-            <a:prstDash val="solid"/>
-          </a:ln>
-        </p:spPr>
+          <p:cNvPr id="14" name="Text 12"/>
+          <p:cNvSpPr/>
+          <p:nvPr/>
+        </p:nvSpPr>
+        <p:spPr>
+          <a:xfrm>
+            <a:off x="7799832" y="2935224"/>
+            <a:ext cx="3145536" cy="256032"/>
+          </a:xfrm>
+          <a:prstGeom prst="rect">
+            <a:avLst/>
+          </a:prstGeom>
+          <a:noFill/>
+          <a:ln/>
+        </p:spPr>
+        <p:txBody>
+          <a:bodyPr wrap="square" lIns="0" tIns="0" rIns="0" bIns="0" rtlCol="0" anchor="ctr"/>
+          <a:lstStyle/>
+          <a:p>
+            <a:pPr indent="0" marL="0">
+              <a:buNone/>
+            </a:pPr>
+            <a:r>
+              <a:rPr lang="en-US" sz="1300" b="1" dirty="0">
+                <a:solidFill>
+                  <a:srgbClr val="0068B7"/>
+                </a:solidFill>
+                <a:latin typeface="Aptos" pitchFamily="34" charset="0"/>
+                <a:ea typeface="Aptos" pitchFamily="34" charset="-122"/>
+                <a:cs typeface="Aptos" pitchFamily="34" charset="-120"/>
+              </a:rPr>
+              <a:t>Concept checkpoints</a:t>
+            </a:r>
+            <a:endParaRPr lang="en-US" sz="1300" dirty="0"/>
+          </a:p>
+        </p:txBody>
+      </p:sp>
+      <p:sp>
+        <p:nvSpPr>
+          <p:cNvPr id="15" name="Text 13"/>
+          <p:cNvSpPr/>
+          <p:nvPr/>
+        </p:nvSpPr>
+        <p:spPr>
+          <a:xfrm>
+            <a:off x="7818120" y="3300984"/>
+            <a:ext cx="3090672" cy="877824"/>
+          </a:xfrm>
+          <a:prstGeom prst="rect">
+            <a:avLst/>
+          </a:prstGeom>
+          <a:noFill/>
+          <a:ln/>
+        </p:spPr>
+        <p:txBody>
+          <a:bodyPr wrap="square" lIns="254" tIns="254" rIns="254" bIns="254" rtlCol="0" anchor="t">
+            <a:normAutofit/>
+          </a:bodyPr>
+          <a:lstStyle/>
+          <a:p>
+            <a:r>
+              <a:rPr lang="en-US" sz="1380" dirty="0">
+                <a:solidFill>
+                  <a:srgbClr val="17364A"/>
+                </a:solidFill>
+                <a:latin typeface="Aptos" pitchFamily="34" charset="0"/>
+                <a:ea typeface="Aptos" pitchFamily="34" charset="-122"/>
+                <a:cs typeface="Aptos" pitchFamily="34" charset="-120"/>
+              </a:rPr>
+              <a:t>Produce or contribute to: Initial inventory of known or suspected AI use.</a:t>
+            </a:r>
+            <a:endParaRPr lang="en-US" sz="1380" dirty="0"/>
+          </a:p>
+          <a:p>
+            <a:r>
+              <a:rPr lang="en-US" sz="1380" dirty="0">
+                <a:solidFill>
+                  <a:srgbClr val="17364A"/>
+                </a:solidFill>
+                <a:latin typeface="Aptos" pitchFamily="34" charset="0"/>
+                <a:ea typeface="Aptos" pitchFamily="34" charset="-122"/>
+                <a:cs typeface="Aptos" pitchFamily="34" charset="-120"/>
+              </a:rPr>
+              <a:t>Produce or contribute to: Draft list of decisions that require human accountability.</a:t>
+            </a:r>
+            <a:endParaRPr lang="en-US" sz="1380" dirty="0"/>
+          </a:p>
+        </p:txBody>
       </p:sp>
       <p:sp>
         <p:nvSpPr>
           <p:cNvPr id="16" name="Shape 14"/>
-          <p:cNvSpPr/>
-          <p:nvPr/>
-        </p:nvSpPr>
-        <p:spPr>
-          <a:xfrm>
-            <a:off x="9198864" y="4206240"/>
-            <a:ext cx="347472" cy="347472"/>
-          </a:xfrm>
-          <a:prstGeom prst="ellipse">
-            <a:avLst/>
-          </a:prstGeom>
-          <a:solidFill>
-            <a:srgbClr val="2F8A28"/>
-          </a:solidFill>
-          <a:ln w="12700">
-            <a:solidFill>
-              <a:srgbClr val="2F8A28"/>
-            </a:solidFill>
-            <a:prstDash val="solid"/>
-          </a:ln>
-        </p:spPr>
-      </p:sp>
-      <p:sp>
-        <p:nvSpPr>
-          <p:cNvPr id="17" name="Text 15"/>
-          <p:cNvSpPr/>
-          <p:nvPr/>
-        </p:nvSpPr>
-        <p:spPr>
-          <a:xfrm>
-            <a:off x="7909560" y="3977640"/>
-            <a:ext cx="2926080" cy="182880"/>
-          </a:xfrm>
-          <a:prstGeom prst="rect">
-            <a:avLst/>
-          </a:prstGeom>
-          <a:noFill/>
-          <a:ln/>
-        </p:spPr>
-        <p:txBody>
-          <a:bodyPr wrap="square" lIns="0" tIns="0" rIns="0" bIns="0" rtlCol="0" anchor="ctr"/>
-          <a:lstStyle/>
-          <a:p>
-            <a:pPr algn="ctr" indent="0" marL="0">
-              <a:buNone/>
-            </a:pPr>
-            <a:r>
-              <a:rPr lang="en-US" sz="1000" dirty="0">
-                <a:solidFill>
-                  <a:srgbClr val="003A63"/>
-                </a:solidFill>
-                <a:latin typeface="Aptos" pitchFamily="34" charset="0"/>
-                <a:ea typeface="Aptos" pitchFamily="34" charset="-122"/>
-                <a:cs typeface="Aptos" pitchFamily="34" charset="-120"/>
-              </a:rPr>
-              <a:t>Concept to action</a:t>
-            </a:r>
-            <a:endParaRPr lang="en-US" sz="1000" dirty="0"/>
-          </a:p>
-        </p:txBody>
-      </p:sp>
-      <p:sp>
-        <p:nvSpPr>
-          <p:cNvPr id="18" name="Shape 16"/>
           <p:cNvSpPr/>
           <p:nvPr/>
         </p:nvSpPr>
@@ -19389,7 +18645,7 @@
       </p:sp>
       <p:sp>
         <p:nvSpPr>
-          <p:cNvPr id="19" name="Text 17"/>
+          <p:cNvPr id="17" name="Text 15"/>
           <p:cNvSpPr/>
           <p:nvPr/>
         </p:nvSpPr>
@@ -19428,7 +18684,7 @@
       </p:sp>
       <p:sp>
         <p:nvSpPr>
-          <p:cNvPr id="20" name="Text 18"/>
+          <p:cNvPr id="18" name="Text 16"/>
           <p:cNvSpPr/>
           <p:nvPr/>
         </p:nvSpPr>
@@ -19936,13 +19192,11 @@
             </a:avLst>
           </a:prstGeom>
           <a:solidFill>
-            <a:srgbClr val="FFFFFF">
-              <a:alpha val="88000"/>
-            </a:srgbClr>
+            <a:srgbClr val="FFFFFF"/>
           </a:solidFill>
           <a:ln w="12700">
             <a:solidFill>
-              <a:srgbClr val="D6E8F2"/>
+              <a:srgbClr val="B9D7E6"/>
             </a:solidFill>
             <a:prstDash val="solid"/>
           </a:ln>
@@ -19950,119 +19204,112 @@
       </p:sp>
       <p:sp>
         <p:nvSpPr>
-          <p:cNvPr id="14" name="Shape 12"/>
-          <p:cNvSpPr/>
-          <p:nvPr/>
-        </p:nvSpPr>
-        <p:spPr>
-          <a:xfrm>
-            <a:off x="8074152" y="3291840"/>
-            <a:ext cx="2596896" cy="749808"/>
-          </a:xfrm>
-          <a:prstGeom prst="rect">
-            <a:avLst/>
-          </a:prstGeom>
-          <a:solidFill>
-            <a:srgbClr val="EAF6F8"/>
-          </a:solidFill>
-          <a:ln w="12700">
-            <a:solidFill>
-              <a:srgbClr val="8ABBD8"/>
-            </a:solidFill>
-            <a:prstDash val="solid"/>
-          </a:ln>
-        </p:spPr>
-      </p:sp>
-      <p:sp>
-        <p:nvSpPr>
-          <p:cNvPr id="15" name="Shape 13"/>
-          <p:cNvSpPr/>
-          <p:nvPr/>
-        </p:nvSpPr>
-        <p:spPr>
-          <a:xfrm>
-            <a:off x="8202168" y="3721608"/>
-            <a:ext cx="2340864" cy="0"/>
-          </a:xfrm>
-          <a:prstGeom prst="line">
-            <a:avLst/>
-          </a:prstGeom>
-          <a:noFill/>
-          <a:ln w="19050">
-            <a:solidFill>
-              <a:srgbClr val="0068B7"/>
-            </a:solidFill>
-            <a:prstDash val="solid"/>
-          </a:ln>
-        </p:spPr>
+          <p:cNvPr id="14" name="Text 12"/>
+          <p:cNvSpPr/>
+          <p:nvPr/>
+        </p:nvSpPr>
+        <p:spPr>
+          <a:xfrm>
+            <a:off x="7799832" y="2935224"/>
+            <a:ext cx="3145536" cy="256032"/>
+          </a:xfrm>
+          <a:prstGeom prst="rect">
+            <a:avLst/>
+          </a:prstGeom>
+          <a:noFill/>
+          <a:ln/>
+        </p:spPr>
+        <p:txBody>
+          <a:bodyPr wrap="square" lIns="0" tIns="0" rIns="0" bIns="0" rtlCol="0" anchor="ctr"/>
+          <a:lstStyle/>
+          <a:p>
+            <a:pPr indent="0" marL="0">
+              <a:buNone/>
+            </a:pPr>
+            <a:r>
+              <a:rPr lang="en-US" sz="1300" b="1" dirty="0">
+                <a:solidFill>
+                  <a:srgbClr val="0068B7"/>
+                </a:solidFill>
+                <a:latin typeface="Aptos" pitchFamily="34" charset="0"/>
+                <a:ea typeface="Aptos" pitchFamily="34" charset="-122"/>
+                <a:cs typeface="Aptos" pitchFamily="34" charset="-120"/>
+              </a:rPr>
+              <a:t>Concept checkpoints</a:t>
+            </a:r>
+            <a:endParaRPr lang="en-US" sz="1300" dirty="0"/>
+          </a:p>
+        </p:txBody>
+      </p:sp>
+      <p:sp>
+        <p:nvSpPr>
+          <p:cNvPr id="15" name="Text 13"/>
+          <p:cNvSpPr/>
+          <p:nvPr/>
+        </p:nvSpPr>
+        <p:spPr>
+          <a:xfrm>
+            <a:off x="7818120" y="3300984"/>
+            <a:ext cx="3090672" cy="877824"/>
+          </a:xfrm>
+          <a:prstGeom prst="rect">
+            <a:avLst/>
+          </a:prstGeom>
+          <a:noFill/>
+          <a:ln/>
+        </p:spPr>
+        <p:txBody>
+          <a:bodyPr wrap="square" lIns="254" tIns="254" rIns="254" bIns="254" rtlCol="0" anchor="t">
+            <a:normAutofit/>
+          </a:bodyPr>
+          <a:lstStyle/>
+          <a:p>
+            <a:r>
+              <a:rPr lang="en-US" sz="1380" dirty="0">
+                <a:solidFill>
+                  <a:srgbClr val="17364A"/>
+                </a:solidFill>
+                <a:latin typeface="Aptos" pitchFamily="34" charset="0"/>
+                <a:ea typeface="Aptos" pitchFamily="34" charset="-122"/>
+                <a:cs typeface="Aptos" pitchFamily="34" charset="-120"/>
+              </a:rPr>
+              <a:t>You do not need to become a machine learning engineer to participate in responsible AI.</a:t>
+            </a:r>
+            <a:endParaRPr lang="en-US" sz="1380" dirty="0"/>
+          </a:p>
+          <a:p>
+            <a:r>
+              <a:rPr lang="en-US" sz="1380" dirty="0">
+                <a:solidFill>
+                  <a:srgbClr val="17364A"/>
+                </a:solidFill>
+                <a:latin typeface="Aptos" pitchFamily="34" charset="0"/>
+                <a:ea typeface="Aptos" pitchFamily="34" charset="-122"/>
+                <a:cs typeface="Aptos" pitchFamily="34" charset="-120"/>
+              </a:rPr>
+              <a:t>This module helps you distinguish pattern recognition, predictive analytics, generative.</a:t>
+            </a:r>
+            <a:endParaRPr lang="en-US" sz="1380" dirty="0"/>
+          </a:p>
+          <a:p>
+            <a:r>
+              <a:rPr lang="en-US" sz="1380" dirty="0">
+                <a:solidFill>
+                  <a:srgbClr val="17364A"/>
+                </a:solidFill>
+                <a:latin typeface="Aptos" pitchFamily="34" charset="0"/>
+                <a:ea typeface="Aptos" pitchFamily="34" charset="-122"/>
+                <a:cs typeface="Aptos" pitchFamily="34" charset="-120"/>
+              </a:rPr>
+              <a:t>That distinction matters because a tool that drafts a message, a tool that predicts risk,.</a:t>
+            </a:r>
+            <a:endParaRPr lang="en-US" sz="1380" dirty="0"/>
+          </a:p>
+        </p:txBody>
       </p:sp>
       <p:sp>
         <p:nvSpPr>
           <p:cNvPr id="16" name="Shape 14"/>
-          <p:cNvSpPr/>
-          <p:nvPr/>
-        </p:nvSpPr>
-        <p:spPr>
-          <a:xfrm>
-            <a:off x="9198864" y="4206240"/>
-            <a:ext cx="347472" cy="347472"/>
-          </a:xfrm>
-          <a:prstGeom prst="ellipse">
-            <a:avLst/>
-          </a:prstGeom>
-          <a:solidFill>
-            <a:srgbClr val="2F8A28"/>
-          </a:solidFill>
-          <a:ln w="12700">
-            <a:solidFill>
-              <a:srgbClr val="2F8A28"/>
-            </a:solidFill>
-            <a:prstDash val="solid"/>
-          </a:ln>
-        </p:spPr>
-      </p:sp>
-      <p:sp>
-        <p:nvSpPr>
-          <p:cNvPr id="17" name="Text 15"/>
-          <p:cNvSpPr/>
-          <p:nvPr/>
-        </p:nvSpPr>
-        <p:spPr>
-          <a:xfrm>
-            <a:off x="7909560" y="3977640"/>
-            <a:ext cx="2926080" cy="182880"/>
-          </a:xfrm>
-          <a:prstGeom prst="rect">
-            <a:avLst/>
-          </a:prstGeom>
-          <a:noFill/>
-          <a:ln/>
-        </p:spPr>
-        <p:txBody>
-          <a:bodyPr wrap="square" lIns="0" tIns="0" rIns="0" bIns="0" rtlCol="0" anchor="ctr"/>
-          <a:lstStyle/>
-          <a:p>
-            <a:pPr algn="ctr" indent="0" marL="0">
-              <a:buNone/>
-            </a:pPr>
-            <a:r>
-              <a:rPr lang="en-US" sz="1000" dirty="0">
-                <a:solidFill>
-                  <a:srgbClr val="003A63"/>
-                </a:solidFill>
-                <a:latin typeface="Aptos" pitchFamily="34" charset="0"/>
-                <a:ea typeface="Aptos" pitchFamily="34" charset="-122"/>
-                <a:cs typeface="Aptos" pitchFamily="34" charset="-120"/>
-              </a:rPr>
-              <a:t>Concept to action</a:t>
-            </a:r>
-            <a:endParaRPr lang="en-US" sz="1000" dirty="0"/>
-          </a:p>
-        </p:txBody>
-      </p:sp>
-      <p:sp>
-        <p:nvSpPr>
-          <p:cNvPr id="18" name="Shape 16"/>
           <p:cNvSpPr/>
           <p:nvPr/>
         </p:nvSpPr>
@@ -20089,7 +19336,7 @@
       </p:sp>
       <p:sp>
         <p:nvSpPr>
-          <p:cNvPr id="19" name="Text 17"/>
+          <p:cNvPr id="17" name="Text 15"/>
           <p:cNvSpPr/>
           <p:nvPr/>
         </p:nvSpPr>
@@ -20128,7 +19375,7 @@
       </p:sp>
       <p:sp>
         <p:nvSpPr>
-          <p:cNvPr id="20" name="Text 18"/>
+          <p:cNvPr id="18" name="Text 16"/>
           <p:cNvSpPr/>
           <p:nvPr/>
         </p:nvSpPr>
@@ -20636,13 +19883,11 @@
             </a:avLst>
           </a:prstGeom>
           <a:solidFill>
-            <a:srgbClr val="FFFFFF">
-              <a:alpha val="88000"/>
-            </a:srgbClr>
+            <a:srgbClr val="FFFFFF"/>
           </a:solidFill>
           <a:ln w="12700">
             <a:solidFill>
-              <a:srgbClr val="D6E8F2"/>
+              <a:srgbClr val="B9D7E6"/>
             </a:solidFill>
             <a:prstDash val="solid"/>
           </a:ln>
@@ -20650,119 +19895,112 @@
       </p:sp>
       <p:sp>
         <p:nvSpPr>
-          <p:cNvPr id="14" name="Shape 12"/>
-          <p:cNvSpPr/>
-          <p:nvPr/>
-        </p:nvSpPr>
-        <p:spPr>
-          <a:xfrm>
-            <a:off x="8074152" y="3291840"/>
-            <a:ext cx="2596896" cy="749808"/>
-          </a:xfrm>
-          <a:prstGeom prst="rect">
-            <a:avLst/>
-          </a:prstGeom>
-          <a:solidFill>
-            <a:srgbClr val="EAF6F8"/>
-          </a:solidFill>
-          <a:ln w="12700">
-            <a:solidFill>
-              <a:srgbClr val="8ABBD8"/>
-            </a:solidFill>
-            <a:prstDash val="solid"/>
-          </a:ln>
-        </p:spPr>
-      </p:sp>
-      <p:sp>
-        <p:nvSpPr>
-          <p:cNvPr id="15" name="Shape 13"/>
-          <p:cNvSpPr/>
-          <p:nvPr/>
-        </p:nvSpPr>
-        <p:spPr>
-          <a:xfrm>
-            <a:off x="8202168" y="3721608"/>
-            <a:ext cx="2340864" cy="0"/>
-          </a:xfrm>
-          <a:prstGeom prst="line">
-            <a:avLst/>
-          </a:prstGeom>
-          <a:noFill/>
-          <a:ln w="19050">
-            <a:solidFill>
-              <a:srgbClr val="0068B7"/>
-            </a:solidFill>
-            <a:prstDash val="solid"/>
-          </a:ln>
-        </p:spPr>
+          <p:cNvPr id="14" name="Text 12"/>
+          <p:cNvSpPr/>
+          <p:nvPr/>
+        </p:nvSpPr>
+        <p:spPr>
+          <a:xfrm>
+            <a:off x="7799832" y="2935224"/>
+            <a:ext cx="3145536" cy="256032"/>
+          </a:xfrm>
+          <a:prstGeom prst="rect">
+            <a:avLst/>
+          </a:prstGeom>
+          <a:noFill/>
+          <a:ln/>
+        </p:spPr>
+        <p:txBody>
+          <a:bodyPr wrap="square" lIns="0" tIns="0" rIns="0" bIns="0" rtlCol="0" anchor="ctr"/>
+          <a:lstStyle/>
+          <a:p>
+            <a:pPr indent="0" marL="0">
+              <a:buNone/>
+            </a:pPr>
+            <a:r>
+              <a:rPr lang="en-US" sz="1300" b="1" dirty="0">
+                <a:solidFill>
+                  <a:srgbClr val="0068B7"/>
+                </a:solidFill>
+                <a:latin typeface="Aptos" pitchFamily="34" charset="0"/>
+                <a:ea typeface="Aptos" pitchFamily="34" charset="-122"/>
+                <a:cs typeface="Aptos" pitchFamily="34" charset="-120"/>
+              </a:rPr>
+              <a:t>Concept checkpoints</a:t>
+            </a:r>
+            <a:endParaRPr lang="en-US" sz="1300" dirty="0"/>
+          </a:p>
+        </p:txBody>
+      </p:sp>
+      <p:sp>
+        <p:nvSpPr>
+          <p:cNvPr id="15" name="Text 13"/>
+          <p:cNvSpPr/>
+          <p:nvPr/>
+        </p:nvSpPr>
+        <p:spPr>
+          <a:xfrm>
+            <a:off x="7818120" y="3300984"/>
+            <a:ext cx="3090672" cy="877824"/>
+          </a:xfrm>
+          <a:prstGeom prst="rect">
+            <a:avLst/>
+          </a:prstGeom>
+          <a:noFill/>
+          <a:ln/>
+        </p:spPr>
+        <p:txBody>
+          <a:bodyPr wrap="square" lIns="254" tIns="254" rIns="254" bIns="254" rtlCol="0" anchor="t">
+            <a:normAutofit/>
+          </a:bodyPr>
+          <a:lstStyle/>
+          <a:p>
+            <a:r>
+              <a:rPr lang="en-US" sz="1380" dirty="0">
+                <a:solidFill>
+                  <a:srgbClr val="17364A"/>
+                </a:solidFill>
+                <a:latin typeface="Aptos" pitchFamily="34" charset="0"/>
+                <a:ea typeface="Aptos" pitchFamily="34" charset="-122"/>
+                <a:cs typeface="Aptos" pitchFamily="34" charset="-120"/>
+              </a:rPr>
+              <a:t>Agentic AI: AI configured to pursue a goal through multiple steps, such as gathering.</a:t>
+            </a:r>
+            <a:endParaRPr lang="en-US" sz="1380" dirty="0"/>
+          </a:p>
+          <a:p>
+            <a:r>
+              <a:rPr lang="en-US" sz="1380" dirty="0">
+                <a:solidFill>
+                  <a:srgbClr val="17364A"/>
+                </a:solidFill>
+                <a:latin typeface="Aptos" pitchFamily="34" charset="0"/>
+                <a:ea typeface="Aptos" pitchFamily="34" charset="-122"/>
+                <a:cs typeface="Aptos" pitchFamily="34" charset="-120"/>
+              </a:rPr>
+              <a:t>Agentic AI requires clear boundaries, permissions, monitoring, audit logs, and human.</a:t>
+            </a:r>
+            <a:endParaRPr lang="en-US" sz="1380" dirty="0"/>
+          </a:p>
+          <a:p>
+            <a:r>
+              <a:rPr lang="en-US" sz="1380" dirty="0">
+                <a:solidFill>
+                  <a:srgbClr val="17364A"/>
+                </a:solidFill>
+                <a:latin typeface="Aptos" pitchFamily="34" charset="0"/>
+                <a:ea typeface="Aptos" pitchFamily="34" charset="-122"/>
+                <a:cs typeface="Aptos" pitchFamily="34" charset="-120"/>
+              </a:rPr>
+              <a:t>Artificial intelligence (AI): Computer-based methods that can recognize patterns, generate.</a:t>
+            </a:r>
+            <a:endParaRPr lang="en-US" sz="1380" dirty="0"/>
+          </a:p>
+        </p:txBody>
       </p:sp>
       <p:sp>
         <p:nvSpPr>
           <p:cNvPr id="16" name="Shape 14"/>
-          <p:cNvSpPr/>
-          <p:nvPr/>
-        </p:nvSpPr>
-        <p:spPr>
-          <a:xfrm>
-            <a:off x="9198864" y="4206240"/>
-            <a:ext cx="347472" cy="347472"/>
-          </a:xfrm>
-          <a:prstGeom prst="ellipse">
-            <a:avLst/>
-          </a:prstGeom>
-          <a:solidFill>
-            <a:srgbClr val="2F8A28"/>
-          </a:solidFill>
-          <a:ln w="12700">
-            <a:solidFill>
-              <a:srgbClr val="2F8A28"/>
-            </a:solidFill>
-            <a:prstDash val="solid"/>
-          </a:ln>
-        </p:spPr>
-      </p:sp>
-      <p:sp>
-        <p:nvSpPr>
-          <p:cNvPr id="17" name="Text 15"/>
-          <p:cNvSpPr/>
-          <p:nvPr/>
-        </p:nvSpPr>
-        <p:spPr>
-          <a:xfrm>
-            <a:off x="7909560" y="3977640"/>
-            <a:ext cx="2926080" cy="182880"/>
-          </a:xfrm>
-          <a:prstGeom prst="rect">
-            <a:avLst/>
-          </a:prstGeom>
-          <a:noFill/>
-          <a:ln/>
-        </p:spPr>
-        <p:txBody>
-          <a:bodyPr wrap="square" lIns="0" tIns="0" rIns="0" bIns="0" rtlCol="0" anchor="ctr"/>
-          <a:lstStyle/>
-          <a:p>
-            <a:pPr algn="ctr" indent="0" marL="0">
-              <a:buNone/>
-            </a:pPr>
-            <a:r>
-              <a:rPr lang="en-US" sz="1000" dirty="0">
-                <a:solidFill>
-                  <a:srgbClr val="003A63"/>
-                </a:solidFill>
-                <a:latin typeface="Aptos" pitchFamily="34" charset="0"/>
-                <a:ea typeface="Aptos" pitchFamily="34" charset="-122"/>
-                <a:cs typeface="Aptos" pitchFamily="34" charset="-120"/>
-              </a:rPr>
-              <a:t>Concept to action</a:t>
-            </a:r>
-            <a:endParaRPr lang="en-US" sz="1000" dirty="0"/>
-          </a:p>
-        </p:txBody>
-      </p:sp>
-      <p:sp>
-        <p:nvSpPr>
-          <p:cNvPr id="18" name="Shape 16"/>
           <p:cNvSpPr/>
           <p:nvPr/>
         </p:nvSpPr>
@@ -20789,7 +20027,7 @@
       </p:sp>
       <p:sp>
         <p:nvSpPr>
-          <p:cNvPr id="19" name="Text 17"/>
+          <p:cNvPr id="17" name="Text 15"/>
           <p:cNvSpPr/>
           <p:nvPr/>
         </p:nvSpPr>
@@ -20828,7 +20066,7 @@
       </p:sp>
       <p:sp>
         <p:nvSpPr>
-          <p:cNvPr id="20" name="Text 18"/>
+          <p:cNvPr id="18" name="Text 16"/>
           <p:cNvSpPr/>
           <p:nvPr/>
         </p:nvSpPr>
@@ -21336,13 +20574,11 @@
             </a:avLst>
           </a:prstGeom>
           <a:solidFill>
-            <a:srgbClr val="FFFFFF">
-              <a:alpha val="88000"/>
-            </a:srgbClr>
+            <a:srgbClr val="FFFFFF"/>
           </a:solidFill>
           <a:ln w="12700">
             <a:solidFill>
-              <a:srgbClr val="D6E8F2"/>
+              <a:srgbClr val="B9D7E6"/>
             </a:solidFill>
             <a:prstDash val="solid"/>
           </a:ln>
@@ -21350,119 +20586,112 @@
       </p:sp>
       <p:sp>
         <p:nvSpPr>
-          <p:cNvPr id="14" name="Shape 12"/>
-          <p:cNvSpPr/>
-          <p:nvPr/>
-        </p:nvSpPr>
-        <p:spPr>
-          <a:xfrm>
-            <a:off x="8074152" y="3291840"/>
-            <a:ext cx="2596896" cy="749808"/>
-          </a:xfrm>
-          <a:prstGeom prst="rect">
-            <a:avLst/>
-          </a:prstGeom>
-          <a:solidFill>
-            <a:srgbClr val="EAF6F8"/>
-          </a:solidFill>
-          <a:ln w="12700">
-            <a:solidFill>
-              <a:srgbClr val="8ABBD8"/>
-            </a:solidFill>
-            <a:prstDash val="solid"/>
-          </a:ln>
-        </p:spPr>
-      </p:sp>
-      <p:sp>
-        <p:nvSpPr>
-          <p:cNvPr id="15" name="Shape 13"/>
-          <p:cNvSpPr/>
-          <p:nvPr/>
-        </p:nvSpPr>
-        <p:spPr>
-          <a:xfrm>
-            <a:off x="8202168" y="3721608"/>
-            <a:ext cx="2340864" cy="0"/>
-          </a:xfrm>
-          <a:prstGeom prst="line">
-            <a:avLst/>
-          </a:prstGeom>
-          <a:noFill/>
-          <a:ln w="19050">
-            <a:solidFill>
-              <a:srgbClr val="0068B7"/>
-            </a:solidFill>
-            <a:prstDash val="solid"/>
-          </a:ln>
-        </p:spPr>
+          <p:cNvPr id="14" name="Text 12"/>
+          <p:cNvSpPr/>
+          <p:nvPr/>
+        </p:nvSpPr>
+        <p:spPr>
+          <a:xfrm>
+            <a:off x="7799832" y="2935224"/>
+            <a:ext cx="3145536" cy="256032"/>
+          </a:xfrm>
+          <a:prstGeom prst="rect">
+            <a:avLst/>
+          </a:prstGeom>
+          <a:noFill/>
+          <a:ln/>
+        </p:spPr>
+        <p:txBody>
+          <a:bodyPr wrap="square" lIns="0" tIns="0" rIns="0" bIns="0" rtlCol="0" anchor="ctr"/>
+          <a:lstStyle/>
+          <a:p>
+            <a:pPr indent="0" marL="0">
+              <a:buNone/>
+            </a:pPr>
+            <a:r>
+              <a:rPr lang="en-US" sz="1300" b="1" dirty="0">
+                <a:solidFill>
+                  <a:srgbClr val="0068B7"/>
+                </a:solidFill>
+                <a:latin typeface="Aptos" pitchFamily="34" charset="0"/>
+                <a:ea typeface="Aptos" pitchFamily="34" charset="-122"/>
+                <a:cs typeface="Aptos" pitchFamily="34" charset="-120"/>
+              </a:rPr>
+              <a:t>Concept checkpoints</a:t>
+            </a:r>
+            <a:endParaRPr lang="en-US" sz="1300" dirty="0"/>
+          </a:p>
+        </p:txBody>
+      </p:sp>
+      <p:sp>
+        <p:nvSpPr>
+          <p:cNvPr id="15" name="Text 13"/>
+          <p:cNvSpPr/>
+          <p:nvPr/>
+        </p:nvSpPr>
+        <p:spPr>
+          <a:xfrm>
+            <a:off x="7818120" y="3300984"/>
+            <a:ext cx="3090672" cy="877824"/>
+          </a:xfrm>
+          <a:prstGeom prst="rect">
+            <a:avLst/>
+          </a:prstGeom>
+          <a:noFill/>
+          <a:ln/>
+        </p:spPr>
+        <p:txBody>
+          <a:bodyPr wrap="square" lIns="254" tIns="254" rIns="254" bIns="254" rtlCol="0" anchor="t">
+            <a:normAutofit/>
+          </a:bodyPr>
+          <a:lstStyle/>
+          <a:p>
+            <a:r>
+              <a:rPr lang="en-US" sz="1380" dirty="0">
+                <a:solidFill>
+                  <a:srgbClr val="17364A"/>
+                </a:solidFill>
+                <a:latin typeface="Aptos" pitchFamily="34" charset="0"/>
+                <a:ea typeface="Aptos" pitchFamily="34" charset="-122"/>
+                <a:cs typeface="Aptos" pitchFamily="34" charset="-120"/>
+              </a:rPr>
+              <a:t>Large language model (LLM): A generative AI model trained on large bodies of text to.</a:t>
+            </a:r>
+            <a:endParaRPr lang="en-US" sz="1380" dirty="0"/>
+          </a:p>
+          <a:p>
+            <a:r>
+              <a:rPr lang="en-US" sz="1380" dirty="0">
+                <a:solidFill>
+                  <a:srgbClr val="17364A"/>
+                </a:solidFill>
+                <a:latin typeface="Aptos" pitchFamily="34" charset="0"/>
+                <a:ea typeface="Aptos" pitchFamily="34" charset="-122"/>
+                <a:cs typeface="Aptos" pitchFamily="34" charset="-120"/>
+              </a:rPr>
+              <a:t>LLM outputs should be reviewed by qualified humans before use in consequential public.</a:t>
+            </a:r>
+            <a:endParaRPr lang="en-US" sz="1380" dirty="0"/>
+          </a:p>
+          <a:p>
+            <a:r>
+              <a:rPr lang="en-US" sz="1380" dirty="0">
+                <a:solidFill>
+                  <a:srgbClr val="17364A"/>
+                </a:solidFill>
+                <a:latin typeface="Aptos" pitchFamily="34" charset="0"/>
+                <a:ea typeface="Aptos" pitchFamily="34" charset="-122"/>
+                <a:cs typeface="Aptos" pitchFamily="34" charset="-120"/>
+              </a:rPr>
+              <a:t>Machine learning: A type of AI that identifies patterns in data and uses those patterns to.</a:t>
+            </a:r>
+            <a:endParaRPr lang="en-US" sz="1380" dirty="0"/>
+          </a:p>
+        </p:txBody>
       </p:sp>
       <p:sp>
         <p:nvSpPr>
           <p:cNvPr id="16" name="Shape 14"/>
-          <p:cNvSpPr/>
-          <p:nvPr/>
-        </p:nvSpPr>
-        <p:spPr>
-          <a:xfrm>
-            <a:off x="9198864" y="4206240"/>
-            <a:ext cx="347472" cy="347472"/>
-          </a:xfrm>
-          <a:prstGeom prst="ellipse">
-            <a:avLst/>
-          </a:prstGeom>
-          <a:solidFill>
-            <a:srgbClr val="2F8A28"/>
-          </a:solidFill>
-          <a:ln w="12700">
-            <a:solidFill>
-              <a:srgbClr val="2F8A28"/>
-            </a:solidFill>
-            <a:prstDash val="solid"/>
-          </a:ln>
-        </p:spPr>
-      </p:sp>
-      <p:sp>
-        <p:nvSpPr>
-          <p:cNvPr id="17" name="Text 15"/>
-          <p:cNvSpPr/>
-          <p:nvPr/>
-        </p:nvSpPr>
-        <p:spPr>
-          <a:xfrm>
-            <a:off x="7909560" y="3977640"/>
-            <a:ext cx="2926080" cy="182880"/>
-          </a:xfrm>
-          <a:prstGeom prst="rect">
-            <a:avLst/>
-          </a:prstGeom>
-          <a:noFill/>
-          <a:ln/>
-        </p:spPr>
-        <p:txBody>
-          <a:bodyPr wrap="square" lIns="0" tIns="0" rIns="0" bIns="0" rtlCol="0" anchor="ctr"/>
-          <a:lstStyle/>
-          <a:p>
-            <a:pPr algn="ctr" indent="0" marL="0">
-              <a:buNone/>
-            </a:pPr>
-            <a:r>
-              <a:rPr lang="en-US" sz="1000" dirty="0">
-                <a:solidFill>
-                  <a:srgbClr val="003A63"/>
-                </a:solidFill>
-                <a:latin typeface="Aptos" pitchFamily="34" charset="0"/>
-                <a:ea typeface="Aptos" pitchFamily="34" charset="-122"/>
-                <a:cs typeface="Aptos" pitchFamily="34" charset="-120"/>
-              </a:rPr>
-              <a:t>Concept to action</a:t>
-            </a:r>
-            <a:endParaRPr lang="en-US" sz="1000" dirty="0"/>
-          </a:p>
-        </p:txBody>
-      </p:sp>
-      <p:sp>
-        <p:nvSpPr>
-          <p:cNvPr id="18" name="Shape 16"/>
           <p:cNvSpPr/>
           <p:nvPr/>
         </p:nvSpPr>
@@ -21489,7 +20718,7 @@
       </p:sp>
       <p:sp>
         <p:nvSpPr>
-          <p:cNvPr id="19" name="Text 17"/>
+          <p:cNvPr id="17" name="Text 15"/>
           <p:cNvSpPr/>
           <p:nvPr/>
         </p:nvSpPr>
@@ -21528,7 +20757,7 @@
       </p:sp>
       <p:sp>
         <p:nvSpPr>
-          <p:cNvPr id="20" name="Text 18"/>
+          <p:cNvPr id="18" name="Text 16"/>
           <p:cNvSpPr/>
           <p:nvPr/>
         </p:nvSpPr>

--- a/downloads/presentations/modules/int-100.pptx
+++ b/downloads/presentations/modules/int-100.pptx
@@ -3809,35 +3809,41 @@
           <a:ln/>
         </p:spPr>
         <p:txBody>
-          <a:bodyPr wrap="square" lIns="635" tIns="635" rIns="635" bIns="635" rtlCol="0" anchor="t">
+          <a:bodyPr wrap="square" lIns="1016" tIns="1016" rIns="1016" bIns="1016" rtlCol="0" anchor="t">
             <a:normAutofit/>
           </a:bodyPr>
           <a:lstStyle/>
           <a:p>
+            <a:pPr indent="0" marL="0">
+              <a:buNone/>
+            </a:pPr>
             <a:r>
               <a:rPr lang="en-US" sz="2100" dirty="0">
                 <a:solidFill>
-                  <a:srgbClr val="17364A"/>
-                </a:solidFill>
-                <a:latin typeface="Aptos" pitchFamily="34" charset="0"/>
-                <a:ea typeface="Aptos" pitchFamily="34" charset="-122"/>
-                <a:cs typeface="Aptos" pitchFamily="34" charset="-120"/>
-              </a:rPr>
-              <a:t>What AI Means for Public Health: Artificial intelligence is a family of methods that enable computer.</a:t>
+                  <a:srgbClr val="003A63"/>
+                </a:solidFill>
+                <a:latin typeface="Aptos" pitchFamily="34" charset="0"/>
+                <a:ea typeface="Aptos" pitchFamily="34" charset="-122"/>
+                <a:cs typeface="Aptos" pitchFamily="34" charset="-120"/>
+              </a:rPr>
+              <a:t>• What AI Means for Public Health: Artificial intelligence is a family of methods that enable.</a:t>
             </a:r>
             <a:endParaRPr lang="en-US" sz="2100" dirty="0"/>
           </a:p>
           <a:p>
+            <a:pPr indent="0" marL="0">
+              <a:buNone/>
+            </a:pPr>
             <a:r>
               <a:rPr lang="en-US" sz="2100" dirty="0">
                 <a:solidFill>
-                  <a:srgbClr val="17364A"/>
-                </a:solidFill>
-                <a:latin typeface="Aptos" pitchFamily="34" charset="0"/>
-                <a:ea typeface="Aptos" pitchFamily="34" charset="-122"/>
-                <a:cs typeface="Aptos" pitchFamily="34" charset="-120"/>
-              </a:rPr>
-              <a:t>For public health agencies, the most consequential near-term branches are generative AI and agentic AI.</a:t>
+                  <a:srgbClr val="003A63"/>
+                </a:solidFill>
+                <a:latin typeface="Aptos" pitchFamily="34" charset="0"/>
+                <a:ea typeface="Aptos" pitchFamily="34" charset="-122"/>
+                <a:cs typeface="Aptos" pitchFamily="34" charset="-120"/>
+              </a:rPr>
+              <a:t>• For public health agencies, the most consequential near-term branches are generative AI and.</a:t>
             </a:r>
             <a:endParaRPr lang="en-US" sz="2100" dirty="0"/>
           </a:p>
@@ -3917,17 +3923,17 @@
         </p:nvSpPr>
         <p:spPr>
           <a:xfrm>
-            <a:off x="7799832" y="1828800"/>
-            <a:ext cx="3145536" cy="685800"/>
-          </a:xfrm>
-          <a:prstGeom prst="rect">
-            <a:avLst/>
-          </a:prstGeom>
-          <a:noFill/>
-          <a:ln/>
-        </p:spPr>
-        <p:txBody>
-          <a:bodyPr wrap="square" lIns="0" tIns="0" rIns="0" bIns="0" rtlCol="0" anchor="t">
+            <a:off x="7799832" y="1801368"/>
+            <a:ext cx="3145536" cy="758952"/>
+          </a:xfrm>
+          <a:prstGeom prst="rect">
+            <a:avLst/>
+          </a:prstGeom>
+          <a:noFill/>
+          <a:ln/>
+        </p:spPr>
+        <p:txBody>
+          <a:bodyPr wrap="square" lIns="254" tIns="254" rIns="254" bIns="254" rtlCol="0" anchor="t">
             <a:normAutofit/>
           </a:bodyPr>
           <a:lstStyle/>
@@ -3936,7 +3942,7 @@
               <a:buNone/>
             </a:pPr>
             <a:r>
-              <a:rPr lang="en-US" sz="1550" dirty="0">
+              <a:rPr lang="en-US" sz="1320" dirty="0">
                 <a:solidFill>
                   <a:srgbClr val="17364A"/>
                 </a:solidFill>
@@ -3946,7 +3952,7 @@
               </a:rPr>
               <a:t>What AI Means for Public Health: Artificial intelligence is a family of methods that enable computer.</a:t>
             </a:r>
-            <a:endParaRPr lang="en-US" sz="1550" dirty="0"/>
+            <a:endParaRPr lang="en-US" sz="1320" dirty="0"/>
           </a:p>
         </p:txBody>
       </p:sp>
@@ -4034,13 +4040,16 @@
           <a:ln/>
         </p:spPr>
         <p:txBody>
-          <a:bodyPr wrap="square" lIns="254" tIns="254" rIns="254" bIns="254" rtlCol="0" anchor="t">
+          <a:bodyPr wrap="square" lIns="508" tIns="508" rIns="508" bIns="508" rtlCol="0" anchor="t">
             <a:normAutofit/>
           </a:bodyPr>
           <a:lstStyle/>
           <a:p>
-            <a:r>
-              <a:rPr lang="en-US" sz="1380" dirty="0">
+            <a:pPr indent="0" marL="0">
+              <a:buNone/>
+            </a:pPr>
+            <a:r>
+              <a:rPr lang="en-US" sz="1220" dirty="0">
                 <a:solidFill>
                   <a:srgbClr val="17364A"/>
                 </a:solidFill>
@@ -4048,13 +4057,16 @@
                 <a:ea typeface="Aptos" pitchFamily="34" charset="-122"/>
                 <a:cs typeface="Aptos" pitchFamily="34" charset="-120"/>
               </a:rPr>
-              <a:t>What AI Means for Public Health: Artificial intelligence is a family of methods that.</a:t>
-            </a:r>
-            <a:endParaRPr lang="en-US" sz="1380" dirty="0"/>
-          </a:p>
-          <a:p>
-            <a:r>
-              <a:rPr lang="en-US" sz="1380" dirty="0">
+              <a:t>What AI Means for Public Health: Artificial intelligence is a.</a:t>
+            </a:r>
+            <a:endParaRPr lang="en-US" sz="1220" dirty="0"/>
+          </a:p>
+          <a:p>
+            <a:pPr indent="0" marL="0">
+              <a:buNone/>
+            </a:pPr>
+            <a:r>
+              <a:rPr lang="en-US" sz="1220" dirty="0">
                 <a:solidFill>
                   <a:srgbClr val="17364A"/>
                 </a:solidFill>
@@ -4062,9 +4074,9 @@
                 <a:ea typeface="Aptos" pitchFamily="34" charset="-122"/>
                 <a:cs typeface="Aptos" pitchFamily="34" charset="-120"/>
               </a:rPr>
-              <a:t>For public health agencies, the most consequential near-term branches are generative AI.</a:t>
-            </a:r>
-            <a:endParaRPr lang="en-US" sz="1380" dirty="0"/>
+              <a:t>For public health agencies, the most consequential near-term.</a:t>
+            </a:r>
+            <a:endParaRPr lang="en-US" sz="1220" dirty="0"/>
           </a:p>
         </p:txBody>
       </p:sp>
@@ -4142,17 +4154,17 @@
         </p:nvSpPr>
         <p:spPr>
           <a:xfrm>
-            <a:off x="7799832" y="5001768"/>
-            <a:ext cx="3145536" cy="502920"/>
-          </a:xfrm>
-          <a:prstGeom prst="rect">
-            <a:avLst/>
-          </a:prstGeom>
-          <a:noFill/>
-          <a:ln/>
-        </p:spPr>
-        <p:txBody>
-          <a:bodyPr wrap="square" lIns="0" tIns="0" rIns="0" bIns="0" rtlCol="0" anchor="t">
+            <a:off x="7799832" y="4974336"/>
+            <a:ext cx="3145536" cy="576072"/>
+          </a:xfrm>
+          <a:prstGeom prst="rect">
+            <a:avLst/>
+          </a:prstGeom>
+          <a:noFill/>
+          <a:ln/>
+        </p:spPr>
+        <p:txBody>
+          <a:bodyPr wrap="square" lIns="254" tIns="254" rIns="254" bIns="254" rtlCol="0" anchor="t">
             <a:normAutofit/>
           </a:bodyPr>
           <a:lstStyle/>
@@ -4161,7 +4173,7 @@
               <a:buNone/>
             </a:pPr>
             <a:r>
-              <a:rPr lang="en-US" sz="1550" dirty="0">
+              <a:rPr lang="en-US" sz="1320" dirty="0">
                 <a:solidFill>
                   <a:srgbClr val="17364A"/>
                 </a:solidFill>
@@ -4169,9 +4181,9 @@
                 <a:ea typeface="Aptos" pitchFamily="34" charset="-122"/>
                 <a:cs typeface="Aptos" pitchFamily="34" charset="-120"/>
               </a:rPr>
-              <a:t>Connect the concept to public health purpose, responsible use, required safeguards, documentation, and the next action a department should take.</a:t>
-            </a:r>
-            <a:endParaRPr lang="en-US" sz="1550" dirty="0"/>
+              <a:t>Connect the concept to public health purpose, responsible use, required safeguards, documentation, and the next action a.</a:t>
+            </a:r>
+            <a:endParaRPr lang="en-US" sz="1320" dirty="0"/>
           </a:p>
         </p:txBody>
       </p:sp>
@@ -4472,49 +4484,58 @@
           <a:ln/>
         </p:spPr>
         <p:txBody>
-          <a:bodyPr wrap="square" lIns="635" tIns="635" rIns="635" bIns="635" rtlCol="0" anchor="t">
+          <a:bodyPr wrap="square" lIns="1016" tIns="1016" rIns="1016" bIns="1016" rtlCol="0" anchor="t">
             <a:normAutofit/>
           </a:bodyPr>
           <a:lstStyle/>
           <a:p>
+            <a:pPr indent="0" marL="0">
+              <a:buNone/>
+            </a:pPr>
             <a:r>
               <a:rPr lang="en-US" sz="2100" dirty="0">
                 <a:solidFill>
-                  <a:srgbClr val="17364A"/>
-                </a:solidFill>
-                <a:latin typeface="Aptos" pitchFamily="34" charset="0"/>
-                <a:ea typeface="Aptos" pitchFamily="34" charset="-122"/>
-                <a:cs typeface="Aptos" pitchFamily="34" charset="-120"/>
-              </a:rPr>
-              <a:t>Artificial intelligence should be introduced as a set of capabilities rather than a single product.</a:t>
+                  <a:srgbClr val="003A63"/>
+                </a:solidFill>
+                <a:latin typeface="Aptos" pitchFamily="34" charset="0"/>
+                <a:ea typeface="Aptos" pitchFamily="34" charset="-122"/>
+                <a:cs typeface="Aptos" pitchFamily="34" charset="-120"/>
+              </a:rPr>
+              <a:t>• Artificial intelligence should be introduced as a set of capabilities rather than a single.</a:t>
             </a:r>
             <a:endParaRPr lang="en-US" sz="2100" dirty="0"/>
           </a:p>
           <a:p>
+            <a:pPr indent="0" marL="0">
+              <a:buNone/>
+            </a:pPr>
             <a:r>
               <a:rPr lang="en-US" sz="2100" dirty="0">
                 <a:solidFill>
-                  <a:srgbClr val="17364A"/>
-                </a:solidFill>
-                <a:latin typeface="Aptos" pitchFamily="34" charset="0"/>
-                <a:ea typeface="Aptos" pitchFamily="34" charset="-122"/>
-                <a:cs typeface="Aptos" pitchFamily="34" charset="-120"/>
-              </a:rPr>
-              <a:t>In public health, AI may appear as predictive analytics, classification, natural-language.</a:t>
+                  <a:srgbClr val="003A63"/>
+                </a:solidFill>
+                <a:latin typeface="Aptos" pitchFamily="34" charset="0"/>
+                <a:ea typeface="Aptos" pitchFamily="34" charset="-122"/>
+                <a:cs typeface="Aptos" pitchFamily="34" charset="-120"/>
+              </a:rPr>
+              <a:t>• In public health, AI may appear as predictive analytics, classification, natural-language.</a:t>
             </a:r>
             <a:endParaRPr lang="en-US" sz="2100" dirty="0"/>
           </a:p>
           <a:p>
+            <a:pPr indent="0" marL="0">
+              <a:buNone/>
+            </a:pPr>
             <a:r>
               <a:rPr lang="en-US" sz="2100" dirty="0">
                 <a:solidFill>
-                  <a:srgbClr val="17364A"/>
-                </a:solidFill>
-                <a:latin typeface="Aptos" pitchFamily="34" charset="0"/>
-                <a:ea typeface="Aptos" pitchFamily="34" charset="-122"/>
-                <a:cs typeface="Aptos" pitchFamily="34" charset="-120"/>
-              </a:rPr>
-              <a:t>You need to recognize these differences because each capability has different risks, data needs, and.</a:t>
+                  <a:srgbClr val="003A63"/>
+                </a:solidFill>
+                <a:latin typeface="Aptos" pitchFamily="34" charset="0"/>
+                <a:ea typeface="Aptos" pitchFamily="34" charset="-122"/>
+                <a:cs typeface="Aptos" pitchFamily="34" charset="-120"/>
+              </a:rPr>
+              <a:t>• You need to recognize these differences because each capability has different risks, data.</a:t>
             </a:r>
             <a:endParaRPr lang="en-US" sz="2100" dirty="0"/>
           </a:p>
@@ -4594,17 +4615,17 @@
         </p:nvSpPr>
         <p:spPr>
           <a:xfrm>
-            <a:off x="7799832" y="1828800"/>
-            <a:ext cx="3145536" cy="685800"/>
-          </a:xfrm>
-          <a:prstGeom prst="rect">
-            <a:avLst/>
-          </a:prstGeom>
-          <a:noFill/>
-          <a:ln/>
-        </p:spPr>
-        <p:txBody>
-          <a:bodyPr wrap="square" lIns="0" tIns="0" rIns="0" bIns="0" rtlCol="0" anchor="t">
+            <a:off x="7799832" y="1801368"/>
+            <a:ext cx="3145536" cy="758952"/>
+          </a:xfrm>
+          <a:prstGeom prst="rect">
+            <a:avLst/>
+          </a:prstGeom>
+          <a:noFill/>
+          <a:ln/>
+        </p:spPr>
+        <p:txBody>
+          <a:bodyPr wrap="square" lIns="254" tIns="254" rIns="254" bIns="254" rtlCol="0" anchor="t">
             <a:normAutofit/>
           </a:bodyPr>
           <a:lstStyle/>
@@ -4613,7 +4634,7 @@
               <a:buNone/>
             </a:pPr>
             <a:r>
-              <a:rPr lang="en-US" sz="1550" dirty="0">
+              <a:rPr lang="en-US" sz="1320" dirty="0">
                 <a:solidFill>
                   <a:srgbClr val="17364A"/>
                 </a:solidFill>
@@ -4623,7 +4644,7 @@
               </a:rPr>
               <a:t>Artificial intelligence should be introduced as a set of capabilities rather than a single product.</a:t>
             </a:r>
-            <a:endParaRPr lang="en-US" sz="1550" dirty="0"/>
+            <a:endParaRPr lang="en-US" sz="1320" dirty="0"/>
           </a:p>
         </p:txBody>
       </p:sp>
@@ -4711,13 +4732,16 @@
           <a:ln/>
         </p:spPr>
         <p:txBody>
-          <a:bodyPr wrap="square" lIns="254" tIns="254" rIns="254" bIns="254" rtlCol="0" anchor="t">
+          <a:bodyPr wrap="square" lIns="508" tIns="508" rIns="508" bIns="508" rtlCol="0" anchor="t">
             <a:normAutofit/>
           </a:bodyPr>
           <a:lstStyle/>
           <a:p>
-            <a:r>
-              <a:rPr lang="en-US" sz="1380" dirty="0">
+            <a:pPr indent="0" marL="0">
+              <a:buNone/>
+            </a:pPr>
+            <a:r>
+              <a:rPr lang="en-US" sz="1220" dirty="0">
                 <a:solidFill>
                   <a:srgbClr val="17364A"/>
                 </a:solidFill>
@@ -4725,13 +4749,16 @@
                 <a:ea typeface="Aptos" pitchFamily="34" charset="-122"/>
                 <a:cs typeface="Aptos" pitchFamily="34" charset="-120"/>
               </a:rPr>
-              <a:t>In public health, AI may appear as predictive analytics, classification, natural-language.</a:t>
-            </a:r>
-            <a:endParaRPr lang="en-US" sz="1380" dirty="0"/>
-          </a:p>
-          <a:p>
-            <a:r>
-              <a:rPr lang="en-US" sz="1380" dirty="0">
+              <a:t>In public health, AI may appear as predictive analytics,.</a:t>
+            </a:r>
+            <a:endParaRPr lang="en-US" sz="1220" dirty="0"/>
+          </a:p>
+          <a:p>
+            <a:pPr indent="0" marL="0">
+              <a:buNone/>
+            </a:pPr>
+            <a:r>
+              <a:rPr lang="en-US" sz="1220" dirty="0">
                 <a:solidFill>
                   <a:srgbClr val="17364A"/>
                 </a:solidFill>
@@ -4739,13 +4766,16 @@
                 <a:ea typeface="Aptos" pitchFamily="34" charset="-122"/>
                 <a:cs typeface="Aptos" pitchFamily="34" charset="-120"/>
               </a:rPr>
-              <a:t>You need to recognize these differences because each capability has different risks, data.</a:t>
-            </a:r>
-            <a:endParaRPr lang="en-US" sz="1380" dirty="0"/>
-          </a:p>
-          <a:p>
-            <a:r>
-              <a:rPr lang="en-US" sz="1380" dirty="0">
+              <a:t>You need to recognize these differences because each capability.</a:t>
+            </a:r>
+            <a:endParaRPr lang="en-US" sz="1220" dirty="0"/>
+          </a:p>
+          <a:p>
+            <a:pPr indent="0" marL="0">
+              <a:buNone/>
+            </a:pPr>
+            <a:r>
+              <a:rPr lang="en-US" sz="1220" dirty="0">
                 <a:solidFill>
                   <a:srgbClr val="17364A"/>
                 </a:solidFill>
@@ -4753,9 +4783,9 @@
                 <a:ea typeface="Aptos" pitchFamily="34" charset="-122"/>
                 <a:cs typeface="Aptos" pitchFamily="34" charset="-120"/>
               </a:rPr>
-              <a:t>A shared foundation also helps departments avoid technology-first decisions.</a:t>
-            </a:r>
-            <a:endParaRPr lang="en-US" sz="1380" dirty="0"/>
+              <a:t>A shared foundation also helps departments avoid technology-first.</a:t>
+            </a:r>
+            <a:endParaRPr lang="en-US" sz="1220" dirty="0"/>
           </a:p>
         </p:txBody>
       </p:sp>
@@ -4833,17 +4863,17 @@
         </p:nvSpPr>
         <p:spPr>
           <a:xfrm>
-            <a:off x="7799832" y="5001768"/>
-            <a:ext cx="3145536" cy="502920"/>
-          </a:xfrm>
-          <a:prstGeom prst="rect">
-            <a:avLst/>
-          </a:prstGeom>
-          <a:noFill/>
-          <a:ln/>
-        </p:spPr>
-        <p:txBody>
-          <a:bodyPr wrap="square" lIns="0" tIns="0" rIns="0" bIns="0" rtlCol="0" anchor="t">
+            <a:off x="7799832" y="4974336"/>
+            <a:ext cx="3145536" cy="576072"/>
+          </a:xfrm>
+          <a:prstGeom prst="rect">
+            <a:avLst/>
+          </a:prstGeom>
+          <a:noFill/>
+          <a:ln/>
+        </p:spPr>
+        <p:txBody>
+          <a:bodyPr wrap="square" lIns="254" tIns="254" rIns="254" bIns="254" rtlCol="0" anchor="t">
             <a:normAutofit/>
           </a:bodyPr>
           <a:lstStyle/>
@@ -4852,7 +4882,7 @@
               <a:buNone/>
             </a:pPr>
             <a:r>
-              <a:rPr lang="en-US" sz="1550" dirty="0">
+              <a:rPr lang="en-US" sz="1320" dirty="0">
                 <a:solidFill>
                   <a:srgbClr val="17364A"/>
                 </a:solidFill>
@@ -4860,9 +4890,9 @@
                 <a:ea typeface="Aptos" pitchFamily="34" charset="-122"/>
                 <a:cs typeface="Aptos" pitchFamily="34" charset="-120"/>
               </a:rPr>
-              <a:t>Connect the concept to public health purpose, responsible use, required safeguards, documentation, and the next action a department should take.</a:t>
-            </a:r>
-            <a:endParaRPr lang="en-US" sz="1550" dirty="0"/>
+              <a:t>Connect the concept to public health purpose, responsible use, required safeguards, documentation, and the next action a.</a:t>
+            </a:r>
+            <a:endParaRPr lang="en-US" sz="1320" dirty="0"/>
           </a:p>
         </p:txBody>
       </p:sp>
@@ -5163,49 +5193,58 @@
           <a:ln/>
         </p:spPr>
         <p:txBody>
-          <a:bodyPr wrap="square" lIns="635" tIns="635" rIns="635" bIns="635" rtlCol="0" anchor="t">
+          <a:bodyPr wrap="square" lIns="1016" tIns="1016" rIns="1016" bIns="1016" rtlCol="0" anchor="t">
             <a:normAutofit/>
           </a:bodyPr>
           <a:lstStyle/>
           <a:p>
+            <a:pPr indent="0" marL="0">
+              <a:buNone/>
+            </a:pPr>
             <a:r>
               <a:rPr lang="en-US" sz="2100" dirty="0">
                 <a:solidFill>
-                  <a:srgbClr val="17364A"/>
-                </a:solidFill>
-                <a:latin typeface="Aptos" pitchFamily="34" charset="0"/>
-                <a:ea typeface="Aptos" pitchFamily="34" charset="-122"/>
-                <a:cs typeface="Aptos" pitchFamily="34" charset="-120"/>
-              </a:rPr>
-              <a:t>AI is not one technology or one product category. In public health, the word AI may refer to predictive.</a:t>
+                  <a:srgbClr val="003A63"/>
+                </a:solidFill>
+                <a:latin typeface="Aptos" pitchFamily="34" charset="0"/>
+                <a:ea typeface="Aptos" pitchFamily="34" charset="-122"/>
+                <a:cs typeface="Aptos" pitchFamily="34" charset="-120"/>
+              </a:rPr>
+              <a:t>• AI is not one technology or one product category. In public health, the word AI may refer to.</a:t>
             </a:r>
             <a:endParaRPr lang="en-US" sz="2100" dirty="0"/>
           </a:p>
           <a:p>
+            <a:pPr indent="0" marL="0">
+              <a:buNone/>
+            </a:pPr>
             <a:r>
               <a:rPr lang="en-US" sz="2100" dirty="0">
                 <a:solidFill>
-                  <a:srgbClr val="17364A"/>
-                </a:solidFill>
-                <a:latin typeface="Aptos" pitchFamily="34" charset="0"/>
-                <a:ea typeface="Aptos" pitchFamily="34" charset="-122"/>
-                <a:cs typeface="Aptos" pitchFamily="34" charset="-120"/>
-              </a:rPr>
-              <a:t>Generative AI produces new content from prompts and source material. It can draft, summarize,.</a:t>
+                  <a:srgbClr val="003A63"/>
+                </a:solidFill>
+                <a:latin typeface="Aptos" pitchFamily="34" charset="0"/>
+                <a:ea typeface="Aptos" pitchFamily="34" charset="-122"/>
+                <a:cs typeface="Aptos" pitchFamily="34" charset="-120"/>
+              </a:rPr>
+              <a:t>• Generative AI produces new content from prompts and source material. It can draft, summarize,.</a:t>
             </a:r>
             <a:endParaRPr lang="en-US" sz="2100" dirty="0"/>
           </a:p>
           <a:p>
+            <a:pPr indent="0" marL="0">
+              <a:buNone/>
+            </a:pPr>
             <a:r>
               <a:rPr lang="en-US" sz="2100" dirty="0">
                 <a:solidFill>
-                  <a:srgbClr val="17364A"/>
-                </a:solidFill>
-                <a:latin typeface="Aptos" pitchFamily="34" charset="0"/>
-                <a:ea typeface="Aptos" pitchFamily="34" charset="-122"/>
-                <a:cs typeface="Aptos" pitchFamily="34" charset="-120"/>
-              </a:rPr>
-              <a:t>Agentic AI can coordinate a sequence of actions across systems under defined rules. This may include.</a:t>
+                  <a:srgbClr val="003A63"/>
+                </a:solidFill>
+                <a:latin typeface="Aptos" pitchFamily="34" charset="0"/>
+                <a:ea typeface="Aptos" pitchFamily="34" charset="-122"/>
+                <a:cs typeface="Aptos" pitchFamily="34" charset="-120"/>
+              </a:rPr>
+              <a:t>• Agentic AI can coordinate a sequence of actions across systems under defined rules. This may.</a:t>
             </a:r>
             <a:endParaRPr lang="en-US" sz="2100" dirty="0"/>
           </a:p>
@@ -5285,17 +5324,17 @@
         </p:nvSpPr>
         <p:spPr>
           <a:xfrm>
-            <a:off x="7799832" y="1828800"/>
-            <a:ext cx="3145536" cy="685800"/>
-          </a:xfrm>
-          <a:prstGeom prst="rect">
-            <a:avLst/>
-          </a:prstGeom>
-          <a:noFill/>
-          <a:ln/>
-        </p:spPr>
-        <p:txBody>
-          <a:bodyPr wrap="square" lIns="0" tIns="0" rIns="0" bIns="0" rtlCol="0" anchor="t">
+            <a:off x="7799832" y="1801368"/>
+            <a:ext cx="3145536" cy="758952"/>
+          </a:xfrm>
+          <a:prstGeom prst="rect">
+            <a:avLst/>
+          </a:prstGeom>
+          <a:noFill/>
+          <a:ln/>
+        </p:spPr>
+        <p:txBody>
+          <a:bodyPr wrap="square" lIns="254" tIns="254" rIns="254" bIns="254" rtlCol="0" anchor="t">
             <a:normAutofit/>
           </a:bodyPr>
           <a:lstStyle/>
@@ -5304,7 +5343,7 @@
               <a:buNone/>
             </a:pPr>
             <a:r>
-              <a:rPr lang="en-US" sz="1550" dirty="0">
+              <a:rPr lang="en-US" sz="1320" dirty="0">
                 <a:solidFill>
                   <a:srgbClr val="17364A"/>
                 </a:solidFill>
@@ -5314,7 +5353,7 @@
               </a:rPr>
               <a:t>AI is not one technology or one product category. In public health, the word AI may refer to predictive.</a:t>
             </a:r>
-            <a:endParaRPr lang="en-US" sz="1550" dirty="0"/>
+            <a:endParaRPr lang="en-US" sz="1320" dirty="0"/>
           </a:p>
         </p:txBody>
       </p:sp>
@@ -5402,13 +5441,16 @@
           <a:ln/>
         </p:spPr>
         <p:txBody>
-          <a:bodyPr wrap="square" lIns="254" tIns="254" rIns="254" bIns="254" rtlCol="0" anchor="t">
+          <a:bodyPr wrap="square" lIns="508" tIns="508" rIns="508" bIns="508" rtlCol="0" anchor="t">
             <a:normAutofit/>
           </a:bodyPr>
           <a:lstStyle/>
           <a:p>
-            <a:r>
-              <a:rPr lang="en-US" sz="1380" dirty="0">
+            <a:pPr indent="0" marL="0">
+              <a:buNone/>
+            </a:pPr>
+            <a:r>
+              <a:rPr lang="en-US" sz="1220" dirty="0">
                 <a:solidFill>
                   <a:srgbClr val="17364A"/>
                 </a:solidFill>
@@ -5418,11 +5460,14 @@
               </a:rPr>
               <a:t>AI is not one technology or one product category.</a:t>
             </a:r>
-            <a:endParaRPr lang="en-US" sz="1380" dirty="0"/>
-          </a:p>
-          <a:p>
-            <a:r>
-              <a:rPr lang="en-US" sz="1380" dirty="0">
+            <a:endParaRPr lang="en-US" sz="1220" dirty="0"/>
+          </a:p>
+          <a:p>
+            <a:pPr indent="0" marL="0">
+              <a:buNone/>
+            </a:pPr>
+            <a:r>
+              <a:rPr lang="en-US" sz="1220" dirty="0">
                 <a:solidFill>
                   <a:srgbClr val="17364A"/>
                 </a:solidFill>
@@ -5430,13 +5475,16 @@
                 <a:ea typeface="Aptos" pitchFamily="34" charset="-122"/>
                 <a:cs typeface="Aptos" pitchFamily="34" charset="-120"/>
               </a:rPr>
-              <a:t>In public health, the word AI may refer to predictive models, classification tools,.</a:t>
-            </a:r>
-            <a:endParaRPr lang="en-US" sz="1380" dirty="0"/>
-          </a:p>
-          <a:p>
-            <a:r>
-              <a:rPr lang="en-US" sz="1380" dirty="0">
+              <a:t>In public health, the word AI may refer to predictive models,.</a:t>
+            </a:r>
+            <a:endParaRPr lang="en-US" sz="1220" dirty="0"/>
+          </a:p>
+          <a:p>
+            <a:pPr indent="0" marL="0">
+              <a:buNone/>
+            </a:pPr>
+            <a:r>
+              <a:rPr lang="en-US" sz="1220" dirty="0">
                 <a:solidFill>
                   <a:srgbClr val="17364A"/>
                 </a:solidFill>
@@ -5444,9 +5492,9 @@
                 <a:ea typeface="Aptos" pitchFamily="34" charset="-122"/>
                 <a:cs typeface="Aptos" pitchFamily="34" charset="-120"/>
               </a:rPr>
-              <a:t>Treating these as interchangeable can lead to poor procurement choices, weak safeguards,.</a:t>
-            </a:r>
-            <a:endParaRPr lang="en-US" sz="1380" dirty="0"/>
+              <a:t>Treating these as interchangeable can lead to poor procurement.</a:t>
+            </a:r>
+            <a:endParaRPr lang="en-US" sz="1220" dirty="0"/>
           </a:p>
         </p:txBody>
       </p:sp>
@@ -5524,17 +5572,17 @@
         </p:nvSpPr>
         <p:spPr>
           <a:xfrm>
-            <a:off x="7799832" y="5001768"/>
-            <a:ext cx="3145536" cy="502920"/>
-          </a:xfrm>
-          <a:prstGeom prst="rect">
-            <a:avLst/>
-          </a:prstGeom>
-          <a:noFill/>
-          <a:ln/>
-        </p:spPr>
-        <p:txBody>
-          <a:bodyPr wrap="square" lIns="0" tIns="0" rIns="0" bIns="0" rtlCol="0" anchor="t">
+            <a:off x="7799832" y="4974336"/>
+            <a:ext cx="3145536" cy="576072"/>
+          </a:xfrm>
+          <a:prstGeom prst="rect">
+            <a:avLst/>
+          </a:prstGeom>
+          <a:noFill/>
+          <a:ln/>
+        </p:spPr>
+        <p:txBody>
+          <a:bodyPr wrap="square" lIns="254" tIns="254" rIns="254" bIns="254" rtlCol="0" anchor="t">
             <a:normAutofit/>
           </a:bodyPr>
           <a:lstStyle/>
@@ -5543,7 +5591,7 @@
               <a:buNone/>
             </a:pPr>
             <a:r>
-              <a:rPr lang="en-US" sz="1550" dirty="0">
+              <a:rPr lang="en-US" sz="1320" dirty="0">
                 <a:solidFill>
                   <a:srgbClr val="17364A"/>
                 </a:solidFill>
@@ -5551,9 +5599,9 @@
                 <a:ea typeface="Aptos" pitchFamily="34" charset="-122"/>
                 <a:cs typeface="Aptos" pitchFamily="34" charset="-120"/>
               </a:rPr>
-              <a:t>Connect the concept to public health purpose, responsible use, required safeguards, documentation, and the next action a department should take.</a:t>
-            </a:r>
-            <a:endParaRPr lang="en-US" sz="1550" dirty="0"/>
+              <a:t>Connect the concept to public health purpose, responsible use, required safeguards, documentation, and the next action a.</a:t>
+            </a:r>
+            <a:endParaRPr lang="en-US" sz="1320" dirty="0"/>
           </a:p>
         </p:txBody>
       </p:sp>
@@ -5854,49 +5902,58 @@
           <a:ln/>
         </p:spPr>
         <p:txBody>
-          <a:bodyPr wrap="square" lIns="635" tIns="635" rIns="635" bIns="635" rtlCol="0" anchor="t">
+          <a:bodyPr wrap="square" lIns="1016" tIns="1016" rIns="1016" bIns="1016" rtlCol="0" anchor="t">
             <a:normAutofit/>
           </a:bodyPr>
           <a:lstStyle/>
           <a:p>
+            <a:pPr indent="0" marL="0">
+              <a:buNone/>
+            </a:pPr>
             <a:r>
               <a:rPr lang="en-US" sz="2100" dirty="0">
                 <a:solidFill>
-                  <a:srgbClr val="17364A"/>
-                </a:solidFill>
-                <a:latin typeface="Aptos" pitchFamily="34" charset="0"/>
-                <a:ea typeface="Aptos" pitchFamily="34" charset="-122"/>
-                <a:cs typeface="Aptos" pitchFamily="34" charset="-120"/>
-              </a:rPr>
-              <a:t>Artificial intelligence is best understood as a family of capabilities rather than a single product.</a:t>
+                  <a:srgbClr val="003A63"/>
+                </a:solidFill>
+                <a:latin typeface="Aptos" pitchFamily="34" charset="0"/>
+                <a:ea typeface="Aptos" pitchFamily="34" charset="-122"/>
+                <a:cs typeface="Aptos" pitchFamily="34" charset="-120"/>
+              </a:rPr>
+              <a:t>• Artificial intelligence is best understood as a family of capabilities rather than a single.</a:t>
             </a:r>
             <a:endParaRPr lang="en-US" sz="2100" dirty="0"/>
           </a:p>
           <a:p>
+            <a:pPr indent="0" marL="0">
+              <a:buNone/>
+            </a:pPr>
             <a:r>
               <a:rPr lang="en-US" sz="2100" dirty="0">
                 <a:solidFill>
-                  <a:srgbClr val="17364A"/>
-                </a:solidFill>
-                <a:latin typeface="Aptos" pitchFamily="34" charset="0"/>
-                <a:ea typeface="Aptos" pitchFamily="34" charset="-122"/>
-                <a:cs typeface="Aptos" pitchFamily="34" charset="-120"/>
-              </a:rPr>
-              <a:t>Some AI systems classify records, some detect patterns, some predict possible outcomes, some generate.</a:t>
+                  <a:srgbClr val="003A63"/>
+                </a:solidFill>
+                <a:latin typeface="Aptos" pitchFamily="34" charset="0"/>
+                <a:ea typeface="Aptos" pitchFamily="34" charset="-122"/>
+                <a:cs typeface="Aptos" pitchFamily="34" charset="-120"/>
+              </a:rPr>
+              <a:t>• Some AI systems classify records, some detect patterns, some predict possible outcomes, some.</a:t>
             </a:r>
             <a:endParaRPr lang="en-US" sz="2100" dirty="0"/>
           </a:p>
           <a:p>
+            <a:pPr indent="0" marL="0">
+              <a:buNone/>
+            </a:pPr>
             <a:r>
               <a:rPr lang="en-US" sz="2100" dirty="0">
                 <a:solidFill>
-                  <a:srgbClr val="17364A"/>
-                </a:solidFill>
-                <a:latin typeface="Aptos" pitchFamily="34" charset="0"/>
-                <a:ea typeface="Aptos" pitchFamily="34" charset="-122"/>
-                <a:cs typeface="Aptos" pitchFamily="34" charset="-120"/>
-              </a:rPr>
-              <a:t>This distinction matters because each capability has different data requirements, error patterns, human.</a:t>
+                  <a:srgbClr val="003A63"/>
+                </a:solidFill>
+                <a:latin typeface="Aptos" pitchFamily="34" charset="0"/>
+                <a:ea typeface="Aptos" pitchFamily="34" charset="-122"/>
+                <a:cs typeface="Aptos" pitchFamily="34" charset="-120"/>
+              </a:rPr>
+              <a:t>• This distinction matters because each capability has different data requirements, error.</a:t>
             </a:r>
             <a:endParaRPr lang="en-US" sz="2100" dirty="0"/>
           </a:p>
@@ -5976,17 +6033,17 @@
         </p:nvSpPr>
         <p:spPr>
           <a:xfrm>
-            <a:off x="7799832" y="1828800"/>
-            <a:ext cx="3145536" cy="685800"/>
-          </a:xfrm>
-          <a:prstGeom prst="rect">
-            <a:avLst/>
-          </a:prstGeom>
-          <a:noFill/>
-          <a:ln/>
-        </p:spPr>
-        <p:txBody>
-          <a:bodyPr wrap="square" lIns="0" tIns="0" rIns="0" bIns="0" rtlCol="0" anchor="t">
+            <a:off x="7799832" y="1801368"/>
+            <a:ext cx="3145536" cy="758952"/>
+          </a:xfrm>
+          <a:prstGeom prst="rect">
+            <a:avLst/>
+          </a:prstGeom>
+          <a:noFill/>
+          <a:ln/>
+        </p:spPr>
+        <p:txBody>
+          <a:bodyPr wrap="square" lIns="254" tIns="254" rIns="254" bIns="254" rtlCol="0" anchor="t">
             <a:normAutofit/>
           </a:bodyPr>
           <a:lstStyle/>
@@ -5995,7 +6052,7 @@
               <a:buNone/>
             </a:pPr>
             <a:r>
-              <a:rPr lang="en-US" sz="1550" dirty="0">
+              <a:rPr lang="en-US" sz="1320" dirty="0">
                 <a:solidFill>
                   <a:srgbClr val="17364A"/>
                 </a:solidFill>
@@ -6005,7 +6062,7 @@
               </a:rPr>
               <a:t>Artificial intelligence is best understood as a family of capabilities rather than a single product.</a:t>
             </a:r>
-            <a:endParaRPr lang="en-US" sz="1550" dirty="0"/>
+            <a:endParaRPr lang="en-US" sz="1320" dirty="0"/>
           </a:p>
         </p:txBody>
       </p:sp>
@@ -6093,13 +6150,16 @@
           <a:ln/>
         </p:spPr>
         <p:txBody>
-          <a:bodyPr wrap="square" lIns="254" tIns="254" rIns="254" bIns="254" rtlCol="0" anchor="t">
+          <a:bodyPr wrap="square" lIns="508" tIns="508" rIns="508" bIns="508" rtlCol="0" anchor="t">
             <a:normAutofit/>
           </a:bodyPr>
           <a:lstStyle/>
           <a:p>
-            <a:r>
-              <a:rPr lang="en-US" sz="1380" dirty="0">
+            <a:pPr indent="0" marL="0">
+              <a:buNone/>
+            </a:pPr>
+            <a:r>
+              <a:rPr lang="en-US" sz="1220" dirty="0">
                 <a:solidFill>
                   <a:srgbClr val="17364A"/>
                 </a:solidFill>
@@ -6107,13 +6167,16 @@
                 <a:ea typeface="Aptos" pitchFamily="34" charset="-122"/>
                 <a:cs typeface="Aptos" pitchFamily="34" charset="-120"/>
               </a:rPr>
-              <a:t>Some AI systems classify records, some detect patterns, some predict possible outcomes,.</a:t>
-            </a:r>
-            <a:endParaRPr lang="en-US" sz="1380" dirty="0"/>
-          </a:p>
-          <a:p>
-            <a:r>
-              <a:rPr lang="en-US" sz="1380" dirty="0">
+              <a:t>Some AI systems classify records, some detect patterns, some.</a:t>
+            </a:r>
+            <a:endParaRPr lang="en-US" sz="1220" dirty="0"/>
+          </a:p>
+          <a:p>
+            <a:pPr indent="0" marL="0">
+              <a:buNone/>
+            </a:pPr>
+            <a:r>
+              <a:rPr lang="en-US" sz="1220" dirty="0">
                 <a:solidFill>
                   <a:srgbClr val="17364A"/>
                 </a:solidFill>
@@ -6121,13 +6184,16 @@
                 <a:ea typeface="Aptos" pitchFamily="34" charset="-122"/>
                 <a:cs typeface="Aptos" pitchFamily="34" charset="-120"/>
               </a:rPr>
-              <a:t>This distinction matters because each capability has different data requirements, error.</a:t>
-            </a:r>
-            <a:endParaRPr lang="en-US" sz="1380" dirty="0"/>
-          </a:p>
-          <a:p>
-            <a:r>
-              <a:rPr lang="en-US" sz="1380" dirty="0">
+              <a:t>This distinction matters because each capability has different.</a:t>
+            </a:r>
+            <a:endParaRPr lang="en-US" sz="1220" dirty="0"/>
+          </a:p>
+          <a:p>
+            <a:pPr indent="0" marL="0">
+              <a:buNone/>
+            </a:pPr>
+            <a:r>
+              <a:rPr lang="en-US" sz="1220" dirty="0">
                 <a:solidFill>
                   <a:srgbClr val="17364A"/>
                 </a:solidFill>
@@ -6135,9 +6201,9 @@
                 <a:ea typeface="Aptos" pitchFamily="34" charset="-122"/>
                 <a:cs typeface="Aptos" pitchFamily="34" charset="-120"/>
               </a:rPr>
-              <a:t>A responsible public health discussion starts by naming what kind of AI support is being.</a:t>
-            </a:r>
-            <a:endParaRPr lang="en-US" sz="1380" dirty="0"/>
+              <a:t>A responsible public health discussion starts by naming what kind.</a:t>
+            </a:r>
+            <a:endParaRPr lang="en-US" sz="1220" dirty="0"/>
           </a:p>
         </p:txBody>
       </p:sp>
@@ -6215,17 +6281,17 @@
         </p:nvSpPr>
         <p:spPr>
           <a:xfrm>
-            <a:off x="7799832" y="5001768"/>
-            <a:ext cx="3145536" cy="502920"/>
-          </a:xfrm>
-          <a:prstGeom prst="rect">
-            <a:avLst/>
-          </a:prstGeom>
-          <a:noFill/>
-          <a:ln/>
-        </p:spPr>
-        <p:txBody>
-          <a:bodyPr wrap="square" lIns="0" tIns="0" rIns="0" bIns="0" rtlCol="0" anchor="t">
+            <a:off x="7799832" y="4974336"/>
+            <a:ext cx="3145536" cy="576072"/>
+          </a:xfrm>
+          <a:prstGeom prst="rect">
+            <a:avLst/>
+          </a:prstGeom>
+          <a:noFill/>
+          <a:ln/>
+        </p:spPr>
+        <p:txBody>
+          <a:bodyPr wrap="square" lIns="254" tIns="254" rIns="254" bIns="254" rtlCol="0" anchor="t">
             <a:normAutofit/>
           </a:bodyPr>
           <a:lstStyle/>
@@ -6234,7 +6300,7 @@
               <a:buNone/>
             </a:pPr>
             <a:r>
-              <a:rPr lang="en-US" sz="1550" dirty="0">
+              <a:rPr lang="en-US" sz="1320" dirty="0">
                 <a:solidFill>
                   <a:srgbClr val="17364A"/>
                 </a:solidFill>
@@ -6242,9 +6308,9 @@
                 <a:ea typeface="Aptos" pitchFamily="34" charset="-122"/>
                 <a:cs typeface="Aptos" pitchFamily="34" charset="-120"/>
               </a:rPr>
-              <a:t>Connect the concept to public health purpose, responsible use, required safeguards, documentation, and the next action a department should take.</a:t>
-            </a:r>
-            <a:endParaRPr lang="en-US" sz="1550" dirty="0"/>
+              <a:t>Connect the concept to public health purpose, responsible use, required safeguards, documentation, and the next action a.</a:t>
+            </a:r>
+            <a:endParaRPr lang="en-US" sz="1320" dirty="0"/>
           </a:p>
         </p:txBody>
       </p:sp>
@@ -6545,49 +6611,58 @@
           <a:ln/>
         </p:spPr>
         <p:txBody>
-          <a:bodyPr wrap="square" lIns="635" tIns="635" rIns="635" bIns="635" rtlCol="0" anchor="t">
+          <a:bodyPr wrap="square" lIns="1016" tIns="1016" rIns="1016" bIns="1016" rtlCol="0" anchor="t">
             <a:normAutofit/>
           </a:bodyPr>
           <a:lstStyle/>
           <a:p>
+            <a:pPr indent="0" marL="0">
+              <a:buNone/>
+            </a:pPr>
             <a:r>
               <a:rPr lang="en-US" sz="2100" dirty="0">
                 <a:solidFill>
-                  <a:srgbClr val="17364A"/>
-                </a:solidFill>
-                <a:latin typeface="Aptos" pitchFamily="34" charset="0"/>
-                <a:ea typeface="Aptos" pitchFamily="34" charset="-122"/>
-                <a:cs typeface="Aptos" pitchFamily="34" charset="-120"/>
-              </a:rPr>
-              <a:t>Retrieval-augmented generation combines generative AI with a defined set of source documents.</a:t>
+                  <a:srgbClr val="003A63"/>
+                </a:solidFill>
+                <a:latin typeface="Aptos" pitchFamily="34" charset="0"/>
+                <a:ea typeface="Aptos" pitchFamily="34" charset="-122"/>
+                <a:cs typeface="Aptos" pitchFamily="34" charset="-120"/>
+              </a:rPr>
+              <a:t>• Retrieval-augmented generation combines generative AI with a defined set of source documents.</a:t>
             </a:r>
             <a:endParaRPr lang="en-US" sz="2100" dirty="0"/>
           </a:p>
           <a:p>
+            <a:pPr indent="0" marL="0">
+              <a:buNone/>
+            </a:pPr>
             <a:r>
               <a:rPr lang="en-US" sz="2100" dirty="0">
                 <a:solidFill>
-                  <a:srgbClr val="17364A"/>
-                </a:solidFill>
-                <a:latin typeface="Aptos" pitchFamily="34" charset="0"/>
-                <a:ea typeface="Aptos" pitchFamily="34" charset="-122"/>
-                <a:cs typeface="Aptos" pitchFamily="34" charset="-120"/>
-              </a:rPr>
-              <a:t>Instead of relying only on a model's general training, the system retrieves relevant passages from.</a:t>
+                  <a:srgbClr val="003A63"/>
+                </a:solidFill>
+                <a:latin typeface="Aptos" pitchFamily="34" charset="0"/>
+                <a:ea typeface="Aptos" pitchFamily="34" charset="-122"/>
+                <a:cs typeface="Aptos" pitchFamily="34" charset="-120"/>
+              </a:rPr>
+              <a:t>• Instead of relying only on a model's general training, the system retrieves relevant passages.</a:t>
             </a:r>
             <a:endParaRPr lang="en-US" sz="2100" dirty="0"/>
           </a:p>
           <a:p>
+            <a:pPr indent="0" marL="0">
+              <a:buNone/>
+            </a:pPr>
             <a:r>
               <a:rPr lang="en-US" sz="2100" dirty="0">
                 <a:solidFill>
-                  <a:srgbClr val="17364A"/>
-                </a:solidFill>
-                <a:latin typeface="Aptos" pitchFamily="34" charset="0"/>
-                <a:ea typeface="Aptos" pitchFamily="34" charset="-122"/>
-                <a:cs typeface="Aptos" pitchFamily="34" charset="-120"/>
-              </a:rPr>
-              <a:t>This approach can be useful for policy summaries, inspection documentation, program guidance, or.</a:t>
+                  <a:srgbClr val="003A63"/>
+                </a:solidFill>
+                <a:latin typeface="Aptos" pitchFamily="34" charset="0"/>
+                <a:ea typeface="Aptos" pitchFamily="34" charset="-122"/>
+                <a:cs typeface="Aptos" pitchFamily="34" charset="-120"/>
+              </a:rPr>
+              <a:t>• This approach can be useful for policy summaries, inspection documentation, program guidance,.</a:t>
             </a:r>
             <a:endParaRPr lang="en-US" sz="2100" dirty="0"/>
           </a:p>
@@ -6667,17 +6742,17 @@
         </p:nvSpPr>
         <p:spPr>
           <a:xfrm>
-            <a:off x="7799832" y="1828800"/>
-            <a:ext cx="3145536" cy="685800"/>
-          </a:xfrm>
-          <a:prstGeom prst="rect">
-            <a:avLst/>
-          </a:prstGeom>
-          <a:noFill/>
-          <a:ln/>
-        </p:spPr>
-        <p:txBody>
-          <a:bodyPr wrap="square" lIns="0" tIns="0" rIns="0" bIns="0" rtlCol="0" anchor="t">
+            <a:off x="7799832" y="1801368"/>
+            <a:ext cx="3145536" cy="758952"/>
+          </a:xfrm>
+          <a:prstGeom prst="rect">
+            <a:avLst/>
+          </a:prstGeom>
+          <a:noFill/>
+          <a:ln/>
+        </p:spPr>
+        <p:txBody>
+          <a:bodyPr wrap="square" lIns="254" tIns="254" rIns="254" bIns="254" rtlCol="0" anchor="t">
             <a:normAutofit/>
           </a:bodyPr>
           <a:lstStyle/>
@@ -6686,7 +6761,7 @@
               <a:buNone/>
             </a:pPr>
             <a:r>
-              <a:rPr lang="en-US" sz="1550" dirty="0">
+              <a:rPr lang="en-US" sz="1320" dirty="0">
                 <a:solidFill>
                   <a:srgbClr val="17364A"/>
                 </a:solidFill>
@@ -6696,7 +6771,7 @@
               </a:rPr>
               <a:t>Retrieval-augmented generation combines generative AI with a defined set of source documents.</a:t>
             </a:r>
-            <a:endParaRPr lang="en-US" sz="1550" dirty="0"/>
+            <a:endParaRPr lang="en-US" sz="1320" dirty="0"/>
           </a:p>
         </p:txBody>
       </p:sp>
@@ -6784,13 +6859,16 @@
           <a:ln/>
         </p:spPr>
         <p:txBody>
-          <a:bodyPr wrap="square" lIns="254" tIns="254" rIns="254" bIns="254" rtlCol="0" anchor="t">
+          <a:bodyPr wrap="square" lIns="508" tIns="508" rIns="508" bIns="508" rtlCol="0" anchor="t">
             <a:normAutofit/>
           </a:bodyPr>
           <a:lstStyle/>
           <a:p>
-            <a:r>
-              <a:rPr lang="en-US" sz="1380" dirty="0">
+            <a:pPr indent="0" marL="0">
+              <a:buNone/>
+            </a:pPr>
+            <a:r>
+              <a:rPr lang="en-US" sz="1220" dirty="0">
                 <a:solidFill>
                   <a:srgbClr val="17364A"/>
                 </a:solidFill>
@@ -6798,13 +6876,16 @@
                 <a:ea typeface="Aptos" pitchFamily="34" charset="-122"/>
                 <a:cs typeface="Aptos" pitchFamily="34" charset="-120"/>
               </a:rPr>
-              <a:t>Instead of relying only on a model's general training, the system retrieves relevant.</a:t>
-            </a:r>
-            <a:endParaRPr lang="en-US" sz="1380" dirty="0"/>
-          </a:p>
-          <a:p>
-            <a:r>
-              <a:rPr lang="en-US" sz="1380" dirty="0">
+              <a:t>Instead of relying only on a model's general training, the system.</a:t>
+            </a:r>
+            <a:endParaRPr lang="en-US" sz="1220" dirty="0"/>
+          </a:p>
+          <a:p>
+            <a:pPr indent="0" marL="0">
+              <a:buNone/>
+            </a:pPr>
+            <a:r>
+              <a:rPr lang="en-US" sz="1220" dirty="0">
                 <a:solidFill>
                   <a:srgbClr val="17364A"/>
                 </a:solidFill>
@@ -6812,13 +6893,16 @@
                 <a:ea typeface="Aptos" pitchFamily="34" charset="-122"/>
                 <a:cs typeface="Aptos" pitchFamily="34" charset="-120"/>
               </a:rPr>
-              <a:t>This approach can be useful for policy summaries, inspection documentation, program.</a:t>
-            </a:r>
-            <a:endParaRPr lang="en-US" sz="1380" dirty="0"/>
-          </a:p>
-          <a:p>
-            <a:r>
-              <a:rPr lang="en-US" sz="1380" dirty="0">
+              <a:t>This approach can be useful for policy summaries, inspection.</a:t>
+            </a:r>
+            <a:endParaRPr lang="en-US" sz="1220" dirty="0"/>
+          </a:p>
+          <a:p>
+            <a:pPr indent="0" marL="0">
+              <a:buNone/>
+            </a:pPr>
+            <a:r>
+              <a:rPr lang="en-US" sz="1220" dirty="0">
                 <a:solidFill>
                   <a:srgbClr val="17364A"/>
                 </a:solidFill>
@@ -6826,9 +6910,9 @@
                 <a:ea typeface="Aptos" pitchFamily="34" charset="-122"/>
                 <a:cs typeface="Aptos" pitchFamily="34" charset="-120"/>
               </a:rPr>
-              <a:t>It still requires review because retrieval can miss important context, select the wrong.</a:t>
-            </a:r>
-            <a:endParaRPr lang="en-US" sz="1380" dirty="0"/>
+              <a:t>It still requires review because retrieval can miss important.</a:t>
+            </a:r>
+            <a:endParaRPr lang="en-US" sz="1220" dirty="0"/>
           </a:p>
         </p:txBody>
       </p:sp>
@@ -6906,17 +6990,17 @@
         </p:nvSpPr>
         <p:spPr>
           <a:xfrm>
-            <a:off x="7799832" y="5001768"/>
-            <a:ext cx="3145536" cy="502920"/>
-          </a:xfrm>
-          <a:prstGeom prst="rect">
-            <a:avLst/>
-          </a:prstGeom>
-          <a:noFill/>
-          <a:ln/>
-        </p:spPr>
-        <p:txBody>
-          <a:bodyPr wrap="square" lIns="0" tIns="0" rIns="0" bIns="0" rtlCol="0" anchor="t">
+            <a:off x="7799832" y="4974336"/>
+            <a:ext cx="3145536" cy="576072"/>
+          </a:xfrm>
+          <a:prstGeom prst="rect">
+            <a:avLst/>
+          </a:prstGeom>
+          <a:noFill/>
+          <a:ln/>
+        </p:spPr>
+        <p:txBody>
+          <a:bodyPr wrap="square" lIns="254" tIns="254" rIns="254" bIns="254" rtlCol="0" anchor="t">
             <a:normAutofit/>
           </a:bodyPr>
           <a:lstStyle/>
@@ -6925,7 +7009,7 @@
               <a:buNone/>
             </a:pPr>
             <a:r>
-              <a:rPr lang="en-US" sz="1550" dirty="0">
+              <a:rPr lang="en-US" sz="1320" dirty="0">
                 <a:solidFill>
                   <a:srgbClr val="17364A"/>
                 </a:solidFill>
@@ -6933,9 +7017,9 @@
                 <a:ea typeface="Aptos" pitchFamily="34" charset="-122"/>
                 <a:cs typeface="Aptos" pitchFamily="34" charset="-120"/>
               </a:rPr>
-              <a:t>Connect the concept to public health purpose, responsible use, required safeguards, documentation, and the next action a department should take.</a:t>
-            </a:r>
-            <a:endParaRPr lang="en-US" sz="1550" dirty="0"/>
+              <a:t>Connect the concept to public health purpose, responsible use, required safeguards, documentation, and the next action a.</a:t>
+            </a:r>
+            <a:endParaRPr lang="en-US" sz="1320" dirty="0"/>
           </a:p>
         </p:txBody>
       </p:sp>
@@ -7236,49 +7320,58 @@
           <a:ln/>
         </p:spPr>
         <p:txBody>
-          <a:bodyPr wrap="square" lIns="635" tIns="635" rIns="635" bIns="635" rtlCol="0" anchor="t">
+          <a:bodyPr wrap="square" lIns="1016" tIns="1016" rIns="1016" bIns="1016" rtlCol="0" anchor="t">
             <a:normAutofit/>
           </a:bodyPr>
           <a:lstStyle/>
           <a:p>
+            <a:pPr indent="0" marL="0">
+              <a:buNone/>
+            </a:pPr>
             <a:r>
               <a:rPr lang="en-US" sz="2100" dirty="0">
                 <a:solidFill>
-                  <a:srgbClr val="17364A"/>
-                </a:solidFill>
-                <a:latin typeface="Aptos" pitchFamily="34" charset="0"/>
-                <a:ea typeface="Aptos" pitchFamily="34" charset="-122"/>
-                <a:cs typeface="Aptos" pitchFamily="34" charset="-120"/>
-              </a:rPr>
-              <a:t>Use these AI concepts to identify where AI may already be present in your department.</a:t>
+                  <a:srgbClr val="003A63"/>
+                </a:solidFill>
+                <a:latin typeface="Aptos" pitchFamily="34" charset="0"/>
+                <a:ea typeface="Aptos" pitchFamily="34" charset="-122"/>
+                <a:cs typeface="Aptos" pitchFamily="34" charset="-120"/>
+              </a:rPr>
+              <a:t>• Use these AI concepts to identify where AI may already be present in your department.</a:t>
             </a:r>
             <a:endParaRPr lang="en-US" sz="2100" dirty="0"/>
           </a:p>
           <a:p>
+            <a:pPr indent="0" marL="0">
+              <a:buNone/>
+            </a:pPr>
             <a:r>
               <a:rPr lang="en-US" sz="2100" dirty="0">
                 <a:solidFill>
-                  <a:srgbClr val="17364A"/>
-                </a:solidFill>
-                <a:latin typeface="Aptos" pitchFamily="34" charset="0"/>
-                <a:ea typeface="Aptos" pitchFamily="34" charset="-122"/>
-                <a:cs typeface="Aptos" pitchFamily="34" charset="-120"/>
-              </a:rPr>
-              <a:t>Informal use can include staff drafting emails or public messages with consumer AI tools, analysts.</a:t>
+                  <a:srgbClr val="003A63"/>
+                </a:solidFill>
+                <a:latin typeface="Aptos" pitchFamily="34" charset="0"/>
+                <a:ea typeface="Aptos" pitchFamily="34" charset="-122"/>
+                <a:cs typeface="Aptos" pitchFamily="34" charset="-120"/>
+              </a:rPr>
+              <a:t>• Informal use can include staff drafting emails or public messages with consumer AI tools,.</a:t>
             </a:r>
             <a:endParaRPr lang="en-US" sz="2100" dirty="0"/>
           </a:p>
           <a:p>
+            <a:pPr indent="0" marL="0">
+              <a:buNone/>
+            </a:pPr>
             <a:r>
               <a:rPr lang="en-US" sz="2100" dirty="0">
                 <a:solidFill>
-                  <a:srgbClr val="17364A"/>
-                </a:solidFill>
-                <a:latin typeface="Aptos" pitchFamily="34" charset="0"/>
-                <a:ea typeface="Aptos" pitchFamily="34" charset="-122"/>
-                <a:cs typeface="Aptos" pitchFamily="34" charset="-120"/>
-              </a:rPr>
-              <a:t>An early inventory does not need to be punitive.</a:t>
+                  <a:srgbClr val="003A63"/>
+                </a:solidFill>
+                <a:latin typeface="Aptos" pitchFamily="34" charset="0"/>
+                <a:ea typeface="Aptos" pitchFamily="34" charset="-122"/>
+                <a:cs typeface="Aptos" pitchFamily="34" charset="-120"/>
+              </a:rPr>
+              <a:t>• An early inventory does not need to be punitive.</a:t>
             </a:r>
             <a:endParaRPr lang="en-US" sz="2100" dirty="0"/>
           </a:p>
@@ -7358,17 +7451,17 @@
         </p:nvSpPr>
         <p:spPr>
           <a:xfrm>
-            <a:off x="7799832" y="1828800"/>
-            <a:ext cx="3145536" cy="685800"/>
-          </a:xfrm>
-          <a:prstGeom prst="rect">
-            <a:avLst/>
-          </a:prstGeom>
-          <a:noFill/>
-          <a:ln/>
-        </p:spPr>
-        <p:txBody>
-          <a:bodyPr wrap="square" lIns="0" tIns="0" rIns="0" bIns="0" rtlCol="0" anchor="t">
+            <a:off x="7799832" y="1801368"/>
+            <a:ext cx="3145536" cy="758952"/>
+          </a:xfrm>
+          <a:prstGeom prst="rect">
+            <a:avLst/>
+          </a:prstGeom>
+          <a:noFill/>
+          <a:ln/>
+        </p:spPr>
+        <p:txBody>
+          <a:bodyPr wrap="square" lIns="254" tIns="254" rIns="254" bIns="254" rtlCol="0" anchor="t">
             <a:normAutofit/>
           </a:bodyPr>
           <a:lstStyle/>
@@ -7377,7 +7470,7 @@
               <a:buNone/>
             </a:pPr>
             <a:r>
-              <a:rPr lang="en-US" sz="1550" dirty="0">
+              <a:rPr lang="en-US" sz="1320" dirty="0">
                 <a:solidFill>
                   <a:srgbClr val="17364A"/>
                 </a:solidFill>
@@ -7387,7 +7480,7 @@
               </a:rPr>
               <a:t>Use these AI concepts to identify where AI may already be present in your department.</a:t>
             </a:r>
-            <a:endParaRPr lang="en-US" sz="1550" dirty="0"/>
+            <a:endParaRPr lang="en-US" sz="1320" dirty="0"/>
           </a:p>
         </p:txBody>
       </p:sp>
@@ -7475,13 +7568,16 @@
           <a:ln/>
         </p:spPr>
         <p:txBody>
-          <a:bodyPr wrap="square" lIns="254" tIns="254" rIns="254" bIns="254" rtlCol="0" anchor="t">
+          <a:bodyPr wrap="square" lIns="508" tIns="508" rIns="508" bIns="508" rtlCol="0" anchor="t">
             <a:normAutofit/>
           </a:bodyPr>
           <a:lstStyle/>
           <a:p>
-            <a:r>
-              <a:rPr lang="en-US" sz="1380" dirty="0">
+            <a:pPr indent="0" marL="0">
+              <a:buNone/>
+            </a:pPr>
+            <a:r>
+              <a:rPr lang="en-US" sz="1220" dirty="0">
                 <a:solidFill>
                   <a:srgbClr val="17364A"/>
                 </a:solidFill>
@@ -7489,13 +7585,16 @@
                 <a:ea typeface="Aptos" pitchFamily="34" charset="-122"/>
                 <a:cs typeface="Aptos" pitchFamily="34" charset="-120"/>
               </a:rPr>
-              <a:t>Informal use can include staff drafting emails or public messages with consumer AI tools,.</a:t>
-            </a:r>
-            <a:endParaRPr lang="en-US" sz="1380" dirty="0"/>
-          </a:p>
-          <a:p>
-            <a:r>
-              <a:rPr lang="en-US" sz="1380" dirty="0">
+              <a:t>Informal use can include staff drafting emails or public messages.</a:t>
+            </a:r>
+            <a:endParaRPr lang="en-US" sz="1220" dirty="0"/>
+          </a:p>
+          <a:p>
+            <a:pPr indent="0" marL="0">
+              <a:buNone/>
+            </a:pPr>
+            <a:r>
+              <a:rPr lang="en-US" sz="1220" dirty="0">
                 <a:solidFill>
                   <a:srgbClr val="17364A"/>
                 </a:solidFill>
@@ -7503,13 +7602,16 @@
                 <a:ea typeface="Aptos" pitchFamily="34" charset="-122"/>
                 <a:cs typeface="Aptos" pitchFamily="34" charset="-120"/>
               </a:rPr>
-              <a:t>Its purpose is to understand what is already happening, where sensitive data may be.</a:t>
-            </a:r>
-            <a:endParaRPr lang="en-US" sz="1380" dirty="0"/>
-          </a:p>
-          <a:p>
-            <a:r>
-              <a:rPr lang="en-US" sz="1380" dirty="0">
+              <a:t>Its purpose is to understand what is already happening, where.</a:t>
+            </a:r>
+            <a:endParaRPr lang="en-US" sz="1220" dirty="0"/>
+          </a:p>
+          <a:p>
+            <a:pPr indent="0" marL="0">
+              <a:buNone/>
+            </a:pPr>
+            <a:r>
+              <a:rPr lang="en-US" sz="1220" dirty="0">
                 <a:solidFill>
                   <a:srgbClr val="17364A"/>
                 </a:solidFill>
@@ -7517,9 +7619,9 @@
                 <a:ea typeface="Aptos" pitchFamily="34" charset="-122"/>
                 <a:cs typeface="Aptos" pitchFamily="34" charset="-120"/>
               </a:rPr>
-              <a:t>A common vocabulary helps different roles evaluate the same workflow together.</a:t>
-            </a:r>
-            <a:endParaRPr lang="en-US" sz="1380" dirty="0"/>
+              <a:t>A common vocabulary helps different roles evaluate the same.</a:t>
+            </a:r>
+            <a:endParaRPr lang="en-US" sz="1220" dirty="0"/>
           </a:p>
         </p:txBody>
       </p:sp>
@@ -7597,17 +7699,17 @@
         </p:nvSpPr>
         <p:spPr>
           <a:xfrm>
-            <a:off x="7799832" y="5001768"/>
-            <a:ext cx="3145536" cy="502920"/>
-          </a:xfrm>
-          <a:prstGeom prst="rect">
-            <a:avLst/>
-          </a:prstGeom>
-          <a:noFill/>
-          <a:ln/>
-        </p:spPr>
-        <p:txBody>
-          <a:bodyPr wrap="square" lIns="0" tIns="0" rIns="0" bIns="0" rtlCol="0" anchor="t">
+            <a:off x="7799832" y="4974336"/>
+            <a:ext cx="3145536" cy="576072"/>
+          </a:xfrm>
+          <a:prstGeom prst="rect">
+            <a:avLst/>
+          </a:prstGeom>
+          <a:noFill/>
+          <a:ln/>
+        </p:spPr>
+        <p:txBody>
+          <a:bodyPr wrap="square" lIns="254" tIns="254" rIns="254" bIns="254" rtlCol="0" anchor="t">
             <a:normAutofit/>
           </a:bodyPr>
           <a:lstStyle/>
@@ -7616,7 +7718,7 @@
               <a:buNone/>
             </a:pPr>
             <a:r>
-              <a:rPr lang="en-US" sz="1550" dirty="0">
+              <a:rPr lang="en-US" sz="1320" dirty="0">
                 <a:solidFill>
                   <a:srgbClr val="17364A"/>
                 </a:solidFill>
@@ -7624,9 +7726,9 @@
                 <a:ea typeface="Aptos" pitchFamily="34" charset="-122"/>
                 <a:cs typeface="Aptos" pitchFamily="34" charset="-120"/>
               </a:rPr>
-              <a:t>Connect the concept to public health purpose, responsible use, required safeguards, documentation, and the next action a department should take.</a:t>
-            </a:r>
-            <a:endParaRPr lang="en-US" sz="1550" dirty="0"/>
+              <a:t>Connect the concept to public health purpose, responsible use, required safeguards, documentation, and the next action a.</a:t>
+            </a:r>
+            <a:endParaRPr lang="en-US" sz="1320" dirty="0"/>
           </a:p>
         </p:txBody>
       </p:sp>
@@ -7927,49 +8029,58 @@
           <a:ln/>
         </p:spPr>
         <p:txBody>
-          <a:bodyPr wrap="square" lIns="635" tIns="635" rIns="635" bIns="635" rtlCol="0" anchor="t">
+          <a:bodyPr wrap="square" lIns="1016" tIns="1016" rIns="1016" bIns="1016" rtlCol="0" anchor="t">
             <a:normAutofit/>
           </a:bodyPr>
           <a:lstStyle/>
           <a:p>
+            <a:pPr indent="0" marL="0">
+              <a:buNone/>
+            </a:pPr>
             <a:r>
               <a:rPr lang="en-US" sz="2100" dirty="0">
                 <a:solidFill>
-                  <a:srgbClr val="17364A"/>
-                </a:solidFill>
-                <a:latin typeface="Aptos" pitchFamily="34" charset="0"/>
-                <a:ea typeface="Aptos" pitchFamily="34" charset="-122"/>
-                <a:cs typeface="Aptos" pitchFamily="34" charset="-120"/>
-              </a:rPr>
-              <a:t>Before any AI project begins, confirm the purpose of the use, the data involved, the intended users,.</a:t>
+                  <a:srgbClr val="003A63"/>
+                </a:solidFill>
+                <a:latin typeface="Aptos" pitchFamily="34" charset="0"/>
+                <a:ea typeface="Aptos" pitchFamily="34" charset="-122"/>
+                <a:cs typeface="Aptos" pitchFamily="34" charset="-120"/>
+              </a:rPr>
+              <a:t>• Before any AI project begins, confirm the purpose of the use, the data involved, the intended.</a:t>
             </a:r>
             <a:endParaRPr lang="en-US" sz="2100" dirty="0"/>
           </a:p>
           <a:p>
+            <a:pPr indent="0" marL="0">
+              <a:buNone/>
+            </a:pPr>
             <a:r>
               <a:rPr lang="en-US" sz="2100" dirty="0">
                 <a:solidFill>
-                  <a:srgbClr val="17364A"/>
-                </a:solidFill>
-                <a:latin typeface="Aptos" pitchFamily="34" charset="0"/>
-                <a:ea typeface="Aptos" pitchFamily="34" charset="-122"/>
-                <a:cs typeface="Aptos" pitchFamily="34" charset="-120"/>
-              </a:rPr>
-              <a:t>These questions should be answered before procurement, pilot approval, or workflow redesign.</a:t>
+                  <a:srgbClr val="003A63"/>
+                </a:solidFill>
+                <a:latin typeface="Aptos" pitchFamily="34" charset="0"/>
+                <a:ea typeface="Aptos" pitchFamily="34" charset="-122"/>
+                <a:cs typeface="Aptos" pitchFamily="34" charset="-120"/>
+              </a:rPr>
+              <a:t>• These questions should be answered before procurement, pilot approval, or workflow redesign.</a:t>
             </a:r>
             <a:endParaRPr lang="en-US" sz="2100" dirty="0"/>
           </a:p>
           <a:p>
+            <a:pPr indent="0" marL="0">
+              <a:buNone/>
+            </a:pPr>
             <a:r>
               <a:rPr lang="en-US" sz="2100" dirty="0">
                 <a:solidFill>
-                  <a:srgbClr val="17364A"/>
-                </a:solidFill>
-                <a:latin typeface="Aptos" pitchFamily="34" charset="0"/>
-                <a:ea typeface="Aptos" pitchFamily="34" charset="-122"/>
-                <a:cs typeface="Aptos" pitchFamily="34" charset="-120"/>
-              </a:rPr>
-              <a:t>If the department cannot explain what the AI will do and how people will review it, the project should.</a:t>
+                  <a:srgbClr val="003A63"/>
+                </a:solidFill>
+                <a:latin typeface="Aptos" pitchFamily="34" charset="0"/>
+                <a:ea typeface="Aptos" pitchFamily="34" charset="-122"/>
+                <a:cs typeface="Aptos" pitchFamily="34" charset="-120"/>
+              </a:rPr>
+              <a:t>• If the department cannot explain what the AI will do and how people will review it, the.</a:t>
             </a:r>
             <a:endParaRPr lang="en-US" sz="2100" dirty="0"/>
           </a:p>
@@ -8049,17 +8160,17 @@
         </p:nvSpPr>
         <p:spPr>
           <a:xfrm>
-            <a:off x="7799832" y="1828800"/>
-            <a:ext cx="3145536" cy="685800"/>
-          </a:xfrm>
-          <a:prstGeom prst="rect">
-            <a:avLst/>
-          </a:prstGeom>
-          <a:noFill/>
-          <a:ln/>
-        </p:spPr>
-        <p:txBody>
-          <a:bodyPr wrap="square" lIns="0" tIns="0" rIns="0" bIns="0" rtlCol="0" anchor="t">
+            <a:off x="7799832" y="1801368"/>
+            <a:ext cx="3145536" cy="758952"/>
+          </a:xfrm>
+          <a:prstGeom prst="rect">
+            <a:avLst/>
+          </a:prstGeom>
+          <a:noFill/>
+          <a:ln/>
+        </p:spPr>
+        <p:txBody>
+          <a:bodyPr wrap="square" lIns="254" tIns="254" rIns="254" bIns="254" rtlCol="0" anchor="t">
             <a:normAutofit/>
           </a:bodyPr>
           <a:lstStyle/>
@@ -8068,7 +8179,7 @@
               <a:buNone/>
             </a:pPr>
             <a:r>
-              <a:rPr lang="en-US" sz="1550" dirty="0">
+              <a:rPr lang="en-US" sz="1320" dirty="0">
                 <a:solidFill>
                   <a:srgbClr val="17364A"/>
                 </a:solidFill>
@@ -8078,7 +8189,7 @@
               </a:rPr>
               <a:t>Before any AI project begins, confirm the purpose of the use, the data involved, the intended users,.</a:t>
             </a:r>
-            <a:endParaRPr lang="en-US" sz="1550" dirty="0"/>
+            <a:endParaRPr lang="en-US" sz="1320" dirty="0"/>
           </a:p>
         </p:txBody>
       </p:sp>
@@ -8166,13 +8277,16 @@
           <a:ln/>
         </p:spPr>
         <p:txBody>
-          <a:bodyPr wrap="square" lIns="254" tIns="254" rIns="254" bIns="254" rtlCol="0" anchor="t">
+          <a:bodyPr wrap="square" lIns="508" tIns="508" rIns="508" bIns="508" rtlCol="0" anchor="t">
             <a:normAutofit/>
           </a:bodyPr>
           <a:lstStyle/>
           <a:p>
-            <a:r>
-              <a:rPr lang="en-US" sz="1380" dirty="0">
+            <a:pPr indent="0" marL="0">
+              <a:buNone/>
+            </a:pPr>
+            <a:r>
+              <a:rPr lang="en-US" sz="1220" dirty="0">
                 <a:solidFill>
                   <a:srgbClr val="17364A"/>
                 </a:solidFill>
@@ -8180,13 +8294,16 @@
                 <a:ea typeface="Aptos" pitchFamily="34" charset="-122"/>
                 <a:cs typeface="Aptos" pitchFamily="34" charset="-120"/>
               </a:rPr>
-              <a:t>Before any AI project begins, confirm the purpose of the use, the data involved, the.</a:t>
-            </a:r>
-            <a:endParaRPr lang="en-US" sz="1380" dirty="0"/>
-          </a:p>
-          <a:p>
-            <a:r>
-              <a:rPr lang="en-US" sz="1380" dirty="0">
+              <a:t>Before any AI project begins, confirm the purpose of the use, the.</a:t>
+            </a:r>
+            <a:endParaRPr lang="en-US" sz="1220" dirty="0"/>
+          </a:p>
+          <a:p>
+            <a:pPr indent="0" marL="0">
+              <a:buNone/>
+            </a:pPr>
+            <a:r>
+              <a:rPr lang="en-US" sz="1220" dirty="0">
                 <a:solidFill>
                   <a:srgbClr val="17364A"/>
                 </a:solidFill>
@@ -8194,13 +8311,16 @@
                 <a:ea typeface="Aptos" pitchFamily="34" charset="-122"/>
                 <a:cs typeface="Aptos" pitchFamily="34" charset="-120"/>
               </a:rPr>
-              <a:t>If the department cannot explain what the AI will do and how people will review it, the.</a:t>
-            </a:r>
-            <a:endParaRPr lang="en-US" sz="1380" dirty="0"/>
-          </a:p>
-          <a:p>
-            <a:r>
-              <a:rPr lang="en-US" sz="1380" dirty="0">
+              <a:t>If the department cannot explain what the AI will do and how.</a:t>
+            </a:r>
+            <a:endParaRPr lang="en-US" sz="1220" dirty="0"/>
+          </a:p>
+          <a:p>
+            <a:pPr indent="0" marL="0">
+              <a:buNone/>
+            </a:pPr>
+            <a:r>
+              <a:rPr lang="en-US" sz="1220" dirty="0">
                 <a:solidFill>
                   <a:srgbClr val="17364A"/>
                 </a:solidFill>
@@ -8208,9 +8328,9 @@
                 <a:ea typeface="Aptos" pitchFamily="34" charset="-122"/>
                 <a:cs typeface="Aptos" pitchFamily="34" charset="-120"/>
               </a:rPr>
-              <a:t>Document what the AI is allowed to do and what decisions remain with qualified public.</a:t>
-            </a:r>
-            <a:endParaRPr lang="en-US" sz="1380" dirty="0"/>
+              <a:t>Document what the AI is allowed to do and what decisions remain.</a:t>
+            </a:r>
+            <a:endParaRPr lang="en-US" sz="1220" dirty="0"/>
           </a:p>
         </p:txBody>
       </p:sp>
@@ -8288,17 +8408,17 @@
         </p:nvSpPr>
         <p:spPr>
           <a:xfrm>
-            <a:off x="7799832" y="5001768"/>
-            <a:ext cx="3145536" cy="502920"/>
-          </a:xfrm>
-          <a:prstGeom prst="rect">
-            <a:avLst/>
-          </a:prstGeom>
-          <a:noFill/>
-          <a:ln/>
-        </p:spPr>
-        <p:txBody>
-          <a:bodyPr wrap="square" lIns="0" tIns="0" rIns="0" bIns="0" rtlCol="0" anchor="t">
+            <a:off x="7799832" y="4974336"/>
+            <a:ext cx="3145536" cy="576072"/>
+          </a:xfrm>
+          <a:prstGeom prst="rect">
+            <a:avLst/>
+          </a:prstGeom>
+          <a:noFill/>
+          <a:ln/>
+        </p:spPr>
+        <p:txBody>
+          <a:bodyPr wrap="square" lIns="254" tIns="254" rIns="254" bIns="254" rtlCol="0" anchor="t">
             <a:normAutofit/>
           </a:bodyPr>
           <a:lstStyle/>
@@ -8307,7 +8427,7 @@
               <a:buNone/>
             </a:pPr>
             <a:r>
-              <a:rPr lang="en-US" sz="1550" dirty="0">
+              <a:rPr lang="en-US" sz="1320" dirty="0">
                 <a:solidFill>
                   <a:srgbClr val="17364A"/>
                 </a:solidFill>
@@ -8315,9 +8435,9 @@
                 <a:ea typeface="Aptos" pitchFamily="34" charset="-122"/>
                 <a:cs typeface="Aptos" pitchFamily="34" charset="-120"/>
               </a:rPr>
-              <a:t>Use the concept to clarify workflow changes, dependencies, staffing, procurement requirements, training needs, and implementation checkpoints.</a:t>
-            </a:r>
-            <a:endParaRPr lang="en-US" sz="1550" dirty="0"/>
+              <a:t>Use the concept to clarify workflow changes, dependencies, staffing, procurement requirements, training needs, and.</a:t>
+            </a:r>
+            <a:endParaRPr lang="en-US" sz="1320" dirty="0"/>
           </a:p>
         </p:txBody>
       </p:sp>
@@ -8618,35 +8738,41 @@
           <a:ln/>
         </p:spPr>
         <p:txBody>
-          <a:bodyPr wrap="square" lIns="635" tIns="635" rIns="635" bIns="635" rtlCol="0" anchor="t">
+          <a:bodyPr wrap="square" lIns="1016" tIns="1016" rIns="1016" bIns="1016" rtlCol="0" anchor="t">
             <a:normAutofit/>
           </a:bodyPr>
           <a:lstStyle/>
           <a:p>
+            <a:pPr indent="0" marL="0">
+              <a:buNone/>
+            </a:pPr>
             <a:r>
               <a:rPr lang="en-US" sz="2100" dirty="0">
                 <a:solidFill>
-                  <a:srgbClr val="17364A"/>
-                </a:solidFill>
-                <a:latin typeface="Aptos" pitchFamily="34" charset="0"/>
-                <a:ea typeface="Aptos" pitchFamily="34" charset="-122"/>
-                <a:cs typeface="Aptos" pitchFamily="34" charset="-120"/>
-              </a:rPr>
-              <a:t>Understanding what these systems can and cannot do is the starting point for responsible adoption.</a:t>
+                  <a:srgbClr val="003A63"/>
+                </a:solidFill>
+                <a:latin typeface="Aptos" pitchFamily="34" charset="0"/>
+                <a:ea typeface="Aptos" pitchFamily="34" charset="-122"/>
+                <a:cs typeface="Aptos" pitchFamily="34" charset="-120"/>
+              </a:rPr>
+              <a:t>• Understanding what these systems can and cannot do is the starting point for responsible.</a:t>
             </a:r>
             <a:endParaRPr lang="en-US" sz="2100" dirty="0"/>
           </a:p>
           <a:p>
+            <a:pPr indent="0" marL="0">
+              <a:buNone/>
+            </a:pPr>
             <a:r>
               <a:rPr lang="en-US" sz="2100" dirty="0">
                 <a:solidFill>
-                  <a:srgbClr val="17364A"/>
-                </a:solidFill>
-                <a:latin typeface="Aptos" pitchFamily="34" charset="0"/>
-                <a:ea typeface="Aptos" pitchFamily="34" charset="-122"/>
-                <a:cs typeface="Aptos" pitchFamily="34" charset="-120"/>
-              </a:rPr>
-              <a:t>Agencies need a shared vocabulary before they can set guardrails, evaluate vendors, select use cases,.</a:t>
+                  <a:srgbClr val="003A63"/>
+                </a:solidFill>
+                <a:latin typeface="Aptos" pitchFamily="34" charset="0"/>
+                <a:ea typeface="Aptos" pitchFamily="34" charset="-122"/>
+                <a:cs typeface="Aptos" pitchFamily="34" charset="-120"/>
+              </a:rPr>
+              <a:t>• Agencies need a shared vocabulary before they can set guardrails, evaluate vendors, select use.</a:t>
             </a:r>
             <a:endParaRPr lang="en-US" sz="2100" dirty="0"/>
           </a:p>
@@ -8726,17 +8852,17 @@
         </p:nvSpPr>
         <p:spPr>
           <a:xfrm>
-            <a:off x="7799832" y="1828800"/>
-            <a:ext cx="3145536" cy="685800"/>
-          </a:xfrm>
-          <a:prstGeom prst="rect">
-            <a:avLst/>
-          </a:prstGeom>
-          <a:noFill/>
-          <a:ln/>
-        </p:spPr>
-        <p:txBody>
-          <a:bodyPr wrap="square" lIns="0" tIns="0" rIns="0" bIns="0" rtlCol="0" anchor="t">
+            <a:off x="7799832" y="1801368"/>
+            <a:ext cx="3145536" cy="758952"/>
+          </a:xfrm>
+          <a:prstGeom prst="rect">
+            <a:avLst/>
+          </a:prstGeom>
+          <a:noFill/>
+          <a:ln/>
+        </p:spPr>
+        <p:txBody>
+          <a:bodyPr wrap="square" lIns="254" tIns="254" rIns="254" bIns="254" rtlCol="0" anchor="t">
             <a:normAutofit/>
           </a:bodyPr>
           <a:lstStyle/>
@@ -8745,7 +8871,7 @@
               <a:buNone/>
             </a:pPr>
             <a:r>
-              <a:rPr lang="en-US" sz="1550" dirty="0">
+              <a:rPr lang="en-US" sz="1320" dirty="0">
                 <a:solidFill>
                   <a:srgbClr val="17364A"/>
                 </a:solidFill>
@@ -8755,7 +8881,7 @@
               </a:rPr>
               <a:t>Understanding what these systems can and cannot do is the starting point for responsible adoption.</a:t>
             </a:r>
-            <a:endParaRPr lang="en-US" sz="1550" dirty="0"/>
+            <a:endParaRPr lang="en-US" sz="1320" dirty="0"/>
           </a:p>
         </p:txBody>
       </p:sp>
@@ -8843,13 +8969,16 @@
           <a:ln/>
         </p:spPr>
         <p:txBody>
-          <a:bodyPr wrap="square" lIns="254" tIns="254" rIns="254" bIns="254" rtlCol="0" anchor="t">
+          <a:bodyPr wrap="square" lIns="508" tIns="508" rIns="508" bIns="508" rtlCol="0" anchor="t">
             <a:normAutofit/>
           </a:bodyPr>
           <a:lstStyle/>
           <a:p>
-            <a:r>
-              <a:rPr lang="en-US" sz="1380" dirty="0">
+            <a:pPr indent="0" marL="0">
+              <a:buNone/>
+            </a:pPr>
+            <a:r>
+              <a:rPr lang="en-US" sz="1220" dirty="0">
                 <a:solidFill>
                   <a:srgbClr val="17364A"/>
                 </a:solidFill>
@@ -8857,13 +8986,16 @@
                 <a:ea typeface="Aptos" pitchFamily="34" charset="-122"/>
                 <a:cs typeface="Aptos" pitchFamily="34" charset="-120"/>
               </a:rPr>
-              <a:t>Understanding what these systems can and cannot do is the starting point for responsible.</a:t>
-            </a:r>
-            <a:endParaRPr lang="en-US" sz="1380" dirty="0"/>
-          </a:p>
-          <a:p>
-            <a:r>
-              <a:rPr lang="en-US" sz="1380" dirty="0">
+              <a:t>Understanding what these systems can and cannot do is the starting.</a:t>
+            </a:r>
+            <a:endParaRPr lang="en-US" sz="1220" dirty="0"/>
+          </a:p>
+          <a:p>
+            <a:pPr indent="0" marL="0">
+              <a:buNone/>
+            </a:pPr>
+            <a:r>
+              <a:rPr lang="en-US" sz="1220" dirty="0">
                 <a:solidFill>
                   <a:srgbClr val="17364A"/>
                 </a:solidFill>
@@ -8871,9 +9003,9 @@
                 <a:ea typeface="Aptos" pitchFamily="34" charset="-122"/>
                 <a:cs typeface="Aptos" pitchFamily="34" charset="-120"/>
               </a:rPr>
-              <a:t>Agencies need a shared vocabulary before they can set guardrails, evaluate vendors, select.</a:t>
-            </a:r>
-            <a:endParaRPr lang="en-US" sz="1380" dirty="0"/>
+              <a:t>Agencies need a shared vocabulary before they can set guardrails,.</a:t>
+            </a:r>
+            <a:endParaRPr lang="en-US" sz="1220" dirty="0"/>
           </a:p>
         </p:txBody>
       </p:sp>
@@ -8951,17 +9083,17 @@
         </p:nvSpPr>
         <p:spPr>
           <a:xfrm>
-            <a:off x="7799832" y="5001768"/>
-            <a:ext cx="3145536" cy="502920"/>
-          </a:xfrm>
-          <a:prstGeom prst="rect">
-            <a:avLst/>
-          </a:prstGeom>
-          <a:noFill/>
-          <a:ln/>
-        </p:spPr>
-        <p:txBody>
-          <a:bodyPr wrap="square" lIns="0" tIns="0" rIns="0" bIns="0" rtlCol="0" anchor="t">
+            <a:off x="7799832" y="4974336"/>
+            <a:ext cx="3145536" cy="576072"/>
+          </a:xfrm>
+          <a:prstGeom prst="rect">
+            <a:avLst/>
+          </a:prstGeom>
+          <a:noFill/>
+          <a:ln/>
+        </p:spPr>
+        <p:txBody>
+          <a:bodyPr wrap="square" lIns="254" tIns="254" rIns="254" bIns="254" rtlCol="0" anchor="t">
             <a:normAutofit/>
           </a:bodyPr>
           <a:lstStyle/>
@@ -8970,7 +9102,7 @@
               <a:buNone/>
             </a:pPr>
             <a:r>
-              <a:rPr lang="en-US" sz="1550" dirty="0">
+              <a:rPr lang="en-US" sz="1320" dirty="0">
                 <a:solidFill>
                   <a:srgbClr val="17364A"/>
                 </a:solidFill>
@@ -8978,9 +9110,9 @@
                 <a:ea typeface="Aptos" pitchFamily="34" charset="-122"/>
                 <a:cs typeface="Aptos" pitchFamily="34" charset="-120"/>
               </a:rPr>
-              <a:t>Connect the concept to public health purpose, responsible use, required safeguards, documentation, and the next action a department should take.</a:t>
-            </a:r>
-            <a:endParaRPr lang="en-US" sz="1550" dirty="0"/>
+              <a:t>Connect the concept to public health purpose, responsible use, required safeguards, documentation, and the next action a.</a:t>
+            </a:r>
+            <a:endParaRPr lang="en-US" sz="1320" dirty="0"/>
           </a:p>
         </p:txBody>
       </p:sp>
@@ -9281,35 +9413,41 @@
           <a:ln/>
         </p:spPr>
         <p:txBody>
-          <a:bodyPr wrap="square" lIns="635" tIns="635" rIns="635" bIns="635" rtlCol="0" anchor="t">
+          <a:bodyPr wrap="square" lIns="1016" tIns="1016" rIns="1016" bIns="1016" rtlCol="0" anchor="t">
             <a:normAutofit/>
           </a:bodyPr>
           <a:lstStyle/>
           <a:p>
+            <a:pPr indent="0" marL="0">
+              <a:buNone/>
+            </a:pPr>
             <a:r>
               <a:rPr lang="en-US" sz="2100" dirty="0">
                 <a:solidFill>
-                  <a:srgbClr val="17364A"/>
-                </a:solidFill>
-                <a:latin typeface="Aptos" pitchFamily="34" charset="0"/>
-                <a:ea typeface="Aptos" pitchFamily="34" charset="-122"/>
-                <a:cs typeface="Aptos" pitchFamily="34" charset="-120"/>
-              </a:rPr>
-              <a:t>Deep Research is an agentic research capability that can plan a multi-step search, gather source.</a:t>
+                  <a:srgbClr val="003A63"/>
+                </a:solidFill>
+                <a:latin typeface="Aptos" pitchFamily="34" charset="0"/>
+                <a:ea typeface="Aptos" pitchFamily="34" charset="-122"/>
+                <a:cs typeface="Aptos" pitchFamily="34" charset="-120"/>
+              </a:rPr>
+              <a:t>• Deep Research is an agentic research capability that can plan a multi-step search, gather.</a:t>
             </a:r>
             <a:endParaRPr lang="en-US" sz="2100" dirty="0"/>
           </a:p>
           <a:p>
+            <a:pPr indent="0" marL="0">
+              <a:buNone/>
+            </a:pPr>
             <a:r>
               <a:rPr lang="en-US" sz="2100" dirty="0">
                 <a:solidFill>
-                  <a:srgbClr val="17364A"/>
-                </a:solidFill>
-                <a:latin typeface="Aptos" pitchFamily="34" charset="0"/>
-                <a:ea typeface="Aptos" pitchFamily="34" charset="-122"/>
-                <a:cs typeface="Aptos" pitchFamily="34" charset="-120"/>
-              </a:rPr>
-              <a:t>It can help with literature scans, policy scans, funding reviews, and comparative program analysis, but.</a:t>
+                  <a:srgbClr val="003A63"/>
+                </a:solidFill>
+                <a:latin typeface="Aptos" pitchFamily="34" charset="0"/>
+                <a:ea typeface="Aptos" pitchFamily="34" charset="-122"/>
+                <a:cs typeface="Aptos" pitchFamily="34" charset="-120"/>
+              </a:rPr>
+              <a:t>• It can help with literature scans, policy scans, funding reviews, and comparative program.</a:t>
             </a:r>
             <a:endParaRPr lang="en-US" sz="2100" dirty="0"/>
           </a:p>
@@ -9389,17 +9527,17 @@
         </p:nvSpPr>
         <p:spPr>
           <a:xfrm>
-            <a:off x="7799832" y="1828800"/>
-            <a:ext cx="3145536" cy="685800"/>
-          </a:xfrm>
-          <a:prstGeom prst="rect">
-            <a:avLst/>
-          </a:prstGeom>
-          <a:noFill/>
-          <a:ln/>
-        </p:spPr>
-        <p:txBody>
-          <a:bodyPr wrap="square" lIns="0" tIns="0" rIns="0" bIns="0" rtlCol="0" anchor="t">
+            <a:off x="7799832" y="1801368"/>
+            <a:ext cx="3145536" cy="758952"/>
+          </a:xfrm>
+          <a:prstGeom prst="rect">
+            <a:avLst/>
+          </a:prstGeom>
+          <a:noFill/>
+          <a:ln/>
+        </p:spPr>
+        <p:txBody>
+          <a:bodyPr wrap="square" lIns="254" tIns="254" rIns="254" bIns="254" rtlCol="0" anchor="t">
             <a:normAutofit/>
           </a:bodyPr>
           <a:lstStyle/>
@@ -9408,7 +9546,7 @@
               <a:buNone/>
             </a:pPr>
             <a:r>
-              <a:rPr lang="en-US" sz="1550" dirty="0">
+              <a:rPr lang="en-US" sz="1320" dirty="0">
                 <a:solidFill>
                   <a:srgbClr val="17364A"/>
                 </a:solidFill>
@@ -9418,7 +9556,7 @@
               </a:rPr>
               <a:t>Deep Research is an agentic research capability that can plan a multi-step search, gather source.</a:t>
             </a:r>
-            <a:endParaRPr lang="en-US" sz="1550" dirty="0"/>
+            <a:endParaRPr lang="en-US" sz="1320" dirty="0"/>
           </a:p>
         </p:txBody>
       </p:sp>
@@ -9506,13 +9644,16 @@
           <a:ln/>
         </p:spPr>
         <p:txBody>
-          <a:bodyPr wrap="square" lIns="254" tIns="254" rIns="254" bIns="254" rtlCol="0" anchor="t">
+          <a:bodyPr wrap="square" lIns="508" tIns="508" rIns="508" bIns="508" rtlCol="0" anchor="t">
             <a:normAutofit/>
           </a:bodyPr>
           <a:lstStyle/>
           <a:p>
-            <a:r>
-              <a:rPr lang="en-US" sz="1380" dirty="0">
+            <a:pPr indent="0" marL="0">
+              <a:buNone/>
+            </a:pPr>
+            <a:r>
+              <a:rPr lang="en-US" sz="1220" dirty="0">
                 <a:solidFill>
                   <a:srgbClr val="17364A"/>
                 </a:solidFill>
@@ -9520,13 +9661,16 @@
                 <a:ea typeface="Aptos" pitchFamily="34" charset="-122"/>
                 <a:cs typeface="Aptos" pitchFamily="34" charset="-120"/>
               </a:rPr>
-              <a:t>Deep Research is an agentic research capability that can plan a multi-step search, gather.</a:t>
-            </a:r>
-            <a:endParaRPr lang="en-US" sz="1380" dirty="0"/>
-          </a:p>
-          <a:p>
-            <a:r>
-              <a:rPr lang="en-US" sz="1380" dirty="0">
+              <a:t>Deep Research is an agentic research capability that can plan a.</a:t>
+            </a:r>
+            <a:endParaRPr lang="en-US" sz="1220" dirty="0"/>
+          </a:p>
+          <a:p>
+            <a:pPr indent="0" marL="0">
+              <a:buNone/>
+            </a:pPr>
+            <a:r>
+              <a:rPr lang="en-US" sz="1220" dirty="0">
                 <a:solidFill>
                   <a:srgbClr val="17364A"/>
                 </a:solidFill>
@@ -9534,9 +9678,9 @@
                 <a:ea typeface="Aptos" pitchFamily="34" charset="-122"/>
                 <a:cs typeface="Aptos" pitchFamily="34" charset="-120"/>
               </a:rPr>
-              <a:t>It can help with literature scans, policy scans, funding reviews, and comparative program.</a:t>
-            </a:r>
-            <a:endParaRPr lang="en-US" sz="1380" dirty="0"/>
+              <a:t>It can help with literature scans, policy scans, funding reviews,.</a:t>
+            </a:r>
+            <a:endParaRPr lang="en-US" sz="1220" dirty="0"/>
           </a:p>
         </p:txBody>
       </p:sp>
@@ -9614,17 +9758,17 @@
         </p:nvSpPr>
         <p:spPr>
           <a:xfrm>
-            <a:off x="7799832" y="5001768"/>
-            <a:ext cx="3145536" cy="502920"/>
-          </a:xfrm>
-          <a:prstGeom prst="rect">
-            <a:avLst/>
-          </a:prstGeom>
-          <a:noFill/>
-          <a:ln/>
-        </p:spPr>
-        <p:txBody>
-          <a:bodyPr wrap="square" lIns="0" tIns="0" rIns="0" bIns="0" rtlCol="0" anchor="t">
+            <a:off x="7799832" y="4974336"/>
+            <a:ext cx="3145536" cy="576072"/>
+          </a:xfrm>
+          <a:prstGeom prst="rect">
+            <a:avLst/>
+          </a:prstGeom>
+          <a:noFill/>
+          <a:ln/>
+        </p:spPr>
+        <p:txBody>
+          <a:bodyPr wrap="square" lIns="254" tIns="254" rIns="254" bIns="254" rtlCol="0" anchor="t">
             <a:normAutofit/>
           </a:bodyPr>
           <a:lstStyle/>
@@ -9633,7 +9777,7 @@
               <a:buNone/>
             </a:pPr>
             <a:r>
-              <a:rPr lang="en-US" sz="1550" dirty="0">
+              <a:rPr lang="en-US" sz="1320" dirty="0">
                 <a:solidFill>
                   <a:srgbClr val="17364A"/>
                 </a:solidFill>
@@ -9641,9 +9785,9 @@
                 <a:ea typeface="Aptos" pitchFamily="34" charset="-122"/>
                 <a:cs typeface="Aptos" pitchFamily="34" charset="-120"/>
               </a:rPr>
-              <a:t>Connect the concept to public health purpose, responsible use, required safeguards, documentation, and the next action a department should take.</a:t>
-            </a:r>
-            <a:endParaRPr lang="en-US" sz="1550" dirty="0"/>
+              <a:t>Connect the concept to public health purpose, responsible use, required safeguards, documentation, and the next action a.</a:t>
+            </a:r>
+            <a:endParaRPr lang="en-US" sz="1320" dirty="0"/>
           </a:p>
         </p:txBody>
       </p:sp>
@@ -9944,35 +10088,41 @@
           <a:ln/>
         </p:spPr>
         <p:txBody>
-          <a:bodyPr wrap="square" lIns="635" tIns="635" rIns="635" bIns="635" rtlCol="0" anchor="t">
+          <a:bodyPr wrap="square" lIns="1016" tIns="1016" rIns="1016" bIns="1016" rtlCol="0" anchor="t">
             <a:normAutofit/>
           </a:bodyPr>
           <a:lstStyle/>
           <a:p>
+            <a:pPr indent="0" marL="0">
+              <a:buNone/>
+            </a:pPr>
             <a:r>
               <a:rPr lang="en-US" sz="2100" dirty="0">
                 <a:solidFill>
-                  <a:srgbClr val="17364A"/>
-                </a:solidFill>
-                <a:latin typeface="Aptos" pitchFamily="34" charset="0"/>
-                <a:ea typeface="Aptos" pitchFamily="34" charset="-122"/>
-                <a:cs typeface="Aptos" pitchFamily="34" charset="-120"/>
-              </a:rPr>
-              <a:t>Use the linked plays to decide who should be involved, what decisions need to be made, and which.</a:t>
+                  <a:srgbClr val="003A63"/>
+                </a:solidFill>
+                <a:latin typeface="Aptos" pitchFamily="34" charset="0"/>
+                <a:ea typeface="Aptos" pitchFamily="34" charset="-122"/>
+                <a:cs typeface="Aptos" pitchFamily="34" charset="-120"/>
+              </a:rPr>
+              <a:t>• Use the linked plays to decide who should be involved, what decisions need to be made, and.</a:t>
             </a:r>
             <a:endParaRPr lang="en-US" sz="2100" dirty="0"/>
           </a:p>
           <a:p>
+            <a:pPr indent="0" marL="0">
+              <a:buNone/>
+            </a:pPr>
             <a:r>
               <a:rPr lang="en-US" sz="2100" dirty="0">
                 <a:solidFill>
-                  <a:srgbClr val="17364A"/>
-                </a:solidFill>
-                <a:latin typeface="Aptos" pitchFamily="34" charset="0"/>
-                <a:ea typeface="Aptos" pitchFamily="34" charset="-122"/>
-                <a:cs typeface="Aptos" pitchFamily="34" charset="-120"/>
-              </a:rPr>
-              <a:t>Use the linked tools to turn the concept into an agency artifact that can be saved, reviewed, updated,.</a:t>
+                  <a:srgbClr val="003A63"/>
+                </a:solidFill>
+                <a:latin typeface="Aptos" pitchFamily="34" charset="0"/>
+                <a:ea typeface="Aptos" pitchFamily="34" charset="-122"/>
+                <a:cs typeface="Aptos" pitchFamily="34" charset="-120"/>
+              </a:rPr>
+              <a:t>• Use the linked tools to turn the concept into an agency artifact that can be saved, reviewed,.</a:t>
             </a:r>
             <a:endParaRPr lang="en-US" sz="2100" dirty="0"/>
           </a:p>
@@ -10052,17 +10202,17 @@
         </p:nvSpPr>
         <p:spPr>
           <a:xfrm>
-            <a:off x="7799832" y="1828800"/>
-            <a:ext cx="3145536" cy="685800"/>
-          </a:xfrm>
-          <a:prstGeom prst="rect">
-            <a:avLst/>
-          </a:prstGeom>
-          <a:noFill/>
-          <a:ln/>
-        </p:spPr>
-        <p:txBody>
-          <a:bodyPr wrap="square" lIns="0" tIns="0" rIns="0" bIns="0" rtlCol="0" anchor="t">
+            <a:off x="7799832" y="1801368"/>
+            <a:ext cx="3145536" cy="758952"/>
+          </a:xfrm>
+          <a:prstGeom prst="rect">
+            <a:avLst/>
+          </a:prstGeom>
+          <a:noFill/>
+          <a:ln/>
+        </p:spPr>
+        <p:txBody>
+          <a:bodyPr wrap="square" lIns="254" tIns="254" rIns="254" bIns="254" rtlCol="0" anchor="t">
             <a:normAutofit/>
           </a:bodyPr>
           <a:lstStyle/>
@@ -10071,7 +10221,7 @@
               <a:buNone/>
             </a:pPr>
             <a:r>
-              <a:rPr lang="en-US" sz="1550" dirty="0">
+              <a:rPr lang="en-US" sz="1320" dirty="0">
                 <a:solidFill>
                   <a:srgbClr val="17364A"/>
                 </a:solidFill>
@@ -10081,7 +10231,7 @@
               </a:rPr>
               <a:t>Use the linked plays to decide who should be involved, what decisions need to be made, and which.</a:t>
             </a:r>
-            <a:endParaRPr lang="en-US" sz="1550" dirty="0"/>
+            <a:endParaRPr lang="en-US" sz="1320" dirty="0"/>
           </a:p>
         </p:txBody>
       </p:sp>
@@ -10169,13 +10319,16 @@
           <a:ln/>
         </p:spPr>
         <p:txBody>
-          <a:bodyPr wrap="square" lIns="254" tIns="254" rIns="254" bIns="254" rtlCol="0" anchor="t">
+          <a:bodyPr wrap="square" lIns="508" tIns="508" rIns="508" bIns="508" rtlCol="0" anchor="t">
             <a:normAutofit/>
           </a:bodyPr>
           <a:lstStyle/>
           <a:p>
-            <a:r>
-              <a:rPr lang="en-US" sz="1380" dirty="0">
+            <a:pPr indent="0" marL="0">
+              <a:buNone/>
+            </a:pPr>
+            <a:r>
+              <a:rPr lang="en-US" sz="1220" dirty="0">
                 <a:solidFill>
                   <a:srgbClr val="17364A"/>
                 </a:solidFill>
@@ -10183,13 +10336,16 @@
                 <a:ea typeface="Aptos" pitchFamily="34" charset="-122"/>
                 <a:cs typeface="Aptos" pitchFamily="34" charset="-120"/>
               </a:rPr>
-              <a:t>Use the linked plays to decide who should be involved, what decisions need to be made, and.</a:t>
-            </a:r>
-            <a:endParaRPr lang="en-US" sz="1380" dirty="0"/>
-          </a:p>
-          <a:p>
-            <a:r>
-              <a:rPr lang="en-US" sz="1380" dirty="0">
+              <a:t>Use the linked plays to decide who should be involved, what.</a:t>
+            </a:r>
+            <a:endParaRPr lang="en-US" sz="1220" dirty="0"/>
+          </a:p>
+          <a:p>
+            <a:pPr indent="0" marL="0">
+              <a:buNone/>
+            </a:pPr>
+            <a:r>
+              <a:rPr lang="en-US" sz="1220" dirty="0">
                 <a:solidFill>
                   <a:srgbClr val="17364A"/>
                 </a:solidFill>
@@ -10197,9 +10353,9 @@
                 <a:ea typeface="Aptos" pitchFamily="34" charset="-122"/>
                 <a:cs typeface="Aptos" pitchFamily="34" charset="-120"/>
               </a:rPr>
-              <a:t>Use the linked tools to turn the concept into an agency artifact that can be saved,.</a:t>
-            </a:r>
-            <a:endParaRPr lang="en-US" sz="1380" dirty="0"/>
+              <a:t>Use the linked tools to turn the concept into an agency artifact.</a:t>
+            </a:r>
+            <a:endParaRPr lang="en-US" sz="1220" dirty="0"/>
           </a:p>
         </p:txBody>
       </p:sp>
@@ -10277,17 +10433,17 @@
         </p:nvSpPr>
         <p:spPr>
           <a:xfrm>
-            <a:off x="7799832" y="5001768"/>
-            <a:ext cx="3145536" cy="502920"/>
-          </a:xfrm>
-          <a:prstGeom prst="rect">
-            <a:avLst/>
-          </a:prstGeom>
-          <a:noFill/>
-          <a:ln/>
-        </p:spPr>
-        <p:txBody>
-          <a:bodyPr wrap="square" lIns="0" tIns="0" rIns="0" bIns="0" rtlCol="0" anchor="t">
+            <a:off x="7799832" y="4974336"/>
+            <a:ext cx="3145536" cy="576072"/>
+          </a:xfrm>
+          <a:prstGeom prst="rect">
+            <a:avLst/>
+          </a:prstGeom>
+          <a:noFill/>
+          <a:ln/>
+        </p:spPr>
+        <p:txBody>
+          <a:bodyPr wrap="square" lIns="254" tIns="254" rIns="254" bIns="254" rtlCol="0" anchor="t">
             <a:normAutofit/>
           </a:bodyPr>
           <a:lstStyle/>
@@ -10296,7 +10452,7 @@
               <a:buNone/>
             </a:pPr>
             <a:r>
-              <a:rPr lang="en-US" sz="1550" dirty="0">
+              <a:rPr lang="en-US" sz="1320" dirty="0">
                 <a:solidFill>
                   <a:srgbClr val="17364A"/>
                 </a:solidFill>
@@ -10304,9 +10460,9 @@
                 <a:ea typeface="Aptos" pitchFamily="34" charset="-122"/>
                 <a:cs typeface="Aptos" pitchFamily="34" charset="-120"/>
               </a:rPr>
-              <a:t>Connect the concept to public health purpose, responsible use, required safeguards, documentation, and the next action a department should take.</a:t>
-            </a:r>
-            <a:endParaRPr lang="en-US" sz="1550" dirty="0"/>
+              <a:t>Connect the concept to public health purpose, responsible use, required safeguards, documentation, and the next action a.</a:t>
+            </a:r>
+            <a:endParaRPr lang="en-US" sz="1320" dirty="0"/>
           </a:p>
         </p:txBody>
       </p:sp>
@@ -10607,35 +10763,41 @@
           <a:ln/>
         </p:spPr>
         <p:txBody>
-          <a:bodyPr wrap="square" lIns="635" tIns="635" rIns="635" bIns="635" rtlCol="0" anchor="t">
+          <a:bodyPr wrap="square" lIns="1016" tIns="1016" rIns="1016" bIns="1016" rtlCol="0" anchor="t">
             <a:normAutofit/>
           </a:bodyPr>
           <a:lstStyle/>
           <a:p>
+            <a:pPr indent="0" marL="0">
+              <a:buNone/>
+            </a:pPr>
             <a:r>
               <a:rPr lang="en-US" sz="2100" dirty="0">
                 <a:solidFill>
-                  <a:srgbClr val="17364A"/>
-                </a:solidFill>
-                <a:latin typeface="Aptos" pitchFamily="34" charset="0"/>
-                <a:ea typeface="Aptos" pitchFamily="34" charset="-122"/>
-                <a:cs typeface="Aptos" pitchFamily="34" charset="-120"/>
-              </a:rPr>
-              <a:t>Use this lesson to build a practical foundation in AI, including predictive AI, generative AI, agentic AI,.</a:t>
+                  <a:srgbClr val="003A63"/>
+                </a:solidFill>
+                <a:latin typeface="Aptos" pitchFamily="34" charset="0"/>
+                <a:ea typeface="Aptos" pitchFamily="34" charset="-122"/>
+                <a:cs typeface="Aptos" pitchFamily="34" charset="-120"/>
+              </a:rPr>
+              <a:t>• Use this lesson to build a practical foundation in AI, including predictive AI, generative AI,.</a:t>
             </a:r>
             <a:endParaRPr lang="en-US" sz="2100" dirty="0"/>
           </a:p>
           <a:p>
+            <a:pPr indent="0" marL="0">
+              <a:buNone/>
+            </a:pPr>
             <a:r>
               <a:rPr lang="en-US" sz="2100" dirty="0">
                 <a:solidFill>
-                  <a:srgbClr val="17364A"/>
-                </a:solidFill>
-                <a:latin typeface="Aptos" pitchFamily="34" charset="0"/>
-                <a:ea typeface="Aptos" pitchFamily="34" charset="-122"/>
-                <a:cs typeface="Aptos" pitchFamily="34" charset="-120"/>
-              </a:rPr>
-              <a:t>The goal is to understand what each capability can support, where it can fail, and what safeguards are needed.</a:t>
+                  <a:srgbClr val="003A63"/>
+                </a:solidFill>
+                <a:latin typeface="Aptos" pitchFamily="34" charset="0"/>
+                <a:ea typeface="Aptos" pitchFamily="34" charset="-122"/>
+                <a:cs typeface="Aptos" pitchFamily="34" charset="-120"/>
+              </a:rPr>
+              <a:t>• The goal is to understand what each capability can support, where it can fail, and what.</a:t>
             </a:r>
             <a:endParaRPr lang="en-US" sz="2100" dirty="0"/>
           </a:p>
@@ -10715,17 +10877,17 @@
         </p:nvSpPr>
         <p:spPr>
           <a:xfrm>
-            <a:off x="8074152" y="1920240"/>
-            <a:ext cx="2825496" cy="1280160"/>
-          </a:xfrm>
-          <a:prstGeom prst="rect">
-            <a:avLst/>
-          </a:prstGeom>
-          <a:noFill/>
-          <a:ln/>
-        </p:spPr>
-        <p:txBody>
-          <a:bodyPr wrap="square" lIns="0" tIns="0" rIns="0" bIns="0" rtlCol="0" anchor="t">
+            <a:off x="8074152" y="1892808"/>
+            <a:ext cx="2825496" cy="1353312"/>
+          </a:xfrm>
+          <a:prstGeom prst="rect">
+            <a:avLst/>
+          </a:prstGeom>
+          <a:noFill/>
+          <a:ln/>
+        </p:spPr>
+        <p:txBody>
+          <a:bodyPr wrap="square" lIns="254" tIns="254" rIns="254" bIns="254" rtlCol="0" anchor="t">
             <a:normAutofit/>
           </a:bodyPr>
           <a:lstStyle/>
@@ -10734,7 +10896,7 @@
               <a:buNone/>
             </a:pPr>
             <a:r>
-              <a:rPr lang="en-US" sz="1550" dirty="0">
+              <a:rPr lang="en-US" sz="1320" dirty="0">
                 <a:solidFill>
                   <a:srgbClr val="17364A"/>
                 </a:solidFill>
@@ -10742,26 +10904,9 @@
                 <a:ea typeface="Aptos" pitchFamily="34" charset="-122"/>
                 <a:cs typeface="Aptos" pitchFamily="34" charset="-120"/>
               </a:rPr>
-              <a:t>Level: Foundational Module</a:t>
-            </a:r>
-            <a:endParaRPr lang="en-US" sz="1550" dirty="0"/>
-          </a:p>
-          <a:p>
-            <a:pPr indent="0" marL="0">
-              <a:buNone/>
-            </a:pPr>
-            <a:r>
-              <a:rPr lang="en-US" sz="1550" dirty="0">
-                <a:solidFill>
-                  <a:srgbClr val="17364A"/>
-                </a:solidFill>
-                <a:latin typeface="Aptos" pitchFamily="34" charset="0"/>
-                <a:ea typeface="Aptos" pitchFamily="34" charset="-122"/>
-                <a:cs typeface="Aptos" pitchFamily="34" charset="-120"/>
-              </a:rPr>
-              <a:t>Appears in tracks: shared-foundational</a:t>
-            </a:r>
-            <a:endParaRPr lang="en-US" sz="1550" dirty="0"/>
+              <a:t>Level: Foundational Module Appears in tracks: shared-foundational</a:t>
+            </a:r>
+            <a:endParaRPr lang="en-US" sz="1320" dirty="0"/>
           </a:p>
         </p:txBody>
       </p:sp>
@@ -10849,13 +10994,16 @@
           <a:ln/>
         </p:spPr>
         <p:txBody>
-          <a:bodyPr wrap="square" lIns="254" tIns="254" rIns="254" bIns="254" rtlCol="0" anchor="t">
+          <a:bodyPr wrap="square" lIns="508" tIns="508" rIns="508" bIns="508" rtlCol="0" anchor="t">
             <a:normAutofit/>
           </a:bodyPr>
           <a:lstStyle/>
           <a:p>
-            <a:r>
-              <a:rPr lang="en-US" sz="1380" dirty="0">
+            <a:pPr indent="0" marL="0">
+              <a:buNone/>
+            </a:pPr>
+            <a:r>
+              <a:rPr lang="en-US" sz="1220" dirty="0">
                 <a:solidFill>
                   <a:srgbClr val="17364A"/>
                 </a:solidFill>
@@ -10865,11 +11013,14 @@
               </a:rPr>
               <a:t>Read the module for shared vocabulary and context.</a:t>
             </a:r>
-            <a:endParaRPr lang="en-US" sz="1380" dirty="0"/>
-          </a:p>
-          <a:p>
-            <a:r>
-              <a:rPr lang="en-US" sz="1380" dirty="0">
+            <a:endParaRPr lang="en-US" sz="1220" dirty="0"/>
+          </a:p>
+          <a:p>
+            <a:pPr indent="0" marL="0">
+              <a:buNone/>
+            </a:pPr>
+            <a:r>
+              <a:rPr lang="en-US" sz="1220" dirty="0">
                 <a:solidFill>
                   <a:srgbClr val="17364A"/>
                 </a:solidFill>
@@ -10879,11 +11030,14 @@
               </a:rPr>
               <a:t>Complete the practical exercise to apply the concept.</a:t>
             </a:r>
-            <a:endParaRPr lang="en-US" sz="1380" dirty="0"/>
-          </a:p>
-          <a:p>
-            <a:r>
-              <a:rPr lang="en-US" sz="1380" dirty="0">
+            <a:endParaRPr lang="en-US" sz="1220" dirty="0"/>
+          </a:p>
+          <a:p>
+            <a:pPr indent="0" marL="0">
+              <a:buNone/>
+            </a:pPr>
+            <a:r>
+              <a:rPr lang="en-US" sz="1220" dirty="0">
                 <a:solidFill>
                   <a:srgbClr val="17364A"/>
                 </a:solidFill>
@@ -10893,7 +11047,7 @@
               </a:rPr>
               <a:t>Use the notes and references for deeper review.</a:t>
             </a:r>
-            <a:endParaRPr lang="en-US" sz="1380" dirty="0"/>
+            <a:endParaRPr lang="en-US" sz="1220" dirty="0"/>
           </a:p>
         </p:txBody>
       </p:sp>
@@ -11194,21 +11348,24 @@
           <a:ln/>
         </p:spPr>
         <p:txBody>
-          <a:bodyPr wrap="square" lIns="635" tIns="635" rIns="635" bIns="635" rtlCol="0" anchor="t">
+          <a:bodyPr wrap="square" lIns="1016" tIns="1016" rIns="1016" bIns="1016" rtlCol="0" anchor="t">
             <a:normAutofit/>
           </a:bodyPr>
           <a:lstStyle/>
           <a:p>
+            <a:pPr indent="0" marL="0">
+              <a:buNone/>
+            </a:pPr>
             <a:r>
               <a:rPr lang="en-US" sz="2100" dirty="0">
                 <a:solidFill>
-                  <a:srgbClr val="17364A"/>
-                </a:solidFill>
-                <a:latin typeface="Aptos" pitchFamily="34" charset="0"/>
-                <a:ea typeface="Aptos" pitchFamily="34" charset="-122"/>
-                <a:cs typeface="Aptos" pitchFamily="34" charset="-120"/>
-              </a:rPr>
-              <a:t>Do not treat AI as a single tool or assume one model fits every public health task.</a:t>
+                  <a:srgbClr val="003A63"/>
+                </a:solidFill>
+                <a:latin typeface="Aptos" pitchFamily="34" charset="0"/>
+                <a:ea typeface="Aptos" pitchFamily="34" charset="-122"/>
+                <a:cs typeface="Aptos" pitchFamily="34" charset="-120"/>
+              </a:rPr>
+              <a:t>• Do not treat AI as a single tool or assume one model fits every public health task.</a:t>
             </a:r>
             <a:endParaRPr lang="en-US" sz="2100" dirty="0"/>
           </a:p>
@@ -11288,17 +11445,17 @@
         </p:nvSpPr>
         <p:spPr>
           <a:xfrm>
-            <a:off x="7799832" y="1828800"/>
-            <a:ext cx="3145536" cy="685800"/>
-          </a:xfrm>
-          <a:prstGeom prst="rect">
-            <a:avLst/>
-          </a:prstGeom>
-          <a:noFill/>
-          <a:ln/>
-        </p:spPr>
-        <p:txBody>
-          <a:bodyPr wrap="square" lIns="0" tIns="0" rIns="0" bIns="0" rtlCol="0" anchor="t">
+            <a:off x="7799832" y="1801368"/>
+            <a:ext cx="3145536" cy="758952"/>
+          </a:xfrm>
+          <a:prstGeom prst="rect">
+            <a:avLst/>
+          </a:prstGeom>
+          <a:noFill/>
+          <a:ln/>
+        </p:spPr>
+        <p:txBody>
+          <a:bodyPr wrap="square" lIns="254" tIns="254" rIns="254" bIns="254" rtlCol="0" anchor="t">
             <a:normAutofit/>
           </a:bodyPr>
           <a:lstStyle/>
@@ -11307,7 +11464,7 @@
               <a:buNone/>
             </a:pPr>
             <a:r>
-              <a:rPr lang="en-US" sz="1550" dirty="0">
+              <a:rPr lang="en-US" sz="1320" dirty="0">
                 <a:solidFill>
                   <a:srgbClr val="17364A"/>
                 </a:solidFill>
@@ -11317,7 +11474,7 @@
               </a:rPr>
               <a:t>Do not treat AI as a single tool or assume one model fits every public health task.</a:t>
             </a:r>
-            <a:endParaRPr lang="en-US" sz="1550" dirty="0"/>
+            <a:endParaRPr lang="en-US" sz="1320" dirty="0"/>
           </a:p>
         </p:txBody>
       </p:sp>
@@ -11405,13 +11562,16 @@
           <a:ln/>
         </p:spPr>
         <p:txBody>
-          <a:bodyPr wrap="square" lIns="254" tIns="254" rIns="254" bIns="254" rtlCol="0" anchor="t">
+          <a:bodyPr wrap="square" lIns="508" tIns="508" rIns="508" bIns="508" rtlCol="0" anchor="t">
             <a:normAutofit/>
           </a:bodyPr>
           <a:lstStyle/>
           <a:p>
-            <a:r>
-              <a:rPr lang="en-US" sz="1380" dirty="0">
+            <a:pPr indent="0" marL="0">
+              <a:buNone/>
+            </a:pPr>
+            <a:r>
+              <a:rPr lang="en-US" sz="1220" dirty="0">
                 <a:solidFill>
                   <a:srgbClr val="17364A"/>
                 </a:solidFill>
@@ -11419,9 +11579,9 @@
                 <a:ea typeface="Aptos" pitchFamily="34" charset="-122"/>
                 <a:cs typeface="Aptos" pitchFamily="34" charset="-120"/>
               </a:rPr>
-              <a:t>Do not treat AI as a single tool or assume one model fits every public health task.</a:t>
-            </a:r>
-            <a:endParaRPr lang="en-US" sz="1380" dirty="0"/>
+              <a:t>Do not treat AI as a single tool or assume one model fits every.</a:t>
+            </a:r>
+            <a:endParaRPr lang="en-US" sz="1220" dirty="0"/>
           </a:p>
         </p:txBody>
       </p:sp>
@@ -11499,17 +11659,17 @@
         </p:nvSpPr>
         <p:spPr>
           <a:xfrm>
-            <a:off x="7799832" y="5001768"/>
-            <a:ext cx="3145536" cy="502920"/>
-          </a:xfrm>
-          <a:prstGeom prst="rect">
-            <a:avLst/>
-          </a:prstGeom>
-          <a:noFill/>
-          <a:ln/>
-        </p:spPr>
-        <p:txBody>
-          <a:bodyPr wrap="square" lIns="0" tIns="0" rIns="0" bIns="0" rtlCol="0" anchor="t">
+            <a:off x="7799832" y="4974336"/>
+            <a:ext cx="3145536" cy="576072"/>
+          </a:xfrm>
+          <a:prstGeom prst="rect">
+            <a:avLst/>
+          </a:prstGeom>
+          <a:noFill/>
+          <a:ln/>
+        </p:spPr>
+        <p:txBody>
+          <a:bodyPr wrap="square" lIns="254" tIns="254" rIns="254" bIns="254" rtlCol="0" anchor="t">
             <a:normAutofit/>
           </a:bodyPr>
           <a:lstStyle/>
@@ -11518,7 +11678,7 @@
               <a:buNone/>
             </a:pPr>
             <a:r>
-              <a:rPr lang="en-US" sz="1550" dirty="0">
+              <a:rPr lang="en-US" sz="1320" dirty="0">
                 <a:solidFill>
                   <a:srgbClr val="17364A"/>
                 </a:solidFill>
@@ -11526,9 +11686,9 @@
                 <a:ea typeface="Aptos" pitchFamily="34" charset="-122"/>
                 <a:cs typeface="Aptos" pitchFamily="34" charset="-120"/>
               </a:rPr>
-              <a:t>Identify what could go wrong, who could be affected, what safeguards are needed, and what evidence should be reviewed before use expands.</a:t>
-            </a:r>
-            <a:endParaRPr lang="en-US" sz="1550" dirty="0"/>
+              <a:t>Identify what could go wrong, who could be affected, what safeguards are needed, and what evidence should be reviewed.</a:t>
+            </a:r>
+            <a:endParaRPr lang="en-US" sz="1320" dirty="0"/>
           </a:p>
         </p:txBody>
       </p:sp>
@@ -11829,35 +11989,41 @@
           <a:ln/>
         </p:spPr>
         <p:txBody>
-          <a:bodyPr wrap="square" lIns="635" tIns="635" rIns="635" bIns="635" rtlCol="0" anchor="t">
+          <a:bodyPr wrap="square" lIns="1016" tIns="1016" rIns="1016" bIns="1016" rtlCol="0" anchor="t">
             <a:normAutofit/>
           </a:bodyPr>
           <a:lstStyle/>
           <a:p>
+            <a:pPr indent="0" marL="0">
+              <a:buNone/>
+            </a:pPr>
             <a:r>
               <a:rPr lang="en-US" sz="2100" dirty="0">
                 <a:solidFill>
-                  <a:srgbClr val="17364A"/>
-                </a:solidFill>
-                <a:latin typeface="Aptos" pitchFamily="34" charset="0"/>
-                <a:ea typeface="Aptos" pitchFamily="34" charset="-122"/>
-                <a:cs typeface="Aptos" pitchFamily="34" charset="-120"/>
-              </a:rPr>
-              <a:t>A shared AI vocabulary prevents agencies from approving tools before they understand the workflow,.</a:t>
+                  <a:srgbClr val="003A63"/>
+                </a:solidFill>
+                <a:latin typeface="Aptos" pitchFamily="34" charset="0"/>
+                <a:ea typeface="Aptos" pitchFamily="34" charset="-122"/>
+                <a:cs typeface="Aptos" pitchFamily="34" charset="-120"/>
+              </a:rPr>
+              <a:t>• A shared AI vocabulary prevents agencies from approving tools before they understand the.</a:t>
             </a:r>
             <a:endParaRPr lang="en-US" sz="2100" dirty="0"/>
           </a:p>
           <a:p>
+            <a:pPr indent="0" marL="0">
+              <a:buNone/>
+            </a:pPr>
             <a:r>
               <a:rPr lang="en-US" sz="2100" dirty="0">
                 <a:solidFill>
-                  <a:srgbClr val="17364A"/>
-                </a:solidFill>
-                <a:latin typeface="Aptos" pitchFamily="34" charset="0"/>
-                <a:ea typeface="Aptos" pitchFamily="34" charset="-122"/>
-                <a:cs typeface="Aptos" pitchFamily="34" charset="-120"/>
-              </a:rPr>
-              <a:t>This is especially important for STLT public health departments because AI may enter through many.</a:t>
+                  <a:srgbClr val="003A63"/>
+                </a:solidFill>
+                <a:latin typeface="Aptos" pitchFamily="34" charset="0"/>
+                <a:ea typeface="Aptos" pitchFamily="34" charset="-122"/>
+                <a:cs typeface="Aptos" pitchFamily="34" charset="-120"/>
+              </a:rPr>
+              <a:t>• This is especially important for STLT public health departments because AI may enter through.</a:t>
             </a:r>
             <a:endParaRPr lang="en-US" sz="2100" dirty="0"/>
           </a:p>
@@ -11937,17 +12103,17 @@
         </p:nvSpPr>
         <p:spPr>
           <a:xfrm>
-            <a:off x="7799832" y="1828800"/>
-            <a:ext cx="3145536" cy="685800"/>
-          </a:xfrm>
-          <a:prstGeom prst="rect">
-            <a:avLst/>
-          </a:prstGeom>
-          <a:noFill/>
-          <a:ln/>
-        </p:spPr>
-        <p:txBody>
-          <a:bodyPr wrap="square" lIns="0" tIns="0" rIns="0" bIns="0" rtlCol="0" anchor="t">
+            <a:off x="7799832" y="1801368"/>
+            <a:ext cx="3145536" cy="758952"/>
+          </a:xfrm>
+          <a:prstGeom prst="rect">
+            <a:avLst/>
+          </a:prstGeom>
+          <a:noFill/>
+          <a:ln/>
+        </p:spPr>
+        <p:txBody>
+          <a:bodyPr wrap="square" lIns="254" tIns="254" rIns="254" bIns="254" rtlCol="0" anchor="t">
             <a:normAutofit/>
           </a:bodyPr>
           <a:lstStyle/>
@@ -11956,7 +12122,7 @@
               <a:buNone/>
             </a:pPr>
             <a:r>
-              <a:rPr lang="en-US" sz="1550" dirty="0">
+              <a:rPr lang="en-US" sz="1320" dirty="0">
                 <a:solidFill>
                   <a:srgbClr val="17364A"/>
                 </a:solidFill>
@@ -11966,7 +12132,7 @@
               </a:rPr>
               <a:t>A shared AI vocabulary prevents agencies from approving tools before they understand the workflow,.</a:t>
             </a:r>
-            <a:endParaRPr lang="en-US" sz="1550" dirty="0"/>
+            <a:endParaRPr lang="en-US" sz="1320" dirty="0"/>
           </a:p>
         </p:txBody>
       </p:sp>
@@ -12054,13 +12220,16 @@
           <a:ln/>
         </p:spPr>
         <p:txBody>
-          <a:bodyPr wrap="square" lIns="254" tIns="254" rIns="254" bIns="254" rtlCol="0" anchor="t">
+          <a:bodyPr wrap="square" lIns="508" tIns="508" rIns="508" bIns="508" rtlCol="0" anchor="t">
             <a:normAutofit/>
           </a:bodyPr>
           <a:lstStyle/>
           <a:p>
-            <a:r>
-              <a:rPr lang="en-US" sz="1380" dirty="0">
+            <a:pPr indent="0" marL="0">
+              <a:buNone/>
+            </a:pPr>
+            <a:r>
+              <a:rPr lang="en-US" sz="1220" dirty="0">
                 <a:solidFill>
                   <a:srgbClr val="17364A"/>
                 </a:solidFill>
@@ -12068,13 +12237,16 @@
                 <a:ea typeface="Aptos" pitchFamily="34" charset="-122"/>
                 <a:cs typeface="Aptos" pitchFamily="34" charset="-120"/>
               </a:rPr>
-              <a:t>A shared AI vocabulary prevents agencies from approving tools before they understand the.</a:t>
-            </a:r>
-            <a:endParaRPr lang="en-US" sz="1380" dirty="0"/>
-          </a:p>
-          <a:p>
-            <a:r>
-              <a:rPr lang="en-US" sz="1380" dirty="0">
+              <a:t>A shared AI vocabulary prevents agencies from approving tools.</a:t>
+            </a:r>
+            <a:endParaRPr lang="en-US" sz="1220" dirty="0"/>
+          </a:p>
+          <a:p>
+            <a:pPr indent="0" marL="0">
+              <a:buNone/>
+            </a:pPr>
+            <a:r>
+              <a:rPr lang="en-US" sz="1220" dirty="0">
                 <a:solidFill>
                   <a:srgbClr val="17364A"/>
                 </a:solidFill>
@@ -12082,9 +12254,9 @@
                 <a:ea typeface="Aptos" pitchFamily="34" charset="-122"/>
                 <a:cs typeface="Aptos" pitchFamily="34" charset="-120"/>
               </a:rPr>
-              <a:t>This is especially important for STLT public health departments because AI may enter.</a:t>
-            </a:r>
-            <a:endParaRPr lang="en-US" sz="1380" dirty="0"/>
+              <a:t>This is especially important for STLT public health departments.</a:t>
+            </a:r>
+            <a:endParaRPr lang="en-US" sz="1220" dirty="0"/>
           </a:p>
         </p:txBody>
       </p:sp>
@@ -12162,17 +12334,17 @@
         </p:nvSpPr>
         <p:spPr>
           <a:xfrm>
-            <a:off x="7799832" y="5001768"/>
-            <a:ext cx="3145536" cy="502920"/>
-          </a:xfrm>
-          <a:prstGeom prst="rect">
-            <a:avLst/>
-          </a:prstGeom>
-          <a:noFill/>
-          <a:ln/>
-        </p:spPr>
-        <p:txBody>
-          <a:bodyPr wrap="square" lIns="0" tIns="0" rIns="0" bIns="0" rtlCol="0" anchor="t">
+            <a:off x="7799832" y="4974336"/>
+            <a:ext cx="3145536" cy="576072"/>
+          </a:xfrm>
+          <a:prstGeom prst="rect">
+            <a:avLst/>
+          </a:prstGeom>
+          <a:noFill/>
+          <a:ln/>
+        </p:spPr>
+        <p:txBody>
+          <a:bodyPr wrap="square" lIns="254" tIns="254" rIns="254" bIns="254" rtlCol="0" anchor="t">
             <a:normAutofit/>
           </a:bodyPr>
           <a:lstStyle/>
@@ -12181,7 +12353,7 @@
               <a:buNone/>
             </a:pPr>
             <a:r>
-              <a:rPr lang="en-US" sz="1550" dirty="0">
+              <a:rPr lang="en-US" sz="1320" dirty="0">
                 <a:solidFill>
                   <a:srgbClr val="17364A"/>
                 </a:solidFill>
@@ -12189,9 +12361,9 @@
                 <a:ea typeface="Aptos" pitchFamily="34" charset="-122"/>
                 <a:cs typeface="Aptos" pitchFamily="34" charset="-120"/>
               </a:rPr>
-              <a:t>Use the assignment to test whether you can explain the concept, apply it to a realistic public health situation, and identify what would need review before the work moves forward.</a:t>
-            </a:r>
-            <a:endParaRPr lang="en-US" sz="1550" dirty="0"/>
+              <a:t>Use the assignment to test whether you can explain the concept, apply it to a realistic public health situation, and.</a:t>
+            </a:r>
+            <a:endParaRPr lang="en-US" sz="1320" dirty="0"/>
           </a:p>
         </p:txBody>
       </p:sp>
@@ -12492,49 +12664,58 @@
           <a:ln/>
         </p:spPr>
         <p:txBody>
-          <a:bodyPr wrap="square" lIns="635" tIns="635" rIns="635" bIns="635" rtlCol="0" anchor="t">
+          <a:bodyPr wrap="square" lIns="1016" tIns="1016" rIns="1016" bIns="1016" rtlCol="0" anchor="t">
             <a:normAutofit/>
           </a:bodyPr>
           <a:lstStyle/>
           <a:p>
+            <a:pPr indent="0" marL="0">
+              <a:buNone/>
+            </a:pPr>
             <a:r>
               <a:rPr lang="en-US" sz="2100" dirty="0">
                 <a:solidFill>
-                  <a:srgbClr val="17364A"/>
-                </a:solidFill>
-                <a:latin typeface="Aptos" pitchFamily="34" charset="0"/>
-                <a:ea typeface="Aptos" pitchFamily="34" charset="-122"/>
-                <a:cs typeface="Aptos" pitchFamily="34" charset="-120"/>
-              </a:rPr>
-              <a:t>What AI tools or AI-enabled vendor products are already being used informally?</a:t>
+                  <a:srgbClr val="003A63"/>
+                </a:solidFill>
+                <a:latin typeface="Aptos" pitchFamily="34" charset="0"/>
+                <a:ea typeface="Aptos" pitchFamily="34" charset="-122"/>
+                <a:cs typeface="Aptos" pitchFamily="34" charset="-120"/>
+              </a:rPr>
+              <a:t>• What AI tools or AI-enabled vendor products are already being used informally?</a:t>
             </a:r>
             <a:endParaRPr lang="en-US" sz="2100" dirty="0"/>
           </a:p>
           <a:p>
+            <a:pPr indent="0" marL="0">
+              <a:buNone/>
+            </a:pPr>
             <a:r>
               <a:rPr lang="en-US" sz="2100" dirty="0">
                 <a:solidFill>
-                  <a:srgbClr val="17364A"/>
-                </a:solidFill>
-                <a:latin typeface="Aptos" pitchFamily="34" charset="0"/>
-                <a:ea typeface="Aptos" pitchFamily="34" charset="-122"/>
-                <a:cs typeface="Aptos" pitchFamily="34" charset="-120"/>
-              </a:rPr>
-              <a:t>Which public health decisions should never be delegated to an AI system?</a:t>
+                  <a:srgbClr val="003A63"/>
+                </a:solidFill>
+                <a:latin typeface="Aptos" pitchFamily="34" charset="0"/>
+                <a:ea typeface="Aptos" pitchFamily="34" charset="-122"/>
+                <a:cs typeface="Aptos" pitchFamily="34" charset="-120"/>
+              </a:rPr>
+              <a:t>• Which public health decisions should never be delegated to an AI system?</a:t>
             </a:r>
             <a:endParaRPr lang="en-US" sz="2100" dirty="0"/>
           </a:p>
           <a:p>
+            <a:pPr indent="0" marL="0">
+              <a:buNone/>
+            </a:pPr>
             <a:r>
               <a:rPr lang="en-US" sz="2100" dirty="0">
                 <a:solidFill>
-                  <a:srgbClr val="17364A"/>
-                </a:solidFill>
-                <a:latin typeface="Aptos" pitchFamily="34" charset="0"/>
-                <a:ea typeface="Aptos" pitchFamily="34" charset="-122"/>
-                <a:cs typeface="Aptos" pitchFamily="34" charset="-120"/>
-              </a:rPr>
-              <a:t>Who needs enough AI literacy to participate in governance, procurement, or implementation decisions?</a:t>
+                  <a:srgbClr val="003A63"/>
+                </a:solidFill>
+                <a:latin typeface="Aptos" pitchFamily="34" charset="0"/>
+                <a:ea typeface="Aptos" pitchFamily="34" charset="-122"/>
+                <a:cs typeface="Aptos" pitchFamily="34" charset="-120"/>
+              </a:rPr>
+              <a:t>• Who needs enough AI literacy to participate in governance, procurement, or implementation.</a:t>
             </a:r>
             <a:endParaRPr lang="en-US" sz="2100" dirty="0"/>
           </a:p>
@@ -12614,17 +12795,17 @@
         </p:nvSpPr>
         <p:spPr>
           <a:xfrm>
-            <a:off x="7799832" y="1828800"/>
-            <a:ext cx="3145536" cy="685800"/>
-          </a:xfrm>
-          <a:prstGeom prst="rect">
-            <a:avLst/>
-          </a:prstGeom>
-          <a:noFill/>
-          <a:ln/>
-        </p:spPr>
-        <p:txBody>
-          <a:bodyPr wrap="square" lIns="0" tIns="0" rIns="0" bIns="0" rtlCol="0" anchor="t">
+            <a:off x="7799832" y="1801368"/>
+            <a:ext cx="3145536" cy="758952"/>
+          </a:xfrm>
+          <a:prstGeom prst="rect">
+            <a:avLst/>
+          </a:prstGeom>
+          <a:noFill/>
+          <a:ln/>
+        </p:spPr>
+        <p:txBody>
+          <a:bodyPr wrap="square" lIns="254" tIns="254" rIns="254" bIns="254" rtlCol="0" anchor="t">
             <a:normAutofit/>
           </a:bodyPr>
           <a:lstStyle/>
@@ -12633,7 +12814,7 @@
               <a:buNone/>
             </a:pPr>
             <a:r>
-              <a:rPr lang="en-US" sz="1550" dirty="0">
+              <a:rPr lang="en-US" sz="1320" dirty="0">
                 <a:solidFill>
                   <a:srgbClr val="17364A"/>
                 </a:solidFill>
@@ -12643,7 +12824,7 @@
               </a:rPr>
               <a:t>What AI tools or AI-enabled vendor products are already being used informally?</a:t>
             </a:r>
-            <a:endParaRPr lang="en-US" sz="1550" dirty="0"/>
+            <a:endParaRPr lang="en-US" sz="1320" dirty="0"/>
           </a:p>
         </p:txBody>
       </p:sp>
@@ -12731,13 +12912,16 @@
           <a:ln/>
         </p:spPr>
         <p:txBody>
-          <a:bodyPr wrap="square" lIns="254" tIns="254" rIns="254" bIns="254" rtlCol="0" anchor="t">
+          <a:bodyPr wrap="square" lIns="508" tIns="508" rIns="508" bIns="508" rtlCol="0" anchor="t">
             <a:normAutofit/>
           </a:bodyPr>
           <a:lstStyle/>
           <a:p>
-            <a:r>
-              <a:rPr lang="en-US" sz="1380" dirty="0">
+            <a:pPr indent="0" marL="0">
+              <a:buNone/>
+            </a:pPr>
+            <a:r>
+              <a:rPr lang="en-US" sz="1220" dirty="0">
                 <a:solidFill>
                   <a:srgbClr val="17364A"/>
                 </a:solidFill>
@@ -12745,13 +12929,16 @@
                 <a:ea typeface="Aptos" pitchFamily="34" charset="-122"/>
                 <a:cs typeface="Aptos" pitchFamily="34" charset="-120"/>
               </a:rPr>
-              <a:t>What AI tools or AI-enabled vendor products are already being used informally?</a:t>
-            </a:r>
-            <a:endParaRPr lang="en-US" sz="1380" dirty="0"/>
-          </a:p>
-          <a:p>
-            <a:r>
-              <a:rPr lang="en-US" sz="1380" dirty="0">
+              <a:t>What AI tools or AI-enabled vendor products are already being used.</a:t>
+            </a:r>
+            <a:endParaRPr lang="en-US" sz="1220" dirty="0"/>
+          </a:p>
+          <a:p>
+            <a:pPr indent="0" marL="0">
+              <a:buNone/>
+            </a:pPr>
+            <a:r>
+              <a:rPr lang="en-US" sz="1220" dirty="0">
                 <a:solidFill>
                   <a:srgbClr val="17364A"/>
                 </a:solidFill>
@@ -12759,13 +12946,16 @@
                 <a:ea typeface="Aptos" pitchFamily="34" charset="-122"/>
                 <a:cs typeface="Aptos" pitchFamily="34" charset="-120"/>
               </a:rPr>
-              <a:t>Which public health decisions should never be delegated to an AI system?</a:t>
-            </a:r>
-            <a:endParaRPr lang="en-US" sz="1380" dirty="0"/>
-          </a:p>
-          <a:p>
-            <a:r>
-              <a:rPr lang="en-US" sz="1380" dirty="0">
+              <a:t>Which public health decisions should never be delegated to an AI.</a:t>
+            </a:r>
+            <a:endParaRPr lang="en-US" sz="1220" dirty="0"/>
+          </a:p>
+          <a:p>
+            <a:pPr indent="0" marL="0">
+              <a:buNone/>
+            </a:pPr>
+            <a:r>
+              <a:rPr lang="en-US" sz="1220" dirty="0">
                 <a:solidFill>
                   <a:srgbClr val="17364A"/>
                 </a:solidFill>
@@ -12773,9 +12963,9 @@
                 <a:ea typeface="Aptos" pitchFamily="34" charset="-122"/>
                 <a:cs typeface="Aptos" pitchFamily="34" charset="-120"/>
               </a:rPr>
-              <a:t>Who needs enough AI literacy to participate in governance, procurement, or implementation.</a:t>
-            </a:r>
-            <a:endParaRPr lang="en-US" sz="1380" dirty="0"/>
+              <a:t>Who needs enough AI literacy to participate in governance,.</a:t>
+            </a:r>
+            <a:endParaRPr lang="en-US" sz="1220" dirty="0"/>
           </a:p>
         </p:txBody>
       </p:sp>
@@ -12853,17 +13043,17 @@
         </p:nvSpPr>
         <p:spPr>
           <a:xfrm>
-            <a:off x="7799832" y="5001768"/>
-            <a:ext cx="3145536" cy="502920"/>
-          </a:xfrm>
-          <a:prstGeom prst="rect">
-            <a:avLst/>
-          </a:prstGeom>
-          <a:noFill/>
-          <a:ln/>
-        </p:spPr>
-        <p:txBody>
-          <a:bodyPr wrap="square" lIns="0" tIns="0" rIns="0" bIns="0" rtlCol="0" anchor="t">
+            <a:off x="7799832" y="4974336"/>
+            <a:ext cx="3145536" cy="576072"/>
+          </a:xfrm>
+          <a:prstGeom prst="rect">
+            <a:avLst/>
+          </a:prstGeom>
+          <a:noFill/>
+          <a:ln/>
+        </p:spPr>
+        <p:txBody>
+          <a:bodyPr wrap="square" lIns="254" tIns="254" rIns="254" bIns="254" rtlCol="0" anchor="t">
             <a:normAutofit/>
           </a:bodyPr>
           <a:lstStyle/>
@@ -12872,7 +13062,7 @@
               <a:buNone/>
             </a:pPr>
             <a:r>
-              <a:rPr lang="en-US" sz="1550" dirty="0">
+              <a:rPr lang="en-US" sz="1320" dirty="0">
                 <a:solidFill>
                   <a:srgbClr val="17364A"/>
                 </a:solidFill>
@@ -12880,9 +13070,9 @@
                 <a:ea typeface="Aptos" pitchFamily="34" charset="-122"/>
                 <a:cs typeface="Aptos" pitchFamily="34" charset="-120"/>
               </a:rPr>
-              <a:t>Connect the concept to public health purpose, responsible use, required safeguards, documentation, and the next action a department should take.</a:t>
-            </a:r>
-            <a:endParaRPr lang="en-US" sz="1550" dirty="0"/>
+              <a:t>Connect the concept to public health purpose, responsible use, required safeguards, documentation, and the next action a.</a:t>
+            </a:r>
+            <a:endParaRPr lang="en-US" sz="1320" dirty="0"/>
           </a:p>
         </p:txBody>
       </p:sp>
@@ -13183,49 +13373,58 @@
           <a:ln/>
         </p:spPr>
         <p:txBody>
-          <a:bodyPr wrap="square" lIns="635" tIns="635" rIns="635" bIns="635" rtlCol="0" anchor="t">
+          <a:bodyPr wrap="square" lIns="1016" tIns="1016" rIns="1016" bIns="1016" rtlCol="0" anchor="t">
             <a:normAutofit/>
           </a:bodyPr>
           <a:lstStyle/>
           <a:p>
+            <a:pPr indent="0" marL="0">
+              <a:buNone/>
+            </a:pPr>
             <a:r>
               <a:rPr lang="en-US" sz="2100" dirty="0">
                 <a:solidFill>
-                  <a:srgbClr val="17364A"/>
-                </a:solidFill>
-                <a:latin typeface="Aptos" pitchFamily="34" charset="0"/>
-                <a:ea typeface="Aptos" pitchFamily="34" charset="-122"/>
-                <a:cs typeface="Aptos" pitchFamily="34" charset="-120"/>
-              </a:rPr>
-              <a:t>Ask each program area to list one current task that involves searching, summarizing, drafting, routing,.</a:t>
+                  <a:srgbClr val="003A63"/>
+                </a:solidFill>
+                <a:latin typeface="Aptos" pitchFamily="34" charset="0"/>
+                <a:ea typeface="Aptos" pitchFamily="34" charset="-122"/>
+                <a:cs typeface="Aptos" pitchFamily="34" charset="-120"/>
+              </a:rPr>
+              <a:t>• Ask each program area to list one current task that involves searching, summarizing, drafting,.</a:t>
             </a:r>
             <a:endParaRPr lang="en-US" sz="2100" dirty="0"/>
           </a:p>
           <a:p>
+            <a:pPr indent="0" marL="0">
+              <a:buNone/>
+            </a:pPr>
             <a:r>
               <a:rPr lang="en-US" sz="2100" dirty="0">
                 <a:solidFill>
-                  <a:srgbClr val="17364A"/>
-                </a:solidFill>
-                <a:latin typeface="Aptos" pitchFamily="34" charset="0"/>
-                <a:ea typeface="Aptos" pitchFamily="34" charset="-122"/>
-                <a:cs typeface="Aptos" pitchFamily="34" charset="-120"/>
-              </a:rPr>
-              <a:t>Classify each task by AI type and identify the human decision owner.</a:t>
+                  <a:srgbClr val="003A63"/>
+                </a:solidFill>
+                <a:latin typeface="Aptos" pitchFamily="34" charset="0"/>
+                <a:ea typeface="Aptos" pitchFamily="34" charset="-122"/>
+                <a:cs typeface="Aptos" pitchFamily="34" charset="-120"/>
+              </a:rPr>
+              <a:t>• Classify each task by AI type and identify the human decision owner.</a:t>
             </a:r>
             <a:endParaRPr lang="en-US" sz="2100" dirty="0"/>
           </a:p>
           <a:p>
+            <a:pPr indent="0" marL="0">
+              <a:buNone/>
+            </a:pPr>
             <a:r>
               <a:rPr lang="en-US" sz="2100" dirty="0">
                 <a:solidFill>
-                  <a:srgbClr val="17364A"/>
-                </a:solidFill>
-                <a:latin typeface="Aptos" pitchFamily="34" charset="0"/>
-                <a:ea typeface="Aptos" pitchFamily="34" charset="-122"/>
-                <a:cs typeface="Aptos" pitchFamily="34" charset="-120"/>
-              </a:rPr>
-              <a:t>Expected assignment: Agency AI vocabulary list</a:t>
+                  <a:srgbClr val="003A63"/>
+                </a:solidFill>
+                <a:latin typeface="Aptos" pitchFamily="34" charset="0"/>
+                <a:ea typeface="Aptos" pitchFamily="34" charset="-122"/>
+                <a:cs typeface="Aptos" pitchFamily="34" charset="-120"/>
+              </a:rPr>
+              <a:t>• Expected assignment: Agency AI vocabulary list</a:t>
             </a:r>
             <a:endParaRPr lang="en-US" sz="2100" dirty="0"/>
           </a:p>
@@ -13305,17 +13504,17 @@
         </p:nvSpPr>
         <p:spPr>
           <a:xfrm>
-            <a:off x="7799832" y="1828800"/>
-            <a:ext cx="3145536" cy="685800"/>
-          </a:xfrm>
-          <a:prstGeom prst="rect">
-            <a:avLst/>
-          </a:prstGeom>
-          <a:noFill/>
-          <a:ln/>
-        </p:spPr>
-        <p:txBody>
-          <a:bodyPr wrap="square" lIns="0" tIns="0" rIns="0" bIns="0" rtlCol="0" anchor="t">
+            <a:off x="7799832" y="1801368"/>
+            <a:ext cx="3145536" cy="758952"/>
+          </a:xfrm>
+          <a:prstGeom prst="rect">
+            <a:avLst/>
+          </a:prstGeom>
+          <a:noFill/>
+          <a:ln/>
+        </p:spPr>
+        <p:txBody>
+          <a:bodyPr wrap="square" lIns="254" tIns="254" rIns="254" bIns="254" rtlCol="0" anchor="t">
             <a:normAutofit/>
           </a:bodyPr>
           <a:lstStyle/>
@@ -13324,7 +13523,7 @@
               <a:buNone/>
             </a:pPr>
             <a:r>
-              <a:rPr lang="en-US" sz="1550" dirty="0">
+              <a:rPr lang="en-US" sz="1320" dirty="0">
                 <a:solidFill>
                   <a:srgbClr val="17364A"/>
                 </a:solidFill>
@@ -13334,7 +13533,7 @@
               </a:rPr>
               <a:t>Ask each program area to list one current task that involves searching, summarizing, drafting, routing,.</a:t>
             </a:r>
-            <a:endParaRPr lang="en-US" sz="1550" dirty="0"/>
+            <a:endParaRPr lang="en-US" sz="1320" dirty="0"/>
           </a:p>
         </p:txBody>
       </p:sp>
@@ -13422,13 +13621,16 @@
           <a:ln/>
         </p:spPr>
         <p:txBody>
-          <a:bodyPr wrap="square" lIns="254" tIns="254" rIns="254" bIns="254" rtlCol="0" anchor="t">
+          <a:bodyPr wrap="square" lIns="508" tIns="508" rIns="508" bIns="508" rtlCol="0" anchor="t">
             <a:normAutofit/>
           </a:bodyPr>
           <a:lstStyle/>
           <a:p>
-            <a:r>
-              <a:rPr lang="en-US" sz="1380" dirty="0">
+            <a:pPr indent="0" marL="0">
+              <a:buNone/>
+            </a:pPr>
+            <a:r>
+              <a:rPr lang="en-US" sz="1220" dirty="0">
                 <a:solidFill>
                   <a:srgbClr val="17364A"/>
                 </a:solidFill>
@@ -13436,13 +13638,16 @@
                 <a:ea typeface="Aptos" pitchFamily="34" charset="-122"/>
                 <a:cs typeface="Aptos" pitchFamily="34" charset="-120"/>
               </a:rPr>
-              <a:t>Ask each program area to list one current task that involves searching, summarizing,.</a:t>
-            </a:r>
-            <a:endParaRPr lang="en-US" sz="1380" dirty="0"/>
-          </a:p>
-          <a:p>
-            <a:r>
-              <a:rPr lang="en-US" sz="1380" dirty="0">
+              <a:t>Ask each program area to list one current task that involves.</a:t>
+            </a:r>
+            <a:endParaRPr lang="en-US" sz="1220" dirty="0"/>
+          </a:p>
+          <a:p>
+            <a:pPr indent="0" marL="0">
+              <a:buNone/>
+            </a:pPr>
+            <a:r>
+              <a:rPr lang="en-US" sz="1220" dirty="0">
                 <a:solidFill>
                   <a:srgbClr val="17364A"/>
                 </a:solidFill>
@@ -13452,7 +13657,7 @@
               </a:rPr>
               <a:t>Expected assignment: Initial inventory of known or suspected AI use</a:t>
             </a:r>
-            <a:endParaRPr lang="en-US" sz="1380" dirty="0"/>
+            <a:endParaRPr lang="en-US" sz="1220" dirty="0"/>
           </a:p>
         </p:txBody>
       </p:sp>
@@ -13530,17 +13735,17 @@
         </p:nvSpPr>
         <p:spPr>
           <a:xfrm>
-            <a:off x="7799832" y="5001768"/>
-            <a:ext cx="3145536" cy="502920"/>
-          </a:xfrm>
-          <a:prstGeom prst="rect">
-            <a:avLst/>
-          </a:prstGeom>
-          <a:noFill/>
-          <a:ln/>
-        </p:spPr>
-        <p:txBody>
-          <a:bodyPr wrap="square" lIns="0" tIns="0" rIns="0" bIns="0" rtlCol="0" anchor="t">
+            <a:off x="7799832" y="4974336"/>
+            <a:ext cx="3145536" cy="576072"/>
+          </a:xfrm>
+          <a:prstGeom prst="rect">
+            <a:avLst/>
+          </a:prstGeom>
+          <a:noFill/>
+          <a:ln/>
+        </p:spPr>
+        <p:txBody>
+          <a:bodyPr wrap="square" lIns="254" tIns="254" rIns="254" bIns="254" rtlCol="0" anchor="t">
             <a:normAutofit/>
           </a:bodyPr>
           <a:lstStyle/>
@@ -13549,7 +13754,7 @@
               <a:buNone/>
             </a:pPr>
             <a:r>
-              <a:rPr lang="en-US" sz="1550" dirty="0">
+              <a:rPr lang="en-US" sz="1320" dirty="0">
                 <a:solidFill>
                   <a:srgbClr val="17364A"/>
                 </a:solidFill>
@@ -13557,9 +13762,9 @@
                 <a:ea typeface="Aptos" pitchFamily="34" charset="-122"/>
                 <a:cs typeface="Aptos" pitchFamily="34" charset="-120"/>
               </a:rPr>
-              <a:t>Use the assignment to test whether you can explain the concept, apply it to a realistic public health situation, and identify what would need review before the work moves forward.</a:t>
-            </a:r>
-            <a:endParaRPr lang="en-US" sz="1550" dirty="0"/>
+              <a:t>Use the assignment to test whether you can explain the concept, apply it to a realistic public health situation, and.</a:t>
+            </a:r>
+            <a:endParaRPr lang="en-US" sz="1320" dirty="0"/>
           </a:p>
         </p:txBody>
       </p:sp>
@@ -13860,21 +14065,24 @@
           <a:ln/>
         </p:spPr>
         <p:txBody>
-          <a:bodyPr wrap="square" lIns="635" tIns="635" rIns="635" bIns="635" rtlCol="0" anchor="t">
+          <a:bodyPr wrap="square" lIns="1016" tIns="1016" rIns="1016" bIns="1016" rtlCol="0" anchor="t">
             <a:normAutofit/>
           </a:bodyPr>
           <a:lstStyle/>
           <a:p>
+            <a:pPr indent="0" marL="0">
+              <a:buNone/>
+            </a:pPr>
             <a:r>
               <a:rPr lang="en-US" sz="2100" dirty="0">
                 <a:solidFill>
-                  <a:srgbClr val="17364A"/>
-                </a:solidFill>
-                <a:latin typeface="Aptos" pitchFamily="34" charset="0"/>
-                <a:ea typeface="Aptos" pitchFamily="34" charset="-122"/>
-                <a:cs typeface="Aptos" pitchFamily="34" charset="-120"/>
-              </a:rPr>
-              <a:t>Expected assignment: Draft list of decisions that require human accountability</a:t>
+                  <a:srgbClr val="003A63"/>
+                </a:solidFill>
+                <a:latin typeface="Aptos" pitchFamily="34" charset="0"/>
+                <a:ea typeface="Aptos" pitchFamily="34" charset="-122"/>
+                <a:cs typeface="Aptos" pitchFamily="34" charset="-120"/>
+              </a:rPr>
+              <a:t>• Expected assignment: Draft list of decisions that require human accountability</a:t>
             </a:r>
             <a:endParaRPr lang="en-US" sz="2100" dirty="0"/>
           </a:p>
@@ -13954,17 +14162,17 @@
         </p:nvSpPr>
         <p:spPr>
           <a:xfrm>
-            <a:off x="7799832" y="1828800"/>
-            <a:ext cx="3145536" cy="685800"/>
-          </a:xfrm>
-          <a:prstGeom prst="rect">
-            <a:avLst/>
-          </a:prstGeom>
-          <a:noFill/>
-          <a:ln/>
-        </p:spPr>
-        <p:txBody>
-          <a:bodyPr wrap="square" lIns="0" tIns="0" rIns="0" bIns="0" rtlCol="0" anchor="t">
+            <a:off x="7799832" y="1801368"/>
+            <a:ext cx="3145536" cy="758952"/>
+          </a:xfrm>
+          <a:prstGeom prst="rect">
+            <a:avLst/>
+          </a:prstGeom>
+          <a:noFill/>
+          <a:ln/>
+        </p:spPr>
+        <p:txBody>
+          <a:bodyPr wrap="square" lIns="254" tIns="254" rIns="254" bIns="254" rtlCol="0" anchor="t">
             <a:normAutofit/>
           </a:bodyPr>
           <a:lstStyle/>
@@ -13973,7 +14181,7 @@
               <a:buNone/>
             </a:pPr>
             <a:r>
-              <a:rPr lang="en-US" sz="1550" dirty="0">
+              <a:rPr lang="en-US" sz="1320" dirty="0">
                 <a:solidFill>
                   <a:srgbClr val="17364A"/>
                 </a:solidFill>
@@ -13983,7 +14191,7 @@
               </a:rPr>
               <a:t>Expected assignment: Draft list of decisions that require human accountability</a:t>
             </a:r>
-            <a:endParaRPr lang="en-US" sz="1550" dirty="0"/>
+            <a:endParaRPr lang="en-US" sz="1320" dirty="0"/>
           </a:p>
         </p:txBody>
       </p:sp>
@@ -14071,13 +14279,16 @@
           <a:ln/>
         </p:spPr>
         <p:txBody>
-          <a:bodyPr wrap="square" lIns="254" tIns="254" rIns="254" bIns="254" rtlCol="0" anchor="t">
+          <a:bodyPr wrap="square" lIns="508" tIns="508" rIns="508" bIns="508" rtlCol="0" anchor="t">
             <a:normAutofit/>
           </a:bodyPr>
           <a:lstStyle/>
           <a:p>
-            <a:r>
-              <a:rPr lang="en-US" sz="1380" dirty="0">
+            <a:pPr indent="0" marL="0">
+              <a:buNone/>
+            </a:pPr>
+            <a:r>
+              <a:rPr lang="en-US" sz="1220" dirty="0">
                 <a:solidFill>
                   <a:srgbClr val="17364A"/>
                 </a:solidFill>
@@ -14085,9 +14296,9 @@
                 <a:ea typeface="Aptos" pitchFamily="34" charset="-122"/>
                 <a:cs typeface="Aptos" pitchFamily="34" charset="-120"/>
               </a:rPr>
-              <a:t>Expected assignment: Draft list of decisions that require human accountability</a:t>
-            </a:r>
-            <a:endParaRPr lang="en-US" sz="1380" dirty="0"/>
+              <a:t>Expected assignment: Draft list of decisions that require human.</a:t>
+            </a:r>
+            <a:endParaRPr lang="en-US" sz="1220" dirty="0"/>
           </a:p>
         </p:txBody>
       </p:sp>
@@ -14165,17 +14376,17 @@
         </p:nvSpPr>
         <p:spPr>
           <a:xfrm>
-            <a:off x="7799832" y="5001768"/>
-            <a:ext cx="3145536" cy="502920"/>
-          </a:xfrm>
-          <a:prstGeom prst="rect">
-            <a:avLst/>
-          </a:prstGeom>
-          <a:noFill/>
-          <a:ln/>
-        </p:spPr>
-        <p:txBody>
-          <a:bodyPr wrap="square" lIns="0" tIns="0" rIns="0" bIns="0" rtlCol="0" anchor="t">
+            <a:off x="7799832" y="4974336"/>
+            <a:ext cx="3145536" cy="576072"/>
+          </a:xfrm>
+          <a:prstGeom prst="rect">
+            <a:avLst/>
+          </a:prstGeom>
+          <a:noFill/>
+          <a:ln/>
+        </p:spPr>
+        <p:txBody>
+          <a:bodyPr wrap="square" lIns="254" tIns="254" rIns="254" bIns="254" rtlCol="0" anchor="t">
             <a:normAutofit/>
           </a:bodyPr>
           <a:lstStyle/>
@@ -14184,7 +14395,7 @@
               <a:buNone/>
             </a:pPr>
             <a:r>
-              <a:rPr lang="en-US" sz="1550" dirty="0">
+              <a:rPr lang="en-US" sz="1320" dirty="0">
                 <a:solidFill>
                   <a:srgbClr val="17364A"/>
                 </a:solidFill>
@@ -14192,9 +14403,9 @@
                 <a:ea typeface="Aptos" pitchFamily="34" charset="-122"/>
                 <a:cs typeface="Aptos" pitchFamily="34" charset="-120"/>
               </a:rPr>
-              <a:t>Use the assignment to test whether you can explain the concept, apply it to a realistic public health situation, and identify what would need review before the work moves forward.</a:t>
-            </a:r>
-            <a:endParaRPr lang="en-US" sz="1550" dirty="0"/>
+              <a:t>Use the assignment to test whether you can explain the concept, apply it to a realistic public health situation, and.</a:t>
+            </a:r>
+            <a:endParaRPr lang="en-US" sz="1320" dirty="0"/>
           </a:p>
         </p:txBody>
       </p:sp>
@@ -14495,49 +14706,58 @@
           <a:ln/>
         </p:spPr>
         <p:txBody>
-          <a:bodyPr wrap="square" lIns="635" tIns="635" rIns="635" bIns="635" rtlCol="0" anchor="t">
+          <a:bodyPr wrap="square" lIns="1016" tIns="1016" rIns="1016" bIns="1016" rtlCol="0" anchor="t">
             <a:normAutofit/>
           </a:bodyPr>
           <a:lstStyle/>
           <a:p>
+            <a:pPr indent="0" marL="0">
+              <a:buNone/>
+            </a:pPr>
             <a:r>
               <a:rPr lang="en-US" sz="2100" dirty="0">
                 <a:solidFill>
-                  <a:srgbClr val="17364A"/>
-                </a:solidFill>
-                <a:latin typeface="Aptos" pitchFamily="34" charset="0"/>
-                <a:ea typeface="Aptos" pitchFamily="34" charset="-122"/>
-                <a:cs typeface="Aptos" pitchFamily="34" charset="-120"/>
-              </a:rPr>
-              <a:t>1. What is the most important first step after completing the Introduction to AI for Public Health.</a:t>
+                  <a:srgbClr val="003A63"/>
+                </a:solidFill>
+                <a:latin typeface="Aptos" pitchFamily="34" charset="0"/>
+                <a:ea typeface="Aptos" pitchFamily="34" charset="-122"/>
+                <a:cs typeface="Aptos" pitchFamily="34" charset="-120"/>
+              </a:rPr>
+              <a:t>• 1. What is the most important first step after completing the Introduction to AI for Public.</a:t>
             </a:r>
             <a:endParaRPr lang="en-US" sz="2100" dirty="0"/>
           </a:p>
           <a:p>
+            <a:pPr indent="0" marL="0">
+              <a:buNone/>
+            </a:pPr>
             <a:r>
               <a:rPr lang="en-US" sz="2100" dirty="0">
                 <a:solidFill>
-                  <a:srgbClr val="17364A"/>
-                </a:solidFill>
-                <a:latin typeface="Aptos" pitchFamily="34" charset="0"/>
-                <a:ea typeface="Aptos" pitchFamily="34" charset="-122"/>
-                <a:cs typeface="Aptos" pitchFamily="34" charset="-120"/>
-              </a:rPr>
-              <a:t>2. Which practice best supports responsible AI use in public health?</a:t>
+                  <a:srgbClr val="003A63"/>
+                </a:solidFill>
+                <a:latin typeface="Aptos" pitchFamily="34" charset="0"/>
+                <a:ea typeface="Aptos" pitchFamily="34" charset="-122"/>
+                <a:cs typeface="Aptos" pitchFamily="34" charset="-120"/>
+              </a:rPr>
+              <a:t>• 2. Which practice best supports responsible AI use in public health?</a:t>
             </a:r>
             <a:endParaRPr lang="en-US" sz="2100" dirty="0"/>
           </a:p>
           <a:p>
+            <a:pPr indent="0" marL="0">
+              <a:buNone/>
+            </a:pPr>
             <a:r>
               <a:rPr lang="en-US" sz="2100" dirty="0">
                 <a:solidFill>
-                  <a:srgbClr val="17364A"/>
-                </a:solidFill>
-                <a:latin typeface="Aptos" pitchFamily="34" charset="0"/>
-                <a:ea typeface="Aptos" pitchFamily="34" charset="-122"/>
-                <a:cs typeface="Aptos" pitchFamily="34" charset="-120"/>
-              </a:rPr>
-              <a:t>3. Which statement best reflects the risk or guardrail for this module: Do not treat AI as a single.</a:t>
+                  <a:srgbClr val="003A63"/>
+                </a:solidFill>
+                <a:latin typeface="Aptos" pitchFamily="34" charset="0"/>
+                <a:ea typeface="Aptos" pitchFamily="34" charset="-122"/>
+                <a:cs typeface="Aptos" pitchFamily="34" charset="-120"/>
+              </a:rPr>
+              <a:t>• 3. Which statement best reflects the risk or guardrail for this module: Do not treat AI as a.</a:t>
             </a:r>
             <a:endParaRPr lang="en-US" sz="2100" dirty="0"/>
           </a:p>
@@ -14617,17 +14837,17 @@
         </p:nvSpPr>
         <p:spPr>
           <a:xfrm>
-            <a:off x="7799832" y="1828800"/>
-            <a:ext cx="3145536" cy="685800"/>
-          </a:xfrm>
-          <a:prstGeom prst="rect">
-            <a:avLst/>
-          </a:prstGeom>
-          <a:noFill/>
-          <a:ln/>
-        </p:spPr>
-        <p:txBody>
-          <a:bodyPr wrap="square" lIns="0" tIns="0" rIns="0" bIns="0" rtlCol="0" anchor="t">
+            <a:off x="7799832" y="1801368"/>
+            <a:ext cx="3145536" cy="758952"/>
+          </a:xfrm>
+          <a:prstGeom prst="rect">
+            <a:avLst/>
+          </a:prstGeom>
+          <a:noFill/>
+          <a:ln/>
+        </p:spPr>
+        <p:txBody>
+          <a:bodyPr wrap="square" lIns="254" tIns="254" rIns="254" bIns="254" rtlCol="0" anchor="t">
             <a:normAutofit/>
           </a:bodyPr>
           <a:lstStyle/>
@@ -14636,7 +14856,7 @@
               <a:buNone/>
             </a:pPr>
             <a:r>
-              <a:rPr lang="en-US" sz="1550" dirty="0">
+              <a:rPr lang="en-US" sz="1320" dirty="0">
                 <a:solidFill>
                   <a:srgbClr val="17364A"/>
                 </a:solidFill>
@@ -14646,7 +14866,7 @@
               </a:rPr>
               <a:t>1. What is the most important first step after completing the Introduction to AI for Public Health.</a:t>
             </a:r>
-            <a:endParaRPr lang="en-US" sz="1550" dirty="0"/>
+            <a:endParaRPr lang="en-US" sz="1320" dirty="0"/>
           </a:p>
         </p:txBody>
       </p:sp>
@@ -14734,13 +14954,16 @@
           <a:ln/>
         </p:spPr>
         <p:txBody>
-          <a:bodyPr wrap="square" lIns="254" tIns="254" rIns="254" bIns="254" rtlCol="0" anchor="t">
+          <a:bodyPr wrap="square" lIns="508" tIns="508" rIns="508" bIns="508" rtlCol="0" anchor="t">
             <a:normAutofit/>
           </a:bodyPr>
           <a:lstStyle/>
           <a:p>
-            <a:r>
-              <a:rPr lang="en-US" sz="1380" dirty="0">
+            <a:pPr indent="0" marL="0">
+              <a:buNone/>
+            </a:pPr>
+            <a:r>
+              <a:rPr lang="en-US" sz="1220" dirty="0">
                 <a:solidFill>
                   <a:srgbClr val="17364A"/>
                 </a:solidFill>
@@ -14750,11 +14973,14 @@
               </a:rPr>
               <a:t>1.</a:t>
             </a:r>
-            <a:endParaRPr lang="en-US" sz="1380" dirty="0"/>
-          </a:p>
-          <a:p>
-            <a:r>
-              <a:rPr lang="en-US" sz="1380" dirty="0">
+            <a:endParaRPr lang="en-US" sz="1220" dirty="0"/>
+          </a:p>
+          <a:p>
+            <a:pPr indent="0" marL="0">
+              <a:buNone/>
+            </a:pPr>
+            <a:r>
+              <a:rPr lang="en-US" sz="1220" dirty="0">
                 <a:solidFill>
                   <a:srgbClr val="17364A"/>
                 </a:solidFill>
@@ -14762,13 +14988,16 @@
                 <a:ea typeface="Aptos" pitchFamily="34" charset="-122"/>
                 <a:cs typeface="Aptos" pitchFamily="34" charset="-120"/>
               </a:rPr>
-              <a:t>What is the most important first step after completing the Introduction to AI for Public.</a:t>
-            </a:r>
-            <a:endParaRPr lang="en-US" sz="1380" dirty="0"/>
-          </a:p>
-          <a:p>
-            <a:r>
-              <a:rPr lang="en-US" sz="1380" dirty="0">
+              <a:t>What is the most important first step after completing the.</a:t>
+            </a:r>
+            <a:endParaRPr lang="en-US" sz="1220" dirty="0"/>
+          </a:p>
+          <a:p>
+            <a:pPr indent="0" marL="0">
+              <a:buNone/>
+            </a:pPr>
+            <a:r>
+              <a:rPr lang="en-US" sz="1220" dirty="0">
                 <a:solidFill>
                   <a:srgbClr val="17364A"/>
                 </a:solidFill>
@@ -14778,7 +15007,7 @@
               </a:rPr>
               <a:t>2.</a:t>
             </a:r>
-            <a:endParaRPr lang="en-US" sz="1380" dirty="0"/>
+            <a:endParaRPr lang="en-US" sz="1220" dirty="0"/>
           </a:p>
         </p:txBody>
       </p:sp>
@@ -14856,17 +15085,17 @@
         </p:nvSpPr>
         <p:spPr>
           <a:xfrm>
-            <a:off x="7799832" y="5001768"/>
-            <a:ext cx="3145536" cy="502920"/>
-          </a:xfrm>
-          <a:prstGeom prst="rect">
-            <a:avLst/>
-          </a:prstGeom>
-          <a:noFill/>
-          <a:ln/>
-        </p:spPr>
-        <p:txBody>
-          <a:bodyPr wrap="square" lIns="0" tIns="0" rIns="0" bIns="0" rtlCol="0" anchor="t">
+            <a:off x="7799832" y="4974336"/>
+            <a:ext cx="3145536" cy="576072"/>
+          </a:xfrm>
+          <a:prstGeom prst="rect">
+            <a:avLst/>
+          </a:prstGeom>
+          <a:noFill/>
+          <a:ln/>
+        </p:spPr>
+        <p:txBody>
+          <a:bodyPr wrap="square" lIns="254" tIns="254" rIns="254" bIns="254" rtlCol="0" anchor="t">
             <a:normAutofit/>
           </a:bodyPr>
           <a:lstStyle/>
@@ -14875,7 +15104,7 @@
               <a:buNone/>
             </a:pPr>
             <a:r>
-              <a:rPr lang="en-US" sz="1550" dirty="0">
+              <a:rPr lang="en-US" sz="1320" dirty="0">
                 <a:solidFill>
                   <a:srgbClr val="17364A"/>
                 </a:solidFill>
@@ -14883,9 +15112,9 @@
                 <a:ea typeface="Aptos" pitchFamily="34" charset="-122"/>
                 <a:cs typeface="Aptos" pitchFamily="34" charset="-120"/>
               </a:rPr>
-              <a:t>Use the assignment to test whether you can explain the concept, apply it to a realistic public health situation, and identify what would need review before the work moves forward.</a:t>
-            </a:r>
-            <a:endParaRPr lang="en-US" sz="1550" dirty="0"/>
+              <a:t>Use the assignment to test whether you can explain the concept, apply it to a realistic public health situation, and.</a:t>
+            </a:r>
+            <a:endParaRPr lang="en-US" sz="1320" dirty="0"/>
           </a:p>
         </p:txBody>
       </p:sp>
@@ -15186,49 +15415,58 @@
           <a:ln/>
         </p:spPr>
         <p:txBody>
-          <a:bodyPr wrap="square" lIns="635" tIns="635" rIns="635" bIns="635" rtlCol="0" anchor="t">
+          <a:bodyPr wrap="square" lIns="1016" tIns="1016" rIns="1016" bIns="1016" rtlCol="0" anchor="t">
             <a:normAutofit/>
           </a:bodyPr>
           <a:lstStyle/>
           <a:p>
+            <a:pPr indent="0" marL="0">
+              <a:buNone/>
+            </a:pPr>
             <a:r>
               <a:rPr lang="en-US" sz="2100" dirty="0">
                 <a:solidFill>
-                  <a:srgbClr val="17364A"/>
-                </a:solidFill>
-                <a:latin typeface="Aptos" pitchFamily="34" charset="0"/>
-                <a:ea typeface="Aptos" pitchFamily="34" charset="-122"/>
-                <a:cs typeface="Aptos" pitchFamily="34" charset="-120"/>
-              </a:rPr>
-              <a:t>NIST AI Risk Management Framework: Foundational vocabulary for trustworthy AI risk management..</a:t>
+                  <a:srgbClr val="003A63"/>
+                </a:solidFill>
+                <a:latin typeface="Aptos" pitchFamily="34" charset="0"/>
+                <a:ea typeface="Aptos" pitchFamily="34" charset="-122"/>
+                <a:cs typeface="Aptos" pitchFamily="34" charset="-120"/>
+              </a:rPr>
+              <a:t>• NIST AI Risk Management Framework: Foundational vocabulary for trustworthy AI risk management..</a:t>
             </a:r>
             <a:endParaRPr lang="en-US" sz="2100" dirty="0"/>
           </a:p>
           <a:p>
+            <a:pPr indent="0" marL="0">
+              <a:buNone/>
+            </a:pPr>
             <a:r>
               <a:rPr lang="en-US" sz="2100" dirty="0">
                 <a:solidFill>
-                  <a:srgbClr val="17364A"/>
-                </a:solidFill>
-                <a:latin typeface="Aptos" pitchFamily="34" charset="0"/>
-                <a:ea typeface="Aptos" pitchFamily="34" charset="-122"/>
-                <a:cs typeface="Aptos" pitchFamily="34" charset="-120"/>
-              </a:rPr>
-              <a:t>ASPPH AI Framework Report: Public health framing for responsible AI education, research, practice,.</a:t>
+                  <a:srgbClr val="003A63"/>
+                </a:solidFill>
+                <a:latin typeface="Aptos" pitchFamily="34" charset="0"/>
+                <a:ea typeface="Aptos" pitchFamily="34" charset="-122"/>
+                <a:cs typeface="Aptos" pitchFamily="34" charset="-120"/>
+              </a:rPr>
+              <a:t>• ASPPH AI Framework Report: Public health framing for responsible AI education, research,.</a:t>
             </a:r>
             <a:endParaRPr lang="en-US" sz="2100" dirty="0"/>
           </a:p>
           <a:p>
+            <a:pPr indent="0" marL="0">
+              <a:buNone/>
+            </a:pPr>
             <a:r>
               <a:rPr lang="en-US" sz="2100" dirty="0">
                 <a:solidFill>
-                  <a:srgbClr val="17364A"/>
-                </a:solidFill>
-                <a:latin typeface="Aptos" pitchFamily="34" charset="0"/>
-                <a:ea typeface="Aptos" pitchFamily="34" charset="-122"/>
-                <a:cs typeface="Aptos" pitchFamily="34" charset="-120"/>
-              </a:rPr>
-              <a:t>WHO: Ethics and governance of artificial intelligence for health: Health-sector principles for ethical.</a:t>
+                  <a:srgbClr val="003A63"/>
+                </a:solidFill>
+                <a:latin typeface="Aptos" pitchFamily="34" charset="0"/>
+                <a:ea typeface="Aptos" pitchFamily="34" charset="-122"/>
+                <a:cs typeface="Aptos" pitchFamily="34" charset="-120"/>
+              </a:rPr>
+              <a:t>• WHO: Ethics and governance of artificial intelligence for health: Health-sector principles for.</a:t>
             </a:r>
             <a:endParaRPr lang="en-US" sz="2100" dirty="0"/>
           </a:p>
@@ -15308,17 +15546,17 @@
         </p:nvSpPr>
         <p:spPr>
           <a:xfrm>
-            <a:off x="7799832" y="1828800"/>
-            <a:ext cx="3145536" cy="685800"/>
-          </a:xfrm>
-          <a:prstGeom prst="rect">
-            <a:avLst/>
-          </a:prstGeom>
-          <a:noFill/>
-          <a:ln/>
-        </p:spPr>
-        <p:txBody>
-          <a:bodyPr wrap="square" lIns="0" tIns="0" rIns="0" bIns="0" rtlCol="0" anchor="t">
+            <a:off x="7799832" y="1801368"/>
+            <a:ext cx="3145536" cy="758952"/>
+          </a:xfrm>
+          <a:prstGeom prst="rect">
+            <a:avLst/>
+          </a:prstGeom>
+          <a:noFill/>
+          <a:ln/>
+        </p:spPr>
+        <p:txBody>
+          <a:bodyPr wrap="square" lIns="254" tIns="254" rIns="254" bIns="254" rtlCol="0" anchor="t">
             <a:normAutofit/>
           </a:bodyPr>
           <a:lstStyle/>
@@ -15327,7 +15565,7 @@
               <a:buNone/>
             </a:pPr>
             <a:r>
-              <a:rPr lang="en-US" sz="1550" dirty="0">
+              <a:rPr lang="en-US" sz="1320" dirty="0">
                 <a:solidFill>
                   <a:srgbClr val="17364A"/>
                 </a:solidFill>
@@ -15337,7 +15575,7 @@
               </a:rPr>
               <a:t>NIST AI Risk Management Framework: Foundational vocabulary for trustworthy AI risk management..</a:t>
             </a:r>
-            <a:endParaRPr lang="en-US" sz="1550" dirty="0"/>
+            <a:endParaRPr lang="en-US" sz="1320" dirty="0"/>
           </a:p>
         </p:txBody>
       </p:sp>
@@ -15425,13 +15663,16 @@
           <a:ln/>
         </p:spPr>
         <p:txBody>
-          <a:bodyPr wrap="square" lIns="254" tIns="254" rIns="254" bIns="254" rtlCol="0" anchor="t">
+          <a:bodyPr wrap="square" lIns="508" tIns="508" rIns="508" bIns="508" rtlCol="0" anchor="t">
             <a:normAutofit/>
           </a:bodyPr>
           <a:lstStyle/>
           <a:p>
-            <a:r>
-              <a:rPr lang="en-US" sz="1380" dirty="0">
+            <a:pPr indent="0" marL="0">
+              <a:buNone/>
+            </a:pPr>
+            <a:r>
+              <a:rPr lang="en-US" sz="1220" dirty="0">
                 <a:solidFill>
                   <a:srgbClr val="17364A"/>
                 </a:solidFill>
@@ -15439,13 +15680,16 @@
                 <a:ea typeface="Aptos" pitchFamily="34" charset="-122"/>
                 <a:cs typeface="Aptos" pitchFamily="34" charset="-120"/>
               </a:rPr>
-              <a:t>ASPPH AI Framework Report: Public health framing for responsible AI education, research,.</a:t>
-            </a:r>
-            <a:endParaRPr lang="en-US" sz="1380" dirty="0"/>
-          </a:p>
-          <a:p>
-            <a:r>
-              <a:rPr lang="en-US" sz="1380" dirty="0">
+              <a:t>ASPPH AI Framework Report: Public health framing for responsible.</a:t>
+            </a:r>
+            <a:endParaRPr lang="en-US" sz="1220" dirty="0"/>
+          </a:p>
+          <a:p>
+            <a:pPr indent="0" marL="0">
+              <a:buNone/>
+            </a:pPr>
+            <a:r>
+              <a:rPr lang="en-US" sz="1220" dirty="0">
                 <a:solidFill>
                   <a:srgbClr val="17364A"/>
                 </a:solidFill>
@@ -15453,13 +15697,16 @@
                 <a:ea typeface="Aptos" pitchFamily="34" charset="-122"/>
                 <a:cs typeface="Aptos" pitchFamily="34" charset="-120"/>
               </a:rPr>
-              <a:t>WHO: Ethics and governance of artificial intelligence for health: Health-sector principles.</a:t>
-            </a:r>
-            <a:endParaRPr lang="en-US" sz="1380" dirty="0"/>
-          </a:p>
-          <a:p>
-            <a:r>
-              <a:rPr lang="en-US" sz="1380" dirty="0">
+              <a:t>WHO: Ethics and governance of artificial intelligence for health:.</a:t>
+            </a:r>
+            <a:endParaRPr lang="en-US" sz="1220" dirty="0"/>
+          </a:p>
+          <a:p>
+            <a:pPr indent="0" marL="0">
+              <a:buNone/>
+            </a:pPr>
+            <a:r>
+              <a:rPr lang="en-US" sz="1220" dirty="0">
                 <a:solidFill>
                   <a:srgbClr val="17364A"/>
                 </a:solidFill>
@@ -15467,9 +15714,9 @@
                 <a:ea typeface="Aptos" pitchFamily="34" charset="-122"/>
                 <a:cs typeface="Aptos" pitchFamily="34" charset="-120"/>
               </a:rPr>
-              <a:t>NIH PubMed: Primary source for biomedical and public health literature searches..</a:t>
-            </a:r>
-            <a:endParaRPr lang="en-US" sz="1380" dirty="0"/>
+              <a:t>NIH PubMed: Primary source for biomedical and public health.</a:t>
+            </a:r>
+            <a:endParaRPr lang="en-US" sz="1220" dirty="0"/>
           </a:p>
         </p:txBody>
       </p:sp>
@@ -15547,17 +15794,17 @@
         </p:nvSpPr>
         <p:spPr>
           <a:xfrm>
-            <a:off x="7799832" y="5001768"/>
-            <a:ext cx="3145536" cy="502920"/>
-          </a:xfrm>
-          <a:prstGeom prst="rect">
-            <a:avLst/>
-          </a:prstGeom>
-          <a:noFill/>
-          <a:ln/>
-        </p:spPr>
-        <p:txBody>
-          <a:bodyPr wrap="square" lIns="0" tIns="0" rIns="0" bIns="0" rtlCol="0" anchor="t">
+            <a:off x="7799832" y="4974336"/>
+            <a:ext cx="3145536" cy="576072"/>
+          </a:xfrm>
+          <a:prstGeom prst="rect">
+            <a:avLst/>
+          </a:prstGeom>
+          <a:noFill/>
+          <a:ln/>
+        </p:spPr>
+        <p:txBody>
+          <a:bodyPr wrap="square" lIns="254" tIns="254" rIns="254" bIns="254" rtlCol="0" anchor="t">
             <a:normAutofit/>
           </a:bodyPr>
           <a:lstStyle/>
@@ -15566,7 +15813,7 @@
               <a:buNone/>
             </a:pPr>
             <a:r>
-              <a:rPr lang="en-US" sz="1550" dirty="0">
+              <a:rPr lang="en-US" sz="1320" dirty="0">
                 <a:solidFill>
                   <a:srgbClr val="17364A"/>
                 </a:solidFill>
@@ -15574,9 +15821,9 @@
                 <a:ea typeface="Aptos" pitchFamily="34" charset="-122"/>
                 <a:cs typeface="Aptos" pitchFamily="34" charset="-120"/>
               </a:rPr>
-              <a:t>Connect the concept to public health purpose, responsible use, required safeguards, documentation, and the next action a department should take.</a:t>
-            </a:r>
-            <a:endParaRPr lang="en-US" sz="1550" dirty="0"/>
+              <a:t>Connect the concept to public health purpose, responsible use, required safeguards, documentation, and the next action a.</a:t>
+            </a:r>
+            <a:endParaRPr lang="en-US" sz="1320" dirty="0"/>
           </a:p>
         </p:txBody>
       </p:sp>
@@ -15877,21 +16124,24 @@
           <a:ln/>
         </p:spPr>
         <p:txBody>
-          <a:bodyPr wrap="square" lIns="635" tIns="635" rIns="635" bIns="635" rtlCol="0" anchor="t">
+          <a:bodyPr wrap="square" lIns="1016" tIns="1016" rIns="1016" bIns="1016" rtlCol="0" anchor="t">
             <a:normAutofit/>
           </a:bodyPr>
           <a:lstStyle/>
           <a:p>
+            <a:pPr indent="0" marL="0">
+              <a:buNone/>
+            </a:pPr>
             <a:r>
               <a:rPr lang="en-US" sz="2100" dirty="0">
                 <a:solidFill>
-                  <a:srgbClr val="17364A"/>
-                </a:solidFill>
-                <a:latin typeface="Aptos" pitchFamily="34" charset="0"/>
-                <a:ea typeface="Aptos" pitchFamily="34" charset="-122"/>
-                <a:cs typeface="Aptos" pitchFamily="34" charset="-120"/>
-              </a:rPr>
-              <a:t>ASPPH AI Framework Report: Framework language for responsible use of AI-supported research and.</a:t>
+                  <a:srgbClr val="003A63"/>
+                </a:solidFill>
+                <a:latin typeface="Aptos" pitchFamily="34" charset="0"/>
+                <a:ea typeface="Aptos" pitchFamily="34" charset="-122"/>
+                <a:cs typeface="Aptos" pitchFamily="34" charset="-120"/>
+              </a:rPr>
+              <a:t>• ASPPH AI Framework Report: Framework language for responsible use of AI-supported research and.</a:t>
             </a:r>
             <a:endParaRPr lang="en-US" sz="2100" dirty="0"/>
           </a:p>
@@ -15971,17 +16221,17 @@
         </p:nvSpPr>
         <p:spPr>
           <a:xfrm>
-            <a:off x="7799832" y="1828800"/>
-            <a:ext cx="3145536" cy="685800"/>
-          </a:xfrm>
-          <a:prstGeom prst="rect">
-            <a:avLst/>
-          </a:prstGeom>
-          <a:noFill/>
-          <a:ln/>
-        </p:spPr>
-        <p:txBody>
-          <a:bodyPr wrap="square" lIns="0" tIns="0" rIns="0" bIns="0" rtlCol="0" anchor="t">
+            <a:off x="7799832" y="1801368"/>
+            <a:ext cx="3145536" cy="758952"/>
+          </a:xfrm>
+          <a:prstGeom prst="rect">
+            <a:avLst/>
+          </a:prstGeom>
+          <a:noFill/>
+          <a:ln/>
+        </p:spPr>
+        <p:txBody>
+          <a:bodyPr wrap="square" lIns="254" tIns="254" rIns="254" bIns="254" rtlCol="0" anchor="t">
             <a:normAutofit/>
           </a:bodyPr>
           <a:lstStyle/>
@@ -15990,7 +16240,7 @@
               <a:buNone/>
             </a:pPr>
             <a:r>
-              <a:rPr lang="en-US" sz="1550" dirty="0">
+              <a:rPr lang="en-US" sz="1320" dirty="0">
                 <a:solidFill>
                   <a:srgbClr val="17364A"/>
                 </a:solidFill>
@@ -16000,7 +16250,7 @@
               </a:rPr>
               <a:t>ASPPH AI Framework Report: Framework language for responsible use of AI-supported research and.</a:t>
             </a:r>
-            <a:endParaRPr lang="en-US" sz="1550" dirty="0"/>
+            <a:endParaRPr lang="en-US" sz="1320" dirty="0"/>
           </a:p>
         </p:txBody>
       </p:sp>
@@ -16088,13 +16338,16 @@
           <a:ln/>
         </p:spPr>
         <p:txBody>
-          <a:bodyPr wrap="square" lIns="254" tIns="254" rIns="254" bIns="254" rtlCol="0" anchor="t">
+          <a:bodyPr wrap="square" lIns="508" tIns="508" rIns="508" bIns="508" rtlCol="0" anchor="t">
             <a:normAutofit/>
           </a:bodyPr>
           <a:lstStyle/>
           <a:p>
-            <a:r>
-              <a:rPr lang="en-US" sz="1380" dirty="0">
+            <a:pPr indent="0" marL="0">
+              <a:buNone/>
+            </a:pPr>
+            <a:r>
+              <a:rPr lang="en-US" sz="1220" dirty="0">
                 <a:solidFill>
                   <a:srgbClr val="17364A"/>
                 </a:solidFill>
@@ -16102,9 +16355,9 @@
                 <a:ea typeface="Aptos" pitchFamily="34" charset="-122"/>
                 <a:cs typeface="Aptos" pitchFamily="34" charset="-120"/>
               </a:rPr>
-              <a:t>ASPPH AI Framework Report: Framework language for responsible use of AI-supported research.</a:t>
-            </a:r>
-            <a:endParaRPr lang="en-US" sz="1380" dirty="0"/>
+              <a:t>ASPPH AI Framework Report: Framework language for responsible use.</a:t>
+            </a:r>
+            <a:endParaRPr lang="en-US" sz="1220" dirty="0"/>
           </a:p>
         </p:txBody>
       </p:sp>
@@ -16182,17 +16435,17 @@
         </p:nvSpPr>
         <p:spPr>
           <a:xfrm>
-            <a:off x="7799832" y="5001768"/>
-            <a:ext cx="3145536" cy="502920"/>
-          </a:xfrm>
-          <a:prstGeom prst="rect">
-            <a:avLst/>
-          </a:prstGeom>
-          <a:noFill/>
-          <a:ln/>
-        </p:spPr>
-        <p:txBody>
-          <a:bodyPr wrap="square" lIns="0" tIns="0" rIns="0" bIns="0" rtlCol="0" anchor="t">
+            <a:off x="7799832" y="4974336"/>
+            <a:ext cx="3145536" cy="576072"/>
+          </a:xfrm>
+          <a:prstGeom prst="rect">
+            <a:avLst/>
+          </a:prstGeom>
+          <a:noFill/>
+          <a:ln/>
+        </p:spPr>
+        <p:txBody>
+          <a:bodyPr wrap="square" lIns="254" tIns="254" rIns="254" bIns="254" rtlCol="0" anchor="t">
             <a:normAutofit/>
           </a:bodyPr>
           <a:lstStyle/>
@@ -16201,7 +16454,7 @@
               <a:buNone/>
             </a:pPr>
             <a:r>
-              <a:rPr lang="en-US" sz="1550" dirty="0">
+              <a:rPr lang="en-US" sz="1320" dirty="0">
                 <a:solidFill>
                   <a:srgbClr val="17364A"/>
                 </a:solidFill>
@@ -16209,9 +16462,9 @@
                 <a:ea typeface="Aptos" pitchFamily="34" charset="-122"/>
                 <a:cs typeface="Aptos" pitchFamily="34" charset="-120"/>
               </a:rPr>
-              <a:t>Connect the concept to public health purpose, responsible use, required safeguards, documentation, and the next action a department should take.</a:t>
-            </a:r>
-            <a:endParaRPr lang="en-US" sz="1550" dirty="0"/>
+              <a:t>Connect the concept to public health purpose, responsible use, required safeguards, documentation, and the next action a.</a:t>
+            </a:r>
+            <a:endParaRPr lang="en-US" sz="1320" dirty="0"/>
           </a:p>
         </p:txBody>
       </p:sp>
@@ -16512,49 +16765,58 @@
           <a:ln/>
         </p:spPr>
         <p:txBody>
-          <a:bodyPr wrap="square" lIns="635" tIns="635" rIns="635" bIns="635" rtlCol="0" anchor="t">
+          <a:bodyPr wrap="square" lIns="1016" tIns="1016" rIns="1016" bIns="1016" rtlCol="0" anchor="t">
             <a:normAutofit/>
           </a:bodyPr>
           <a:lstStyle/>
           <a:p>
+            <a:pPr indent="0" marL="0">
+              <a:buNone/>
+            </a:pPr>
             <a:r>
               <a:rPr lang="en-US" sz="1900" dirty="0">
                 <a:solidFill>
-                  <a:srgbClr val="17364A"/>
-                </a:solidFill>
-                <a:latin typeface="Aptos" pitchFamily="34" charset="0"/>
-                <a:ea typeface="Aptos" pitchFamily="34" charset="-122"/>
-                <a:cs typeface="Aptos" pitchFamily="34" charset="-120"/>
-              </a:rPr>
-              <a:t>Play 1: Vision &amp; Guardrails - This lesson informs Play 1 by helping learners connect the lesson topic to.</a:t>
+                  <a:srgbClr val="003A63"/>
+                </a:solidFill>
+                <a:latin typeface="Aptos" pitchFamily="34" charset="0"/>
+                <a:ea typeface="Aptos" pitchFamily="34" charset="-122"/>
+                <a:cs typeface="Aptos" pitchFamily="34" charset="-120"/>
+              </a:rPr>
+              <a:t>• Play 1: Vision &amp; Guardrails - This lesson informs Play 1 by helping learners connect the.</a:t>
             </a:r>
             <a:endParaRPr lang="en-US" sz="1900" dirty="0"/>
           </a:p>
           <a:p>
+            <a:pPr indent="0" marL="0">
+              <a:buNone/>
+            </a:pPr>
             <a:r>
               <a:rPr lang="en-US" sz="1900" dirty="0">
                 <a:solidFill>
-                  <a:srgbClr val="17364A"/>
-                </a:solidFill>
-                <a:latin typeface="Aptos" pitchFamily="34" charset="0"/>
-                <a:ea typeface="Aptos" pitchFamily="34" charset="-122"/>
-                <a:cs typeface="Aptos" pitchFamily="34" charset="-120"/>
-              </a:rPr>
-              <a:t>Play 3: Establish AI Governance - This lesson informs Play 3 by helping learners connect the lesson topic to.</a:t>
+                  <a:srgbClr val="003A63"/>
+                </a:solidFill>
+                <a:latin typeface="Aptos" pitchFamily="34" charset="0"/>
+                <a:ea typeface="Aptos" pitchFamily="34" charset="-122"/>
+                <a:cs typeface="Aptos" pitchFamily="34" charset="-120"/>
+              </a:rPr>
+              <a:t>• Play 3: Establish AI Governance - This lesson informs Play 3 by helping learners connect the.</a:t>
             </a:r>
             <a:endParaRPr lang="en-US" sz="1900" dirty="0"/>
           </a:p>
           <a:p>
+            <a:pPr indent="0" marL="0">
+              <a:buNone/>
+            </a:pPr>
             <a:r>
               <a:rPr lang="en-US" sz="1900" dirty="0">
                 <a:solidFill>
-                  <a:srgbClr val="17364A"/>
-                </a:solidFill>
-                <a:latin typeface="Aptos" pitchFamily="34" charset="0"/>
-                <a:ea typeface="Aptos" pitchFamily="34" charset="-122"/>
-                <a:cs typeface="Aptos" pitchFamily="34" charset="-120"/>
-              </a:rPr>
-              <a:t>Play 11: Build and Deploy AI Solutions - This lesson informs Play 11 by helping learners connect the lesson.</a:t>
+                  <a:srgbClr val="003A63"/>
+                </a:solidFill>
+                <a:latin typeface="Aptos" pitchFamily="34" charset="0"/>
+                <a:ea typeface="Aptos" pitchFamily="34" charset="-122"/>
+                <a:cs typeface="Aptos" pitchFamily="34" charset="-120"/>
+              </a:rPr>
+              <a:t>• Play 11: Build and Deploy AI Solutions - This lesson informs Play 11 by helping learners.</a:t>
             </a:r>
             <a:endParaRPr lang="en-US" sz="1900" dirty="0"/>
           </a:p>
@@ -16634,17 +16896,17 @@
         </p:nvSpPr>
         <p:spPr>
           <a:xfrm>
-            <a:off x="8211312" y="1920240"/>
-            <a:ext cx="2734056" cy="1463040"/>
-          </a:xfrm>
-          <a:prstGeom prst="rect">
-            <a:avLst/>
-          </a:prstGeom>
-          <a:noFill/>
-          <a:ln/>
-        </p:spPr>
-        <p:txBody>
-          <a:bodyPr wrap="square" lIns="0" tIns="0" rIns="0" bIns="0" rtlCol="0" anchor="t">
+            <a:off x="8211312" y="1892808"/>
+            <a:ext cx="2734056" cy="1536192"/>
+          </a:xfrm>
+          <a:prstGeom prst="rect">
+            <a:avLst/>
+          </a:prstGeom>
+          <a:noFill/>
+          <a:ln/>
+        </p:spPr>
+        <p:txBody>
+          <a:bodyPr wrap="square" lIns="254" tIns="254" rIns="254" bIns="254" rtlCol="0" anchor="t">
             <a:normAutofit/>
           </a:bodyPr>
           <a:lstStyle/>
@@ -16653,7 +16915,7 @@
               <a:buNone/>
             </a:pPr>
             <a:r>
-              <a:rPr lang="en-US" sz="1550" dirty="0">
+              <a:rPr lang="en-US" sz="1320" dirty="0">
                 <a:solidFill>
                   <a:srgbClr val="17364A"/>
                 </a:solidFill>
@@ -16661,9 +16923,9 @@
                 <a:ea typeface="Aptos" pitchFamily="34" charset="-122"/>
                 <a:cs typeface="Aptos" pitchFamily="34" charset="-120"/>
               </a:rPr>
-              <a:t>Use the related plays to identify decisions, participants, timing, approvals, and documentation needed for responsible implementation.</a:t>
-            </a:r>
-            <a:endParaRPr lang="en-US" sz="1550" dirty="0"/>
+              <a:t>Use the related plays to identify decisions, participants, timing, approvals, and documentation needed for responsible.</a:t>
+            </a:r>
+            <a:endParaRPr lang="en-US" sz="1320" dirty="0"/>
           </a:p>
         </p:txBody>
       </p:sp>
@@ -16751,13 +17013,16 @@
           <a:ln/>
         </p:spPr>
         <p:txBody>
-          <a:bodyPr wrap="square" lIns="254" tIns="254" rIns="254" bIns="254" rtlCol="0" anchor="t">
+          <a:bodyPr wrap="square" lIns="508" tIns="508" rIns="508" bIns="508" rtlCol="0" anchor="t">
             <a:normAutofit/>
           </a:bodyPr>
           <a:lstStyle/>
           <a:p>
-            <a:r>
-              <a:rPr lang="en-US" sz="1380" dirty="0">
+            <a:pPr indent="0" marL="0">
+              <a:buNone/>
+            </a:pPr>
+            <a:r>
+              <a:rPr lang="en-US" sz="1220" dirty="0">
                 <a:solidFill>
                   <a:srgbClr val="17364A"/>
                 </a:solidFill>
@@ -16767,11 +17032,14 @@
               </a:rPr>
               <a:t>Locate the decision point in the playbook sequence.</a:t>
             </a:r>
-            <a:endParaRPr lang="en-US" sz="1380" dirty="0"/>
-          </a:p>
-          <a:p>
-            <a:r>
-              <a:rPr lang="en-US" sz="1380" dirty="0">
+            <a:endParaRPr lang="en-US" sz="1220" dirty="0"/>
+          </a:p>
+          <a:p>
+            <a:pPr indent="0" marL="0">
+              <a:buNone/>
+            </a:pPr>
+            <a:r>
+              <a:rPr lang="en-US" sz="1220" dirty="0">
                 <a:solidFill>
                   <a:srgbClr val="17364A"/>
                 </a:solidFill>
@@ -16781,11 +17049,14 @@
               </a:rPr>
               <a:t>Identify who should participate in the work.</a:t>
             </a:r>
-            <a:endParaRPr lang="en-US" sz="1380" dirty="0"/>
-          </a:p>
-          <a:p>
-            <a:r>
-              <a:rPr lang="en-US" sz="1380" dirty="0">
+            <a:endParaRPr lang="en-US" sz="1220" dirty="0"/>
+          </a:p>
+          <a:p>
+            <a:pPr indent="0" marL="0">
+              <a:buNone/>
+            </a:pPr>
+            <a:r>
+              <a:rPr lang="en-US" sz="1220" dirty="0">
                 <a:solidFill>
                   <a:srgbClr val="17364A"/>
                 </a:solidFill>
@@ -16795,7 +17066,7 @@
               </a:rPr>
               <a:t>Document the review, approval, or implementation step.</a:t>
             </a:r>
-            <a:endParaRPr lang="en-US" sz="1380" dirty="0"/>
+            <a:endParaRPr lang="en-US" sz="1220" dirty="0"/>
           </a:p>
         </p:txBody>
       </p:sp>
@@ -17096,35 +17367,41 @@
           <a:ln/>
         </p:spPr>
         <p:txBody>
-          <a:bodyPr wrap="square" lIns="635" tIns="635" rIns="635" bIns="635" rtlCol="0" anchor="t">
+          <a:bodyPr wrap="square" lIns="1016" tIns="1016" rIns="1016" bIns="1016" rtlCol="0" anchor="t">
             <a:normAutofit/>
           </a:bodyPr>
           <a:lstStyle/>
           <a:p>
+            <a:pPr indent="0" marL="0">
+              <a:buNone/>
+            </a:pPr>
             <a:r>
               <a:rPr lang="en-US" sz="1850" dirty="0">
                 <a:solidFill>
-                  <a:srgbClr val="17364A"/>
-                </a:solidFill>
-                <a:latin typeface="Aptos" pitchFamily="34" charset="0"/>
-                <a:ea typeface="Aptos" pitchFamily="34" charset="-122"/>
-                <a:cs typeface="Aptos" pitchFamily="34" charset="-120"/>
-              </a:rPr>
-              <a:t>Tool 1: AI Vision &amp; Principles Workshop (Workshop) - Use AI Vision &amp; Principles Workshop to translate this.</a:t>
+                  <a:srgbClr val="003A63"/>
+                </a:solidFill>
+                <a:latin typeface="Aptos" pitchFamily="34" charset="0"/>
+                <a:ea typeface="Aptos" pitchFamily="34" charset="-122"/>
+                <a:cs typeface="Aptos" pitchFamily="34" charset="-120"/>
+              </a:rPr>
+              <a:t>• Tool 1: AI Vision &amp; Principles Workshop (Workshop) - Use AI Vision &amp; Principles Workshop to.</a:t>
             </a:r>
             <a:endParaRPr lang="en-US" sz="1850" dirty="0"/>
           </a:p>
           <a:p>
+            <a:pPr indent="0" marL="0">
+              <a:buNone/>
+            </a:pPr>
             <a:r>
               <a:rPr lang="en-US" sz="1850" dirty="0">
                 <a:solidFill>
-                  <a:srgbClr val="17364A"/>
-                </a:solidFill>
-                <a:latin typeface="Aptos" pitchFamily="34" charset="0"/>
-                <a:ea typeface="Aptos" pitchFamily="34" charset="-122"/>
-                <a:cs typeface="Aptos" pitchFamily="34" charset="-120"/>
-              </a:rPr>
-              <a:t>Tool 2: Responsible AI Policy Template (Template) - Use Responsible AI Policy Template to translate this.</a:t>
+                  <a:srgbClr val="003A63"/>
+                </a:solidFill>
+                <a:latin typeface="Aptos" pitchFamily="34" charset="0"/>
+                <a:ea typeface="Aptos" pitchFamily="34" charset="-122"/>
+                <a:cs typeface="Aptos" pitchFamily="34" charset="-120"/>
+              </a:rPr>
+              <a:t>• Tool 2: Responsible AI Policy Template (Template) - Use Responsible AI Policy Template to.</a:t>
             </a:r>
             <a:endParaRPr lang="en-US" sz="1850" dirty="0"/>
           </a:p>
@@ -17204,17 +17481,17 @@
         </p:nvSpPr>
         <p:spPr>
           <a:xfrm>
-            <a:off x="8211312" y="1920240"/>
-            <a:ext cx="2734056" cy="1463040"/>
-          </a:xfrm>
-          <a:prstGeom prst="rect">
-            <a:avLst/>
-          </a:prstGeom>
-          <a:noFill/>
-          <a:ln/>
-        </p:spPr>
-        <p:txBody>
-          <a:bodyPr wrap="square" lIns="0" tIns="0" rIns="0" bIns="0" rtlCol="0" anchor="t">
+            <a:off x="8211312" y="1892808"/>
+            <a:ext cx="2734056" cy="1536192"/>
+          </a:xfrm>
+          <a:prstGeom prst="rect">
+            <a:avLst/>
+          </a:prstGeom>
+          <a:noFill/>
+          <a:ln/>
+        </p:spPr>
+        <p:txBody>
+          <a:bodyPr wrap="square" lIns="254" tIns="254" rIns="254" bIns="254" rtlCol="0" anchor="t">
             <a:normAutofit/>
           </a:bodyPr>
           <a:lstStyle/>
@@ -17223,7 +17500,7 @@
               <a:buNone/>
             </a:pPr>
             <a:r>
-              <a:rPr lang="en-US" sz="1550" dirty="0">
+              <a:rPr lang="en-US" sz="1320" dirty="0">
                 <a:solidFill>
                   <a:srgbClr val="17364A"/>
                 </a:solidFill>
@@ -17231,9 +17508,9 @@
                 <a:ea typeface="Aptos" pitchFamily="34" charset="-122"/>
                 <a:cs typeface="Aptos" pitchFamily="34" charset="-120"/>
               </a:rPr>
-              <a:t>Use linked tools when your department needs a structured worksheet, template, checklist, review process, or documentation artifact.</a:t>
-            </a:r>
-            <a:endParaRPr lang="en-US" sz="1550" dirty="0"/>
+              <a:t>Use linked tools when your department needs a structured worksheet, template, checklist, review process, or.</a:t>
+            </a:r>
+            <a:endParaRPr lang="en-US" sz="1320" dirty="0"/>
           </a:p>
         </p:txBody>
       </p:sp>
@@ -17321,13 +17598,16 @@
           <a:ln/>
         </p:spPr>
         <p:txBody>
-          <a:bodyPr wrap="square" lIns="254" tIns="254" rIns="254" bIns="254" rtlCol="0" anchor="t">
+          <a:bodyPr wrap="square" lIns="508" tIns="508" rIns="508" bIns="508" rtlCol="0" anchor="t">
             <a:normAutofit/>
           </a:bodyPr>
           <a:lstStyle/>
           <a:p>
-            <a:r>
-              <a:rPr lang="en-US" sz="1380" dirty="0">
+            <a:pPr indent="0" marL="0">
+              <a:buNone/>
+            </a:pPr>
+            <a:r>
+              <a:rPr lang="en-US" sz="1220" dirty="0">
                 <a:solidFill>
                   <a:srgbClr val="17364A"/>
                 </a:solidFill>
@@ -17337,11 +17617,14 @@
               </a:rPr>
               <a:t>Use a tool when no comparable local process exists.</a:t>
             </a:r>
-            <a:endParaRPr lang="en-US" sz="1380" dirty="0"/>
-          </a:p>
-          <a:p>
-            <a:r>
-              <a:rPr lang="en-US" sz="1380" dirty="0">
+            <a:endParaRPr lang="en-US" sz="1220" dirty="0"/>
+          </a:p>
+          <a:p>
+            <a:pPr indent="0" marL="0">
+              <a:buNone/>
+            </a:pPr>
+            <a:r>
+              <a:rPr lang="en-US" sz="1220" dirty="0">
                 <a:solidFill>
                   <a:srgbClr val="17364A"/>
                 </a:solidFill>
@@ -17349,13 +17632,16 @@
                 <a:ea typeface="Aptos" pitchFamily="34" charset="-122"/>
                 <a:cs typeface="Aptos" pitchFamily="34" charset="-120"/>
               </a:rPr>
-              <a:t>Adapt existing department templates when they already fit the purpose.</a:t>
-            </a:r>
-            <a:endParaRPr lang="en-US" sz="1380" dirty="0"/>
-          </a:p>
-          <a:p>
-            <a:r>
-              <a:rPr lang="en-US" sz="1380" dirty="0">
+              <a:t>Adapt existing department templates when they already fit the.</a:t>
+            </a:r>
+            <a:endParaRPr lang="en-US" sz="1220" dirty="0"/>
+          </a:p>
+          <a:p>
+            <a:pPr indent="0" marL="0">
+              <a:buNone/>
+            </a:pPr>
+            <a:r>
+              <a:rPr lang="en-US" sz="1220" dirty="0">
                 <a:solidFill>
                   <a:srgbClr val="17364A"/>
                 </a:solidFill>
@@ -17365,7 +17651,7 @@
               </a:rPr>
               <a:t>Save the completed artifact as evidence of the decision.</a:t>
             </a:r>
-            <a:endParaRPr lang="en-US" sz="1380" dirty="0"/>
+            <a:endParaRPr lang="en-US" sz="1220" dirty="0"/>
           </a:p>
         </p:txBody>
       </p:sp>
@@ -17666,49 +17952,58 @@
           <a:ln/>
         </p:spPr>
         <p:txBody>
-          <a:bodyPr wrap="square" lIns="635" tIns="635" rIns="635" bIns="635" rtlCol="0" anchor="t">
+          <a:bodyPr wrap="square" lIns="1016" tIns="1016" rIns="1016" bIns="1016" rtlCol="0" anchor="t">
             <a:normAutofit/>
           </a:bodyPr>
           <a:lstStyle/>
           <a:p>
+            <a:pPr indent="0" marL="0">
+              <a:buNone/>
+            </a:pPr>
             <a:r>
               <a:rPr lang="en-US" sz="2100" dirty="0">
                 <a:solidFill>
-                  <a:srgbClr val="17364A"/>
-                </a:solidFill>
-                <a:latin typeface="Aptos" pitchFamily="34" charset="0"/>
-                <a:ea typeface="Aptos" pitchFamily="34" charset="-122"/>
-                <a:cs typeface="Aptos" pitchFamily="34" charset="-120"/>
-              </a:rPr>
-              <a:t>Define the concept in plain language for colleagues, leaders, partners, and community-facing discussions.</a:t>
+                  <a:srgbClr val="003A63"/>
+                </a:solidFill>
+                <a:latin typeface="Aptos" pitchFamily="34" charset="0"/>
+                <a:ea typeface="Aptos" pitchFamily="34" charset="-122"/>
+                <a:cs typeface="Aptos" pitchFamily="34" charset="-120"/>
+              </a:rPr>
+              <a:t>• Define the concept in plain language for colleagues, leaders, partners, and community-facing.</a:t>
             </a:r>
             <a:endParaRPr lang="en-US" sz="2100" dirty="0"/>
           </a:p>
           <a:p>
+            <a:pPr indent="0" marL="0">
+              <a:buNone/>
+            </a:pPr>
             <a:r>
               <a:rPr lang="en-US" sz="2100" dirty="0">
                 <a:solidFill>
-                  <a:srgbClr val="17364A"/>
-                </a:solidFill>
-                <a:latin typeface="Aptos" pitchFamily="34" charset="0"/>
-                <a:ea typeface="Aptos" pitchFamily="34" charset="-122"/>
-                <a:cs typeface="Aptos" pitchFamily="34" charset="-120"/>
-              </a:rPr>
-              <a:t>Identify where the concept affects AI planning, governance, procurement, implementation, monitoring,.</a:t>
+                  <a:srgbClr val="003A63"/>
+                </a:solidFill>
+                <a:latin typeface="Aptos" pitchFamily="34" charset="0"/>
+                <a:ea typeface="Aptos" pitchFamily="34" charset="-122"/>
+                <a:cs typeface="Aptos" pitchFamily="34" charset="-120"/>
+              </a:rPr>
+              <a:t>• Identify where the concept affects AI planning, governance, procurement, implementation,.</a:t>
             </a:r>
             <a:endParaRPr lang="en-US" sz="2100" dirty="0"/>
           </a:p>
           <a:p>
+            <a:pPr indent="0" marL="0">
+              <a:buNone/>
+            </a:pPr>
             <a:r>
               <a:rPr lang="en-US" sz="2100" dirty="0">
                 <a:solidFill>
-                  <a:srgbClr val="17364A"/>
-                </a:solidFill>
-                <a:latin typeface="Aptos" pitchFamily="34" charset="0"/>
-                <a:ea typeface="Aptos" pitchFamily="34" charset="-122"/>
-                <a:cs typeface="Aptos" pitchFamily="34" charset="-120"/>
-              </a:rPr>
-              <a:t>Apply the concept to a concrete public health workflow using the linked plays, tools, safeguards, and.</a:t>
+                  <a:srgbClr val="003A63"/>
+                </a:solidFill>
+                <a:latin typeface="Aptos" pitchFamily="34" charset="0"/>
+                <a:ea typeface="Aptos" pitchFamily="34" charset="-122"/>
+                <a:cs typeface="Aptos" pitchFamily="34" charset="-120"/>
+              </a:rPr>
+              <a:t>• Apply the concept to a concrete public health workflow using the linked plays, tools,.</a:t>
             </a:r>
             <a:endParaRPr lang="en-US" sz="2100" dirty="0"/>
           </a:p>
@@ -17788,17 +18083,17 @@
         </p:nvSpPr>
         <p:spPr>
           <a:xfrm>
-            <a:off x="7799832" y="1828800"/>
-            <a:ext cx="3145536" cy="685800"/>
-          </a:xfrm>
-          <a:prstGeom prst="rect">
-            <a:avLst/>
-          </a:prstGeom>
-          <a:noFill/>
-          <a:ln/>
-        </p:spPr>
-        <p:txBody>
-          <a:bodyPr wrap="square" lIns="0" tIns="0" rIns="0" bIns="0" rtlCol="0" anchor="t">
+            <a:off x="7799832" y="1801368"/>
+            <a:ext cx="3145536" cy="758952"/>
+          </a:xfrm>
+          <a:prstGeom prst="rect">
+            <a:avLst/>
+          </a:prstGeom>
+          <a:noFill/>
+          <a:ln/>
+        </p:spPr>
+        <p:txBody>
+          <a:bodyPr wrap="square" lIns="254" tIns="254" rIns="254" bIns="254" rtlCol="0" anchor="t">
             <a:normAutofit/>
           </a:bodyPr>
           <a:lstStyle/>
@@ -17807,7 +18102,7 @@
               <a:buNone/>
             </a:pPr>
             <a:r>
-              <a:rPr lang="en-US" sz="1550" dirty="0">
+              <a:rPr lang="en-US" sz="1320" dirty="0">
                 <a:solidFill>
                   <a:srgbClr val="17364A"/>
                 </a:solidFill>
@@ -17817,7 +18112,7 @@
               </a:rPr>
               <a:t>Define the concept in plain language for colleagues, leaders, partners, and community-facing discussions.</a:t>
             </a:r>
-            <a:endParaRPr lang="en-US" sz="1550" dirty="0"/>
+            <a:endParaRPr lang="en-US" sz="1320" dirty="0"/>
           </a:p>
         </p:txBody>
       </p:sp>
@@ -17905,13 +18200,16 @@
           <a:ln/>
         </p:spPr>
         <p:txBody>
-          <a:bodyPr wrap="square" lIns="254" tIns="254" rIns="254" bIns="254" rtlCol="0" anchor="t">
+          <a:bodyPr wrap="square" lIns="508" tIns="508" rIns="508" bIns="508" rtlCol="0" anchor="t">
             <a:normAutofit/>
           </a:bodyPr>
           <a:lstStyle/>
           <a:p>
-            <a:r>
-              <a:rPr lang="en-US" sz="1380" dirty="0">
+            <a:pPr indent="0" marL="0">
+              <a:buNone/>
+            </a:pPr>
+            <a:r>
+              <a:rPr lang="en-US" sz="1220" dirty="0">
                 <a:solidFill>
                   <a:srgbClr val="17364A"/>
                 </a:solidFill>
@@ -17919,13 +18217,16 @@
                 <a:ea typeface="Aptos" pitchFamily="34" charset="-122"/>
                 <a:cs typeface="Aptos" pitchFamily="34" charset="-120"/>
               </a:rPr>
-              <a:t>Identify where the concept affects AI planning, governance, procurement, implementation,.</a:t>
-            </a:r>
-            <a:endParaRPr lang="en-US" sz="1380" dirty="0"/>
-          </a:p>
-          <a:p>
-            <a:r>
-              <a:rPr lang="en-US" sz="1380" dirty="0">
+              <a:t>Identify where the concept affects AI planning, governance,.</a:t>
+            </a:r>
+            <a:endParaRPr lang="en-US" sz="1220" dirty="0"/>
+          </a:p>
+          <a:p>
+            <a:pPr indent="0" marL="0">
+              <a:buNone/>
+            </a:pPr>
+            <a:r>
+              <a:rPr lang="en-US" sz="1220" dirty="0">
                 <a:solidFill>
                   <a:srgbClr val="17364A"/>
                 </a:solidFill>
@@ -17933,13 +18234,16 @@
                 <a:ea typeface="Aptos" pitchFamily="34" charset="-122"/>
                 <a:cs typeface="Aptos" pitchFamily="34" charset="-120"/>
               </a:rPr>
-              <a:t>Apply the concept to a concrete public health workflow using the linked plays, tools,.</a:t>
-            </a:r>
-            <a:endParaRPr lang="en-US" sz="1380" dirty="0"/>
-          </a:p>
-          <a:p>
-            <a:r>
-              <a:rPr lang="en-US" sz="1380" dirty="0">
+              <a:t>Apply the concept to a concrete public health workflow using the.</a:t>
+            </a:r>
+            <a:endParaRPr lang="en-US" sz="1220" dirty="0"/>
+          </a:p>
+          <a:p>
+            <a:pPr indent="0" marL="0">
+              <a:buNone/>
+            </a:pPr>
+            <a:r>
+              <a:rPr lang="en-US" sz="1220" dirty="0">
                 <a:solidFill>
                   <a:srgbClr val="17364A"/>
                 </a:solidFill>
@@ -17947,9 +18251,9 @@
                 <a:ea typeface="Aptos" pitchFamily="34" charset="-122"/>
                 <a:cs typeface="Aptos" pitchFamily="34" charset="-120"/>
               </a:rPr>
-              <a:t>Complete a practical activity that produces an artifact you can use in readiness.</a:t>
-            </a:r>
-            <a:endParaRPr lang="en-US" sz="1380" dirty="0"/>
+              <a:t>Complete a practical activity that produces an artifact you can.</a:t>
+            </a:r>
+            <a:endParaRPr lang="en-US" sz="1220" dirty="0"/>
           </a:p>
         </p:txBody>
       </p:sp>
@@ -18027,17 +18331,17 @@
         </p:nvSpPr>
         <p:spPr>
           <a:xfrm>
-            <a:off x="7799832" y="5001768"/>
-            <a:ext cx="3145536" cy="502920"/>
-          </a:xfrm>
-          <a:prstGeom prst="rect">
-            <a:avLst/>
-          </a:prstGeom>
-          <a:noFill/>
-          <a:ln/>
-        </p:spPr>
-        <p:txBody>
-          <a:bodyPr wrap="square" lIns="0" tIns="0" rIns="0" bIns="0" rtlCol="0" anchor="t">
+            <a:off x="7799832" y="4974336"/>
+            <a:ext cx="3145536" cy="576072"/>
+          </a:xfrm>
+          <a:prstGeom prst="rect">
+            <a:avLst/>
+          </a:prstGeom>
+          <a:noFill/>
+          <a:ln/>
+        </p:spPr>
+        <p:txBody>
+          <a:bodyPr wrap="square" lIns="254" tIns="254" rIns="254" bIns="254" rtlCol="0" anchor="t">
             <a:normAutofit/>
           </a:bodyPr>
           <a:lstStyle/>
@@ -18046,7 +18350,7 @@
               <a:buNone/>
             </a:pPr>
             <a:r>
-              <a:rPr lang="en-US" sz="1550" dirty="0">
+              <a:rPr lang="en-US" sz="1320" dirty="0">
                 <a:solidFill>
                   <a:srgbClr val="17364A"/>
                 </a:solidFill>
@@ -18054,9 +18358,9 @@
                 <a:ea typeface="Aptos" pitchFamily="34" charset="-122"/>
                 <a:cs typeface="Aptos" pitchFamily="34" charset="-120"/>
               </a:rPr>
-              <a:t>Use the assignment to test whether you can explain the concept, apply it to a realistic public health situation, and identify what would need review before the work moves forward.</a:t>
-            </a:r>
-            <a:endParaRPr lang="en-US" sz="1550" dirty="0"/>
+              <a:t>Use the assignment to test whether you can explain the concept, apply it to a realistic public health situation, and.</a:t>
+            </a:r>
+            <a:endParaRPr lang="en-US" sz="1320" dirty="0"/>
           </a:p>
         </p:txBody>
       </p:sp>
@@ -18357,35 +18661,41 @@
           <a:ln/>
         </p:spPr>
         <p:txBody>
-          <a:bodyPr wrap="square" lIns="635" tIns="635" rIns="635" bIns="635" rtlCol="0" anchor="t">
+          <a:bodyPr wrap="square" lIns="1016" tIns="1016" rIns="1016" bIns="1016" rtlCol="0" anchor="t">
             <a:normAutofit/>
           </a:bodyPr>
           <a:lstStyle/>
           <a:p>
+            <a:pPr indent="0" marL="0">
+              <a:buNone/>
+            </a:pPr>
             <a:r>
               <a:rPr lang="en-US" sz="2100" dirty="0">
                 <a:solidFill>
-                  <a:srgbClr val="17364A"/>
-                </a:solidFill>
-                <a:latin typeface="Aptos" pitchFamily="34" charset="0"/>
-                <a:ea typeface="Aptos" pitchFamily="34" charset="-122"/>
-                <a:cs typeface="Aptos" pitchFamily="34" charset="-120"/>
-              </a:rPr>
-              <a:t>Produce or contribute to: Initial inventory of known or suspected AI use.</a:t>
+                  <a:srgbClr val="003A63"/>
+                </a:solidFill>
+                <a:latin typeface="Aptos" pitchFamily="34" charset="0"/>
+                <a:ea typeface="Aptos" pitchFamily="34" charset="-122"/>
+                <a:cs typeface="Aptos" pitchFamily="34" charset="-120"/>
+              </a:rPr>
+              <a:t>• Produce or contribute to: Initial inventory of known or suspected AI use.</a:t>
             </a:r>
             <a:endParaRPr lang="en-US" sz="2100" dirty="0"/>
           </a:p>
           <a:p>
+            <a:pPr indent="0" marL="0">
+              <a:buNone/>
+            </a:pPr>
             <a:r>
               <a:rPr lang="en-US" sz="2100" dirty="0">
                 <a:solidFill>
-                  <a:srgbClr val="17364A"/>
-                </a:solidFill>
-                <a:latin typeface="Aptos" pitchFamily="34" charset="0"/>
-                <a:ea typeface="Aptos" pitchFamily="34" charset="-122"/>
-                <a:cs typeface="Aptos" pitchFamily="34" charset="-120"/>
-              </a:rPr>
-              <a:t>Produce or contribute to: Draft list of decisions that require human accountability.</a:t>
+                  <a:srgbClr val="003A63"/>
+                </a:solidFill>
+                <a:latin typeface="Aptos" pitchFamily="34" charset="0"/>
+                <a:ea typeface="Aptos" pitchFamily="34" charset="-122"/>
+                <a:cs typeface="Aptos" pitchFamily="34" charset="-120"/>
+              </a:rPr>
+              <a:t>• Produce or contribute to: Draft list of decisions that require human accountability.</a:t>
             </a:r>
             <a:endParaRPr lang="en-US" sz="2100" dirty="0"/>
           </a:p>
@@ -18465,17 +18775,17 @@
         </p:nvSpPr>
         <p:spPr>
           <a:xfrm>
-            <a:off x="7799832" y="1828800"/>
-            <a:ext cx="3145536" cy="685800"/>
-          </a:xfrm>
-          <a:prstGeom prst="rect">
-            <a:avLst/>
-          </a:prstGeom>
-          <a:noFill/>
-          <a:ln/>
-        </p:spPr>
-        <p:txBody>
-          <a:bodyPr wrap="square" lIns="0" tIns="0" rIns="0" bIns="0" rtlCol="0" anchor="t">
+            <a:off x="7799832" y="1801368"/>
+            <a:ext cx="3145536" cy="758952"/>
+          </a:xfrm>
+          <a:prstGeom prst="rect">
+            <a:avLst/>
+          </a:prstGeom>
+          <a:noFill/>
+          <a:ln/>
+        </p:spPr>
+        <p:txBody>
+          <a:bodyPr wrap="square" lIns="254" tIns="254" rIns="254" bIns="254" rtlCol="0" anchor="t">
             <a:normAutofit/>
           </a:bodyPr>
           <a:lstStyle/>
@@ -18484,7 +18794,7 @@
               <a:buNone/>
             </a:pPr>
             <a:r>
-              <a:rPr lang="en-US" sz="1550" dirty="0">
+              <a:rPr lang="en-US" sz="1320" dirty="0">
                 <a:solidFill>
                   <a:srgbClr val="17364A"/>
                 </a:solidFill>
@@ -18494,7 +18804,7 @@
               </a:rPr>
               <a:t>Produce or contribute to: Initial inventory of known or suspected AI use.</a:t>
             </a:r>
-            <a:endParaRPr lang="en-US" sz="1550" dirty="0"/>
+            <a:endParaRPr lang="en-US" sz="1320" dirty="0"/>
           </a:p>
         </p:txBody>
       </p:sp>
@@ -18582,13 +18892,16 @@
           <a:ln/>
         </p:spPr>
         <p:txBody>
-          <a:bodyPr wrap="square" lIns="254" tIns="254" rIns="254" bIns="254" rtlCol="0" anchor="t">
+          <a:bodyPr wrap="square" lIns="508" tIns="508" rIns="508" bIns="508" rtlCol="0" anchor="t">
             <a:normAutofit/>
           </a:bodyPr>
           <a:lstStyle/>
           <a:p>
-            <a:r>
-              <a:rPr lang="en-US" sz="1380" dirty="0">
+            <a:pPr indent="0" marL="0">
+              <a:buNone/>
+            </a:pPr>
+            <a:r>
+              <a:rPr lang="en-US" sz="1220" dirty="0">
                 <a:solidFill>
                   <a:srgbClr val="17364A"/>
                 </a:solidFill>
@@ -18596,13 +18909,16 @@
                 <a:ea typeface="Aptos" pitchFamily="34" charset="-122"/>
                 <a:cs typeface="Aptos" pitchFamily="34" charset="-120"/>
               </a:rPr>
-              <a:t>Produce or contribute to: Initial inventory of known or suspected AI use.</a:t>
-            </a:r>
-            <a:endParaRPr lang="en-US" sz="1380" dirty="0"/>
-          </a:p>
-          <a:p>
-            <a:r>
-              <a:rPr lang="en-US" sz="1380" dirty="0">
+              <a:t>Produce or contribute to: Initial inventory of known or suspected.</a:t>
+            </a:r>
+            <a:endParaRPr lang="en-US" sz="1220" dirty="0"/>
+          </a:p>
+          <a:p>
+            <a:pPr indent="0" marL="0">
+              <a:buNone/>
+            </a:pPr>
+            <a:r>
+              <a:rPr lang="en-US" sz="1220" dirty="0">
                 <a:solidFill>
                   <a:srgbClr val="17364A"/>
                 </a:solidFill>
@@ -18610,9 +18926,9 @@
                 <a:ea typeface="Aptos" pitchFamily="34" charset="-122"/>
                 <a:cs typeface="Aptos" pitchFamily="34" charset="-120"/>
               </a:rPr>
-              <a:t>Produce or contribute to: Draft list of decisions that require human accountability.</a:t>
-            </a:r>
-            <a:endParaRPr lang="en-US" sz="1380" dirty="0"/>
+              <a:t>Produce or contribute to: Draft list of decisions that require.</a:t>
+            </a:r>
+            <a:endParaRPr lang="en-US" sz="1220" dirty="0"/>
           </a:p>
         </p:txBody>
       </p:sp>
@@ -18690,17 +19006,17 @@
         </p:nvSpPr>
         <p:spPr>
           <a:xfrm>
-            <a:off x="7799832" y="5001768"/>
-            <a:ext cx="3145536" cy="502920"/>
-          </a:xfrm>
-          <a:prstGeom prst="rect">
-            <a:avLst/>
-          </a:prstGeom>
-          <a:noFill/>
-          <a:ln/>
-        </p:spPr>
-        <p:txBody>
-          <a:bodyPr wrap="square" lIns="0" tIns="0" rIns="0" bIns="0" rtlCol="0" anchor="t">
+            <a:off x="7799832" y="4974336"/>
+            <a:ext cx="3145536" cy="576072"/>
+          </a:xfrm>
+          <a:prstGeom prst="rect">
+            <a:avLst/>
+          </a:prstGeom>
+          <a:noFill/>
+          <a:ln/>
+        </p:spPr>
+        <p:txBody>
+          <a:bodyPr wrap="square" lIns="254" tIns="254" rIns="254" bIns="254" rtlCol="0" anchor="t">
             <a:normAutofit/>
           </a:bodyPr>
           <a:lstStyle/>
@@ -18709,7 +19025,7 @@
               <a:buNone/>
             </a:pPr>
             <a:r>
-              <a:rPr lang="en-US" sz="1550" dirty="0">
+              <a:rPr lang="en-US" sz="1320" dirty="0">
                 <a:solidFill>
                   <a:srgbClr val="17364A"/>
                 </a:solidFill>
@@ -18717,9 +19033,9 @@
                 <a:ea typeface="Aptos" pitchFamily="34" charset="-122"/>
                 <a:cs typeface="Aptos" pitchFamily="34" charset="-120"/>
               </a:rPr>
-              <a:t>Use the assignment to test whether you can explain the concept, apply it to a realistic public health situation, and identify what would need review before the work moves forward.</a:t>
-            </a:r>
-            <a:endParaRPr lang="en-US" sz="1550" dirty="0"/>
+              <a:t>Use the assignment to test whether you can explain the concept, apply it to a realistic public health situation, and.</a:t>
+            </a:r>
+            <a:endParaRPr lang="en-US" sz="1320" dirty="0"/>
           </a:p>
         </p:txBody>
       </p:sp>
@@ -19020,49 +19336,58 @@
           <a:ln/>
         </p:spPr>
         <p:txBody>
-          <a:bodyPr wrap="square" lIns="635" tIns="635" rIns="635" bIns="635" rtlCol="0" anchor="t">
+          <a:bodyPr wrap="square" lIns="1016" tIns="1016" rIns="1016" bIns="1016" rtlCol="0" anchor="t">
             <a:normAutofit/>
           </a:bodyPr>
           <a:lstStyle/>
           <a:p>
+            <a:pPr indent="0" marL="0">
+              <a:buNone/>
+            </a:pPr>
             <a:r>
               <a:rPr lang="en-US" sz="2100" dirty="0">
                 <a:solidFill>
-                  <a:srgbClr val="17364A"/>
-                </a:solidFill>
-                <a:latin typeface="Aptos" pitchFamily="34" charset="0"/>
-                <a:ea typeface="Aptos" pitchFamily="34" charset="-122"/>
-                <a:cs typeface="Aptos" pitchFamily="34" charset="-120"/>
-              </a:rPr>
-              <a:t>You do not need to become a machine learning engineer to participate in responsible AI planning, but.</a:t>
+                  <a:srgbClr val="003A63"/>
+                </a:solidFill>
+                <a:latin typeface="Aptos" pitchFamily="34" charset="0"/>
+                <a:ea typeface="Aptos" pitchFamily="34" charset="-122"/>
+                <a:cs typeface="Aptos" pitchFamily="34" charset="-120"/>
+              </a:rPr>
+              <a:t>• You do not need to become a machine learning engineer to participate in responsible AI.</a:t>
             </a:r>
             <a:endParaRPr lang="en-US" sz="2100" dirty="0"/>
           </a:p>
           <a:p>
+            <a:pPr indent="0" marL="0">
+              <a:buNone/>
+            </a:pPr>
             <a:r>
               <a:rPr lang="en-US" sz="2100" dirty="0">
                 <a:solidFill>
-                  <a:srgbClr val="17364A"/>
-                </a:solidFill>
-                <a:latin typeface="Aptos" pitchFamily="34" charset="0"/>
-                <a:ea typeface="Aptos" pitchFamily="34" charset="-122"/>
-                <a:cs typeface="Aptos" pitchFamily="34" charset="-120"/>
-              </a:rPr>
-              <a:t>This module helps you distinguish pattern recognition, predictive analytics, generative AI,.</a:t>
+                  <a:srgbClr val="003A63"/>
+                </a:solidFill>
+                <a:latin typeface="Aptos" pitchFamily="34" charset="0"/>
+                <a:ea typeface="Aptos" pitchFamily="34" charset="-122"/>
+                <a:cs typeface="Aptos" pitchFamily="34" charset="-120"/>
+              </a:rPr>
+              <a:t>• This module helps you distinguish pattern recognition, predictive analytics, generative AI,.</a:t>
             </a:r>
             <a:endParaRPr lang="en-US" sz="2100" dirty="0"/>
           </a:p>
           <a:p>
+            <a:pPr indent="0" marL="0">
+              <a:buNone/>
+            </a:pPr>
             <a:r>
               <a:rPr lang="en-US" sz="2100" dirty="0">
                 <a:solidFill>
-                  <a:srgbClr val="17364A"/>
-                </a:solidFill>
-                <a:latin typeface="Aptos" pitchFamily="34" charset="0"/>
-                <a:ea typeface="Aptos" pitchFamily="34" charset="-122"/>
-                <a:cs typeface="Aptos" pitchFamily="34" charset="-120"/>
-              </a:rPr>
-              <a:t>That distinction matters because a tool that drafts a message, a tool that predicts risk, and a tool.</a:t>
+                  <a:srgbClr val="003A63"/>
+                </a:solidFill>
+                <a:latin typeface="Aptos" pitchFamily="34" charset="0"/>
+                <a:ea typeface="Aptos" pitchFamily="34" charset="-122"/>
+                <a:cs typeface="Aptos" pitchFamily="34" charset="-120"/>
+              </a:rPr>
+              <a:t>• That distinction matters because a tool that drafts a message, a tool that predicts risk, and.</a:t>
             </a:r>
             <a:endParaRPr lang="en-US" sz="2100" dirty="0"/>
           </a:p>
@@ -19142,17 +19467,17 @@
         </p:nvSpPr>
         <p:spPr>
           <a:xfrm>
-            <a:off x="7799832" y="1828800"/>
-            <a:ext cx="3145536" cy="685800"/>
-          </a:xfrm>
-          <a:prstGeom prst="rect">
-            <a:avLst/>
-          </a:prstGeom>
-          <a:noFill/>
-          <a:ln/>
-        </p:spPr>
-        <p:txBody>
-          <a:bodyPr wrap="square" lIns="0" tIns="0" rIns="0" bIns="0" rtlCol="0" anchor="t">
+            <a:off x="7799832" y="1801368"/>
+            <a:ext cx="3145536" cy="758952"/>
+          </a:xfrm>
+          <a:prstGeom prst="rect">
+            <a:avLst/>
+          </a:prstGeom>
+          <a:noFill/>
+          <a:ln/>
+        </p:spPr>
+        <p:txBody>
+          <a:bodyPr wrap="square" lIns="254" tIns="254" rIns="254" bIns="254" rtlCol="0" anchor="t">
             <a:normAutofit/>
           </a:bodyPr>
           <a:lstStyle/>
@@ -19161,7 +19486,7 @@
               <a:buNone/>
             </a:pPr>
             <a:r>
-              <a:rPr lang="en-US" sz="1550" dirty="0">
+              <a:rPr lang="en-US" sz="1320" dirty="0">
                 <a:solidFill>
                   <a:srgbClr val="17364A"/>
                 </a:solidFill>
@@ -19171,7 +19496,7 @@
               </a:rPr>
               <a:t>You do not need to become a machine learning engineer to participate in responsible AI planning, but.</a:t>
             </a:r>
-            <a:endParaRPr lang="en-US" sz="1550" dirty="0"/>
+            <a:endParaRPr lang="en-US" sz="1320" dirty="0"/>
           </a:p>
         </p:txBody>
       </p:sp>
@@ -19259,13 +19584,16 @@
           <a:ln/>
         </p:spPr>
         <p:txBody>
-          <a:bodyPr wrap="square" lIns="254" tIns="254" rIns="254" bIns="254" rtlCol="0" anchor="t">
+          <a:bodyPr wrap="square" lIns="508" tIns="508" rIns="508" bIns="508" rtlCol="0" anchor="t">
             <a:normAutofit/>
           </a:bodyPr>
           <a:lstStyle/>
           <a:p>
-            <a:r>
-              <a:rPr lang="en-US" sz="1380" dirty="0">
+            <a:pPr indent="0" marL="0">
+              <a:buNone/>
+            </a:pPr>
+            <a:r>
+              <a:rPr lang="en-US" sz="1220" dirty="0">
                 <a:solidFill>
                   <a:srgbClr val="17364A"/>
                 </a:solidFill>
@@ -19273,13 +19601,16 @@
                 <a:ea typeface="Aptos" pitchFamily="34" charset="-122"/>
                 <a:cs typeface="Aptos" pitchFamily="34" charset="-120"/>
               </a:rPr>
-              <a:t>You do not need to become a machine learning engineer to participate in responsible AI.</a:t>
-            </a:r>
-            <a:endParaRPr lang="en-US" sz="1380" dirty="0"/>
-          </a:p>
-          <a:p>
-            <a:r>
-              <a:rPr lang="en-US" sz="1380" dirty="0">
+              <a:t>You do not need to become a machine learning engineer to.</a:t>
+            </a:r>
+            <a:endParaRPr lang="en-US" sz="1220" dirty="0"/>
+          </a:p>
+          <a:p>
+            <a:pPr indent="0" marL="0">
+              <a:buNone/>
+            </a:pPr>
+            <a:r>
+              <a:rPr lang="en-US" sz="1220" dirty="0">
                 <a:solidFill>
                   <a:srgbClr val="17364A"/>
                 </a:solidFill>
@@ -19287,13 +19618,16 @@
                 <a:ea typeface="Aptos" pitchFamily="34" charset="-122"/>
                 <a:cs typeface="Aptos" pitchFamily="34" charset="-120"/>
               </a:rPr>
-              <a:t>This module helps you distinguish pattern recognition, predictive analytics, generative.</a:t>
-            </a:r>
-            <a:endParaRPr lang="en-US" sz="1380" dirty="0"/>
-          </a:p>
-          <a:p>
-            <a:r>
-              <a:rPr lang="en-US" sz="1380" dirty="0">
+              <a:t>This module helps you distinguish pattern recognition, predictive.</a:t>
+            </a:r>
+            <a:endParaRPr lang="en-US" sz="1220" dirty="0"/>
+          </a:p>
+          <a:p>
+            <a:pPr indent="0" marL="0">
+              <a:buNone/>
+            </a:pPr>
+            <a:r>
+              <a:rPr lang="en-US" sz="1220" dirty="0">
                 <a:solidFill>
                   <a:srgbClr val="17364A"/>
                 </a:solidFill>
@@ -19301,9 +19635,9 @@
                 <a:ea typeface="Aptos" pitchFamily="34" charset="-122"/>
                 <a:cs typeface="Aptos" pitchFamily="34" charset="-120"/>
               </a:rPr>
-              <a:t>That distinction matters because a tool that drafts a message, a tool that predicts risk,.</a:t>
-            </a:r>
-            <a:endParaRPr lang="en-US" sz="1380" dirty="0"/>
+              <a:t>That distinction matters because a tool that drafts a message, a.</a:t>
+            </a:r>
+            <a:endParaRPr lang="en-US" sz="1220" dirty="0"/>
           </a:p>
         </p:txBody>
       </p:sp>
@@ -19381,17 +19715,17 @@
         </p:nvSpPr>
         <p:spPr>
           <a:xfrm>
-            <a:off x="7799832" y="5001768"/>
-            <a:ext cx="3145536" cy="502920"/>
-          </a:xfrm>
-          <a:prstGeom prst="rect">
-            <a:avLst/>
-          </a:prstGeom>
-          <a:noFill/>
-          <a:ln/>
-        </p:spPr>
-        <p:txBody>
-          <a:bodyPr wrap="square" lIns="0" tIns="0" rIns="0" bIns="0" rtlCol="0" anchor="t">
+            <a:off x="7799832" y="4974336"/>
+            <a:ext cx="3145536" cy="576072"/>
+          </a:xfrm>
+          <a:prstGeom prst="rect">
+            <a:avLst/>
+          </a:prstGeom>
+          <a:noFill/>
+          <a:ln/>
+        </p:spPr>
+        <p:txBody>
+          <a:bodyPr wrap="square" lIns="254" tIns="254" rIns="254" bIns="254" rtlCol="0" anchor="t">
             <a:normAutofit/>
           </a:bodyPr>
           <a:lstStyle/>
@@ -19400,7 +19734,7 @@
               <a:buNone/>
             </a:pPr>
             <a:r>
-              <a:rPr lang="en-US" sz="1550" dirty="0">
+              <a:rPr lang="en-US" sz="1320" dirty="0">
                 <a:solidFill>
                   <a:srgbClr val="17364A"/>
                 </a:solidFill>
@@ -19408,9 +19742,9 @@
                 <a:ea typeface="Aptos" pitchFamily="34" charset="-122"/>
                 <a:cs typeface="Aptos" pitchFamily="34" charset="-120"/>
               </a:rPr>
-              <a:t>Connect the concept to public health purpose, responsible use, required safeguards, documentation, and the next action a department should take.</a:t>
-            </a:r>
-            <a:endParaRPr lang="en-US" sz="1550" dirty="0"/>
+              <a:t>Connect the concept to public health purpose, responsible use, required safeguards, documentation, and the next action a.</a:t>
+            </a:r>
+            <a:endParaRPr lang="en-US" sz="1320" dirty="0"/>
           </a:p>
         </p:txBody>
       </p:sp>
@@ -19711,49 +20045,58 @@
           <a:ln/>
         </p:spPr>
         <p:txBody>
-          <a:bodyPr wrap="square" lIns="635" tIns="635" rIns="635" bIns="635" rtlCol="0" anchor="t">
+          <a:bodyPr wrap="square" lIns="1016" tIns="1016" rIns="1016" bIns="1016" rtlCol="0" anchor="t">
             <a:normAutofit/>
           </a:bodyPr>
           <a:lstStyle/>
           <a:p>
+            <a:pPr indent="0" marL="0">
+              <a:buNone/>
+            </a:pPr>
             <a:r>
               <a:rPr lang="en-US" sz="2100" dirty="0">
                 <a:solidFill>
-                  <a:srgbClr val="17364A"/>
-                </a:solidFill>
-                <a:latin typeface="Aptos" pitchFamily="34" charset="0"/>
-                <a:ea typeface="Aptos" pitchFamily="34" charset="-122"/>
-                <a:cs typeface="Aptos" pitchFamily="34" charset="-120"/>
-              </a:rPr>
-              <a:t>Agentic AI: AI configured to pursue a goal through multiple steps, such as gathering information,.</a:t>
+                  <a:srgbClr val="003A63"/>
+                </a:solidFill>
+                <a:latin typeface="Aptos" pitchFamily="34" charset="0"/>
+                <a:ea typeface="Aptos" pitchFamily="34" charset="-122"/>
+                <a:cs typeface="Aptos" pitchFamily="34" charset="-120"/>
+              </a:rPr>
+              <a:t>• Agentic AI: AI configured to pursue a goal through multiple steps, such as gathering.</a:t>
             </a:r>
             <a:endParaRPr lang="en-US" sz="2100" dirty="0"/>
           </a:p>
           <a:p>
+            <a:pPr indent="0" marL="0">
+              <a:buNone/>
+            </a:pPr>
             <a:r>
               <a:rPr lang="en-US" sz="2100" dirty="0">
                 <a:solidFill>
-                  <a:srgbClr val="17364A"/>
-                </a:solidFill>
-                <a:latin typeface="Aptos" pitchFamily="34" charset="0"/>
-                <a:ea typeface="Aptos" pitchFamily="34" charset="-122"/>
-                <a:cs typeface="Aptos" pitchFamily="34" charset="-120"/>
-              </a:rPr>
-              <a:t>Artificial intelligence (AI): Computer-based methods that can recognize patterns, generate content,.</a:t>
+                  <a:srgbClr val="003A63"/>
+                </a:solidFill>
+                <a:latin typeface="Aptos" pitchFamily="34" charset="0"/>
+                <a:ea typeface="Aptos" pitchFamily="34" charset="-122"/>
+                <a:cs typeface="Aptos" pitchFamily="34" charset="-120"/>
+              </a:rPr>
+              <a:t>• Artificial intelligence (AI): Computer-based methods that can recognize patterns, generate.</a:t>
             </a:r>
             <a:endParaRPr lang="en-US" sz="2100" dirty="0"/>
           </a:p>
           <a:p>
+            <a:pPr indent="0" marL="0">
+              <a:buNone/>
+            </a:pPr>
             <a:r>
               <a:rPr lang="en-US" sz="2100" dirty="0">
                 <a:solidFill>
-                  <a:srgbClr val="17364A"/>
-                </a:solidFill>
-                <a:latin typeface="Aptos" pitchFamily="34" charset="0"/>
-                <a:ea typeface="Aptos" pitchFamily="34" charset="-122"/>
-                <a:cs typeface="Aptos" pitchFamily="34" charset="-120"/>
-              </a:rPr>
-              <a:t>Deep Research: An agentic research capability that can plan a multi-step search, gather and compare.</a:t>
+                  <a:srgbClr val="003A63"/>
+                </a:solidFill>
+                <a:latin typeface="Aptos" pitchFamily="34" charset="0"/>
+                <a:ea typeface="Aptos" pitchFamily="34" charset="-122"/>
+                <a:cs typeface="Aptos" pitchFamily="34" charset="-120"/>
+              </a:rPr>
+              <a:t>• Deep Research: An agentic research capability that can plan a multi-step search, gather and.</a:t>
             </a:r>
             <a:endParaRPr lang="en-US" sz="2100" dirty="0"/>
           </a:p>
@@ -19833,17 +20176,17 @@
         </p:nvSpPr>
         <p:spPr>
           <a:xfrm>
-            <a:off x="7799832" y="1828800"/>
-            <a:ext cx="3145536" cy="685800"/>
-          </a:xfrm>
-          <a:prstGeom prst="rect">
-            <a:avLst/>
-          </a:prstGeom>
-          <a:noFill/>
-          <a:ln/>
-        </p:spPr>
-        <p:txBody>
-          <a:bodyPr wrap="square" lIns="0" tIns="0" rIns="0" bIns="0" rtlCol="0" anchor="t">
+            <a:off x="7799832" y="1801368"/>
+            <a:ext cx="3145536" cy="758952"/>
+          </a:xfrm>
+          <a:prstGeom prst="rect">
+            <a:avLst/>
+          </a:prstGeom>
+          <a:noFill/>
+          <a:ln/>
+        </p:spPr>
+        <p:txBody>
+          <a:bodyPr wrap="square" lIns="254" tIns="254" rIns="254" bIns="254" rtlCol="0" anchor="t">
             <a:normAutofit/>
           </a:bodyPr>
           <a:lstStyle/>
@@ -19852,7 +20195,7 @@
               <a:buNone/>
             </a:pPr>
             <a:r>
-              <a:rPr lang="en-US" sz="1550" dirty="0">
+              <a:rPr lang="en-US" sz="1320" dirty="0">
                 <a:solidFill>
                   <a:srgbClr val="17364A"/>
                 </a:solidFill>
@@ -19862,7 +20205,7 @@
               </a:rPr>
               <a:t>Agentic AI: AI configured to pursue a goal through multiple steps, such as gathering information,.</a:t>
             </a:r>
-            <a:endParaRPr lang="en-US" sz="1550" dirty="0"/>
+            <a:endParaRPr lang="en-US" sz="1320" dirty="0"/>
           </a:p>
         </p:txBody>
       </p:sp>
@@ -19950,13 +20293,16 @@
           <a:ln/>
         </p:spPr>
         <p:txBody>
-          <a:bodyPr wrap="square" lIns="254" tIns="254" rIns="254" bIns="254" rtlCol="0" anchor="t">
+          <a:bodyPr wrap="square" lIns="508" tIns="508" rIns="508" bIns="508" rtlCol="0" anchor="t">
             <a:normAutofit/>
           </a:bodyPr>
           <a:lstStyle/>
           <a:p>
-            <a:r>
-              <a:rPr lang="en-US" sz="1380" dirty="0">
+            <a:pPr indent="0" marL="0">
+              <a:buNone/>
+            </a:pPr>
+            <a:r>
+              <a:rPr lang="en-US" sz="1220" dirty="0">
                 <a:solidFill>
                   <a:srgbClr val="17364A"/>
                 </a:solidFill>
@@ -19964,13 +20310,16 @@
                 <a:ea typeface="Aptos" pitchFamily="34" charset="-122"/>
                 <a:cs typeface="Aptos" pitchFamily="34" charset="-120"/>
               </a:rPr>
-              <a:t>Agentic AI: AI configured to pursue a goal through multiple steps, such as gathering.</a:t>
-            </a:r>
-            <a:endParaRPr lang="en-US" sz="1380" dirty="0"/>
-          </a:p>
-          <a:p>
-            <a:r>
-              <a:rPr lang="en-US" sz="1380" dirty="0">
+              <a:t>Agentic AI: AI configured to pursue a goal through multiple steps,.</a:t>
+            </a:r>
+            <a:endParaRPr lang="en-US" sz="1220" dirty="0"/>
+          </a:p>
+          <a:p>
+            <a:pPr indent="0" marL="0">
+              <a:buNone/>
+            </a:pPr>
+            <a:r>
+              <a:rPr lang="en-US" sz="1220" dirty="0">
                 <a:solidFill>
                   <a:srgbClr val="17364A"/>
                 </a:solidFill>
@@ -19978,13 +20327,16 @@
                 <a:ea typeface="Aptos" pitchFamily="34" charset="-122"/>
                 <a:cs typeface="Aptos" pitchFamily="34" charset="-120"/>
               </a:rPr>
-              <a:t>Agentic AI requires clear boundaries, permissions, monitoring, audit logs, and human.</a:t>
-            </a:r>
-            <a:endParaRPr lang="en-US" sz="1380" dirty="0"/>
-          </a:p>
-          <a:p>
-            <a:r>
-              <a:rPr lang="en-US" sz="1380" dirty="0">
+              <a:t>Agentic AI requires clear boundaries, permissions, monitoring,.</a:t>
+            </a:r>
+            <a:endParaRPr lang="en-US" sz="1220" dirty="0"/>
+          </a:p>
+          <a:p>
+            <a:pPr indent="0" marL="0">
+              <a:buNone/>
+            </a:pPr>
+            <a:r>
+              <a:rPr lang="en-US" sz="1220" dirty="0">
                 <a:solidFill>
                   <a:srgbClr val="17364A"/>
                 </a:solidFill>
@@ -19992,9 +20344,9 @@
                 <a:ea typeface="Aptos" pitchFamily="34" charset="-122"/>
                 <a:cs typeface="Aptos" pitchFamily="34" charset="-120"/>
               </a:rPr>
-              <a:t>Artificial intelligence (AI): Computer-based methods that can recognize patterns, generate.</a:t>
-            </a:r>
-            <a:endParaRPr lang="en-US" sz="1380" dirty="0"/>
+              <a:t>Artificial intelligence (AI): Computer-based methods that can.</a:t>
+            </a:r>
+            <a:endParaRPr lang="en-US" sz="1220" dirty="0"/>
           </a:p>
         </p:txBody>
       </p:sp>
@@ -20072,17 +20424,17 @@
         </p:nvSpPr>
         <p:spPr>
           <a:xfrm>
-            <a:off x="7799832" y="5001768"/>
-            <a:ext cx="3145536" cy="502920"/>
-          </a:xfrm>
-          <a:prstGeom prst="rect">
-            <a:avLst/>
-          </a:prstGeom>
-          <a:noFill/>
-          <a:ln/>
-        </p:spPr>
-        <p:txBody>
-          <a:bodyPr wrap="square" lIns="0" tIns="0" rIns="0" bIns="0" rtlCol="0" anchor="t">
+            <a:off x="7799832" y="4974336"/>
+            <a:ext cx="3145536" cy="576072"/>
+          </a:xfrm>
+          <a:prstGeom prst="rect">
+            <a:avLst/>
+          </a:prstGeom>
+          <a:noFill/>
+          <a:ln/>
+        </p:spPr>
+        <p:txBody>
+          <a:bodyPr wrap="square" lIns="254" tIns="254" rIns="254" bIns="254" rtlCol="0" anchor="t">
             <a:normAutofit/>
           </a:bodyPr>
           <a:lstStyle/>
@@ -20091,7 +20443,7 @@
               <a:buNone/>
             </a:pPr>
             <a:r>
-              <a:rPr lang="en-US" sz="1550" dirty="0">
+              <a:rPr lang="en-US" sz="1320" dirty="0">
                 <a:solidFill>
                   <a:srgbClr val="17364A"/>
                 </a:solidFill>
@@ -20099,9 +20451,9 @@
                 <a:ea typeface="Aptos" pitchFamily="34" charset="-122"/>
                 <a:cs typeface="Aptos" pitchFamily="34" charset="-120"/>
               </a:rPr>
-              <a:t>Connect the concept to public health purpose, responsible use, required safeguards, documentation, and the next action a department should take.</a:t>
-            </a:r>
-            <a:endParaRPr lang="en-US" sz="1550" dirty="0"/>
+              <a:t>Connect the concept to public health purpose, responsible use, required safeguards, documentation, and the next action a.</a:t>
+            </a:r>
+            <a:endParaRPr lang="en-US" sz="1320" dirty="0"/>
           </a:p>
         </p:txBody>
       </p:sp>
@@ -20402,49 +20754,58 @@
           <a:ln/>
         </p:spPr>
         <p:txBody>
-          <a:bodyPr wrap="square" lIns="635" tIns="635" rIns="635" bIns="635" rtlCol="0" anchor="t">
+          <a:bodyPr wrap="square" lIns="1016" tIns="1016" rIns="1016" bIns="1016" rtlCol="0" anchor="t">
             <a:normAutofit/>
           </a:bodyPr>
           <a:lstStyle/>
           <a:p>
+            <a:pPr indent="0" marL="0">
+              <a:buNone/>
+            </a:pPr>
             <a:r>
               <a:rPr lang="en-US" sz="2100" dirty="0">
                 <a:solidFill>
-                  <a:srgbClr val="17364A"/>
-                </a:solidFill>
-                <a:latin typeface="Aptos" pitchFamily="34" charset="0"/>
-                <a:ea typeface="Aptos" pitchFamily="34" charset="-122"/>
-                <a:cs typeface="Aptos" pitchFamily="34" charset="-120"/>
-              </a:rPr>
-              <a:t>Large language model (LLM): A generative AI model trained on large bodies of text to produce,.</a:t>
+                  <a:srgbClr val="003A63"/>
+                </a:solidFill>
+                <a:latin typeface="Aptos" pitchFamily="34" charset="0"/>
+                <a:ea typeface="Aptos" pitchFamily="34" charset="-122"/>
+                <a:cs typeface="Aptos" pitchFamily="34" charset="-120"/>
+              </a:rPr>
+              <a:t>• Large language model (LLM): A generative AI model trained on large bodies of text to produce,.</a:t>
             </a:r>
             <a:endParaRPr lang="en-US" sz="2100" dirty="0"/>
           </a:p>
           <a:p>
+            <a:pPr indent="0" marL="0">
+              <a:buNone/>
+            </a:pPr>
             <a:r>
               <a:rPr lang="en-US" sz="2100" dirty="0">
                 <a:solidFill>
-                  <a:srgbClr val="17364A"/>
-                </a:solidFill>
-                <a:latin typeface="Aptos" pitchFamily="34" charset="0"/>
-                <a:ea typeface="Aptos" pitchFamily="34" charset="-122"/>
-                <a:cs typeface="Aptos" pitchFamily="34" charset="-120"/>
-              </a:rPr>
-              <a:t>Machine learning: A type of AI that identifies patterns in data and uses those patterns to classify,.</a:t>
+                  <a:srgbClr val="003A63"/>
+                </a:solidFill>
+                <a:latin typeface="Aptos" pitchFamily="34" charset="0"/>
+                <a:ea typeface="Aptos" pitchFamily="34" charset="-122"/>
+                <a:cs typeface="Aptos" pitchFamily="34" charset="-120"/>
+              </a:rPr>
+              <a:t>• Machine learning: A type of AI that identifies patterns in data and uses those patterns to.</a:t>
             </a:r>
             <a:endParaRPr lang="en-US" sz="2100" dirty="0"/>
           </a:p>
           <a:p>
+            <a:pPr indent="0" marL="0">
+              <a:buNone/>
+            </a:pPr>
             <a:r>
               <a:rPr lang="en-US" sz="2100" dirty="0">
                 <a:solidFill>
-                  <a:srgbClr val="17364A"/>
-                </a:solidFill>
-                <a:latin typeface="Aptos" pitchFamily="34" charset="0"/>
-                <a:ea typeface="Aptos" pitchFamily="34" charset="-122"/>
-                <a:cs typeface="Aptos" pitchFamily="34" charset="-120"/>
-              </a:rPr>
-              <a:t>Predictive AI: AI that uses data patterns to estimate future events, risks, needs, trends, or outcomes..</a:t>
+                  <a:srgbClr val="003A63"/>
+                </a:solidFill>
+                <a:latin typeface="Aptos" pitchFamily="34" charset="0"/>
+                <a:ea typeface="Aptos" pitchFamily="34" charset="-122"/>
+                <a:cs typeface="Aptos" pitchFamily="34" charset="-120"/>
+              </a:rPr>
+              <a:t>• Predictive AI: AI that uses data patterns to estimate future events, risks, needs, trends, or.</a:t>
             </a:r>
             <a:endParaRPr lang="en-US" sz="2100" dirty="0"/>
           </a:p>
@@ -20524,17 +20885,17 @@
         </p:nvSpPr>
         <p:spPr>
           <a:xfrm>
-            <a:off x="7799832" y="1828800"/>
-            <a:ext cx="3145536" cy="685800"/>
-          </a:xfrm>
-          <a:prstGeom prst="rect">
-            <a:avLst/>
-          </a:prstGeom>
-          <a:noFill/>
-          <a:ln/>
-        </p:spPr>
-        <p:txBody>
-          <a:bodyPr wrap="square" lIns="0" tIns="0" rIns="0" bIns="0" rtlCol="0" anchor="t">
+            <a:off x="7799832" y="1801368"/>
+            <a:ext cx="3145536" cy="758952"/>
+          </a:xfrm>
+          <a:prstGeom prst="rect">
+            <a:avLst/>
+          </a:prstGeom>
+          <a:noFill/>
+          <a:ln/>
+        </p:spPr>
+        <p:txBody>
+          <a:bodyPr wrap="square" lIns="254" tIns="254" rIns="254" bIns="254" rtlCol="0" anchor="t">
             <a:normAutofit/>
           </a:bodyPr>
           <a:lstStyle/>
@@ -20543,7 +20904,7 @@
               <a:buNone/>
             </a:pPr>
             <a:r>
-              <a:rPr lang="en-US" sz="1550" dirty="0">
+              <a:rPr lang="en-US" sz="1320" dirty="0">
                 <a:solidFill>
                   <a:srgbClr val="17364A"/>
                 </a:solidFill>
@@ -20553,7 +20914,7 @@
               </a:rPr>
               <a:t>Large language model (LLM): A generative AI model trained on large bodies of text to produce,.</a:t>
             </a:r>
-            <a:endParaRPr lang="en-US" sz="1550" dirty="0"/>
+            <a:endParaRPr lang="en-US" sz="1320" dirty="0"/>
           </a:p>
         </p:txBody>
       </p:sp>
@@ -20641,13 +21002,16 @@
           <a:ln/>
         </p:spPr>
         <p:txBody>
-          <a:bodyPr wrap="square" lIns="254" tIns="254" rIns="254" bIns="254" rtlCol="0" anchor="t">
+          <a:bodyPr wrap="square" lIns="508" tIns="508" rIns="508" bIns="508" rtlCol="0" anchor="t">
             <a:normAutofit/>
           </a:bodyPr>
           <a:lstStyle/>
           <a:p>
-            <a:r>
-              <a:rPr lang="en-US" sz="1380" dirty="0">
+            <a:pPr indent="0" marL="0">
+              <a:buNone/>
+            </a:pPr>
+            <a:r>
+              <a:rPr lang="en-US" sz="1220" dirty="0">
                 <a:solidFill>
                   <a:srgbClr val="17364A"/>
                 </a:solidFill>
@@ -20655,13 +21019,16 @@
                 <a:ea typeface="Aptos" pitchFamily="34" charset="-122"/>
                 <a:cs typeface="Aptos" pitchFamily="34" charset="-120"/>
               </a:rPr>
-              <a:t>Large language model (LLM): A generative AI model trained on large bodies of text to.</a:t>
-            </a:r>
-            <a:endParaRPr lang="en-US" sz="1380" dirty="0"/>
-          </a:p>
-          <a:p>
-            <a:r>
-              <a:rPr lang="en-US" sz="1380" dirty="0">
+              <a:t>Large language model (LLM): A generative AI model trained on large.</a:t>
+            </a:r>
+            <a:endParaRPr lang="en-US" sz="1220" dirty="0"/>
+          </a:p>
+          <a:p>
+            <a:pPr indent="0" marL="0">
+              <a:buNone/>
+            </a:pPr>
+            <a:r>
+              <a:rPr lang="en-US" sz="1220" dirty="0">
                 <a:solidFill>
                   <a:srgbClr val="17364A"/>
                 </a:solidFill>
@@ -20669,13 +21036,16 @@
                 <a:ea typeface="Aptos" pitchFamily="34" charset="-122"/>
                 <a:cs typeface="Aptos" pitchFamily="34" charset="-120"/>
               </a:rPr>
-              <a:t>LLM outputs should be reviewed by qualified humans before use in consequential public.</a:t>
-            </a:r>
-            <a:endParaRPr lang="en-US" sz="1380" dirty="0"/>
-          </a:p>
-          <a:p>
-            <a:r>
-              <a:rPr lang="en-US" sz="1380" dirty="0">
+              <a:t>LLM outputs should be reviewed by qualified humans before use in.</a:t>
+            </a:r>
+            <a:endParaRPr lang="en-US" sz="1220" dirty="0"/>
+          </a:p>
+          <a:p>
+            <a:pPr indent="0" marL="0">
+              <a:buNone/>
+            </a:pPr>
+            <a:r>
+              <a:rPr lang="en-US" sz="1220" dirty="0">
                 <a:solidFill>
                   <a:srgbClr val="17364A"/>
                 </a:solidFill>
@@ -20683,9 +21053,9 @@
                 <a:ea typeface="Aptos" pitchFamily="34" charset="-122"/>
                 <a:cs typeface="Aptos" pitchFamily="34" charset="-120"/>
               </a:rPr>
-              <a:t>Machine learning: A type of AI that identifies patterns in data and uses those patterns to.</a:t>
-            </a:r>
-            <a:endParaRPr lang="en-US" sz="1380" dirty="0"/>
+              <a:t>Machine learning: A type of AI that identifies patterns in data.</a:t>
+            </a:r>
+            <a:endParaRPr lang="en-US" sz="1220" dirty="0"/>
           </a:p>
         </p:txBody>
       </p:sp>
@@ -20763,17 +21133,17 @@
         </p:nvSpPr>
         <p:spPr>
           <a:xfrm>
-            <a:off x="7799832" y="5001768"/>
-            <a:ext cx="3145536" cy="502920"/>
-          </a:xfrm>
-          <a:prstGeom prst="rect">
-            <a:avLst/>
-          </a:prstGeom>
-          <a:noFill/>
-          <a:ln/>
-        </p:spPr>
-        <p:txBody>
-          <a:bodyPr wrap="square" lIns="0" tIns="0" rIns="0" bIns="0" rtlCol="0" anchor="t">
+            <a:off x="7799832" y="4974336"/>
+            <a:ext cx="3145536" cy="576072"/>
+          </a:xfrm>
+          <a:prstGeom prst="rect">
+            <a:avLst/>
+          </a:prstGeom>
+          <a:noFill/>
+          <a:ln/>
+        </p:spPr>
+        <p:txBody>
+          <a:bodyPr wrap="square" lIns="254" tIns="254" rIns="254" bIns="254" rtlCol="0" anchor="t">
             <a:normAutofit/>
           </a:bodyPr>
           <a:lstStyle/>
@@ -20782,7 +21152,7 @@
               <a:buNone/>
             </a:pPr>
             <a:r>
-              <a:rPr lang="en-US" sz="1550" dirty="0">
+              <a:rPr lang="en-US" sz="1320" dirty="0">
                 <a:solidFill>
                   <a:srgbClr val="17364A"/>
                 </a:solidFill>
@@ -20790,9 +21160,9 @@
                 <a:ea typeface="Aptos" pitchFamily="34" charset="-122"/>
                 <a:cs typeface="Aptos" pitchFamily="34" charset="-120"/>
               </a:rPr>
-              <a:t>Connect the concept to public health purpose, responsible use, required safeguards, documentation, and the next action a department should take.</a:t>
-            </a:r>
-            <a:endParaRPr lang="en-US" sz="1550" dirty="0"/>
+              <a:t>Connect the concept to public health purpose, responsible use, required safeguards, documentation, and the next action a.</a:t>
+            </a:r>
+            <a:endParaRPr lang="en-US" sz="1320" dirty="0"/>
           </a:p>
         </p:txBody>
       </p:sp>

--- a/downloads/presentations/modules/int-100.pptx
+++ b/downloads/presentations/modules/int-100.pptx
@@ -3858,11 +3858,11 @@
         <p:spPr>
           <a:xfrm>
             <a:off x="7635240" y="1325880"/>
-            <a:ext cx="3474720" cy="1325880"/>
+            <a:ext cx="3474720" cy="1255471"/>
           </a:xfrm>
           <a:prstGeom prst="roundRect">
             <a:avLst>
-              <a:gd name="adj" fmla="val 8276"/>
+              <a:gd name="adj" fmla="val 8740"/>
             </a:avLst>
           </a:prstGeom>
           <a:solidFill>
@@ -3924,7 +3924,7 @@
         <p:spPr>
           <a:xfrm>
             <a:off x="7799832" y="1801368"/>
-            <a:ext cx="3145536" cy="758952"/>
+            <a:ext cx="3145536" cy="688543"/>
           </a:xfrm>
           <a:prstGeom prst="rect">
             <a:avLst/>
@@ -3964,12 +3964,12 @@
         </p:nvSpPr>
         <p:spPr>
           <a:xfrm>
-            <a:off x="7635240" y="2788920"/>
-            <a:ext cx="3474720" cy="1536192"/>
+            <a:off x="7635240" y="2718511"/>
+            <a:ext cx="3474720" cy="1328623"/>
           </a:xfrm>
           <a:prstGeom prst="roundRect">
             <a:avLst>
-              <a:gd name="adj" fmla="val 7143"/>
+              <a:gd name="adj" fmla="val 8259"/>
             </a:avLst>
           </a:prstGeom>
           <a:solidFill>
@@ -3991,7 +3991,7 @@
         </p:nvSpPr>
         <p:spPr>
           <a:xfrm>
-            <a:off x="7799832" y="2935224"/>
+            <a:off x="7799832" y="2864815"/>
             <a:ext cx="3145536" cy="256032"/>
           </a:xfrm>
           <a:prstGeom prst="rect">
@@ -4030,8 +4030,8 @@
         </p:nvSpPr>
         <p:spPr>
           <a:xfrm>
-            <a:off x="7818120" y="3300984"/>
-            <a:ext cx="3090672" cy="877824"/>
+            <a:off x="7818120" y="3230575"/>
+            <a:ext cx="3090672" cy="670255"/>
           </a:xfrm>
           <a:prstGeom prst="rect">
             <a:avLst/>
@@ -4088,12 +4088,12 @@
         </p:nvSpPr>
         <p:spPr>
           <a:xfrm>
-            <a:off x="7635240" y="4498848"/>
-            <a:ext cx="3474720" cy="1143000"/>
+            <a:off x="7635240" y="4184294"/>
+            <a:ext cx="3474720" cy="1466698"/>
           </a:xfrm>
           <a:prstGeom prst="roundRect">
             <a:avLst>
-              <a:gd name="adj" fmla="val 9600"/>
+              <a:gd name="adj" fmla="val 7481"/>
             </a:avLst>
           </a:prstGeom>
           <a:solidFill>
@@ -4115,7 +4115,7 @@
         </p:nvSpPr>
         <p:spPr>
           <a:xfrm>
-            <a:off x="7799832" y="4645152"/>
+            <a:off x="7799832" y="4330598"/>
             <a:ext cx="3145536" cy="256032"/>
           </a:xfrm>
           <a:prstGeom prst="rect">
@@ -4154,8 +4154,8 @@
         </p:nvSpPr>
         <p:spPr>
           <a:xfrm>
-            <a:off x="7799832" y="4974336"/>
-            <a:ext cx="3145536" cy="576072"/>
+            <a:off x="7799832" y="4659782"/>
+            <a:ext cx="3145536" cy="899770"/>
           </a:xfrm>
           <a:prstGeom prst="rect">
             <a:avLst/>
@@ -4181,7 +4181,7 @@
                 <a:ea typeface="Aptos" pitchFamily="34" charset="-122"/>
                 <a:cs typeface="Aptos" pitchFamily="34" charset="-120"/>
               </a:rPr>
-              <a:t>Connect the concept to public health purpose, responsible use, required safeguards, documentation, and the next action a.</a:t>
+              <a:t>Connect the concept to public health purpose, responsible use, required safeguards, documentation, and the next action a department should take.</a:t>
             </a:r>
             <a:endParaRPr lang="en-US" sz="1320" dirty="0"/>
           </a:p>
@@ -4550,11 +4550,11 @@
         <p:spPr>
           <a:xfrm>
             <a:off x="7635240" y="1325880"/>
-            <a:ext cx="3474720" cy="1325880"/>
+            <a:ext cx="3474720" cy="1255471"/>
           </a:xfrm>
           <a:prstGeom prst="roundRect">
             <a:avLst>
-              <a:gd name="adj" fmla="val 8276"/>
+              <a:gd name="adj" fmla="val 8740"/>
             </a:avLst>
           </a:prstGeom>
           <a:solidFill>
@@ -4616,7 +4616,7 @@
         <p:spPr>
           <a:xfrm>
             <a:off x="7799832" y="1801368"/>
-            <a:ext cx="3145536" cy="758952"/>
+            <a:ext cx="3145536" cy="688543"/>
           </a:xfrm>
           <a:prstGeom prst="rect">
             <a:avLst/>
@@ -4656,12 +4656,12 @@
         </p:nvSpPr>
         <p:spPr>
           <a:xfrm>
-            <a:off x="7635240" y="2788920"/>
-            <a:ext cx="3474720" cy="1536192"/>
+            <a:off x="7635240" y="2718511"/>
+            <a:ext cx="3474720" cy="1328623"/>
           </a:xfrm>
           <a:prstGeom prst="roundRect">
             <a:avLst>
-              <a:gd name="adj" fmla="val 7143"/>
+              <a:gd name="adj" fmla="val 8259"/>
             </a:avLst>
           </a:prstGeom>
           <a:solidFill>
@@ -4683,7 +4683,7 @@
         </p:nvSpPr>
         <p:spPr>
           <a:xfrm>
-            <a:off x="7799832" y="2935224"/>
+            <a:off x="7799832" y="2864815"/>
             <a:ext cx="3145536" cy="256032"/>
           </a:xfrm>
           <a:prstGeom prst="rect">
@@ -4722,8 +4722,8 @@
         </p:nvSpPr>
         <p:spPr>
           <a:xfrm>
-            <a:off x="7818120" y="3300984"/>
-            <a:ext cx="3090672" cy="877824"/>
+            <a:off x="7818120" y="3230575"/>
+            <a:ext cx="3090672" cy="670255"/>
           </a:xfrm>
           <a:prstGeom prst="rect">
             <a:avLst/>
@@ -4797,12 +4797,12 @@
         </p:nvSpPr>
         <p:spPr>
           <a:xfrm>
-            <a:off x="7635240" y="4498848"/>
-            <a:ext cx="3474720" cy="1143000"/>
+            <a:off x="7635240" y="4184294"/>
+            <a:ext cx="3474720" cy="1466698"/>
           </a:xfrm>
           <a:prstGeom prst="roundRect">
             <a:avLst>
-              <a:gd name="adj" fmla="val 9600"/>
+              <a:gd name="adj" fmla="val 7481"/>
             </a:avLst>
           </a:prstGeom>
           <a:solidFill>
@@ -4824,7 +4824,7 @@
         </p:nvSpPr>
         <p:spPr>
           <a:xfrm>
-            <a:off x="7799832" y="4645152"/>
+            <a:off x="7799832" y="4330598"/>
             <a:ext cx="3145536" cy="256032"/>
           </a:xfrm>
           <a:prstGeom prst="rect">
@@ -4863,8 +4863,8 @@
         </p:nvSpPr>
         <p:spPr>
           <a:xfrm>
-            <a:off x="7799832" y="4974336"/>
-            <a:ext cx="3145536" cy="576072"/>
+            <a:off x="7799832" y="4659782"/>
+            <a:ext cx="3145536" cy="899770"/>
           </a:xfrm>
           <a:prstGeom prst="rect">
             <a:avLst/>
@@ -4890,7 +4890,7 @@
                 <a:ea typeface="Aptos" pitchFamily="34" charset="-122"/>
                 <a:cs typeface="Aptos" pitchFamily="34" charset="-120"/>
               </a:rPr>
-              <a:t>Connect the concept to public health purpose, responsible use, required safeguards, documentation, and the next action a.</a:t>
+              <a:t>Connect the concept to public health purpose, responsible use, required safeguards, documentation, and the next action a department should take.</a:t>
             </a:r>
             <a:endParaRPr lang="en-US" sz="1320" dirty="0"/>
           </a:p>
@@ -5259,11 +5259,11 @@
         <p:spPr>
           <a:xfrm>
             <a:off x="7635240" y="1325880"/>
-            <a:ext cx="3474720" cy="1325880"/>
+            <a:ext cx="3474720" cy="1255471"/>
           </a:xfrm>
           <a:prstGeom prst="roundRect">
             <a:avLst>
-              <a:gd name="adj" fmla="val 8276"/>
+              <a:gd name="adj" fmla="val 8740"/>
             </a:avLst>
           </a:prstGeom>
           <a:solidFill>
@@ -5325,7 +5325,7 @@
         <p:spPr>
           <a:xfrm>
             <a:off x="7799832" y="1801368"/>
-            <a:ext cx="3145536" cy="758952"/>
+            <a:ext cx="3145536" cy="688543"/>
           </a:xfrm>
           <a:prstGeom prst="rect">
             <a:avLst/>
@@ -5365,12 +5365,12 @@
         </p:nvSpPr>
         <p:spPr>
           <a:xfrm>
-            <a:off x="7635240" y="2788920"/>
-            <a:ext cx="3474720" cy="1536192"/>
+            <a:off x="7635240" y="2718511"/>
+            <a:ext cx="3474720" cy="1328623"/>
           </a:xfrm>
           <a:prstGeom prst="roundRect">
             <a:avLst>
-              <a:gd name="adj" fmla="val 7143"/>
+              <a:gd name="adj" fmla="val 8259"/>
             </a:avLst>
           </a:prstGeom>
           <a:solidFill>
@@ -5392,7 +5392,7 @@
         </p:nvSpPr>
         <p:spPr>
           <a:xfrm>
-            <a:off x="7799832" y="2935224"/>
+            <a:off x="7799832" y="2864815"/>
             <a:ext cx="3145536" cy="256032"/>
           </a:xfrm>
           <a:prstGeom prst="rect">
@@ -5431,8 +5431,8 @@
         </p:nvSpPr>
         <p:spPr>
           <a:xfrm>
-            <a:off x="7818120" y="3300984"/>
-            <a:ext cx="3090672" cy="877824"/>
+            <a:off x="7818120" y="3230575"/>
+            <a:ext cx="3090672" cy="670255"/>
           </a:xfrm>
           <a:prstGeom prst="rect">
             <a:avLst/>
@@ -5506,12 +5506,12 @@
         </p:nvSpPr>
         <p:spPr>
           <a:xfrm>
-            <a:off x="7635240" y="4498848"/>
-            <a:ext cx="3474720" cy="1143000"/>
+            <a:off x="7635240" y="4184294"/>
+            <a:ext cx="3474720" cy="1466698"/>
           </a:xfrm>
           <a:prstGeom prst="roundRect">
             <a:avLst>
-              <a:gd name="adj" fmla="val 9600"/>
+              <a:gd name="adj" fmla="val 7481"/>
             </a:avLst>
           </a:prstGeom>
           <a:solidFill>
@@ -5533,7 +5533,7 @@
         </p:nvSpPr>
         <p:spPr>
           <a:xfrm>
-            <a:off x="7799832" y="4645152"/>
+            <a:off x="7799832" y="4330598"/>
             <a:ext cx="3145536" cy="256032"/>
           </a:xfrm>
           <a:prstGeom prst="rect">
@@ -5572,8 +5572,8 @@
         </p:nvSpPr>
         <p:spPr>
           <a:xfrm>
-            <a:off x="7799832" y="4974336"/>
-            <a:ext cx="3145536" cy="576072"/>
+            <a:off x="7799832" y="4659782"/>
+            <a:ext cx="3145536" cy="899770"/>
           </a:xfrm>
           <a:prstGeom prst="rect">
             <a:avLst/>
@@ -5599,7 +5599,7 @@
                 <a:ea typeface="Aptos" pitchFamily="34" charset="-122"/>
                 <a:cs typeface="Aptos" pitchFamily="34" charset="-120"/>
               </a:rPr>
-              <a:t>Connect the concept to public health purpose, responsible use, required safeguards, documentation, and the next action a.</a:t>
+              <a:t>Connect the concept to public health purpose, responsible use, required safeguards, documentation, and the next action a department should take.</a:t>
             </a:r>
             <a:endParaRPr lang="en-US" sz="1320" dirty="0"/>
           </a:p>
@@ -5968,11 +5968,11 @@
         <p:spPr>
           <a:xfrm>
             <a:off x="7635240" y="1325880"/>
-            <a:ext cx="3474720" cy="1325880"/>
+            <a:ext cx="3474720" cy="1255471"/>
           </a:xfrm>
           <a:prstGeom prst="roundRect">
             <a:avLst>
-              <a:gd name="adj" fmla="val 8276"/>
+              <a:gd name="adj" fmla="val 8740"/>
             </a:avLst>
           </a:prstGeom>
           <a:solidFill>
@@ -6034,7 +6034,7 @@
         <p:spPr>
           <a:xfrm>
             <a:off x="7799832" y="1801368"/>
-            <a:ext cx="3145536" cy="758952"/>
+            <a:ext cx="3145536" cy="688543"/>
           </a:xfrm>
           <a:prstGeom prst="rect">
             <a:avLst/>
@@ -6074,12 +6074,12 @@
         </p:nvSpPr>
         <p:spPr>
           <a:xfrm>
-            <a:off x="7635240" y="2788920"/>
-            <a:ext cx="3474720" cy="1536192"/>
+            <a:off x="7635240" y="2718511"/>
+            <a:ext cx="3474720" cy="1328623"/>
           </a:xfrm>
           <a:prstGeom prst="roundRect">
             <a:avLst>
-              <a:gd name="adj" fmla="val 7143"/>
+              <a:gd name="adj" fmla="val 8259"/>
             </a:avLst>
           </a:prstGeom>
           <a:solidFill>
@@ -6101,7 +6101,7 @@
         </p:nvSpPr>
         <p:spPr>
           <a:xfrm>
-            <a:off x="7799832" y="2935224"/>
+            <a:off x="7799832" y="2864815"/>
             <a:ext cx="3145536" cy="256032"/>
           </a:xfrm>
           <a:prstGeom prst="rect">
@@ -6140,8 +6140,8 @@
         </p:nvSpPr>
         <p:spPr>
           <a:xfrm>
-            <a:off x="7818120" y="3300984"/>
-            <a:ext cx="3090672" cy="877824"/>
+            <a:off x="7818120" y="3230575"/>
+            <a:ext cx="3090672" cy="670255"/>
           </a:xfrm>
           <a:prstGeom prst="rect">
             <a:avLst/>
@@ -6215,12 +6215,12 @@
         </p:nvSpPr>
         <p:spPr>
           <a:xfrm>
-            <a:off x="7635240" y="4498848"/>
-            <a:ext cx="3474720" cy="1143000"/>
+            <a:off x="7635240" y="4184294"/>
+            <a:ext cx="3474720" cy="1466698"/>
           </a:xfrm>
           <a:prstGeom prst="roundRect">
             <a:avLst>
-              <a:gd name="adj" fmla="val 9600"/>
+              <a:gd name="adj" fmla="val 7481"/>
             </a:avLst>
           </a:prstGeom>
           <a:solidFill>
@@ -6242,7 +6242,7 @@
         </p:nvSpPr>
         <p:spPr>
           <a:xfrm>
-            <a:off x="7799832" y="4645152"/>
+            <a:off x="7799832" y="4330598"/>
             <a:ext cx="3145536" cy="256032"/>
           </a:xfrm>
           <a:prstGeom prst="rect">
@@ -6281,8 +6281,8 @@
         </p:nvSpPr>
         <p:spPr>
           <a:xfrm>
-            <a:off x="7799832" y="4974336"/>
-            <a:ext cx="3145536" cy="576072"/>
+            <a:off x="7799832" y="4659782"/>
+            <a:ext cx="3145536" cy="899770"/>
           </a:xfrm>
           <a:prstGeom prst="rect">
             <a:avLst/>
@@ -6308,7 +6308,7 @@
                 <a:ea typeface="Aptos" pitchFamily="34" charset="-122"/>
                 <a:cs typeface="Aptos" pitchFamily="34" charset="-120"/>
               </a:rPr>
-              <a:t>Connect the concept to public health purpose, responsible use, required safeguards, documentation, and the next action a.</a:t>
+              <a:t>Connect the concept to public health purpose, responsible use, required safeguards, documentation, and the next action a department should take.</a:t>
             </a:r>
             <a:endParaRPr lang="en-US" sz="1320" dirty="0"/>
           </a:p>
@@ -6677,11 +6677,11 @@
         <p:spPr>
           <a:xfrm>
             <a:off x="7635240" y="1325880"/>
-            <a:ext cx="3474720" cy="1325880"/>
+            <a:ext cx="3474720" cy="1207008"/>
           </a:xfrm>
           <a:prstGeom prst="roundRect">
             <a:avLst>
-              <a:gd name="adj" fmla="val 8276"/>
+              <a:gd name="adj" fmla="val 9091"/>
             </a:avLst>
           </a:prstGeom>
           <a:solidFill>
@@ -6743,7 +6743,7 @@
         <p:spPr>
           <a:xfrm>
             <a:off x="7799832" y="1801368"/>
-            <a:ext cx="3145536" cy="758952"/>
+            <a:ext cx="3145536" cy="640080"/>
           </a:xfrm>
           <a:prstGeom prst="rect">
             <a:avLst/>
@@ -6769,7 +6769,7 @@
                 <a:ea typeface="Aptos" pitchFamily="34" charset="-122"/>
                 <a:cs typeface="Aptos" pitchFamily="34" charset="-120"/>
               </a:rPr>
-              <a:t>Retrieval-augmented generation combines generative AI with a defined set of source documents.</a:t>
+              <a:t>Retrieval-augmented generation combines generative AI with a defined set of source.</a:t>
             </a:r>
             <a:endParaRPr lang="en-US" sz="1320" dirty="0"/>
           </a:p>
@@ -6783,12 +6783,12 @@
         </p:nvSpPr>
         <p:spPr>
           <a:xfrm>
-            <a:off x="7635240" y="2788920"/>
-            <a:ext cx="3474720" cy="1536192"/>
+            <a:off x="7635240" y="2670048"/>
+            <a:ext cx="3474720" cy="1377086"/>
           </a:xfrm>
           <a:prstGeom prst="roundRect">
             <a:avLst>
-              <a:gd name="adj" fmla="val 7143"/>
+              <a:gd name="adj" fmla="val 7968"/>
             </a:avLst>
           </a:prstGeom>
           <a:solidFill>
@@ -6810,7 +6810,7 @@
         </p:nvSpPr>
         <p:spPr>
           <a:xfrm>
-            <a:off x="7799832" y="2935224"/>
+            <a:off x="7799832" y="2816352"/>
             <a:ext cx="3145536" cy="256032"/>
           </a:xfrm>
           <a:prstGeom prst="rect">
@@ -6849,8 +6849,8 @@
         </p:nvSpPr>
         <p:spPr>
           <a:xfrm>
-            <a:off x="7818120" y="3300984"/>
-            <a:ext cx="3090672" cy="877824"/>
+            <a:off x="7818120" y="3182112"/>
+            <a:ext cx="3090672" cy="718718"/>
           </a:xfrm>
           <a:prstGeom prst="rect">
             <a:avLst/>
@@ -6924,12 +6924,12 @@
         </p:nvSpPr>
         <p:spPr>
           <a:xfrm>
-            <a:off x="7635240" y="4498848"/>
-            <a:ext cx="3474720" cy="1143000"/>
+            <a:off x="7635240" y="4184294"/>
+            <a:ext cx="3474720" cy="1466698"/>
           </a:xfrm>
           <a:prstGeom prst="roundRect">
             <a:avLst>
-              <a:gd name="adj" fmla="val 9600"/>
+              <a:gd name="adj" fmla="val 7481"/>
             </a:avLst>
           </a:prstGeom>
           <a:solidFill>
@@ -6951,7 +6951,7 @@
         </p:nvSpPr>
         <p:spPr>
           <a:xfrm>
-            <a:off x="7799832" y="4645152"/>
+            <a:off x="7799832" y="4330598"/>
             <a:ext cx="3145536" cy="256032"/>
           </a:xfrm>
           <a:prstGeom prst="rect">
@@ -6990,8 +6990,8 @@
         </p:nvSpPr>
         <p:spPr>
           <a:xfrm>
-            <a:off x="7799832" y="4974336"/>
-            <a:ext cx="3145536" cy="576072"/>
+            <a:off x="7799832" y="4659782"/>
+            <a:ext cx="3145536" cy="899770"/>
           </a:xfrm>
           <a:prstGeom prst="rect">
             <a:avLst/>
@@ -7017,7 +7017,7 @@
                 <a:ea typeface="Aptos" pitchFamily="34" charset="-122"/>
                 <a:cs typeface="Aptos" pitchFamily="34" charset="-120"/>
               </a:rPr>
-              <a:t>Connect the concept to public health purpose, responsible use, required safeguards, documentation, and the next action a.</a:t>
+              <a:t>Connect the concept to public health purpose, responsible use, required safeguards, documentation, and the next action a department should take.</a:t>
             </a:r>
             <a:endParaRPr lang="en-US" sz="1320" dirty="0"/>
           </a:p>
@@ -7386,11 +7386,11 @@
         <p:spPr>
           <a:xfrm>
             <a:off x="7635240" y="1325880"/>
-            <a:ext cx="3474720" cy="1325880"/>
+            <a:ext cx="3474720" cy="1207008"/>
           </a:xfrm>
           <a:prstGeom prst="roundRect">
             <a:avLst>
-              <a:gd name="adj" fmla="val 8276"/>
+              <a:gd name="adj" fmla="val 9091"/>
             </a:avLst>
           </a:prstGeom>
           <a:solidFill>
@@ -7452,7 +7452,7 @@
         <p:spPr>
           <a:xfrm>
             <a:off x="7799832" y="1801368"/>
-            <a:ext cx="3145536" cy="758952"/>
+            <a:ext cx="3145536" cy="640080"/>
           </a:xfrm>
           <a:prstGeom prst="rect">
             <a:avLst/>
@@ -7492,12 +7492,12 @@
         </p:nvSpPr>
         <p:spPr>
           <a:xfrm>
-            <a:off x="7635240" y="2788920"/>
-            <a:ext cx="3474720" cy="1536192"/>
+            <a:off x="7635240" y="2670048"/>
+            <a:ext cx="3474720" cy="1377086"/>
           </a:xfrm>
           <a:prstGeom prst="roundRect">
             <a:avLst>
-              <a:gd name="adj" fmla="val 7143"/>
+              <a:gd name="adj" fmla="val 7968"/>
             </a:avLst>
           </a:prstGeom>
           <a:solidFill>
@@ -7519,7 +7519,7 @@
         </p:nvSpPr>
         <p:spPr>
           <a:xfrm>
-            <a:off x="7799832" y="2935224"/>
+            <a:off x="7799832" y="2816352"/>
             <a:ext cx="3145536" cy="256032"/>
           </a:xfrm>
           <a:prstGeom prst="rect">
@@ -7558,8 +7558,8 @@
         </p:nvSpPr>
         <p:spPr>
           <a:xfrm>
-            <a:off x="7818120" y="3300984"/>
-            <a:ext cx="3090672" cy="877824"/>
+            <a:off x="7818120" y="3182112"/>
+            <a:ext cx="3090672" cy="718718"/>
           </a:xfrm>
           <a:prstGeom prst="rect">
             <a:avLst/>
@@ -7633,12 +7633,12 @@
         </p:nvSpPr>
         <p:spPr>
           <a:xfrm>
-            <a:off x="7635240" y="4498848"/>
-            <a:ext cx="3474720" cy="1143000"/>
+            <a:off x="7635240" y="4184294"/>
+            <a:ext cx="3474720" cy="1466698"/>
           </a:xfrm>
           <a:prstGeom prst="roundRect">
             <a:avLst>
-              <a:gd name="adj" fmla="val 9600"/>
+              <a:gd name="adj" fmla="val 7481"/>
             </a:avLst>
           </a:prstGeom>
           <a:solidFill>
@@ -7660,7 +7660,7 @@
         </p:nvSpPr>
         <p:spPr>
           <a:xfrm>
-            <a:off x="7799832" y="4645152"/>
+            <a:off x="7799832" y="4330598"/>
             <a:ext cx="3145536" cy="256032"/>
           </a:xfrm>
           <a:prstGeom prst="rect">
@@ -7699,8 +7699,8 @@
         </p:nvSpPr>
         <p:spPr>
           <a:xfrm>
-            <a:off x="7799832" y="4974336"/>
-            <a:ext cx="3145536" cy="576072"/>
+            <a:off x="7799832" y="4659782"/>
+            <a:ext cx="3145536" cy="899770"/>
           </a:xfrm>
           <a:prstGeom prst="rect">
             <a:avLst/>
@@ -7726,7 +7726,7 @@
                 <a:ea typeface="Aptos" pitchFamily="34" charset="-122"/>
                 <a:cs typeface="Aptos" pitchFamily="34" charset="-120"/>
               </a:rPr>
-              <a:t>Connect the concept to public health purpose, responsible use, required safeguards, documentation, and the next action a.</a:t>
+              <a:t>Connect the concept to public health purpose, responsible use, required safeguards, documentation, and the next action a department should take.</a:t>
             </a:r>
             <a:endParaRPr lang="en-US" sz="1320" dirty="0"/>
           </a:p>
@@ -8095,11 +8095,11 @@
         <p:spPr>
           <a:xfrm>
             <a:off x="7635240" y="1325880"/>
-            <a:ext cx="3474720" cy="1325880"/>
+            <a:ext cx="3474720" cy="1255471"/>
           </a:xfrm>
           <a:prstGeom prst="roundRect">
             <a:avLst>
-              <a:gd name="adj" fmla="val 8276"/>
+              <a:gd name="adj" fmla="val 8740"/>
             </a:avLst>
           </a:prstGeom>
           <a:solidFill>
@@ -8161,7 +8161,7 @@
         <p:spPr>
           <a:xfrm>
             <a:off x="7799832" y="1801368"/>
-            <a:ext cx="3145536" cy="758952"/>
+            <a:ext cx="3145536" cy="688543"/>
           </a:xfrm>
           <a:prstGeom prst="rect">
             <a:avLst/>
@@ -8201,12 +8201,12 @@
         </p:nvSpPr>
         <p:spPr>
           <a:xfrm>
-            <a:off x="7635240" y="2788920"/>
-            <a:ext cx="3474720" cy="1536192"/>
+            <a:off x="7635240" y="2718511"/>
+            <a:ext cx="3474720" cy="1328623"/>
           </a:xfrm>
           <a:prstGeom prst="roundRect">
             <a:avLst>
-              <a:gd name="adj" fmla="val 7143"/>
+              <a:gd name="adj" fmla="val 8259"/>
             </a:avLst>
           </a:prstGeom>
           <a:solidFill>
@@ -8228,7 +8228,7 @@
         </p:nvSpPr>
         <p:spPr>
           <a:xfrm>
-            <a:off x="7799832" y="2935224"/>
+            <a:off x="7799832" y="2864815"/>
             <a:ext cx="3145536" cy="256032"/>
           </a:xfrm>
           <a:prstGeom prst="rect">
@@ -8267,8 +8267,8 @@
         </p:nvSpPr>
         <p:spPr>
           <a:xfrm>
-            <a:off x="7818120" y="3300984"/>
-            <a:ext cx="3090672" cy="877824"/>
+            <a:off x="7818120" y="3230575"/>
+            <a:ext cx="3090672" cy="670255"/>
           </a:xfrm>
           <a:prstGeom prst="rect">
             <a:avLst/>
@@ -8342,12 +8342,12 @@
         </p:nvSpPr>
         <p:spPr>
           <a:xfrm>
-            <a:off x="7635240" y="4498848"/>
-            <a:ext cx="3474720" cy="1143000"/>
+            <a:off x="7635240" y="4184294"/>
+            <a:ext cx="3474720" cy="1466698"/>
           </a:xfrm>
           <a:prstGeom prst="roundRect">
             <a:avLst>
-              <a:gd name="adj" fmla="val 9600"/>
+              <a:gd name="adj" fmla="val 7481"/>
             </a:avLst>
           </a:prstGeom>
           <a:solidFill>
@@ -8369,7 +8369,7 @@
         </p:nvSpPr>
         <p:spPr>
           <a:xfrm>
-            <a:off x="7799832" y="4645152"/>
+            <a:off x="7799832" y="4330598"/>
             <a:ext cx="3145536" cy="256032"/>
           </a:xfrm>
           <a:prstGeom prst="rect">
@@ -8408,8 +8408,8 @@
         </p:nvSpPr>
         <p:spPr>
           <a:xfrm>
-            <a:off x="7799832" y="4974336"/>
-            <a:ext cx="3145536" cy="576072"/>
+            <a:off x="7799832" y="4659782"/>
+            <a:ext cx="3145536" cy="899770"/>
           </a:xfrm>
           <a:prstGeom prst="rect">
             <a:avLst/>
@@ -8435,7 +8435,7 @@
                 <a:ea typeface="Aptos" pitchFamily="34" charset="-122"/>
                 <a:cs typeface="Aptos" pitchFamily="34" charset="-120"/>
               </a:rPr>
-              <a:t>Use the concept to clarify workflow changes, dependencies, staffing, procurement requirements, training needs, and.</a:t>
+              <a:t>Use the concept to clarify workflow changes, dependencies, staffing, procurement requirements, training needs, and implementation checkpoints.</a:t>
             </a:r>
             <a:endParaRPr lang="en-US" sz="1320" dirty="0"/>
           </a:p>
@@ -8787,11 +8787,11 @@
         <p:spPr>
           <a:xfrm>
             <a:off x="7635240" y="1325880"/>
-            <a:ext cx="3474720" cy="1325880"/>
+            <a:ext cx="3474720" cy="1255471"/>
           </a:xfrm>
           <a:prstGeom prst="roundRect">
             <a:avLst>
-              <a:gd name="adj" fmla="val 8276"/>
+              <a:gd name="adj" fmla="val 8740"/>
             </a:avLst>
           </a:prstGeom>
           <a:solidFill>
@@ -8853,7 +8853,7 @@
         <p:spPr>
           <a:xfrm>
             <a:off x="7799832" y="1801368"/>
-            <a:ext cx="3145536" cy="758952"/>
+            <a:ext cx="3145536" cy="688543"/>
           </a:xfrm>
           <a:prstGeom prst="rect">
             <a:avLst/>
@@ -8893,12 +8893,12 @@
         </p:nvSpPr>
         <p:spPr>
           <a:xfrm>
-            <a:off x="7635240" y="2788920"/>
-            <a:ext cx="3474720" cy="1536192"/>
+            <a:off x="7635240" y="2718511"/>
+            <a:ext cx="3474720" cy="1328623"/>
           </a:xfrm>
           <a:prstGeom prst="roundRect">
             <a:avLst>
-              <a:gd name="adj" fmla="val 7143"/>
+              <a:gd name="adj" fmla="val 8259"/>
             </a:avLst>
           </a:prstGeom>
           <a:solidFill>
@@ -8920,7 +8920,7 @@
         </p:nvSpPr>
         <p:spPr>
           <a:xfrm>
-            <a:off x="7799832" y="2935224"/>
+            <a:off x="7799832" y="2864815"/>
             <a:ext cx="3145536" cy="256032"/>
           </a:xfrm>
           <a:prstGeom prst="rect">
@@ -8959,8 +8959,8 @@
         </p:nvSpPr>
         <p:spPr>
           <a:xfrm>
-            <a:off x="7818120" y="3300984"/>
-            <a:ext cx="3090672" cy="877824"/>
+            <a:off x="7818120" y="3230575"/>
+            <a:ext cx="3090672" cy="670255"/>
           </a:xfrm>
           <a:prstGeom prst="rect">
             <a:avLst/>
@@ -9017,12 +9017,12 @@
         </p:nvSpPr>
         <p:spPr>
           <a:xfrm>
-            <a:off x="7635240" y="4498848"/>
-            <a:ext cx="3474720" cy="1143000"/>
+            <a:off x="7635240" y="4184294"/>
+            <a:ext cx="3474720" cy="1466698"/>
           </a:xfrm>
           <a:prstGeom prst="roundRect">
             <a:avLst>
-              <a:gd name="adj" fmla="val 9600"/>
+              <a:gd name="adj" fmla="val 7481"/>
             </a:avLst>
           </a:prstGeom>
           <a:solidFill>
@@ -9044,7 +9044,7 @@
         </p:nvSpPr>
         <p:spPr>
           <a:xfrm>
-            <a:off x="7799832" y="4645152"/>
+            <a:off x="7799832" y="4330598"/>
             <a:ext cx="3145536" cy="256032"/>
           </a:xfrm>
           <a:prstGeom prst="rect">
@@ -9083,8 +9083,8 @@
         </p:nvSpPr>
         <p:spPr>
           <a:xfrm>
-            <a:off x="7799832" y="4974336"/>
-            <a:ext cx="3145536" cy="576072"/>
+            <a:off x="7799832" y="4659782"/>
+            <a:ext cx="3145536" cy="899770"/>
           </a:xfrm>
           <a:prstGeom prst="rect">
             <a:avLst/>
@@ -9110,7 +9110,7 @@
                 <a:ea typeface="Aptos" pitchFamily="34" charset="-122"/>
                 <a:cs typeface="Aptos" pitchFamily="34" charset="-120"/>
               </a:rPr>
-              <a:t>Connect the concept to public health purpose, responsible use, required safeguards, documentation, and the next action a.</a:t>
+              <a:t>Connect the concept to public health purpose, responsible use, required safeguards, documentation, and the next action a department should take.</a:t>
             </a:r>
             <a:endParaRPr lang="en-US" sz="1320" dirty="0"/>
           </a:p>
@@ -9462,11 +9462,11 @@
         <p:spPr>
           <a:xfrm>
             <a:off x="7635240" y="1325880"/>
-            <a:ext cx="3474720" cy="1325880"/>
+            <a:ext cx="3474720" cy="1255471"/>
           </a:xfrm>
           <a:prstGeom prst="roundRect">
             <a:avLst>
-              <a:gd name="adj" fmla="val 8276"/>
+              <a:gd name="adj" fmla="val 8740"/>
             </a:avLst>
           </a:prstGeom>
           <a:solidFill>
@@ -9528,7 +9528,7 @@
         <p:spPr>
           <a:xfrm>
             <a:off x="7799832" y="1801368"/>
-            <a:ext cx="3145536" cy="758952"/>
+            <a:ext cx="3145536" cy="688543"/>
           </a:xfrm>
           <a:prstGeom prst="rect">
             <a:avLst/>
@@ -9568,12 +9568,12 @@
         </p:nvSpPr>
         <p:spPr>
           <a:xfrm>
-            <a:off x="7635240" y="2788920"/>
-            <a:ext cx="3474720" cy="1536192"/>
+            <a:off x="7635240" y="2718511"/>
+            <a:ext cx="3474720" cy="1328623"/>
           </a:xfrm>
           <a:prstGeom prst="roundRect">
             <a:avLst>
-              <a:gd name="adj" fmla="val 7143"/>
+              <a:gd name="adj" fmla="val 8259"/>
             </a:avLst>
           </a:prstGeom>
           <a:solidFill>
@@ -9595,7 +9595,7 @@
         </p:nvSpPr>
         <p:spPr>
           <a:xfrm>
-            <a:off x="7799832" y="2935224"/>
+            <a:off x="7799832" y="2864815"/>
             <a:ext cx="3145536" cy="256032"/>
           </a:xfrm>
           <a:prstGeom prst="rect">
@@ -9634,8 +9634,8 @@
         </p:nvSpPr>
         <p:spPr>
           <a:xfrm>
-            <a:off x="7818120" y="3300984"/>
-            <a:ext cx="3090672" cy="877824"/>
+            <a:off x="7818120" y="3230575"/>
+            <a:ext cx="3090672" cy="670255"/>
           </a:xfrm>
           <a:prstGeom prst="rect">
             <a:avLst/>
@@ -9692,12 +9692,12 @@
         </p:nvSpPr>
         <p:spPr>
           <a:xfrm>
-            <a:off x="7635240" y="4498848"/>
-            <a:ext cx="3474720" cy="1143000"/>
+            <a:off x="7635240" y="4184294"/>
+            <a:ext cx="3474720" cy="1466698"/>
           </a:xfrm>
           <a:prstGeom prst="roundRect">
             <a:avLst>
-              <a:gd name="adj" fmla="val 9600"/>
+              <a:gd name="adj" fmla="val 7481"/>
             </a:avLst>
           </a:prstGeom>
           <a:solidFill>
@@ -9719,7 +9719,7 @@
         </p:nvSpPr>
         <p:spPr>
           <a:xfrm>
-            <a:off x="7799832" y="4645152"/>
+            <a:off x="7799832" y="4330598"/>
             <a:ext cx="3145536" cy="256032"/>
           </a:xfrm>
           <a:prstGeom prst="rect">
@@ -9758,8 +9758,8 @@
         </p:nvSpPr>
         <p:spPr>
           <a:xfrm>
-            <a:off x="7799832" y="4974336"/>
-            <a:ext cx="3145536" cy="576072"/>
+            <a:off x="7799832" y="4659782"/>
+            <a:ext cx="3145536" cy="899770"/>
           </a:xfrm>
           <a:prstGeom prst="rect">
             <a:avLst/>
@@ -9785,7 +9785,7 @@
                 <a:ea typeface="Aptos" pitchFamily="34" charset="-122"/>
                 <a:cs typeface="Aptos" pitchFamily="34" charset="-120"/>
               </a:rPr>
-              <a:t>Connect the concept to public health purpose, responsible use, required safeguards, documentation, and the next action a.</a:t>
+              <a:t>Connect the concept to public health purpose, responsible use, required safeguards, documentation, and the next action a department should take.</a:t>
             </a:r>
             <a:endParaRPr lang="en-US" sz="1320" dirty="0"/>
           </a:p>
@@ -10137,11 +10137,11 @@
         <p:spPr>
           <a:xfrm>
             <a:off x="7635240" y="1325880"/>
-            <a:ext cx="3474720" cy="1325880"/>
+            <a:ext cx="3474720" cy="1255471"/>
           </a:xfrm>
           <a:prstGeom prst="roundRect">
             <a:avLst>
-              <a:gd name="adj" fmla="val 8276"/>
+              <a:gd name="adj" fmla="val 8740"/>
             </a:avLst>
           </a:prstGeom>
           <a:solidFill>
@@ -10203,7 +10203,7 @@
         <p:spPr>
           <a:xfrm>
             <a:off x="7799832" y="1801368"/>
-            <a:ext cx="3145536" cy="758952"/>
+            <a:ext cx="3145536" cy="688543"/>
           </a:xfrm>
           <a:prstGeom prst="rect">
             <a:avLst/>
@@ -10243,12 +10243,12 @@
         </p:nvSpPr>
         <p:spPr>
           <a:xfrm>
-            <a:off x="7635240" y="2788920"/>
-            <a:ext cx="3474720" cy="1536192"/>
+            <a:off x="7635240" y="2718511"/>
+            <a:ext cx="3474720" cy="1328623"/>
           </a:xfrm>
           <a:prstGeom prst="roundRect">
             <a:avLst>
-              <a:gd name="adj" fmla="val 7143"/>
+              <a:gd name="adj" fmla="val 8259"/>
             </a:avLst>
           </a:prstGeom>
           <a:solidFill>
@@ -10270,7 +10270,7 @@
         </p:nvSpPr>
         <p:spPr>
           <a:xfrm>
-            <a:off x="7799832" y="2935224"/>
+            <a:off x="7799832" y="2864815"/>
             <a:ext cx="3145536" cy="256032"/>
           </a:xfrm>
           <a:prstGeom prst="rect">
@@ -10309,8 +10309,8 @@
         </p:nvSpPr>
         <p:spPr>
           <a:xfrm>
-            <a:off x="7818120" y="3300984"/>
-            <a:ext cx="3090672" cy="877824"/>
+            <a:off x="7818120" y="3230575"/>
+            <a:ext cx="3090672" cy="670255"/>
           </a:xfrm>
           <a:prstGeom prst="rect">
             <a:avLst/>
@@ -10367,12 +10367,12 @@
         </p:nvSpPr>
         <p:spPr>
           <a:xfrm>
-            <a:off x="7635240" y="4498848"/>
-            <a:ext cx="3474720" cy="1143000"/>
+            <a:off x="7635240" y="4184294"/>
+            <a:ext cx="3474720" cy="1466698"/>
           </a:xfrm>
           <a:prstGeom prst="roundRect">
             <a:avLst>
-              <a:gd name="adj" fmla="val 9600"/>
+              <a:gd name="adj" fmla="val 7481"/>
             </a:avLst>
           </a:prstGeom>
           <a:solidFill>
@@ -10394,7 +10394,7 @@
         </p:nvSpPr>
         <p:spPr>
           <a:xfrm>
-            <a:off x="7799832" y="4645152"/>
+            <a:off x="7799832" y="4330598"/>
             <a:ext cx="3145536" cy="256032"/>
           </a:xfrm>
           <a:prstGeom prst="rect">
@@ -10433,8 +10433,8 @@
         </p:nvSpPr>
         <p:spPr>
           <a:xfrm>
-            <a:off x="7799832" y="4974336"/>
-            <a:ext cx="3145536" cy="576072"/>
+            <a:off x="7799832" y="4659782"/>
+            <a:ext cx="3145536" cy="899770"/>
           </a:xfrm>
           <a:prstGeom prst="rect">
             <a:avLst/>
@@ -10460,7 +10460,7 @@
                 <a:ea typeface="Aptos" pitchFamily="34" charset="-122"/>
                 <a:cs typeface="Aptos" pitchFamily="34" charset="-120"/>
               </a:rPr>
-              <a:t>Connect the concept to public health purpose, responsible use, required safeguards, documentation, and the next action a.</a:t>
+              <a:t>Connect the concept to public health purpose, responsible use, required safeguards, documentation, and the next action a department should take.</a:t>
             </a:r>
             <a:endParaRPr lang="en-US" sz="1320" dirty="0"/>
           </a:p>
@@ -11380,11 +11380,11 @@
         <p:spPr>
           <a:xfrm>
             <a:off x="7635240" y="1325880"/>
-            <a:ext cx="3474720" cy="1325880"/>
+            <a:ext cx="3474720" cy="1207008"/>
           </a:xfrm>
           <a:prstGeom prst="roundRect">
             <a:avLst>
-              <a:gd name="adj" fmla="val 8276"/>
+              <a:gd name="adj" fmla="val 9091"/>
             </a:avLst>
           </a:prstGeom>
           <a:solidFill>
@@ -11446,7 +11446,7 @@
         <p:spPr>
           <a:xfrm>
             <a:off x="7799832" y="1801368"/>
-            <a:ext cx="3145536" cy="758952"/>
+            <a:ext cx="3145536" cy="640080"/>
           </a:xfrm>
           <a:prstGeom prst="rect">
             <a:avLst/>
@@ -11486,7 +11486,7 @@
         </p:nvSpPr>
         <p:spPr>
           <a:xfrm>
-            <a:off x="7635240" y="2788920"/>
+            <a:off x="7635240" y="2670048"/>
             <a:ext cx="3474720" cy="1536192"/>
           </a:xfrm>
           <a:prstGeom prst="roundRect">
@@ -11513,7 +11513,7 @@
         </p:nvSpPr>
         <p:spPr>
           <a:xfrm>
-            <a:off x="7799832" y="2935224"/>
+            <a:off x="7799832" y="2816352"/>
             <a:ext cx="3145536" cy="256032"/>
           </a:xfrm>
           <a:prstGeom prst="rect">
@@ -11552,7 +11552,7 @@
         </p:nvSpPr>
         <p:spPr>
           <a:xfrm>
-            <a:off x="7818120" y="3300984"/>
+            <a:off x="7818120" y="3182112"/>
             <a:ext cx="3090672" cy="877824"/>
           </a:xfrm>
           <a:prstGeom prst="rect">
@@ -11593,12 +11593,12 @@
         </p:nvSpPr>
         <p:spPr>
           <a:xfrm>
-            <a:off x="7635240" y="4498848"/>
-            <a:ext cx="3474720" cy="1143000"/>
+            <a:off x="7635240" y="4343400"/>
+            <a:ext cx="3474720" cy="1255471"/>
           </a:xfrm>
           <a:prstGeom prst="roundRect">
             <a:avLst>
-              <a:gd name="adj" fmla="val 9600"/>
+              <a:gd name="adj" fmla="val 8740"/>
             </a:avLst>
           </a:prstGeom>
           <a:solidFill>
@@ -11620,7 +11620,7 @@
         </p:nvSpPr>
         <p:spPr>
           <a:xfrm>
-            <a:off x="7799832" y="4645152"/>
+            <a:off x="7799832" y="4489704"/>
             <a:ext cx="3145536" cy="256032"/>
           </a:xfrm>
           <a:prstGeom prst="rect">
@@ -11659,8 +11659,8 @@
         </p:nvSpPr>
         <p:spPr>
           <a:xfrm>
-            <a:off x="7799832" y="4974336"/>
-            <a:ext cx="3145536" cy="576072"/>
+            <a:off x="7799832" y="4818888"/>
+            <a:ext cx="3145536" cy="688543"/>
           </a:xfrm>
           <a:prstGeom prst="rect">
             <a:avLst/>
@@ -11686,7 +11686,7 @@
                 <a:ea typeface="Aptos" pitchFamily="34" charset="-122"/>
                 <a:cs typeface="Aptos" pitchFamily="34" charset="-120"/>
               </a:rPr>
-              <a:t>Identify what could go wrong, who could be affected, what safeguards are needed, and what evidence should be reviewed.</a:t>
+              <a:t>Identify what could go wrong, who could be affected, what safeguards are needed, and what evidence should be reviewed before use.</a:t>
             </a:r>
             <a:endParaRPr lang="en-US" sz="1320" dirty="0"/>
           </a:p>
@@ -12038,11 +12038,11 @@
         <p:spPr>
           <a:xfrm>
             <a:off x="7635240" y="1325880"/>
-            <a:ext cx="3474720" cy="1325880"/>
+            <a:ext cx="3474720" cy="1255471"/>
           </a:xfrm>
           <a:prstGeom prst="roundRect">
             <a:avLst>
-              <a:gd name="adj" fmla="val 8276"/>
+              <a:gd name="adj" fmla="val 8740"/>
             </a:avLst>
           </a:prstGeom>
           <a:solidFill>
@@ -12104,7 +12104,7 @@
         <p:spPr>
           <a:xfrm>
             <a:off x="7799832" y="1801368"/>
-            <a:ext cx="3145536" cy="758952"/>
+            <a:ext cx="3145536" cy="688543"/>
           </a:xfrm>
           <a:prstGeom prst="rect">
             <a:avLst/>
@@ -12144,12 +12144,12 @@
         </p:nvSpPr>
         <p:spPr>
           <a:xfrm>
-            <a:off x="7635240" y="2788920"/>
-            <a:ext cx="3474720" cy="1536192"/>
+            <a:off x="7635240" y="2718511"/>
+            <a:ext cx="3474720" cy="1328623"/>
           </a:xfrm>
           <a:prstGeom prst="roundRect">
             <a:avLst>
-              <a:gd name="adj" fmla="val 7143"/>
+              <a:gd name="adj" fmla="val 8259"/>
             </a:avLst>
           </a:prstGeom>
           <a:solidFill>
@@ -12171,7 +12171,7 @@
         </p:nvSpPr>
         <p:spPr>
           <a:xfrm>
-            <a:off x="7799832" y="2935224"/>
+            <a:off x="7799832" y="2864815"/>
             <a:ext cx="3145536" cy="256032"/>
           </a:xfrm>
           <a:prstGeom prst="rect">
@@ -12210,8 +12210,8 @@
         </p:nvSpPr>
         <p:spPr>
           <a:xfrm>
-            <a:off x="7818120" y="3300984"/>
-            <a:ext cx="3090672" cy="877824"/>
+            <a:off x="7818120" y="3230575"/>
+            <a:ext cx="3090672" cy="670255"/>
           </a:xfrm>
           <a:prstGeom prst="rect">
             <a:avLst/>
@@ -12268,12 +12268,12 @@
         </p:nvSpPr>
         <p:spPr>
           <a:xfrm>
-            <a:off x="7635240" y="4498848"/>
-            <a:ext cx="3474720" cy="1143000"/>
+            <a:off x="7635240" y="4184294"/>
+            <a:ext cx="3474720" cy="1466698"/>
           </a:xfrm>
           <a:prstGeom prst="roundRect">
             <a:avLst>
-              <a:gd name="adj" fmla="val 9600"/>
+              <a:gd name="adj" fmla="val 7481"/>
             </a:avLst>
           </a:prstGeom>
           <a:solidFill>
@@ -12295,7 +12295,7 @@
         </p:nvSpPr>
         <p:spPr>
           <a:xfrm>
-            <a:off x="7799832" y="4645152"/>
+            <a:off x="7799832" y="4330598"/>
             <a:ext cx="3145536" cy="256032"/>
           </a:xfrm>
           <a:prstGeom prst="rect">
@@ -12334,8 +12334,8 @@
         </p:nvSpPr>
         <p:spPr>
           <a:xfrm>
-            <a:off x="7799832" y="4974336"/>
-            <a:ext cx="3145536" cy="576072"/>
+            <a:off x="7799832" y="4659782"/>
+            <a:ext cx="3145536" cy="899770"/>
           </a:xfrm>
           <a:prstGeom prst="rect">
             <a:avLst/>
@@ -12361,7 +12361,7 @@
                 <a:ea typeface="Aptos" pitchFamily="34" charset="-122"/>
                 <a:cs typeface="Aptos" pitchFamily="34" charset="-120"/>
               </a:rPr>
-              <a:t>Use the assignment to test whether you can explain the concept, apply it to a realistic public health situation, and.</a:t>
+              <a:t>Use the assignment to test whether you can explain the concept, apply it to a realistic public health situation, and identify what would need review before the work moves forward.</a:t>
             </a:r>
             <a:endParaRPr lang="en-US" sz="1320" dirty="0"/>
           </a:p>
@@ -12730,11 +12730,11 @@
         <p:spPr>
           <a:xfrm>
             <a:off x="7635240" y="1325880"/>
-            <a:ext cx="3474720" cy="1325880"/>
+            <a:ext cx="3474720" cy="1207008"/>
           </a:xfrm>
           <a:prstGeom prst="roundRect">
             <a:avLst>
-              <a:gd name="adj" fmla="val 8276"/>
+              <a:gd name="adj" fmla="val 9091"/>
             </a:avLst>
           </a:prstGeom>
           <a:solidFill>
@@ -12796,7 +12796,7 @@
         <p:spPr>
           <a:xfrm>
             <a:off x="7799832" y="1801368"/>
-            <a:ext cx="3145536" cy="758952"/>
+            <a:ext cx="3145536" cy="640080"/>
           </a:xfrm>
           <a:prstGeom prst="rect">
             <a:avLst/>
@@ -12836,12 +12836,12 @@
         </p:nvSpPr>
         <p:spPr>
           <a:xfrm>
-            <a:off x="7635240" y="2788920"/>
-            <a:ext cx="3474720" cy="1536192"/>
+            <a:off x="7635240" y="2670048"/>
+            <a:ext cx="3474720" cy="1377086"/>
           </a:xfrm>
           <a:prstGeom prst="roundRect">
             <a:avLst>
-              <a:gd name="adj" fmla="val 7143"/>
+              <a:gd name="adj" fmla="val 7968"/>
             </a:avLst>
           </a:prstGeom>
           <a:solidFill>
@@ -12863,7 +12863,7 @@
         </p:nvSpPr>
         <p:spPr>
           <a:xfrm>
-            <a:off x="7799832" y="2935224"/>
+            <a:off x="7799832" y="2816352"/>
             <a:ext cx="3145536" cy="256032"/>
           </a:xfrm>
           <a:prstGeom prst="rect">
@@ -12902,8 +12902,8 @@
         </p:nvSpPr>
         <p:spPr>
           <a:xfrm>
-            <a:off x="7818120" y="3300984"/>
-            <a:ext cx="3090672" cy="877824"/>
+            <a:off x="7818120" y="3182112"/>
+            <a:ext cx="3090672" cy="718718"/>
           </a:xfrm>
           <a:prstGeom prst="rect">
             <a:avLst/>
@@ -12977,12 +12977,12 @@
         </p:nvSpPr>
         <p:spPr>
           <a:xfrm>
-            <a:off x="7635240" y="4498848"/>
-            <a:ext cx="3474720" cy="1143000"/>
+            <a:off x="7635240" y="4184294"/>
+            <a:ext cx="3474720" cy="1466698"/>
           </a:xfrm>
           <a:prstGeom prst="roundRect">
             <a:avLst>
-              <a:gd name="adj" fmla="val 9600"/>
+              <a:gd name="adj" fmla="val 7481"/>
             </a:avLst>
           </a:prstGeom>
           <a:solidFill>
@@ -13004,7 +13004,7 @@
         </p:nvSpPr>
         <p:spPr>
           <a:xfrm>
-            <a:off x="7799832" y="4645152"/>
+            <a:off x="7799832" y="4330598"/>
             <a:ext cx="3145536" cy="256032"/>
           </a:xfrm>
           <a:prstGeom prst="rect">
@@ -13043,8 +13043,8 @@
         </p:nvSpPr>
         <p:spPr>
           <a:xfrm>
-            <a:off x="7799832" y="4974336"/>
-            <a:ext cx="3145536" cy="576072"/>
+            <a:off x="7799832" y="4659782"/>
+            <a:ext cx="3145536" cy="899770"/>
           </a:xfrm>
           <a:prstGeom prst="rect">
             <a:avLst/>
@@ -13070,7 +13070,7 @@
                 <a:ea typeface="Aptos" pitchFamily="34" charset="-122"/>
                 <a:cs typeface="Aptos" pitchFamily="34" charset="-120"/>
               </a:rPr>
-              <a:t>Connect the concept to public health purpose, responsible use, required safeguards, documentation, and the next action a.</a:t>
+              <a:t>Connect the concept to public health purpose, responsible use, required safeguards, documentation, and the next action a department should take.</a:t>
             </a:r>
             <a:endParaRPr lang="en-US" sz="1320" dirty="0"/>
           </a:p>
@@ -13439,11 +13439,11 @@
         <p:spPr>
           <a:xfrm>
             <a:off x="7635240" y="1325880"/>
-            <a:ext cx="3474720" cy="1325880"/>
+            <a:ext cx="3474720" cy="1255471"/>
           </a:xfrm>
           <a:prstGeom prst="roundRect">
             <a:avLst>
-              <a:gd name="adj" fmla="val 8276"/>
+              <a:gd name="adj" fmla="val 8740"/>
             </a:avLst>
           </a:prstGeom>
           <a:solidFill>
@@ -13505,7 +13505,7 @@
         <p:spPr>
           <a:xfrm>
             <a:off x="7799832" y="1801368"/>
-            <a:ext cx="3145536" cy="758952"/>
+            <a:ext cx="3145536" cy="688543"/>
           </a:xfrm>
           <a:prstGeom prst="rect">
             <a:avLst/>
@@ -13545,12 +13545,12 @@
         </p:nvSpPr>
         <p:spPr>
           <a:xfrm>
-            <a:off x="7635240" y="2788920"/>
-            <a:ext cx="3474720" cy="1536192"/>
+            <a:off x="7635240" y="2718511"/>
+            <a:ext cx="3474720" cy="1328623"/>
           </a:xfrm>
           <a:prstGeom prst="roundRect">
             <a:avLst>
-              <a:gd name="adj" fmla="val 7143"/>
+              <a:gd name="adj" fmla="val 8259"/>
             </a:avLst>
           </a:prstGeom>
           <a:solidFill>
@@ -13572,7 +13572,7 @@
         </p:nvSpPr>
         <p:spPr>
           <a:xfrm>
-            <a:off x="7799832" y="2935224"/>
+            <a:off x="7799832" y="2864815"/>
             <a:ext cx="3145536" cy="256032"/>
           </a:xfrm>
           <a:prstGeom prst="rect">
@@ -13611,8 +13611,8 @@
         </p:nvSpPr>
         <p:spPr>
           <a:xfrm>
-            <a:off x="7818120" y="3300984"/>
-            <a:ext cx="3090672" cy="877824"/>
+            <a:off x="7818120" y="3230575"/>
+            <a:ext cx="3090672" cy="670255"/>
           </a:xfrm>
           <a:prstGeom prst="rect">
             <a:avLst/>
@@ -13669,12 +13669,12 @@
         </p:nvSpPr>
         <p:spPr>
           <a:xfrm>
-            <a:off x="7635240" y="4498848"/>
-            <a:ext cx="3474720" cy="1143000"/>
+            <a:off x="7635240" y="4184294"/>
+            <a:ext cx="3474720" cy="1466698"/>
           </a:xfrm>
           <a:prstGeom prst="roundRect">
             <a:avLst>
-              <a:gd name="adj" fmla="val 9600"/>
+              <a:gd name="adj" fmla="val 7481"/>
             </a:avLst>
           </a:prstGeom>
           <a:solidFill>
@@ -13696,7 +13696,7 @@
         </p:nvSpPr>
         <p:spPr>
           <a:xfrm>
-            <a:off x="7799832" y="4645152"/>
+            <a:off x="7799832" y="4330598"/>
             <a:ext cx="3145536" cy="256032"/>
           </a:xfrm>
           <a:prstGeom prst="rect">
@@ -13735,8 +13735,8 @@
         </p:nvSpPr>
         <p:spPr>
           <a:xfrm>
-            <a:off x="7799832" y="4974336"/>
-            <a:ext cx="3145536" cy="576072"/>
+            <a:off x="7799832" y="4659782"/>
+            <a:ext cx="3145536" cy="899770"/>
           </a:xfrm>
           <a:prstGeom prst="rect">
             <a:avLst/>
@@ -13762,7 +13762,7 @@
                 <a:ea typeface="Aptos" pitchFamily="34" charset="-122"/>
                 <a:cs typeface="Aptos" pitchFamily="34" charset="-120"/>
               </a:rPr>
-              <a:t>Use the assignment to test whether you can explain the concept, apply it to a realistic public health situation, and.</a:t>
+              <a:t>Use the assignment to test whether you can explain the concept, apply it to a realistic public health situation, and identify what would need review before the work moves forward.</a:t>
             </a:r>
             <a:endParaRPr lang="en-US" sz="1320" dirty="0"/>
           </a:p>
@@ -14097,11 +14097,11 @@
         <p:spPr>
           <a:xfrm>
             <a:off x="7635240" y="1325880"/>
-            <a:ext cx="3474720" cy="1325880"/>
+            <a:ext cx="3474720" cy="1207008"/>
           </a:xfrm>
           <a:prstGeom prst="roundRect">
             <a:avLst>
-              <a:gd name="adj" fmla="val 8276"/>
+              <a:gd name="adj" fmla="val 9091"/>
             </a:avLst>
           </a:prstGeom>
           <a:solidFill>
@@ -14163,7 +14163,7 @@
         <p:spPr>
           <a:xfrm>
             <a:off x="7799832" y="1801368"/>
-            <a:ext cx="3145536" cy="758952"/>
+            <a:ext cx="3145536" cy="640080"/>
           </a:xfrm>
           <a:prstGeom prst="rect">
             <a:avLst/>
@@ -14203,12 +14203,12 @@
         </p:nvSpPr>
         <p:spPr>
           <a:xfrm>
-            <a:off x="7635240" y="2788920"/>
-            <a:ext cx="3474720" cy="1536192"/>
+            <a:off x="7635240" y="2670048"/>
+            <a:ext cx="3474720" cy="1377086"/>
           </a:xfrm>
           <a:prstGeom prst="roundRect">
             <a:avLst>
-              <a:gd name="adj" fmla="val 7143"/>
+              <a:gd name="adj" fmla="val 7968"/>
             </a:avLst>
           </a:prstGeom>
           <a:solidFill>
@@ -14230,7 +14230,7 @@
         </p:nvSpPr>
         <p:spPr>
           <a:xfrm>
-            <a:off x="7799832" y="2935224"/>
+            <a:off x="7799832" y="2816352"/>
             <a:ext cx="3145536" cy="256032"/>
           </a:xfrm>
           <a:prstGeom prst="rect">
@@ -14269,8 +14269,8 @@
         </p:nvSpPr>
         <p:spPr>
           <a:xfrm>
-            <a:off x="7818120" y="3300984"/>
-            <a:ext cx="3090672" cy="877824"/>
+            <a:off x="7818120" y="3182112"/>
+            <a:ext cx="3090672" cy="718718"/>
           </a:xfrm>
           <a:prstGeom prst="rect">
             <a:avLst/>
@@ -14310,12 +14310,12 @@
         </p:nvSpPr>
         <p:spPr>
           <a:xfrm>
-            <a:off x="7635240" y="4498848"/>
-            <a:ext cx="3474720" cy="1143000"/>
+            <a:off x="7635240" y="4184294"/>
+            <a:ext cx="3474720" cy="1466698"/>
           </a:xfrm>
           <a:prstGeom prst="roundRect">
             <a:avLst>
-              <a:gd name="adj" fmla="val 9600"/>
+              <a:gd name="adj" fmla="val 7481"/>
             </a:avLst>
           </a:prstGeom>
           <a:solidFill>
@@ -14337,7 +14337,7 @@
         </p:nvSpPr>
         <p:spPr>
           <a:xfrm>
-            <a:off x="7799832" y="4645152"/>
+            <a:off x="7799832" y="4330598"/>
             <a:ext cx="3145536" cy="256032"/>
           </a:xfrm>
           <a:prstGeom prst="rect">
@@ -14376,8 +14376,8 @@
         </p:nvSpPr>
         <p:spPr>
           <a:xfrm>
-            <a:off x="7799832" y="4974336"/>
-            <a:ext cx="3145536" cy="576072"/>
+            <a:off x="7799832" y="4659782"/>
+            <a:ext cx="3145536" cy="899770"/>
           </a:xfrm>
           <a:prstGeom prst="rect">
             <a:avLst/>
@@ -14403,7 +14403,7 @@
                 <a:ea typeface="Aptos" pitchFamily="34" charset="-122"/>
                 <a:cs typeface="Aptos" pitchFamily="34" charset="-120"/>
               </a:rPr>
-              <a:t>Use the assignment to test whether you can explain the concept, apply it to a realistic public health situation, and.</a:t>
+              <a:t>Use the assignment to test whether you can explain the concept, apply it to a realistic public health situation, and identify what would need review before the work moves forward.</a:t>
             </a:r>
             <a:endParaRPr lang="en-US" sz="1320" dirty="0"/>
           </a:p>
@@ -14772,11 +14772,11 @@
         <p:spPr>
           <a:xfrm>
             <a:off x="7635240" y="1325880"/>
-            <a:ext cx="3474720" cy="1325880"/>
+            <a:ext cx="3474720" cy="1255471"/>
           </a:xfrm>
           <a:prstGeom prst="roundRect">
             <a:avLst>
-              <a:gd name="adj" fmla="val 8276"/>
+              <a:gd name="adj" fmla="val 8740"/>
             </a:avLst>
           </a:prstGeom>
           <a:solidFill>
@@ -14838,7 +14838,7 @@
         <p:spPr>
           <a:xfrm>
             <a:off x="7799832" y="1801368"/>
-            <a:ext cx="3145536" cy="758952"/>
+            <a:ext cx="3145536" cy="688543"/>
           </a:xfrm>
           <a:prstGeom prst="rect">
             <a:avLst/>
@@ -14878,12 +14878,12 @@
         </p:nvSpPr>
         <p:spPr>
           <a:xfrm>
-            <a:off x="7635240" y="2788920"/>
-            <a:ext cx="3474720" cy="1536192"/>
+            <a:off x="7635240" y="2718511"/>
+            <a:ext cx="3474720" cy="1328623"/>
           </a:xfrm>
           <a:prstGeom prst="roundRect">
             <a:avLst>
-              <a:gd name="adj" fmla="val 7143"/>
+              <a:gd name="adj" fmla="val 8259"/>
             </a:avLst>
           </a:prstGeom>
           <a:solidFill>
@@ -14905,7 +14905,7 @@
         </p:nvSpPr>
         <p:spPr>
           <a:xfrm>
-            <a:off x="7799832" y="2935224"/>
+            <a:off x="7799832" y="2864815"/>
             <a:ext cx="3145536" cy="256032"/>
           </a:xfrm>
           <a:prstGeom prst="rect">
@@ -14944,8 +14944,8 @@
         </p:nvSpPr>
         <p:spPr>
           <a:xfrm>
-            <a:off x="7818120" y="3300984"/>
-            <a:ext cx="3090672" cy="877824"/>
+            <a:off x="7818120" y="3230575"/>
+            <a:ext cx="3090672" cy="670255"/>
           </a:xfrm>
           <a:prstGeom prst="rect">
             <a:avLst/>
@@ -15019,12 +15019,12 @@
         </p:nvSpPr>
         <p:spPr>
           <a:xfrm>
-            <a:off x="7635240" y="4498848"/>
-            <a:ext cx="3474720" cy="1143000"/>
+            <a:off x="7635240" y="4184294"/>
+            <a:ext cx="3474720" cy="1466698"/>
           </a:xfrm>
           <a:prstGeom prst="roundRect">
             <a:avLst>
-              <a:gd name="adj" fmla="val 9600"/>
+              <a:gd name="adj" fmla="val 7481"/>
             </a:avLst>
           </a:prstGeom>
           <a:solidFill>
@@ -15046,7 +15046,7 @@
         </p:nvSpPr>
         <p:spPr>
           <a:xfrm>
-            <a:off x="7799832" y="4645152"/>
+            <a:off x="7799832" y="4330598"/>
             <a:ext cx="3145536" cy="256032"/>
           </a:xfrm>
           <a:prstGeom prst="rect">
@@ -15085,8 +15085,8 @@
         </p:nvSpPr>
         <p:spPr>
           <a:xfrm>
-            <a:off x="7799832" y="4974336"/>
-            <a:ext cx="3145536" cy="576072"/>
+            <a:off x="7799832" y="4659782"/>
+            <a:ext cx="3145536" cy="899770"/>
           </a:xfrm>
           <a:prstGeom prst="rect">
             <a:avLst/>
@@ -15112,7 +15112,7 @@
                 <a:ea typeface="Aptos" pitchFamily="34" charset="-122"/>
                 <a:cs typeface="Aptos" pitchFamily="34" charset="-120"/>
               </a:rPr>
-              <a:t>Use the assignment to test whether you can explain the concept, apply it to a realistic public health situation, and.</a:t>
+              <a:t>Use the assignment to test whether you can explain the concept, apply it to a realistic public health situation, and identify what would need review before the work moves forward.</a:t>
             </a:r>
             <a:endParaRPr lang="en-US" sz="1320" dirty="0"/>
           </a:p>
@@ -15481,11 +15481,11 @@
         <p:spPr>
           <a:xfrm>
             <a:off x="7635240" y="1325880"/>
-            <a:ext cx="3474720" cy="1325880"/>
+            <a:ext cx="3474720" cy="1255471"/>
           </a:xfrm>
           <a:prstGeom prst="roundRect">
             <a:avLst>
-              <a:gd name="adj" fmla="val 8276"/>
+              <a:gd name="adj" fmla="val 8740"/>
             </a:avLst>
           </a:prstGeom>
           <a:solidFill>
@@ -15547,7 +15547,7 @@
         <p:spPr>
           <a:xfrm>
             <a:off x="7799832" y="1801368"/>
-            <a:ext cx="3145536" cy="758952"/>
+            <a:ext cx="3145536" cy="688543"/>
           </a:xfrm>
           <a:prstGeom prst="rect">
             <a:avLst/>
@@ -15587,12 +15587,12 @@
         </p:nvSpPr>
         <p:spPr>
           <a:xfrm>
-            <a:off x="7635240" y="2788920"/>
-            <a:ext cx="3474720" cy="1536192"/>
+            <a:off x="7635240" y="2718511"/>
+            <a:ext cx="3474720" cy="1328623"/>
           </a:xfrm>
           <a:prstGeom prst="roundRect">
             <a:avLst>
-              <a:gd name="adj" fmla="val 7143"/>
+              <a:gd name="adj" fmla="val 8259"/>
             </a:avLst>
           </a:prstGeom>
           <a:solidFill>
@@ -15614,7 +15614,7 @@
         </p:nvSpPr>
         <p:spPr>
           <a:xfrm>
-            <a:off x="7799832" y="2935224"/>
+            <a:off x="7799832" y="2864815"/>
             <a:ext cx="3145536" cy="256032"/>
           </a:xfrm>
           <a:prstGeom prst="rect">
@@ -15653,8 +15653,8 @@
         </p:nvSpPr>
         <p:spPr>
           <a:xfrm>
-            <a:off x="7818120" y="3300984"/>
-            <a:ext cx="3090672" cy="877824"/>
+            <a:off x="7818120" y="3230575"/>
+            <a:ext cx="3090672" cy="670255"/>
           </a:xfrm>
           <a:prstGeom prst="rect">
             <a:avLst/>
@@ -15728,12 +15728,12 @@
         </p:nvSpPr>
         <p:spPr>
           <a:xfrm>
-            <a:off x="7635240" y="4498848"/>
-            <a:ext cx="3474720" cy="1143000"/>
+            <a:off x="7635240" y="4184294"/>
+            <a:ext cx="3474720" cy="1466698"/>
           </a:xfrm>
           <a:prstGeom prst="roundRect">
             <a:avLst>
-              <a:gd name="adj" fmla="val 9600"/>
+              <a:gd name="adj" fmla="val 7481"/>
             </a:avLst>
           </a:prstGeom>
           <a:solidFill>
@@ -15755,7 +15755,7 @@
         </p:nvSpPr>
         <p:spPr>
           <a:xfrm>
-            <a:off x="7799832" y="4645152"/>
+            <a:off x="7799832" y="4330598"/>
             <a:ext cx="3145536" cy="256032"/>
           </a:xfrm>
           <a:prstGeom prst="rect">
@@ -15794,8 +15794,8 @@
         </p:nvSpPr>
         <p:spPr>
           <a:xfrm>
-            <a:off x="7799832" y="4974336"/>
-            <a:ext cx="3145536" cy="576072"/>
+            <a:off x="7799832" y="4659782"/>
+            <a:ext cx="3145536" cy="899770"/>
           </a:xfrm>
           <a:prstGeom prst="rect">
             <a:avLst/>
@@ -15821,7 +15821,7 @@
                 <a:ea typeface="Aptos" pitchFamily="34" charset="-122"/>
                 <a:cs typeface="Aptos" pitchFamily="34" charset="-120"/>
               </a:rPr>
-              <a:t>Connect the concept to public health purpose, responsible use, required safeguards, documentation, and the next action a.</a:t>
+              <a:t>Connect the concept to public health purpose, responsible use, required safeguards, documentation, and the next action a department should take.</a:t>
             </a:r>
             <a:endParaRPr lang="en-US" sz="1320" dirty="0"/>
           </a:p>
@@ -16156,11 +16156,11 @@
         <p:spPr>
           <a:xfrm>
             <a:off x="7635240" y="1325880"/>
-            <a:ext cx="3474720" cy="1325880"/>
+            <a:ext cx="3474720" cy="1255471"/>
           </a:xfrm>
           <a:prstGeom prst="roundRect">
             <a:avLst>
-              <a:gd name="adj" fmla="val 8276"/>
+              <a:gd name="adj" fmla="val 8740"/>
             </a:avLst>
           </a:prstGeom>
           <a:solidFill>
@@ -16222,7 +16222,7 @@
         <p:spPr>
           <a:xfrm>
             <a:off x="7799832" y="1801368"/>
-            <a:ext cx="3145536" cy="758952"/>
+            <a:ext cx="3145536" cy="688543"/>
           </a:xfrm>
           <a:prstGeom prst="rect">
             <a:avLst/>
@@ -16262,12 +16262,12 @@
         </p:nvSpPr>
         <p:spPr>
           <a:xfrm>
-            <a:off x="7635240" y="2788920"/>
-            <a:ext cx="3474720" cy="1536192"/>
+            <a:off x="7635240" y="2718511"/>
+            <a:ext cx="3474720" cy="1328623"/>
           </a:xfrm>
           <a:prstGeom prst="roundRect">
             <a:avLst>
-              <a:gd name="adj" fmla="val 7143"/>
+              <a:gd name="adj" fmla="val 8259"/>
             </a:avLst>
           </a:prstGeom>
           <a:solidFill>
@@ -16289,7 +16289,7 @@
         </p:nvSpPr>
         <p:spPr>
           <a:xfrm>
-            <a:off x="7799832" y="2935224"/>
+            <a:off x="7799832" y="2864815"/>
             <a:ext cx="3145536" cy="256032"/>
           </a:xfrm>
           <a:prstGeom prst="rect">
@@ -16328,8 +16328,8 @@
         </p:nvSpPr>
         <p:spPr>
           <a:xfrm>
-            <a:off x="7818120" y="3300984"/>
-            <a:ext cx="3090672" cy="877824"/>
+            <a:off x="7818120" y="3230575"/>
+            <a:ext cx="3090672" cy="670255"/>
           </a:xfrm>
           <a:prstGeom prst="rect">
             <a:avLst/>
@@ -16369,12 +16369,12 @@
         </p:nvSpPr>
         <p:spPr>
           <a:xfrm>
-            <a:off x="7635240" y="4498848"/>
-            <a:ext cx="3474720" cy="1143000"/>
+            <a:off x="7635240" y="4184294"/>
+            <a:ext cx="3474720" cy="1466698"/>
           </a:xfrm>
           <a:prstGeom prst="roundRect">
             <a:avLst>
-              <a:gd name="adj" fmla="val 9600"/>
+              <a:gd name="adj" fmla="val 7481"/>
             </a:avLst>
           </a:prstGeom>
           <a:solidFill>
@@ -16396,7 +16396,7 @@
         </p:nvSpPr>
         <p:spPr>
           <a:xfrm>
-            <a:off x="7799832" y="4645152"/>
+            <a:off x="7799832" y="4330598"/>
             <a:ext cx="3145536" cy="256032"/>
           </a:xfrm>
           <a:prstGeom prst="rect">
@@ -16435,8 +16435,8 @@
         </p:nvSpPr>
         <p:spPr>
           <a:xfrm>
-            <a:off x="7799832" y="4974336"/>
-            <a:ext cx="3145536" cy="576072"/>
+            <a:off x="7799832" y="4659782"/>
+            <a:ext cx="3145536" cy="899770"/>
           </a:xfrm>
           <a:prstGeom prst="rect">
             <a:avLst/>
@@ -16462,7 +16462,7 @@
                 <a:ea typeface="Aptos" pitchFamily="34" charset="-122"/>
                 <a:cs typeface="Aptos" pitchFamily="34" charset="-120"/>
               </a:rPr>
-              <a:t>Connect the concept to public health purpose, responsible use, required safeguards, documentation, and the next action a.</a:t>
+              <a:t>Connect the concept to public health purpose, responsible use, required safeguards, documentation, and the next action a department should take.</a:t>
             </a:r>
             <a:endParaRPr lang="en-US" sz="1320" dirty="0"/>
           </a:p>
@@ -16923,7 +16923,7 @@
                 <a:ea typeface="Aptos" pitchFamily="34" charset="-122"/>
                 <a:cs typeface="Aptos" pitchFamily="34" charset="-120"/>
               </a:rPr>
-              <a:t>Use the related plays to identify decisions, participants, timing, approvals, and documentation needed for responsible.</a:t>
+              <a:t>Use the related plays to identify decisions, participants, timing, approvals, and documentation needed for responsible implementation.</a:t>
             </a:r>
             <a:endParaRPr lang="en-US" sz="1320" dirty="0"/>
           </a:p>
@@ -17508,7 +17508,7 @@
                 <a:ea typeface="Aptos" pitchFamily="34" charset="-122"/>
                 <a:cs typeface="Aptos" pitchFamily="34" charset="-120"/>
               </a:rPr>
-              <a:t>Use linked tools when your department needs a structured worksheet, template, checklist, review process, or.</a:t>
+              <a:t>Use linked tools when your department needs a structured worksheet, template, checklist, review process, or documentation artifact.</a:t>
             </a:r>
             <a:endParaRPr lang="en-US" sz="1320" dirty="0"/>
           </a:p>
@@ -18018,11 +18018,11 @@
         <p:spPr>
           <a:xfrm>
             <a:off x="7635240" y="1325880"/>
-            <a:ext cx="3474720" cy="1325880"/>
+            <a:ext cx="3474720" cy="1255471"/>
           </a:xfrm>
           <a:prstGeom prst="roundRect">
             <a:avLst>
-              <a:gd name="adj" fmla="val 8276"/>
+              <a:gd name="adj" fmla="val 8740"/>
             </a:avLst>
           </a:prstGeom>
           <a:solidFill>
@@ -18084,7 +18084,7 @@
         <p:spPr>
           <a:xfrm>
             <a:off x="7799832" y="1801368"/>
-            <a:ext cx="3145536" cy="758952"/>
+            <a:ext cx="3145536" cy="688543"/>
           </a:xfrm>
           <a:prstGeom prst="rect">
             <a:avLst/>
@@ -18124,12 +18124,12 @@
         </p:nvSpPr>
         <p:spPr>
           <a:xfrm>
-            <a:off x="7635240" y="2788920"/>
-            <a:ext cx="3474720" cy="1536192"/>
+            <a:off x="7635240" y="2718511"/>
+            <a:ext cx="3474720" cy="1328623"/>
           </a:xfrm>
           <a:prstGeom prst="roundRect">
             <a:avLst>
-              <a:gd name="adj" fmla="val 7143"/>
+              <a:gd name="adj" fmla="val 8259"/>
             </a:avLst>
           </a:prstGeom>
           <a:solidFill>
@@ -18151,7 +18151,7 @@
         </p:nvSpPr>
         <p:spPr>
           <a:xfrm>
-            <a:off x="7799832" y="2935224"/>
+            <a:off x="7799832" y="2864815"/>
             <a:ext cx="3145536" cy="256032"/>
           </a:xfrm>
           <a:prstGeom prst="rect">
@@ -18190,8 +18190,8 @@
         </p:nvSpPr>
         <p:spPr>
           <a:xfrm>
-            <a:off x="7818120" y="3300984"/>
-            <a:ext cx="3090672" cy="877824"/>
+            <a:off x="7818120" y="3230575"/>
+            <a:ext cx="3090672" cy="670255"/>
           </a:xfrm>
           <a:prstGeom prst="rect">
             <a:avLst/>
@@ -18265,12 +18265,12 @@
         </p:nvSpPr>
         <p:spPr>
           <a:xfrm>
-            <a:off x="7635240" y="4498848"/>
-            <a:ext cx="3474720" cy="1143000"/>
+            <a:off x="7635240" y="4184294"/>
+            <a:ext cx="3474720" cy="1466698"/>
           </a:xfrm>
           <a:prstGeom prst="roundRect">
             <a:avLst>
-              <a:gd name="adj" fmla="val 9600"/>
+              <a:gd name="adj" fmla="val 7481"/>
             </a:avLst>
           </a:prstGeom>
           <a:solidFill>
@@ -18292,7 +18292,7 @@
         </p:nvSpPr>
         <p:spPr>
           <a:xfrm>
-            <a:off x="7799832" y="4645152"/>
+            <a:off x="7799832" y="4330598"/>
             <a:ext cx="3145536" cy="256032"/>
           </a:xfrm>
           <a:prstGeom prst="rect">
@@ -18331,8 +18331,8 @@
         </p:nvSpPr>
         <p:spPr>
           <a:xfrm>
-            <a:off x="7799832" y="4974336"/>
-            <a:ext cx="3145536" cy="576072"/>
+            <a:off x="7799832" y="4659782"/>
+            <a:ext cx="3145536" cy="899770"/>
           </a:xfrm>
           <a:prstGeom prst="rect">
             <a:avLst/>
@@ -18358,7 +18358,7 @@
                 <a:ea typeface="Aptos" pitchFamily="34" charset="-122"/>
                 <a:cs typeface="Aptos" pitchFamily="34" charset="-120"/>
               </a:rPr>
-              <a:t>Use the assignment to test whether you can explain the concept, apply it to a realistic public health situation, and.</a:t>
+              <a:t>Use the assignment to test whether you can explain the concept, apply it to a realistic public health situation, and identify what would need review before the work moves forward.</a:t>
             </a:r>
             <a:endParaRPr lang="en-US" sz="1320" dirty="0"/>
           </a:p>
@@ -18710,11 +18710,11 @@
         <p:spPr>
           <a:xfrm>
             <a:off x="7635240" y="1325880"/>
-            <a:ext cx="3474720" cy="1325880"/>
+            <a:ext cx="3474720" cy="1207008"/>
           </a:xfrm>
           <a:prstGeom prst="roundRect">
             <a:avLst>
-              <a:gd name="adj" fmla="val 8276"/>
+              <a:gd name="adj" fmla="val 9091"/>
             </a:avLst>
           </a:prstGeom>
           <a:solidFill>
@@ -18776,7 +18776,7 @@
         <p:spPr>
           <a:xfrm>
             <a:off x="7799832" y="1801368"/>
-            <a:ext cx="3145536" cy="758952"/>
+            <a:ext cx="3145536" cy="640080"/>
           </a:xfrm>
           <a:prstGeom prst="rect">
             <a:avLst/>
@@ -18816,12 +18816,12 @@
         </p:nvSpPr>
         <p:spPr>
           <a:xfrm>
-            <a:off x="7635240" y="2788920"/>
-            <a:ext cx="3474720" cy="1536192"/>
+            <a:off x="7635240" y="2670048"/>
+            <a:ext cx="3474720" cy="1377086"/>
           </a:xfrm>
           <a:prstGeom prst="roundRect">
             <a:avLst>
-              <a:gd name="adj" fmla="val 7143"/>
+              <a:gd name="adj" fmla="val 7968"/>
             </a:avLst>
           </a:prstGeom>
           <a:solidFill>
@@ -18843,7 +18843,7 @@
         </p:nvSpPr>
         <p:spPr>
           <a:xfrm>
-            <a:off x="7799832" y="2935224"/>
+            <a:off x="7799832" y="2816352"/>
             <a:ext cx="3145536" cy="256032"/>
           </a:xfrm>
           <a:prstGeom prst="rect">
@@ -18882,8 +18882,8 @@
         </p:nvSpPr>
         <p:spPr>
           <a:xfrm>
-            <a:off x="7818120" y="3300984"/>
-            <a:ext cx="3090672" cy="877824"/>
+            <a:off x="7818120" y="3182112"/>
+            <a:ext cx="3090672" cy="718718"/>
           </a:xfrm>
           <a:prstGeom prst="rect">
             <a:avLst/>
@@ -18940,12 +18940,12 @@
         </p:nvSpPr>
         <p:spPr>
           <a:xfrm>
-            <a:off x="7635240" y="4498848"/>
-            <a:ext cx="3474720" cy="1143000"/>
+            <a:off x="7635240" y="4184294"/>
+            <a:ext cx="3474720" cy="1466698"/>
           </a:xfrm>
           <a:prstGeom prst="roundRect">
             <a:avLst>
-              <a:gd name="adj" fmla="val 9600"/>
+              <a:gd name="adj" fmla="val 7481"/>
             </a:avLst>
           </a:prstGeom>
           <a:solidFill>
@@ -18967,7 +18967,7 @@
         </p:nvSpPr>
         <p:spPr>
           <a:xfrm>
-            <a:off x="7799832" y="4645152"/>
+            <a:off x="7799832" y="4330598"/>
             <a:ext cx="3145536" cy="256032"/>
           </a:xfrm>
           <a:prstGeom prst="rect">
@@ -19006,8 +19006,8 @@
         </p:nvSpPr>
         <p:spPr>
           <a:xfrm>
-            <a:off x="7799832" y="4974336"/>
-            <a:ext cx="3145536" cy="576072"/>
+            <a:off x="7799832" y="4659782"/>
+            <a:ext cx="3145536" cy="899770"/>
           </a:xfrm>
           <a:prstGeom prst="rect">
             <a:avLst/>
@@ -19033,7 +19033,7 @@
                 <a:ea typeface="Aptos" pitchFamily="34" charset="-122"/>
                 <a:cs typeface="Aptos" pitchFamily="34" charset="-120"/>
               </a:rPr>
-              <a:t>Use the assignment to test whether you can explain the concept, apply it to a realistic public health situation, and.</a:t>
+              <a:t>Use the assignment to test whether you can explain the concept, apply it to a realistic public health situation, and identify what would need review before the work moves forward.</a:t>
             </a:r>
             <a:endParaRPr lang="en-US" sz="1320" dirty="0"/>
           </a:p>
@@ -19402,11 +19402,11 @@
         <p:spPr>
           <a:xfrm>
             <a:off x="7635240" y="1325880"/>
-            <a:ext cx="3474720" cy="1325880"/>
+            <a:ext cx="3474720" cy="1255471"/>
           </a:xfrm>
           <a:prstGeom prst="roundRect">
             <a:avLst>
-              <a:gd name="adj" fmla="val 8276"/>
+              <a:gd name="adj" fmla="val 8740"/>
             </a:avLst>
           </a:prstGeom>
           <a:solidFill>
@@ -19468,7 +19468,7 @@
         <p:spPr>
           <a:xfrm>
             <a:off x="7799832" y="1801368"/>
-            <a:ext cx="3145536" cy="758952"/>
+            <a:ext cx="3145536" cy="688543"/>
           </a:xfrm>
           <a:prstGeom prst="rect">
             <a:avLst/>
@@ -19508,12 +19508,12 @@
         </p:nvSpPr>
         <p:spPr>
           <a:xfrm>
-            <a:off x="7635240" y="2788920"/>
-            <a:ext cx="3474720" cy="1536192"/>
+            <a:off x="7635240" y="2718511"/>
+            <a:ext cx="3474720" cy="1328623"/>
           </a:xfrm>
           <a:prstGeom prst="roundRect">
             <a:avLst>
-              <a:gd name="adj" fmla="val 7143"/>
+              <a:gd name="adj" fmla="val 8259"/>
             </a:avLst>
           </a:prstGeom>
           <a:solidFill>
@@ -19535,7 +19535,7 @@
         </p:nvSpPr>
         <p:spPr>
           <a:xfrm>
-            <a:off x="7799832" y="2935224"/>
+            <a:off x="7799832" y="2864815"/>
             <a:ext cx="3145536" cy="256032"/>
           </a:xfrm>
           <a:prstGeom prst="rect">
@@ -19574,8 +19574,8 @@
         </p:nvSpPr>
         <p:spPr>
           <a:xfrm>
-            <a:off x="7818120" y="3300984"/>
-            <a:ext cx="3090672" cy="877824"/>
+            <a:off x="7818120" y="3230575"/>
+            <a:ext cx="3090672" cy="670255"/>
           </a:xfrm>
           <a:prstGeom prst="rect">
             <a:avLst/>
@@ -19649,12 +19649,12 @@
         </p:nvSpPr>
         <p:spPr>
           <a:xfrm>
-            <a:off x="7635240" y="4498848"/>
-            <a:ext cx="3474720" cy="1143000"/>
+            <a:off x="7635240" y="4184294"/>
+            <a:ext cx="3474720" cy="1466698"/>
           </a:xfrm>
           <a:prstGeom prst="roundRect">
             <a:avLst>
-              <a:gd name="adj" fmla="val 9600"/>
+              <a:gd name="adj" fmla="val 7481"/>
             </a:avLst>
           </a:prstGeom>
           <a:solidFill>
@@ -19676,7 +19676,7 @@
         </p:nvSpPr>
         <p:spPr>
           <a:xfrm>
-            <a:off x="7799832" y="4645152"/>
+            <a:off x="7799832" y="4330598"/>
             <a:ext cx="3145536" cy="256032"/>
           </a:xfrm>
           <a:prstGeom prst="rect">
@@ -19715,8 +19715,8 @@
         </p:nvSpPr>
         <p:spPr>
           <a:xfrm>
-            <a:off x="7799832" y="4974336"/>
-            <a:ext cx="3145536" cy="576072"/>
+            <a:off x="7799832" y="4659782"/>
+            <a:ext cx="3145536" cy="899770"/>
           </a:xfrm>
           <a:prstGeom prst="rect">
             <a:avLst/>
@@ -19742,7 +19742,7 @@
                 <a:ea typeface="Aptos" pitchFamily="34" charset="-122"/>
                 <a:cs typeface="Aptos" pitchFamily="34" charset="-120"/>
               </a:rPr>
-              <a:t>Connect the concept to public health purpose, responsible use, required safeguards, documentation, and the next action a.</a:t>
+              <a:t>Connect the concept to public health purpose, responsible use, required safeguards, documentation, and the next action a department should take.</a:t>
             </a:r>
             <a:endParaRPr lang="en-US" sz="1320" dirty="0"/>
           </a:p>
@@ -20111,11 +20111,11 @@
         <p:spPr>
           <a:xfrm>
             <a:off x="7635240" y="1325880"/>
-            <a:ext cx="3474720" cy="1325880"/>
+            <a:ext cx="3474720" cy="1255471"/>
           </a:xfrm>
           <a:prstGeom prst="roundRect">
             <a:avLst>
-              <a:gd name="adj" fmla="val 8276"/>
+              <a:gd name="adj" fmla="val 8740"/>
             </a:avLst>
           </a:prstGeom>
           <a:solidFill>
@@ -20177,7 +20177,7 @@
         <p:spPr>
           <a:xfrm>
             <a:off x="7799832" y="1801368"/>
-            <a:ext cx="3145536" cy="758952"/>
+            <a:ext cx="3145536" cy="688543"/>
           </a:xfrm>
           <a:prstGeom prst="rect">
             <a:avLst/>
@@ -20217,12 +20217,12 @@
         </p:nvSpPr>
         <p:spPr>
           <a:xfrm>
-            <a:off x="7635240" y="2788920"/>
-            <a:ext cx="3474720" cy="1536192"/>
+            <a:off x="7635240" y="2718511"/>
+            <a:ext cx="3474720" cy="1328623"/>
           </a:xfrm>
           <a:prstGeom prst="roundRect">
             <a:avLst>
-              <a:gd name="adj" fmla="val 7143"/>
+              <a:gd name="adj" fmla="val 8259"/>
             </a:avLst>
           </a:prstGeom>
           <a:solidFill>
@@ -20244,7 +20244,7 @@
         </p:nvSpPr>
         <p:spPr>
           <a:xfrm>
-            <a:off x="7799832" y="2935224"/>
+            <a:off x="7799832" y="2864815"/>
             <a:ext cx="3145536" cy="256032"/>
           </a:xfrm>
           <a:prstGeom prst="rect">
@@ -20283,8 +20283,8 @@
         </p:nvSpPr>
         <p:spPr>
           <a:xfrm>
-            <a:off x="7818120" y="3300984"/>
-            <a:ext cx="3090672" cy="877824"/>
+            <a:off x="7818120" y="3230575"/>
+            <a:ext cx="3090672" cy="670255"/>
           </a:xfrm>
           <a:prstGeom prst="rect">
             <a:avLst/>
@@ -20358,12 +20358,12 @@
         </p:nvSpPr>
         <p:spPr>
           <a:xfrm>
-            <a:off x="7635240" y="4498848"/>
-            <a:ext cx="3474720" cy="1143000"/>
+            <a:off x="7635240" y="4184294"/>
+            <a:ext cx="3474720" cy="1466698"/>
           </a:xfrm>
           <a:prstGeom prst="roundRect">
             <a:avLst>
-              <a:gd name="adj" fmla="val 9600"/>
+              <a:gd name="adj" fmla="val 7481"/>
             </a:avLst>
           </a:prstGeom>
           <a:solidFill>
@@ -20385,7 +20385,7 @@
         </p:nvSpPr>
         <p:spPr>
           <a:xfrm>
-            <a:off x="7799832" y="4645152"/>
+            <a:off x="7799832" y="4330598"/>
             <a:ext cx="3145536" cy="256032"/>
           </a:xfrm>
           <a:prstGeom prst="rect">
@@ -20424,8 +20424,8 @@
         </p:nvSpPr>
         <p:spPr>
           <a:xfrm>
-            <a:off x="7799832" y="4974336"/>
-            <a:ext cx="3145536" cy="576072"/>
+            <a:off x="7799832" y="4659782"/>
+            <a:ext cx="3145536" cy="899770"/>
           </a:xfrm>
           <a:prstGeom prst="rect">
             <a:avLst/>
@@ -20451,7 +20451,7 @@
                 <a:ea typeface="Aptos" pitchFamily="34" charset="-122"/>
                 <a:cs typeface="Aptos" pitchFamily="34" charset="-120"/>
               </a:rPr>
-              <a:t>Connect the concept to public health purpose, responsible use, required safeguards, documentation, and the next action a.</a:t>
+              <a:t>Connect the concept to public health purpose, responsible use, required safeguards, documentation, and the next action a department should take.</a:t>
             </a:r>
             <a:endParaRPr lang="en-US" sz="1320" dirty="0"/>
           </a:p>
@@ -20820,11 +20820,11 @@
         <p:spPr>
           <a:xfrm>
             <a:off x="7635240" y="1325880"/>
-            <a:ext cx="3474720" cy="1325880"/>
+            <a:ext cx="3474720" cy="1207008"/>
           </a:xfrm>
           <a:prstGeom prst="roundRect">
             <a:avLst>
-              <a:gd name="adj" fmla="val 8276"/>
+              <a:gd name="adj" fmla="val 9091"/>
             </a:avLst>
           </a:prstGeom>
           <a:solidFill>
@@ -20886,7 +20886,7 @@
         <p:spPr>
           <a:xfrm>
             <a:off x="7799832" y="1801368"/>
-            <a:ext cx="3145536" cy="758952"/>
+            <a:ext cx="3145536" cy="640080"/>
           </a:xfrm>
           <a:prstGeom prst="rect">
             <a:avLst/>
@@ -20912,7 +20912,7 @@
                 <a:ea typeface="Aptos" pitchFamily="34" charset="-122"/>
                 <a:cs typeface="Aptos" pitchFamily="34" charset="-120"/>
               </a:rPr>
-              <a:t>Large language model (LLM): A generative AI model trained on large bodies of text to produce,.</a:t>
+              <a:t>Large language model (LLM): A generative AI model trained on large bodies of text to.</a:t>
             </a:r>
             <a:endParaRPr lang="en-US" sz="1320" dirty="0"/>
           </a:p>
@@ -20926,12 +20926,12 @@
         </p:nvSpPr>
         <p:spPr>
           <a:xfrm>
-            <a:off x="7635240" y="2788920"/>
-            <a:ext cx="3474720" cy="1536192"/>
+            <a:off x="7635240" y="2670048"/>
+            <a:ext cx="3474720" cy="1377086"/>
           </a:xfrm>
           <a:prstGeom prst="roundRect">
             <a:avLst>
-              <a:gd name="adj" fmla="val 7143"/>
+              <a:gd name="adj" fmla="val 7968"/>
             </a:avLst>
           </a:prstGeom>
           <a:solidFill>
@@ -20953,7 +20953,7 @@
         </p:nvSpPr>
         <p:spPr>
           <a:xfrm>
-            <a:off x="7799832" y="2935224"/>
+            <a:off x="7799832" y="2816352"/>
             <a:ext cx="3145536" cy="256032"/>
           </a:xfrm>
           <a:prstGeom prst="rect">
@@ -20992,8 +20992,8 @@
         </p:nvSpPr>
         <p:spPr>
           <a:xfrm>
-            <a:off x="7818120" y="3300984"/>
-            <a:ext cx="3090672" cy="877824"/>
+            <a:off x="7818120" y="3182112"/>
+            <a:ext cx="3090672" cy="718718"/>
           </a:xfrm>
           <a:prstGeom prst="rect">
             <a:avLst/>
@@ -21067,12 +21067,12 @@
         </p:nvSpPr>
         <p:spPr>
           <a:xfrm>
-            <a:off x="7635240" y="4498848"/>
-            <a:ext cx="3474720" cy="1143000"/>
+            <a:off x="7635240" y="4184294"/>
+            <a:ext cx="3474720" cy="1466698"/>
           </a:xfrm>
           <a:prstGeom prst="roundRect">
             <a:avLst>
-              <a:gd name="adj" fmla="val 9600"/>
+              <a:gd name="adj" fmla="val 7481"/>
             </a:avLst>
           </a:prstGeom>
           <a:solidFill>
@@ -21094,7 +21094,7 @@
         </p:nvSpPr>
         <p:spPr>
           <a:xfrm>
-            <a:off x="7799832" y="4645152"/>
+            <a:off x="7799832" y="4330598"/>
             <a:ext cx="3145536" cy="256032"/>
           </a:xfrm>
           <a:prstGeom prst="rect">
@@ -21133,8 +21133,8 @@
         </p:nvSpPr>
         <p:spPr>
           <a:xfrm>
-            <a:off x="7799832" y="4974336"/>
-            <a:ext cx="3145536" cy="576072"/>
+            <a:off x="7799832" y="4659782"/>
+            <a:ext cx="3145536" cy="899770"/>
           </a:xfrm>
           <a:prstGeom prst="rect">
             <a:avLst/>
@@ -21160,7 +21160,7 @@
                 <a:ea typeface="Aptos" pitchFamily="34" charset="-122"/>
                 <a:cs typeface="Aptos" pitchFamily="34" charset="-120"/>
               </a:rPr>
-              <a:t>Connect the concept to public health purpose, responsible use, required safeguards, documentation, and the next action a.</a:t>
+              <a:t>Connect the concept to public health purpose, responsible use, required safeguards, documentation, and the next action a department should take.</a:t>
             </a:r>
             <a:endParaRPr lang="en-US" sz="1320" dirty="0"/>
           </a:p>

--- a/downloads/presentations/modules/int-100.pptx
+++ b/downloads/presentations/modules/int-100.pptx
@@ -3799,8 +3799,8 @@
         </p:nvSpPr>
         <p:spPr>
           <a:xfrm>
-            <a:off x="868680" y="1508760"/>
-            <a:ext cx="6309360" cy="4160520"/>
+            <a:off x="822960" y="1463040"/>
+            <a:ext cx="6565392" cy="4343400"/>
           </a:xfrm>
           <a:prstGeom prst="rect">
             <a:avLst/>
@@ -3818,7 +3818,7 @@
               <a:buNone/>
             </a:pPr>
             <a:r>
-              <a:rPr lang="en-US" sz="2100" dirty="0">
+              <a:rPr lang="en-US" sz="1920" dirty="0">
                 <a:solidFill>
                   <a:srgbClr val="003A63"/>
                 </a:solidFill>
@@ -3826,16 +3826,16 @@
                 <a:ea typeface="Aptos" pitchFamily="34" charset="-122"/>
                 <a:cs typeface="Aptos" pitchFamily="34" charset="-120"/>
               </a:rPr>
-              <a:t>• What AI Means for Public Health: Artificial intelligence is a family of methods that enable.</a:t>
-            </a:r>
-            <a:endParaRPr lang="en-US" sz="2100" dirty="0"/>
-          </a:p>
-          <a:p>
-            <a:pPr indent="0" marL="0">
-              <a:buNone/>
-            </a:pPr>
-            <a:r>
-              <a:rPr lang="en-US" sz="2100" dirty="0">
+              <a:t>• What AI Means for Public Health: Artificial intelligence is a family of.</a:t>
+            </a:r>
+            <a:endParaRPr lang="en-US" sz="1920" dirty="0"/>
+          </a:p>
+          <a:p>
+            <a:pPr indent="0" marL="0">
+              <a:buNone/>
+            </a:pPr>
+            <a:r>
+              <a:rPr lang="en-US" sz="1920" dirty="0">
                 <a:solidFill>
                   <a:srgbClr val="003A63"/>
                 </a:solidFill>
@@ -3843,9 +3843,9 @@
                 <a:ea typeface="Aptos" pitchFamily="34" charset="-122"/>
                 <a:cs typeface="Aptos" pitchFamily="34" charset="-120"/>
               </a:rPr>
-              <a:t>• For public health agencies, the most consequential near-term branches are generative AI and.</a:t>
-            </a:r>
-            <a:endParaRPr lang="en-US" sz="2100" dirty="0"/>
+              <a:t>• For public health agencies, the most consequential near-term branches are.</a:t>
+            </a:r>
+            <a:endParaRPr lang="en-US" sz="1920" dirty="0"/>
           </a:p>
         </p:txBody>
       </p:sp>
@@ -3857,12 +3857,12 @@
         </p:nvSpPr>
         <p:spPr>
           <a:xfrm>
-            <a:off x="7635240" y="1325880"/>
-            <a:ext cx="3474720" cy="1255471"/>
+            <a:off x="7543800" y="1325880"/>
+            <a:ext cx="3611880" cy="1261872"/>
           </a:xfrm>
           <a:prstGeom prst="roundRect">
             <a:avLst>
-              <a:gd name="adj" fmla="val 8740"/>
+              <a:gd name="adj" fmla="val 8696"/>
             </a:avLst>
           </a:prstGeom>
           <a:solidFill>
@@ -3884,8 +3884,8 @@
         </p:nvSpPr>
         <p:spPr>
           <a:xfrm>
-            <a:off x="7799832" y="1472184"/>
-            <a:ext cx="3145536" cy="256032"/>
+            <a:off x="7708392" y="1453896"/>
+            <a:ext cx="3282696" cy="228600"/>
           </a:xfrm>
           <a:prstGeom prst="rect">
             <a:avLst/>
@@ -3901,7 +3901,7 @@
               <a:buNone/>
             </a:pPr>
             <a:r>
-              <a:rPr lang="en-US" sz="1300" b="1" dirty="0">
+              <a:rPr lang="en-US" sz="1220" b="1" dirty="0">
                 <a:solidFill>
                   <a:srgbClr val="0068B7"/>
                 </a:solidFill>
@@ -3911,7 +3911,7 @@
               </a:rPr>
               <a:t>Core concept</a:t>
             </a:r>
-            <a:endParaRPr lang="en-US" sz="1300" dirty="0"/>
+            <a:endParaRPr lang="en-US" sz="1220" dirty="0"/>
           </a:p>
         </p:txBody>
       </p:sp>
@@ -3923,8 +3923,8 @@
         </p:nvSpPr>
         <p:spPr>
           <a:xfrm>
-            <a:off x="7799832" y="1801368"/>
-            <a:ext cx="3145536" cy="688543"/>
+            <a:off x="7708392" y="1764792"/>
+            <a:ext cx="3282696" cy="749808"/>
           </a:xfrm>
           <a:prstGeom prst="rect">
             <a:avLst/>
@@ -3942,7 +3942,7 @@
               <a:buNone/>
             </a:pPr>
             <a:r>
-              <a:rPr lang="en-US" sz="1320" dirty="0">
+              <a:rPr lang="en-US" sz="1220" dirty="0">
                 <a:solidFill>
                   <a:srgbClr val="17364A"/>
                 </a:solidFill>
@@ -3950,9 +3950,9 @@
                 <a:ea typeface="Aptos" pitchFamily="34" charset="-122"/>
                 <a:cs typeface="Aptos" pitchFamily="34" charset="-120"/>
               </a:rPr>
-              <a:t>What AI Means for Public Health: Artificial intelligence is a family of methods that enable computer.</a:t>
-            </a:r>
-            <a:endParaRPr lang="en-US" sz="1320" dirty="0"/>
+              <a:t>What AI Means for Public Health: Artificial intelligence is a family of methods.</a:t>
+            </a:r>
+            <a:endParaRPr lang="en-US" sz="1220" dirty="0"/>
           </a:p>
         </p:txBody>
       </p:sp>
@@ -3964,12 +3964,12 @@
         </p:nvSpPr>
         <p:spPr>
           <a:xfrm>
-            <a:off x="7635240" y="2718511"/>
-            <a:ext cx="3474720" cy="1328623"/>
+            <a:off x="7543800" y="2724912"/>
+            <a:ext cx="3611880" cy="1527048"/>
           </a:xfrm>
           <a:prstGeom prst="roundRect">
             <a:avLst>
-              <a:gd name="adj" fmla="val 8259"/>
+              <a:gd name="adj" fmla="val 7186"/>
             </a:avLst>
           </a:prstGeom>
           <a:solidFill>
@@ -3991,8 +3991,8 @@
         </p:nvSpPr>
         <p:spPr>
           <a:xfrm>
-            <a:off x="7799832" y="2864815"/>
-            <a:ext cx="3145536" cy="256032"/>
+            <a:off x="7708392" y="2852928"/>
+            <a:ext cx="3282696" cy="228600"/>
           </a:xfrm>
           <a:prstGeom prst="rect">
             <a:avLst/>
@@ -4008,7 +4008,7 @@
               <a:buNone/>
             </a:pPr>
             <a:r>
-              <a:rPr lang="en-US" sz="1300" b="1" dirty="0">
+              <a:rPr lang="en-US" sz="1220" b="1" dirty="0">
                 <a:solidFill>
                   <a:srgbClr val="0068B7"/>
                 </a:solidFill>
@@ -4018,7 +4018,7 @@
               </a:rPr>
               <a:t>Concept checkpoints</a:t>
             </a:r>
-            <a:endParaRPr lang="en-US" sz="1300" dirty="0"/>
+            <a:endParaRPr lang="en-US" sz="1220" dirty="0"/>
           </a:p>
         </p:txBody>
       </p:sp>
@@ -4030,8 +4030,8 @@
         </p:nvSpPr>
         <p:spPr>
           <a:xfrm>
-            <a:off x="7818120" y="3230575"/>
-            <a:ext cx="3090672" cy="670255"/>
+            <a:off x="7726680" y="3182112"/>
+            <a:ext cx="3227832" cy="960120"/>
           </a:xfrm>
           <a:prstGeom prst="rect">
             <a:avLst/>
@@ -4049,7 +4049,7 @@
               <a:buNone/>
             </a:pPr>
             <a:r>
-              <a:rPr lang="en-US" sz="1220" dirty="0">
+              <a:rPr lang="en-US" sz="1140" dirty="0">
                 <a:solidFill>
                   <a:srgbClr val="17364A"/>
                 </a:solidFill>
@@ -4057,16 +4057,16 @@
                 <a:ea typeface="Aptos" pitchFamily="34" charset="-122"/>
                 <a:cs typeface="Aptos" pitchFamily="34" charset="-120"/>
               </a:rPr>
-              <a:t>What AI Means for Public Health: Artificial intelligence is a.</a:t>
-            </a:r>
-            <a:endParaRPr lang="en-US" sz="1220" dirty="0"/>
-          </a:p>
-          <a:p>
-            <a:pPr indent="0" marL="0">
-              <a:buNone/>
-            </a:pPr>
-            <a:r>
-              <a:rPr lang="en-US" sz="1220" dirty="0">
+              <a:t>What AI Means for Public Health: Artificial.</a:t>
+            </a:r>
+            <a:endParaRPr lang="en-US" sz="1140" dirty="0"/>
+          </a:p>
+          <a:p>
+            <a:pPr indent="0" marL="0">
+              <a:buNone/>
+            </a:pPr>
+            <a:r>
+              <a:rPr lang="en-US" sz="1140" dirty="0">
                 <a:solidFill>
                   <a:srgbClr val="17364A"/>
                 </a:solidFill>
@@ -4074,9 +4074,9 @@
                 <a:ea typeface="Aptos" pitchFamily="34" charset="-122"/>
                 <a:cs typeface="Aptos" pitchFamily="34" charset="-120"/>
               </a:rPr>
-              <a:t>For public health agencies, the most consequential near-term.</a:t>
-            </a:r>
-            <a:endParaRPr lang="en-US" sz="1220" dirty="0"/>
+              <a:t>For public health agencies, the most consequential.</a:t>
+            </a:r>
+            <a:endParaRPr lang="en-US" sz="1140" dirty="0"/>
           </a:p>
         </p:txBody>
       </p:sp>
@@ -4088,12 +4088,12 @@
         </p:nvSpPr>
         <p:spPr>
           <a:xfrm>
-            <a:off x="7635240" y="4184294"/>
-            <a:ext cx="3474720" cy="1466698"/>
+            <a:off x="7543800" y="4389120"/>
+            <a:ext cx="3611880" cy="1261872"/>
           </a:xfrm>
           <a:prstGeom prst="roundRect">
             <a:avLst>
-              <a:gd name="adj" fmla="val 7481"/>
+              <a:gd name="adj" fmla="val 8696"/>
             </a:avLst>
           </a:prstGeom>
           <a:solidFill>
@@ -4115,8 +4115,8 @@
         </p:nvSpPr>
         <p:spPr>
           <a:xfrm>
-            <a:off x="7799832" y="4330598"/>
-            <a:ext cx="3145536" cy="256032"/>
+            <a:off x="7708392" y="4517136"/>
+            <a:ext cx="3282696" cy="228600"/>
           </a:xfrm>
           <a:prstGeom prst="rect">
             <a:avLst/>
@@ -4132,7 +4132,7 @@
               <a:buNone/>
             </a:pPr>
             <a:r>
-              <a:rPr lang="en-US" sz="1300" b="1" dirty="0">
+              <a:rPr lang="en-US" sz="1220" b="1" dirty="0">
                 <a:solidFill>
                   <a:srgbClr val="0068B7"/>
                 </a:solidFill>
@@ -4142,7 +4142,7 @@
               </a:rPr>
               <a:t>Apply it</a:t>
             </a:r>
-            <a:endParaRPr lang="en-US" sz="1300" dirty="0"/>
+            <a:endParaRPr lang="en-US" sz="1220" dirty="0"/>
           </a:p>
         </p:txBody>
       </p:sp>
@@ -4154,8 +4154,8 @@
         </p:nvSpPr>
         <p:spPr>
           <a:xfrm>
-            <a:off x="7799832" y="4659782"/>
-            <a:ext cx="3145536" cy="899770"/>
+            <a:off x="7708392" y="4828032"/>
+            <a:ext cx="3282696" cy="749808"/>
           </a:xfrm>
           <a:prstGeom prst="rect">
             <a:avLst/>
@@ -4173,7 +4173,7 @@
               <a:buNone/>
             </a:pPr>
             <a:r>
-              <a:rPr lang="en-US" sz="1320" dirty="0">
+              <a:rPr lang="en-US" sz="1220" dirty="0">
                 <a:solidFill>
                   <a:srgbClr val="17364A"/>
                 </a:solidFill>
@@ -4181,9 +4181,9 @@
                 <a:ea typeface="Aptos" pitchFamily="34" charset="-122"/>
                 <a:cs typeface="Aptos" pitchFamily="34" charset="-120"/>
               </a:rPr>
-              <a:t>Connect the concept to public health purpose, responsible use, required safeguards, documentation, and the next action a department should take.</a:t>
-            </a:r>
-            <a:endParaRPr lang="en-US" sz="1320" dirty="0"/>
+              <a:t>Connect the concept to public health purpose, responsible use, required.</a:t>
+            </a:r>
+            <a:endParaRPr lang="en-US" sz="1220" dirty="0"/>
           </a:p>
         </p:txBody>
       </p:sp>
@@ -4474,8 +4474,8 @@
         </p:nvSpPr>
         <p:spPr>
           <a:xfrm>
-            <a:off x="868680" y="1508760"/>
-            <a:ext cx="6309360" cy="4160520"/>
+            <a:off x="822960" y="1463040"/>
+            <a:ext cx="6565392" cy="4343400"/>
           </a:xfrm>
           <a:prstGeom prst="rect">
             <a:avLst/>
@@ -4493,7 +4493,7 @@
               <a:buNone/>
             </a:pPr>
             <a:r>
-              <a:rPr lang="en-US" sz="2100" dirty="0">
+              <a:rPr lang="en-US" sz="1920" dirty="0">
                 <a:solidFill>
                   <a:srgbClr val="003A63"/>
                 </a:solidFill>
@@ -4501,16 +4501,16 @@
                 <a:ea typeface="Aptos" pitchFamily="34" charset="-122"/>
                 <a:cs typeface="Aptos" pitchFamily="34" charset="-120"/>
               </a:rPr>
-              <a:t>• Artificial intelligence should be introduced as a set of capabilities rather than a single.</a:t>
-            </a:r>
-            <a:endParaRPr lang="en-US" sz="2100" dirty="0"/>
-          </a:p>
-          <a:p>
-            <a:pPr indent="0" marL="0">
-              <a:buNone/>
-            </a:pPr>
-            <a:r>
-              <a:rPr lang="en-US" sz="2100" dirty="0">
+              <a:t>• Artificial intelligence should be introduced as a set of capabilities rather.</a:t>
+            </a:r>
+            <a:endParaRPr lang="en-US" sz="1920" dirty="0"/>
+          </a:p>
+          <a:p>
+            <a:pPr indent="0" marL="0">
+              <a:buNone/>
+            </a:pPr>
+            <a:r>
+              <a:rPr lang="en-US" sz="1920" dirty="0">
                 <a:solidFill>
                   <a:srgbClr val="003A63"/>
                 </a:solidFill>
@@ -4518,16 +4518,16 @@
                 <a:ea typeface="Aptos" pitchFamily="34" charset="-122"/>
                 <a:cs typeface="Aptos" pitchFamily="34" charset="-120"/>
               </a:rPr>
-              <a:t>• In public health, AI may appear as predictive analytics, classification, natural-language.</a:t>
-            </a:r>
-            <a:endParaRPr lang="en-US" sz="2100" dirty="0"/>
-          </a:p>
-          <a:p>
-            <a:pPr indent="0" marL="0">
-              <a:buNone/>
-            </a:pPr>
-            <a:r>
-              <a:rPr lang="en-US" sz="2100" dirty="0">
+              <a:t>• In public health, AI may appear as predictive analytics, classification,.</a:t>
+            </a:r>
+            <a:endParaRPr lang="en-US" sz="1920" dirty="0"/>
+          </a:p>
+          <a:p>
+            <a:pPr indent="0" marL="0">
+              <a:buNone/>
+            </a:pPr>
+            <a:r>
+              <a:rPr lang="en-US" sz="1920" dirty="0">
                 <a:solidFill>
                   <a:srgbClr val="003A63"/>
                 </a:solidFill>
@@ -4535,9 +4535,9 @@
                 <a:ea typeface="Aptos" pitchFamily="34" charset="-122"/>
                 <a:cs typeface="Aptos" pitchFamily="34" charset="-120"/>
               </a:rPr>
-              <a:t>• You need to recognize these differences because each capability has different risks, data.</a:t>
-            </a:r>
-            <a:endParaRPr lang="en-US" sz="2100" dirty="0"/>
+              <a:t>• You need to recognize these differences because each capability has.</a:t>
+            </a:r>
+            <a:endParaRPr lang="en-US" sz="1920" dirty="0"/>
           </a:p>
         </p:txBody>
       </p:sp>
@@ -4549,12 +4549,12 @@
         </p:nvSpPr>
         <p:spPr>
           <a:xfrm>
-            <a:off x="7635240" y="1325880"/>
-            <a:ext cx="3474720" cy="1255471"/>
+            <a:off x="7543800" y="1325880"/>
+            <a:ext cx="3611880" cy="1261872"/>
           </a:xfrm>
           <a:prstGeom prst="roundRect">
             <a:avLst>
-              <a:gd name="adj" fmla="val 8740"/>
+              <a:gd name="adj" fmla="val 8696"/>
             </a:avLst>
           </a:prstGeom>
           <a:solidFill>
@@ -4576,8 +4576,8 @@
         </p:nvSpPr>
         <p:spPr>
           <a:xfrm>
-            <a:off x="7799832" y="1472184"/>
-            <a:ext cx="3145536" cy="256032"/>
+            <a:off x="7708392" y="1453896"/>
+            <a:ext cx="3282696" cy="228600"/>
           </a:xfrm>
           <a:prstGeom prst="rect">
             <a:avLst/>
@@ -4593,7 +4593,7 @@
               <a:buNone/>
             </a:pPr>
             <a:r>
-              <a:rPr lang="en-US" sz="1300" b="1" dirty="0">
+              <a:rPr lang="en-US" sz="1220" b="1" dirty="0">
                 <a:solidFill>
                   <a:srgbClr val="0068B7"/>
                 </a:solidFill>
@@ -4603,7 +4603,7 @@
               </a:rPr>
               <a:t>Core concept</a:t>
             </a:r>
-            <a:endParaRPr lang="en-US" sz="1300" dirty="0"/>
+            <a:endParaRPr lang="en-US" sz="1220" dirty="0"/>
           </a:p>
         </p:txBody>
       </p:sp>
@@ -4615,8 +4615,8 @@
         </p:nvSpPr>
         <p:spPr>
           <a:xfrm>
-            <a:off x="7799832" y="1801368"/>
-            <a:ext cx="3145536" cy="688543"/>
+            <a:off x="7708392" y="1764792"/>
+            <a:ext cx="3282696" cy="749808"/>
           </a:xfrm>
           <a:prstGeom prst="rect">
             <a:avLst/>
@@ -4634,7 +4634,7 @@
               <a:buNone/>
             </a:pPr>
             <a:r>
-              <a:rPr lang="en-US" sz="1320" dirty="0">
+              <a:rPr lang="en-US" sz="1220" dirty="0">
                 <a:solidFill>
                   <a:srgbClr val="17364A"/>
                 </a:solidFill>
@@ -4642,9 +4642,9 @@
                 <a:ea typeface="Aptos" pitchFamily="34" charset="-122"/>
                 <a:cs typeface="Aptos" pitchFamily="34" charset="-120"/>
               </a:rPr>
-              <a:t>Artificial intelligence should be introduced as a set of capabilities rather than a single product.</a:t>
-            </a:r>
-            <a:endParaRPr lang="en-US" sz="1320" dirty="0"/>
+              <a:t>Artificial intelligence should be introduced as a set of capabilities rather.</a:t>
+            </a:r>
+            <a:endParaRPr lang="en-US" sz="1220" dirty="0"/>
           </a:p>
         </p:txBody>
       </p:sp>
@@ -4656,12 +4656,12 @@
         </p:nvSpPr>
         <p:spPr>
           <a:xfrm>
-            <a:off x="7635240" y="2718511"/>
-            <a:ext cx="3474720" cy="1328623"/>
+            <a:off x="7543800" y="2724912"/>
+            <a:ext cx="3611880" cy="1527048"/>
           </a:xfrm>
           <a:prstGeom prst="roundRect">
             <a:avLst>
-              <a:gd name="adj" fmla="val 8259"/>
+              <a:gd name="adj" fmla="val 7186"/>
             </a:avLst>
           </a:prstGeom>
           <a:solidFill>
@@ -4683,8 +4683,8 @@
         </p:nvSpPr>
         <p:spPr>
           <a:xfrm>
-            <a:off x="7799832" y="2864815"/>
-            <a:ext cx="3145536" cy="256032"/>
+            <a:off x="7708392" y="2852928"/>
+            <a:ext cx="3282696" cy="228600"/>
           </a:xfrm>
           <a:prstGeom prst="rect">
             <a:avLst/>
@@ -4700,7 +4700,7 @@
               <a:buNone/>
             </a:pPr>
             <a:r>
-              <a:rPr lang="en-US" sz="1300" b="1" dirty="0">
+              <a:rPr lang="en-US" sz="1220" b="1" dirty="0">
                 <a:solidFill>
                   <a:srgbClr val="0068B7"/>
                 </a:solidFill>
@@ -4710,7 +4710,7 @@
               </a:rPr>
               <a:t>Concept checkpoints</a:t>
             </a:r>
-            <a:endParaRPr lang="en-US" sz="1300" dirty="0"/>
+            <a:endParaRPr lang="en-US" sz="1220" dirty="0"/>
           </a:p>
         </p:txBody>
       </p:sp>
@@ -4722,8 +4722,8 @@
         </p:nvSpPr>
         <p:spPr>
           <a:xfrm>
-            <a:off x="7818120" y="3230575"/>
-            <a:ext cx="3090672" cy="670255"/>
+            <a:off x="7726680" y="3182112"/>
+            <a:ext cx="3227832" cy="960120"/>
           </a:xfrm>
           <a:prstGeom prst="rect">
             <a:avLst/>
@@ -4741,7 +4741,7 @@
               <a:buNone/>
             </a:pPr>
             <a:r>
-              <a:rPr lang="en-US" sz="1220" dirty="0">
+              <a:rPr lang="en-US" sz="1140" dirty="0">
                 <a:solidFill>
                   <a:srgbClr val="17364A"/>
                 </a:solidFill>
@@ -4749,16 +4749,16 @@
                 <a:ea typeface="Aptos" pitchFamily="34" charset="-122"/>
                 <a:cs typeface="Aptos" pitchFamily="34" charset="-120"/>
               </a:rPr>
-              <a:t>In public health, AI may appear as predictive analytics,.</a:t>
-            </a:r>
-            <a:endParaRPr lang="en-US" sz="1220" dirty="0"/>
-          </a:p>
-          <a:p>
-            <a:pPr indent="0" marL="0">
-              <a:buNone/>
-            </a:pPr>
-            <a:r>
-              <a:rPr lang="en-US" sz="1220" dirty="0">
+              <a:t>In public health, AI may appear as predictive.</a:t>
+            </a:r>
+            <a:endParaRPr lang="en-US" sz="1140" dirty="0"/>
+          </a:p>
+          <a:p>
+            <a:pPr indent="0" marL="0">
+              <a:buNone/>
+            </a:pPr>
+            <a:r>
+              <a:rPr lang="en-US" sz="1140" dirty="0">
                 <a:solidFill>
                   <a:srgbClr val="17364A"/>
                 </a:solidFill>
@@ -4766,16 +4766,16 @@
                 <a:ea typeface="Aptos" pitchFamily="34" charset="-122"/>
                 <a:cs typeface="Aptos" pitchFamily="34" charset="-120"/>
               </a:rPr>
-              <a:t>You need to recognize these differences because each capability.</a:t>
-            </a:r>
-            <a:endParaRPr lang="en-US" sz="1220" dirty="0"/>
-          </a:p>
-          <a:p>
-            <a:pPr indent="0" marL="0">
-              <a:buNone/>
-            </a:pPr>
-            <a:r>
-              <a:rPr lang="en-US" sz="1220" dirty="0">
+              <a:t>You need to recognize these differences because.</a:t>
+            </a:r>
+            <a:endParaRPr lang="en-US" sz="1140" dirty="0"/>
+          </a:p>
+          <a:p>
+            <a:pPr indent="0" marL="0">
+              <a:buNone/>
+            </a:pPr>
+            <a:r>
+              <a:rPr lang="en-US" sz="1140" dirty="0">
                 <a:solidFill>
                   <a:srgbClr val="17364A"/>
                 </a:solidFill>
@@ -4783,9 +4783,9 @@
                 <a:ea typeface="Aptos" pitchFamily="34" charset="-122"/>
                 <a:cs typeface="Aptos" pitchFamily="34" charset="-120"/>
               </a:rPr>
-              <a:t>A shared foundation also helps departments avoid technology-first.</a:t>
-            </a:r>
-            <a:endParaRPr lang="en-US" sz="1220" dirty="0"/>
+              <a:t>A shared foundation also helps departments avoid.</a:t>
+            </a:r>
+            <a:endParaRPr lang="en-US" sz="1140" dirty="0"/>
           </a:p>
         </p:txBody>
       </p:sp>
@@ -4797,12 +4797,12 @@
         </p:nvSpPr>
         <p:spPr>
           <a:xfrm>
-            <a:off x="7635240" y="4184294"/>
-            <a:ext cx="3474720" cy="1466698"/>
+            <a:off x="7543800" y="4389120"/>
+            <a:ext cx="3611880" cy="1261872"/>
           </a:xfrm>
           <a:prstGeom prst="roundRect">
             <a:avLst>
-              <a:gd name="adj" fmla="val 7481"/>
+              <a:gd name="adj" fmla="val 8696"/>
             </a:avLst>
           </a:prstGeom>
           <a:solidFill>
@@ -4824,8 +4824,8 @@
         </p:nvSpPr>
         <p:spPr>
           <a:xfrm>
-            <a:off x="7799832" y="4330598"/>
-            <a:ext cx="3145536" cy="256032"/>
+            <a:off x="7708392" y="4517136"/>
+            <a:ext cx="3282696" cy="228600"/>
           </a:xfrm>
           <a:prstGeom prst="rect">
             <a:avLst/>
@@ -4841,7 +4841,7 @@
               <a:buNone/>
             </a:pPr>
             <a:r>
-              <a:rPr lang="en-US" sz="1300" b="1" dirty="0">
+              <a:rPr lang="en-US" sz="1220" b="1" dirty="0">
                 <a:solidFill>
                   <a:srgbClr val="0068B7"/>
                 </a:solidFill>
@@ -4851,7 +4851,7 @@
               </a:rPr>
               <a:t>Apply it</a:t>
             </a:r>
-            <a:endParaRPr lang="en-US" sz="1300" dirty="0"/>
+            <a:endParaRPr lang="en-US" sz="1220" dirty="0"/>
           </a:p>
         </p:txBody>
       </p:sp>
@@ -4863,8 +4863,8 @@
         </p:nvSpPr>
         <p:spPr>
           <a:xfrm>
-            <a:off x="7799832" y="4659782"/>
-            <a:ext cx="3145536" cy="899770"/>
+            <a:off x="7708392" y="4828032"/>
+            <a:ext cx="3282696" cy="749808"/>
           </a:xfrm>
           <a:prstGeom prst="rect">
             <a:avLst/>
@@ -4882,7 +4882,7 @@
               <a:buNone/>
             </a:pPr>
             <a:r>
-              <a:rPr lang="en-US" sz="1320" dirty="0">
+              <a:rPr lang="en-US" sz="1220" dirty="0">
                 <a:solidFill>
                   <a:srgbClr val="17364A"/>
                 </a:solidFill>
@@ -4890,9 +4890,9 @@
                 <a:ea typeface="Aptos" pitchFamily="34" charset="-122"/>
                 <a:cs typeface="Aptos" pitchFamily="34" charset="-120"/>
               </a:rPr>
-              <a:t>Connect the concept to public health purpose, responsible use, required safeguards, documentation, and the next action a department should take.</a:t>
-            </a:r>
-            <a:endParaRPr lang="en-US" sz="1320" dirty="0"/>
+              <a:t>Connect the concept to public health purpose, responsible use, required.</a:t>
+            </a:r>
+            <a:endParaRPr lang="en-US" sz="1220" dirty="0"/>
           </a:p>
         </p:txBody>
       </p:sp>
@@ -5183,8 +5183,8 @@
         </p:nvSpPr>
         <p:spPr>
           <a:xfrm>
-            <a:off x="868680" y="1508760"/>
-            <a:ext cx="6309360" cy="4160520"/>
+            <a:off x="822960" y="1463040"/>
+            <a:ext cx="6565392" cy="4343400"/>
           </a:xfrm>
           <a:prstGeom prst="rect">
             <a:avLst/>
@@ -5202,7 +5202,7 @@
               <a:buNone/>
             </a:pPr>
             <a:r>
-              <a:rPr lang="en-US" sz="2100" dirty="0">
+              <a:rPr lang="en-US" sz="1920" dirty="0">
                 <a:solidFill>
                   <a:srgbClr val="003A63"/>
                 </a:solidFill>
@@ -5210,16 +5210,16 @@
                 <a:ea typeface="Aptos" pitchFamily="34" charset="-122"/>
                 <a:cs typeface="Aptos" pitchFamily="34" charset="-120"/>
               </a:rPr>
-              <a:t>• AI is not one technology or one product category. In public health, the word AI may refer to.</a:t>
-            </a:r>
-            <a:endParaRPr lang="en-US" sz="2100" dirty="0"/>
-          </a:p>
-          <a:p>
-            <a:pPr indent="0" marL="0">
-              <a:buNone/>
-            </a:pPr>
-            <a:r>
-              <a:rPr lang="en-US" sz="2100" dirty="0">
+              <a:t>• AI is not one technology or one product category. In public health, the word.</a:t>
+            </a:r>
+            <a:endParaRPr lang="en-US" sz="1920" dirty="0"/>
+          </a:p>
+          <a:p>
+            <a:pPr indent="0" marL="0">
+              <a:buNone/>
+            </a:pPr>
+            <a:r>
+              <a:rPr lang="en-US" sz="1920" dirty="0">
                 <a:solidFill>
                   <a:srgbClr val="003A63"/>
                 </a:solidFill>
@@ -5227,16 +5227,16 @@
                 <a:ea typeface="Aptos" pitchFamily="34" charset="-122"/>
                 <a:cs typeface="Aptos" pitchFamily="34" charset="-120"/>
               </a:rPr>
-              <a:t>• Generative AI produces new content from prompts and source material. It can draft, summarize,.</a:t>
-            </a:r>
-            <a:endParaRPr lang="en-US" sz="2100" dirty="0"/>
-          </a:p>
-          <a:p>
-            <a:pPr indent="0" marL="0">
-              <a:buNone/>
-            </a:pPr>
-            <a:r>
-              <a:rPr lang="en-US" sz="2100" dirty="0">
+              <a:t>• Generative AI produces new content from prompts and source material. It can.</a:t>
+            </a:r>
+            <a:endParaRPr lang="en-US" sz="1920" dirty="0"/>
+          </a:p>
+          <a:p>
+            <a:pPr indent="0" marL="0">
+              <a:buNone/>
+            </a:pPr>
+            <a:r>
+              <a:rPr lang="en-US" sz="1920" dirty="0">
                 <a:solidFill>
                   <a:srgbClr val="003A63"/>
                 </a:solidFill>
@@ -5244,9 +5244,9 @@
                 <a:ea typeface="Aptos" pitchFamily="34" charset="-122"/>
                 <a:cs typeface="Aptos" pitchFamily="34" charset="-120"/>
               </a:rPr>
-              <a:t>• Agentic AI can coordinate a sequence of actions across systems under defined rules. This may.</a:t>
-            </a:r>
-            <a:endParaRPr lang="en-US" sz="2100" dirty="0"/>
+              <a:t>• Agentic AI can coordinate a sequence of actions across systems under defined.</a:t>
+            </a:r>
+            <a:endParaRPr lang="en-US" sz="1920" dirty="0"/>
           </a:p>
         </p:txBody>
       </p:sp>
@@ -5258,12 +5258,12 @@
         </p:nvSpPr>
         <p:spPr>
           <a:xfrm>
-            <a:off x="7635240" y="1325880"/>
-            <a:ext cx="3474720" cy="1255471"/>
+            <a:off x="7543800" y="1325880"/>
+            <a:ext cx="3611880" cy="1261872"/>
           </a:xfrm>
           <a:prstGeom prst="roundRect">
             <a:avLst>
-              <a:gd name="adj" fmla="val 8740"/>
+              <a:gd name="adj" fmla="val 8696"/>
             </a:avLst>
           </a:prstGeom>
           <a:solidFill>
@@ -5285,8 +5285,8 @@
         </p:nvSpPr>
         <p:spPr>
           <a:xfrm>
-            <a:off x="7799832" y="1472184"/>
-            <a:ext cx="3145536" cy="256032"/>
+            <a:off x="7708392" y="1453896"/>
+            <a:ext cx="3282696" cy="228600"/>
           </a:xfrm>
           <a:prstGeom prst="rect">
             <a:avLst/>
@@ -5302,7 +5302,7 @@
               <a:buNone/>
             </a:pPr>
             <a:r>
-              <a:rPr lang="en-US" sz="1300" b="1" dirty="0">
+              <a:rPr lang="en-US" sz="1220" b="1" dirty="0">
                 <a:solidFill>
                   <a:srgbClr val="0068B7"/>
                 </a:solidFill>
@@ -5312,7 +5312,7 @@
               </a:rPr>
               <a:t>Core concept</a:t>
             </a:r>
-            <a:endParaRPr lang="en-US" sz="1300" dirty="0"/>
+            <a:endParaRPr lang="en-US" sz="1220" dirty="0"/>
           </a:p>
         </p:txBody>
       </p:sp>
@@ -5324,8 +5324,8 @@
         </p:nvSpPr>
         <p:spPr>
           <a:xfrm>
-            <a:off x="7799832" y="1801368"/>
-            <a:ext cx="3145536" cy="688543"/>
+            <a:off x="7708392" y="1764792"/>
+            <a:ext cx="3282696" cy="749808"/>
           </a:xfrm>
           <a:prstGeom prst="rect">
             <a:avLst/>
@@ -5343,7 +5343,7 @@
               <a:buNone/>
             </a:pPr>
             <a:r>
-              <a:rPr lang="en-US" sz="1320" dirty="0">
+              <a:rPr lang="en-US" sz="1220" dirty="0">
                 <a:solidFill>
                   <a:srgbClr val="17364A"/>
                 </a:solidFill>
@@ -5351,9 +5351,9 @@
                 <a:ea typeface="Aptos" pitchFamily="34" charset="-122"/>
                 <a:cs typeface="Aptos" pitchFamily="34" charset="-120"/>
               </a:rPr>
-              <a:t>AI is not one technology or one product category. In public health, the word AI may refer to predictive.</a:t>
-            </a:r>
-            <a:endParaRPr lang="en-US" sz="1320" dirty="0"/>
+              <a:t>AI is not one technology or one product category. In public health, the word AI.</a:t>
+            </a:r>
+            <a:endParaRPr lang="en-US" sz="1220" dirty="0"/>
           </a:p>
         </p:txBody>
       </p:sp>
@@ -5365,12 +5365,12 @@
         </p:nvSpPr>
         <p:spPr>
           <a:xfrm>
-            <a:off x="7635240" y="2718511"/>
-            <a:ext cx="3474720" cy="1328623"/>
+            <a:off x="7543800" y="2724912"/>
+            <a:ext cx="3611880" cy="1527048"/>
           </a:xfrm>
           <a:prstGeom prst="roundRect">
             <a:avLst>
-              <a:gd name="adj" fmla="val 8259"/>
+              <a:gd name="adj" fmla="val 7186"/>
             </a:avLst>
           </a:prstGeom>
           <a:solidFill>
@@ -5392,8 +5392,8 @@
         </p:nvSpPr>
         <p:spPr>
           <a:xfrm>
-            <a:off x="7799832" y="2864815"/>
-            <a:ext cx="3145536" cy="256032"/>
+            <a:off x="7708392" y="2852928"/>
+            <a:ext cx="3282696" cy="228600"/>
           </a:xfrm>
           <a:prstGeom prst="rect">
             <a:avLst/>
@@ -5409,7 +5409,7 @@
               <a:buNone/>
             </a:pPr>
             <a:r>
-              <a:rPr lang="en-US" sz="1300" b="1" dirty="0">
+              <a:rPr lang="en-US" sz="1220" b="1" dirty="0">
                 <a:solidFill>
                   <a:srgbClr val="0068B7"/>
                 </a:solidFill>
@@ -5419,7 +5419,7 @@
               </a:rPr>
               <a:t>Concept checkpoints</a:t>
             </a:r>
-            <a:endParaRPr lang="en-US" sz="1300" dirty="0"/>
+            <a:endParaRPr lang="en-US" sz="1220" dirty="0"/>
           </a:p>
         </p:txBody>
       </p:sp>
@@ -5431,8 +5431,8 @@
         </p:nvSpPr>
         <p:spPr>
           <a:xfrm>
-            <a:off x="7818120" y="3230575"/>
-            <a:ext cx="3090672" cy="670255"/>
+            <a:off x="7726680" y="3182112"/>
+            <a:ext cx="3227832" cy="960120"/>
           </a:xfrm>
           <a:prstGeom prst="rect">
             <a:avLst/>
@@ -5450,7 +5450,7 @@
               <a:buNone/>
             </a:pPr>
             <a:r>
-              <a:rPr lang="en-US" sz="1220" dirty="0">
+              <a:rPr lang="en-US" sz="1140" dirty="0">
                 <a:solidFill>
                   <a:srgbClr val="17364A"/>
                 </a:solidFill>
@@ -5460,14 +5460,14 @@
               </a:rPr>
               <a:t>AI is not one technology or one product category.</a:t>
             </a:r>
-            <a:endParaRPr lang="en-US" sz="1220" dirty="0"/>
-          </a:p>
-          <a:p>
-            <a:pPr indent="0" marL="0">
-              <a:buNone/>
-            </a:pPr>
-            <a:r>
-              <a:rPr lang="en-US" sz="1220" dirty="0">
+            <a:endParaRPr lang="en-US" sz="1140" dirty="0"/>
+          </a:p>
+          <a:p>
+            <a:pPr indent="0" marL="0">
+              <a:buNone/>
+            </a:pPr>
+            <a:r>
+              <a:rPr lang="en-US" sz="1140" dirty="0">
                 <a:solidFill>
                   <a:srgbClr val="17364A"/>
                 </a:solidFill>
@@ -5475,16 +5475,16 @@
                 <a:ea typeface="Aptos" pitchFamily="34" charset="-122"/>
                 <a:cs typeface="Aptos" pitchFamily="34" charset="-120"/>
               </a:rPr>
-              <a:t>In public health, the word AI may refer to predictive models,.</a:t>
-            </a:r>
-            <a:endParaRPr lang="en-US" sz="1220" dirty="0"/>
-          </a:p>
-          <a:p>
-            <a:pPr indent="0" marL="0">
-              <a:buNone/>
-            </a:pPr>
-            <a:r>
-              <a:rPr lang="en-US" sz="1220" dirty="0">
+              <a:t>In public health, the word AI may refer to.</a:t>
+            </a:r>
+            <a:endParaRPr lang="en-US" sz="1140" dirty="0"/>
+          </a:p>
+          <a:p>
+            <a:pPr indent="0" marL="0">
+              <a:buNone/>
+            </a:pPr>
+            <a:r>
+              <a:rPr lang="en-US" sz="1140" dirty="0">
                 <a:solidFill>
                   <a:srgbClr val="17364A"/>
                 </a:solidFill>
@@ -5492,9 +5492,9 @@
                 <a:ea typeface="Aptos" pitchFamily="34" charset="-122"/>
                 <a:cs typeface="Aptos" pitchFamily="34" charset="-120"/>
               </a:rPr>
-              <a:t>Treating these as interchangeable can lead to poor procurement.</a:t>
-            </a:r>
-            <a:endParaRPr lang="en-US" sz="1220" dirty="0"/>
+              <a:t>Treating these as interchangeable can lead to poor.</a:t>
+            </a:r>
+            <a:endParaRPr lang="en-US" sz="1140" dirty="0"/>
           </a:p>
         </p:txBody>
       </p:sp>
@@ -5506,12 +5506,12 @@
         </p:nvSpPr>
         <p:spPr>
           <a:xfrm>
-            <a:off x="7635240" y="4184294"/>
-            <a:ext cx="3474720" cy="1466698"/>
+            <a:off x="7543800" y="4389120"/>
+            <a:ext cx="3611880" cy="1261872"/>
           </a:xfrm>
           <a:prstGeom prst="roundRect">
             <a:avLst>
-              <a:gd name="adj" fmla="val 7481"/>
+              <a:gd name="adj" fmla="val 8696"/>
             </a:avLst>
           </a:prstGeom>
           <a:solidFill>
@@ -5533,8 +5533,8 @@
         </p:nvSpPr>
         <p:spPr>
           <a:xfrm>
-            <a:off x="7799832" y="4330598"/>
-            <a:ext cx="3145536" cy="256032"/>
+            <a:off x="7708392" y="4517136"/>
+            <a:ext cx="3282696" cy="228600"/>
           </a:xfrm>
           <a:prstGeom prst="rect">
             <a:avLst/>
@@ -5550,7 +5550,7 @@
               <a:buNone/>
             </a:pPr>
             <a:r>
-              <a:rPr lang="en-US" sz="1300" b="1" dirty="0">
+              <a:rPr lang="en-US" sz="1220" b="1" dirty="0">
                 <a:solidFill>
                   <a:srgbClr val="0068B7"/>
                 </a:solidFill>
@@ -5560,7 +5560,7 @@
               </a:rPr>
               <a:t>Apply it</a:t>
             </a:r>
-            <a:endParaRPr lang="en-US" sz="1300" dirty="0"/>
+            <a:endParaRPr lang="en-US" sz="1220" dirty="0"/>
           </a:p>
         </p:txBody>
       </p:sp>
@@ -5572,8 +5572,8 @@
         </p:nvSpPr>
         <p:spPr>
           <a:xfrm>
-            <a:off x="7799832" y="4659782"/>
-            <a:ext cx="3145536" cy="899770"/>
+            <a:off x="7708392" y="4828032"/>
+            <a:ext cx="3282696" cy="749808"/>
           </a:xfrm>
           <a:prstGeom prst="rect">
             <a:avLst/>
@@ -5591,7 +5591,7 @@
               <a:buNone/>
             </a:pPr>
             <a:r>
-              <a:rPr lang="en-US" sz="1320" dirty="0">
+              <a:rPr lang="en-US" sz="1220" dirty="0">
                 <a:solidFill>
                   <a:srgbClr val="17364A"/>
                 </a:solidFill>
@@ -5599,9 +5599,9 @@
                 <a:ea typeface="Aptos" pitchFamily="34" charset="-122"/>
                 <a:cs typeface="Aptos" pitchFamily="34" charset="-120"/>
               </a:rPr>
-              <a:t>Connect the concept to public health purpose, responsible use, required safeguards, documentation, and the next action a department should take.</a:t>
-            </a:r>
-            <a:endParaRPr lang="en-US" sz="1320" dirty="0"/>
+              <a:t>Connect the concept to public health purpose, responsible use, required.</a:t>
+            </a:r>
+            <a:endParaRPr lang="en-US" sz="1220" dirty="0"/>
           </a:p>
         </p:txBody>
       </p:sp>
@@ -5892,8 +5892,8 @@
         </p:nvSpPr>
         <p:spPr>
           <a:xfrm>
-            <a:off x="868680" y="1508760"/>
-            <a:ext cx="6309360" cy="4160520"/>
+            <a:off x="822960" y="1463040"/>
+            <a:ext cx="6565392" cy="4343400"/>
           </a:xfrm>
           <a:prstGeom prst="rect">
             <a:avLst/>
@@ -5911,7 +5911,7 @@
               <a:buNone/>
             </a:pPr>
             <a:r>
-              <a:rPr lang="en-US" sz="2100" dirty="0">
+              <a:rPr lang="en-US" sz="1920" dirty="0">
                 <a:solidFill>
                   <a:srgbClr val="003A63"/>
                 </a:solidFill>
@@ -5919,16 +5919,16 @@
                 <a:ea typeface="Aptos" pitchFamily="34" charset="-122"/>
                 <a:cs typeface="Aptos" pitchFamily="34" charset="-120"/>
               </a:rPr>
-              <a:t>• Artificial intelligence is best understood as a family of capabilities rather than a single.</a:t>
-            </a:r>
-            <a:endParaRPr lang="en-US" sz="2100" dirty="0"/>
-          </a:p>
-          <a:p>
-            <a:pPr indent="0" marL="0">
-              <a:buNone/>
-            </a:pPr>
-            <a:r>
-              <a:rPr lang="en-US" sz="2100" dirty="0">
+              <a:t>• Artificial intelligence is best understood as a family of capabilities.</a:t>
+            </a:r>
+            <a:endParaRPr lang="en-US" sz="1920" dirty="0"/>
+          </a:p>
+          <a:p>
+            <a:pPr indent="0" marL="0">
+              <a:buNone/>
+            </a:pPr>
+            <a:r>
+              <a:rPr lang="en-US" sz="1920" dirty="0">
                 <a:solidFill>
                   <a:srgbClr val="003A63"/>
                 </a:solidFill>
@@ -5936,16 +5936,16 @@
                 <a:ea typeface="Aptos" pitchFamily="34" charset="-122"/>
                 <a:cs typeface="Aptos" pitchFamily="34" charset="-120"/>
               </a:rPr>
-              <a:t>• Some AI systems classify records, some detect patterns, some predict possible outcomes, some.</a:t>
-            </a:r>
-            <a:endParaRPr lang="en-US" sz="2100" dirty="0"/>
-          </a:p>
-          <a:p>
-            <a:pPr indent="0" marL="0">
-              <a:buNone/>
-            </a:pPr>
-            <a:r>
-              <a:rPr lang="en-US" sz="2100" dirty="0">
+              <a:t>• Some AI systems classify records, some detect patterns, some predict.</a:t>
+            </a:r>
+            <a:endParaRPr lang="en-US" sz="1920" dirty="0"/>
+          </a:p>
+          <a:p>
+            <a:pPr indent="0" marL="0">
+              <a:buNone/>
+            </a:pPr>
+            <a:r>
+              <a:rPr lang="en-US" sz="1920" dirty="0">
                 <a:solidFill>
                   <a:srgbClr val="003A63"/>
                 </a:solidFill>
@@ -5953,9 +5953,9 @@
                 <a:ea typeface="Aptos" pitchFamily="34" charset="-122"/>
                 <a:cs typeface="Aptos" pitchFamily="34" charset="-120"/>
               </a:rPr>
-              <a:t>• This distinction matters because each capability has different data requirements, error.</a:t>
-            </a:r>
-            <a:endParaRPr lang="en-US" sz="2100" dirty="0"/>
+              <a:t>• This distinction matters because each capability has different data.</a:t>
+            </a:r>
+            <a:endParaRPr lang="en-US" sz="1920" dirty="0"/>
           </a:p>
         </p:txBody>
       </p:sp>
@@ -5967,12 +5967,12 @@
         </p:nvSpPr>
         <p:spPr>
           <a:xfrm>
-            <a:off x="7635240" y="1325880"/>
-            <a:ext cx="3474720" cy="1255471"/>
+            <a:off x="7543800" y="1325880"/>
+            <a:ext cx="3611880" cy="1261872"/>
           </a:xfrm>
           <a:prstGeom prst="roundRect">
             <a:avLst>
-              <a:gd name="adj" fmla="val 8740"/>
+              <a:gd name="adj" fmla="val 8696"/>
             </a:avLst>
           </a:prstGeom>
           <a:solidFill>
@@ -5994,8 +5994,8 @@
         </p:nvSpPr>
         <p:spPr>
           <a:xfrm>
-            <a:off x="7799832" y="1472184"/>
-            <a:ext cx="3145536" cy="256032"/>
+            <a:off x="7708392" y="1453896"/>
+            <a:ext cx="3282696" cy="228600"/>
           </a:xfrm>
           <a:prstGeom prst="rect">
             <a:avLst/>
@@ -6011,7 +6011,7 @@
               <a:buNone/>
             </a:pPr>
             <a:r>
-              <a:rPr lang="en-US" sz="1300" b="1" dirty="0">
+              <a:rPr lang="en-US" sz="1220" b="1" dirty="0">
                 <a:solidFill>
                   <a:srgbClr val="0068B7"/>
                 </a:solidFill>
@@ -6021,7 +6021,7 @@
               </a:rPr>
               <a:t>Core concept</a:t>
             </a:r>
-            <a:endParaRPr lang="en-US" sz="1300" dirty="0"/>
+            <a:endParaRPr lang="en-US" sz="1220" dirty="0"/>
           </a:p>
         </p:txBody>
       </p:sp>
@@ -6033,8 +6033,8 @@
         </p:nvSpPr>
         <p:spPr>
           <a:xfrm>
-            <a:off x="7799832" y="1801368"/>
-            <a:ext cx="3145536" cy="688543"/>
+            <a:off x="7708392" y="1764792"/>
+            <a:ext cx="3282696" cy="749808"/>
           </a:xfrm>
           <a:prstGeom prst="rect">
             <a:avLst/>
@@ -6052,7 +6052,7 @@
               <a:buNone/>
             </a:pPr>
             <a:r>
-              <a:rPr lang="en-US" sz="1320" dirty="0">
+              <a:rPr lang="en-US" sz="1220" dirty="0">
                 <a:solidFill>
                   <a:srgbClr val="17364A"/>
                 </a:solidFill>
@@ -6060,9 +6060,9 @@
                 <a:ea typeface="Aptos" pitchFamily="34" charset="-122"/>
                 <a:cs typeface="Aptos" pitchFamily="34" charset="-120"/>
               </a:rPr>
-              <a:t>Artificial intelligence is best understood as a family of capabilities rather than a single product.</a:t>
-            </a:r>
-            <a:endParaRPr lang="en-US" sz="1320" dirty="0"/>
+              <a:t>Artificial intelligence is best understood as a family of capabilities rather.</a:t>
+            </a:r>
+            <a:endParaRPr lang="en-US" sz="1220" dirty="0"/>
           </a:p>
         </p:txBody>
       </p:sp>
@@ -6074,12 +6074,12 @@
         </p:nvSpPr>
         <p:spPr>
           <a:xfrm>
-            <a:off x="7635240" y="2718511"/>
-            <a:ext cx="3474720" cy="1328623"/>
+            <a:off x="7543800" y="2724912"/>
+            <a:ext cx="3611880" cy="1527048"/>
           </a:xfrm>
           <a:prstGeom prst="roundRect">
             <a:avLst>
-              <a:gd name="adj" fmla="val 8259"/>
+              <a:gd name="adj" fmla="val 7186"/>
             </a:avLst>
           </a:prstGeom>
           <a:solidFill>
@@ -6101,8 +6101,8 @@
         </p:nvSpPr>
         <p:spPr>
           <a:xfrm>
-            <a:off x="7799832" y="2864815"/>
-            <a:ext cx="3145536" cy="256032"/>
+            <a:off x="7708392" y="2852928"/>
+            <a:ext cx="3282696" cy="228600"/>
           </a:xfrm>
           <a:prstGeom prst="rect">
             <a:avLst/>
@@ -6118,7 +6118,7 @@
               <a:buNone/>
             </a:pPr>
             <a:r>
-              <a:rPr lang="en-US" sz="1300" b="1" dirty="0">
+              <a:rPr lang="en-US" sz="1220" b="1" dirty="0">
                 <a:solidFill>
                   <a:srgbClr val="0068B7"/>
                 </a:solidFill>
@@ -6128,7 +6128,7 @@
               </a:rPr>
               <a:t>Concept checkpoints</a:t>
             </a:r>
-            <a:endParaRPr lang="en-US" sz="1300" dirty="0"/>
+            <a:endParaRPr lang="en-US" sz="1220" dirty="0"/>
           </a:p>
         </p:txBody>
       </p:sp>
@@ -6140,8 +6140,8 @@
         </p:nvSpPr>
         <p:spPr>
           <a:xfrm>
-            <a:off x="7818120" y="3230575"/>
-            <a:ext cx="3090672" cy="670255"/>
+            <a:off x="7726680" y="3182112"/>
+            <a:ext cx="3227832" cy="960120"/>
           </a:xfrm>
           <a:prstGeom prst="rect">
             <a:avLst/>
@@ -6159,7 +6159,7 @@
               <a:buNone/>
             </a:pPr>
             <a:r>
-              <a:rPr lang="en-US" sz="1220" dirty="0">
+              <a:rPr lang="en-US" sz="1140" dirty="0">
                 <a:solidFill>
                   <a:srgbClr val="17364A"/>
                 </a:solidFill>
@@ -6167,16 +6167,16 @@
                 <a:ea typeface="Aptos" pitchFamily="34" charset="-122"/>
                 <a:cs typeface="Aptos" pitchFamily="34" charset="-120"/>
               </a:rPr>
-              <a:t>Some AI systems classify records, some detect patterns, some.</a:t>
-            </a:r>
-            <a:endParaRPr lang="en-US" sz="1220" dirty="0"/>
-          </a:p>
-          <a:p>
-            <a:pPr indent="0" marL="0">
-              <a:buNone/>
-            </a:pPr>
-            <a:r>
-              <a:rPr lang="en-US" sz="1220" dirty="0">
+              <a:t>Some AI systems classify records, some detect.</a:t>
+            </a:r>
+            <a:endParaRPr lang="en-US" sz="1140" dirty="0"/>
+          </a:p>
+          <a:p>
+            <a:pPr indent="0" marL="0">
+              <a:buNone/>
+            </a:pPr>
+            <a:r>
+              <a:rPr lang="en-US" sz="1140" dirty="0">
                 <a:solidFill>
                   <a:srgbClr val="17364A"/>
                 </a:solidFill>
@@ -6184,16 +6184,16 @@
                 <a:ea typeface="Aptos" pitchFamily="34" charset="-122"/>
                 <a:cs typeface="Aptos" pitchFamily="34" charset="-120"/>
               </a:rPr>
-              <a:t>This distinction matters because each capability has different.</a:t>
-            </a:r>
-            <a:endParaRPr lang="en-US" sz="1220" dirty="0"/>
-          </a:p>
-          <a:p>
-            <a:pPr indent="0" marL="0">
-              <a:buNone/>
-            </a:pPr>
-            <a:r>
-              <a:rPr lang="en-US" sz="1220" dirty="0">
+              <a:t>This distinction matters because each capability.</a:t>
+            </a:r>
+            <a:endParaRPr lang="en-US" sz="1140" dirty="0"/>
+          </a:p>
+          <a:p>
+            <a:pPr indent="0" marL="0">
+              <a:buNone/>
+            </a:pPr>
+            <a:r>
+              <a:rPr lang="en-US" sz="1140" dirty="0">
                 <a:solidFill>
                   <a:srgbClr val="17364A"/>
                 </a:solidFill>
@@ -6201,9 +6201,9 @@
                 <a:ea typeface="Aptos" pitchFamily="34" charset="-122"/>
                 <a:cs typeface="Aptos" pitchFamily="34" charset="-120"/>
               </a:rPr>
-              <a:t>A responsible public health discussion starts by naming what kind.</a:t>
-            </a:r>
-            <a:endParaRPr lang="en-US" sz="1220" dirty="0"/>
+              <a:t>A responsible public health discussion starts by.</a:t>
+            </a:r>
+            <a:endParaRPr lang="en-US" sz="1140" dirty="0"/>
           </a:p>
         </p:txBody>
       </p:sp>
@@ -6215,12 +6215,12 @@
         </p:nvSpPr>
         <p:spPr>
           <a:xfrm>
-            <a:off x="7635240" y="4184294"/>
-            <a:ext cx="3474720" cy="1466698"/>
+            <a:off x="7543800" y="4389120"/>
+            <a:ext cx="3611880" cy="1261872"/>
           </a:xfrm>
           <a:prstGeom prst="roundRect">
             <a:avLst>
-              <a:gd name="adj" fmla="val 7481"/>
+              <a:gd name="adj" fmla="val 8696"/>
             </a:avLst>
           </a:prstGeom>
           <a:solidFill>
@@ -6242,8 +6242,8 @@
         </p:nvSpPr>
         <p:spPr>
           <a:xfrm>
-            <a:off x="7799832" y="4330598"/>
-            <a:ext cx="3145536" cy="256032"/>
+            <a:off x="7708392" y="4517136"/>
+            <a:ext cx="3282696" cy="228600"/>
           </a:xfrm>
           <a:prstGeom prst="rect">
             <a:avLst/>
@@ -6259,7 +6259,7 @@
               <a:buNone/>
             </a:pPr>
             <a:r>
-              <a:rPr lang="en-US" sz="1300" b="1" dirty="0">
+              <a:rPr lang="en-US" sz="1220" b="1" dirty="0">
                 <a:solidFill>
                   <a:srgbClr val="0068B7"/>
                 </a:solidFill>
@@ -6269,7 +6269,7 @@
               </a:rPr>
               <a:t>Apply it</a:t>
             </a:r>
-            <a:endParaRPr lang="en-US" sz="1300" dirty="0"/>
+            <a:endParaRPr lang="en-US" sz="1220" dirty="0"/>
           </a:p>
         </p:txBody>
       </p:sp>
@@ -6281,8 +6281,8 @@
         </p:nvSpPr>
         <p:spPr>
           <a:xfrm>
-            <a:off x="7799832" y="4659782"/>
-            <a:ext cx="3145536" cy="899770"/>
+            <a:off x="7708392" y="4828032"/>
+            <a:ext cx="3282696" cy="749808"/>
           </a:xfrm>
           <a:prstGeom prst="rect">
             <a:avLst/>
@@ -6300,7 +6300,7 @@
               <a:buNone/>
             </a:pPr>
             <a:r>
-              <a:rPr lang="en-US" sz="1320" dirty="0">
+              <a:rPr lang="en-US" sz="1220" dirty="0">
                 <a:solidFill>
                   <a:srgbClr val="17364A"/>
                 </a:solidFill>
@@ -6308,9 +6308,9 @@
                 <a:ea typeface="Aptos" pitchFamily="34" charset="-122"/>
                 <a:cs typeface="Aptos" pitchFamily="34" charset="-120"/>
               </a:rPr>
-              <a:t>Connect the concept to public health purpose, responsible use, required safeguards, documentation, and the next action a department should take.</a:t>
-            </a:r>
-            <a:endParaRPr lang="en-US" sz="1320" dirty="0"/>
+              <a:t>Connect the concept to public health purpose, responsible use, required.</a:t>
+            </a:r>
+            <a:endParaRPr lang="en-US" sz="1220" dirty="0"/>
           </a:p>
         </p:txBody>
       </p:sp>
@@ -6601,8 +6601,8 @@
         </p:nvSpPr>
         <p:spPr>
           <a:xfrm>
-            <a:off x="868680" y="1508760"/>
-            <a:ext cx="6309360" cy="4160520"/>
+            <a:off x="822960" y="1463040"/>
+            <a:ext cx="6565392" cy="4343400"/>
           </a:xfrm>
           <a:prstGeom prst="rect">
             <a:avLst/>
@@ -6620,7 +6620,7 @@
               <a:buNone/>
             </a:pPr>
             <a:r>
-              <a:rPr lang="en-US" sz="2100" dirty="0">
+              <a:rPr lang="en-US" sz="1920" dirty="0">
                 <a:solidFill>
                   <a:srgbClr val="003A63"/>
                 </a:solidFill>
@@ -6628,16 +6628,16 @@
                 <a:ea typeface="Aptos" pitchFamily="34" charset="-122"/>
                 <a:cs typeface="Aptos" pitchFamily="34" charset="-120"/>
               </a:rPr>
-              <a:t>• Retrieval-augmented generation combines generative AI with a defined set of source documents.</a:t>
-            </a:r>
-            <a:endParaRPr lang="en-US" sz="2100" dirty="0"/>
-          </a:p>
-          <a:p>
-            <a:pPr indent="0" marL="0">
-              <a:buNone/>
-            </a:pPr>
-            <a:r>
-              <a:rPr lang="en-US" sz="2100" dirty="0">
+              <a:t>• Retrieval-augmented generation combines generative AI with a defined set of.</a:t>
+            </a:r>
+            <a:endParaRPr lang="en-US" sz="1920" dirty="0"/>
+          </a:p>
+          <a:p>
+            <a:pPr indent="0" marL="0">
+              <a:buNone/>
+            </a:pPr>
+            <a:r>
+              <a:rPr lang="en-US" sz="1920" dirty="0">
                 <a:solidFill>
                   <a:srgbClr val="003A63"/>
                 </a:solidFill>
@@ -6645,16 +6645,16 @@
                 <a:ea typeface="Aptos" pitchFamily="34" charset="-122"/>
                 <a:cs typeface="Aptos" pitchFamily="34" charset="-120"/>
               </a:rPr>
-              <a:t>• Instead of relying only on a model's general training, the system retrieves relevant passages.</a:t>
-            </a:r>
-            <a:endParaRPr lang="en-US" sz="2100" dirty="0"/>
-          </a:p>
-          <a:p>
-            <a:pPr indent="0" marL="0">
-              <a:buNone/>
-            </a:pPr>
-            <a:r>
-              <a:rPr lang="en-US" sz="2100" dirty="0">
+              <a:t>• Instead of relying only on a model's general training, the system retrieves.</a:t>
+            </a:r>
+            <a:endParaRPr lang="en-US" sz="1920" dirty="0"/>
+          </a:p>
+          <a:p>
+            <a:pPr indent="0" marL="0">
+              <a:buNone/>
+            </a:pPr>
+            <a:r>
+              <a:rPr lang="en-US" sz="1920" dirty="0">
                 <a:solidFill>
                   <a:srgbClr val="003A63"/>
                 </a:solidFill>
@@ -6662,9 +6662,9 @@
                 <a:ea typeface="Aptos" pitchFamily="34" charset="-122"/>
                 <a:cs typeface="Aptos" pitchFamily="34" charset="-120"/>
               </a:rPr>
-              <a:t>• This approach can be useful for policy summaries, inspection documentation, program guidance,.</a:t>
-            </a:r>
-            <a:endParaRPr lang="en-US" sz="2100" dirty="0"/>
+              <a:t>• This approach can be useful for policy summaries, inspection documentation,.</a:t>
+            </a:r>
+            <a:endParaRPr lang="en-US" sz="1920" dirty="0"/>
           </a:p>
         </p:txBody>
       </p:sp>
@@ -6676,12 +6676,12 @@
         </p:nvSpPr>
         <p:spPr>
           <a:xfrm>
-            <a:off x="7635240" y="1325880"/>
-            <a:ext cx="3474720" cy="1207008"/>
+            <a:off x="7543800" y="1325880"/>
+            <a:ext cx="3611880" cy="1261872"/>
           </a:xfrm>
           <a:prstGeom prst="roundRect">
             <a:avLst>
-              <a:gd name="adj" fmla="val 9091"/>
+              <a:gd name="adj" fmla="val 8696"/>
             </a:avLst>
           </a:prstGeom>
           <a:solidFill>
@@ -6703,8 +6703,8 @@
         </p:nvSpPr>
         <p:spPr>
           <a:xfrm>
-            <a:off x="7799832" y="1472184"/>
-            <a:ext cx="3145536" cy="256032"/>
+            <a:off x="7708392" y="1453896"/>
+            <a:ext cx="3282696" cy="228600"/>
           </a:xfrm>
           <a:prstGeom prst="rect">
             <a:avLst/>
@@ -6720,7 +6720,7 @@
               <a:buNone/>
             </a:pPr>
             <a:r>
-              <a:rPr lang="en-US" sz="1300" b="1" dirty="0">
+              <a:rPr lang="en-US" sz="1220" b="1" dirty="0">
                 <a:solidFill>
                   <a:srgbClr val="0068B7"/>
                 </a:solidFill>
@@ -6730,7 +6730,7 @@
               </a:rPr>
               <a:t>Core concept</a:t>
             </a:r>
-            <a:endParaRPr lang="en-US" sz="1300" dirty="0"/>
+            <a:endParaRPr lang="en-US" sz="1220" dirty="0"/>
           </a:p>
         </p:txBody>
       </p:sp>
@@ -6742,8 +6742,8 @@
         </p:nvSpPr>
         <p:spPr>
           <a:xfrm>
-            <a:off x="7799832" y="1801368"/>
-            <a:ext cx="3145536" cy="640080"/>
+            <a:off x="7708392" y="1764792"/>
+            <a:ext cx="3282696" cy="749808"/>
           </a:xfrm>
           <a:prstGeom prst="rect">
             <a:avLst/>
@@ -6761,7 +6761,7 @@
               <a:buNone/>
             </a:pPr>
             <a:r>
-              <a:rPr lang="en-US" sz="1320" dirty="0">
+              <a:rPr lang="en-US" sz="1220" dirty="0">
                 <a:solidFill>
                   <a:srgbClr val="17364A"/>
                 </a:solidFill>
@@ -6769,9 +6769,9 @@
                 <a:ea typeface="Aptos" pitchFamily="34" charset="-122"/>
                 <a:cs typeface="Aptos" pitchFamily="34" charset="-120"/>
               </a:rPr>
-              <a:t>Retrieval-augmented generation combines generative AI with a defined set of source.</a:t>
-            </a:r>
-            <a:endParaRPr lang="en-US" sz="1320" dirty="0"/>
+              <a:t>Retrieval-augmented generation combines generative AI with a defined set of.</a:t>
+            </a:r>
+            <a:endParaRPr lang="en-US" sz="1220" dirty="0"/>
           </a:p>
         </p:txBody>
       </p:sp>
@@ -6783,12 +6783,12 @@
         </p:nvSpPr>
         <p:spPr>
           <a:xfrm>
-            <a:off x="7635240" y="2670048"/>
-            <a:ext cx="3474720" cy="1377086"/>
+            <a:off x="7543800" y="2724912"/>
+            <a:ext cx="3611880" cy="1527048"/>
           </a:xfrm>
           <a:prstGeom prst="roundRect">
             <a:avLst>
-              <a:gd name="adj" fmla="val 7968"/>
+              <a:gd name="adj" fmla="val 7186"/>
             </a:avLst>
           </a:prstGeom>
           <a:solidFill>
@@ -6810,8 +6810,8 @@
         </p:nvSpPr>
         <p:spPr>
           <a:xfrm>
-            <a:off x="7799832" y="2816352"/>
-            <a:ext cx="3145536" cy="256032"/>
+            <a:off x="7708392" y="2852928"/>
+            <a:ext cx="3282696" cy="228600"/>
           </a:xfrm>
           <a:prstGeom prst="rect">
             <a:avLst/>
@@ -6827,7 +6827,7 @@
               <a:buNone/>
             </a:pPr>
             <a:r>
-              <a:rPr lang="en-US" sz="1300" b="1" dirty="0">
+              <a:rPr lang="en-US" sz="1220" b="1" dirty="0">
                 <a:solidFill>
                   <a:srgbClr val="0068B7"/>
                 </a:solidFill>
@@ -6837,7 +6837,7 @@
               </a:rPr>
               <a:t>Concept checkpoints</a:t>
             </a:r>
-            <a:endParaRPr lang="en-US" sz="1300" dirty="0"/>
+            <a:endParaRPr lang="en-US" sz="1220" dirty="0"/>
           </a:p>
         </p:txBody>
       </p:sp>
@@ -6849,8 +6849,8 @@
         </p:nvSpPr>
         <p:spPr>
           <a:xfrm>
-            <a:off x="7818120" y="3182112"/>
-            <a:ext cx="3090672" cy="718718"/>
+            <a:off x="7726680" y="3182112"/>
+            <a:ext cx="3227832" cy="960120"/>
           </a:xfrm>
           <a:prstGeom prst="rect">
             <a:avLst/>
@@ -6868,7 +6868,7 @@
               <a:buNone/>
             </a:pPr>
             <a:r>
-              <a:rPr lang="en-US" sz="1220" dirty="0">
+              <a:rPr lang="en-US" sz="1140" dirty="0">
                 <a:solidFill>
                   <a:srgbClr val="17364A"/>
                 </a:solidFill>
@@ -6876,16 +6876,16 @@
                 <a:ea typeface="Aptos" pitchFamily="34" charset="-122"/>
                 <a:cs typeface="Aptos" pitchFamily="34" charset="-120"/>
               </a:rPr>
-              <a:t>Instead of relying only on a model's general training, the system.</a:t>
-            </a:r>
-            <a:endParaRPr lang="en-US" sz="1220" dirty="0"/>
-          </a:p>
-          <a:p>
-            <a:pPr indent="0" marL="0">
-              <a:buNone/>
-            </a:pPr>
-            <a:r>
-              <a:rPr lang="en-US" sz="1220" dirty="0">
+              <a:t>Instead of relying only on a model's general.</a:t>
+            </a:r>
+            <a:endParaRPr lang="en-US" sz="1140" dirty="0"/>
+          </a:p>
+          <a:p>
+            <a:pPr indent="0" marL="0">
+              <a:buNone/>
+            </a:pPr>
+            <a:r>
+              <a:rPr lang="en-US" sz="1140" dirty="0">
                 <a:solidFill>
                   <a:srgbClr val="17364A"/>
                 </a:solidFill>
@@ -6893,16 +6893,16 @@
                 <a:ea typeface="Aptos" pitchFamily="34" charset="-122"/>
                 <a:cs typeface="Aptos" pitchFamily="34" charset="-120"/>
               </a:rPr>
-              <a:t>This approach can be useful for policy summaries, inspection.</a:t>
-            </a:r>
-            <a:endParaRPr lang="en-US" sz="1220" dirty="0"/>
-          </a:p>
-          <a:p>
-            <a:pPr indent="0" marL="0">
-              <a:buNone/>
-            </a:pPr>
-            <a:r>
-              <a:rPr lang="en-US" sz="1220" dirty="0">
+              <a:t>This approach can be useful for policy summaries,.</a:t>
+            </a:r>
+            <a:endParaRPr lang="en-US" sz="1140" dirty="0"/>
+          </a:p>
+          <a:p>
+            <a:pPr indent="0" marL="0">
+              <a:buNone/>
+            </a:pPr>
+            <a:r>
+              <a:rPr lang="en-US" sz="1140" dirty="0">
                 <a:solidFill>
                   <a:srgbClr val="17364A"/>
                 </a:solidFill>
@@ -6910,9 +6910,9 @@
                 <a:ea typeface="Aptos" pitchFamily="34" charset="-122"/>
                 <a:cs typeface="Aptos" pitchFamily="34" charset="-120"/>
               </a:rPr>
-              <a:t>It still requires review because retrieval can miss important.</a:t>
-            </a:r>
-            <a:endParaRPr lang="en-US" sz="1220" dirty="0"/>
+              <a:t>It still requires review because retrieval can.</a:t>
+            </a:r>
+            <a:endParaRPr lang="en-US" sz="1140" dirty="0"/>
           </a:p>
         </p:txBody>
       </p:sp>
@@ -6924,12 +6924,12 @@
         </p:nvSpPr>
         <p:spPr>
           <a:xfrm>
-            <a:off x="7635240" y="4184294"/>
-            <a:ext cx="3474720" cy="1466698"/>
+            <a:off x="7543800" y="4389120"/>
+            <a:ext cx="3611880" cy="1261872"/>
           </a:xfrm>
           <a:prstGeom prst="roundRect">
             <a:avLst>
-              <a:gd name="adj" fmla="val 7481"/>
+              <a:gd name="adj" fmla="val 8696"/>
             </a:avLst>
           </a:prstGeom>
           <a:solidFill>
@@ -6951,8 +6951,8 @@
         </p:nvSpPr>
         <p:spPr>
           <a:xfrm>
-            <a:off x="7799832" y="4330598"/>
-            <a:ext cx="3145536" cy="256032"/>
+            <a:off x="7708392" y="4517136"/>
+            <a:ext cx="3282696" cy="228600"/>
           </a:xfrm>
           <a:prstGeom prst="rect">
             <a:avLst/>
@@ -6968,7 +6968,7 @@
               <a:buNone/>
             </a:pPr>
             <a:r>
-              <a:rPr lang="en-US" sz="1300" b="1" dirty="0">
+              <a:rPr lang="en-US" sz="1220" b="1" dirty="0">
                 <a:solidFill>
                   <a:srgbClr val="0068B7"/>
                 </a:solidFill>
@@ -6978,7 +6978,7 @@
               </a:rPr>
               <a:t>Apply it</a:t>
             </a:r>
-            <a:endParaRPr lang="en-US" sz="1300" dirty="0"/>
+            <a:endParaRPr lang="en-US" sz="1220" dirty="0"/>
           </a:p>
         </p:txBody>
       </p:sp>
@@ -6990,8 +6990,8 @@
         </p:nvSpPr>
         <p:spPr>
           <a:xfrm>
-            <a:off x="7799832" y="4659782"/>
-            <a:ext cx="3145536" cy="899770"/>
+            <a:off x="7708392" y="4828032"/>
+            <a:ext cx="3282696" cy="749808"/>
           </a:xfrm>
           <a:prstGeom prst="rect">
             <a:avLst/>
@@ -7009,7 +7009,7 @@
               <a:buNone/>
             </a:pPr>
             <a:r>
-              <a:rPr lang="en-US" sz="1320" dirty="0">
+              <a:rPr lang="en-US" sz="1220" dirty="0">
                 <a:solidFill>
                   <a:srgbClr val="17364A"/>
                 </a:solidFill>
@@ -7017,9 +7017,9 @@
                 <a:ea typeface="Aptos" pitchFamily="34" charset="-122"/>
                 <a:cs typeface="Aptos" pitchFamily="34" charset="-120"/>
               </a:rPr>
-              <a:t>Connect the concept to public health purpose, responsible use, required safeguards, documentation, and the next action a department should take.</a:t>
-            </a:r>
-            <a:endParaRPr lang="en-US" sz="1320" dirty="0"/>
+              <a:t>Connect the concept to public health purpose, responsible use, required.</a:t>
+            </a:r>
+            <a:endParaRPr lang="en-US" sz="1220" dirty="0"/>
           </a:p>
         </p:txBody>
       </p:sp>
@@ -7310,8 +7310,8 @@
         </p:nvSpPr>
         <p:spPr>
           <a:xfrm>
-            <a:off x="868680" y="1508760"/>
-            <a:ext cx="6309360" cy="4160520"/>
+            <a:off x="822960" y="1463040"/>
+            <a:ext cx="6565392" cy="4343400"/>
           </a:xfrm>
           <a:prstGeom prst="rect">
             <a:avLst/>
@@ -7329,7 +7329,7 @@
               <a:buNone/>
             </a:pPr>
             <a:r>
-              <a:rPr lang="en-US" sz="2100" dirty="0">
+              <a:rPr lang="en-US" sz="1920" dirty="0">
                 <a:solidFill>
                   <a:srgbClr val="003A63"/>
                 </a:solidFill>
@@ -7337,16 +7337,16 @@
                 <a:ea typeface="Aptos" pitchFamily="34" charset="-122"/>
                 <a:cs typeface="Aptos" pitchFamily="34" charset="-120"/>
               </a:rPr>
-              <a:t>• Use these AI concepts to identify where AI may already be present in your department.</a:t>
-            </a:r>
-            <a:endParaRPr lang="en-US" sz="2100" dirty="0"/>
-          </a:p>
-          <a:p>
-            <a:pPr indent="0" marL="0">
-              <a:buNone/>
-            </a:pPr>
-            <a:r>
-              <a:rPr lang="en-US" sz="2100" dirty="0">
+              <a:t>• Use these AI concepts to identify where AI may already be present in your.</a:t>
+            </a:r>
+            <a:endParaRPr lang="en-US" sz="1920" dirty="0"/>
+          </a:p>
+          <a:p>
+            <a:pPr indent="0" marL="0">
+              <a:buNone/>
+            </a:pPr>
+            <a:r>
+              <a:rPr lang="en-US" sz="1920" dirty="0">
                 <a:solidFill>
                   <a:srgbClr val="003A63"/>
                 </a:solidFill>
@@ -7354,16 +7354,16 @@
                 <a:ea typeface="Aptos" pitchFamily="34" charset="-122"/>
                 <a:cs typeface="Aptos" pitchFamily="34" charset="-120"/>
               </a:rPr>
-              <a:t>• Informal use can include staff drafting emails or public messages with consumer AI tools,.</a:t>
-            </a:r>
-            <a:endParaRPr lang="en-US" sz="2100" dirty="0"/>
-          </a:p>
-          <a:p>
-            <a:pPr indent="0" marL="0">
-              <a:buNone/>
-            </a:pPr>
-            <a:r>
-              <a:rPr lang="en-US" sz="2100" dirty="0">
+              <a:t>• Informal use can include staff drafting emails or public messages with.</a:t>
+            </a:r>
+            <a:endParaRPr lang="en-US" sz="1920" dirty="0"/>
+          </a:p>
+          <a:p>
+            <a:pPr indent="0" marL="0">
+              <a:buNone/>
+            </a:pPr>
+            <a:r>
+              <a:rPr lang="en-US" sz="1920" dirty="0">
                 <a:solidFill>
                   <a:srgbClr val="003A63"/>
                 </a:solidFill>
@@ -7373,7 +7373,7 @@
               </a:rPr>
               <a:t>• An early inventory does not need to be punitive.</a:t>
             </a:r>
-            <a:endParaRPr lang="en-US" sz="2100" dirty="0"/>
+            <a:endParaRPr lang="en-US" sz="1920" dirty="0"/>
           </a:p>
         </p:txBody>
       </p:sp>
@@ -7385,12 +7385,12 @@
         </p:nvSpPr>
         <p:spPr>
           <a:xfrm>
-            <a:off x="7635240" y="1325880"/>
-            <a:ext cx="3474720" cy="1207008"/>
+            <a:off x="7543800" y="1325880"/>
+            <a:ext cx="3611880" cy="1261872"/>
           </a:xfrm>
           <a:prstGeom prst="roundRect">
             <a:avLst>
-              <a:gd name="adj" fmla="val 9091"/>
+              <a:gd name="adj" fmla="val 8696"/>
             </a:avLst>
           </a:prstGeom>
           <a:solidFill>
@@ -7412,8 +7412,8 @@
         </p:nvSpPr>
         <p:spPr>
           <a:xfrm>
-            <a:off x="7799832" y="1472184"/>
-            <a:ext cx="3145536" cy="256032"/>
+            <a:off x="7708392" y="1453896"/>
+            <a:ext cx="3282696" cy="228600"/>
           </a:xfrm>
           <a:prstGeom prst="rect">
             <a:avLst/>
@@ -7429,7 +7429,7 @@
               <a:buNone/>
             </a:pPr>
             <a:r>
-              <a:rPr lang="en-US" sz="1300" b="1" dirty="0">
+              <a:rPr lang="en-US" sz="1220" b="1" dirty="0">
                 <a:solidFill>
                   <a:srgbClr val="0068B7"/>
                 </a:solidFill>
@@ -7439,7 +7439,7 @@
               </a:rPr>
               <a:t>Core concept</a:t>
             </a:r>
-            <a:endParaRPr lang="en-US" sz="1300" dirty="0"/>
+            <a:endParaRPr lang="en-US" sz="1220" dirty="0"/>
           </a:p>
         </p:txBody>
       </p:sp>
@@ -7451,8 +7451,8 @@
         </p:nvSpPr>
         <p:spPr>
           <a:xfrm>
-            <a:off x="7799832" y="1801368"/>
-            <a:ext cx="3145536" cy="640080"/>
+            <a:off x="7708392" y="1764792"/>
+            <a:ext cx="3282696" cy="749808"/>
           </a:xfrm>
           <a:prstGeom prst="rect">
             <a:avLst/>
@@ -7470,7 +7470,7 @@
               <a:buNone/>
             </a:pPr>
             <a:r>
-              <a:rPr lang="en-US" sz="1320" dirty="0">
+              <a:rPr lang="en-US" sz="1220" dirty="0">
                 <a:solidFill>
                   <a:srgbClr val="17364A"/>
                 </a:solidFill>
@@ -7478,9 +7478,9 @@
                 <a:ea typeface="Aptos" pitchFamily="34" charset="-122"/>
                 <a:cs typeface="Aptos" pitchFamily="34" charset="-120"/>
               </a:rPr>
-              <a:t>Use these AI concepts to identify where AI may already be present in your department.</a:t>
-            </a:r>
-            <a:endParaRPr lang="en-US" sz="1320" dirty="0"/>
+              <a:t>Use these AI concepts to identify where AI may already be present in your.</a:t>
+            </a:r>
+            <a:endParaRPr lang="en-US" sz="1220" dirty="0"/>
           </a:p>
         </p:txBody>
       </p:sp>
@@ -7492,12 +7492,12 @@
         </p:nvSpPr>
         <p:spPr>
           <a:xfrm>
-            <a:off x="7635240" y="2670048"/>
-            <a:ext cx="3474720" cy="1377086"/>
+            <a:off x="7543800" y="2724912"/>
+            <a:ext cx="3611880" cy="1527048"/>
           </a:xfrm>
           <a:prstGeom prst="roundRect">
             <a:avLst>
-              <a:gd name="adj" fmla="val 7968"/>
+              <a:gd name="adj" fmla="val 7186"/>
             </a:avLst>
           </a:prstGeom>
           <a:solidFill>
@@ -7519,8 +7519,8 @@
         </p:nvSpPr>
         <p:spPr>
           <a:xfrm>
-            <a:off x="7799832" y="2816352"/>
-            <a:ext cx="3145536" cy="256032"/>
+            <a:off x="7708392" y="2852928"/>
+            <a:ext cx="3282696" cy="228600"/>
           </a:xfrm>
           <a:prstGeom prst="rect">
             <a:avLst/>
@@ -7536,7 +7536,7 @@
               <a:buNone/>
             </a:pPr>
             <a:r>
-              <a:rPr lang="en-US" sz="1300" b="1" dirty="0">
+              <a:rPr lang="en-US" sz="1220" b="1" dirty="0">
                 <a:solidFill>
                   <a:srgbClr val="0068B7"/>
                 </a:solidFill>
@@ -7546,7 +7546,7 @@
               </a:rPr>
               <a:t>Concept checkpoints</a:t>
             </a:r>
-            <a:endParaRPr lang="en-US" sz="1300" dirty="0"/>
+            <a:endParaRPr lang="en-US" sz="1220" dirty="0"/>
           </a:p>
         </p:txBody>
       </p:sp>
@@ -7558,8 +7558,8 @@
         </p:nvSpPr>
         <p:spPr>
           <a:xfrm>
-            <a:off x="7818120" y="3182112"/>
-            <a:ext cx="3090672" cy="718718"/>
+            <a:off x="7726680" y="3182112"/>
+            <a:ext cx="3227832" cy="960120"/>
           </a:xfrm>
           <a:prstGeom prst="rect">
             <a:avLst/>
@@ -7577,7 +7577,7 @@
               <a:buNone/>
             </a:pPr>
             <a:r>
-              <a:rPr lang="en-US" sz="1220" dirty="0">
+              <a:rPr lang="en-US" sz="1140" dirty="0">
                 <a:solidFill>
                   <a:srgbClr val="17364A"/>
                 </a:solidFill>
@@ -7585,16 +7585,16 @@
                 <a:ea typeface="Aptos" pitchFamily="34" charset="-122"/>
                 <a:cs typeface="Aptos" pitchFamily="34" charset="-120"/>
               </a:rPr>
-              <a:t>Informal use can include staff drafting emails or public messages.</a:t>
-            </a:r>
-            <a:endParaRPr lang="en-US" sz="1220" dirty="0"/>
-          </a:p>
-          <a:p>
-            <a:pPr indent="0" marL="0">
-              <a:buNone/>
-            </a:pPr>
-            <a:r>
-              <a:rPr lang="en-US" sz="1220" dirty="0">
+              <a:t>Informal use can include staff drafting emails or.</a:t>
+            </a:r>
+            <a:endParaRPr lang="en-US" sz="1140" dirty="0"/>
+          </a:p>
+          <a:p>
+            <a:pPr indent="0" marL="0">
+              <a:buNone/>
+            </a:pPr>
+            <a:r>
+              <a:rPr lang="en-US" sz="1140" dirty="0">
                 <a:solidFill>
                   <a:srgbClr val="17364A"/>
                 </a:solidFill>
@@ -7602,16 +7602,16 @@
                 <a:ea typeface="Aptos" pitchFamily="34" charset="-122"/>
                 <a:cs typeface="Aptos" pitchFamily="34" charset="-120"/>
               </a:rPr>
-              <a:t>Its purpose is to understand what is already happening, where.</a:t>
-            </a:r>
-            <a:endParaRPr lang="en-US" sz="1220" dirty="0"/>
-          </a:p>
-          <a:p>
-            <a:pPr indent="0" marL="0">
-              <a:buNone/>
-            </a:pPr>
-            <a:r>
-              <a:rPr lang="en-US" sz="1220" dirty="0">
+              <a:t>Its purpose is to understand what is already.</a:t>
+            </a:r>
+            <a:endParaRPr lang="en-US" sz="1140" dirty="0"/>
+          </a:p>
+          <a:p>
+            <a:pPr indent="0" marL="0">
+              <a:buNone/>
+            </a:pPr>
+            <a:r>
+              <a:rPr lang="en-US" sz="1140" dirty="0">
                 <a:solidFill>
                   <a:srgbClr val="17364A"/>
                 </a:solidFill>
@@ -7619,9 +7619,9 @@
                 <a:ea typeface="Aptos" pitchFamily="34" charset="-122"/>
                 <a:cs typeface="Aptos" pitchFamily="34" charset="-120"/>
               </a:rPr>
-              <a:t>A common vocabulary helps different roles evaluate the same.</a:t>
-            </a:r>
-            <a:endParaRPr lang="en-US" sz="1220" dirty="0"/>
+              <a:t>A common vocabulary helps different roles evaluate.</a:t>
+            </a:r>
+            <a:endParaRPr lang="en-US" sz="1140" dirty="0"/>
           </a:p>
         </p:txBody>
       </p:sp>
@@ -7633,12 +7633,12 @@
         </p:nvSpPr>
         <p:spPr>
           <a:xfrm>
-            <a:off x="7635240" y="4184294"/>
-            <a:ext cx="3474720" cy="1466698"/>
+            <a:off x="7543800" y="4389120"/>
+            <a:ext cx="3611880" cy="1261872"/>
           </a:xfrm>
           <a:prstGeom prst="roundRect">
             <a:avLst>
-              <a:gd name="adj" fmla="val 7481"/>
+              <a:gd name="adj" fmla="val 8696"/>
             </a:avLst>
           </a:prstGeom>
           <a:solidFill>
@@ -7660,8 +7660,8 @@
         </p:nvSpPr>
         <p:spPr>
           <a:xfrm>
-            <a:off x="7799832" y="4330598"/>
-            <a:ext cx="3145536" cy="256032"/>
+            <a:off x="7708392" y="4517136"/>
+            <a:ext cx="3282696" cy="228600"/>
           </a:xfrm>
           <a:prstGeom prst="rect">
             <a:avLst/>
@@ -7677,7 +7677,7 @@
               <a:buNone/>
             </a:pPr>
             <a:r>
-              <a:rPr lang="en-US" sz="1300" b="1" dirty="0">
+              <a:rPr lang="en-US" sz="1220" b="1" dirty="0">
                 <a:solidFill>
                   <a:srgbClr val="0068B7"/>
                 </a:solidFill>
@@ -7687,7 +7687,7 @@
               </a:rPr>
               <a:t>Apply it</a:t>
             </a:r>
-            <a:endParaRPr lang="en-US" sz="1300" dirty="0"/>
+            <a:endParaRPr lang="en-US" sz="1220" dirty="0"/>
           </a:p>
         </p:txBody>
       </p:sp>
@@ -7699,8 +7699,8 @@
         </p:nvSpPr>
         <p:spPr>
           <a:xfrm>
-            <a:off x="7799832" y="4659782"/>
-            <a:ext cx="3145536" cy="899770"/>
+            <a:off x="7708392" y="4828032"/>
+            <a:ext cx="3282696" cy="749808"/>
           </a:xfrm>
           <a:prstGeom prst="rect">
             <a:avLst/>
@@ -7718,7 +7718,7 @@
               <a:buNone/>
             </a:pPr>
             <a:r>
-              <a:rPr lang="en-US" sz="1320" dirty="0">
+              <a:rPr lang="en-US" sz="1220" dirty="0">
                 <a:solidFill>
                   <a:srgbClr val="17364A"/>
                 </a:solidFill>
@@ -7726,9 +7726,9 @@
                 <a:ea typeface="Aptos" pitchFamily="34" charset="-122"/>
                 <a:cs typeface="Aptos" pitchFamily="34" charset="-120"/>
               </a:rPr>
-              <a:t>Connect the concept to public health purpose, responsible use, required safeguards, documentation, and the next action a department should take.</a:t>
-            </a:r>
-            <a:endParaRPr lang="en-US" sz="1320" dirty="0"/>
+              <a:t>Connect the concept to public health purpose, responsible use, required.</a:t>
+            </a:r>
+            <a:endParaRPr lang="en-US" sz="1220" dirty="0"/>
           </a:p>
         </p:txBody>
       </p:sp>
@@ -8019,8 +8019,8 @@
         </p:nvSpPr>
         <p:spPr>
           <a:xfrm>
-            <a:off x="868680" y="1508760"/>
-            <a:ext cx="6309360" cy="4160520"/>
+            <a:off x="822960" y="1463040"/>
+            <a:ext cx="6565392" cy="4343400"/>
           </a:xfrm>
           <a:prstGeom prst="rect">
             <a:avLst/>
@@ -8038,7 +8038,7 @@
               <a:buNone/>
             </a:pPr>
             <a:r>
-              <a:rPr lang="en-US" sz="2100" dirty="0">
+              <a:rPr lang="en-US" sz="1920" dirty="0">
                 <a:solidFill>
                   <a:srgbClr val="003A63"/>
                 </a:solidFill>
@@ -8046,16 +8046,16 @@
                 <a:ea typeface="Aptos" pitchFamily="34" charset="-122"/>
                 <a:cs typeface="Aptos" pitchFamily="34" charset="-120"/>
               </a:rPr>
-              <a:t>• Before any AI project begins, confirm the purpose of the use, the data involved, the intended.</a:t>
-            </a:r>
-            <a:endParaRPr lang="en-US" sz="2100" dirty="0"/>
-          </a:p>
-          <a:p>
-            <a:pPr indent="0" marL="0">
-              <a:buNone/>
-            </a:pPr>
-            <a:r>
-              <a:rPr lang="en-US" sz="2100" dirty="0">
+              <a:t>• Before any AI project begins, confirm the purpose of the use, the data.</a:t>
+            </a:r>
+            <a:endParaRPr lang="en-US" sz="1920" dirty="0"/>
+          </a:p>
+          <a:p>
+            <a:pPr indent="0" marL="0">
+              <a:buNone/>
+            </a:pPr>
+            <a:r>
+              <a:rPr lang="en-US" sz="1920" dirty="0">
                 <a:solidFill>
                   <a:srgbClr val="003A63"/>
                 </a:solidFill>
@@ -8063,16 +8063,16 @@
                 <a:ea typeface="Aptos" pitchFamily="34" charset="-122"/>
                 <a:cs typeface="Aptos" pitchFamily="34" charset="-120"/>
               </a:rPr>
-              <a:t>• These questions should be answered before procurement, pilot approval, or workflow redesign.</a:t>
-            </a:r>
-            <a:endParaRPr lang="en-US" sz="2100" dirty="0"/>
-          </a:p>
-          <a:p>
-            <a:pPr indent="0" marL="0">
-              <a:buNone/>
-            </a:pPr>
-            <a:r>
-              <a:rPr lang="en-US" sz="2100" dirty="0">
+              <a:t>• These questions should be answered before procurement, pilot approval, or.</a:t>
+            </a:r>
+            <a:endParaRPr lang="en-US" sz="1920" dirty="0"/>
+          </a:p>
+          <a:p>
+            <a:pPr indent="0" marL="0">
+              <a:buNone/>
+            </a:pPr>
+            <a:r>
+              <a:rPr lang="en-US" sz="1920" dirty="0">
                 <a:solidFill>
                   <a:srgbClr val="003A63"/>
                 </a:solidFill>
@@ -8080,9 +8080,9 @@
                 <a:ea typeface="Aptos" pitchFamily="34" charset="-122"/>
                 <a:cs typeface="Aptos" pitchFamily="34" charset="-120"/>
               </a:rPr>
-              <a:t>• If the department cannot explain what the AI will do and how people will review it, the.</a:t>
-            </a:r>
-            <a:endParaRPr lang="en-US" sz="2100" dirty="0"/>
+              <a:t>• If the department cannot explain what the AI will do and how people will.</a:t>
+            </a:r>
+            <a:endParaRPr lang="en-US" sz="1920" dirty="0"/>
           </a:p>
         </p:txBody>
       </p:sp>
@@ -8094,12 +8094,12 @@
         </p:nvSpPr>
         <p:spPr>
           <a:xfrm>
-            <a:off x="7635240" y="1325880"/>
-            <a:ext cx="3474720" cy="1255471"/>
+            <a:off x="7543800" y="1325880"/>
+            <a:ext cx="3611880" cy="1261872"/>
           </a:xfrm>
           <a:prstGeom prst="roundRect">
             <a:avLst>
-              <a:gd name="adj" fmla="val 8740"/>
+              <a:gd name="adj" fmla="val 8696"/>
             </a:avLst>
           </a:prstGeom>
           <a:solidFill>
@@ -8121,8 +8121,8 @@
         </p:nvSpPr>
         <p:spPr>
           <a:xfrm>
-            <a:off x="7799832" y="1472184"/>
-            <a:ext cx="3145536" cy="256032"/>
+            <a:off x="7708392" y="1453896"/>
+            <a:ext cx="3282696" cy="228600"/>
           </a:xfrm>
           <a:prstGeom prst="rect">
             <a:avLst/>
@@ -8138,7 +8138,7 @@
               <a:buNone/>
             </a:pPr>
             <a:r>
-              <a:rPr lang="en-US" sz="1300" b="1" dirty="0">
+              <a:rPr lang="en-US" sz="1220" b="1" dirty="0">
                 <a:solidFill>
                   <a:srgbClr val="0068B7"/>
                 </a:solidFill>
@@ -8148,7 +8148,7 @@
               </a:rPr>
               <a:t>Implementation cue</a:t>
             </a:r>
-            <a:endParaRPr lang="en-US" sz="1300" dirty="0"/>
+            <a:endParaRPr lang="en-US" sz="1220" dirty="0"/>
           </a:p>
         </p:txBody>
       </p:sp>
@@ -8160,8 +8160,8 @@
         </p:nvSpPr>
         <p:spPr>
           <a:xfrm>
-            <a:off x="7799832" y="1801368"/>
-            <a:ext cx="3145536" cy="688543"/>
+            <a:off x="7708392" y="1764792"/>
+            <a:ext cx="3282696" cy="749808"/>
           </a:xfrm>
           <a:prstGeom prst="rect">
             <a:avLst/>
@@ -8179,7 +8179,7 @@
               <a:buNone/>
             </a:pPr>
             <a:r>
-              <a:rPr lang="en-US" sz="1320" dirty="0">
+              <a:rPr lang="en-US" sz="1220" dirty="0">
                 <a:solidFill>
                   <a:srgbClr val="17364A"/>
                 </a:solidFill>
@@ -8187,9 +8187,9 @@
                 <a:ea typeface="Aptos" pitchFamily="34" charset="-122"/>
                 <a:cs typeface="Aptos" pitchFamily="34" charset="-120"/>
               </a:rPr>
-              <a:t>Before any AI project begins, confirm the purpose of the use, the data involved, the intended users,.</a:t>
-            </a:r>
-            <a:endParaRPr lang="en-US" sz="1320" dirty="0"/>
+              <a:t>Before any AI project begins, confirm the purpose of the use, the data involved,.</a:t>
+            </a:r>
+            <a:endParaRPr lang="en-US" sz="1220" dirty="0"/>
           </a:p>
         </p:txBody>
       </p:sp>
@@ -8201,12 +8201,12 @@
         </p:nvSpPr>
         <p:spPr>
           <a:xfrm>
-            <a:off x="7635240" y="2718511"/>
-            <a:ext cx="3474720" cy="1328623"/>
+            <a:off x="7543800" y="2724912"/>
+            <a:ext cx="3611880" cy="1527048"/>
           </a:xfrm>
           <a:prstGeom prst="roundRect">
             <a:avLst>
-              <a:gd name="adj" fmla="val 8259"/>
+              <a:gd name="adj" fmla="val 7186"/>
             </a:avLst>
           </a:prstGeom>
           <a:solidFill>
@@ -8228,8 +8228,8 @@
         </p:nvSpPr>
         <p:spPr>
           <a:xfrm>
-            <a:off x="7799832" y="2864815"/>
-            <a:ext cx="3145536" cy="256032"/>
+            <a:off x="7708392" y="2852928"/>
+            <a:ext cx="3282696" cy="228600"/>
           </a:xfrm>
           <a:prstGeom prst="rect">
             <a:avLst/>
@@ -8245,7 +8245,7 @@
               <a:buNone/>
             </a:pPr>
             <a:r>
-              <a:rPr lang="en-US" sz="1300" b="1" dirty="0">
+              <a:rPr lang="en-US" sz="1220" b="1" dirty="0">
                 <a:solidFill>
                   <a:srgbClr val="0068B7"/>
                 </a:solidFill>
@@ -8255,7 +8255,7 @@
               </a:rPr>
               <a:t>Concept checkpoints</a:t>
             </a:r>
-            <a:endParaRPr lang="en-US" sz="1300" dirty="0"/>
+            <a:endParaRPr lang="en-US" sz="1220" dirty="0"/>
           </a:p>
         </p:txBody>
       </p:sp>
@@ -8267,8 +8267,8 @@
         </p:nvSpPr>
         <p:spPr>
           <a:xfrm>
-            <a:off x="7818120" y="3230575"/>
-            <a:ext cx="3090672" cy="670255"/>
+            <a:off x="7726680" y="3182112"/>
+            <a:ext cx="3227832" cy="960120"/>
           </a:xfrm>
           <a:prstGeom prst="rect">
             <a:avLst/>
@@ -8286,7 +8286,7 @@
               <a:buNone/>
             </a:pPr>
             <a:r>
-              <a:rPr lang="en-US" sz="1220" dirty="0">
+              <a:rPr lang="en-US" sz="1140" dirty="0">
                 <a:solidFill>
                   <a:srgbClr val="17364A"/>
                 </a:solidFill>
@@ -8294,16 +8294,16 @@
                 <a:ea typeface="Aptos" pitchFamily="34" charset="-122"/>
                 <a:cs typeface="Aptos" pitchFamily="34" charset="-120"/>
               </a:rPr>
-              <a:t>Before any AI project begins, confirm the purpose of the use, the.</a:t>
-            </a:r>
-            <a:endParaRPr lang="en-US" sz="1220" dirty="0"/>
-          </a:p>
-          <a:p>
-            <a:pPr indent="0" marL="0">
-              <a:buNone/>
-            </a:pPr>
-            <a:r>
-              <a:rPr lang="en-US" sz="1220" dirty="0">
+              <a:t>Before any AI project begins, confirm the purpose.</a:t>
+            </a:r>
+            <a:endParaRPr lang="en-US" sz="1140" dirty="0"/>
+          </a:p>
+          <a:p>
+            <a:pPr indent="0" marL="0">
+              <a:buNone/>
+            </a:pPr>
+            <a:r>
+              <a:rPr lang="en-US" sz="1140" dirty="0">
                 <a:solidFill>
                   <a:srgbClr val="17364A"/>
                 </a:solidFill>
@@ -8311,16 +8311,16 @@
                 <a:ea typeface="Aptos" pitchFamily="34" charset="-122"/>
                 <a:cs typeface="Aptos" pitchFamily="34" charset="-120"/>
               </a:rPr>
-              <a:t>If the department cannot explain what the AI will do and how.</a:t>
-            </a:r>
-            <a:endParaRPr lang="en-US" sz="1220" dirty="0"/>
-          </a:p>
-          <a:p>
-            <a:pPr indent="0" marL="0">
-              <a:buNone/>
-            </a:pPr>
-            <a:r>
-              <a:rPr lang="en-US" sz="1220" dirty="0">
+              <a:t>If the department cannot explain what the AI will.</a:t>
+            </a:r>
+            <a:endParaRPr lang="en-US" sz="1140" dirty="0"/>
+          </a:p>
+          <a:p>
+            <a:pPr indent="0" marL="0">
+              <a:buNone/>
+            </a:pPr>
+            <a:r>
+              <a:rPr lang="en-US" sz="1140" dirty="0">
                 <a:solidFill>
                   <a:srgbClr val="17364A"/>
                 </a:solidFill>
@@ -8328,9 +8328,9 @@
                 <a:ea typeface="Aptos" pitchFamily="34" charset="-122"/>
                 <a:cs typeface="Aptos" pitchFamily="34" charset="-120"/>
               </a:rPr>
-              <a:t>Document what the AI is allowed to do and what decisions remain.</a:t>
-            </a:r>
-            <a:endParaRPr lang="en-US" sz="1220" dirty="0"/>
+              <a:t>Document what the AI is allowed to do and what.</a:t>
+            </a:r>
+            <a:endParaRPr lang="en-US" sz="1140" dirty="0"/>
           </a:p>
         </p:txBody>
       </p:sp>
@@ -8342,12 +8342,12 @@
         </p:nvSpPr>
         <p:spPr>
           <a:xfrm>
-            <a:off x="7635240" y="4184294"/>
-            <a:ext cx="3474720" cy="1466698"/>
+            <a:off x="7543800" y="4389120"/>
+            <a:ext cx="3611880" cy="1261872"/>
           </a:xfrm>
           <a:prstGeom prst="roundRect">
             <a:avLst>
-              <a:gd name="adj" fmla="val 7481"/>
+              <a:gd name="adj" fmla="val 8696"/>
             </a:avLst>
           </a:prstGeom>
           <a:solidFill>
@@ -8369,8 +8369,8 @@
         </p:nvSpPr>
         <p:spPr>
           <a:xfrm>
-            <a:off x="7799832" y="4330598"/>
-            <a:ext cx="3145536" cy="256032"/>
+            <a:off x="7708392" y="4517136"/>
+            <a:ext cx="3282696" cy="228600"/>
           </a:xfrm>
           <a:prstGeom prst="rect">
             <a:avLst/>
@@ -8386,7 +8386,7 @@
               <a:buNone/>
             </a:pPr>
             <a:r>
-              <a:rPr lang="en-US" sz="1300" b="1" dirty="0">
+              <a:rPr lang="en-US" sz="1220" b="1" dirty="0">
                 <a:solidFill>
                   <a:srgbClr val="0068B7"/>
                 </a:solidFill>
@@ -8396,7 +8396,7 @@
               </a:rPr>
               <a:t>Next action</a:t>
             </a:r>
-            <a:endParaRPr lang="en-US" sz="1300" dirty="0"/>
+            <a:endParaRPr lang="en-US" sz="1220" dirty="0"/>
           </a:p>
         </p:txBody>
       </p:sp>
@@ -8408,8 +8408,8 @@
         </p:nvSpPr>
         <p:spPr>
           <a:xfrm>
-            <a:off x="7799832" y="4659782"/>
-            <a:ext cx="3145536" cy="899770"/>
+            <a:off x="7708392" y="4828032"/>
+            <a:ext cx="3282696" cy="749808"/>
           </a:xfrm>
           <a:prstGeom prst="rect">
             <a:avLst/>
@@ -8427,7 +8427,7 @@
               <a:buNone/>
             </a:pPr>
             <a:r>
-              <a:rPr lang="en-US" sz="1320" dirty="0">
+              <a:rPr lang="en-US" sz="1220" dirty="0">
                 <a:solidFill>
                   <a:srgbClr val="17364A"/>
                 </a:solidFill>
@@ -8435,9 +8435,9 @@
                 <a:ea typeface="Aptos" pitchFamily="34" charset="-122"/>
                 <a:cs typeface="Aptos" pitchFamily="34" charset="-120"/>
               </a:rPr>
-              <a:t>Use the concept to clarify workflow changes, dependencies, staffing, procurement requirements, training needs, and implementation checkpoints.</a:t>
-            </a:r>
-            <a:endParaRPr lang="en-US" sz="1320" dirty="0"/>
+              <a:t>Use the concept to clarify workflow changes, dependencies, staffing, procurement.</a:t>
+            </a:r>
+            <a:endParaRPr lang="en-US" sz="1220" dirty="0"/>
           </a:p>
         </p:txBody>
       </p:sp>
@@ -8728,8 +8728,8 @@
         </p:nvSpPr>
         <p:spPr>
           <a:xfrm>
-            <a:off x="868680" y="1508760"/>
-            <a:ext cx="6309360" cy="4160520"/>
+            <a:off x="822960" y="1463040"/>
+            <a:ext cx="6565392" cy="4343400"/>
           </a:xfrm>
           <a:prstGeom prst="rect">
             <a:avLst/>
@@ -8747,7 +8747,7 @@
               <a:buNone/>
             </a:pPr>
             <a:r>
-              <a:rPr lang="en-US" sz="2100" dirty="0">
+              <a:rPr lang="en-US" sz="1920" dirty="0">
                 <a:solidFill>
                   <a:srgbClr val="003A63"/>
                 </a:solidFill>
@@ -8755,16 +8755,16 @@
                 <a:ea typeface="Aptos" pitchFamily="34" charset="-122"/>
                 <a:cs typeface="Aptos" pitchFamily="34" charset="-120"/>
               </a:rPr>
-              <a:t>• Understanding what these systems can and cannot do is the starting point for responsible.</a:t>
-            </a:r>
-            <a:endParaRPr lang="en-US" sz="2100" dirty="0"/>
-          </a:p>
-          <a:p>
-            <a:pPr indent="0" marL="0">
-              <a:buNone/>
-            </a:pPr>
-            <a:r>
-              <a:rPr lang="en-US" sz="2100" dirty="0">
+              <a:t>• Understanding what these systems can and cannot do is the starting point for.</a:t>
+            </a:r>
+            <a:endParaRPr lang="en-US" sz="1920" dirty="0"/>
+          </a:p>
+          <a:p>
+            <a:pPr indent="0" marL="0">
+              <a:buNone/>
+            </a:pPr>
+            <a:r>
+              <a:rPr lang="en-US" sz="1920" dirty="0">
                 <a:solidFill>
                   <a:srgbClr val="003A63"/>
                 </a:solidFill>
@@ -8772,9 +8772,9 @@
                 <a:ea typeface="Aptos" pitchFamily="34" charset="-122"/>
                 <a:cs typeface="Aptos" pitchFamily="34" charset="-120"/>
               </a:rPr>
-              <a:t>• Agencies need a shared vocabulary before they can set guardrails, evaluate vendors, select use.</a:t>
-            </a:r>
-            <a:endParaRPr lang="en-US" sz="2100" dirty="0"/>
+              <a:t>• Agencies need a shared vocabulary before they can set guardrails, evaluate.</a:t>
+            </a:r>
+            <a:endParaRPr lang="en-US" sz="1920" dirty="0"/>
           </a:p>
         </p:txBody>
       </p:sp>
@@ -8786,12 +8786,12 @@
         </p:nvSpPr>
         <p:spPr>
           <a:xfrm>
-            <a:off x="7635240" y="1325880"/>
-            <a:ext cx="3474720" cy="1255471"/>
+            <a:off x="7543800" y="1325880"/>
+            <a:ext cx="3611880" cy="1261872"/>
           </a:xfrm>
           <a:prstGeom prst="roundRect">
             <a:avLst>
-              <a:gd name="adj" fmla="val 8740"/>
+              <a:gd name="adj" fmla="val 8696"/>
             </a:avLst>
           </a:prstGeom>
           <a:solidFill>
@@ -8813,8 +8813,8 @@
         </p:nvSpPr>
         <p:spPr>
           <a:xfrm>
-            <a:off x="7799832" y="1472184"/>
-            <a:ext cx="3145536" cy="256032"/>
+            <a:off x="7708392" y="1453896"/>
+            <a:ext cx="3282696" cy="228600"/>
           </a:xfrm>
           <a:prstGeom prst="rect">
             <a:avLst/>
@@ -8830,7 +8830,7 @@
               <a:buNone/>
             </a:pPr>
             <a:r>
-              <a:rPr lang="en-US" sz="1300" b="1" dirty="0">
+              <a:rPr lang="en-US" sz="1220" b="1" dirty="0">
                 <a:solidFill>
                   <a:srgbClr val="0068B7"/>
                 </a:solidFill>
@@ -8840,7 +8840,7 @@
               </a:rPr>
               <a:t>Core concept</a:t>
             </a:r>
-            <a:endParaRPr lang="en-US" sz="1300" dirty="0"/>
+            <a:endParaRPr lang="en-US" sz="1220" dirty="0"/>
           </a:p>
         </p:txBody>
       </p:sp>
@@ -8852,8 +8852,8 @@
         </p:nvSpPr>
         <p:spPr>
           <a:xfrm>
-            <a:off x="7799832" y="1801368"/>
-            <a:ext cx="3145536" cy="688543"/>
+            <a:off x="7708392" y="1764792"/>
+            <a:ext cx="3282696" cy="749808"/>
           </a:xfrm>
           <a:prstGeom prst="rect">
             <a:avLst/>
@@ -8871,7 +8871,7 @@
               <a:buNone/>
             </a:pPr>
             <a:r>
-              <a:rPr lang="en-US" sz="1320" dirty="0">
+              <a:rPr lang="en-US" sz="1220" dirty="0">
                 <a:solidFill>
                   <a:srgbClr val="17364A"/>
                 </a:solidFill>
@@ -8879,9 +8879,9 @@
                 <a:ea typeface="Aptos" pitchFamily="34" charset="-122"/>
                 <a:cs typeface="Aptos" pitchFamily="34" charset="-120"/>
               </a:rPr>
-              <a:t>Understanding what these systems can and cannot do is the starting point for responsible adoption.</a:t>
-            </a:r>
-            <a:endParaRPr lang="en-US" sz="1320" dirty="0"/>
+              <a:t>Understanding what these systems can and cannot do is the starting point for.</a:t>
+            </a:r>
+            <a:endParaRPr lang="en-US" sz="1220" dirty="0"/>
           </a:p>
         </p:txBody>
       </p:sp>
@@ -8893,12 +8893,12 @@
         </p:nvSpPr>
         <p:spPr>
           <a:xfrm>
-            <a:off x="7635240" y="2718511"/>
-            <a:ext cx="3474720" cy="1328623"/>
+            <a:off x="7543800" y="2724912"/>
+            <a:ext cx="3611880" cy="1527048"/>
           </a:xfrm>
           <a:prstGeom prst="roundRect">
             <a:avLst>
-              <a:gd name="adj" fmla="val 8259"/>
+              <a:gd name="adj" fmla="val 7186"/>
             </a:avLst>
           </a:prstGeom>
           <a:solidFill>
@@ -8920,8 +8920,8 @@
         </p:nvSpPr>
         <p:spPr>
           <a:xfrm>
-            <a:off x="7799832" y="2864815"/>
-            <a:ext cx="3145536" cy="256032"/>
+            <a:off x="7708392" y="2852928"/>
+            <a:ext cx="3282696" cy="228600"/>
           </a:xfrm>
           <a:prstGeom prst="rect">
             <a:avLst/>
@@ -8937,7 +8937,7 @@
               <a:buNone/>
             </a:pPr>
             <a:r>
-              <a:rPr lang="en-US" sz="1300" b="1" dirty="0">
+              <a:rPr lang="en-US" sz="1220" b="1" dirty="0">
                 <a:solidFill>
                   <a:srgbClr val="0068B7"/>
                 </a:solidFill>
@@ -8947,7 +8947,7 @@
               </a:rPr>
               <a:t>Concept checkpoints</a:t>
             </a:r>
-            <a:endParaRPr lang="en-US" sz="1300" dirty="0"/>
+            <a:endParaRPr lang="en-US" sz="1220" dirty="0"/>
           </a:p>
         </p:txBody>
       </p:sp>
@@ -8959,8 +8959,8 @@
         </p:nvSpPr>
         <p:spPr>
           <a:xfrm>
-            <a:off x="7818120" y="3230575"/>
-            <a:ext cx="3090672" cy="670255"/>
+            <a:off x="7726680" y="3182112"/>
+            <a:ext cx="3227832" cy="960120"/>
           </a:xfrm>
           <a:prstGeom prst="rect">
             <a:avLst/>
@@ -8978,7 +8978,7 @@
               <a:buNone/>
             </a:pPr>
             <a:r>
-              <a:rPr lang="en-US" sz="1220" dirty="0">
+              <a:rPr lang="en-US" sz="1140" dirty="0">
                 <a:solidFill>
                   <a:srgbClr val="17364A"/>
                 </a:solidFill>
@@ -8986,16 +8986,16 @@
                 <a:ea typeface="Aptos" pitchFamily="34" charset="-122"/>
                 <a:cs typeface="Aptos" pitchFamily="34" charset="-120"/>
               </a:rPr>
-              <a:t>Understanding what these systems can and cannot do is the starting.</a:t>
-            </a:r>
-            <a:endParaRPr lang="en-US" sz="1220" dirty="0"/>
-          </a:p>
-          <a:p>
-            <a:pPr indent="0" marL="0">
-              <a:buNone/>
-            </a:pPr>
-            <a:r>
-              <a:rPr lang="en-US" sz="1220" dirty="0">
+              <a:t>Understanding what these systems can and cannot do.</a:t>
+            </a:r>
+            <a:endParaRPr lang="en-US" sz="1140" dirty="0"/>
+          </a:p>
+          <a:p>
+            <a:pPr indent="0" marL="0">
+              <a:buNone/>
+            </a:pPr>
+            <a:r>
+              <a:rPr lang="en-US" sz="1140" dirty="0">
                 <a:solidFill>
                   <a:srgbClr val="17364A"/>
                 </a:solidFill>
@@ -9003,9 +9003,9 @@
                 <a:ea typeface="Aptos" pitchFamily="34" charset="-122"/>
                 <a:cs typeface="Aptos" pitchFamily="34" charset="-120"/>
               </a:rPr>
-              <a:t>Agencies need a shared vocabulary before they can set guardrails,.</a:t>
-            </a:r>
-            <a:endParaRPr lang="en-US" sz="1220" dirty="0"/>
+              <a:t>Agencies need a shared vocabulary before they can.</a:t>
+            </a:r>
+            <a:endParaRPr lang="en-US" sz="1140" dirty="0"/>
           </a:p>
         </p:txBody>
       </p:sp>
@@ -9017,12 +9017,12 @@
         </p:nvSpPr>
         <p:spPr>
           <a:xfrm>
-            <a:off x="7635240" y="4184294"/>
-            <a:ext cx="3474720" cy="1466698"/>
+            <a:off x="7543800" y="4389120"/>
+            <a:ext cx="3611880" cy="1261872"/>
           </a:xfrm>
           <a:prstGeom prst="roundRect">
             <a:avLst>
-              <a:gd name="adj" fmla="val 7481"/>
+              <a:gd name="adj" fmla="val 8696"/>
             </a:avLst>
           </a:prstGeom>
           <a:solidFill>
@@ -9044,8 +9044,8 @@
         </p:nvSpPr>
         <p:spPr>
           <a:xfrm>
-            <a:off x="7799832" y="4330598"/>
-            <a:ext cx="3145536" cy="256032"/>
+            <a:off x="7708392" y="4517136"/>
+            <a:ext cx="3282696" cy="228600"/>
           </a:xfrm>
           <a:prstGeom prst="rect">
             <a:avLst/>
@@ -9061,7 +9061,7 @@
               <a:buNone/>
             </a:pPr>
             <a:r>
-              <a:rPr lang="en-US" sz="1300" b="1" dirty="0">
+              <a:rPr lang="en-US" sz="1220" b="1" dirty="0">
                 <a:solidFill>
                   <a:srgbClr val="0068B7"/>
                 </a:solidFill>
@@ -9071,7 +9071,7 @@
               </a:rPr>
               <a:t>Apply it</a:t>
             </a:r>
-            <a:endParaRPr lang="en-US" sz="1300" dirty="0"/>
+            <a:endParaRPr lang="en-US" sz="1220" dirty="0"/>
           </a:p>
         </p:txBody>
       </p:sp>
@@ -9083,8 +9083,8 @@
         </p:nvSpPr>
         <p:spPr>
           <a:xfrm>
-            <a:off x="7799832" y="4659782"/>
-            <a:ext cx="3145536" cy="899770"/>
+            <a:off x="7708392" y="4828032"/>
+            <a:ext cx="3282696" cy="749808"/>
           </a:xfrm>
           <a:prstGeom prst="rect">
             <a:avLst/>
@@ -9102,7 +9102,7 @@
               <a:buNone/>
             </a:pPr>
             <a:r>
-              <a:rPr lang="en-US" sz="1320" dirty="0">
+              <a:rPr lang="en-US" sz="1220" dirty="0">
                 <a:solidFill>
                   <a:srgbClr val="17364A"/>
                 </a:solidFill>
@@ -9110,9 +9110,9 @@
                 <a:ea typeface="Aptos" pitchFamily="34" charset="-122"/>
                 <a:cs typeface="Aptos" pitchFamily="34" charset="-120"/>
               </a:rPr>
-              <a:t>Connect the concept to public health purpose, responsible use, required safeguards, documentation, and the next action a department should take.</a:t>
-            </a:r>
-            <a:endParaRPr lang="en-US" sz="1320" dirty="0"/>
+              <a:t>Connect the concept to public health purpose, responsible use, required.</a:t>
+            </a:r>
+            <a:endParaRPr lang="en-US" sz="1220" dirty="0"/>
           </a:p>
         </p:txBody>
       </p:sp>
@@ -9403,8 +9403,8 @@
         </p:nvSpPr>
         <p:spPr>
           <a:xfrm>
-            <a:off x="868680" y="1508760"/>
-            <a:ext cx="6309360" cy="4160520"/>
+            <a:off x="822960" y="1463040"/>
+            <a:ext cx="6565392" cy="4343400"/>
           </a:xfrm>
           <a:prstGeom prst="rect">
             <a:avLst/>
@@ -9422,7 +9422,7 @@
               <a:buNone/>
             </a:pPr>
             <a:r>
-              <a:rPr lang="en-US" sz="2100" dirty="0">
+              <a:rPr lang="en-US" sz="1920" dirty="0">
                 <a:solidFill>
                   <a:srgbClr val="003A63"/>
                 </a:solidFill>
@@ -9430,16 +9430,16 @@
                 <a:ea typeface="Aptos" pitchFamily="34" charset="-122"/>
                 <a:cs typeface="Aptos" pitchFamily="34" charset="-120"/>
               </a:rPr>
-              <a:t>• Deep Research is an agentic research capability that can plan a multi-step search, gather.</a:t>
-            </a:r>
-            <a:endParaRPr lang="en-US" sz="2100" dirty="0"/>
-          </a:p>
-          <a:p>
-            <a:pPr indent="0" marL="0">
-              <a:buNone/>
-            </a:pPr>
-            <a:r>
-              <a:rPr lang="en-US" sz="2100" dirty="0">
+              <a:t>• Deep Research is an agentic research capability that can plan a multi-step.</a:t>
+            </a:r>
+            <a:endParaRPr lang="en-US" sz="1920" dirty="0"/>
+          </a:p>
+          <a:p>
+            <a:pPr indent="0" marL="0">
+              <a:buNone/>
+            </a:pPr>
+            <a:r>
+              <a:rPr lang="en-US" sz="1920" dirty="0">
                 <a:solidFill>
                   <a:srgbClr val="003A63"/>
                 </a:solidFill>
@@ -9447,9 +9447,9 @@
                 <a:ea typeface="Aptos" pitchFamily="34" charset="-122"/>
                 <a:cs typeface="Aptos" pitchFamily="34" charset="-120"/>
               </a:rPr>
-              <a:t>• It can help with literature scans, policy scans, funding reviews, and comparative program.</a:t>
-            </a:r>
-            <a:endParaRPr lang="en-US" sz="2100" dirty="0"/>
+              <a:t>• It can help with literature scans, policy scans, funding reviews, and.</a:t>
+            </a:r>
+            <a:endParaRPr lang="en-US" sz="1920" dirty="0"/>
           </a:p>
         </p:txBody>
       </p:sp>
@@ -9461,12 +9461,12 @@
         </p:nvSpPr>
         <p:spPr>
           <a:xfrm>
-            <a:off x="7635240" y="1325880"/>
-            <a:ext cx="3474720" cy="1255471"/>
+            <a:off x="7543800" y="1325880"/>
+            <a:ext cx="3611880" cy="1261872"/>
           </a:xfrm>
           <a:prstGeom prst="roundRect">
             <a:avLst>
-              <a:gd name="adj" fmla="val 8740"/>
+              <a:gd name="adj" fmla="val 8696"/>
             </a:avLst>
           </a:prstGeom>
           <a:solidFill>
@@ -9488,8 +9488,8 @@
         </p:nvSpPr>
         <p:spPr>
           <a:xfrm>
-            <a:off x="7799832" y="1472184"/>
-            <a:ext cx="3145536" cy="256032"/>
+            <a:off x="7708392" y="1453896"/>
+            <a:ext cx="3282696" cy="228600"/>
           </a:xfrm>
           <a:prstGeom prst="rect">
             <a:avLst/>
@@ -9505,7 +9505,7 @@
               <a:buNone/>
             </a:pPr>
             <a:r>
-              <a:rPr lang="en-US" sz="1300" b="1" dirty="0">
+              <a:rPr lang="en-US" sz="1220" b="1" dirty="0">
                 <a:solidFill>
                   <a:srgbClr val="0068B7"/>
                 </a:solidFill>
@@ -9515,7 +9515,7 @@
               </a:rPr>
               <a:t>Core concept</a:t>
             </a:r>
-            <a:endParaRPr lang="en-US" sz="1300" dirty="0"/>
+            <a:endParaRPr lang="en-US" sz="1220" dirty="0"/>
           </a:p>
         </p:txBody>
       </p:sp>
@@ -9527,8 +9527,8 @@
         </p:nvSpPr>
         <p:spPr>
           <a:xfrm>
-            <a:off x="7799832" y="1801368"/>
-            <a:ext cx="3145536" cy="688543"/>
+            <a:off x="7708392" y="1764792"/>
+            <a:ext cx="3282696" cy="749808"/>
           </a:xfrm>
           <a:prstGeom prst="rect">
             <a:avLst/>
@@ -9546,7 +9546,7 @@
               <a:buNone/>
             </a:pPr>
             <a:r>
-              <a:rPr lang="en-US" sz="1320" dirty="0">
+              <a:rPr lang="en-US" sz="1220" dirty="0">
                 <a:solidFill>
                   <a:srgbClr val="17364A"/>
                 </a:solidFill>
@@ -9554,9 +9554,9 @@
                 <a:ea typeface="Aptos" pitchFamily="34" charset="-122"/>
                 <a:cs typeface="Aptos" pitchFamily="34" charset="-120"/>
               </a:rPr>
-              <a:t>Deep Research is an agentic research capability that can plan a multi-step search, gather source.</a:t>
-            </a:r>
-            <a:endParaRPr lang="en-US" sz="1320" dirty="0"/>
+              <a:t>Deep Research is an agentic research capability that can plan a multi-step.</a:t>
+            </a:r>
+            <a:endParaRPr lang="en-US" sz="1220" dirty="0"/>
           </a:p>
         </p:txBody>
       </p:sp>
@@ -9568,12 +9568,12 @@
         </p:nvSpPr>
         <p:spPr>
           <a:xfrm>
-            <a:off x="7635240" y="2718511"/>
-            <a:ext cx="3474720" cy="1328623"/>
+            <a:off x="7543800" y="2724912"/>
+            <a:ext cx="3611880" cy="1527048"/>
           </a:xfrm>
           <a:prstGeom prst="roundRect">
             <a:avLst>
-              <a:gd name="adj" fmla="val 8259"/>
+              <a:gd name="adj" fmla="val 7186"/>
             </a:avLst>
           </a:prstGeom>
           <a:solidFill>
@@ -9595,8 +9595,8 @@
         </p:nvSpPr>
         <p:spPr>
           <a:xfrm>
-            <a:off x="7799832" y="2864815"/>
-            <a:ext cx="3145536" cy="256032"/>
+            <a:off x="7708392" y="2852928"/>
+            <a:ext cx="3282696" cy="228600"/>
           </a:xfrm>
           <a:prstGeom prst="rect">
             <a:avLst/>
@@ -9612,7 +9612,7 @@
               <a:buNone/>
             </a:pPr>
             <a:r>
-              <a:rPr lang="en-US" sz="1300" b="1" dirty="0">
+              <a:rPr lang="en-US" sz="1220" b="1" dirty="0">
                 <a:solidFill>
                   <a:srgbClr val="0068B7"/>
                 </a:solidFill>
@@ -9622,7 +9622,7 @@
               </a:rPr>
               <a:t>Concept checkpoints</a:t>
             </a:r>
-            <a:endParaRPr lang="en-US" sz="1300" dirty="0"/>
+            <a:endParaRPr lang="en-US" sz="1220" dirty="0"/>
           </a:p>
         </p:txBody>
       </p:sp>
@@ -9634,8 +9634,8 @@
         </p:nvSpPr>
         <p:spPr>
           <a:xfrm>
-            <a:off x="7818120" y="3230575"/>
-            <a:ext cx="3090672" cy="670255"/>
+            <a:off x="7726680" y="3182112"/>
+            <a:ext cx="3227832" cy="960120"/>
           </a:xfrm>
           <a:prstGeom prst="rect">
             <a:avLst/>
@@ -9653,7 +9653,7 @@
               <a:buNone/>
             </a:pPr>
             <a:r>
-              <a:rPr lang="en-US" sz="1220" dirty="0">
+              <a:rPr lang="en-US" sz="1140" dirty="0">
                 <a:solidFill>
                   <a:srgbClr val="17364A"/>
                 </a:solidFill>
@@ -9661,16 +9661,16 @@
                 <a:ea typeface="Aptos" pitchFamily="34" charset="-122"/>
                 <a:cs typeface="Aptos" pitchFamily="34" charset="-120"/>
               </a:rPr>
-              <a:t>Deep Research is an agentic research capability that can plan a.</a:t>
-            </a:r>
-            <a:endParaRPr lang="en-US" sz="1220" dirty="0"/>
-          </a:p>
-          <a:p>
-            <a:pPr indent="0" marL="0">
-              <a:buNone/>
-            </a:pPr>
-            <a:r>
-              <a:rPr lang="en-US" sz="1220" dirty="0">
+              <a:t>Deep Research is an agentic research capability.</a:t>
+            </a:r>
+            <a:endParaRPr lang="en-US" sz="1140" dirty="0"/>
+          </a:p>
+          <a:p>
+            <a:pPr indent="0" marL="0">
+              <a:buNone/>
+            </a:pPr>
+            <a:r>
+              <a:rPr lang="en-US" sz="1140" dirty="0">
                 <a:solidFill>
                   <a:srgbClr val="17364A"/>
                 </a:solidFill>
@@ -9678,9 +9678,9 @@
                 <a:ea typeface="Aptos" pitchFamily="34" charset="-122"/>
                 <a:cs typeface="Aptos" pitchFamily="34" charset="-120"/>
               </a:rPr>
-              <a:t>It can help with literature scans, policy scans, funding reviews,.</a:t>
-            </a:r>
-            <a:endParaRPr lang="en-US" sz="1220" dirty="0"/>
+              <a:t>It can help with literature scans, policy scans,.</a:t>
+            </a:r>
+            <a:endParaRPr lang="en-US" sz="1140" dirty="0"/>
           </a:p>
         </p:txBody>
       </p:sp>
@@ -9692,12 +9692,12 @@
         </p:nvSpPr>
         <p:spPr>
           <a:xfrm>
-            <a:off x="7635240" y="4184294"/>
-            <a:ext cx="3474720" cy="1466698"/>
+            <a:off x="7543800" y="4389120"/>
+            <a:ext cx="3611880" cy="1261872"/>
           </a:xfrm>
           <a:prstGeom prst="roundRect">
             <a:avLst>
-              <a:gd name="adj" fmla="val 7481"/>
+              <a:gd name="adj" fmla="val 8696"/>
             </a:avLst>
           </a:prstGeom>
           <a:solidFill>
@@ -9719,8 +9719,8 @@
         </p:nvSpPr>
         <p:spPr>
           <a:xfrm>
-            <a:off x="7799832" y="4330598"/>
-            <a:ext cx="3145536" cy="256032"/>
+            <a:off x="7708392" y="4517136"/>
+            <a:ext cx="3282696" cy="228600"/>
           </a:xfrm>
           <a:prstGeom prst="rect">
             <a:avLst/>
@@ -9736,7 +9736,7 @@
               <a:buNone/>
             </a:pPr>
             <a:r>
-              <a:rPr lang="en-US" sz="1300" b="1" dirty="0">
+              <a:rPr lang="en-US" sz="1220" b="1" dirty="0">
                 <a:solidFill>
                   <a:srgbClr val="0068B7"/>
                 </a:solidFill>
@@ -9746,7 +9746,7 @@
               </a:rPr>
               <a:t>Apply it</a:t>
             </a:r>
-            <a:endParaRPr lang="en-US" sz="1300" dirty="0"/>
+            <a:endParaRPr lang="en-US" sz="1220" dirty="0"/>
           </a:p>
         </p:txBody>
       </p:sp>
@@ -9758,8 +9758,8 @@
         </p:nvSpPr>
         <p:spPr>
           <a:xfrm>
-            <a:off x="7799832" y="4659782"/>
-            <a:ext cx="3145536" cy="899770"/>
+            <a:off x="7708392" y="4828032"/>
+            <a:ext cx="3282696" cy="749808"/>
           </a:xfrm>
           <a:prstGeom prst="rect">
             <a:avLst/>
@@ -9777,7 +9777,7 @@
               <a:buNone/>
             </a:pPr>
             <a:r>
-              <a:rPr lang="en-US" sz="1320" dirty="0">
+              <a:rPr lang="en-US" sz="1220" dirty="0">
                 <a:solidFill>
                   <a:srgbClr val="17364A"/>
                 </a:solidFill>
@@ -9785,9 +9785,9 @@
                 <a:ea typeface="Aptos" pitchFamily="34" charset="-122"/>
                 <a:cs typeface="Aptos" pitchFamily="34" charset="-120"/>
               </a:rPr>
-              <a:t>Connect the concept to public health purpose, responsible use, required safeguards, documentation, and the next action a department should take.</a:t>
-            </a:r>
-            <a:endParaRPr lang="en-US" sz="1320" dirty="0"/>
+              <a:t>Connect the concept to public health purpose, responsible use, required.</a:t>
+            </a:r>
+            <a:endParaRPr lang="en-US" sz="1220" dirty="0"/>
           </a:p>
         </p:txBody>
       </p:sp>
@@ -10078,8 +10078,8 @@
         </p:nvSpPr>
         <p:spPr>
           <a:xfrm>
-            <a:off x="868680" y="1508760"/>
-            <a:ext cx="6309360" cy="4160520"/>
+            <a:off x="822960" y="1463040"/>
+            <a:ext cx="6565392" cy="4343400"/>
           </a:xfrm>
           <a:prstGeom prst="rect">
             <a:avLst/>
@@ -10097,7 +10097,7 @@
               <a:buNone/>
             </a:pPr>
             <a:r>
-              <a:rPr lang="en-US" sz="2100" dirty="0">
+              <a:rPr lang="en-US" sz="1920" dirty="0">
                 <a:solidFill>
                   <a:srgbClr val="003A63"/>
                 </a:solidFill>
@@ -10105,16 +10105,16 @@
                 <a:ea typeface="Aptos" pitchFamily="34" charset="-122"/>
                 <a:cs typeface="Aptos" pitchFamily="34" charset="-120"/>
               </a:rPr>
-              <a:t>• Use the linked plays to decide who should be involved, what decisions need to be made, and.</a:t>
-            </a:r>
-            <a:endParaRPr lang="en-US" sz="2100" dirty="0"/>
-          </a:p>
-          <a:p>
-            <a:pPr indent="0" marL="0">
-              <a:buNone/>
-            </a:pPr>
-            <a:r>
-              <a:rPr lang="en-US" sz="2100" dirty="0">
+              <a:t>• Use the linked plays to decide who should be involved, what decisions need.</a:t>
+            </a:r>
+            <a:endParaRPr lang="en-US" sz="1920" dirty="0"/>
+          </a:p>
+          <a:p>
+            <a:pPr indent="0" marL="0">
+              <a:buNone/>
+            </a:pPr>
+            <a:r>
+              <a:rPr lang="en-US" sz="1920" dirty="0">
                 <a:solidFill>
                   <a:srgbClr val="003A63"/>
                 </a:solidFill>
@@ -10122,9 +10122,9 @@
                 <a:ea typeface="Aptos" pitchFamily="34" charset="-122"/>
                 <a:cs typeface="Aptos" pitchFamily="34" charset="-120"/>
               </a:rPr>
-              <a:t>• Use the linked tools to turn the concept into an agency artifact that can be saved, reviewed,.</a:t>
-            </a:r>
-            <a:endParaRPr lang="en-US" sz="2100" dirty="0"/>
+              <a:t>• Use the linked tools to turn the concept into an agency artifact that can be.</a:t>
+            </a:r>
+            <a:endParaRPr lang="en-US" sz="1920" dirty="0"/>
           </a:p>
         </p:txBody>
       </p:sp>
@@ -10136,12 +10136,12 @@
         </p:nvSpPr>
         <p:spPr>
           <a:xfrm>
-            <a:off x="7635240" y="1325880"/>
-            <a:ext cx="3474720" cy="1255471"/>
+            <a:off x="7543800" y="1325880"/>
+            <a:ext cx="3611880" cy="1261872"/>
           </a:xfrm>
           <a:prstGeom prst="roundRect">
             <a:avLst>
-              <a:gd name="adj" fmla="val 8740"/>
+              <a:gd name="adj" fmla="val 8696"/>
             </a:avLst>
           </a:prstGeom>
           <a:solidFill>
@@ -10163,8 +10163,8 @@
         </p:nvSpPr>
         <p:spPr>
           <a:xfrm>
-            <a:off x="7799832" y="1472184"/>
-            <a:ext cx="3145536" cy="256032"/>
+            <a:off x="7708392" y="1453896"/>
+            <a:ext cx="3282696" cy="228600"/>
           </a:xfrm>
           <a:prstGeom prst="rect">
             <a:avLst/>
@@ -10180,7 +10180,7 @@
               <a:buNone/>
             </a:pPr>
             <a:r>
-              <a:rPr lang="en-US" sz="1300" b="1" dirty="0">
+              <a:rPr lang="en-US" sz="1220" b="1" dirty="0">
                 <a:solidFill>
                   <a:srgbClr val="0068B7"/>
                 </a:solidFill>
@@ -10190,7 +10190,7 @@
               </a:rPr>
               <a:t>Core concept</a:t>
             </a:r>
-            <a:endParaRPr lang="en-US" sz="1300" dirty="0"/>
+            <a:endParaRPr lang="en-US" sz="1220" dirty="0"/>
           </a:p>
         </p:txBody>
       </p:sp>
@@ -10202,8 +10202,8 @@
         </p:nvSpPr>
         <p:spPr>
           <a:xfrm>
-            <a:off x="7799832" y="1801368"/>
-            <a:ext cx="3145536" cy="688543"/>
+            <a:off x="7708392" y="1764792"/>
+            <a:ext cx="3282696" cy="749808"/>
           </a:xfrm>
           <a:prstGeom prst="rect">
             <a:avLst/>
@@ -10221,7 +10221,7 @@
               <a:buNone/>
             </a:pPr>
             <a:r>
-              <a:rPr lang="en-US" sz="1320" dirty="0">
+              <a:rPr lang="en-US" sz="1220" dirty="0">
                 <a:solidFill>
                   <a:srgbClr val="17364A"/>
                 </a:solidFill>
@@ -10229,9 +10229,9 @@
                 <a:ea typeface="Aptos" pitchFamily="34" charset="-122"/>
                 <a:cs typeface="Aptos" pitchFamily="34" charset="-120"/>
               </a:rPr>
-              <a:t>Use the linked plays to decide who should be involved, what decisions need to be made, and which.</a:t>
-            </a:r>
-            <a:endParaRPr lang="en-US" sz="1320" dirty="0"/>
+              <a:t>Use the linked plays to decide who should be involved, what decisions need to be.</a:t>
+            </a:r>
+            <a:endParaRPr lang="en-US" sz="1220" dirty="0"/>
           </a:p>
         </p:txBody>
       </p:sp>
@@ -10243,12 +10243,12 @@
         </p:nvSpPr>
         <p:spPr>
           <a:xfrm>
-            <a:off x="7635240" y="2718511"/>
-            <a:ext cx="3474720" cy="1328623"/>
+            <a:off x="7543800" y="2724912"/>
+            <a:ext cx="3611880" cy="1527048"/>
           </a:xfrm>
           <a:prstGeom prst="roundRect">
             <a:avLst>
-              <a:gd name="adj" fmla="val 8259"/>
+              <a:gd name="adj" fmla="val 7186"/>
             </a:avLst>
           </a:prstGeom>
           <a:solidFill>
@@ -10270,8 +10270,8 @@
         </p:nvSpPr>
         <p:spPr>
           <a:xfrm>
-            <a:off x="7799832" y="2864815"/>
-            <a:ext cx="3145536" cy="256032"/>
+            <a:off x="7708392" y="2852928"/>
+            <a:ext cx="3282696" cy="228600"/>
           </a:xfrm>
           <a:prstGeom prst="rect">
             <a:avLst/>
@@ -10287,7 +10287,7 @@
               <a:buNone/>
             </a:pPr>
             <a:r>
-              <a:rPr lang="en-US" sz="1300" b="1" dirty="0">
+              <a:rPr lang="en-US" sz="1220" b="1" dirty="0">
                 <a:solidFill>
                   <a:srgbClr val="0068B7"/>
                 </a:solidFill>
@@ -10297,7 +10297,7 @@
               </a:rPr>
               <a:t>Concept checkpoints</a:t>
             </a:r>
-            <a:endParaRPr lang="en-US" sz="1300" dirty="0"/>
+            <a:endParaRPr lang="en-US" sz="1220" dirty="0"/>
           </a:p>
         </p:txBody>
       </p:sp>
@@ -10309,8 +10309,8 @@
         </p:nvSpPr>
         <p:spPr>
           <a:xfrm>
-            <a:off x="7818120" y="3230575"/>
-            <a:ext cx="3090672" cy="670255"/>
+            <a:off x="7726680" y="3182112"/>
+            <a:ext cx="3227832" cy="960120"/>
           </a:xfrm>
           <a:prstGeom prst="rect">
             <a:avLst/>
@@ -10328,7 +10328,7 @@
               <a:buNone/>
             </a:pPr>
             <a:r>
-              <a:rPr lang="en-US" sz="1220" dirty="0">
+              <a:rPr lang="en-US" sz="1140" dirty="0">
                 <a:solidFill>
                   <a:srgbClr val="17364A"/>
                 </a:solidFill>
@@ -10336,16 +10336,16 @@
                 <a:ea typeface="Aptos" pitchFamily="34" charset="-122"/>
                 <a:cs typeface="Aptos" pitchFamily="34" charset="-120"/>
               </a:rPr>
-              <a:t>Use the linked plays to decide who should be involved, what.</a:t>
-            </a:r>
-            <a:endParaRPr lang="en-US" sz="1220" dirty="0"/>
-          </a:p>
-          <a:p>
-            <a:pPr indent="0" marL="0">
-              <a:buNone/>
-            </a:pPr>
-            <a:r>
-              <a:rPr lang="en-US" sz="1220" dirty="0">
+              <a:t>Use the linked plays to decide who should be.</a:t>
+            </a:r>
+            <a:endParaRPr lang="en-US" sz="1140" dirty="0"/>
+          </a:p>
+          <a:p>
+            <a:pPr indent="0" marL="0">
+              <a:buNone/>
+            </a:pPr>
+            <a:r>
+              <a:rPr lang="en-US" sz="1140" dirty="0">
                 <a:solidFill>
                   <a:srgbClr val="17364A"/>
                 </a:solidFill>
@@ -10353,9 +10353,9 @@
                 <a:ea typeface="Aptos" pitchFamily="34" charset="-122"/>
                 <a:cs typeface="Aptos" pitchFamily="34" charset="-120"/>
               </a:rPr>
-              <a:t>Use the linked tools to turn the concept into an agency artifact.</a:t>
-            </a:r>
-            <a:endParaRPr lang="en-US" sz="1220" dirty="0"/>
+              <a:t>Use the linked tools to turn the concept into an.</a:t>
+            </a:r>
+            <a:endParaRPr lang="en-US" sz="1140" dirty="0"/>
           </a:p>
         </p:txBody>
       </p:sp>
@@ -10367,12 +10367,12 @@
         </p:nvSpPr>
         <p:spPr>
           <a:xfrm>
-            <a:off x="7635240" y="4184294"/>
-            <a:ext cx="3474720" cy="1466698"/>
+            <a:off x="7543800" y="4389120"/>
+            <a:ext cx="3611880" cy="1261872"/>
           </a:xfrm>
           <a:prstGeom prst="roundRect">
             <a:avLst>
-              <a:gd name="adj" fmla="val 7481"/>
+              <a:gd name="adj" fmla="val 8696"/>
             </a:avLst>
           </a:prstGeom>
           <a:solidFill>
@@ -10394,8 +10394,8 @@
         </p:nvSpPr>
         <p:spPr>
           <a:xfrm>
-            <a:off x="7799832" y="4330598"/>
-            <a:ext cx="3145536" cy="256032"/>
+            <a:off x="7708392" y="4517136"/>
+            <a:ext cx="3282696" cy="228600"/>
           </a:xfrm>
           <a:prstGeom prst="rect">
             <a:avLst/>
@@ -10411,7 +10411,7 @@
               <a:buNone/>
             </a:pPr>
             <a:r>
-              <a:rPr lang="en-US" sz="1300" b="1" dirty="0">
+              <a:rPr lang="en-US" sz="1220" b="1" dirty="0">
                 <a:solidFill>
                   <a:srgbClr val="0068B7"/>
                 </a:solidFill>
@@ -10421,7 +10421,7 @@
               </a:rPr>
               <a:t>Apply it</a:t>
             </a:r>
-            <a:endParaRPr lang="en-US" sz="1300" dirty="0"/>
+            <a:endParaRPr lang="en-US" sz="1220" dirty="0"/>
           </a:p>
         </p:txBody>
       </p:sp>
@@ -10433,8 +10433,8 @@
         </p:nvSpPr>
         <p:spPr>
           <a:xfrm>
-            <a:off x="7799832" y="4659782"/>
-            <a:ext cx="3145536" cy="899770"/>
+            <a:off x="7708392" y="4828032"/>
+            <a:ext cx="3282696" cy="749808"/>
           </a:xfrm>
           <a:prstGeom prst="rect">
             <a:avLst/>
@@ -10452,7 +10452,7 @@
               <a:buNone/>
             </a:pPr>
             <a:r>
-              <a:rPr lang="en-US" sz="1320" dirty="0">
+              <a:rPr lang="en-US" sz="1220" dirty="0">
                 <a:solidFill>
                   <a:srgbClr val="17364A"/>
                 </a:solidFill>
@@ -10460,9 +10460,9 @@
                 <a:ea typeface="Aptos" pitchFamily="34" charset="-122"/>
                 <a:cs typeface="Aptos" pitchFamily="34" charset="-120"/>
               </a:rPr>
-              <a:t>Connect the concept to public health purpose, responsible use, required safeguards, documentation, and the next action a department should take.</a:t>
-            </a:r>
-            <a:endParaRPr lang="en-US" sz="1320" dirty="0"/>
+              <a:t>Connect the concept to public health purpose, responsible use, required.</a:t>
+            </a:r>
+            <a:endParaRPr lang="en-US" sz="1220" dirty="0"/>
           </a:p>
         </p:txBody>
       </p:sp>
@@ -10780,7 +10780,7 @@
                 <a:ea typeface="Aptos" pitchFamily="34" charset="-122"/>
                 <a:cs typeface="Aptos" pitchFamily="34" charset="-120"/>
               </a:rPr>
-              <a:t>• Use this lesson to build a practical foundation in AI, including predictive AI, generative AI,.</a:t>
+              <a:t>• Use this lesson to build a practical foundation in AI, including predictive.</a:t>
             </a:r>
             <a:endParaRPr lang="en-US" sz="2100" dirty="0"/>
           </a:p>
@@ -10797,7 +10797,7 @@
                 <a:ea typeface="Aptos" pitchFamily="34" charset="-122"/>
                 <a:cs typeface="Aptos" pitchFamily="34" charset="-120"/>
               </a:rPr>
-              <a:t>• The goal is to understand what each capability can support, where it can fail, and what.</a:t>
+              <a:t>• The goal is to understand what each capability can support, where it can.</a:t>
             </a:r>
             <a:endParaRPr lang="en-US" sz="2100" dirty="0"/>
           </a:p>
@@ -10838,8 +10838,8 @@
         </p:nvSpPr>
         <p:spPr>
           <a:xfrm>
-            <a:off x="8074152" y="1563624"/>
-            <a:ext cx="2825496" cy="256032"/>
+            <a:off x="8074152" y="1545336"/>
+            <a:ext cx="2825496" cy="228600"/>
           </a:xfrm>
           <a:prstGeom prst="rect">
             <a:avLst/>
@@ -10855,7 +10855,7 @@
               <a:buNone/>
             </a:pPr>
             <a:r>
-              <a:rPr lang="en-US" sz="1300" b="1" dirty="0">
+              <a:rPr lang="en-US" sz="1220" b="1" dirty="0">
                 <a:solidFill>
                   <a:srgbClr val="0068B7"/>
                 </a:solidFill>
@@ -10865,7 +10865,7 @@
               </a:rPr>
               <a:t>Module details</a:t>
             </a:r>
-            <a:endParaRPr lang="en-US" sz="1300" dirty="0"/>
+            <a:endParaRPr lang="en-US" sz="1220" dirty="0"/>
           </a:p>
         </p:txBody>
       </p:sp>
@@ -10877,8 +10877,8 @@
         </p:nvSpPr>
         <p:spPr>
           <a:xfrm>
-            <a:off x="8074152" y="1892808"/>
-            <a:ext cx="2825496" cy="1353312"/>
+            <a:off x="8074152" y="1856232"/>
+            <a:ext cx="2825496" cy="1408176"/>
           </a:xfrm>
           <a:prstGeom prst="rect">
             <a:avLst/>
@@ -10896,7 +10896,7 @@
               <a:buNone/>
             </a:pPr>
             <a:r>
-              <a:rPr lang="en-US" sz="1320" dirty="0">
+              <a:rPr lang="en-US" sz="1220" dirty="0">
                 <a:solidFill>
                   <a:srgbClr val="17364A"/>
                 </a:solidFill>
@@ -10906,7 +10906,7 @@
               </a:rPr>
               <a:t>Level: Foundational Module Appears in tracks: shared-foundational</a:t>
             </a:r>
-            <a:endParaRPr lang="en-US" sz="1320" dirty="0"/>
+            <a:endParaRPr lang="en-US" sz="1220" dirty="0"/>
           </a:p>
         </p:txBody>
       </p:sp>
@@ -10945,8 +10945,8 @@
         </p:nvSpPr>
         <p:spPr>
           <a:xfrm>
-            <a:off x="8074152" y="3822192"/>
-            <a:ext cx="2825496" cy="256032"/>
+            <a:off x="8074152" y="3803904"/>
+            <a:ext cx="2825496" cy="228600"/>
           </a:xfrm>
           <a:prstGeom prst="rect">
             <a:avLst/>
@@ -10962,7 +10962,7 @@
               <a:buNone/>
             </a:pPr>
             <a:r>
-              <a:rPr lang="en-US" sz="1300" b="1" dirty="0">
+              <a:rPr lang="en-US" sz="1220" b="1" dirty="0">
                 <a:solidFill>
                   <a:srgbClr val="0068B7"/>
                 </a:solidFill>
@@ -10972,7 +10972,7 @@
               </a:rPr>
               <a:t>Learning sequence</a:t>
             </a:r>
-            <a:endParaRPr lang="en-US" sz="1300" dirty="0"/>
+            <a:endParaRPr lang="en-US" sz="1220" dirty="0"/>
           </a:p>
         </p:txBody>
       </p:sp>
@@ -10984,8 +10984,8 @@
         </p:nvSpPr>
         <p:spPr>
           <a:xfrm>
-            <a:off x="8092440" y="4187952"/>
-            <a:ext cx="2770632" cy="1033272"/>
+            <a:off x="8092440" y="4133088"/>
+            <a:ext cx="2770632" cy="1124712"/>
           </a:xfrm>
           <a:prstGeom prst="rect">
             <a:avLst/>
@@ -11003,7 +11003,7 @@
               <a:buNone/>
             </a:pPr>
             <a:r>
-              <a:rPr lang="en-US" sz="1220" dirty="0">
+              <a:rPr lang="en-US" sz="1140" dirty="0">
                 <a:solidFill>
                   <a:srgbClr val="17364A"/>
                 </a:solidFill>
@@ -11013,14 +11013,14 @@
               </a:rPr>
               <a:t>Read the module for shared vocabulary and context.</a:t>
             </a:r>
-            <a:endParaRPr lang="en-US" sz="1220" dirty="0"/>
-          </a:p>
-          <a:p>
-            <a:pPr indent="0" marL="0">
-              <a:buNone/>
-            </a:pPr>
-            <a:r>
-              <a:rPr lang="en-US" sz="1220" dirty="0">
+            <a:endParaRPr lang="en-US" sz="1140" dirty="0"/>
+          </a:p>
+          <a:p>
+            <a:pPr indent="0" marL="0">
+              <a:buNone/>
+            </a:pPr>
+            <a:r>
+              <a:rPr lang="en-US" sz="1140" dirty="0">
                 <a:solidFill>
                   <a:srgbClr val="17364A"/>
                 </a:solidFill>
@@ -11028,16 +11028,16 @@
                 <a:ea typeface="Aptos" pitchFamily="34" charset="-122"/>
                 <a:cs typeface="Aptos" pitchFamily="34" charset="-120"/>
               </a:rPr>
-              <a:t>Complete the practical exercise to apply the concept.</a:t>
-            </a:r>
-            <a:endParaRPr lang="en-US" sz="1220" dirty="0"/>
-          </a:p>
-          <a:p>
-            <a:pPr indent="0" marL="0">
-              <a:buNone/>
-            </a:pPr>
-            <a:r>
-              <a:rPr lang="en-US" sz="1220" dirty="0">
+              <a:t>Complete the practical exercise to apply the.</a:t>
+            </a:r>
+            <a:endParaRPr lang="en-US" sz="1140" dirty="0"/>
+          </a:p>
+          <a:p>
+            <a:pPr indent="0" marL="0">
+              <a:buNone/>
+            </a:pPr>
+            <a:r>
+              <a:rPr lang="en-US" sz="1140" dirty="0">
                 <a:solidFill>
                   <a:srgbClr val="17364A"/>
                 </a:solidFill>
@@ -11047,7 +11047,7 @@
               </a:rPr>
               <a:t>Use the notes and references for deeper review.</a:t>
             </a:r>
-            <a:endParaRPr lang="en-US" sz="1220" dirty="0"/>
+            <a:endParaRPr lang="en-US" sz="1140" dirty="0"/>
           </a:p>
         </p:txBody>
       </p:sp>
@@ -11338,8 +11338,8 @@
         </p:nvSpPr>
         <p:spPr>
           <a:xfrm>
-            <a:off x="868680" y="1508760"/>
-            <a:ext cx="6309360" cy="4160520"/>
+            <a:off x="822960" y="1463040"/>
+            <a:ext cx="6565392" cy="4343400"/>
           </a:xfrm>
           <a:prstGeom prst="rect">
             <a:avLst/>
@@ -11357,7 +11357,7 @@
               <a:buNone/>
             </a:pPr>
             <a:r>
-              <a:rPr lang="en-US" sz="2100" dirty="0">
+              <a:rPr lang="en-US" sz="1920" dirty="0">
                 <a:solidFill>
                   <a:srgbClr val="003A63"/>
                 </a:solidFill>
@@ -11365,9 +11365,9 @@
                 <a:ea typeface="Aptos" pitchFamily="34" charset="-122"/>
                 <a:cs typeface="Aptos" pitchFamily="34" charset="-120"/>
               </a:rPr>
-              <a:t>• Do not treat AI as a single tool or assume one model fits every public health task.</a:t>
-            </a:r>
-            <a:endParaRPr lang="en-US" sz="2100" dirty="0"/>
+              <a:t>• Do not treat AI as a single tool or assume one model fits every public.</a:t>
+            </a:r>
+            <a:endParaRPr lang="en-US" sz="1920" dirty="0"/>
           </a:p>
         </p:txBody>
       </p:sp>
@@ -11379,12 +11379,12 @@
         </p:nvSpPr>
         <p:spPr>
           <a:xfrm>
-            <a:off x="7635240" y="1325880"/>
-            <a:ext cx="3474720" cy="1207008"/>
+            <a:off x="7543800" y="1325880"/>
+            <a:ext cx="3611880" cy="1261872"/>
           </a:xfrm>
           <a:prstGeom prst="roundRect">
             <a:avLst>
-              <a:gd name="adj" fmla="val 9091"/>
+              <a:gd name="adj" fmla="val 8696"/>
             </a:avLst>
           </a:prstGeom>
           <a:solidFill>
@@ -11406,8 +11406,8 @@
         </p:nvSpPr>
         <p:spPr>
           <a:xfrm>
-            <a:off x="7799832" y="1472184"/>
-            <a:ext cx="3145536" cy="256032"/>
+            <a:off x="7708392" y="1453896"/>
+            <a:ext cx="3282696" cy="228600"/>
           </a:xfrm>
           <a:prstGeom prst="rect">
             <a:avLst/>
@@ -11423,7 +11423,7 @@
               <a:buNone/>
             </a:pPr>
             <a:r>
-              <a:rPr lang="en-US" sz="1300" b="1" dirty="0">
+              <a:rPr lang="en-US" sz="1220" b="1" dirty="0">
                 <a:solidFill>
                   <a:srgbClr val="0068B7"/>
                 </a:solidFill>
@@ -11433,7 +11433,7 @@
               </a:rPr>
               <a:t>Risk check</a:t>
             </a:r>
-            <a:endParaRPr lang="en-US" sz="1300" dirty="0"/>
+            <a:endParaRPr lang="en-US" sz="1220" dirty="0"/>
           </a:p>
         </p:txBody>
       </p:sp>
@@ -11445,8 +11445,8 @@
         </p:nvSpPr>
         <p:spPr>
           <a:xfrm>
-            <a:off x="7799832" y="1801368"/>
-            <a:ext cx="3145536" cy="640080"/>
+            <a:off x="7708392" y="1764792"/>
+            <a:ext cx="3282696" cy="749808"/>
           </a:xfrm>
           <a:prstGeom prst="rect">
             <a:avLst/>
@@ -11464,7 +11464,7 @@
               <a:buNone/>
             </a:pPr>
             <a:r>
-              <a:rPr lang="en-US" sz="1320" dirty="0">
+              <a:rPr lang="en-US" sz="1220" dirty="0">
                 <a:solidFill>
                   <a:srgbClr val="17364A"/>
                 </a:solidFill>
@@ -11472,9 +11472,9 @@
                 <a:ea typeface="Aptos" pitchFamily="34" charset="-122"/>
                 <a:cs typeface="Aptos" pitchFamily="34" charset="-120"/>
               </a:rPr>
-              <a:t>Do not treat AI as a single tool or assume one model fits every public health task.</a:t>
-            </a:r>
-            <a:endParaRPr lang="en-US" sz="1320" dirty="0"/>
+              <a:t>Do not treat AI as a single tool or assume one model fits every public health.</a:t>
+            </a:r>
+            <a:endParaRPr lang="en-US" sz="1220" dirty="0"/>
           </a:p>
         </p:txBody>
       </p:sp>
@@ -11486,12 +11486,12 @@
         </p:nvSpPr>
         <p:spPr>
           <a:xfrm>
-            <a:off x="7635240" y="2670048"/>
-            <a:ext cx="3474720" cy="1536192"/>
+            <a:off x="7543800" y="2724912"/>
+            <a:ext cx="3611880" cy="1527048"/>
           </a:xfrm>
           <a:prstGeom prst="roundRect">
             <a:avLst>
-              <a:gd name="adj" fmla="val 7143"/>
+              <a:gd name="adj" fmla="val 7186"/>
             </a:avLst>
           </a:prstGeom>
           <a:solidFill>
@@ -11513,8 +11513,8 @@
         </p:nvSpPr>
         <p:spPr>
           <a:xfrm>
-            <a:off x="7799832" y="2816352"/>
-            <a:ext cx="3145536" cy="256032"/>
+            <a:off x="7708392" y="2852928"/>
+            <a:ext cx="3282696" cy="228600"/>
           </a:xfrm>
           <a:prstGeom prst="rect">
             <a:avLst/>
@@ -11530,7 +11530,7 @@
               <a:buNone/>
             </a:pPr>
             <a:r>
-              <a:rPr lang="en-US" sz="1300" b="1" dirty="0">
+              <a:rPr lang="en-US" sz="1220" b="1" dirty="0">
                 <a:solidFill>
                   <a:srgbClr val="0068B7"/>
                 </a:solidFill>
@@ -11540,7 +11540,7 @@
               </a:rPr>
               <a:t>Concept checkpoints</a:t>
             </a:r>
-            <a:endParaRPr lang="en-US" sz="1300" dirty="0"/>
+            <a:endParaRPr lang="en-US" sz="1220" dirty="0"/>
           </a:p>
         </p:txBody>
       </p:sp>
@@ -11552,8 +11552,8 @@
         </p:nvSpPr>
         <p:spPr>
           <a:xfrm>
-            <a:off x="7818120" y="3182112"/>
-            <a:ext cx="3090672" cy="877824"/>
+            <a:off x="7726680" y="3182112"/>
+            <a:ext cx="3227832" cy="960120"/>
           </a:xfrm>
           <a:prstGeom prst="rect">
             <a:avLst/>
@@ -11571,7 +11571,7 @@
               <a:buNone/>
             </a:pPr>
             <a:r>
-              <a:rPr lang="en-US" sz="1220" dirty="0">
+              <a:rPr lang="en-US" sz="1140" dirty="0">
                 <a:solidFill>
                   <a:srgbClr val="17364A"/>
                 </a:solidFill>
@@ -11579,9 +11579,9 @@
                 <a:ea typeface="Aptos" pitchFamily="34" charset="-122"/>
                 <a:cs typeface="Aptos" pitchFamily="34" charset="-120"/>
               </a:rPr>
-              <a:t>Do not treat AI as a single tool or assume one model fits every.</a:t>
-            </a:r>
-            <a:endParaRPr lang="en-US" sz="1220" dirty="0"/>
+              <a:t>Do not treat AI as a single tool or assume one.</a:t>
+            </a:r>
+            <a:endParaRPr lang="en-US" sz="1140" dirty="0"/>
           </a:p>
         </p:txBody>
       </p:sp>
@@ -11593,12 +11593,12 @@
         </p:nvSpPr>
         <p:spPr>
           <a:xfrm>
-            <a:off x="7635240" y="4343400"/>
-            <a:ext cx="3474720" cy="1255471"/>
+            <a:off x="7543800" y="4389120"/>
+            <a:ext cx="3611880" cy="1261872"/>
           </a:xfrm>
           <a:prstGeom prst="roundRect">
             <a:avLst>
-              <a:gd name="adj" fmla="val 8740"/>
+              <a:gd name="adj" fmla="val 8696"/>
             </a:avLst>
           </a:prstGeom>
           <a:solidFill>
@@ -11620,8 +11620,8 @@
         </p:nvSpPr>
         <p:spPr>
           <a:xfrm>
-            <a:off x="7799832" y="4489704"/>
-            <a:ext cx="3145536" cy="256032"/>
+            <a:off x="7708392" y="4517136"/>
+            <a:ext cx="3282696" cy="228600"/>
           </a:xfrm>
           <a:prstGeom prst="rect">
             <a:avLst/>
@@ -11637,7 +11637,7 @@
               <a:buNone/>
             </a:pPr>
             <a:r>
-              <a:rPr lang="en-US" sz="1300" b="1" dirty="0">
+              <a:rPr lang="en-US" sz="1220" b="1" dirty="0">
                 <a:solidFill>
                   <a:srgbClr val="0068B7"/>
                 </a:solidFill>
@@ -11647,7 +11647,7 @@
               </a:rPr>
               <a:t>Safeguard to plan</a:t>
             </a:r>
-            <a:endParaRPr lang="en-US" sz="1300" dirty="0"/>
+            <a:endParaRPr lang="en-US" sz="1220" dirty="0"/>
           </a:p>
         </p:txBody>
       </p:sp>
@@ -11659,8 +11659,8 @@
         </p:nvSpPr>
         <p:spPr>
           <a:xfrm>
-            <a:off x="7799832" y="4818888"/>
-            <a:ext cx="3145536" cy="688543"/>
+            <a:off x="7708392" y="4828032"/>
+            <a:ext cx="3282696" cy="749808"/>
           </a:xfrm>
           <a:prstGeom prst="rect">
             <a:avLst/>
@@ -11678,7 +11678,7 @@
               <a:buNone/>
             </a:pPr>
             <a:r>
-              <a:rPr lang="en-US" sz="1320" dirty="0">
+              <a:rPr lang="en-US" sz="1220" dirty="0">
                 <a:solidFill>
                   <a:srgbClr val="17364A"/>
                 </a:solidFill>
@@ -11686,9 +11686,9 @@
                 <a:ea typeface="Aptos" pitchFamily="34" charset="-122"/>
                 <a:cs typeface="Aptos" pitchFamily="34" charset="-120"/>
               </a:rPr>
-              <a:t>Identify what could go wrong, who could be affected, what safeguards are needed, and what evidence should be reviewed before use.</a:t>
-            </a:r>
-            <a:endParaRPr lang="en-US" sz="1320" dirty="0"/>
+              <a:t>Identify what could go wrong, who could be affected, what safeguards are needed,.</a:t>
+            </a:r>
+            <a:endParaRPr lang="en-US" sz="1220" dirty="0"/>
           </a:p>
         </p:txBody>
       </p:sp>
@@ -11979,8 +11979,8 @@
         </p:nvSpPr>
         <p:spPr>
           <a:xfrm>
-            <a:off x="868680" y="1508760"/>
-            <a:ext cx="6309360" cy="4160520"/>
+            <a:off x="822960" y="1463040"/>
+            <a:ext cx="6565392" cy="4343400"/>
           </a:xfrm>
           <a:prstGeom prst="rect">
             <a:avLst/>
@@ -11998,7 +11998,7 @@
               <a:buNone/>
             </a:pPr>
             <a:r>
-              <a:rPr lang="en-US" sz="2100" dirty="0">
+              <a:rPr lang="en-US" sz="1920" dirty="0">
                 <a:solidFill>
                   <a:srgbClr val="003A63"/>
                 </a:solidFill>
@@ -12006,16 +12006,16 @@
                 <a:ea typeface="Aptos" pitchFamily="34" charset="-122"/>
                 <a:cs typeface="Aptos" pitchFamily="34" charset="-120"/>
               </a:rPr>
-              <a:t>• A shared AI vocabulary prevents agencies from approving tools before they understand the.</a:t>
-            </a:r>
-            <a:endParaRPr lang="en-US" sz="2100" dirty="0"/>
-          </a:p>
-          <a:p>
-            <a:pPr indent="0" marL="0">
-              <a:buNone/>
-            </a:pPr>
-            <a:r>
-              <a:rPr lang="en-US" sz="2100" dirty="0">
+              <a:t>• A shared AI vocabulary prevents agencies from approving tools before they.</a:t>
+            </a:r>
+            <a:endParaRPr lang="en-US" sz="1920" dirty="0"/>
+          </a:p>
+          <a:p>
+            <a:pPr indent="0" marL="0">
+              <a:buNone/>
+            </a:pPr>
+            <a:r>
+              <a:rPr lang="en-US" sz="1920" dirty="0">
                 <a:solidFill>
                   <a:srgbClr val="003A63"/>
                 </a:solidFill>
@@ -12023,9 +12023,9 @@
                 <a:ea typeface="Aptos" pitchFamily="34" charset="-122"/>
                 <a:cs typeface="Aptos" pitchFamily="34" charset="-120"/>
               </a:rPr>
-              <a:t>• This is especially important for STLT public health departments because AI may enter through.</a:t>
-            </a:r>
-            <a:endParaRPr lang="en-US" sz="2100" dirty="0"/>
+              <a:t>• This is especially important for STLT public health departments because AI.</a:t>
+            </a:r>
+            <a:endParaRPr lang="en-US" sz="1920" dirty="0"/>
           </a:p>
         </p:txBody>
       </p:sp>
@@ -12037,12 +12037,12 @@
         </p:nvSpPr>
         <p:spPr>
           <a:xfrm>
-            <a:off x="7635240" y="1325880"/>
-            <a:ext cx="3474720" cy="1255471"/>
+            <a:off x="7543800" y="1325880"/>
+            <a:ext cx="3611880" cy="1261872"/>
           </a:xfrm>
           <a:prstGeom prst="roundRect">
             <a:avLst>
-              <a:gd name="adj" fmla="val 8740"/>
+              <a:gd name="adj" fmla="val 8696"/>
             </a:avLst>
           </a:prstGeom>
           <a:solidFill>
@@ -12064,8 +12064,8 @@
         </p:nvSpPr>
         <p:spPr>
           <a:xfrm>
-            <a:off x="7799832" y="1472184"/>
-            <a:ext cx="3145536" cy="256032"/>
+            <a:off x="7708392" y="1453896"/>
+            <a:ext cx="3282696" cy="228600"/>
           </a:xfrm>
           <a:prstGeom prst="rect">
             <a:avLst/>
@@ -12081,7 +12081,7 @@
               <a:buNone/>
             </a:pPr>
             <a:r>
-              <a:rPr lang="en-US" sz="1300" b="1" dirty="0">
+              <a:rPr lang="en-US" sz="1220" b="1" dirty="0">
                 <a:solidFill>
                   <a:srgbClr val="0068B7"/>
                 </a:solidFill>
@@ -12091,7 +12091,7 @@
               </a:rPr>
               <a:t>Practice focus</a:t>
             </a:r>
-            <a:endParaRPr lang="en-US" sz="1300" dirty="0"/>
+            <a:endParaRPr lang="en-US" sz="1220" dirty="0"/>
           </a:p>
         </p:txBody>
       </p:sp>
@@ -12103,8 +12103,8 @@
         </p:nvSpPr>
         <p:spPr>
           <a:xfrm>
-            <a:off x="7799832" y="1801368"/>
-            <a:ext cx="3145536" cy="688543"/>
+            <a:off x="7708392" y="1764792"/>
+            <a:ext cx="3282696" cy="749808"/>
           </a:xfrm>
           <a:prstGeom prst="rect">
             <a:avLst/>
@@ -12122,7 +12122,7 @@
               <a:buNone/>
             </a:pPr>
             <a:r>
-              <a:rPr lang="en-US" sz="1320" dirty="0">
+              <a:rPr lang="en-US" sz="1220" dirty="0">
                 <a:solidFill>
                   <a:srgbClr val="17364A"/>
                 </a:solidFill>
@@ -12130,9 +12130,9 @@
                 <a:ea typeface="Aptos" pitchFamily="34" charset="-122"/>
                 <a:cs typeface="Aptos" pitchFamily="34" charset="-120"/>
               </a:rPr>
-              <a:t>A shared AI vocabulary prevents agencies from approving tools before they understand the workflow,.</a:t>
-            </a:r>
-            <a:endParaRPr lang="en-US" sz="1320" dirty="0"/>
+              <a:t>A shared AI vocabulary prevents agencies from approving tools before they.</a:t>
+            </a:r>
+            <a:endParaRPr lang="en-US" sz="1220" dirty="0"/>
           </a:p>
         </p:txBody>
       </p:sp>
@@ -12144,12 +12144,12 @@
         </p:nvSpPr>
         <p:spPr>
           <a:xfrm>
-            <a:off x="7635240" y="2718511"/>
-            <a:ext cx="3474720" cy="1328623"/>
+            <a:off x="7543800" y="2724912"/>
+            <a:ext cx="3611880" cy="1527048"/>
           </a:xfrm>
           <a:prstGeom prst="roundRect">
             <a:avLst>
-              <a:gd name="adj" fmla="val 8259"/>
+              <a:gd name="adj" fmla="val 7186"/>
             </a:avLst>
           </a:prstGeom>
           <a:solidFill>
@@ -12171,8 +12171,8 @@
         </p:nvSpPr>
         <p:spPr>
           <a:xfrm>
-            <a:off x="7799832" y="2864815"/>
-            <a:ext cx="3145536" cy="256032"/>
+            <a:off x="7708392" y="2852928"/>
+            <a:ext cx="3282696" cy="228600"/>
           </a:xfrm>
           <a:prstGeom prst="rect">
             <a:avLst/>
@@ -12188,7 +12188,7 @@
               <a:buNone/>
             </a:pPr>
             <a:r>
-              <a:rPr lang="en-US" sz="1300" b="1" dirty="0">
+              <a:rPr lang="en-US" sz="1220" b="1" dirty="0">
                 <a:solidFill>
                   <a:srgbClr val="0068B7"/>
                 </a:solidFill>
@@ -12198,7 +12198,7 @@
               </a:rPr>
               <a:t>Concept checkpoints</a:t>
             </a:r>
-            <a:endParaRPr lang="en-US" sz="1300" dirty="0"/>
+            <a:endParaRPr lang="en-US" sz="1220" dirty="0"/>
           </a:p>
         </p:txBody>
       </p:sp>
@@ -12210,8 +12210,8 @@
         </p:nvSpPr>
         <p:spPr>
           <a:xfrm>
-            <a:off x="7818120" y="3230575"/>
-            <a:ext cx="3090672" cy="670255"/>
+            <a:off x="7726680" y="3182112"/>
+            <a:ext cx="3227832" cy="960120"/>
           </a:xfrm>
           <a:prstGeom prst="rect">
             <a:avLst/>
@@ -12229,7 +12229,7 @@
               <a:buNone/>
             </a:pPr>
             <a:r>
-              <a:rPr lang="en-US" sz="1220" dirty="0">
+              <a:rPr lang="en-US" sz="1140" dirty="0">
                 <a:solidFill>
                   <a:srgbClr val="17364A"/>
                 </a:solidFill>
@@ -12237,16 +12237,16 @@
                 <a:ea typeface="Aptos" pitchFamily="34" charset="-122"/>
                 <a:cs typeface="Aptos" pitchFamily="34" charset="-120"/>
               </a:rPr>
-              <a:t>A shared AI vocabulary prevents agencies from approving tools.</a:t>
-            </a:r>
-            <a:endParaRPr lang="en-US" sz="1220" dirty="0"/>
-          </a:p>
-          <a:p>
-            <a:pPr indent="0" marL="0">
-              <a:buNone/>
-            </a:pPr>
-            <a:r>
-              <a:rPr lang="en-US" sz="1220" dirty="0">
+              <a:t>A shared AI vocabulary prevents agencies from.</a:t>
+            </a:r>
+            <a:endParaRPr lang="en-US" sz="1140" dirty="0"/>
+          </a:p>
+          <a:p>
+            <a:pPr indent="0" marL="0">
+              <a:buNone/>
+            </a:pPr>
+            <a:r>
+              <a:rPr lang="en-US" sz="1140" dirty="0">
                 <a:solidFill>
                   <a:srgbClr val="17364A"/>
                 </a:solidFill>
@@ -12254,9 +12254,9 @@
                 <a:ea typeface="Aptos" pitchFamily="34" charset="-122"/>
                 <a:cs typeface="Aptos" pitchFamily="34" charset="-120"/>
               </a:rPr>
-              <a:t>This is especially important for STLT public health departments.</a:t>
-            </a:r>
-            <a:endParaRPr lang="en-US" sz="1220" dirty="0"/>
+              <a:t>This is especially important for STLT public.</a:t>
+            </a:r>
+            <a:endParaRPr lang="en-US" sz="1140" dirty="0"/>
           </a:p>
         </p:txBody>
       </p:sp>
@@ -12268,12 +12268,12 @@
         </p:nvSpPr>
         <p:spPr>
           <a:xfrm>
-            <a:off x="7635240" y="4184294"/>
-            <a:ext cx="3474720" cy="1466698"/>
+            <a:off x="7543800" y="4389120"/>
+            <a:ext cx="3611880" cy="1261872"/>
           </a:xfrm>
           <a:prstGeom prst="roundRect">
             <a:avLst>
-              <a:gd name="adj" fmla="val 7481"/>
+              <a:gd name="adj" fmla="val 8696"/>
             </a:avLst>
           </a:prstGeom>
           <a:solidFill>
@@ -12295,8 +12295,8 @@
         </p:nvSpPr>
         <p:spPr>
           <a:xfrm>
-            <a:off x="7799832" y="4330598"/>
-            <a:ext cx="3145536" cy="256032"/>
+            <a:off x="7708392" y="4517136"/>
+            <a:ext cx="3282696" cy="228600"/>
           </a:xfrm>
           <a:prstGeom prst="rect">
             <a:avLst/>
@@ -12312,7 +12312,7 @@
               <a:buNone/>
             </a:pPr>
             <a:r>
-              <a:rPr lang="en-US" sz="1300" b="1" dirty="0">
+              <a:rPr lang="en-US" sz="1220" b="1" dirty="0">
                 <a:solidFill>
                   <a:srgbClr val="0068B7"/>
                 </a:solidFill>
@@ -12322,7 +12322,7 @@
               </a:rPr>
               <a:t>What to produce</a:t>
             </a:r>
-            <a:endParaRPr lang="en-US" sz="1300" dirty="0"/>
+            <a:endParaRPr lang="en-US" sz="1220" dirty="0"/>
           </a:p>
         </p:txBody>
       </p:sp>
@@ -12334,8 +12334,8 @@
         </p:nvSpPr>
         <p:spPr>
           <a:xfrm>
-            <a:off x="7799832" y="4659782"/>
-            <a:ext cx="3145536" cy="899770"/>
+            <a:off x="7708392" y="4828032"/>
+            <a:ext cx="3282696" cy="749808"/>
           </a:xfrm>
           <a:prstGeom prst="rect">
             <a:avLst/>
@@ -12353,7 +12353,7 @@
               <a:buNone/>
             </a:pPr>
             <a:r>
-              <a:rPr lang="en-US" sz="1320" dirty="0">
+              <a:rPr lang="en-US" sz="1220" dirty="0">
                 <a:solidFill>
                   <a:srgbClr val="17364A"/>
                 </a:solidFill>
@@ -12361,9 +12361,9 @@
                 <a:ea typeface="Aptos" pitchFamily="34" charset="-122"/>
                 <a:cs typeface="Aptos" pitchFamily="34" charset="-120"/>
               </a:rPr>
-              <a:t>Use the assignment to test whether you can explain the concept, apply it to a realistic public health situation, and identify what would need review before the work moves forward.</a:t>
-            </a:r>
-            <a:endParaRPr lang="en-US" sz="1320" dirty="0"/>
+              <a:t>Use the assignment to test whether you can explain the concept, apply it to a.</a:t>
+            </a:r>
+            <a:endParaRPr lang="en-US" sz="1220" dirty="0"/>
           </a:p>
         </p:txBody>
       </p:sp>
@@ -12654,8 +12654,8 @@
         </p:nvSpPr>
         <p:spPr>
           <a:xfrm>
-            <a:off x="868680" y="1508760"/>
-            <a:ext cx="6309360" cy="4160520"/>
+            <a:off x="822960" y="1463040"/>
+            <a:ext cx="6565392" cy="4343400"/>
           </a:xfrm>
           <a:prstGeom prst="rect">
             <a:avLst/>
@@ -12673,7 +12673,7 @@
               <a:buNone/>
             </a:pPr>
             <a:r>
-              <a:rPr lang="en-US" sz="2100" dirty="0">
+              <a:rPr lang="en-US" sz="1920" dirty="0">
                 <a:solidFill>
                   <a:srgbClr val="003A63"/>
                 </a:solidFill>
@@ -12683,14 +12683,14 @@
               </a:rPr>
               <a:t>• What AI tools or AI-enabled vendor products are already being used informally?</a:t>
             </a:r>
-            <a:endParaRPr lang="en-US" sz="2100" dirty="0"/>
-          </a:p>
-          <a:p>
-            <a:pPr indent="0" marL="0">
-              <a:buNone/>
-            </a:pPr>
-            <a:r>
-              <a:rPr lang="en-US" sz="2100" dirty="0">
+            <a:endParaRPr lang="en-US" sz="1920" dirty="0"/>
+          </a:p>
+          <a:p>
+            <a:pPr indent="0" marL="0">
+              <a:buNone/>
+            </a:pPr>
+            <a:r>
+              <a:rPr lang="en-US" sz="1920" dirty="0">
                 <a:solidFill>
                   <a:srgbClr val="003A63"/>
                 </a:solidFill>
@@ -12700,14 +12700,14 @@
               </a:rPr>
               <a:t>• Which public health decisions should never be delegated to an AI system?</a:t>
             </a:r>
-            <a:endParaRPr lang="en-US" sz="2100" dirty="0"/>
-          </a:p>
-          <a:p>
-            <a:pPr indent="0" marL="0">
-              <a:buNone/>
-            </a:pPr>
-            <a:r>
-              <a:rPr lang="en-US" sz="2100" dirty="0">
+            <a:endParaRPr lang="en-US" sz="1920" dirty="0"/>
+          </a:p>
+          <a:p>
+            <a:pPr indent="0" marL="0">
+              <a:buNone/>
+            </a:pPr>
+            <a:r>
+              <a:rPr lang="en-US" sz="1920" dirty="0">
                 <a:solidFill>
                   <a:srgbClr val="003A63"/>
                 </a:solidFill>
@@ -12715,9 +12715,9 @@
                 <a:ea typeface="Aptos" pitchFamily="34" charset="-122"/>
                 <a:cs typeface="Aptos" pitchFamily="34" charset="-120"/>
               </a:rPr>
-              <a:t>• Who needs enough AI literacy to participate in governance, procurement, or implementation.</a:t>
-            </a:r>
-            <a:endParaRPr lang="en-US" sz="2100" dirty="0"/>
+              <a:t>• Who needs enough AI literacy to participate in governance, procurement, or.</a:t>
+            </a:r>
+            <a:endParaRPr lang="en-US" sz="1920" dirty="0"/>
           </a:p>
         </p:txBody>
       </p:sp>
@@ -12729,12 +12729,12 @@
         </p:nvSpPr>
         <p:spPr>
           <a:xfrm>
-            <a:off x="7635240" y="1325880"/>
-            <a:ext cx="3474720" cy="1207008"/>
+            <a:off x="7543800" y="1325880"/>
+            <a:ext cx="3611880" cy="1261872"/>
           </a:xfrm>
           <a:prstGeom prst="roundRect">
             <a:avLst>
-              <a:gd name="adj" fmla="val 9091"/>
+              <a:gd name="adj" fmla="val 8696"/>
             </a:avLst>
           </a:prstGeom>
           <a:solidFill>
@@ -12756,8 +12756,8 @@
         </p:nvSpPr>
         <p:spPr>
           <a:xfrm>
-            <a:off x="7799832" y="1472184"/>
-            <a:ext cx="3145536" cy="256032"/>
+            <a:off x="7708392" y="1453896"/>
+            <a:ext cx="3282696" cy="228600"/>
           </a:xfrm>
           <a:prstGeom prst="rect">
             <a:avLst/>
@@ -12773,7 +12773,7 @@
               <a:buNone/>
             </a:pPr>
             <a:r>
-              <a:rPr lang="en-US" sz="1300" b="1" dirty="0">
+              <a:rPr lang="en-US" sz="1220" b="1" dirty="0">
                 <a:solidFill>
                   <a:srgbClr val="0068B7"/>
                 </a:solidFill>
@@ -12783,7 +12783,7 @@
               </a:rPr>
               <a:t>Core concept</a:t>
             </a:r>
-            <a:endParaRPr lang="en-US" sz="1300" dirty="0"/>
+            <a:endParaRPr lang="en-US" sz="1220" dirty="0"/>
           </a:p>
         </p:txBody>
       </p:sp>
@@ -12795,8 +12795,8 @@
         </p:nvSpPr>
         <p:spPr>
           <a:xfrm>
-            <a:off x="7799832" y="1801368"/>
-            <a:ext cx="3145536" cy="640080"/>
+            <a:off x="7708392" y="1764792"/>
+            <a:ext cx="3282696" cy="749808"/>
           </a:xfrm>
           <a:prstGeom prst="rect">
             <a:avLst/>
@@ -12814,7 +12814,7 @@
               <a:buNone/>
             </a:pPr>
             <a:r>
-              <a:rPr lang="en-US" sz="1320" dirty="0">
+              <a:rPr lang="en-US" sz="1220" dirty="0">
                 <a:solidFill>
                   <a:srgbClr val="17364A"/>
                 </a:solidFill>
@@ -12824,7 +12824,7 @@
               </a:rPr>
               <a:t>What AI tools or AI-enabled vendor products are already being used informally?</a:t>
             </a:r>
-            <a:endParaRPr lang="en-US" sz="1320" dirty="0"/>
+            <a:endParaRPr lang="en-US" sz="1220" dirty="0"/>
           </a:p>
         </p:txBody>
       </p:sp>
@@ -12836,12 +12836,12 @@
         </p:nvSpPr>
         <p:spPr>
           <a:xfrm>
-            <a:off x="7635240" y="2670048"/>
-            <a:ext cx="3474720" cy="1377086"/>
+            <a:off x="7543800" y="2724912"/>
+            <a:ext cx="3611880" cy="1527048"/>
           </a:xfrm>
           <a:prstGeom prst="roundRect">
             <a:avLst>
-              <a:gd name="adj" fmla="val 7968"/>
+              <a:gd name="adj" fmla="val 7186"/>
             </a:avLst>
           </a:prstGeom>
           <a:solidFill>
@@ -12863,8 +12863,8 @@
         </p:nvSpPr>
         <p:spPr>
           <a:xfrm>
-            <a:off x="7799832" y="2816352"/>
-            <a:ext cx="3145536" cy="256032"/>
+            <a:off x="7708392" y="2852928"/>
+            <a:ext cx="3282696" cy="228600"/>
           </a:xfrm>
           <a:prstGeom prst="rect">
             <a:avLst/>
@@ -12880,7 +12880,7 @@
               <a:buNone/>
             </a:pPr>
             <a:r>
-              <a:rPr lang="en-US" sz="1300" b="1" dirty="0">
+              <a:rPr lang="en-US" sz="1220" b="1" dirty="0">
                 <a:solidFill>
                   <a:srgbClr val="0068B7"/>
                 </a:solidFill>
@@ -12890,7 +12890,7 @@
               </a:rPr>
               <a:t>Concept checkpoints</a:t>
             </a:r>
-            <a:endParaRPr lang="en-US" sz="1300" dirty="0"/>
+            <a:endParaRPr lang="en-US" sz="1220" dirty="0"/>
           </a:p>
         </p:txBody>
       </p:sp>
@@ -12902,8 +12902,8 @@
         </p:nvSpPr>
         <p:spPr>
           <a:xfrm>
-            <a:off x="7818120" y="3182112"/>
-            <a:ext cx="3090672" cy="718718"/>
+            <a:off x="7726680" y="3182112"/>
+            <a:ext cx="3227832" cy="960120"/>
           </a:xfrm>
           <a:prstGeom prst="rect">
             <a:avLst/>
@@ -12921,7 +12921,7 @@
               <a:buNone/>
             </a:pPr>
             <a:r>
-              <a:rPr lang="en-US" sz="1220" dirty="0">
+              <a:rPr lang="en-US" sz="1140" dirty="0">
                 <a:solidFill>
                   <a:srgbClr val="17364A"/>
                 </a:solidFill>
@@ -12929,16 +12929,16 @@
                 <a:ea typeface="Aptos" pitchFamily="34" charset="-122"/>
                 <a:cs typeface="Aptos" pitchFamily="34" charset="-120"/>
               </a:rPr>
-              <a:t>What AI tools or AI-enabled vendor products are already being used.</a:t>
-            </a:r>
-            <a:endParaRPr lang="en-US" sz="1220" dirty="0"/>
-          </a:p>
-          <a:p>
-            <a:pPr indent="0" marL="0">
-              <a:buNone/>
-            </a:pPr>
-            <a:r>
-              <a:rPr lang="en-US" sz="1220" dirty="0">
+              <a:t>What AI tools or AI-enabled vendor products are.</a:t>
+            </a:r>
+            <a:endParaRPr lang="en-US" sz="1140" dirty="0"/>
+          </a:p>
+          <a:p>
+            <a:pPr indent="0" marL="0">
+              <a:buNone/>
+            </a:pPr>
+            <a:r>
+              <a:rPr lang="en-US" sz="1140" dirty="0">
                 <a:solidFill>
                   <a:srgbClr val="17364A"/>
                 </a:solidFill>
@@ -12946,16 +12946,16 @@
                 <a:ea typeface="Aptos" pitchFamily="34" charset="-122"/>
                 <a:cs typeface="Aptos" pitchFamily="34" charset="-120"/>
               </a:rPr>
-              <a:t>Which public health decisions should never be delegated to an AI.</a:t>
-            </a:r>
-            <a:endParaRPr lang="en-US" sz="1220" dirty="0"/>
-          </a:p>
-          <a:p>
-            <a:pPr indent="0" marL="0">
-              <a:buNone/>
-            </a:pPr>
-            <a:r>
-              <a:rPr lang="en-US" sz="1220" dirty="0">
+              <a:t>Which public health decisions should never be.</a:t>
+            </a:r>
+            <a:endParaRPr lang="en-US" sz="1140" dirty="0"/>
+          </a:p>
+          <a:p>
+            <a:pPr indent="0" marL="0">
+              <a:buNone/>
+            </a:pPr>
+            <a:r>
+              <a:rPr lang="en-US" sz="1140" dirty="0">
                 <a:solidFill>
                   <a:srgbClr val="17364A"/>
                 </a:solidFill>
@@ -12963,9 +12963,9 @@
                 <a:ea typeface="Aptos" pitchFamily="34" charset="-122"/>
                 <a:cs typeface="Aptos" pitchFamily="34" charset="-120"/>
               </a:rPr>
-              <a:t>Who needs enough AI literacy to participate in governance,.</a:t>
-            </a:r>
-            <a:endParaRPr lang="en-US" sz="1220" dirty="0"/>
+              <a:t>Who needs enough AI literacy to participate in.</a:t>
+            </a:r>
+            <a:endParaRPr lang="en-US" sz="1140" dirty="0"/>
           </a:p>
         </p:txBody>
       </p:sp>
@@ -12977,12 +12977,12 @@
         </p:nvSpPr>
         <p:spPr>
           <a:xfrm>
-            <a:off x="7635240" y="4184294"/>
-            <a:ext cx="3474720" cy="1466698"/>
+            <a:off x="7543800" y="4389120"/>
+            <a:ext cx="3611880" cy="1261872"/>
           </a:xfrm>
           <a:prstGeom prst="roundRect">
             <a:avLst>
-              <a:gd name="adj" fmla="val 7481"/>
+              <a:gd name="adj" fmla="val 8696"/>
             </a:avLst>
           </a:prstGeom>
           <a:solidFill>
@@ -13004,8 +13004,8 @@
         </p:nvSpPr>
         <p:spPr>
           <a:xfrm>
-            <a:off x="7799832" y="4330598"/>
-            <a:ext cx="3145536" cy="256032"/>
+            <a:off x="7708392" y="4517136"/>
+            <a:ext cx="3282696" cy="228600"/>
           </a:xfrm>
           <a:prstGeom prst="rect">
             <a:avLst/>
@@ -13021,7 +13021,7 @@
               <a:buNone/>
             </a:pPr>
             <a:r>
-              <a:rPr lang="en-US" sz="1300" b="1" dirty="0">
+              <a:rPr lang="en-US" sz="1220" b="1" dirty="0">
                 <a:solidFill>
                   <a:srgbClr val="0068B7"/>
                 </a:solidFill>
@@ -13031,7 +13031,7 @@
               </a:rPr>
               <a:t>Apply it</a:t>
             </a:r>
-            <a:endParaRPr lang="en-US" sz="1300" dirty="0"/>
+            <a:endParaRPr lang="en-US" sz="1220" dirty="0"/>
           </a:p>
         </p:txBody>
       </p:sp>
@@ -13043,8 +13043,8 @@
         </p:nvSpPr>
         <p:spPr>
           <a:xfrm>
-            <a:off x="7799832" y="4659782"/>
-            <a:ext cx="3145536" cy="899770"/>
+            <a:off x="7708392" y="4828032"/>
+            <a:ext cx="3282696" cy="749808"/>
           </a:xfrm>
           <a:prstGeom prst="rect">
             <a:avLst/>
@@ -13062,7 +13062,7 @@
               <a:buNone/>
             </a:pPr>
             <a:r>
-              <a:rPr lang="en-US" sz="1320" dirty="0">
+              <a:rPr lang="en-US" sz="1220" dirty="0">
                 <a:solidFill>
                   <a:srgbClr val="17364A"/>
                 </a:solidFill>
@@ -13070,9 +13070,9 @@
                 <a:ea typeface="Aptos" pitchFamily="34" charset="-122"/>
                 <a:cs typeface="Aptos" pitchFamily="34" charset="-120"/>
               </a:rPr>
-              <a:t>Connect the concept to public health purpose, responsible use, required safeguards, documentation, and the next action a department should take.</a:t>
-            </a:r>
-            <a:endParaRPr lang="en-US" sz="1320" dirty="0"/>
+              <a:t>Connect the concept to public health purpose, responsible use, required.</a:t>
+            </a:r>
+            <a:endParaRPr lang="en-US" sz="1220" dirty="0"/>
           </a:p>
         </p:txBody>
       </p:sp>
@@ -13363,8 +13363,8 @@
         </p:nvSpPr>
         <p:spPr>
           <a:xfrm>
-            <a:off x="868680" y="1508760"/>
-            <a:ext cx="6309360" cy="4160520"/>
+            <a:off x="822960" y="1463040"/>
+            <a:ext cx="6565392" cy="4343400"/>
           </a:xfrm>
           <a:prstGeom prst="rect">
             <a:avLst/>
@@ -13382,7 +13382,7 @@
               <a:buNone/>
             </a:pPr>
             <a:r>
-              <a:rPr lang="en-US" sz="2100" dirty="0">
+              <a:rPr lang="en-US" sz="1920" dirty="0">
                 <a:solidFill>
                   <a:srgbClr val="003A63"/>
                 </a:solidFill>
@@ -13390,16 +13390,16 @@
                 <a:ea typeface="Aptos" pitchFamily="34" charset="-122"/>
                 <a:cs typeface="Aptos" pitchFamily="34" charset="-120"/>
               </a:rPr>
-              <a:t>• Ask each program area to list one current task that involves searching, summarizing, drafting,.</a:t>
-            </a:r>
-            <a:endParaRPr lang="en-US" sz="2100" dirty="0"/>
-          </a:p>
-          <a:p>
-            <a:pPr indent="0" marL="0">
-              <a:buNone/>
-            </a:pPr>
-            <a:r>
-              <a:rPr lang="en-US" sz="2100" dirty="0">
+              <a:t>• Ask each program area to list one current task that involves searching,.</a:t>
+            </a:r>
+            <a:endParaRPr lang="en-US" sz="1920" dirty="0"/>
+          </a:p>
+          <a:p>
+            <a:pPr indent="0" marL="0">
+              <a:buNone/>
+            </a:pPr>
+            <a:r>
+              <a:rPr lang="en-US" sz="1920" dirty="0">
                 <a:solidFill>
                   <a:srgbClr val="003A63"/>
                 </a:solidFill>
@@ -13409,14 +13409,14 @@
               </a:rPr>
               <a:t>• Classify each task by AI type and identify the human decision owner.</a:t>
             </a:r>
-            <a:endParaRPr lang="en-US" sz="2100" dirty="0"/>
-          </a:p>
-          <a:p>
-            <a:pPr indent="0" marL="0">
-              <a:buNone/>
-            </a:pPr>
-            <a:r>
-              <a:rPr lang="en-US" sz="2100" dirty="0">
+            <a:endParaRPr lang="en-US" sz="1920" dirty="0"/>
+          </a:p>
+          <a:p>
+            <a:pPr indent="0" marL="0">
+              <a:buNone/>
+            </a:pPr>
+            <a:r>
+              <a:rPr lang="en-US" sz="1920" dirty="0">
                 <a:solidFill>
                   <a:srgbClr val="003A63"/>
                 </a:solidFill>
@@ -13426,7 +13426,7 @@
               </a:rPr>
               <a:t>• Expected assignment: Agency AI vocabulary list</a:t>
             </a:r>
-            <a:endParaRPr lang="en-US" sz="2100" dirty="0"/>
+            <a:endParaRPr lang="en-US" sz="1920" dirty="0"/>
           </a:p>
         </p:txBody>
       </p:sp>
@@ -13438,12 +13438,12 @@
         </p:nvSpPr>
         <p:spPr>
           <a:xfrm>
-            <a:off x="7635240" y="1325880"/>
-            <a:ext cx="3474720" cy="1255471"/>
+            <a:off x="7543800" y="1325880"/>
+            <a:ext cx="3611880" cy="1261872"/>
           </a:xfrm>
           <a:prstGeom prst="roundRect">
             <a:avLst>
-              <a:gd name="adj" fmla="val 8740"/>
+              <a:gd name="adj" fmla="val 8696"/>
             </a:avLst>
           </a:prstGeom>
           <a:solidFill>
@@ -13465,8 +13465,8 @@
         </p:nvSpPr>
         <p:spPr>
           <a:xfrm>
-            <a:off x="7799832" y="1472184"/>
-            <a:ext cx="3145536" cy="256032"/>
+            <a:off x="7708392" y="1453896"/>
+            <a:ext cx="3282696" cy="228600"/>
           </a:xfrm>
           <a:prstGeom prst="rect">
             <a:avLst/>
@@ -13482,7 +13482,7 @@
               <a:buNone/>
             </a:pPr>
             <a:r>
-              <a:rPr lang="en-US" sz="1300" b="1" dirty="0">
+              <a:rPr lang="en-US" sz="1220" b="1" dirty="0">
                 <a:solidFill>
                   <a:srgbClr val="0068B7"/>
                 </a:solidFill>
@@ -13492,7 +13492,7 @@
               </a:rPr>
               <a:t>Practice focus</a:t>
             </a:r>
-            <a:endParaRPr lang="en-US" sz="1300" dirty="0"/>
+            <a:endParaRPr lang="en-US" sz="1220" dirty="0"/>
           </a:p>
         </p:txBody>
       </p:sp>
@@ -13504,8 +13504,8 @@
         </p:nvSpPr>
         <p:spPr>
           <a:xfrm>
-            <a:off x="7799832" y="1801368"/>
-            <a:ext cx="3145536" cy="688543"/>
+            <a:off x="7708392" y="1764792"/>
+            <a:ext cx="3282696" cy="749808"/>
           </a:xfrm>
           <a:prstGeom prst="rect">
             <a:avLst/>
@@ -13523,7 +13523,7 @@
               <a:buNone/>
             </a:pPr>
             <a:r>
-              <a:rPr lang="en-US" sz="1320" dirty="0">
+              <a:rPr lang="en-US" sz="1220" dirty="0">
                 <a:solidFill>
                   <a:srgbClr val="17364A"/>
                 </a:solidFill>
@@ -13531,9 +13531,9 @@
                 <a:ea typeface="Aptos" pitchFamily="34" charset="-122"/>
                 <a:cs typeface="Aptos" pitchFamily="34" charset="-120"/>
               </a:rPr>
-              <a:t>Ask each program area to list one current task that involves searching, summarizing, drafting, routing,.</a:t>
-            </a:r>
-            <a:endParaRPr lang="en-US" sz="1320" dirty="0"/>
+              <a:t>Ask each program area to list one current task that involves searching,.</a:t>
+            </a:r>
+            <a:endParaRPr lang="en-US" sz="1220" dirty="0"/>
           </a:p>
         </p:txBody>
       </p:sp>
@@ -13545,12 +13545,12 @@
         </p:nvSpPr>
         <p:spPr>
           <a:xfrm>
-            <a:off x="7635240" y="2718511"/>
-            <a:ext cx="3474720" cy="1328623"/>
+            <a:off x="7543800" y="2724912"/>
+            <a:ext cx="3611880" cy="1527048"/>
           </a:xfrm>
           <a:prstGeom prst="roundRect">
             <a:avLst>
-              <a:gd name="adj" fmla="val 8259"/>
+              <a:gd name="adj" fmla="val 7186"/>
             </a:avLst>
           </a:prstGeom>
           <a:solidFill>
@@ -13572,8 +13572,8 @@
         </p:nvSpPr>
         <p:spPr>
           <a:xfrm>
-            <a:off x="7799832" y="2864815"/>
-            <a:ext cx="3145536" cy="256032"/>
+            <a:off x="7708392" y="2852928"/>
+            <a:ext cx="3282696" cy="228600"/>
           </a:xfrm>
           <a:prstGeom prst="rect">
             <a:avLst/>
@@ -13589,7 +13589,7 @@
               <a:buNone/>
             </a:pPr>
             <a:r>
-              <a:rPr lang="en-US" sz="1300" b="1" dirty="0">
+              <a:rPr lang="en-US" sz="1220" b="1" dirty="0">
                 <a:solidFill>
                   <a:srgbClr val="0068B7"/>
                 </a:solidFill>
@@ -13599,7 +13599,7 @@
               </a:rPr>
               <a:t>Concept checkpoints</a:t>
             </a:r>
-            <a:endParaRPr lang="en-US" sz="1300" dirty="0"/>
+            <a:endParaRPr lang="en-US" sz="1220" dirty="0"/>
           </a:p>
         </p:txBody>
       </p:sp>
@@ -13611,8 +13611,8 @@
         </p:nvSpPr>
         <p:spPr>
           <a:xfrm>
-            <a:off x="7818120" y="3230575"/>
-            <a:ext cx="3090672" cy="670255"/>
+            <a:off x="7726680" y="3182112"/>
+            <a:ext cx="3227832" cy="960120"/>
           </a:xfrm>
           <a:prstGeom prst="rect">
             <a:avLst/>
@@ -13630,7 +13630,7 @@
               <a:buNone/>
             </a:pPr>
             <a:r>
-              <a:rPr lang="en-US" sz="1220" dirty="0">
+              <a:rPr lang="en-US" sz="1140" dirty="0">
                 <a:solidFill>
                   <a:srgbClr val="17364A"/>
                 </a:solidFill>
@@ -13638,16 +13638,16 @@
                 <a:ea typeface="Aptos" pitchFamily="34" charset="-122"/>
                 <a:cs typeface="Aptos" pitchFamily="34" charset="-120"/>
               </a:rPr>
-              <a:t>Ask each program area to list one current task that involves.</a:t>
-            </a:r>
-            <a:endParaRPr lang="en-US" sz="1220" dirty="0"/>
-          </a:p>
-          <a:p>
-            <a:pPr indent="0" marL="0">
-              <a:buNone/>
-            </a:pPr>
-            <a:r>
-              <a:rPr lang="en-US" sz="1220" dirty="0">
+              <a:t>Ask each program area to list one current task.</a:t>
+            </a:r>
+            <a:endParaRPr lang="en-US" sz="1140" dirty="0"/>
+          </a:p>
+          <a:p>
+            <a:pPr indent="0" marL="0">
+              <a:buNone/>
+            </a:pPr>
+            <a:r>
+              <a:rPr lang="en-US" sz="1140" dirty="0">
                 <a:solidFill>
                   <a:srgbClr val="17364A"/>
                 </a:solidFill>
@@ -13655,9 +13655,9 @@
                 <a:ea typeface="Aptos" pitchFamily="34" charset="-122"/>
                 <a:cs typeface="Aptos" pitchFamily="34" charset="-120"/>
               </a:rPr>
-              <a:t>Expected assignment: Initial inventory of known or suspected AI use</a:t>
-            </a:r>
-            <a:endParaRPr lang="en-US" sz="1220" dirty="0"/>
+              <a:t>Expected assignment: Initial inventory of known or.</a:t>
+            </a:r>
+            <a:endParaRPr lang="en-US" sz="1140" dirty="0"/>
           </a:p>
         </p:txBody>
       </p:sp>
@@ -13669,12 +13669,12 @@
         </p:nvSpPr>
         <p:spPr>
           <a:xfrm>
-            <a:off x="7635240" y="4184294"/>
-            <a:ext cx="3474720" cy="1466698"/>
+            <a:off x="7543800" y="4389120"/>
+            <a:ext cx="3611880" cy="1261872"/>
           </a:xfrm>
           <a:prstGeom prst="roundRect">
             <a:avLst>
-              <a:gd name="adj" fmla="val 7481"/>
+              <a:gd name="adj" fmla="val 8696"/>
             </a:avLst>
           </a:prstGeom>
           <a:solidFill>
@@ -13696,8 +13696,8 @@
         </p:nvSpPr>
         <p:spPr>
           <a:xfrm>
-            <a:off x="7799832" y="4330598"/>
-            <a:ext cx="3145536" cy="256032"/>
+            <a:off x="7708392" y="4517136"/>
+            <a:ext cx="3282696" cy="228600"/>
           </a:xfrm>
           <a:prstGeom prst="rect">
             <a:avLst/>
@@ -13713,7 +13713,7 @@
               <a:buNone/>
             </a:pPr>
             <a:r>
-              <a:rPr lang="en-US" sz="1300" b="1" dirty="0">
+              <a:rPr lang="en-US" sz="1220" b="1" dirty="0">
                 <a:solidFill>
                   <a:srgbClr val="0068B7"/>
                 </a:solidFill>
@@ -13723,7 +13723,7 @@
               </a:rPr>
               <a:t>What to produce</a:t>
             </a:r>
-            <a:endParaRPr lang="en-US" sz="1300" dirty="0"/>
+            <a:endParaRPr lang="en-US" sz="1220" dirty="0"/>
           </a:p>
         </p:txBody>
       </p:sp>
@@ -13735,8 +13735,8 @@
         </p:nvSpPr>
         <p:spPr>
           <a:xfrm>
-            <a:off x="7799832" y="4659782"/>
-            <a:ext cx="3145536" cy="899770"/>
+            <a:off x="7708392" y="4828032"/>
+            <a:ext cx="3282696" cy="749808"/>
           </a:xfrm>
           <a:prstGeom prst="rect">
             <a:avLst/>
@@ -13754,7 +13754,7 @@
               <a:buNone/>
             </a:pPr>
             <a:r>
-              <a:rPr lang="en-US" sz="1320" dirty="0">
+              <a:rPr lang="en-US" sz="1220" dirty="0">
                 <a:solidFill>
                   <a:srgbClr val="17364A"/>
                 </a:solidFill>
@@ -13762,9 +13762,9 @@
                 <a:ea typeface="Aptos" pitchFamily="34" charset="-122"/>
                 <a:cs typeface="Aptos" pitchFamily="34" charset="-120"/>
               </a:rPr>
-              <a:t>Use the assignment to test whether you can explain the concept, apply it to a realistic public health situation, and identify what would need review before the work moves forward.</a:t>
-            </a:r>
-            <a:endParaRPr lang="en-US" sz="1320" dirty="0"/>
+              <a:t>Use the assignment to test whether you can explain the concept, apply it to a.</a:t>
+            </a:r>
+            <a:endParaRPr lang="en-US" sz="1220" dirty="0"/>
           </a:p>
         </p:txBody>
       </p:sp>
@@ -14055,8 +14055,8 @@
         </p:nvSpPr>
         <p:spPr>
           <a:xfrm>
-            <a:off x="868680" y="1508760"/>
-            <a:ext cx="6309360" cy="4160520"/>
+            <a:off x="822960" y="1463040"/>
+            <a:ext cx="6565392" cy="4343400"/>
           </a:xfrm>
           <a:prstGeom prst="rect">
             <a:avLst/>
@@ -14074,7 +14074,7 @@
               <a:buNone/>
             </a:pPr>
             <a:r>
-              <a:rPr lang="en-US" sz="2100" dirty="0">
+              <a:rPr lang="en-US" sz="1920" dirty="0">
                 <a:solidFill>
                   <a:srgbClr val="003A63"/>
                 </a:solidFill>
@@ -14084,7 +14084,7 @@
               </a:rPr>
               <a:t>• Expected assignment: Draft list of decisions that require human accountability</a:t>
             </a:r>
-            <a:endParaRPr lang="en-US" sz="2100" dirty="0"/>
+            <a:endParaRPr lang="en-US" sz="1920" dirty="0"/>
           </a:p>
         </p:txBody>
       </p:sp>
@@ -14096,12 +14096,12 @@
         </p:nvSpPr>
         <p:spPr>
           <a:xfrm>
-            <a:off x="7635240" y="1325880"/>
-            <a:ext cx="3474720" cy="1207008"/>
+            <a:off x="7543800" y="1325880"/>
+            <a:ext cx="3611880" cy="1261872"/>
           </a:xfrm>
           <a:prstGeom prst="roundRect">
             <a:avLst>
-              <a:gd name="adj" fmla="val 9091"/>
+              <a:gd name="adj" fmla="val 8696"/>
             </a:avLst>
           </a:prstGeom>
           <a:solidFill>
@@ -14123,8 +14123,8 @@
         </p:nvSpPr>
         <p:spPr>
           <a:xfrm>
-            <a:off x="7799832" y="1472184"/>
-            <a:ext cx="3145536" cy="256032"/>
+            <a:off x="7708392" y="1453896"/>
+            <a:ext cx="3282696" cy="228600"/>
           </a:xfrm>
           <a:prstGeom prst="rect">
             <a:avLst/>
@@ -14140,7 +14140,7 @@
               <a:buNone/>
             </a:pPr>
             <a:r>
-              <a:rPr lang="en-US" sz="1300" b="1" dirty="0">
+              <a:rPr lang="en-US" sz="1220" b="1" dirty="0">
                 <a:solidFill>
                   <a:srgbClr val="0068B7"/>
                 </a:solidFill>
@@ -14150,7 +14150,7 @@
               </a:rPr>
               <a:t>Practice focus</a:t>
             </a:r>
-            <a:endParaRPr lang="en-US" sz="1300" dirty="0"/>
+            <a:endParaRPr lang="en-US" sz="1220" dirty="0"/>
           </a:p>
         </p:txBody>
       </p:sp>
@@ -14162,8 +14162,8 @@
         </p:nvSpPr>
         <p:spPr>
           <a:xfrm>
-            <a:off x="7799832" y="1801368"/>
-            <a:ext cx="3145536" cy="640080"/>
+            <a:off x="7708392" y="1764792"/>
+            <a:ext cx="3282696" cy="749808"/>
           </a:xfrm>
           <a:prstGeom prst="rect">
             <a:avLst/>
@@ -14181,7 +14181,7 @@
               <a:buNone/>
             </a:pPr>
             <a:r>
-              <a:rPr lang="en-US" sz="1320" dirty="0">
+              <a:rPr lang="en-US" sz="1220" dirty="0">
                 <a:solidFill>
                   <a:srgbClr val="17364A"/>
                 </a:solidFill>
@@ -14191,7 +14191,7 @@
               </a:rPr>
               <a:t>Expected assignment: Draft list of decisions that require human accountability</a:t>
             </a:r>
-            <a:endParaRPr lang="en-US" sz="1320" dirty="0"/>
+            <a:endParaRPr lang="en-US" sz="1220" dirty="0"/>
           </a:p>
         </p:txBody>
       </p:sp>
@@ -14203,12 +14203,12 @@
         </p:nvSpPr>
         <p:spPr>
           <a:xfrm>
-            <a:off x="7635240" y="2670048"/>
-            <a:ext cx="3474720" cy="1377086"/>
+            <a:off x="7543800" y="2724912"/>
+            <a:ext cx="3611880" cy="1527048"/>
           </a:xfrm>
           <a:prstGeom prst="roundRect">
             <a:avLst>
-              <a:gd name="adj" fmla="val 7968"/>
+              <a:gd name="adj" fmla="val 7186"/>
             </a:avLst>
           </a:prstGeom>
           <a:solidFill>
@@ -14230,8 +14230,8 @@
         </p:nvSpPr>
         <p:spPr>
           <a:xfrm>
-            <a:off x="7799832" y="2816352"/>
-            <a:ext cx="3145536" cy="256032"/>
+            <a:off x="7708392" y="2852928"/>
+            <a:ext cx="3282696" cy="228600"/>
           </a:xfrm>
           <a:prstGeom prst="rect">
             <a:avLst/>
@@ -14247,7 +14247,7 @@
               <a:buNone/>
             </a:pPr>
             <a:r>
-              <a:rPr lang="en-US" sz="1300" b="1" dirty="0">
+              <a:rPr lang="en-US" sz="1220" b="1" dirty="0">
                 <a:solidFill>
                   <a:srgbClr val="0068B7"/>
                 </a:solidFill>
@@ -14257,7 +14257,7 @@
               </a:rPr>
               <a:t>Concept checkpoints</a:t>
             </a:r>
-            <a:endParaRPr lang="en-US" sz="1300" dirty="0"/>
+            <a:endParaRPr lang="en-US" sz="1220" dirty="0"/>
           </a:p>
         </p:txBody>
       </p:sp>
@@ -14269,8 +14269,8 @@
         </p:nvSpPr>
         <p:spPr>
           <a:xfrm>
-            <a:off x="7818120" y="3182112"/>
-            <a:ext cx="3090672" cy="718718"/>
+            <a:off x="7726680" y="3182112"/>
+            <a:ext cx="3227832" cy="960120"/>
           </a:xfrm>
           <a:prstGeom prst="rect">
             <a:avLst/>
@@ -14288,7 +14288,7 @@
               <a:buNone/>
             </a:pPr>
             <a:r>
-              <a:rPr lang="en-US" sz="1220" dirty="0">
+              <a:rPr lang="en-US" sz="1140" dirty="0">
                 <a:solidFill>
                   <a:srgbClr val="17364A"/>
                 </a:solidFill>
@@ -14296,9 +14296,9 @@
                 <a:ea typeface="Aptos" pitchFamily="34" charset="-122"/>
                 <a:cs typeface="Aptos" pitchFamily="34" charset="-120"/>
               </a:rPr>
-              <a:t>Expected assignment: Draft list of decisions that require human.</a:t>
-            </a:r>
-            <a:endParaRPr lang="en-US" sz="1220" dirty="0"/>
+              <a:t>Expected assignment: Draft list of decisions that.</a:t>
+            </a:r>
+            <a:endParaRPr lang="en-US" sz="1140" dirty="0"/>
           </a:p>
         </p:txBody>
       </p:sp>
@@ -14310,12 +14310,12 @@
         </p:nvSpPr>
         <p:spPr>
           <a:xfrm>
-            <a:off x="7635240" y="4184294"/>
-            <a:ext cx="3474720" cy="1466698"/>
+            <a:off x="7543800" y="4389120"/>
+            <a:ext cx="3611880" cy="1261872"/>
           </a:xfrm>
           <a:prstGeom prst="roundRect">
             <a:avLst>
-              <a:gd name="adj" fmla="val 7481"/>
+              <a:gd name="adj" fmla="val 8696"/>
             </a:avLst>
           </a:prstGeom>
           <a:solidFill>
@@ -14337,8 +14337,8 @@
         </p:nvSpPr>
         <p:spPr>
           <a:xfrm>
-            <a:off x="7799832" y="4330598"/>
-            <a:ext cx="3145536" cy="256032"/>
+            <a:off x="7708392" y="4517136"/>
+            <a:ext cx="3282696" cy="228600"/>
           </a:xfrm>
           <a:prstGeom prst="rect">
             <a:avLst/>
@@ -14354,7 +14354,7 @@
               <a:buNone/>
             </a:pPr>
             <a:r>
-              <a:rPr lang="en-US" sz="1300" b="1" dirty="0">
+              <a:rPr lang="en-US" sz="1220" b="1" dirty="0">
                 <a:solidFill>
                   <a:srgbClr val="0068B7"/>
                 </a:solidFill>
@@ -14364,7 +14364,7 @@
               </a:rPr>
               <a:t>What to produce</a:t>
             </a:r>
-            <a:endParaRPr lang="en-US" sz="1300" dirty="0"/>
+            <a:endParaRPr lang="en-US" sz="1220" dirty="0"/>
           </a:p>
         </p:txBody>
       </p:sp>
@@ -14376,8 +14376,8 @@
         </p:nvSpPr>
         <p:spPr>
           <a:xfrm>
-            <a:off x="7799832" y="4659782"/>
-            <a:ext cx="3145536" cy="899770"/>
+            <a:off x="7708392" y="4828032"/>
+            <a:ext cx="3282696" cy="749808"/>
           </a:xfrm>
           <a:prstGeom prst="rect">
             <a:avLst/>
@@ -14395,7 +14395,7 @@
               <a:buNone/>
             </a:pPr>
             <a:r>
-              <a:rPr lang="en-US" sz="1320" dirty="0">
+              <a:rPr lang="en-US" sz="1220" dirty="0">
                 <a:solidFill>
                   <a:srgbClr val="17364A"/>
                 </a:solidFill>
@@ -14403,9 +14403,9 @@
                 <a:ea typeface="Aptos" pitchFamily="34" charset="-122"/>
                 <a:cs typeface="Aptos" pitchFamily="34" charset="-120"/>
               </a:rPr>
-              <a:t>Use the assignment to test whether you can explain the concept, apply it to a realistic public health situation, and identify what would need review before the work moves forward.</a:t>
-            </a:r>
-            <a:endParaRPr lang="en-US" sz="1320" dirty="0"/>
+              <a:t>Use the assignment to test whether you can explain the concept, apply it to a.</a:t>
+            </a:r>
+            <a:endParaRPr lang="en-US" sz="1220" dirty="0"/>
           </a:p>
         </p:txBody>
       </p:sp>
@@ -14696,8 +14696,8 @@
         </p:nvSpPr>
         <p:spPr>
           <a:xfrm>
-            <a:off x="868680" y="1508760"/>
-            <a:ext cx="6309360" cy="4160520"/>
+            <a:off x="822960" y="1463040"/>
+            <a:ext cx="6565392" cy="4343400"/>
           </a:xfrm>
           <a:prstGeom prst="rect">
             <a:avLst/>
@@ -14715,7 +14715,7 @@
               <a:buNone/>
             </a:pPr>
             <a:r>
-              <a:rPr lang="en-US" sz="2100" dirty="0">
+              <a:rPr lang="en-US" sz="1920" dirty="0">
                 <a:solidFill>
                   <a:srgbClr val="003A63"/>
                 </a:solidFill>
@@ -14723,16 +14723,16 @@
                 <a:ea typeface="Aptos" pitchFamily="34" charset="-122"/>
                 <a:cs typeface="Aptos" pitchFamily="34" charset="-120"/>
               </a:rPr>
-              <a:t>• 1. What is the most important first step after completing the Introduction to AI for Public.</a:t>
-            </a:r>
-            <a:endParaRPr lang="en-US" sz="2100" dirty="0"/>
-          </a:p>
-          <a:p>
-            <a:pPr indent="0" marL="0">
-              <a:buNone/>
-            </a:pPr>
-            <a:r>
-              <a:rPr lang="en-US" sz="2100" dirty="0">
+              <a:t>• 1. What is the most important first step after completing the Introduction.</a:t>
+            </a:r>
+            <a:endParaRPr lang="en-US" sz="1920" dirty="0"/>
+          </a:p>
+          <a:p>
+            <a:pPr indent="0" marL="0">
+              <a:buNone/>
+            </a:pPr>
+            <a:r>
+              <a:rPr lang="en-US" sz="1920" dirty="0">
                 <a:solidFill>
                   <a:srgbClr val="003A63"/>
                 </a:solidFill>
@@ -14742,14 +14742,14 @@
               </a:rPr>
               <a:t>• 2. Which practice best supports responsible AI use in public health?</a:t>
             </a:r>
-            <a:endParaRPr lang="en-US" sz="2100" dirty="0"/>
-          </a:p>
-          <a:p>
-            <a:pPr indent="0" marL="0">
-              <a:buNone/>
-            </a:pPr>
-            <a:r>
-              <a:rPr lang="en-US" sz="2100" dirty="0">
+            <a:endParaRPr lang="en-US" sz="1920" dirty="0"/>
+          </a:p>
+          <a:p>
+            <a:pPr indent="0" marL="0">
+              <a:buNone/>
+            </a:pPr>
+            <a:r>
+              <a:rPr lang="en-US" sz="1920" dirty="0">
                 <a:solidFill>
                   <a:srgbClr val="003A63"/>
                 </a:solidFill>
@@ -14757,9 +14757,9 @@
                 <a:ea typeface="Aptos" pitchFamily="34" charset="-122"/>
                 <a:cs typeface="Aptos" pitchFamily="34" charset="-120"/>
               </a:rPr>
-              <a:t>• 3. Which statement best reflects the risk or guardrail for this module: Do not treat AI as a.</a:t>
-            </a:r>
-            <a:endParaRPr lang="en-US" sz="2100" dirty="0"/>
+              <a:t>• 3. Which statement best reflects the risk or guardrail for this module: Do.</a:t>
+            </a:r>
+            <a:endParaRPr lang="en-US" sz="1920" dirty="0"/>
           </a:p>
         </p:txBody>
       </p:sp>
@@ -14771,12 +14771,12 @@
         </p:nvSpPr>
         <p:spPr>
           <a:xfrm>
-            <a:off x="7635240" y="1325880"/>
-            <a:ext cx="3474720" cy="1255471"/>
+            <a:off x="7543800" y="1325880"/>
+            <a:ext cx="3611880" cy="1261872"/>
           </a:xfrm>
           <a:prstGeom prst="roundRect">
             <a:avLst>
-              <a:gd name="adj" fmla="val 8740"/>
+              <a:gd name="adj" fmla="val 8696"/>
             </a:avLst>
           </a:prstGeom>
           <a:solidFill>
@@ -14798,8 +14798,8 @@
         </p:nvSpPr>
         <p:spPr>
           <a:xfrm>
-            <a:off x="7799832" y="1472184"/>
-            <a:ext cx="3145536" cy="256032"/>
+            <a:off x="7708392" y="1453896"/>
+            <a:ext cx="3282696" cy="228600"/>
           </a:xfrm>
           <a:prstGeom prst="rect">
             <a:avLst/>
@@ -14815,7 +14815,7 @@
               <a:buNone/>
             </a:pPr>
             <a:r>
-              <a:rPr lang="en-US" sz="1300" b="1" dirty="0">
+              <a:rPr lang="en-US" sz="1220" b="1" dirty="0">
                 <a:solidFill>
                   <a:srgbClr val="0068B7"/>
                 </a:solidFill>
@@ -14825,7 +14825,7 @@
               </a:rPr>
               <a:t>Practice focus</a:t>
             </a:r>
-            <a:endParaRPr lang="en-US" sz="1300" dirty="0"/>
+            <a:endParaRPr lang="en-US" sz="1220" dirty="0"/>
           </a:p>
         </p:txBody>
       </p:sp>
@@ -14837,8 +14837,8 @@
         </p:nvSpPr>
         <p:spPr>
           <a:xfrm>
-            <a:off x="7799832" y="1801368"/>
-            <a:ext cx="3145536" cy="688543"/>
+            <a:off x="7708392" y="1764792"/>
+            <a:ext cx="3282696" cy="749808"/>
           </a:xfrm>
           <a:prstGeom prst="rect">
             <a:avLst/>
@@ -14856,7 +14856,7 @@
               <a:buNone/>
             </a:pPr>
             <a:r>
-              <a:rPr lang="en-US" sz="1320" dirty="0">
+              <a:rPr lang="en-US" sz="1220" dirty="0">
                 <a:solidFill>
                   <a:srgbClr val="17364A"/>
                 </a:solidFill>
@@ -14864,9 +14864,9 @@
                 <a:ea typeface="Aptos" pitchFamily="34" charset="-122"/>
                 <a:cs typeface="Aptos" pitchFamily="34" charset="-120"/>
               </a:rPr>
-              <a:t>1. What is the most important first step after completing the Introduction to AI for Public Health.</a:t>
-            </a:r>
-            <a:endParaRPr lang="en-US" sz="1320" dirty="0"/>
+              <a:t>1. What is the most important first step after completing the Introduction to AI.</a:t>
+            </a:r>
+            <a:endParaRPr lang="en-US" sz="1220" dirty="0"/>
           </a:p>
         </p:txBody>
       </p:sp>
@@ -14878,12 +14878,12 @@
         </p:nvSpPr>
         <p:spPr>
           <a:xfrm>
-            <a:off x="7635240" y="2718511"/>
-            <a:ext cx="3474720" cy="1328623"/>
+            <a:off x="7543800" y="2724912"/>
+            <a:ext cx="3611880" cy="1527048"/>
           </a:xfrm>
           <a:prstGeom prst="roundRect">
             <a:avLst>
-              <a:gd name="adj" fmla="val 8259"/>
+              <a:gd name="adj" fmla="val 7186"/>
             </a:avLst>
           </a:prstGeom>
           <a:solidFill>
@@ -14905,8 +14905,8 @@
         </p:nvSpPr>
         <p:spPr>
           <a:xfrm>
-            <a:off x="7799832" y="2864815"/>
-            <a:ext cx="3145536" cy="256032"/>
+            <a:off x="7708392" y="2852928"/>
+            <a:ext cx="3282696" cy="228600"/>
           </a:xfrm>
           <a:prstGeom prst="rect">
             <a:avLst/>
@@ -14922,7 +14922,7 @@
               <a:buNone/>
             </a:pPr>
             <a:r>
-              <a:rPr lang="en-US" sz="1300" b="1" dirty="0">
+              <a:rPr lang="en-US" sz="1220" b="1" dirty="0">
                 <a:solidFill>
                   <a:srgbClr val="0068B7"/>
                 </a:solidFill>
@@ -14932,7 +14932,7 @@
               </a:rPr>
               <a:t>Concept checkpoints</a:t>
             </a:r>
-            <a:endParaRPr lang="en-US" sz="1300" dirty="0"/>
+            <a:endParaRPr lang="en-US" sz="1220" dirty="0"/>
           </a:p>
         </p:txBody>
       </p:sp>
@@ -14944,8 +14944,8 @@
         </p:nvSpPr>
         <p:spPr>
           <a:xfrm>
-            <a:off x="7818120" y="3230575"/>
-            <a:ext cx="3090672" cy="670255"/>
+            <a:off x="7726680" y="3182112"/>
+            <a:ext cx="3227832" cy="960120"/>
           </a:xfrm>
           <a:prstGeom prst="rect">
             <a:avLst/>
@@ -14963,7 +14963,7 @@
               <a:buNone/>
             </a:pPr>
             <a:r>
-              <a:rPr lang="en-US" sz="1220" dirty="0">
+              <a:rPr lang="en-US" sz="1140" dirty="0">
                 <a:solidFill>
                   <a:srgbClr val="17364A"/>
                 </a:solidFill>
@@ -14973,14 +14973,14 @@
               </a:rPr>
               <a:t>1.</a:t>
             </a:r>
-            <a:endParaRPr lang="en-US" sz="1220" dirty="0"/>
-          </a:p>
-          <a:p>
-            <a:pPr indent="0" marL="0">
-              <a:buNone/>
-            </a:pPr>
-            <a:r>
-              <a:rPr lang="en-US" sz="1220" dirty="0">
+            <a:endParaRPr lang="en-US" sz="1140" dirty="0"/>
+          </a:p>
+          <a:p>
+            <a:pPr indent="0" marL="0">
+              <a:buNone/>
+            </a:pPr>
+            <a:r>
+              <a:rPr lang="en-US" sz="1140" dirty="0">
                 <a:solidFill>
                   <a:srgbClr val="17364A"/>
                 </a:solidFill>
@@ -14988,16 +14988,16 @@
                 <a:ea typeface="Aptos" pitchFamily="34" charset="-122"/>
                 <a:cs typeface="Aptos" pitchFamily="34" charset="-120"/>
               </a:rPr>
-              <a:t>What is the most important first step after completing the.</a:t>
-            </a:r>
-            <a:endParaRPr lang="en-US" sz="1220" dirty="0"/>
-          </a:p>
-          <a:p>
-            <a:pPr indent="0" marL="0">
-              <a:buNone/>
-            </a:pPr>
-            <a:r>
-              <a:rPr lang="en-US" sz="1220" dirty="0">
+              <a:t>What is the most important first step after.</a:t>
+            </a:r>
+            <a:endParaRPr lang="en-US" sz="1140" dirty="0"/>
+          </a:p>
+          <a:p>
+            <a:pPr indent="0" marL="0">
+              <a:buNone/>
+            </a:pPr>
+            <a:r>
+              <a:rPr lang="en-US" sz="1140" dirty="0">
                 <a:solidFill>
                   <a:srgbClr val="17364A"/>
                 </a:solidFill>
@@ -15007,7 +15007,7 @@
               </a:rPr>
               <a:t>2.</a:t>
             </a:r>
-            <a:endParaRPr lang="en-US" sz="1220" dirty="0"/>
+            <a:endParaRPr lang="en-US" sz="1140" dirty="0"/>
           </a:p>
         </p:txBody>
       </p:sp>
@@ -15019,12 +15019,12 @@
         </p:nvSpPr>
         <p:spPr>
           <a:xfrm>
-            <a:off x="7635240" y="4184294"/>
-            <a:ext cx="3474720" cy="1466698"/>
+            <a:off x="7543800" y="4389120"/>
+            <a:ext cx="3611880" cy="1261872"/>
           </a:xfrm>
           <a:prstGeom prst="roundRect">
             <a:avLst>
-              <a:gd name="adj" fmla="val 7481"/>
+              <a:gd name="adj" fmla="val 8696"/>
             </a:avLst>
           </a:prstGeom>
           <a:solidFill>
@@ -15046,8 +15046,8 @@
         </p:nvSpPr>
         <p:spPr>
           <a:xfrm>
-            <a:off x="7799832" y="4330598"/>
-            <a:ext cx="3145536" cy="256032"/>
+            <a:off x="7708392" y="4517136"/>
+            <a:ext cx="3282696" cy="228600"/>
           </a:xfrm>
           <a:prstGeom prst="rect">
             <a:avLst/>
@@ -15063,7 +15063,7 @@
               <a:buNone/>
             </a:pPr>
             <a:r>
-              <a:rPr lang="en-US" sz="1300" b="1" dirty="0">
+              <a:rPr lang="en-US" sz="1220" b="1" dirty="0">
                 <a:solidFill>
                   <a:srgbClr val="0068B7"/>
                 </a:solidFill>
@@ -15073,7 +15073,7 @@
               </a:rPr>
               <a:t>What to produce</a:t>
             </a:r>
-            <a:endParaRPr lang="en-US" sz="1300" dirty="0"/>
+            <a:endParaRPr lang="en-US" sz="1220" dirty="0"/>
           </a:p>
         </p:txBody>
       </p:sp>
@@ -15085,8 +15085,8 @@
         </p:nvSpPr>
         <p:spPr>
           <a:xfrm>
-            <a:off x="7799832" y="4659782"/>
-            <a:ext cx="3145536" cy="899770"/>
+            <a:off x="7708392" y="4828032"/>
+            <a:ext cx="3282696" cy="749808"/>
           </a:xfrm>
           <a:prstGeom prst="rect">
             <a:avLst/>
@@ -15104,7 +15104,7 @@
               <a:buNone/>
             </a:pPr>
             <a:r>
-              <a:rPr lang="en-US" sz="1320" dirty="0">
+              <a:rPr lang="en-US" sz="1220" dirty="0">
                 <a:solidFill>
                   <a:srgbClr val="17364A"/>
                 </a:solidFill>
@@ -15112,9 +15112,9 @@
                 <a:ea typeface="Aptos" pitchFamily="34" charset="-122"/>
                 <a:cs typeface="Aptos" pitchFamily="34" charset="-120"/>
               </a:rPr>
-              <a:t>Use the assignment to test whether you can explain the concept, apply it to a realistic public health situation, and identify what would need review before the work moves forward.</a:t>
-            </a:r>
-            <a:endParaRPr lang="en-US" sz="1320" dirty="0"/>
+              <a:t>Use the assignment to test whether you can explain the concept, apply it to a.</a:t>
+            </a:r>
+            <a:endParaRPr lang="en-US" sz="1220" dirty="0"/>
           </a:p>
         </p:txBody>
       </p:sp>
@@ -15405,8 +15405,8 @@
         </p:nvSpPr>
         <p:spPr>
           <a:xfrm>
-            <a:off x="868680" y="1508760"/>
-            <a:ext cx="6309360" cy="4160520"/>
+            <a:off x="822960" y="1463040"/>
+            <a:ext cx="6565392" cy="4343400"/>
           </a:xfrm>
           <a:prstGeom prst="rect">
             <a:avLst/>
@@ -15424,7 +15424,7 @@
               <a:buNone/>
             </a:pPr>
             <a:r>
-              <a:rPr lang="en-US" sz="2100" dirty="0">
+              <a:rPr lang="en-US" sz="1920" dirty="0">
                 <a:solidFill>
                   <a:srgbClr val="003A63"/>
                 </a:solidFill>
@@ -15432,16 +15432,16 @@
                 <a:ea typeface="Aptos" pitchFamily="34" charset="-122"/>
                 <a:cs typeface="Aptos" pitchFamily="34" charset="-120"/>
               </a:rPr>
-              <a:t>• NIST AI Risk Management Framework: Foundational vocabulary for trustworthy AI risk management..</a:t>
-            </a:r>
-            <a:endParaRPr lang="en-US" sz="2100" dirty="0"/>
-          </a:p>
-          <a:p>
-            <a:pPr indent="0" marL="0">
-              <a:buNone/>
-            </a:pPr>
-            <a:r>
-              <a:rPr lang="en-US" sz="2100" dirty="0">
+              <a:t>• NIST AI Risk Management Framework: Foundational vocabulary for trustworthy.</a:t>
+            </a:r>
+            <a:endParaRPr lang="en-US" sz="1920" dirty="0"/>
+          </a:p>
+          <a:p>
+            <a:pPr indent="0" marL="0">
+              <a:buNone/>
+            </a:pPr>
+            <a:r>
+              <a:rPr lang="en-US" sz="1920" dirty="0">
                 <a:solidFill>
                   <a:srgbClr val="003A63"/>
                 </a:solidFill>
@@ -15449,16 +15449,16 @@
                 <a:ea typeface="Aptos" pitchFamily="34" charset="-122"/>
                 <a:cs typeface="Aptos" pitchFamily="34" charset="-120"/>
               </a:rPr>
-              <a:t>• ASPPH AI Framework Report: Public health framing for responsible AI education, research,.</a:t>
-            </a:r>
-            <a:endParaRPr lang="en-US" sz="2100" dirty="0"/>
-          </a:p>
-          <a:p>
-            <a:pPr indent="0" marL="0">
-              <a:buNone/>
-            </a:pPr>
-            <a:r>
-              <a:rPr lang="en-US" sz="2100" dirty="0">
+              <a:t>• ASPPH AI Framework Report: Public health framing for responsible AI.</a:t>
+            </a:r>
+            <a:endParaRPr lang="en-US" sz="1920" dirty="0"/>
+          </a:p>
+          <a:p>
+            <a:pPr indent="0" marL="0">
+              <a:buNone/>
+            </a:pPr>
+            <a:r>
+              <a:rPr lang="en-US" sz="1920" dirty="0">
                 <a:solidFill>
                   <a:srgbClr val="003A63"/>
                 </a:solidFill>
@@ -15466,9 +15466,9 @@
                 <a:ea typeface="Aptos" pitchFamily="34" charset="-122"/>
                 <a:cs typeface="Aptos" pitchFamily="34" charset="-120"/>
               </a:rPr>
-              <a:t>• WHO: Ethics and governance of artificial intelligence for health: Health-sector principles for.</a:t>
-            </a:r>
-            <a:endParaRPr lang="en-US" sz="2100" dirty="0"/>
+              <a:t>• WHO: Ethics and governance of artificial intelligence for health:.</a:t>
+            </a:r>
+            <a:endParaRPr lang="en-US" sz="1920" dirty="0"/>
           </a:p>
         </p:txBody>
       </p:sp>
@@ -15480,12 +15480,12 @@
         </p:nvSpPr>
         <p:spPr>
           <a:xfrm>
-            <a:off x="7635240" y="1325880"/>
-            <a:ext cx="3474720" cy="1255471"/>
+            <a:off x="7543800" y="1325880"/>
+            <a:ext cx="3611880" cy="1261872"/>
           </a:xfrm>
           <a:prstGeom prst="roundRect">
             <a:avLst>
-              <a:gd name="adj" fmla="val 8740"/>
+              <a:gd name="adj" fmla="val 8696"/>
             </a:avLst>
           </a:prstGeom>
           <a:solidFill>
@@ -15507,8 +15507,8 @@
         </p:nvSpPr>
         <p:spPr>
           <a:xfrm>
-            <a:off x="7799832" y="1472184"/>
-            <a:ext cx="3145536" cy="256032"/>
+            <a:off x="7708392" y="1453896"/>
+            <a:ext cx="3282696" cy="228600"/>
           </a:xfrm>
           <a:prstGeom prst="rect">
             <a:avLst/>
@@ -15524,7 +15524,7 @@
               <a:buNone/>
             </a:pPr>
             <a:r>
-              <a:rPr lang="en-US" sz="1300" b="1" dirty="0">
+              <a:rPr lang="en-US" sz="1220" b="1" dirty="0">
                 <a:solidFill>
                   <a:srgbClr val="0068B7"/>
                 </a:solidFill>
@@ -15534,7 +15534,7 @@
               </a:rPr>
               <a:t>Core concept</a:t>
             </a:r>
-            <a:endParaRPr lang="en-US" sz="1300" dirty="0"/>
+            <a:endParaRPr lang="en-US" sz="1220" dirty="0"/>
           </a:p>
         </p:txBody>
       </p:sp>
@@ -15546,8 +15546,8 @@
         </p:nvSpPr>
         <p:spPr>
           <a:xfrm>
-            <a:off x="7799832" y="1801368"/>
-            <a:ext cx="3145536" cy="688543"/>
+            <a:off x="7708392" y="1764792"/>
+            <a:ext cx="3282696" cy="749808"/>
           </a:xfrm>
           <a:prstGeom prst="rect">
             <a:avLst/>
@@ -15565,7 +15565,7 @@
               <a:buNone/>
             </a:pPr>
             <a:r>
-              <a:rPr lang="en-US" sz="1320" dirty="0">
+              <a:rPr lang="en-US" sz="1220" dirty="0">
                 <a:solidFill>
                   <a:srgbClr val="17364A"/>
                 </a:solidFill>
@@ -15573,9 +15573,9 @@
                 <a:ea typeface="Aptos" pitchFamily="34" charset="-122"/>
                 <a:cs typeface="Aptos" pitchFamily="34" charset="-120"/>
               </a:rPr>
-              <a:t>NIST AI Risk Management Framework: Foundational vocabulary for trustworthy AI risk management..</a:t>
-            </a:r>
-            <a:endParaRPr lang="en-US" sz="1320" dirty="0"/>
+              <a:t>NIST AI Risk Management Framework: Foundational vocabulary for trustworthy AI.</a:t>
+            </a:r>
+            <a:endParaRPr lang="en-US" sz="1220" dirty="0"/>
           </a:p>
         </p:txBody>
       </p:sp>
@@ -15587,12 +15587,12 @@
         </p:nvSpPr>
         <p:spPr>
           <a:xfrm>
-            <a:off x="7635240" y="2718511"/>
-            <a:ext cx="3474720" cy="1328623"/>
+            <a:off x="7543800" y="2724912"/>
+            <a:ext cx="3611880" cy="1527048"/>
           </a:xfrm>
           <a:prstGeom prst="roundRect">
             <a:avLst>
-              <a:gd name="adj" fmla="val 8259"/>
+              <a:gd name="adj" fmla="val 7186"/>
             </a:avLst>
           </a:prstGeom>
           <a:solidFill>
@@ -15614,8 +15614,8 @@
         </p:nvSpPr>
         <p:spPr>
           <a:xfrm>
-            <a:off x="7799832" y="2864815"/>
-            <a:ext cx="3145536" cy="256032"/>
+            <a:off x="7708392" y="2852928"/>
+            <a:ext cx="3282696" cy="228600"/>
           </a:xfrm>
           <a:prstGeom prst="rect">
             <a:avLst/>
@@ -15631,7 +15631,7 @@
               <a:buNone/>
             </a:pPr>
             <a:r>
-              <a:rPr lang="en-US" sz="1300" b="1" dirty="0">
+              <a:rPr lang="en-US" sz="1220" b="1" dirty="0">
                 <a:solidFill>
                   <a:srgbClr val="0068B7"/>
                 </a:solidFill>
@@ -15641,7 +15641,7 @@
               </a:rPr>
               <a:t>Concept checkpoints</a:t>
             </a:r>
-            <a:endParaRPr lang="en-US" sz="1300" dirty="0"/>
+            <a:endParaRPr lang="en-US" sz="1220" dirty="0"/>
           </a:p>
         </p:txBody>
       </p:sp>
@@ -15653,8 +15653,8 @@
         </p:nvSpPr>
         <p:spPr>
           <a:xfrm>
-            <a:off x="7818120" y="3230575"/>
-            <a:ext cx="3090672" cy="670255"/>
+            <a:off x="7726680" y="3182112"/>
+            <a:ext cx="3227832" cy="960120"/>
           </a:xfrm>
           <a:prstGeom prst="rect">
             <a:avLst/>
@@ -15672,7 +15672,7 @@
               <a:buNone/>
             </a:pPr>
             <a:r>
-              <a:rPr lang="en-US" sz="1220" dirty="0">
+              <a:rPr lang="en-US" sz="1140" dirty="0">
                 <a:solidFill>
                   <a:srgbClr val="17364A"/>
                 </a:solidFill>
@@ -15680,16 +15680,16 @@
                 <a:ea typeface="Aptos" pitchFamily="34" charset="-122"/>
                 <a:cs typeface="Aptos" pitchFamily="34" charset="-120"/>
               </a:rPr>
-              <a:t>ASPPH AI Framework Report: Public health framing for responsible.</a:t>
-            </a:r>
-            <a:endParaRPr lang="en-US" sz="1220" dirty="0"/>
-          </a:p>
-          <a:p>
-            <a:pPr indent="0" marL="0">
-              <a:buNone/>
-            </a:pPr>
-            <a:r>
-              <a:rPr lang="en-US" sz="1220" dirty="0">
+              <a:t>ASPPH AI Framework Report: Public health framing.</a:t>
+            </a:r>
+            <a:endParaRPr lang="en-US" sz="1140" dirty="0"/>
+          </a:p>
+          <a:p>
+            <a:pPr indent="0" marL="0">
+              <a:buNone/>
+            </a:pPr>
+            <a:r>
+              <a:rPr lang="en-US" sz="1140" dirty="0">
                 <a:solidFill>
                   <a:srgbClr val="17364A"/>
                 </a:solidFill>
@@ -15697,16 +15697,16 @@
                 <a:ea typeface="Aptos" pitchFamily="34" charset="-122"/>
                 <a:cs typeface="Aptos" pitchFamily="34" charset="-120"/>
               </a:rPr>
-              <a:t>WHO: Ethics and governance of artificial intelligence for health:.</a:t>
-            </a:r>
-            <a:endParaRPr lang="en-US" sz="1220" dirty="0"/>
-          </a:p>
-          <a:p>
-            <a:pPr indent="0" marL="0">
-              <a:buNone/>
-            </a:pPr>
-            <a:r>
-              <a:rPr lang="en-US" sz="1220" dirty="0">
+              <a:t>WHO: Ethics and governance of artificial.</a:t>
+            </a:r>
+            <a:endParaRPr lang="en-US" sz="1140" dirty="0"/>
+          </a:p>
+          <a:p>
+            <a:pPr indent="0" marL="0">
+              <a:buNone/>
+            </a:pPr>
+            <a:r>
+              <a:rPr lang="en-US" sz="1140" dirty="0">
                 <a:solidFill>
                   <a:srgbClr val="17364A"/>
                 </a:solidFill>
@@ -15714,9 +15714,9 @@
                 <a:ea typeface="Aptos" pitchFamily="34" charset="-122"/>
                 <a:cs typeface="Aptos" pitchFamily="34" charset="-120"/>
               </a:rPr>
-              <a:t>NIH PubMed: Primary source for biomedical and public health.</a:t>
-            </a:r>
-            <a:endParaRPr lang="en-US" sz="1220" dirty="0"/>
+              <a:t>NIH PubMed: Primary source for biomedical and.</a:t>
+            </a:r>
+            <a:endParaRPr lang="en-US" sz="1140" dirty="0"/>
           </a:p>
         </p:txBody>
       </p:sp>
@@ -15728,12 +15728,12 @@
         </p:nvSpPr>
         <p:spPr>
           <a:xfrm>
-            <a:off x="7635240" y="4184294"/>
-            <a:ext cx="3474720" cy="1466698"/>
+            <a:off x="7543800" y="4389120"/>
+            <a:ext cx="3611880" cy="1261872"/>
           </a:xfrm>
           <a:prstGeom prst="roundRect">
             <a:avLst>
-              <a:gd name="adj" fmla="val 7481"/>
+              <a:gd name="adj" fmla="val 8696"/>
             </a:avLst>
           </a:prstGeom>
           <a:solidFill>
@@ -15755,8 +15755,8 @@
         </p:nvSpPr>
         <p:spPr>
           <a:xfrm>
-            <a:off x="7799832" y="4330598"/>
-            <a:ext cx="3145536" cy="256032"/>
+            <a:off x="7708392" y="4517136"/>
+            <a:ext cx="3282696" cy="228600"/>
           </a:xfrm>
           <a:prstGeom prst="rect">
             <a:avLst/>
@@ -15772,7 +15772,7 @@
               <a:buNone/>
             </a:pPr>
             <a:r>
-              <a:rPr lang="en-US" sz="1300" b="1" dirty="0">
+              <a:rPr lang="en-US" sz="1220" b="1" dirty="0">
                 <a:solidFill>
                   <a:srgbClr val="0068B7"/>
                 </a:solidFill>
@@ -15782,7 +15782,7 @@
               </a:rPr>
               <a:t>Apply it</a:t>
             </a:r>
-            <a:endParaRPr lang="en-US" sz="1300" dirty="0"/>
+            <a:endParaRPr lang="en-US" sz="1220" dirty="0"/>
           </a:p>
         </p:txBody>
       </p:sp>
@@ -15794,8 +15794,8 @@
         </p:nvSpPr>
         <p:spPr>
           <a:xfrm>
-            <a:off x="7799832" y="4659782"/>
-            <a:ext cx="3145536" cy="899770"/>
+            <a:off x="7708392" y="4828032"/>
+            <a:ext cx="3282696" cy="749808"/>
           </a:xfrm>
           <a:prstGeom prst="rect">
             <a:avLst/>
@@ -15813,7 +15813,7 @@
               <a:buNone/>
             </a:pPr>
             <a:r>
-              <a:rPr lang="en-US" sz="1320" dirty="0">
+              <a:rPr lang="en-US" sz="1220" dirty="0">
                 <a:solidFill>
                   <a:srgbClr val="17364A"/>
                 </a:solidFill>
@@ -15821,9 +15821,9 @@
                 <a:ea typeface="Aptos" pitchFamily="34" charset="-122"/>
                 <a:cs typeface="Aptos" pitchFamily="34" charset="-120"/>
               </a:rPr>
-              <a:t>Connect the concept to public health purpose, responsible use, required safeguards, documentation, and the next action a department should take.</a:t>
-            </a:r>
-            <a:endParaRPr lang="en-US" sz="1320" dirty="0"/>
+              <a:t>Connect the concept to public health purpose, responsible use, required.</a:t>
+            </a:r>
+            <a:endParaRPr lang="en-US" sz="1220" dirty="0"/>
           </a:p>
         </p:txBody>
       </p:sp>
@@ -16114,8 +16114,8 @@
         </p:nvSpPr>
         <p:spPr>
           <a:xfrm>
-            <a:off x="868680" y="1508760"/>
-            <a:ext cx="6309360" cy="4160520"/>
+            <a:off x="822960" y="1463040"/>
+            <a:ext cx="6565392" cy="4343400"/>
           </a:xfrm>
           <a:prstGeom prst="rect">
             <a:avLst/>
@@ -16133,7 +16133,7 @@
               <a:buNone/>
             </a:pPr>
             <a:r>
-              <a:rPr lang="en-US" sz="2100" dirty="0">
+              <a:rPr lang="en-US" sz="1920" dirty="0">
                 <a:solidFill>
                   <a:srgbClr val="003A63"/>
                 </a:solidFill>
@@ -16141,9 +16141,9 @@
                 <a:ea typeface="Aptos" pitchFamily="34" charset="-122"/>
                 <a:cs typeface="Aptos" pitchFamily="34" charset="-120"/>
               </a:rPr>
-              <a:t>• ASPPH AI Framework Report: Framework language for responsible use of AI-supported research and.</a:t>
-            </a:r>
-            <a:endParaRPr lang="en-US" sz="2100" dirty="0"/>
+              <a:t>• ASPPH AI Framework Report: Framework language for responsible use of.</a:t>
+            </a:r>
+            <a:endParaRPr lang="en-US" sz="1920" dirty="0"/>
           </a:p>
         </p:txBody>
       </p:sp>
@@ -16155,12 +16155,12 @@
         </p:nvSpPr>
         <p:spPr>
           <a:xfrm>
-            <a:off x="7635240" y="1325880"/>
-            <a:ext cx="3474720" cy="1255471"/>
+            <a:off x="7543800" y="1325880"/>
+            <a:ext cx="3611880" cy="1261872"/>
           </a:xfrm>
           <a:prstGeom prst="roundRect">
             <a:avLst>
-              <a:gd name="adj" fmla="val 8740"/>
+              <a:gd name="adj" fmla="val 8696"/>
             </a:avLst>
           </a:prstGeom>
           <a:solidFill>
@@ -16182,8 +16182,8 @@
         </p:nvSpPr>
         <p:spPr>
           <a:xfrm>
-            <a:off x="7799832" y="1472184"/>
-            <a:ext cx="3145536" cy="256032"/>
+            <a:off x="7708392" y="1453896"/>
+            <a:ext cx="3282696" cy="228600"/>
           </a:xfrm>
           <a:prstGeom prst="rect">
             <a:avLst/>
@@ -16199,7 +16199,7 @@
               <a:buNone/>
             </a:pPr>
             <a:r>
-              <a:rPr lang="en-US" sz="1300" b="1" dirty="0">
+              <a:rPr lang="en-US" sz="1220" b="1" dirty="0">
                 <a:solidFill>
                   <a:srgbClr val="0068B7"/>
                 </a:solidFill>
@@ -16209,7 +16209,7 @@
               </a:rPr>
               <a:t>Core concept</a:t>
             </a:r>
-            <a:endParaRPr lang="en-US" sz="1300" dirty="0"/>
+            <a:endParaRPr lang="en-US" sz="1220" dirty="0"/>
           </a:p>
         </p:txBody>
       </p:sp>
@@ -16221,8 +16221,8 @@
         </p:nvSpPr>
         <p:spPr>
           <a:xfrm>
-            <a:off x="7799832" y="1801368"/>
-            <a:ext cx="3145536" cy="688543"/>
+            <a:off x="7708392" y="1764792"/>
+            <a:ext cx="3282696" cy="749808"/>
           </a:xfrm>
           <a:prstGeom prst="rect">
             <a:avLst/>
@@ -16240,7 +16240,7 @@
               <a:buNone/>
             </a:pPr>
             <a:r>
-              <a:rPr lang="en-US" sz="1320" dirty="0">
+              <a:rPr lang="en-US" sz="1220" dirty="0">
                 <a:solidFill>
                   <a:srgbClr val="17364A"/>
                 </a:solidFill>
@@ -16248,9 +16248,9 @@
                 <a:ea typeface="Aptos" pitchFamily="34" charset="-122"/>
                 <a:cs typeface="Aptos" pitchFamily="34" charset="-120"/>
               </a:rPr>
-              <a:t>ASPPH AI Framework Report: Framework language for responsible use of AI-supported research and.</a:t>
-            </a:r>
-            <a:endParaRPr lang="en-US" sz="1320" dirty="0"/>
+              <a:t>ASPPH AI Framework Report: Framework language for responsible use of.</a:t>
+            </a:r>
+            <a:endParaRPr lang="en-US" sz="1220" dirty="0"/>
           </a:p>
         </p:txBody>
       </p:sp>
@@ -16262,12 +16262,12 @@
         </p:nvSpPr>
         <p:spPr>
           <a:xfrm>
-            <a:off x="7635240" y="2718511"/>
-            <a:ext cx="3474720" cy="1328623"/>
+            <a:off x="7543800" y="2724912"/>
+            <a:ext cx="3611880" cy="1527048"/>
           </a:xfrm>
           <a:prstGeom prst="roundRect">
             <a:avLst>
-              <a:gd name="adj" fmla="val 8259"/>
+              <a:gd name="adj" fmla="val 7186"/>
             </a:avLst>
           </a:prstGeom>
           <a:solidFill>
@@ -16289,8 +16289,8 @@
         </p:nvSpPr>
         <p:spPr>
           <a:xfrm>
-            <a:off x="7799832" y="2864815"/>
-            <a:ext cx="3145536" cy="256032"/>
+            <a:off x="7708392" y="2852928"/>
+            <a:ext cx="3282696" cy="228600"/>
           </a:xfrm>
           <a:prstGeom prst="rect">
             <a:avLst/>
@@ -16306,7 +16306,7 @@
               <a:buNone/>
             </a:pPr>
             <a:r>
-              <a:rPr lang="en-US" sz="1300" b="1" dirty="0">
+              <a:rPr lang="en-US" sz="1220" b="1" dirty="0">
                 <a:solidFill>
                   <a:srgbClr val="0068B7"/>
                 </a:solidFill>
@@ -16316,7 +16316,7 @@
               </a:rPr>
               <a:t>Concept checkpoints</a:t>
             </a:r>
-            <a:endParaRPr lang="en-US" sz="1300" dirty="0"/>
+            <a:endParaRPr lang="en-US" sz="1220" dirty="0"/>
           </a:p>
         </p:txBody>
       </p:sp>
@@ -16328,8 +16328,8 @@
         </p:nvSpPr>
         <p:spPr>
           <a:xfrm>
-            <a:off x="7818120" y="3230575"/>
-            <a:ext cx="3090672" cy="670255"/>
+            <a:off x="7726680" y="3182112"/>
+            <a:ext cx="3227832" cy="960120"/>
           </a:xfrm>
           <a:prstGeom prst="rect">
             <a:avLst/>
@@ -16347,7 +16347,7 @@
               <a:buNone/>
             </a:pPr>
             <a:r>
-              <a:rPr lang="en-US" sz="1220" dirty="0">
+              <a:rPr lang="en-US" sz="1140" dirty="0">
                 <a:solidFill>
                   <a:srgbClr val="17364A"/>
                 </a:solidFill>
@@ -16355,9 +16355,9 @@
                 <a:ea typeface="Aptos" pitchFamily="34" charset="-122"/>
                 <a:cs typeface="Aptos" pitchFamily="34" charset="-120"/>
               </a:rPr>
-              <a:t>ASPPH AI Framework Report: Framework language for responsible use.</a:t>
-            </a:r>
-            <a:endParaRPr lang="en-US" sz="1220" dirty="0"/>
+              <a:t>ASPPH AI Framework Report: Framework language for.</a:t>
+            </a:r>
+            <a:endParaRPr lang="en-US" sz="1140" dirty="0"/>
           </a:p>
         </p:txBody>
       </p:sp>
@@ -16369,12 +16369,12 @@
         </p:nvSpPr>
         <p:spPr>
           <a:xfrm>
-            <a:off x="7635240" y="4184294"/>
-            <a:ext cx="3474720" cy="1466698"/>
+            <a:off x="7543800" y="4389120"/>
+            <a:ext cx="3611880" cy="1261872"/>
           </a:xfrm>
           <a:prstGeom prst="roundRect">
             <a:avLst>
-              <a:gd name="adj" fmla="val 7481"/>
+              <a:gd name="adj" fmla="val 8696"/>
             </a:avLst>
           </a:prstGeom>
           <a:solidFill>
@@ -16396,8 +16396,8 @@
         </p:nvSpPr>
         <p:spPr>
           <a:xfrm>
-            <a:off x="7799832" y="4330598"/>
-            <a:ext cx="3145536" cy="256032"/>
+            <a:off x="7708392" y="4517136"/>
+            <a:ext cx="3282696" cy="228600"/>
           </a:xfrm>
           <a:prstGeom prst="rect">
             <a:avLst/>
@@ -16413,7 +16413,7 @@
               <a:buNone/>
             </a:pPr>
             <a:r>
-              <a:rPr lang="en-US" sz="1300" b="1" dirty="0">
+              <a:rPr lang="en-US" sz="1220" b="1" dirty="0">
                 <a:solidFill>
                   <a:srgbClr val="0068B7"/>
                 </a:solidFill>
@@ -16423,7 +16423,7 @@
               </a:rPr>
               <a:t>Apply it</a:t>
             </a:r>
-            <a:endParaRPr lang="en-US" sz="1300" dirty="0"/>
+            <a:endParaRPr lang="en-US" sz="1220" dirty="0"/>
           </a:p>
         </p:txBody>
       </p:sp>
@@ -16435,8 +16435,8 @@
         </p:nvSpPr>
         <p:spPr>
           <a:xfrm>
-            <a:off x="7799832" y="4659782"/>
-            <a:ext cx="3145536" cy="899770"/>
+            <a:off x="7708392" y="4828032"/>
+            <a:ext cx="3282696" cy="749808"/>
           </a:xfrm>
           <a:prstGeom prst="rect">
             <a:avLst/>
@@ -16454,7 +16454,7 @@
               <a:buNone/>
             </a:pPr>
             <a:r>
-              <a:rPr lang="en-US" sz="1320" dirty="0">
+              <a:rPr lang="en-US" sz="1220" dirty="0">
                 <a:solidFill>
                   <a:srgbClr val="17364A"/>
                 </a:solidFill>
@@ -16462,9 +16462,9 @@
                 <a:ea typeface="Aptos" pitchFamily="34" charset="-122"/>
                 <a:cs typeface="Aptos" pitchFamily="34" charset="-120"/>
               </a:rPr>
-              <a:t>Connect the concept to public health purpose, responsible use, required safeguards, documentation, and the next action a department should take.</a:t>
-            </a:r>
-            <a:endParaRPr lang="en-US" sz="1320" dirty="0"/>
+              <a:t>Connect the concept to public health purpose, responsible use, required.</a:t>
+            </a:r>
+            <a:endParaRPr lang="en-US" sz="1220" dirty="0"/>
           </a:p>
         </p:txBody>
       </p:sp>
@@ -16782,7 +16782,7 @@
                 <a:ea typeface="Aptos" pitchFamily="34" charset="-122"/>
                 <a:cs typeface="Aptos" pitchFamily="34" charset="-120"/>
               </a:rPr>
-              <a:t>• Play 1: Vision &amp; Guardrails - This lesson informs Play 1 by helping learners connect the.</a:t>
+              <a:t>• Play 1: Vision &amp; Guardrails - This lesson informs Play 1 by helping learners.</a:t>
             </a:r>
             <a:endParaRPr lang="en-US" sz="1900" dirty="0"/>
           </a:p>
@@ -16799,7 +16799,7 @@
                 <a:ea typeface="Aptos" pitchFamily="34" charset="-122"/>
                 <a:cs typeface="Aptos" pitchFamily="34" charset="-120"/>
               </a:rPr>
-              <a:t>• Play 3: Establish AI Governance - This lesson informs Play 3 by helping learners connect the.</a:t>
+              <a:t>• Play 3: Establish AI Governance - This lesson informs Play 3 by helping.</a:t>
             </a:r>
             <a:endParaRPr lang="en-US" sz="1900" dirty="0"/>
           </a:p>
@@ -16816,7 +16816,7 @@
                 <a:ea typeface="Aptos" pitchFamily="34" charset="-122"/>
                 <a:cs typeface="Aptos" pitchFamily="34" charset="-120"/>
               </a:rPr>
-              <a:t>• Play 11: Build and Deploy AI Solutions - This lesson informs Play 11 by helping learners.</a:t>
+              <a:t>• Play 11: Build and Deploy AI Solutions - This lesson informs Play 11 by.</a:t>
             </a:r>
             <a:endParaRPr lang="en-US" sz="1900" dirty="0"/>
           </a:p>
@@ -16857,8 +16857,8 @@
         </p:nvSpPr>
         <p:spPr>
           <a:xfrm>
-            <a:off x="8211312" y="1563624"/>
-            <a:ext cx="2734056" cy="256032"/>
+            <a:off x="8211312" y="1545336"/>
+            <a:ext cx="2734056" cy="228600"/>
           </a:xfrm>
           <a:prstGeom prst="rect">
             <a:avLst/>
@@ -16874,7 +16874,7 @@
               <a:buNone/>
             </a:pPr>
             <a:r>
-              <a:rPr lang="en-US" sz="1300" b="1" dirty="0">
+              <a:rPr lang="en-US" sz="1220" b="1" dirty="0">
                 <a:solidFill>
                   <a:srgbClr val="0068B7"/>
                 </a:solidFill>
@@ -16884,7 +16884,7 @@
               </a:rPr>
               <a:t>Apply the lesson</a:t>
             </a:r>
-            <a:endParaRPr lang="en-US" sz="1300" dirty="0"/>
+            <a:endParaRPr lang="en-US" sz="1220" dirty="0"/>
           </a:p>
         </p:txBody>
       </p:sp>
@@ -16896,8 +16896,8 @@
         </p:nvSpPr>
         <p:spPr>
           <a:xfrm>
-            <a:off x="8211312" y="1892808"/>
-            <a:ext cx="2734056" cy="1536192"/>
+            <a:off x="8211312" y="1856232"/>
+            <a:ext cx="2734056" cy="1591056"/>
           </a:xfrm>
           <a:prstGeom prst="rect">
             <a:avLst/>
@@ -16915,7 +16915,7 @@
               <a:buNone/>
             </a:pPr>
             <a:r>
-              <a:rPr lang="en-US" sz="1320" dirty="0">
+              <a:rPr lang="en-US" sz="1220" dirty="0">
                 <a:solidFill>
                   <a:srgbClr val="17364A"/>
                 </a:solidFill>
@@ -16923,9 +16923,9 @@
                 <a:ea typeface="Aptos" pitchFamily="34" charset="-122"/>
                 <a:cs typeface="Aptos" pitchFamily="34" charset="-120"/>
               </a:rPr>
-              <a:t>Use the related plays to identify decisions, participants, timing, approvals, and documentation needed for responsible implementation.</a:t>
-            </a:r>
-            <a:endParaRPr lang="en-US" sz="1320" dirty="0"/>
+              <a:t>Use the related plays to identify decisions, participants, timing, approvals,.</a:t>
+            </a:r>
+            <a:endParaRPr lang="en-US" sz="1220" dirty="0"/>
           </a:p>
         </p:txBody>
       </p:sp>
@@ -16964,8 +16964,8 @@
         </p:nvSpPr>
         <p:spPr>
           <a:xfrm>
-            <a:off x="8211312" y="3941064"/>
-            <a:ext cx="2734056" cy="256032"/>
+            <a:off x="8211312" y="3922776"/>
+            <a:ext cx="2734056" cy="228600"/>
           </a:xfrm>
           <a:prstGeom prst="rect">
             <a:avLst/>
@@ -16981,7 +16981,7 @@
               <a:buNone/>
             </a:pPr>
             <a:r>
-              <a:rPr lang="en-US" sz="1300" b="1" dirty="0">
+              <a:rPr lang="en-US" sz="1220" b="1" dirty="0">
                 <a:solidFill>
                   <a:srgbClr val="0068B7"/>
                 </a:solidFill>
@@ -16991,7 +16991,7 @@
               </a:rPr>
               <a:t>Use the play links to</a:t>
             </a:r>
-            <a:endParaRPr lang="en-US" sz="1300" dirty="0"/>
+            <a:endParaRPr lang="en-US" sz="1220" dirty="0"/>
           </a:p>
         </p:txBody>
       </p:sp>
@@ -17003,8 +17003,8 @@
         </p:nvSpPr>
         <p:spPr>
           <a:xfrm>
-            <a:off x="8229600" y="4306824"/>
-            <a:ext cx="2679192" cy="941832"/>
+            <a:off x="8229600" y="4251960"/>
+            <a:ext cx="2679192" cy="1033272"/>
           </a:xfrm>
           <a:prstGeom prst="rect">
             <a:avLst/>
@@ -17022,7 +17022,7 @@
               <a:buNone/>
             </a:pPr>
             <a:r>
-              <a:rPr lang="en-US" sz="1220" dirty="0">
+              <a:rPr lang="en-US" sz="1140" dirty="0">
                 <a:solidFill>
                   <a:srgbClr val="17364A"/>
                 </a:solidFill>
@@ -17032,14 +17032,14 @@
               </a:rPr>
               <a:t>Locate the decision point in the playbook sequence.</a:t>
             </a:r>
-            <a:endParaRPr lang="en-US" sz="1220" dirty="0"/>
-          </a:p>
-          <a:p>
-            <a:pPr indent="0" marL="0">
-              <a:buNone/>
-            </a:pPr>
-            <a:r>
-              <a:rPr lang="en-US" sz="1220" dirty="0">
+            <a:endParaRPr lang="en-US" sz="1140" dirty="0"/>
+          </a:p>
+          <a:p>
+            <a:pPr indent="0" marL="0">
+              <a:buNone/>
+            </a:pPr>
+            <a:r>
+              <a:rPr lang="en-US" sz="1140" dirty="0">
                 <a:solidFill>
                   <a:srgbClr val="17364A"/>
                 </a:solidFill>
@@ -17049,14 +17049,14 @@
               </a:rPr>
               <a:t>Identify who should participate in the work.</a:t>
             </a:r>
-            <a:endParaRPr lang="en-US" sz="1220" dirty="0"/>
-          </a:p>
-          <a:p>
-            <a:pPr indent="0" marL="0">
-              <a:buNone/>
-            </a:pPr>
-            <a:r>
-              <a:rPr lang="en-US" sz="1220" dirty="0">
+            <a:endParaRPr lang="en-US" sz="1140" dirty="0"/>
+          </a:p>
+          <a:p>
+            <a:pPr indent="0" marL="0">
+              <a:buNone/>
+            </a:pPr>
+            <a:r>
+              <a:rPr lang="en-US" sz="1140" dirty="0">
                 <a:solidFill>
                   <a:srgbClr val="17364A"/>
                 </a:solidFill>
@@ -17064,9 +17064,9 @@
                 <a:ea typeface="Aptos" pitchFamily="34" charset="-122"/>
                 <a:cs typeface="Aptos" pitchFamily="34" charset="-120"/>
               </a:rPr>
-              <a:t>Document the review, approval, or implementation step.</a:t>
-            </a:r>
-            <a:endParaRPr lang="en-US" sz="1220" dirty="0"/>
+              <a:t>Document the review, approval, or implementation.</a:t>
+            </a:r>
+            <a:endParaRPr lang="en-US" sz="1140" dirty="0"/>
           </a:p>
         </p:txBody>
       </p:sp>
@@ -17384,7 +17384,7 @@
                 <a:ea typeface="Aptos" pitchFamily="34" charset="-122"/>
                 <a:cs typeface="Aptos" pitchFamily="34" charset="-120"/>
               </a:rPr>
-              <a:t>• Tool 1: AI Vision &amp; Principles Workshop (Workshop) - Use AI Vision &amp; Principles Workshop to.</a:t>
+              <a:t>• Tool 1: AI Vision &amp; Principles Workshop (Workshop) - Use AI Vision &amp;.</a:t>
             </a:r>
             <a:endParaRPr lang="en-US" sz="1850" dirty="0"/>
           </a:p>
@@ -17401,7 +17401,7 @@
                 <a:ea typeface="Aptos" pitchFamily="34" charset="-122"/>
                 <a:cs typeface="Aptos" pitchFamily="34" charset="-120"/>
               </a:rPr>
-              <a:t>• Tool 2: Responsible AI Policy Template (Template) - Use Responsible AI Policy Template to.</a:t>
+              <a:t>• Tool 2: Responsible AI Policy Template (Template) - Use Responsible AI.</a:t>
             </a:r>
             <a:endParaRPr lang="en-US" sz="1850" dirty="0"/>
           </a:p>
@@ -17442,8 +17442,8 @@
         </p:nvSpPr>
         <p:spPr>
           <a:xfrm>
-            <a:off x="8211312" y="1563624"/>
-            <a:ext cx="2734056" cy="256032"/>
+            <a:off x="8211312" y="1545336"/>
+            <a:ext cx="2734056" cy="228600"/>
           </a:xfrm>
           <a:prstGeom prst="rect">
             <a:avLst/>
@@ -17459,7 +17459,7 @@
               <a:buNone/>
             </a:pPr>
             <a:r>
-              <a:rPr lang="en-US" sz="1300" b="1" dirty="0">
+              <a:rPr lang="en-US" sz="1220" b="1" dirty="0">
                 <a:solidFill>
                   <a:srgbClr val="0068B7"/>
                 </a:solidFill>
@@ -17469,7 +17469,7 @@
               </a:rPr>
               <a:t>Use the tools</a:t>
             </a:r>
-            <a:endParaRPr lang="en-US" sz="1300" dirty="0"/>
+            <a:endParaRPr lang="en-US" sz="1220" dirty="0"/>
           </a:p>
         </p:txBody>
       </p:sp>
@@ -17481,8 +17481,8 @@
         </p:nvSpPr>
         <p:spPr>
           <a:xfrm>
-            <a:off x="8211312" y="1892808"/>
-            <a:ext cx="2734056" cy="1536192"/>
+            <a:off x="8211312" y="1856232"/>
+            <a:ext cx="2734056" cy="1591056"/>
           </a:xfrm>
           <a:prstGeom prst="rect">
             <a:avLst/>
@@ -17500,7 +17500,7 @@
               <a:buNone/>
             </a:pPr>
             <a:r>
-              <a:rPr lang="en-US" sz="1320" dirty="0">
+              <a:rPr lang="en-US" sz="1220" dirty="0">
                 <a:solidFill>
                   <a:srgbClr val="17364A"/>
                 </a:solidFill>
@@ -17508,9 +17508,9 @@
                 <a:ea typeface="Aptos" pitchFamily="34" charset="-122"/>
                 <a:cs typeface="Aptos" pitchFamily="34" charset="-120"/>
               </a:rPr>
-              <a:t>Use linked tools when your department needs a structured worksheet, template, checklist, review process, or documentation artifact.</a:t>
-            </a:r>
-            <a:endParaRPr lang="en-US" sz="1320" dirty="0"/>
+              <a:t>Use linked tools when your department needs a structured worksheet, template,.</a:t>
+            </a:r>
+            <a:endParaRPr lang="en-US" sz="1220" dirty="0"/>
           </a:p>
         </p:txBody>
       </p:sp>
@@ -17549,8 +17549,8 @@
         </p:nvSpPr>
         <p:spPr>
           <a:xfrm>
-            <a:off x="8211312" y="3941064"/>
-            <a:ext cx="2734056" cy="256032"/>
+            <a:off x="8211312" y="3922776"/>
+            <a:ext cx="2734056" cy="228600"/>
           </a:xfrm>
           <a:prstGeom prst="rect">
             <a:avLst/>
@@ -17566,7 +17566,7 @@
               <a:buNone/>
             </a:pPr>
             <a:r>
-              <a:rPr lang="en-US" sz="1300" b="1" dirty="0">
+              <a:rPr lang="en-US" sz="1220" b="1" dirty="0">
                 <a:solidFill>
                   <a:srgbClr val="0068B7"/>
                 </a:solidFill>
@@ -17576,7 +17576,7 @@
               </a:rPr>
               <a:t>Tool selection cues</a:t>
             </a:r>
-            <a:endParaRPr lang="en-US" sz="1300" dirty="0"/>
+            <a:endParaRPr lang="en-US" sz="1220" dirty="0"/>
           </a:p>
         </p:txBody>
       </p:sp>
@@ -17588,8 +17588,8 @@
         </p:nvSpPr>
         <p:spPr>
           <a:xfrm>
-            <a:off x="8229600" y="4306824"/>
-            <a:ext cx="2679192" cy="941832"/>
+            <a:off x="8229600" y="4251960"/>
+            <a:ext cx="2679192" cy="1033272"/>
           </a:xfrm>
           <a:prstGeom prst="rect">
             <a:avLst/>
@@ -17607,7 +17607,7 @@
               <a:buNone/>
             </a:pPr>
             <a:r>
-              <a:rPr lang="en-US" sz="1220" dirty="0">
+              <a:rPr lang="en-US" sz="1140" dirty="0">
                 <a:solidFill>
                   <a:srgbClr val="17364A"/>
                 </a:solidFill>
@@ -17617,14 +17617,14 @@
               </a:rPr>
               <a:t>Use a tool when no comparable local process exists.</a:t>
             </a:r>
-            <a:endParaRPr lang="en-US" sz="1220" dirty="0"/>
-          </a:p>
-          <a:p>
-            <a:pPr indent="0" marL="0">
-              <a:buNone/>
-            </a:pPr>
-            <a:r>
-              <a:rPr lang="en-US" sz="1220" dirty="0">
+            <a:endParaRPr lang="en-US" sz="1140" dirty="0"/>
+          </a:p>
+          <a:p>
+            <a:pPr indent="0" marL="0">
+              <a:buNone/>
+            </a:pPr>
+            <a:r>
+              <a:rPr lang="en-US" sz="1140" dirty="0">
                 <a:solidFill>
                   <a:srgbClr val="17364A"/>
                 </a:solidFill>
@@ -17632,16 +17632,16 @@
                 <a:ea typeface="Aptos" pitchFamily="34" charset="-122"/>
                 <a:cs typeface="Aptos" pitchFamily="34" charset="-120"/>
               </a:rPr>
-              <a:t>Adapt existing department templates when they already fit the.</a:t>
-            </a:r>
-            <a:endParaRPr lang="en-US" sz="1220" dirty="0"/>
-          </a:p>
-          <a:p>
-            <a:pPr indent="0" marL="0">
-              <a:buNone/>
-            </a:pPr>
-            <a:r>
-              <a:rPr lang="en-US" sz="1220" dirty="0">
+              <a:t>Adapt existing department templates when they.</a:t>
+            </a:r>
+            <a:endParaRPr lang="en-US" sz="1140" dirty="0"/>
+          </a:p>
+          <a:p>
+            <a:pPr indent="0" marL="0">
+              <a:buNone/>
+            </a:pPr>
+            <a:r>
+              <a:rPr lang="en-US" sz="1140" dirty="0">
                 <a:solidFill>
                   <a:srgbClr val="17364A"/>
                 </a:solidFill>
@@ -17649,9 +17649,9 @@
                 <a:ea typeface="Aptos" pitchFamily="34" charset="-122"/>
                 <a:cs typeface="Aptos" pitchFamily="34" charset="-120"/>
               </a:rPr>
-              <a:t>Save the completed artifact as evidence of the decision.</a:t>
-            </a:r>
-            <a:endParaRPr lang="en-US" sz="1220" dirty="0"/>
+              <a:t>Save the completed artifact as evidence of the.</a:t>
+            </a:r>
+            <a:endParaRPr lang="en-US" sz="1140" dirty="0"/>
           </a:p>
         </p:txBody>
       </p:sp>
@@ -17942,8 +17942,8 @@
         </p:nvSpPr>
         <p:spPr>
           <a:xfrm>
-            <a:off x="868680" y="1508760"/>
-            <a:ext cx="6309360" cy="4160520"/>
+            <a:off x="822960" y="1463040"/>
+            <a:ext cx="6565392" cy="4343400"/>
           </a:xfrm>
           <a:prstGeom prst="rect">
             <a:avLst/>
@@ -17961,7 +17961,7 @@
               <a:buNone/>
             </a:pPr>
             <a:r>
-              <a:rPr lang="en-US" sz="2100" dirty="0">
+              <a:rPr lang="en-US" sz="1920" dirty="0">
                 <a:solidFill>
                   <a:srgbClr val="003A63"/>
                 </a:solidFill>
@@ -17969,16 +17969,16 @@
                 <a:ea typeface="Aptos" pitchFamily="34" charset="-122"/>
                 <a:cs typeface="Aptos" pitchFamily="34" charset="-120"/>
               </a:rPr>
-              <a:t>• Define the concept in plain language for colleagues, leaders, partners, and community-facing.</a:t>
-            </a:r>
-            <a:endParaRPr lang="en-US" sz="2100" dirty="0"/>
-          </a:p>
-          <a:p>
-            <a:pPr indent="0" marL="0">
-              <a:buNone/>
-            </a:pPr>
-            <a:r>
-              <a:rPr lang="en-US" sz="2100" dirty="0">
+              <a:t>• Define the concept in plain language for colleagues, leaders, partners, and.</a:t>
+            </a:r>
+            <a:endParaRPr lang="en-US" sz="1920" dirty="0"/>
+          </a:p>
+          <a:p>
+            <a:pPr indent="0" marL="0">
+              <a:buNone/>
+            </a:pPr>
+            <a:r>
+              <a:rPr lang="en-US" sz="1920" dirty="0">
                 <a:solidFill>
                   <a:srgbClr val="003A63"/>
                 </a:solidFill>
@@ -17986,16 +17986,16 @@
                 <a:ea typeface="Aptos" pitchFamily="34" charset="-122"/>
                 <a:cs typeface="Aptos" pitchFamily="34" charset="-120"/>
               </a:rPr>
-              <a:t>• Identify where the concept affects AI planning, governance, procurement, implementation,.</a:t>
-            </a:r>
-            <a:endParaRPr lang="en-US" sz="2100" dirty="0"/>
-          </a:p>
-          <a:p>
-            <a:pPr indent="0" marL="0">
-              <a:buNone/>
-            </a:pPr>
-            <a:r>
-              <a:rPr lang="en-US" sz="2100" dirty="0">
+              <a:t>• Identify where the concept affects AI planning, governance, procurement,.</a:t>
+            </a:r>
+            <a:endParaRPr lang="en-US" sz="1920" dirty="0"/>
+          </a:p>
+          <a:p>
+            <a:pPr indent="0" marL="0">
+              <a:buNone/>
+            </a:pPr>
+            <a:r>
+              <a:rPr lang="en-US" sz="1920" dirty="0">
                 <a:solidFill>
                   <a:srgbClr val="003A63"/>
                 </a:solidFill>
@@ -18003,9 +18003,9 @@
                 <a:ea typeface="Aptos" pitchFamily="34" charset="-122"/>
                 <a:cs typeface="Aptos" pitchFamily="34" charset="-120"/>
               </a:rPr>
-              <a:t>• Apply the concept to a concrete public health workflow using the linked plays, tools,.</a:t>
-            </a:r>
-            <a:endParaRPr lang="en-US" sz="2100" dirty="0"/>
+              <a:t>• Apply the concept to a concrete public health workflow using the linked.</a:t>
+            </a:r>
+            <a:endParaRPr lang="en-US" sz="1920" dirty="0"/>
           </a:p>
         </p:txBody>
       </p:sp>
@@ -18017,12 +18017,12 @@
         </p:nvSpPr>
         <p:spPr>
           <a:xfrm>
-            <a:off x="7635240" y="1325880"/>
-            <a:ext cx="3474720" cy="1255471"/>
+            <a:off x="7543800" y="1325880"/>
+            <a:ext cx="3611880" cy="1261872"/>
           </a:xfrm>
           <a:prstGeom prst="roundRect">
             <a:avLst>
-              <a:gd name="adj" fmla="val 8740"/>
+              <a:gd name="adj" fmla="val 8696"/>
             </a:avLst>
           </a:prstGeom>
           <a:solidFill>
@@ -18044,8 +18044,8 @@
         </p:nvSpPr>
         <p:spPr>
           <a:xfrm>
-            <a:off x="7799832" y="1472184"/>
-            <a:ext cx="3145536" cy="256032"/>
+            <a:off x="7708392" y="1453896"/>
+            <a:ext cx="3282696" cy="228600"/>
           </a:xfrm>
           <a:prstGeom prst="rect">
             <a:avLst/>
@@ -18061,7 +18061,7 @@
               <a:buNone/>
             </a:pPr>
             <a:r>
-              <a:rPr lang="en-US" sz="1300" b="1" dirty="0">
+              <a:rPr lang="en-US" sz="1220" b="1" dirty="0">
                 <a:solidFill>
                   <a:srgbClr val="0068B7"/>
                 </a:solidFill>
@@ -18071,7 +18071,7 @@
               </a:rPr>
               <a:t>Practice focus</a:t>
             </a:r>
-            <a:endParaRPr lang="en-US" sz="1300" dirty="0"/>
+            <a:endParaRPr lang="en-US" sz="1220" dirty="0"/>
           </a:p>
         </p:txBody>
       </p:sp>
@@ -18083,8 +18083,8 @@
         </p:nvSpPr>
         <p:spPr>
           <a:xfrm>
-            <a:off x="7799832" y="1801368"/>
-            <a:ext cx="3145536" cy="688543"/>
+            <a:off x="7708392" y="1764792"/>
+            <a:ext cx="3282696" cy="749808"/>
           </a:xfrm>
           <a:prstGeom prst="rect">
             <a:avLst/>
@@ -18102,7 +18102,7 @@
               <a:buNone/>
             </a:pPr>
             <a:r>
-              <a:rPr lang="en-US" sz="1320" dirty="0">
+              <a:rPr lang="en-US" sz="1220" dirty="0">
                 <a:solidFill>
                   <a:srgbClr val="17364A"/>
                 </a:solidFill>
@@ -18110,9 +18110,9 @@
                 <a:ea typeface="Aptos" pitchFamily="34" charset="-122"/>
                 <a:cs typeface="Aptos" pitchFamily="34" charset="-120"/>
               </a:rPr>
-              <a:t>Define the concept in plain language for colleagues, leaders, partners, and community-facing discussions.</a:t>
-            </a:r>
-            <a:endParaRPr lang="en-US" sz="1320" dirty="0"/>
+              <a:t>Define the concept in plain language for colleagues, leaders, partners, and.</a:t>
+            </a:r>
+            <a:endParaRPr lang="en-US" sz="1220" dirty="0"/>
           </a:p>
         </p:txBody>
       </p:sp>
@@ -18124,12 +18124,12 @@
         </p:nvSpPr>
         <p:spPr>
           <a:xfrm>
-            <a:off x="7635240" y="2718511"/>
-            <a:ext cx="3474720" cy="1328623"/>
+            <a:off x="7543800" y="2724912"/>
+            <a:ext cx="3611880" cy="1527048"/>
           </a:xfrm>
           <a:prstGeom prst="roundRect">
             <a:avLst>
-              <a:gd name="adj" fmla="val 8259"/>
+              <a:gd name="adj" fmla="val 7186"/>
             </a:avLst>
           </a:prstGeom>
           <a:solidFill>
@@ -18151,8 +18151,8 @@
         </p:nvSpPr>
         <p:spPr>
           <a:xfrm>
-            <a:off x="7799832" y="2864815"/>
-            <a:ext cx="3145536" cy="256032"/>
+            <a:off x="7708392" y="2852928"/>
+            <a:ext cx="3282696" cy="228600"/>
           </a:xfrm>
           <a:prstGeom prst="rect">
             <a:avLst/>
@@ -18168,7 +18168,7 @@
               <a:buNone/>
             </a:pPr>
             <a:r>
-              <a:rPr lang="en-US" sz="1300" b="1" dirty="0">
+              <a:rPr lang="en-US" sz="1220" b="1" dirty="0">
                 <a:solidFill>
                   <a:srgbClr val="0068B7"/>
                 </a:solidFill>
@@ -18178,7 +18178,7 @@
               </a:rPr>
               <a:t>Concept checkpoints</a:t>
             </a:r>
-            <a:endParaRPr lang="en-US" sz="1300" dirty="0"/>
+            <a:endParaRPr lang="en-US" sz="1220" dirty="0"/>
           </a:p>
         </p:txBody>
       </p:sp>
@@ -18190,8 +18190,8 @@
         </p:nvSpPr>
         <p:spPr>
           <a:xfrm>
-            <a:off x="7818120" y="3230575"/>
-            <a:ext cx="3090672" cy="670255"/>
+            <a:off x="7726680" y="3182112"/>
+            <a:ext cx="3227832" cy="960120"/>
           </a:xfrm>
           <a:prstGeom prst="rect">
             <a:avLst/>
@@ -18209,7 +18209,7 @@
               <a:buNone/>
             </a:pPr>
             <a:r>
-              <a:rPr lang="en-US" sz="1220" dirty="0">
+              <a:rPr lang="en-US" sz="1140" dirty="0">
                 <a:solidFill>
                   <a:srgbClr val="17364A"/>
                 </a:solidFill>
@@ -18217,16 +18217,16 @@
                 <a:ea typeface="Aptos" pitchFamily="34" charset="-122"/>
                 <a:cs typeface="Aptos" pitchFamily="34" charset="-120"/>
               </a:rPr>
-              <a:t>Identify where the concept affects AI planning, governance,.</a:t>
-            </a:r>
-            <a:endParaRPr lang="en-US" sz="1220" dirty="0"/>
-          </a:p>
-          <a:p>
-            <a:pPr indent="0" marL="0">
-              <a:buNone/>
-            </a:pPr>
-            <a:r>
-              <a:rPr lang="en-US" sz="1220" dirty="0">
+              <a:t>Identify where the concept affects AI planning,.</a:t>
+            </a:r>
+            <a:endParaRPr lang="en-US" sz="1140" dirty="0"/>
+          </a:p>
+          <a:p>
+            <a:pPr indent="0" marL="0">
+              <a:buNone/>
+            </a:pPr>
+            <a:r>
+              <a:rPr lang="en-US" sz="1140" dirty="0">
                 <a:solidFill>
                   <a:srgbClr val="17364A"/>
                 </a:solidFill>
@@ -18234,16 +18234,16 @@
                 <a:ea typeface="Aptos" pitchFamily="34" charset="-122"/>
                 <a:cs typeface="Aptos" pitchFamily="34" charset="-120"/>
               </a:rPr>
-              <a:t>Apply the concept to a concrete public health workflow using the.</a:t>
-            </a:r>
-            <a:endParaRPr lang="en-US" sz="1220" dirty="0"/>
-          </a:p>
-          <a:p>
-            <a:pPr indent="0" marL="0">
-              <a:buNone/>
-            </a:pPr>
-            <a:r>
-              <a:rPr lang="en-US" sz="1220" dirty="0">
+              <a:t>Apply the concept to a concrete public health.</a:t>
+            </a:r>
+            <a:endParaRPr lang="en-US" sz="1140" dirty="0"/>
+          </a:p>
+          <a:p>
+            <a:pPr indent="0" marL="0">
+              <a:buNone/>
+            </a:pPr>
+            <a:r>
+              <a:rPr lang="en-US" sz="1140" dirty="0">
                 <a:solidFill>
                   <a:srgbClr val="17364A"/>
                 </a:solidFill>
@@ -18251,9 +18251,9 @@
                 <a:ea typeface="Aptos" pitchFamily="34" charset="-122"/>
                 <a:cs typeface="Aptos" pitchFamily="34" charset="-120"/>
               </a:rPr>
-              <a:t>Complete a practical activity that produces an artifact you can.</a:t>
-            </a:r>
-            <a:endParaRPr lang="en-US" sz="1220" dirty="0"/>
+              <a:t>Complete a practical activity that produces an.</a:t>
+            </a:r>
+            <a:endParaRPr lang="en-US" sz="1140" dirty="0"/>
           </a:p>
         </p:txBody>
       </p:sp>
@@ -18265,12 +18265,12 @@
         </p:nvSpPr>
         <p:spPr>
           <a:xfrm>
-            <a:off x="7635240" y="4184294"/>
-            <a:ext cx="3474720" cy="1466698"/>
+            <a:off x="7543800" y="4389120"/>
+            <a:ext cx="3611880" cy="1261872"/>
           </a:xfrm>
           <a:prstGeom prst="roundRect">
             <a:avLst>
-              <a:gd name="adj" fmla="val 7481"/>
+              <a:gd name="adj" fmla="val 8696"/>
             </a:avLst>
           </a:prstGeom>
           <a:solidFill>
@@ -18292,8 +18292,8 @@
         </p:nvSpPr>
         <p:spPr>
           <a:xfrm>
-            <a:off x="7799832" y="4330598"/>
-            <a:ext cx="3145536" cy="256032"/>
+            <a:off x="7708392" y="4517136"/>
+            <a:ext cx="3282696" cy="228600"/>
           </a:xfrm>
           <a:prstGeom prst="rect">
             <a:avLst/>
@@ -18309,7 +18309,7 @@
               <a:buNone/>
             </a:pPr>
             <a:r>
-              <a:rPr lang="en-US" sz="1300" b="1" dirty="0">
+              <a:rPr lang="en-US" sz="1220" b="1" dirty="0">
                 <a:solidFill>
                   <a:srgbClr val="0068B7"/>
                 </a:solidFill>
@@ -18319,7 +18319,7 @@
               </a:rPr>
               <a:t>What to produce</a:t>
             </a:r>
-            <a:endParaRPr lang="en-US" sz="1300" dirty="0"/>
+            <a:endParaRPr lang="en-US" sz="1220" dirty="0"/>
           </a:p>
         </p:txBody>
       </p:sp>
@@ -18331,8 +18331,8 @@
         </p:nvSpPr>
         <p:spPr>
           <a:xfrm>
-            <a:off x="7799832" y="4659782"/>
-            <a:ext cx="3145536" cy="899770"/>
+            <a:off x="7708392" y="4828032"/>
+            <a:ext cx="3282696" cy="749808"/>
           </a:xfrm>
           <a:prstGeom prst="rect">
             <a:avLst/>
@@ -18350,7 +18350,7 @@
               <a:buNone/>
             </a:pPr>
             <a:r>
-              <a:rPr lang="en-US" sz="1320" dirty="0">
+              <a:rPr lang="en-US" sz="1220" dirty="0">
                 <a:solidFill>
                   <a:srgbClr val="17364A"/>
                 </a:solidFill>
@@ -18358,9 +18358,9 @@
                 <a:ea typeface="Aptos" pitchFamily="34" charset="-122"/>
                 <a:cs typeface="Aptos" pitchFamily="34" charset="-120"/>
               </a:rPr>
-              <a:t>Use the assignment to test whether you can explain the concept, apply it to a realistic public health situation, and identify what would need review before the work moves forward.</a:t>
-            </a:r>
-            <a:endParaRPr lang="en-US" sz="1320" dirty="0"/>
+              <a:t>Use the assignment to test whether you can explain the concept, apply it to a.</a:t>
+            </a:r>
+            <a:endParaRPr lang="en-US" sz="1220" dirty="0"/>
           </a:p>
         </p:txBody>
       </p:sp>
@@ -18651,8 +18651,8 @@
         </p:nvSpPr>
         <p:spPr>
           <a:xfrm>
-            <a:off x="868680" y="1508760"/>
-            <a:ext cx="6309360" cy="4160520"/>
+            <a:off x="822960" y="1463040"/>
+            <a:ext cx="6565392" cy="4343400"/>
           </a:xfrm>
           <a:prstGeom prst="rect">
             <a:avLst/>
@@ -18670,7 +18670,7 @@
               <a:buNone/>
             </a:pPr>
             <a:r>
-              <a:rPr lang="en-US" sz="2100" dirty="0">
+              <a:rPr lang="en-US" sz="1920" dirty="0">
                 <a:solidFill>
                   <a:srgbClr val="003A63"/>
                 </a:solidFill>
@@ -18680,14 +18680,14 @@
               </a:rPr>
               <a:t>• Produce or contribute to: Initial inventory of known or suspected AI use.</a:t>
             </a:r>
-            <a:endParaRPr lang="en-US" sz="2100" dirty="0"/>
-          </a:p>
-          <a:p>
-            <a:pPr indent="0" marL="0">
-              <a:buNone/>
-            </a:pPr>
-            <a:r>
-              <a:rPr lang="en-US" sz="2100" dirty="0">
+            <a:endParaRPr lang="en-US" sz="1920" dirty="0"/>
+          </a:p>
+          <a:p>
+            <a:pPr indent="0" marL="0">
+              <a:buNone/>
+            </a:pPr>
+            <a:r>
+              <a:rPr lang="en-US" sz="1920" dirty="0">
                 <a:solidFill>
                   <a:srgbClr val="003A63"/>
                 </a:solidFill>
@@ -18695,9 +18695,9 @@
                 <a:ea typeface="Aptos" pitchFamily="34" charset="-122"/>
                 <a:cs typeface="Aptos" pitchFamily="34" charset="-120"/>
               </a:rPr>
-              <a:t>• Produce or contribute to: Draft list of decisions that require human accountability.</a:t>
-            </a:r>
-            <a:endParaRPr lang="en-US" sz="2100" dirty="0"/>
+              <a:t>• Produce or contribute to: Draft list of decisions that require human.</a:t>
+            </a:r>
+            <a:endParaRPr lang="en-US" sz="1920" dirty="0"/>
           </a:p>
         </p:txBody>
       </p:sp>
@@ -18709,12 +18709,12 @@
         </p:nvSpPr>
         <p:spPr>
           <a:xfrm>
-            <a:off x="7635240" y="1325880"/>
-            <a:ext cx="3474720" cy="1207008"/>
+            <a:off x="7543800" y="1325880"/>
+            <a:ext cx="3611880" cy="1261872"/>
           </a:xfrm>
           <a:prstGeom prst="roundRect">
             <a:avLst>
-              <a:gd name="adj" fmla="val 9091"/>
+              <a:gd name="adj" fmla="val 8696"/>
             </a:avLst>
           </a:prstGeom>
           <a:solidFill>
@@ -18736,8 +18736,8 @@
         </p:nvSpPr>
         <p:spPr>
           <a:xfrm>
-            <a:off x="7799832" y="1472184"/>
-            <a:ext cx="3145536" cy="256032"/>
+            <a:off x="7708392" y="1453896"/>
+            <a:ext cx="3282696" cy="228600"/>
           </a:xfrm>
           <a:prstGeom prst="rect">
             <a:avLst/>
@@ -18753,7 +18753,7 @@
               <a:buNone/>
             </a:pPr>
             <a:r>
-              <a:rPr lang="en-US" sz="1300" b="1" dirty="0">
+              <a:rPr lang="en-US" sz="1220" b="1" dirty="0">
                 <a:solidFill>
                   <a:srgbClr val="0068B7"/>
                 </a:solidFill>
@@ -18763,7 +18763,7 @@
               </a:rPr>
               <a:t>Practice focus</a:t>
             </a:r>
-            <a:endParaRPr lang="en-US" sz="1300" dirty="0"/>
+            <a:endParaRPr lang="en-US" sz="1220" dirty="0"/>
           </a:p>
         </p:txBody>
       </p:sp>
@@ -18775,8 +18775,8 @@
         </p:nvSpPr>
         <p:spPr>
           <a:xfrm>
-            <a:off x="7799832" y="1801368"/>
-            <a:ext cx="3145536" cy="640080"/>
+            <a:off x="7708392" y="1764792"/>
+            <a:ext cx="3282696" cy="749808"/>
           </a:xfrm>
           <a:prstGeom prst="rect">
             <a:avLst/>
@@ -18794,7 +18794,7 @@
               <a:buNone/>
             </a:pPr>
             <a:r>
-              <a:rPr lang="en-US" sz="1320" dirty="0">
+              <a:rPr lang="en-US" sz="1220" dirty="0">
                 <a:solidFill>
                   <a:srgbClr val="17364A"/>
                 </a:solidFill>
@@ -18804,7 +18804,7 @@
               </a:rPr>
               <a:t>Produce or contribute to: Initial inventory of known or suspected AI use.</a:t>
             </a:r>
-            <a:endParaRPr lang="en-US" sz="1320" dirty="0"/>
+            <a:endParaRPr lang="en-US" sz="1220" dirty="0"/>
           </a:p>
         </p:txBody>
       </p:sp>
@@ -18816,12 +18816,12 @@
         </p:nvSpPr>
         <p:spPr>
           <a:xfrm>
-            <a:off x="7635240" y="2670048"/>
-            <a:ext cx="3474720" cy="1377086"/>
+            <a:off x="7543800" y="2724912"/>
+            <a:ext cx="3611880" cy="1527048"/>
           </a:xfrm>
           <a:prstGeom prst="roundRect">
             <a:avLst>
-              <a:gd name="adj" fmla="val 7968"/>
+              <a:gd name="adj" fmla="val 7186"/>
             </a:avLst>
           </a:prstGeom>
           <a:solidFill>
@@ -18843,8 +18843,8 @@
         </p:nvSpPr>
         <p:spPr>
           <a:xfrm>
-            <a:off x="7799832" y="2816352"/>
-            <a:ext cx="3145536" cy="256032"/>
+            <a:off x="7708392" y="2852928"/>
+            <a:ext cx="3282696" cy="228600"/>
           </a:xfrm>
           <a:prstGeom prst="rect">
             <a:avLst/>
@@ -18860,7 +18860,7 @@
               <a:buNone/>
             </a:pPr>
             <a:r>
-              <a:rPr lang="en-US" sz="1300" b="1" dirty="0">
+              <a:rPr lang="en-US" sz="1220" b="1" dirty="0">
                 <a:solidFill>
                   <a:srgbClr val="0068B7"/>
                 </a:solidFill>
@@ -18870,7 +18870,7 @@
               </a:rPr>
               <a:t>Concept checkpoints</a:t>
             </a:r>
-            <a:endParaRPr lang="en-US" sz="1300" dirty="0"/>
+            <a:endParaRPr lang="en-US" sz="1220" dirty="0"/>
           </a:p>
         </p:txBody>
       </p:sp>
@@ -18882,8 +18882,8 @@
         </p:nvSpPr>
         <p:spPr>
           <a:xfrm>
-            <a:off x="7818120" y="3182112"/>
-            <a:ext cx="3090672" cy="718718"/>
+            <a:off x="7726680" y="3182112"/>
+            <a:ext cx="3227832" cy="960120"/>
           </a:xfrm>
           <a:prstGeom prst="rect">
             <a:avLst/>
@@ -18901,7 +18901,7 @@
               <a:buNone/>
             </a:pPr>
             <a:r>
-              <a:rPr lang="en-US" sz="1220" dirty="0">
+              <a:rPr lang="en-US" sz="1140" dirty="0">
                 <a:solidFill>
                   <a:srgbClr val="17364A"/>
                 </a:solidFill>
@@ -18909,16 +18909,16 @@
                 <a:ea typeface="Aptos" pitchFamily="34" charset="-122"/>
                 <a:cs typeface="Aptos" pitchFamily="34" charset="-120"/>
               </a:rPr>
-              <a:t>Produce or contribute to: Initial inventory of known or suspected.</a:t>
-            </a:r>
-            <a:endParaRPr lang="en-US" sz="1220" dirty="0"/>
-          </a:p>
-          <a:p>
-            <a:pPr indent="0" marL="0">
-              <a:buNone/>
-            </a:pPr>
-            <a:r>
-              <a:rPr lang="en-US" sz="1220" dirty="0">
+              <a:t>Produce or contribute to: Initial inventory of.</a:t>
+            </a:r>
+            <a:endParaRPr lang="en-US" sz="1140" dirty="0"/>
+          </a:p>
+          <a:p>
+            <a:pPr indent="0" marL="0">
+              <a:buNone/>
+            </a:pPr>
+            <a:r>
+              <a:rPr lang="en-US" sz="1140" dirty="0">
                 <a:solidFill>
                   <a:srgbClr val="17364A"/>
                 </a:solidFill>
@@ -18926,9 +18926,9 @@
                 <a:ea typeface="Aptos" pitchFamily="34" charset="-122"/>
                 <a:cs typeface="Aptos" pitchFamily="34" charset="-120"/>
               </a:rPr>
-              <a:t>Produce or contribute to: Draft list of decisions that require.</a:t>
-            </a:r>
-            <a:endParaRPr lang="en-US" sz="1220" dirty="0"/>
+              <a:t>Produce or contribute to: Draft list of decisions.</a:t>
+            </a:r>
+            <a:endParaRPr lang="en-US" sz="1140" dirty="0"/>
           </a:p>
         </p:txBody>
       </p:sp>
@@ -18940,12 +18940,12 @@
         </p:nvSpPr>
         <p:spPr>
           <a:xfrm>
-            <a:off x="7635240" y="4184294"/>
-            <a:ext cx="3474720" cy="1466698"/>
+            <a:off x="7543800" y="4389120"/>
+            <a:ext cx="3611880" cy="1261872"/>
           </a:xfrm>
           <a:prstGeom prst="roundRect">
             <a:avLst>
-              <a:gd name="adj" fmla="val 7481"/>
+              <a:gd name="adj" fmla="val 8696"/>
             </a:avLst>
           </a:prstGeom>
           <a:solidFill>
@@ -18967,8 +18967,8 @@
         </p:nvSpPr>
         <p:spPr>
           <a:xfrm>
-            <a:off x="7799832" y="4330598"/>
-            <a:ext cx="3145536" cy="256032"/>
+            <a:off x="7708392" y="4517136"/>
+            <a:ext cx="3282696" cy="228600"/>
           </a:xfrm>
           <a:prstGeom prst="rect">
             <a:avLst/>
@@ -18984,7 +18984,7 @@
               <a:buNone/>
             </a:pPr>
             <a:r>
-              <a:rPr lang="en-US" sz="1300" b="1" dirty="0">
+              <a:rPr lang="en-US" sz="1220" b="1" dirty="0">
                 <a:solidFill>
                   <a:srgbClr val="0068B7"/>
                 </a:solidFill>
@@ -18994,7 +18994,7 @@
               </a:rPr>
               <a:t>What to produce</a:t>
             </a:r>
-            <a:endParaRPr lang="en-US" sz="1300" dirty="0"/>
+            <a:endParaRPr lang="en-US" sz="1220" dirty="0"/>
           </a:p>
         </p:txBody>
       </p:sp>
@@ -19006,8 +19006,8 @@
         </p:nvSpPr>
         <p:spPr>
           <a:xfrm>
-            <a:off x="7799832" y="4659782"/>
-            <a:ext cx="3145536" cy="899770"/>
+            <a:off x="7708392" y="4828032"/>
+            <a:ext cx="3282696" cy="749808"/>
           </a:xfrm>
           <a:prstGeom prst="rect">
             <a:avLst/>
@@ -19025,7 +19025,7 @@
               <a:buNone/>
             </a:pPr>
             <a:r>
-              <a:rPr lang="en-US" sz="1320" dirty="0">
+              <a:rPr lang="en-US" sz="1220" dirty="0">
                 <a:solidFill>
                   <a:srgbClr val="17364A"/>
                 </a:solidFill>
@@ -19033,9 +19033,9 @@
                 <a:ea typeface="Aptos" pitchFamily="34" charset="-122"/>
                 <a:cs typeface="Aptos" pitchFamily="34" charset="-120"/>
               </a:rPr>
-              <a:t>Use the assignment to test whether you can explain the concept, apply it to a realistic public health situation, and identify what would need review before the work moves forward.</a:t>
-            </a:r>
-            <a:endParaRPr lang="en-US" sz="1320" dirty="0"/>
+              <a:t>Use the assignment to test whether you can explain the concept, apply it to a.</a:t>
+            </a:r>
+            <a:endParaRPr lang="en-US" sz="1220" dirty="0"/>
           </a:p>
         </p:txBody>
       </p:sp>
@@ -19326,8 +19326,8 @@
         </p:nvSpPr>
         <p:spPr>
           <a:xfrm>
-            <a:off x="868680" y="1508760"/>
-            <a:ext cx="6309360" cy="4160520"/>
+            <a:off x="822960" y="1463040"/>
+            <a:ext cx="6565392" cy="4343400"/>
           </a:xfrm>
           <a:prstGeom prst="rect">
             <a:avLst/>
@@ -19345,7 +19345,7 @@
               <a:buNone/>
             </a:pPr>
             <a:r>
-              <a:rPr lang="en-US" sz="2100" dirty="0">
+              <a:rPr lang="en-US" sz="1920" dirty="0">
                 <a:solidFill>
                   <a:srgbClr val="003A63"/>
                 </a:solidFill>
@@ -19353,16 +19353,16 @@
                 <a:ea typeface="Aptos" pitchFamily="34" charset="-122"/>
                 <a:cs typeface="Aptos" pitchFamily="34" charset="-120"/>
               </a:rPr>
-              <a:t>• You do not need to become a machine learning engineer to participate in responsible AI.</a:t>
-            </a:r>
-            <a:endParaRPr lang="en-US" sz="2100" dirty="0"/>
-          </a:p>
-          <a:p>
-            <a:pPr indent="0" marL="0">
-              <a:buNone/>
-            </a:pPr>
-            <a:r>
-              <a:rPr lang="en-US" sz="2100" dirty="0">
+              <a:t>• You do not need to become a machine learning engineer to participate in.</a:t>
+            </a:r>
+            <a:endParaRPr lang="en-US" sz="1920" dirty="0"/>
+          </a:p>
+          <a:p>
+            <a:pPr indent="0" marL="0">
+              <a:buNone/>
+            </a:pPr>
+            <a:r>
+              <a:rPr lang="en-US" sz="1920" dirty="0">
                 <a:solidFill>
                   <a:srgbClr val="003A63"/>
                 </a:solidFill>
@@ -19370,16 +19370,16 @@
                 <a:ea typeface="Aptos" pitchFamily="34" charset="-122"/>
                 <a:cs typeface="Aptos" pitchFamily="34" charset="-120"/>
               </a:rPr>
-              <a:t>• This module helps you distinguish pattern recognition, predictive analytics, generative AI,.</a:t>
-            </a:r>
-            <a:endParaRPr lang="en-US" sz="2100" dirty="0"/>
-          </a:p>
-          <a:p>
-            <a:pPr indent="0" marL="0">
-              <a:buNone/>
-            </a:pPr>
-            <a:r>
-              <a:rPr lang="en-US" sz="2100" dirty="0">
+              <a:t>• This module helps you distinguish pattern recognition, predictive analytics,.</a:t>
+            </a:r>
+            <a:endParaRPr lang="en-US" sz="1920" dirty="0"/>
+          </a:p>
+          <a:p>
+            <a:pPr indent="0" marL="0">
+              <a:buNone/>
+            </a:pPr>
+            <a:r>
+              <a:rPr lang="en-US" sz="1920" dirty="0">
                 <a:solidFill>
                   <a:srgbClr val="003A63"/>
                 </a:solidFill>
@@ -19387,9 +19387,9 @@
                 <a:ea typeface="Aptos" pitchFamily="34" charset="-122"/>
                 <a:cs typeface="Aptos" pitchFamily="34" charset="-120"/>
               </a:rPr>
-              <a:t>• That distinction matters because a tool that drafts a message, a tool that predicts risk, and.</a:t>
-            </a:r>
-            <a:endParaRPr lang="en-US" sz="2100" dirty="0"/>
+              <a:t>• That distinction matters because a tool that drafts a message, a tool that.</a:t>
+            </a:r>
+            <a:endParaRPr lang="en-US" sz="1920" dirty="0"/>
           </a:p>
         </p:txBody>
       </p:sp>
@@ -19401,12 +19401,12 @@
         </p:nvSpPr>
         <p:spPr>
           <a:xfrm>
-            <a:off x="7635240" y="1325880"/>
-            <a:ext cx="3474720" cy="1255471"/>
+            <a:off x="7543800" y="1325880"/>
+            <a:ext cx="3611880" cy="1261872"/>
           </a:xfrm>
           <a:prstGeom prst="roundRect">
             <a:avLst>
-              <a:gd name="adj" fmla="val 8740"/>
+              <a:gd name="adj" fmla="val 8696"/>
             </a:avLst>
           </a:prstGeom>
           <a:solidFill>
@@ -19428,8 +19428,8 @@
         </p:nvSpPr>
         <p:spPr>
           <a:xfrm>
-            <a:off x="7799832" y="1472184"/>
-            <a:ext cx="3145536" cy="256032"/>
+            <a:off x="7708392" y="1453896"/>
+            <a:ext cx="3282696" cy="228600"/>
           </a:xfrm>
           <a:prstGeom prst="rect">
             <a:avLst/>
@@ -19445,7 +19445,7 @@
               <a:buNone/>
             </a:pPr>
             <a:r>
-              <a:rPr lang="en-US" sz="1300" b="1" dirty="0">
+              <a:rPr lang="en-US" sz="1220" b="1" dirty="0">
                 <a:solidFill>
                   <a:srgbClr val="0068B7"/>
                 </a:solidFill>
@@ -19455,7 +19455,7 @@
               </a:rPr>
               <a:t>Core concept</a:t>
             </a:r>
-            <a:endParaRPr lang="en-US" sz="1300" dirty="0"/>
+            <a:endParaRPr lang="en-US" sz="1220" dirty="0"/>
           </a:p>
         </p:txBody>
       </p:sp>
@@ -19467,8 +19467,8 @@
         </p:nvSpPr>
         <p:spPr>
           <a:xfrm>
-            <a:off x="7799832" y="1801368"/>
-            <a:ext cx="3145536" cy="688543"/>
+            <a:off x="7708392" y="1764792"/>
+            <a:ext cx="3282696" cy="749808"/>
           </a:xfrm>
           <a:prstGeom prst="rect">
             <a:avLst/>
@@ -19486,7 +19486,7 @@
               <a:buNone/>
             </a:pPr>
             <a:r>
-              <a:rPr lang="en-US" sz="1320" dirty="0">
+              <a:rPr lang="en-US" sz="1220" dirty="0">
                 <a:solidFill>
                   <a:srgbClr val="17364A"/>
                 </a:solidFill>
@@ -19494,9 +19494,9 @@
                 <a:ea typeface="Aptos" pitchFamily="34" charset="-122"/>
                 <a:cs typeface="Aptos" pitchFamily="34" charset="-120"/>
               </a:rPr>
-              <a:t>You do not need to become a machine learning engineer to participate in responsible AI planning, but.</a:t>
-            </a:r>
-            <a:endParaRPr lang="en-US" sz="1320" dirty="0"/>
+              <a:t>You do not need to become a machine learning engineer to participate in.</a:t>
+            </a:r>
+            <a:endParaRPr lang="en-US" sz="1220" dirty="0"/>
           </a:p>
         </p:txBody>
       </p:sp>
@@ -19508,12 +19508,12 @@
         </p:nvSpPr>
         <p:spPr>
           <a:xfrm>
-            <a:off x="7635240" y="2718511"/>
-            <a:ext cx="3474720" cy="1328623"/>
+            <a:off x="7543800" y="2724912"/>
+            <a:ext cx="3611880" cy="1527048"/>
           </a:xfrm>
           <a:prstGeom prst="roundRect">
             <a:avLst>
-              <a:gd name="adj" fmla="val 8259"/>
+              <a:gd name="adj" fmla="val 7186"/>
             </a:avLst>
           </a:prstGeom>
           <a:solidFill>
@@ -19535,8 +19535,8 @@
         </p:nvSpPr>
         <p:spPr>
           <a:xfrm>
-            <a:off x="7799832" y="2864815"/>
-            <a:ext cx="3145536" cy="256032"/>
+            <a:off x="7708392" y="2852928"/>
+            <a:ext cx="3282696" cy="228600"/>
           </a:xfrm>
           <a:prstGeom prst="rect">
             <a:avLst/>
@@ -19552,7 +19552,7 @@
               <a:buNone/>
             </a:pPr>
             <a:r>
-              <a:rPr lang="en-US" sz="1300" b="1" dirty="0">
+              <a:rPr lang="en-US" sz="1220" b="1" dirty="0">
                 <a:solidFill>
                   <a:srgbClr val="0068B7"/>
                 </a:solidFill>
@@ -19562,7 +19562,7 @@
               </a:rPr>
               <a:t>Concept checkpoints</a:t>
             </a:r>
-            <a:endParaRPr lang="en-US" sz="1300" dirty="0"/>
+            <a:endParaRPr lang="en-US" sz="1220" dirty="0"/>
           </a:p>
         </p:txBody>
       </p:sp>
@@ -19574,8 +19574,8 @@
         </p:nvSpPr>
         <p:spPr>
           <a:xfrm>
-            <a:off x="7818120" y="3230575"/>
-            <a:ext cx="3090672" cy="670255"/>
+            <a:off x="7726680" y="3182112"/>
+            <a:ext cx="3227832" cy="960120"/>
           </a:xfrm>
           <a:prstGeom prst="rect">
             <a:avLst/>
@@ -19593,7 +19593,7 @@
               <a:buNone/>
             </a:pPr>
             <a:r>
-              <a:rPr lang="en-US" sz="1220" dirty="0">
+              <a:rPr lang="en-US" sz="1140" dirty="0">
                 <a:solidFill>
                   <a:srgbClr val="17364A"/>
                 </a:solidFill>
@@ -19601,16 +19601,16 @@
                 <a:ea typeface="Aptos" pitchFamily="34" charset="-122"/>
                 <a:cs typeface="Aptos" pitchFamily="34" charset="-120"/>
               </a:rPr>
-              <a:t>You do not need to become a machine learning engineer to.</a:t>
-            </a:r>
-            <a:endParaRPr lang="en-US" sz="1220" dirty="0"/>
-          </a:p>
-          <a:p>
-            <a:pPr indent="0" marL="0">
-              <a:buNone/>
-            </a:pPr>
-            <a:r>
-              <a:rPr lang="en-US" sz="1220" dirty="0">
+              <a:t>You do not need to become a machine learning.</a:t>
+            </a:r>
+            <a:endParaRPr lang="en-US" sz="1140" dirty="0"/>
+          </a:p>
+          <a:p>
+            <a:pPr indent="0" marL="0">
+              <a:buNone/>
+            </a:pPr>
+            <a:r>
+              <a:rPr lang="en-US" sz="1140" dirty="0">
                 <a:solidFill>
                   <a:srgbClr val="17364A"/>
                 </a:solidFill>
@@ -19618,16 +19618,16 @@
                 <a:ea typeface="Aptos" pitchFamily="34" charset="-122"/>
                 <a:cs typeface="Aptos" pitchFamily="34" charset="-120"/>
               </a:rPr>
-              <a:t>This module helps you distinguish pattern recognition, predictive.</a:t>
-            </a:r>
-            <a:endParaRPr lang="en-US" sz="1220" dirty="0"/>
-          </a:p>
-          <a:p>
-            <a:pPr indent="0" marL="0">
-              <a:buNone/>
-            </a:pPr>
-            <a:r>
-              <a:rPr lang="en-US" sz="1220" dirty="0">
+              <a:t>This module helps you distinguish pattern.</a:t>
+            </a:r>
+            <a:endParaRPr lang="en-US" sz="1140" dirty="0"/>
+          </a:p>
+          <a:p>
+            <a:pPr indent="0" marL="0">
+              <a:buNone/>
+            </a:pPr>
+            <a:r>
+              <a:rPr lang="en-US" sz="1140" dirty="0">
                 <a:solidFill>
                   <a:srgbClr val="17364A"/>
                 </a:solidFill>
@@ -19635,9 +19635,9 @@
                 <a:ea typeface="Aptos" pitchFamily="34" charset="-122"/>
                 <a:cs typeface="Aptos" pitchFamily="34" charset="-120"/>
               </a:rPr>
-              <a:t>That distinction matters because a tool that drafts a message, a.</a:t>
-            </a:r>
-            <a:endParaRPr lang="en-US" sz="1220" dirty="0"/>
+              <a:t>That distinction matters because a tool that.</a:t>
+            </a:r>
+            <a:endParaRPr lang="en-US" sz="1140" dirty="0"/>
           </a:p>
         </p:txBody>
       </p:sp>
@@ -19649,12 +19649,12 @@
         </p:nvSpPr>
         <p:spPr>
           <a:xfrm>
-            <a:off x="7635240" y="4184294"/>
-            <a:ext cx="3474720" cy="1466698"/>
+            <a:off x="7543800" y="4389120"/>
+            <a:ext cx="3611880" cy="1261872"/>
           </a:xfrm>
           <a:prstGeom prst="roundRect">
             <a:avLst>
-              <a:gd name="adj" fmla="val 7481"/>
+              <a:gd name="adj" fmla="val 8696"/>
             </a:avLst>
           </a:prstGeom>
           <a:solidFill>
@@ -19676,8 +19676,8 @@
         </p:nvSpPr>
         <p:spPr>
           <a:xfrm>
-            <a:off x="7799832" y="4330598"/>
-            <a:ext cx="3145536" cy="256032"/>
+            <a:off x="7708392" y="4517136"/>
+            <a:ext cx="3282696" cy="228600"/>
           </a:xfrm>
           <a:prstGeom prst="rect">
             <a:avLst/>
@@ -19693,7 +19693,7 @@
               <a:buNone/>
             </a:pPr>
             <a:r>
-              <a:rPr lang="en-US" sz="1300" b="1" dirty="0">
+              <a:rPr lang="en-US" sz="1220" b="1" dirty="0">
                 <a:solidFill>
                   <a:srgbClr val="0068B7"/>
                 </a:solidFill>
@@ -19703,7 +19703,7 @@
               </a:rPr>
               <a:t>Apply it</a:t>
             </a:r>
-            <a:endParaRPr lang="en-US" sz="1300" dirty="0"/>
+            <a:endParaRPr lang="en-US" sz="1220" dirty="0"/>
           </a:p>
         </p:txBody>
       </p:sp>
@@ -19715,8 +19715,8 @@
         </p:nvSpPr>
         <p:spPr>
           <a:xfrm>
-            <a:off x="7799832" y="4659782"/>
-            <a:ext cx="3145536" cy="899770"/>
+            <a:off x="7708392" y="4828032"/>
+            <a:ext cx="3282696" cy="749808"/>
           </a:xfrm>
           <a:prstGeom prst="rect">
             <a:avLst/>
@@ -19734,7 +19734,7 @@
               <a:buNone/>
             </a:pPr>
             <a:r>
-              <a:rPr lang="en-US" sz="1320" dirty="0">
+              <a:rPr lang="en-US" sz="1220" dirty="0">
                 <a:solidFill>
                   <a:srgbClr val="17364A"/>
                 </a:solidFill>
@@ -19742,9 +19742,9 @@
                 <a:ea typeface="Aptos" pitchFamily="34" charset="-122"/>
                 <a:cs typeface="Aptos" pitchFamily="34" charset="-120"/>
               </a:rPr>
-              <a:t>Connect the concept to public health purpose, responsible use, required safeguards, documentation, and the next action a department should take.</a:t>
-            </a:r>
-            <a:endParaRPr lang="en-US" sz="1320" dirty="0"/>
+              <a:t>Connect the concept to public health purpose, responsible use, required.</a:t>
+            </a:r>
+            <a:endParaRPr lang="en-US" sz="1220" dirty="0"/>
           </a:p>
         </p:txBody>
       </p:sp>
@@ -20035,8 +20035,8 @@
         </p:nvSpPr>
         <p:spPr>
           <a:xfrm>
-            <a:off x="868680" y="1508760"/>
-            <a:ext cx="6309360" cy="4160520"/>
+            <a:off x="822960" y="1463040"/>
+            <a:ext cx="6565392" cy="4343400"/>
           </a:xfrm>
           <a:prstGeom prst="rect">
             <a:avLst/>
@@ -20054,7 +20054,7 @@
               <a:buNone/>
             </a:pPr>
             <a:r>
-              <a:rPr lang="en-US" sz="2100" dirty="0">
+              <a:rPr lang="en-US" sz="1920" dirty="0">
                 <a:solidFill>
                   <a:srgbClr val="003A63"/>
                 </a:solidFill>
@@ -20062,16 +20062,16 @@
                 <a:ea typeface="Aptos" pitchFamily="34" charset="-122"/>
                 <a:cs typeface="Aptos" pitchFamily="34" charset="-120"/>
               </a:rPr>
-              <a:t>• Agentic AI: AI configured to pursue a goal through multiple steps, such as gathering.</a:t>
-            </a:r>
-            <a:endParaRPr lang="en-US" sz="2100" dirty="0"/>
-          </a:p>
-          <a:p>
-            <a:pPr indent="0" marL="0">
-              <a:buNone/>
-            </a:pPr>
-            <a:r>
-              <a:rPr lang="en-US" sz="2100" dirty="0">
+              <a:t>• Agentic AI: AI configured to pursue a goal through multiple steps, such as.</a:t>
+            </a:r>
+            <a:endParaRPr lang="en-US" sz="1920" dirty="0"/>
+          </a:p>
+          <a:p>
+            <a:pPr indent="0" marL="0">
+              <a:buNone/>
+            </a:pPr>
+            <a:r>
+              <a:rPr lang="en-US" sz="1920" dirty="0">
                 <a:solidFill>
                   <a:srgbClr val="003A63"/>
                 </a:solidFill>
@@ -20079,16 +20079,16 @@
                 <a:ea typeface="Aptos" pitchFamily="34" charset="-122"/>
                 <a:cs typeface="Aptos" pitchFamily="34" charset="-120"/>
               </a:rPr>
-              <a:t>• Artificial intelligence (AI): Computer-based methods that can recognize patterns, generate.</a:t>
-            </a:r>
-            <a:endParaRPr lang="en-US" sz="2100" dirty="0"/>
-          </a:p>
-          <a:p>
-            <a:pPr indent="0" marL="0">
-              <a:buNone/>
-            </a:pPr>
-            <a:r>
-              <a:rPr lang="en-US" sz="2100" dirty="0">
+              <a:t>• Artificial intelligence (AI): Computer-based methods that can recognize.</a:t>
+            </a:r>
+            <a:endParaRPr lang="en-US" sz="1920" dirty="0"/>
+          </a:p>
+          <a:p>
+            <a:pPr indent="0" marL="0">
+              <a:buNone/>
+            </a:pPr>
+            <a:r>
+              <a:rPr lang="en-US" sz="1920" dirty="0">
                 <a:solidFill>
                   <a:srgbClr val="003A63"/>
                 </a:solidFill>
@@ -20096,9 +20096,9 @@
                 <a:ea typeface="Aptos" pitchFamily="34" charset="-122"/>
                 <a:cs typeface="Aptos" pitchFamily="34" charset="-120"/>
               </a:rPr>
-              <a:t>• Deep Research: An agentic research capability that can plan a multi-step search, gather and.</a:t>
-            </a:r>
-            <a:endParaRPr lang="en-US" sz="2100" dirty="0"/>
+              <a:t>• Deep Research: An agentic research capability that can plan a multi-step.</a:t>
+            </a:r>
+            <a:endParaRPr lang="en-US" sz="1920" dirty="0"/>
           </a:p>
         </p:txBody>
       </p:sp>
@@ -20110,12 +20110,12 @@
         </p:nvSpPr>
         <p:spPr>
           <a:xfrm>
-            <a:off x="7635240" y="1325880"/>
-            <a:ext cx="3474720" cy="1255471"/>
+            <a:off x="7543800" y="1325880"/>
+            <a:ext cx="3611880" cy="1261872"/>
           </a:xfrm>
           <a:prstGeom prst="roundRect">
             <a:avLst>
-              <a:gd name="adj" fmla="val 8740"/>
+              <a:gd name="adj" fmla="val 8696"/>
             </a:avLst>
           </a:prstGeom>
           <a:solidFill>
@@ -20137,8 +20137,8 @@
         </p:nvSpPr>
         <p:spPr>
           <a:xfrm>
-            <a:off x="7799832" y="1472184"/>
-            <a:ext cx="3145536" cy="256032"/>
+            <a:off x="7708392" y="1453896"/>
+            <a:ext cx="3282696" cy="228600"/>
           </a:xfrm>
           <a:prstGeom prst="rect">
             <a:avLst/>
@@ -20154,7 +20154,7 @@
               <a:buNone/>
             </a:pPr>
             <a:r>
-              <a:rPr lang="en-US" sz="1300" b="1" dirty="0">
+              <a:rPr lang="en-US" sz="1220" b="1" dirty="0">
                 <a:solidFill>
                   <a:srgbClr val="0068B7"/>
                 </a:solidFill>
@@ -20164,7 +20164,7 @@
               </a:rPr>
               <a:t>Core concept</a:t>
             </a:r>
-            <a:endParaRPr lang="en-US" sz="1300" dirty="0"/>
+            <a:endParaRPr lang="en-US" sz="1220" dirty="0"/>
           </a:p>
         </p:txBody>
       </p:sp>
@@ -20176,8 +20176,8 @@
         </p:nvSpPr>
         <p:spPr>
           <a:xfrm>
-            <a:off x="7799832" y="1801368"/>
-            <a:ext cx="3145536" cy="688543"/>
+            <a:off x="7708392" y="1764792"/>
+            <a:ext cx="3282696" cy="749808"/>
           </a:xfrm>
           <a:prstGeom prst="rect">
             <a:avLst/>
@@ -20195,7 +20195,7 @@
               <a:buNone/>
             </a:pPr>
             <a:r>
-              <a:rPr lang="en-US" sz="1320" dirty="0">
+              <a:rPr lang="en-US" sz="1220" dirty="0">
                 <a:solidFill>
                   <a:srgbClr val="17364A"/>
                 </a:solidFill>
@@ -20203,9 +20203,9 @@
                 <a:ea typeface="Aptos" pitchFamily="34" charset="-122"/>
                 <a:cs typeface="Aptos" pitchFamily="34" charset="-120"/>
               </a:rPr>
-              <a:t>Agentic AI: AI configured to pursue a goal through multiple steps, such as gathering information,.</a:t>
-            </a:r>
-            <a:endParaRPr lang="en-US" sz="1320" dirty="0"/>
+              <a:t>Agentic AI: AI configured to pursue a goal through multiple steps, such as.</a:t>
+            </a:r>
+            <a:endParaRPr lang="en-US" sz="1220" dirty="0"/>
           </a:p>
         </p:txBody>
       </p:sp>
@@ -20217,12 +20217,12 @@
         </p:nvSpPr>
         <p:spPr>
           <a:xfrm>
-            <a:off x="7635240" y="2718511"/>
-            <a:ext cx="3474720" cy="1328623"/>
+            <a:off x="7543800" y="2724912"/>
+            <a:ext cx="3611880" cy="1527048"/>
           </a:xfrm>
           <a:prstGeom prst="roundRect">
             <a:avLst>
-              <a:gd name="adj" fmla="val 8259"/>
+              <a:gd name="adj" fmla="val 7186"/>
             </a:avLst>
           </a:prstGeom>
           <a:solidFill>
@@ -20244,8 +20244,8 @@
         </p:nvSpPr>
         <p:spPr>
           <a:xfrm>
-            <a:off x="7799832" y="2864815"/>
-            <a:ext cx="3145536" cy="256032"/>
+            <a:off x="7708392" y="2852928"/>
+            <a:ext cx="3282696" cy="228600"/>
           </a:xfrm>
           <a:prstGeom prst="rect">
             <a:avLst/>
@@ -20261,7 +20261,7 @@
               <a:buNone/>
             </a:pPr>
             <a:r>
-              <a:rPr lang="en-US" sz="1300" b="1" dirty="0">
+              <a:rPr lang="en-US" sz="1220" b="1" dirty="0">
                 <a:solidFill>
                   <a:srgbClr val="0068B7"/>
                 </a:solidFill>
@@ -20271,7 +20271,7 @@
               </a:rPr>
               <a:t>Concept checkpoints</a:t>
             </a:r>
-            <a:endParaRPr lang="en-US" sz="1300" dirty="0"/>
+            <a:endParaRPr lang="en-US" sz="1220" dirty="0"/>
           </a:p>
         </p:txBody>
       </p:sp>
@@ -20283,8 +20283,8 @@
         </p:nvSpPr>
         <p:spPr>
           <a:xfrm>
-            <a:off x="7818120" y="3230575"/>
-            <a:ext cx="3090672" cy="670255"/>
+            <a:off x="7726680" y="3182112"/>
+            <a:ext cx="3227832" cy="960120"/>
           </a:xfrm>
           <a:prstGeom prst="rect">
             <a:avLst/>
@@ -20302,7 +20302,7 @@
               <a:buNone/>
             </a:pPr>
             <a:r>
-              <a:rPr lang="en-US" sz="1220" dirty="0">
+              <a:rPr lang="en-US" sz="1140" dirty="0">
                 <a:solidFill>
                   <a:srgbClr val="17364A"/>
                 </a:solidFill>
@@ -20310,16 +20310,16 @@
                 <a:ea typeface="Aptos" pitchFamily="34" charset="-122"/>
                 <a:cs typeface="Aptos" pitchFamily="34" charset="-120"/>
               </a:rPr>
-              <a:t>Agentic AI: AI configured to pursue a goal through multiple steps,.</a:t>
-            </a:r>
-            <a:endParaRPr lang="en-US" sz="1220" dirty="0"/>
-          </a:p>
-          <a:p>
-            <a:pPr indent="0" marL="0">
-              <a:buNone/>
-            </a:pPr>
-            <a:r>
-              <a:rPr lang="en-US" sz="1220" dirty="0">
+              <a:t>Agentic AI: AI configured to pursue a goal through.</a:t>
+            </a:r>
+            <a:endParaRPr lang="en-US" sz="1140" dirty="0"/>
+          </a:p>
+          <a:p>
+            <a:pPr indent="0" marL="0">
+              <a:buNone/>
+            </a:pPr>
+            <a:r>
+              <a:rPr lang="en-US" sz="1140" dirty="0">
                 <a:solidFill>
                   <a:srgbClr val="17364A"/>
                 </a:solidFill>
@@ -20327,16 +20327,16 @@
                 <a:ea typeface="Aptos" pitchFamily="34" charset="-122"/>
                 <a:cs typeface="Aptos" pitchFamily="34" charset="-120"/>
               </a:rPr>
-              <a:t>Agentic AI requires clear boundaries, permissions, monitoring,.</a:t>
-            </a:r>
-            <a:endParaRPr lang="en-US" sz="1220" dirty="0"/>
-          </a:p>
-          <a:p>
-            <a:pPr indent="0" marL="0">
-              <a:buNone/>
-            </a:pPr>
-            <a:r>
-              <a:rPr lang="en-US" sz="1220" dirty="0">
+              <a:t>Agentic AI requires clear boundaries, permissions,.</a:t>
+            </a:r>
+            <a:endParaRPr lang="en-US" sz="1140" dirty="0"/>
+          </a:p>
+          <a:p>
+            <a:pPr indent="0" marL="0">
+              <a:buNone/>
+            </a:pPr>
+            <a:r>
+              <a:rPr lang="en-US" sz="1140" dirty="0">
                 <a:solidFill>
                   <a:srgbClr val="17364A"/>
                 </a:solidFill>
@@ -20344,9 +20344,9 @@
                 <a:ea typeface="Aptos" pitchFamily="34" charset="-122"/>
                 <a:cs typeface="Aptos" pitchFamily="34" charset="-120"/>
               </a:rPr>
-              <a:t>Artificial intelligence (AI): Computer-based methods that can.</a:t>
-            </a:r>
-            <a:endParaRPr lang="en-US" sz="1220" dirty="0"/>
+              <a:t>Artificial intelligence (AI): Computer-based.</a:t>
+            </a:r>
+            <a:endParaRPr lang="en-US" sz="1140" dirty="0"/>
           </a:p>
         </p:txBody>
       </p:sp>
@@ -20358,12 +20358,12 @@
         </p:nvSpPr>
         <p:spPr>
           <a:xfrm>
-            <a:off x="7635240" y="4184294"/>
-            <a:ext cx="3474720" cy="1466698"/>
+            <a:off x="7543800" y="4389120"/>
+            <a:ext cx="3611880" cy="1261872"/>
           </a:xfrm>
           <a:prstGeom prst="roundRect">
             <a:avLst>
-              <a:gd name="adj" fmla="val 7481"/>
+              <a:gd name="adj" fmla="val 8696"/>
             </a:avLst>
           </a:prstGeom>
           <a:solidFill>
@@ -20385,8 +20385,8 @@
         </p:nvSpPr>
         <p:spPr>
           <a:xfrm>
-            <a:off x="7799832" y="4330598"/>
-            <a:ext cx="3145536" cy="256032"/>
+            <a:off x="7708392" y="4517136"/>
+            <a:ext cx="3282696" cy="228600"/>
           </a:xfrm>
           <a:prstGeom prst="rect">
             <a:avLst/>
@@ -20402,7 +20402,7 @@
               <a:buNone/>
             </a:pPr>
             <a:r>
-              <a:rPr lang="en-US" sz="1300" b="1" dirty="0">
+              <a:rPr lang="en-US" sz="1220" b="1" dirty="0">
                 <a:solidFill>
                   <a:srgbClr val="0068B7"/>
                 </a:solidFill>
@@ -20412,7 +20412,7 @@
               </a:rPr>
               <a:t>Apply it</a:t>
             </a:r>
-            <a:endParaRPr lang="en-US" sz="1300" dirty="0"/>
+            <a:endParaRPr lang="en-US" sz="1220" dirty="0"/>
           </a:p>
         </p:txBody>
       </p:sp>
@@ -20424,8 +20424,8 @@
         </p:nvSpPr>
         <p:spPr>
           <a:xfrm>
-            <a:off x="7799832" y="4659782"/>
-            <a:ext cx="3145536" cy="899770"/>
+            <a:off x="7708392" y="4828032"/>
+            <a:ext cx="3282696" cy="749808"/>
           </a:xfrm>
           <a:prstGeom prst="rect">
             <a:avLst/>
@@ -20443,7 +20443,7 @@
               <a:buNone/>
             </a:pPr>
             <a:r>
-              <a:rPr lang="en-US" sz="1320" dirty="0">
+              <a:rPr lang="en-US" sz="1220" dirty="0">
                 <a:solidFill>
                   <a:srgbClr val="17364A"/>
                 </a:solidFill>
@@ -20451,9 +20451,9 @@
                 <a:ea typeface="Aptos" pitchFamily="34" charset="-122"/>
                 <a:cs typeface="Aptos" pitchFamily="34" charset="-120"/>
               </a:rPr>
-              <a:t>Connect the concept to public health purpose, responsible use, required safeguards, documentation, and the next action a department should take.</a:t>
-            </a:r>
-            <a:endParaRPr lang="en-US" sz="1320" dirty="0"/>
+              <a:t>Connect the concept to public health purpose, responsible use, required.</a:t>
+            </a:r>
+            <a:endParaRPr lang="en-US" sz="1220" dirty="0"/>
           </a:p>
         </p:txBody>
       </p:sp>
@@ -20744,8 +20744,8 @@
         </p:nvSpPr>
         <p:spPr>
           <a:xfrm>
-            <a:off x="868680" y="1508760"/>
-            <a:ext cx="6309360" cy="4160520"/>
+            <a:off x="822960" y="1463040"/>
+            <a:ext cx="6565392" cy="4343400"/>
           </a:xfrm>
           <a:prstGeom prst="rect">
             <a:avLst/>
@@ -20763,7 +20763,7 @@
               <a:buNone/>
             </a:pPr>
             <a:r>
-              <a:rPr lang="en-US" sz="2100" dirty="0">
+              <a:rPr lang="en-US" sz="1920" dirty="0">
                 <a:solidFill>
                   <a:srgbClr val="003A63"/>
                 </a:solidFill>
@@ -20771,16 +20771,16 @@
                 <a:ea typeface="Aptos" pitchFamily="34" charset="-122"/>
                 <a:cs typeface="Aptos" pitchFamily="34" charset="-120"/>
               </a:rPr>
-              <a:t>• Large language model (LLM): A generative AI model trained on large bodies of text to produce,.</a:t>
-            </a:r>
-            <a:endParaRPr lang="en-US" sz="2100" dirty="0"/>
-          </a:p>
-          <a:p>
-            <a:pPr indent="0" marL="0">
-              <a:buNone/>
-            </a:pPr>
-            <a:r>
-              <a:rPr lang="en-US" sz="2100" dirty="0">
+              <a:t>• Large language model (LLM): A generative AI model trained on large bodies of.</a:t>
+            </a:r>
+            <a:endParaRPr lang="en-US" sz="1920" dirty="0"/>
+          </a:p>
+          <a:p>
+            <a:pPr indent="0" marL="0">
+              <a:buNone/>
+            </a:pPr>
+            <a:r>
+              <a:rPr lang="en-US" sz="1920" dirty="0">
                 <a:solidFill>
                   <a:srgbClr val="003A63"/>
                 </a:solidFill>
@@ -20788,16 +20788,16 @@
                 <a:ea typeface="Aptos" pitchFamily="34" charset="-122"/>
                 <a:cs typeface="Aptos" pitchFamily="34" charset="-120"/>
               </a:rPr>
-              <a:t>• Machine learning: A type of AI that identifies patterns in data and uses those patterns to.</a:t>
-            </a:r>
-            <a:endParaRPr lang="en-US" sz="2100" dirty="0"/>
-          </a:p>
-          <a:p>
-            <a:pPr indent="0" marL="0">
-              <a:buNone/>
-            </a:pPr>
-            <a:r>
-              <a:rPr lang="en-US" sz="2100" dirty="0">
+              <a:t>• Machine learning: A type of AI that identifies patterns in data and uses.</a:t>
+            </a:r>
+            <a:endParaRPr lang="en-US" sz="1920" dirty="0"/>
+          </a:p>
+          <a:p>
+            <a:pPr indent="0" marL="0">
+              <a:buNone/>
+            </a:pPr>
+            <a:r>
+              <a:rPr lang="en-US" sz="1920" dirty="0">
                 <a:solidFill>
                   <a:srgbClr val="003A63"/>
                 </a:solidFill>
@@ -20805,9 +20805,9 @@
                 <a:ea typeface="Aptos" pitchFamily="34" charset="-122"/>
                 <a:cs typeface="Aptos" pitchFamily="34" charset="-120"/>
               </a:rPr>
-              <a:t>• Predictive AI: AI that uses data patterns to estimate future events, risks, needs, trends, or.</a:t>
-            </a:r>
-            <a:endParaRPr lang="en-US" sz="2100" dirty="0"/>
+              <a:t>• Predictive AI: AI that uses data patterns to estimate future events, risks,.</a:t>
+            </a:r>
+            <a:endParaRPr lang="en-US" sz="1920" dirty="0"/>
           </a:p>
         </p:txBody>
       </p:sp>
@@ -20819,12 +20819,12 @@
         </p:nvSpPr>
         <p:spPr>
           <a:xfrm>
-            <a:off x="7635240" y="1325880"/>
-            <a:ext cx="3474720" cy="1207008"/>
+            <a:off x="7543800" y="1325880"/>
+            <a:ext cx="3611880" cy="1261872"/>
           </a:xfrm>
           <a:prstGeom prst="roundRect">
             <a:avLst>
-              <a:gd name="adj" fmla="val 9091"/>
+              <a:gd name="adj" fmla="val 8696"/>
             </a:avLst>
           </a:prstGeom>
           <a:solidFill>
@@ -20846,8 +20846,8 @@
         </p:nvSpPr>
         <p:spPr>
           <a:xfrm>
-            <a:off x="7799832" y="1472184"/>
-            <a:ext cx="3145536" cy="256032"/>
+            <a:off x="7708392" y="1453896"/>
+            <a:ext cx="3282696" cy="228600"/>
           </a:xfrm>
           <a:prstGeom prst="rect">
             <a:avLst/>
@@ -20863,7 +20863,7 @@
               <a:buNone/>
             </a:pPr>
             <a:r>
-              <a:rPr lang="en-US" sz="1300" b="1" dirty="0">
+              <a:rPr lang="en-US" sz="1220" b="1" dirty="0">
                 <a:solidFill>
                   <a:srgbClr val="0068B7"/>
                 </a:solidFill>
@@ -20873,7 +20873,7 @@
               </a:rPr>
               <a:t>Core concept</a:t>
             </a:r>
-            <a:endParaRPr lang="en-US" sz="1300" dirty="0"/>
+            <a:endParaRPr lang="en-US" sz="1220" dirty="0"/>
           </a:p>
         </p:txBody>
       </p:sp>
@@ -20885,8 +20885,8 @@
         </p:nvSpPr>
         <p:spPr>
           <a:xfrm>
-            <a:off x="7799832" y="1801368"/>
-            <a:ext cx="3145536" cy="640080"/>
+            <a:off x="7708392" y="1764792"/>
+            <a:ext cx="3282696" cy="749808"/>
           </a:xfrm>
           <a:prstGeom prst="rect">
             <a:avLst/>
@@ -20904,7 +20904,7 @@
               <a:buNone/>
             </a:pPr>
             <a:r>
-              <a:rPr lang="en-US" sz="1320" dirty="0">
+              <a:rPr lang="en-US" sz="1220" dirty="0">
                 <a:solidFill>
                   <a:srgbClr val="17364A"/>
                 </a:solidFill>
@@ -20912,9 +20912,9 @@
                 <a:ea typeface="Aptos" pitchFamily="34" charset="-122"/>
                 <a:cs typeface="Aptos" pitchFamily="34" charset="-120"/>
               </a:rPr>
-              <a:t>Large language model (LLM): A generative AI model trained on large bodies of text to.</a:t>
-            </a:r>
-            <a:endParaRPr lang="en-US" sz="1320" dirty="0"/>
+              <a:t>Large language model (LLM): A generative AI model trained on large bodies of.</a:t>
+            </a:r>
+            <a:endParaRPr lang="en-US" sz="1220" dirty="0"/>
           </a:p>
         </p:txBody>
       </p:sp>
@@ -20926,12 +20926,12 @@
         </p:nvSpPr>
         <p:spPr>
           <a:xfrm>
-            <a:off x="7635240" y="2670048"/>
-            <a:ext cx="3474720" cy="1377086"/>
+            <a:off x="7543800" y="2724912"/>
+            <a:ext cx="3611880" cy="1527048"/>
           </a:xfrm>
           <a:prstGeom prst="roundRect">
             <a:avLst>
-              <a:gd name="adj" fmla="val 7968"/>
+              <a:gd name="adj" fmla="val 7186"/>
             </a:avLst>
           </a:prstGeom>
           <a:solidFill>
@@ -20953,8 +20953,8 @@
         </p:nvSpPr>
         <p:spPr>
           <a:xfrm>
-            <a:off x="7799832" y="2816352"/>
-            <a:ext cx="3145536" cy="256032"/>
+            <a:off x="7708392" y="2852928"/>
+            <a:ext cx="3282696" cy="228600"/>
           </a:xfrm>
           <a:prstGeom prst="rect">
             <a:avLst/>
@@ -20970,7 +20970,7 @@
               <a:buNone/>
             </a:pPr>
             <a:r>
-              <a:rPr lang="en-US" sz="1300" b="1" dirty="0">
+              <a:rPr lang="en-US" sz="1220" b="1" dirty="0">
                 <a:solidFill>
                   <a:srgbClr val="0068B7"/>
                 </a:solidFill>
@@ -20980,7 +20980,7 @@
               </a:rPr>
               <a:t>Concept checkpoints</a:t>
             </a:r>
-            <a:endParaRPr lang="en-US" sz="1300" dirty="0"/>
+            <a:endParaRPr lang="en-US" sz="1220" dirty="0"/>
           </a:p>
         </p:txBody>
       </p:sp>
@@ -20992,8 +20992,8 @@
         </p:nvSpPr>
         <p:spPr>
           <a:xfrm>
-            <a:off x="7818120" y="3182112"/>
-            <a:ext cx="3090672" cy="718718"/>
+            <a:off x="7726680" y="3182112"/>
+            <a:ext cx="3227832" cy="960120"/>
           </a:xfrm>
           <a:prstGeom prst="rect">
             <a:avLst/>
@@ -21011,7 +21011,7 @@
               <a:buNone/>
             </a:pPr>
             <a:r>
-              <a:rPr lang="en-US" sz="1220" dirty="0">
+              <a:rPr lang="en-US" sz="1140" dirty="0">
                 <a:solidFill>
                   <a:srgbClr val="17364A"/>
                 </a:solidFill>
@@ -21019,16 +21019,16 @@
                 <a:ea typeface="Aptos" pitchFamily="34" charset="-122"/>
                 <a:cs typeface="Aptos" pitchFamily="34" charset="-120"/>
               </a:rPr>
-              <a:t>Large language model (LLM): A generative AI model trained on large.</a:t>
-            </a:r>
-            <a:endParaRPr lang="en-US" sz="1220" dirty="0"/>
-          </a:p>
-          <a:p>
-            <a:pPr indent="0" marL="0">
-              <a:buNone/>
-            </a:pPr>
-            <a:r>
-              <a:rPr lang="en-US" sz="1220" dirty="0">
+              <a:t>Large language model (LLM): A generative AI model.</a:t>
+            </a:r>
+            <a:endParaRPr lang="en-US" sz="1140" dirty="0"/>
+          </a:p>
+          <a:p>
+            <a:pPr indent="0" marL="0">
+              <a:buNone/>
+            </a:pPr>
+            <a:r>
+              <a:rPr lang="en-US" sz="1140" dirty="0">
                 <a:solidFill>
                   <a:srgbClr val="17364A"/>
                 </a:solidFill>
@@ -21036,16 +21036,16 @@
                 <a:ea typeface="Aptos" pitchFamily="34" charset="-122"/>
                 <a:cs typeface="Aptos" pitchFamily="34" charset="-120"/>
               </a:rPr>
-              <a:t>LLM outputs should be reviewed by qualified humans before use in.</a:t>
-            </a:r>
-            <a:endParaRPr lang="en-US" sz="1220" dirty="0"/>
-          </a:p>
-          <a:p>
-            <a:pPr indent="0" marL="0">
-              <a:buNone/>
-            </a:pPr>
-            <a:r>
-              <a:rPr lang="en-US" sz="1220" dirty="0">
+              <a:t>LLM outputs should be reviewed by qualified humans.</a:t>
+            </a:r>
+            <a:endParaRPr lang="en-US" sz="1140" dirty="0"/>
+          </a:p>
+          <a:p>
+            <a:pPr indent="0" marL="0">
+              <a:buNone/>
+            </a:pPr>
+            <a:r>
+              <a:rPr lang="en-US" sz="1140" dirty="0">
                 <a:solidFill>
                   <a:srgbClr val="17364A"/>
                 </a:solidFill>
@@ -21053,9 +21053,9 @@
                 <a:ea typeface="Aptos" pitchFamily="34" charset="-122"/>
                 <a:cs typeface="Aptos" pitchFamily="34" charset="-120"/>
               </a:rPr>
-              <a:t>Machine learning: A type of AI that identifies patterns in data.</a:t>
-            </a:r>
-            <a:endParaRPr lang="en-US" sz="1220" dirty="0"/>
+              <a:t>Machine learning: A type of AI that identifies.</a:t>
+            </a:r>
+            <a:endParaRPr lang="en-US" sz="1140" dirty="0"/>
           </a:p>
         </p:txBody>
       </p:sp>
@@ -21067,12 +21067,12 @@
         </p:nvSpPr>
         <p:spPr>
           <a:xfrm>
-            <a:off x="7635240" y="4184294"/>
-            <a:ext cx="3474720" cy="1466698"/>
+            <a:off x="7543800" y="4389120"/>
+            <a:ext cx="3611880" cy="1261872"/>
           </a:xfrm>
           <a:prstGeom prst="roundRect">
             <a:avLst>
-              <a:gd name="adj" fmla="val 7481"/>
+              <a:gd name="adj" fmla="val 8696"/>
             </a:avLst>
           </a:prstGeom>
           <a:solidFill>
@@ -21094,8 +21094,8 @@
         </p:nvSpPr>
         <p:spPr>
           <a:xfrm>
-            <a:off x="7799832" y="4330598"/>
-            <a:ext cx="3145536" cy="256032"/>
+            <a:off x="7708392" y="4517136"/>
+            <a:ext cx="3282696" cy="228600"/>
           </a:xfrm>
           <a:prstGeom prst="rect">
             <a:avLst/>
@@ -21111,7 +21111,7 @@
               <a:buNone/>
             </a:pPr>
             <a:r>
-              <a:rPr lang="en-US" sz="1300" b="1" dirty="0">
+              <a:rPr lang="en-US" sz="1220" b="1" dirty="0">
                 <a:solidFill>
                   <a:srgbClr val="0068B7"/>
                 </a:solidFill>
@@ -21121,7 +21121,7 @@
               </a:rPr>
               <a:t>Apply it</a:t>
             </a:r>
-            <a:endParaRPr lang="en-US" sz="1300" dirty="0"/>
+            <a:endParaRPr lang="en-US" sz="1220" dirty="0"/>
           </a:p>
         </p:txBody>
       </p:sp>
@@ -21133,8 +21133,8 @@
         </p:nvSpPr>
         <p:spPr>
           <a:xfrm>
-            <a:off x="7799832" y="4659782"/>
-            <a:ext cx="3145536" cy="899770"/>
+            <a:off x="7708392" y="4828032"/>
+            <a:ext cx="3282696" cy="749808"/>
           </a:xfrm>
           <a:prstGeom prst="rect">
             <a:avLst/>
@@ -21152,7 +21152,7 @@
               <a:buNone/>
             </a:pPr>
             <a:r>
-              <a:rPr lang="en-US" sz="1320" dirty="0">
+              <a:rPr lang="en-US" sz="1220" dirty="0">
                 <a:solidFill>
                   <a:srgbClr val="17364A"/>
                 </a:solidFill>
@@ -21160,9 +21160,9 @@
                 <a:ea typeface="Aptos" pitchFamily="34" charset="-122"/>
                 <a:cs typeface="Aptos" pitchFamily="34" charset="-120"/>
               </a:rPr>
-              <a:t>Connect the concept to public health purpose, responsible use, required safeguards, documentation, and the next action a department should take.</a:t>
-            </a:r>
-            <a:endParaRPr lang="en-US" sz="1320" dirty="0"/>
+              <a:t>Connect the concept to public health purpose, responsible use, required.</a:t>
+            </a:r>
+            <a:endParaRPr lang="en-US" sz="1220" dirty="0"/>
           </a:p>
         </p:txBody>
       </p:sp>

--- a/downloads/presentations/modules/int-100.pptx
+++ b/downloads/presentations/modules/int-100.pptx
@@ -14723,7 +14723,7 @@
                 <a:ea typeface="Aptos" pitchFamily="34" charset="-122"/>
                 <a:cs typeface="Aptos" pitchFamily="34" charset="-120"/>
               </a:rPr>
-              <a:t>• 1. What is the most important first step after completing the Introduction.</a:t>
+              <a:t>1. What is the most important first step after completing the Introduction.</a:t>
             </a:r>
             <a:endParaRPr lang="en-US" sz="1920" dirty="0"/>
           </a:p>
@@ -14740,7 +14740,7 @@
                 <a:ea typeface="Aptos" pitchFamily="34" charset="-122"/>
                 <a:cs typeface="Aptos" pitchFamily="34" charset="-120"/>
               </a:rPr>
-              <a:t>• 2. Which practice best supports responsible AI use in public health?</a:t>
+              <a:t>2. Which practice best supports responsible AI use in public health?</a:t>
             </a:r>
             <a:endParaRPr lang="en-US" sz="1920" dirty="0"/>
           </a:p>
@@ -14757,7 +14757,7 @@
                 <a:ea typeface="Aptos" pitchFamily="34" charset="-122"/>
                 <a:cs typeface="Aptos" pitchFamily="34" charset="-120"/>
               </a:rPr>
-              <a:t>• 3. Which statement best reflects the risk or guardrail for this module: Do.</a:t>
+              <a:t>3. Which statement best reflects the risk or guardrail for this module: Do.</a:t>
             </a:r>
             <a:endParaRPr lang="en-US" sz="1920" dirty="0"/>
           </a:p>
@@ -14864,7 +14864,7 @@
                 <a:ea typeface="Aptos" pitchFamily="34" charset="-122"/>
                 <a:cs typeface="Aptos" pitchFamily="34" charset="-120"/>
               </a:rPr>
-              <a:t>1. What is the most important first step after completing the Introduction to AI.</a:t>
+              <a:t>What is the most important first step after completing the Introduction to AI.</a:t>
             </a:r>
             <a:endParaRPr lang="en-US" sz="1220" dirty="0"/>
           </a:p>
@@ -14971,41 +14971,7 @@
                 <a:ea typeface="Aptos" pitchFamily="34" charset="-122"/>
                 <a:cs typeface="Aptos" pitchFamily="34" charset="-120"/>
               </a:rPr>
-              <a:t>1.</a:t>
-            </a:r>
-            <a:endParaRPr lang="en-US" sz="1140" dirty="0"/>
-          </a:p>
-          <a:p>
-            <a:pPr indent="0" marL="0">
-              <a:buNone/>
-            </a:pPr>
-            <a:r>
-              <a:rPr lang="en-US" sz="1140" dirty="0">
-                <a:solidFill>
-                  <a:srgbClr val="17364A"/>
-                </a:solidFill>
-                <a:latin typeface="Aptos" pitchFamily="34" charset="0"/>
-                <a:ea typeface="Aptos" pitchFamily="34" charset="-122"/>
-                <a:cs typeface="Aptos" pitchFamily="34" charset="-120"/>
-              </a:rPr>
               <a:t>What is the most important first step after.</a:t>
-            </a:r>
-            <a:endParaRPr lang="en-US" sz="1140" dirty="0"/>
-          </a:p>
-          <a:p>
-            <a:pPr indent="0" marL="0">
-              <a:buNone/>
-            </a:pPr>
-            <a:r>
-              <a:rPr lang="en-US" sz="1140" dirty="0">
-                <a:solidFill>
-                  <a:srgbClr val="17364A"/>
-                </a:solidFill>
-                <a:latin typeface="Aptos" pitchFamily="34" charset="0"/>
-                <a:ea typeface="Aptos" pitchFamily="34" charset="-122"/>
-                <a:cs typeface="Aptos" pitchFamily="34" charset="-120"/>
-              </a:rPr>
-              <a:t>2.</a:t>
             </a:r>
             <a:endParaRPr lang="en-US" sz="1140" dirty="0"/>
           </a:p>

--- a/downloads/presentations/modules/int-100.pptx
+++ b/downloads/presentations/modules/int-100.pptx
@@ -27,14 +27,9 @@
     <p:sldId id="275" r:id="rId21"/>
     <p:sldId id="276" r:id="rId22"/>
     <p:sldId id="277" r:id="rId23"/>
-    <p:sldId id="278" r:id="rId24"/>
-    <p:sldId id="279" r:id="rId25"/>
-    <p:sldId id="280" r:id="rId26"/>
-    <p:sldId id="281" r:id="rId27"/>
-    <p:sldId id="282" r:id="rId28"/>
   </p:sldIdLst>
   <p:notesMasterIdLst>
-    <p:notesMasterId r:id="rId29"/>
+    <p:notesMasterId r:id="rId24"/>
   </p:notesMasterIdLst>
   <p:sldSz cx="12192000" cy="6858000"/>
   <p:notesSz cx="6858000" cy="12192000"/>
@@ -529,7 +524,7 @@
             <a:r>
               <a:rPr lang="en-US" dirty="0"/>
               <a:t>INT 100 Introduction to AI for Public Health
-Use this lesson to build a practical foundation in AI, including predictive AI, generative AI, agentic AI, retrieval-augmented generation, and Deep Research. The goal is to understand what each capability can support, where it can fail, and what safeguards are needed before AI is used in public health work.</a:t>
+Artificial intelligence is a broad family of computational methods that can recognize patterns, generate content, support prediction, retrieve information, or assist with multi-step workflows. In public health, AI is not a single product or a single capability. It may appear inside analytics platforms, dashboards, document tools, translation systems, vendor products, chatbots, surveillance workflows, or administrative systems. This module gives you the vocabulary and judgment needed to participate in AI discussions before a tool is selected or a pilot begins. The goal is not to turn every learner into a data scientist. The goal is to help you recognize different kinds of AI, ask the right implementation questions, and understand why governance, privacy, equity, security, and human review are necessary. You should use this module before completing the readiness assessment, reviewing vendors, prioritizing use cases, or participating in governance discussions. A shared foundation helps prevent confusion between predictive models, generative tools, retrieval systems, deep research, and agentic workflows.</a:t>
             </a:r>
             <a:endParaRPr lang="en-US" dirty="0"/>
           </a:p>
@@ -617,8 +612,9 @@
           <a:p>
             <a:r>
               <a:rPr lang="en-US" dirty="0"/>
-              <a:t>Additional Definitions
-What AI Means for Public Health: Artificial intelligence is a family of methods that enable computer systems to learn from data, recognize patterns, generate new content, and support action toward defined goals. For public health agencies, the most consequential near-term branches are generative AI and agentic AI.
+              <a:t>AI should be understood as a set of capabilities rather than a single technology. Predictive AI estimates patterns or outcomes, generative AI creates content, retrieval systems connect responses to source documents, deep research supports structured evidence gathering, and agentic AI coordinates steps in a workflow. Each capability can be useful, but each creates different risks and review needs.
+The public health workflow matters as much as the model. A low-risk drafting task using public information is different from a workflow that influences inspections, benefits, outbreak response, case prioritization, or public alerts. You should always identify the workflow step, the user, the people affected, the data involved, and the decision that remains human.
+Human review is not a vague concept. A responsible workflow names who reviews the AI output, what evidence they check, what criteria they apply, how corrections are documented, and when concerns are escalated. Review should be built into the workflow before the tool is used.
 Application guidance: Connect the concept to public health purpose, responsible use, required safeguards, documentation, and the next action a department should take.</a:t>
             </a:r>
             <a:endParaRPr lang="en-US" dirty="0"/>
@@ -707,10 +703,7 @@
           <a:p>
             <a:r>
               <a:rPr lang="en-US" dirty="0"/>
-              <a:t>Lesson Context
-Artificial intelligence should be introduced as a set of capabilities rather than a single product. In public health, AI may appear as predictive analytics, classification, natural-language summarization, generative drafting, document search, translation support, or workflow automation. You need to recognize these differences because each capability has different risks, data needs, and review requirements.
-A shared foundation also helps departments avoid technology-first decisions. The central question is not whether an AI tool is impressive, but whether it fits a public health purpose, uses appropriate data, improves a workflow, and remains accountable to humans. This matters when AI is embedded in vendor products, offered through enterprise software, or used informally by staff.
-By the end of this module, you should be able to describe an AI-supported workflow in plain language: what the system does, what data it uses, who reviews the output, what decision remains human, and what safeguards are required before use.
+              <a:t>Deep research tools deserve special attention because they can look like expert evidence synthesis. They may be useful for finding, organizing, and summarizing sources, but the learner or reviewer must still check source quality, missing perspectives, publication dates, jurisdictional relevance, and whether the conclusions are supported.
 Application guidance: Connect the concept to public health purpose, responsible use, required safeguards, documentation, and the next action a department should take.</a:t>
             </a:r>
             <a:endParaRPr lang="en-US" dirty="0"/>
@@ -799,12 +792,9 @@
           <a:p>
             <a:r>
               <a:rPr lang="en-US" dirty="0"/>
-              <a:t>Foundational concepts
-AI is not one technology or one product category. In public health, the word AI may refer to predictive models, classification tools, natural-language processing, generative drafting systems, retrieval tools, automation inside vendor platforms, or agentic workflows that coordinate several steps. Treating these as interchangeable can lead to poor procurement choices, weak safeguards, and confusion about who is accountable for decisions.
-Generative AI produces new content from prompts and source material. It can draft, summarize, translate, rewrite, organize, or explain information, but it does not inherently know whether a statement is true, current, equitable, legally appropriate, or consistent with local policy. For public health use, generative outputs should be treated as drafts that require human review and, when possible, grounding in approved source material.
-Agentic AI can coordinate a sequence of actions across systems under defined rules. This may include monitoring an inbox, retrieving documents, creating a task, routing a summary, or updating a dashboard. Because agentic systems can initiate steps rather than simply generate text, they require clearer boundaries, audit logs, role-based access, and human approval points before they are used in public health operations.
-Public health use requires human review, privacy protections, equity monitoring, and governance. AI can affect trust, service access, surveillance, communications, and resource decisions even when the tool seems administrative. A responsible approach makes the workflow, data, human decision owner, review steps, escalation process, and monitoring expectations visible before the tool is used.
-Deep Research tools can support evidence scans, policy scans, legal or procurement comparisons, and funding research by organizing sources into a structured draft. Treat the output as research support, not as final evidence, and verify every source before using the content in policy, governance, public communication, or funding decisions.
+              <a:t>AI systems can generate inaccurate, incomplete, biased, outdated, or misleading outputs. Generative tools can hallucinate. Predictive tools can perform poorly for underrepresented groups. Agentic systems can take inappropriate actions if boundaries, permissions, or escalation paths are unclear.
+Public health data can be sensitive even when it is not formally protected health information. Records may include small populations, geographic identifiers, outbreak details, program participation, immigration-related concerns, tribal data, environmental exposure information, or other context that requires careful handling.
+Strong guardrails include approved-use policies, data tiering, human review, source verification, equity review, access controls, documentation, incident reporting, and monitoring. These safeguards should be proportional to risk, but they should not be skipped because a tool appears easy to use.
 Application guidance: Connect the concept to public health purpose, responsible use, required safeguards, documentation, and the next action a department should take.</a:t>
             </a:r>
             <a:endParaRPr lang="en-US" dirty="0"/>
@@ -893,10 +883,9 @@
           <a:p>
             <a:r>
               <a:rPr lang="en-US" dirty="0"/>
-              <a:t>Core Concepts
-Artificial intelligence is best understood as a family of capabilities rather than a single product. Some AI systems classify records, some detect patterns, some predict possible outcomes, some generate language, and some coordinate steps in a workflow. This distinction matters because each capability has different data requirements, error patterns, human review needs, and governance controls. A responsible public health discussion starts by naming what kind of AI support is being considered before deciding whether the tool is appropriate.
-Pattern recognition and predictive analytics are often used to find signals in structured or semi-structured data. These systems may identify unusual disease activity, estimate risk, prioritize records for review, or classify incoming reports into categories. Their usefulness depends heavily on data quality, population representation, validation, and ongoing monitoring for drift or uneven performance. They should support professional review rather than replace epidemiologic, programmatic, legal, or community judgment.
-Generative AI creates new content from prompts, examples, and source material. In public health, it may help draft plain-language messages, summarize guidance, prepare meeting notes, translate technical findings, or organize a briefing. The output can be fluent and useful, but it can also be inaccurate, incomplete, outdated, biased, or unsupported by evidence. Generative AI should be treated as draft support that requires source checking, human review, and clear rules about what data may be entered.
+              <a:t>When you encounter a proposed AI use, start by describing the public health task in plain language. Identify the problem, the current workflow, the proposed AI-supported step, the users, the data, the affected populations, and the decision points that must remain under human control.
+Next, decide what type of AI is being proposed. Predictive, generative, retrieval, deep research, and agentic uses should not be reviewed as if they were the same. The review pathway should match the risk, data sensitivity, workflow impact, and degree of automation.
+Finally, connect the proposed use to the playbook. Early ideas may belong in vision, readiness, governance, stakeholder engagement, or use case intake before any pilot or procurement begins. The tools are available to fill gaps where your department does not already have a comparable process.
 Application guidance: Connect the concept to public health purpose, responsible use, required safeguards, documentation, and the next action a department should take.</a:t>
             </a:r>
             <a:endParaRPr lang="en-US" dirty="0"/>
@@ -985,10 +974,9 @@
           <a:p>
             <a:r>
               <a:rPr lang="en-US" dirty="0"/>
-              <a:t>Core Concepts
-Retrieval-augmented generation combines generative AI with a defined set of source documents. Instead of relying only on a model's general training, the system retrieves relevant passages from approved materials and uses them to help generate an answer. This approach can be useful for policy summaries, inspection documentation, program guidance, or internal knowledge bases when the source collection is current and authoritative. It still requires review because retrieval can miss important context, select the wrong source, or summarize a source incorrectly.
-Agentic AI refers to systems that can take or coordinate multiple steps toward a goal under defined rules. A bounded agentic workflow might monitor an inbox, retrieve documents, draft a summary, create a task, route it to the right staff person, and update a dashboard. Because these systems can initiate actions, they require stricter boundaries than simple drafting tools. Public health use should define allowable actions, prohibited actions, human approval points, audit logs, and a process for pausing or overriding the workflow.
-Human accountability is the through-line across all AI concepts. The department should be able to explain what the system does, what data it uses, who reviews the output, what decision remains human, and how concerns are escalated. This is especially important when AI affects public communication, surveillance prioritization, eligibility, outreach, inspection documentation, resource allocation, or public trust. AI can support public health work, but it should not obscure who is responsible for decisions or how those decisions are reviewed.
+              <a:t>What AI tools or AI-enabled features are already being used informally in your work environment?
+Which public health workflows in your area involve drafting, summarizing, searching, triage, prediction, routing, or monitoring tasks that could attract AI proposals?
+What information should never be entered into an unapproved AI tool in your role?
 Application guidance: Connect the concept to public health purpose, responsible use, required safeguards, documentation, and the next action a department should take.</a:t>
             </a:r>
             <a:endParaRPr lang="en-US" dirty="0"/>
@@ -1077,10 +1065,8 @@
           <a:p>
             <a:r>
               <a:rPr lang="en-US" dirty="0"/>
-              <a:t>Public Health Application
-Use these AI concepts to identify where AI may already be present in your department. Informal use can include staff drafting emails or public messages with consumer AI tools, analysts using AI-assisted coding features, communications teams summarizing meeting notes, or programs using vendor platforms that quietly add AI-enabled triage, search, forecasting, translation, or reporting features. An early inventory does not need to be punitive. Its purpose is to understand what is already happening, where sensitive data may be involved, and where you need clearer guidance.
-A common vocabulary helps different roles evaluate the same workflow together. Privacy staff may focus on the data being entered, legal staff may focus on authority and liability, IT may focus on security and integration, program colleagues may focus on usefulness and burden, equity staff may focus on differential impact, and communications staff may focus on public understanding. When everyone can distinguish drafting, retrieval, prediction, classification, workflow automation, and decision support, the conversation becomes more precise and less driven by hype or fear.
-Translate technical capabilities into public health value before selecting a tool. AI should not be adopted because it is new or because a vendor says it is innovative. It should help address a defined public health need such as faster review of records, more consistent documentation, clearer plain-language communication, broader language access, earlier signal detection, better routing of work, or more complete preparation for governance decisions. If the public health value is vague, the use case is not ready for approval.
+              <a:t>Who would need to review an AI output before it influenced communication, services, enforcement, surveillance, or leadership decisions?
+What existing governance, privacy, security, procurement, or equity review process could be used before creating a new AI-specific process?
 Application guidance: Connect the concept to public health purpose, responsible use, required safeguards, documentation, and the next action a department should take.</a:t>
             </a:r>
             <a:endParaRPr lang="en-US" dirty="0"/>
@@ -1169,11 +1155,9 @@
           <a:p>
             <a:r>
               <a:rPr lang="en-US" dirty="0"/>
-              <a:t>Implementation Check
-Before any AI project begins, confirm the purpose of the use, the data involved, the intended users, the people or communities affected, the public impact, the review requirements, and the escalation pathway. These questions should be answered before procurement, pilot approval, or workflow redesign. If the department cannot explain what the AI will do and how people will review it, the project should remain in planning rather than moving into implementation.
-Document what the AI is allowed to do and what decisions remain with qualified public health staff. For example, a system may be allowed to draft a situation summary, flag a possible anomaly, translate an internal draft, or prepare a task list. It may not be allowed to issue a public alert, make an enforcement decision, determine eligibility, contact a community member, or change an official record without human approval. Drawing this line early prevents confusion after the tool becomes part of daily work.
-Avoid selecting tools before the department has established vision, readiness, governance, and data-use expectations. Tool selection should follow a clear understanding of the problem, the workflow, the available data, the risk tier, the human decision owner, and the safeguards needed. If your department already has data governance, technology governance, privacy review, procurement standards, or quality improvement processes, use and adapt those processes rather than creating a disconnected AI process from scratch.
-Application guidance: Use the concept to clarify workflow changes, dependencies, staffing, procurement requirements, training needs, and implementation checkpoints.</a:t>
+              <a:t>Choose one public health workflow where AI might be proposed. Write a short description of the current workflow, the AI-supported step, the type of AI that might be involved, the data that would be used, the staff who would use the output, and the people or communities who could be affected.
+Then identify at least three safeguards that would be needed before the AI-supported workflow could move forward. Your safeguards should address human review, data protection, equity, accuracy, documentation, governance review, or monitoring.
+Application guidance: Connect the concept to public health purpose, responsible use, required safeguards, documentation, and the next action a department should take.</a:t>
             </a:r>
             <a:endParaRPr lang="en-US" dirty="0"/>
           </a:p>
@@ -1261,8 +1245,9 @@
           <a:p>
             <a:r>
               <a:rPr lang="en-US" dirty="0"/>
-              <a:t>Why This Comes First
-Understanding what these systems can and cannot do is the starting point for responsible adoption. Agencies need a shared vocabulary before they can set guardrails, evaluate vendors, select use cases, or explain AI-supported workflows to staff and communities.
+              <a:t>Upload or paste a one- to two-page AI workflow concept note.
+The concept note should identify the proposed AI type, workflow step, data involved, users, affected populations, human review point, and key risks.
+It should also list the governance, privacy, equity, security, procurement, or leadership questions that need to be answered before the idea moves forward.
 Application guidance: Connect the concept to public health purpose, responsible use, required safeguards, documentation, and the next action a department should take.</a:t>
             </a:r>
             <a:endParaRPr lang="en-US" dirty="0"/>
@@ -1351,8 +1336,7 @@
           <a:p>
             <a:r>
               <a:rPr lang="en-US" dirty="0"/>
-              <a:t>Deep Research
-Deep Research is an agentic research capability that can plan a multi-step search, gather source materials, compare information, and draft a citation-based synthesis. It can help with literature scans, policy scans, funding reviews, and comparative program analysis, but all sources, dates, claims, and conclusions still need human review.
+              <a:t>Use AI-assisted feedback to help you identify strengths, missing elements, unclear assumptions, and areas that may need revision.
 Application guidance: Connect the concept to public health purpose, responsible use, required safeguards, documentation, and the next action a department should take.</a:t>
             </a:r>
             <a:endParaRPr lang="en-US" dirty="0"/>
@@ -1441,9 +1425,12 @@
           <a:p>
             <a:r>
               <a:rPr lang="en-US" dirty="0"/>
-              <a:t>How to Apply This Module
-Use the linked plays to decide who should be involved, what decisions need to be made, and which safeguards should be documented. Use the linked tools to turn the concept into an agency artifact that can be saved, reviewed, updated, and used during governance or implementation meetings.
-Application guidance: Connect the concept to public health purpose, responsible use, required safeguards, documentation, and the next action a department should take.</a:t>
+              <a:t>Expected Assignment
+A short description of a public health workflow where AI might be used.
+A list of the data, users, affected populations, and human decision points in that workflow.
+A preliminary note describing why the use case may need governance, privacy, equity, security, procurement, or leadership review.
+A reflection on where AI should not be used or where human judgment must remain primary.
+Application guidance: Use the assignment to test whether you can explain the concept, apply it to a realistic public health situation, and identify what would need review before the work moves forward.</a:t>
             </a:r>
             <a:endParaRPr lang="en-US" dirty="0"/>
           </a:p>
@@ -1533,8 +1520,9 @@
               <a:rPr lang="en-US" dirty="0"/>
               <a:t>Module Context
 Level: Foundational Module
+Primary track: Foundational Modules
 Appears in tracks: shared-foundational
-Use this lesson to build a practical foundation in AI, including predictive AI, generative AI, agentic AI, retrieval-augmented generation, and Deep Research. The goal is to understand what each capability can support, where it can fail, and what safeguards are needed before AI is used in public health work.</a:t>
+Artificial intelligence is a broad family of computational methods that can recognize patterns, generate content, support prediction, retrieve information, or assist with multi-step workflows. In public health, AI is not a single product or a single capability. It may appear inside analytics platforms, dashboards, document tools, translation systems, vendor products, chatbots, surveillance workflows, or administrative systems. This module gives you the vocabulary and judgment needed to participate in AI discussions before a tool is selected or a pilot begins. The goal is not to turn every learner into a data scientist. The goal is to help you recognize different kinds of AI, ask the right implementation questions, and understand why governance, privacy, equity, security, and human review are necessary. You should use this module before completing the readiness assessment, reviewing vendors, prioritizing use cases, or participating in governance discussions. A shared foundation helps prevent confusion between predictive models, generative tools, retrieval systems, deep research, and agentic workflows.</a:t>
             </a:r>
             <a:endParaRPr lang="en-US" dirty="0"/>
           </a:p>
@@ -1622,9 +1610,13 @@
           <a:p>
             <a:r>
               <a:rPr lang="en-US" dirty="0"/>
-              <a:t>Risk or Guardrail
-Do not treat AI as a single tool or assume one model fits every public health task.
-Application guidance: Identify what could go wrong, who could be affected, what safeguards are needed, and what evidence should be reviewed before use expands.</a:t>
+              <a:t>Knowledge Check
+1. What is the most important first step after completing the Introduction to AI for Public Health module?
+2. Which practice best supports responsible AI use in public health?
+3. Which statement best reflects the risk or guardrail for this module: AI systems can generate inaccurate, incomplete, biased, outdated, or misleading outputs. Generative tools can hallucinate. Predictive tools can perform poorly for underrepresented groups. Agentic systems can take inappropriate actions if boundaries, permissions, or escalation paths are unclear.
+Public health data can be sensitive even when it is not formally protected health information. Records may include small populations, geographic identifiers, outbreak details, program participation, immigration-related concerns, tribal data, environmental exposure information, or other context that requires careful handling.
+Strong guardrails include approved-use policies, data tiering, human review, source verification, equity review, access controls, documentation, incident reporting, and monitoring. These safeguards should be proportional to risk, but they should not be skipped because a tool appears easy to use.
+Application guidance: Use the assignment to test whether you can explain the concept, apply it to a realistic public health situation, and identify what would need review before the work moves forward.</a:t>
             </a:r>
             <a:endParaRPr lang="en-US" dirty="0"/>
           </a:p>
@@ -1712,8 +1704,9 @@
           <a:p>
             <a:r>
               <a:rPr lang="en-US" dirty="0"/>
-              <a:t>Why This Matters for Your Practice
-A shared AI vocabulary prevents agencies from approving tools before they understand the workflow, data, risk level, and accountability structure. This is especially important for STLT public health departments because AI may enter through many doors: staff productivity tools, vendor platforms, analytics systems, communications workflows, or grant-funded pilots.
+              <a:t>Knowledge Check
+4. When should a staff member escalate an AI-related concern?
+5. What counts as stronger completion evidence for a training module?
 Application guidance: Use the assignment to test whether you can explain the concept, apply it to a realistic public health situation, and identify what would need review before the work moves forward.</a:t>
             </a:r>
             <a:endParaRPr lang="en-US" dirty="0"/>
@@ -1802,10 +1795,11 @@
           <a:p>
             <a:r>
               <a:rPr lang="en-US" dirty="0"/>
-              <a:t>Reflection Questions
-What AI tools or AI-enabled vendor products are already being used informally?
-Which public health decisions should never be delegated to an AI system?
-Who needs enough AI literacy to participate in governance, procurement, or implementation decisions?
+              <a:t>References and Resources
+[object Object]
+[object Object]
+[object Object]
+[object Object]
 Application guidance: Connect the concept to public health purpose, responsible use, required safeguards, documentation, and the next action a department should take.</a:t>
             </a:r>
             <a:endParaRPr lang="en-US" dirty="0"/>
@@ -1830,466 +1824,6 @@
             <a:fld id="{F7021451-1387-4CA6-816F-3879F97B5CBC}" type="slidenum">
               <a:rPr lang="en-US"/>
               <a:t>22</a:t>
-            </a:fld>
-            <a:endParaRPr lang="en-US"/>
-          </a:p>
-        </p:txBody>
-      </p:sp>
-    </p:spTree>
-    <p:extLst>
-      <p:ext uri="{BB962C8B-B14F-4D97-AF65-F5344CB8AC3E}">
-        <p14:creationId xmlns:p14="http://schemas.microsoft.com/office/powerpoint/2010/main" val="1024086991"/>
-      </p:ext>
-    </p:extLst>
-  </p:cSld>
-  <p:clrMapOvr>
-    <a:masterClrMapping/>
-  </p:clrMapOvr>
-</p:notes>
-</file>
-
-<file path=ppt/notesSlides/notesSlide23.xml><?xml version="1.0" encoding="utf-8"?>
-<p:notes xmlns:a="http://schemas.openxmlformats.org/drawingml/2006/main" xmlns:r="http://schemas.openxmlformats.org/officeDocument/2006/relationships" xmlns:p="http://schemas.openxmlformats.org/presentationml/2006/main">
-  <p:cSld>
-    <p:spTree>
-      <p:nvGrpSpPr>
-        <p:cNvPr id="1" name=""/>
-        <p:cNvGrpSpPr/>
-        <p:nvPr/>
-      </p:nvGrpSpPr>
-      <p:grpSpPr>
-        <a:xfrm>
-          <a:off x="0" y="0"/>
-          <a:ext cx="0" cy="0"/>
-          <a:chOff x="0" y="0"/>
-          <a:chExt cx="0" cy="0"/>
-        </a:xfrm>
-      </p:grpSpPr>
-      <p:sp>
-        <p:nvSpPr>
-          <p:cNvPr id="2" name="Slide Image Placeholder 1"/>
-          <p:cNvSpPr>
-            <a:spLocks noGrp="1" noRot="1" noChangeAspect="1"/>
-          </p:cNvSpPr>
-          <p:nvPr>
-            <p:ph type="sldImg"/>
-          </p:nvPr>
-        </p:nvSpPr>
-        <p:spPr/>
-      </p:sp>
-      <p:sp>
-        <p:nvSpPr>
-          <p:cNvPr id="3" name="Notes Placeholder 2"/>
-          <p:cNvSpPr>
-            <a:spLocks noGrp="1"/>
-          </p:cNvSpPr>
-          <p:nvPr>
-            <p:ph type="body" idx="1"/>
-          </p:nvPr>
-        </p:nvSpPr>
-        <p:spPr/>
-        <p:txBody>
-          <a:bodyPr/>
-          <a:lstStyle/>
-          <a:p>
-            <a:r>
-              <a:rPr lang="en-US" dirty="0"/>
-              <a:t>Practical Exercise
-Ask each program area to list one current task that involves searching, summarizing, drafting, routing, predicting, translating, or prioritizing. Classify each task by AI type and identify the human decision owner.
-Expected assignment: Agency AI vocabulary list
-Expected assignment: Initial inventory of known or suspected AI use
-Application guidance: Use the assignment to test whether you can explain the concept, apply it to a realistic public health situation, and identify what would need review before the work moves forward.</a:t>
-            </a:r>
-            <a:endParaRPr lang="en-US" dirty="0"/>
-          </a:p>
-        </p:txBody>
-      </p:sp>
-      <p:sp>
-        <p:nvSpPr>
-          <p:cNvPr id="4" name="Slide Number Placeholder 3"/>
-          <p:cNvSpPr>
-            <a:spLocks noGrp="1"/>
-          </p:cNvSpPr>
-          <p:nvPr>
-            <p:ph type="sldNum" sz="quarter" idx="10"/>
-          </p:nvPr>
-        </p:nvSpPr>
-        <p:spPr/>
-        <p:txBody>
-          <a:bodyPr/>
-          <a:lstStyle/>
-          <a:p>
-            <a:fld id="{F7021451-1387-4CA6-816F-3879F97B5CBC}" type="slidenum">
-              <a:rPr lang="en-US"/>
-              <a:t>23</a:t>
-            </a:fld>
-            <a:endParaRPr lang="en-US"/>
-          </a:p>
-        </p:txBody>
-      </p:sp>
-    </p:spTree>
-    <p:extLst>
-      <p:ext uri="{BB962C8B-B14F-4D97-AF65-F5344CB8AC3E}">
-        <p14:creationId xmlns:p14="http://schemas.microsoft.com/office/powerpoint/2010/main" val="1024086991"/>
-      </p:ext>
-    </p:extLst>
-  </p:cSld>
-  <p:clrMapOvr>
-    <a:masterClrMapping/>
-  </p:clrMapOvr>
-</p:notes>
-</file>
-
-<file path=ppt/notesSlides/notesSlide24.xml><?xml version="1.0" encoding="utf-8"?>
-<p:notes xmlns:a="http://schemas.openxmlformats.org/drawingml/2006/main" xmlns:r="http://schemas.openxmlformats.org/officeDocument/2006/relationships" xmlns:p="http://schemas.openxmlformats.org/presentationml/2006/main">
-  <p:cSld>
-    <p:spTree>
-      <p:nvGrpSpPr>
-        <p:cNvPr id="1" name=""/>
-        <p:cNvGrpSpPr/>
-        <p:nvPr/>
-      </p:nvGrpSpPr>
-      <p:grpSpPr>
-        <a:xfrm>
-          <a:off x="0" y="0"/>
-          <a:ext cx="0" cy="0"/>
-          <a:chOff x="0" y="0"/>
-          <a:chExt cx="0" cy="0"/>
-        </a:xfrm>
-      </p:grpSpPr>
-      <p:sp>
-        <p:nvSpPr>
-          <p:cNvPr id="2" name="Slide Image Placeholder 1"/>
-          <p:cNvSpPr>
-            <a:spLocks noGrp="1" noRot="1" noChangeAspect="1"/>
-          </p:cNvSpPr>
-          <p:nvPr>
-            <p:ph type="sldImg"/>
-          </p:nvPr>
-        </p:nvSpPr>
-        <p:spPr/>
-      </p:sp>
-      <p:sp>
-        <p:nvSpPr>
-          <p:cNvPr id="3" name="Notes Placeholder 2"/>
-          <p:cNvSpPr>
-            <a:spLocks noGrp="1"/>
-          </p:cNvSpPr>
-          <p:nvPr>
-            <p:ph type="body" idx="1"/>
-          </p:nvPr>
-        </p:nvSpPr>
-        <p:spPr/>
-        <p:txBody>
-          <a:bodyPr/>
-          <a:lstStyle/>
-          <a:p>
-            <a:r>
-              <a:rPr lang="en-US" dirty="0"/>
-              <a:t>Practical Exercise
-Expected assignment: Draft list of decisions that require human accountability
-Application guidance: Use the assignment to test whether you can explain the concept, apply it to a realistic public health situation, and identify what would need review before the work moves forward.</a:t>
-            </a:r>
-            <a:endParaRPr lang="en-US" dirty="0"/>
-          </a:p>
-        </p:txBody>
-      </p:sp>
-      <p:sp>
-        <p:nvSpPr>
-          <p:cNvPr id="4" name="Slide Number Placeholder 3"/>
-          <p:cNvSpPr>
-            <a:spLocks noGrp="1"/>
-          </p:cNvSpPr>
-          <p:nvPr>
-            <p:ph type="sldNum" sz="quarter" idx="10"/>
-          </p:nvPr>
-        </p:nvSpPr>
-        <p:spPr/>
-        <p:txBody>
-          <a:bodyPr/>
-          <a:lstStyle/>
-          <a:p>
-            <a:fld id="{F7021451-1387-4CA6-816F-3879F97B5CBC}" type="slidenum">
-              <a:rPr lang="en-US"/>
-              <a:t>24</a:t>
-            </a:fld>
-            <a:endParaRPr lang="en-US"/>
-          </a:p>
-        </p:txBody>
-      </p:sp>
-    </p:spTree>
-    <p:extLst>
-      <p:ext uri="{BB962C8B-B14F-4D97-AF65-F5344CB8AC3E}">
-        <p14:creationId xmlns:p14="http://schemas.microsoft.com/office/powerpoint/2010/main" val="1024086991"/>
-      </p:ext>
-    </p:extLst>
-  </p:cSld>
-  <p:clrMapOvr>
-    <a:masterClrMapping/>
-  </p:clrMapOvr>
-</p:notes>
-</file>
-
-<file path=ppt/notesSlides/notesSlide25.xml><?xml version="1.0" encoding="utf-8"?>
-<p:notes xmlns:a="http://schemas.openxmlformats.org/drawingml/2006/main" xmlns:r="http://schemas.openxmlformats.org/officeDocument/2006/relationships" xmlns:p="http://schemas.openxmlformats.org/presentationml/2006/main">
-  <p:cSld>
-    <p:spTree>
-      <p:nvGrpSpPr>
-        <p:cNvPr id="1" name=""/>
-        <p:cNvGrpSpPr/>
-        <p:nvPr/>
-      </p:nvGrpSpPr>
-      <p:grpSpPr>
-        <a:xfrm>
-          <a:off x="0" y="0"/>
-          <a:ext cx="0" cy="0"/>
-          <a:chOff x="0" y="0"/>
-          <a:chExt cx="0" cy="0"/>
-        </a:xfrm>
-      </p:grpSpPr>
-      <p:sp>
-        <p:nvSpPr>
-          <p:cNvPr id="2" name="Slide Image Placeholder 1"/>
-          <p:cNvSpPr>
-            <a:spLocks noGrp="1" noRot="1" noChangeAspect="1"/>
-          </p:cNvSpPr>
-          <p:nvPr>
-            <p:ph type="sldImg"/>
-          </p:nvPr>
-        </p:nvSpPr>
-        <p:spPr/>
-      </p:sp>
-      <p:sp>
-        <p:nvSpPr>
-          <p:cNvPr id="3" name="Notes Placeholder 2"/>
-          <p:cNvSpPr>
-            <a:spLocks noGrp="1"/>
-          </p:cNvSpPr>
-          <p:nvPr>
-            <p:ph type="body" idx="1"/>
-          </p:nvPr>
-        </p:nvSpPr>
-        <p:spPr/>
-        <p:txBody>
-          <a:bodyPr/>
-          <a:lstStyle/>
-          <a:p>
-            <a:r>
-              <a:rPr lang="en-US" dirty="0"/>
-              <a:t>Knowledge Check
-1. What is the most important first step after completing the Introduction to AI for Public Health module?
-2. Which practice best supports responsible AI use in public health?
-3. Which statement best reflects the risk or guardrail for this module: Do not treat AI as a single tool or assume one model fits every public health task.
-4. When should a staff member escalate an AI-related concern?
-5. What counts as stronger completion evidence for a training module?
-Application guidance: Use the assignment to test whether you can explain the concept, apply it to a realistic public health situation, and identify what would need review before the work moves forward.</a:t>
-            </a:r>
-            <a:endParaRPr lang="en-US" dirty="0"/>
-          </a:p>
-        </p:txBody>
-      </p:sp>
-      <p:sp>
-        <p:nvSpPr>
-          <p:cNvPr id="4" name="Slide Number Placeholder 3"/>
-          <p:cNvSpPr>
-            <a:spLocks noGrp="1"/>
-          </p:cNvSpPr>
-          <p:nvPr>
-            <p:ph type="sldNum" sz="quarter" idx="10"/>
-          </p:nvPr>
-        </p:nvSpPr>
-        <p:spPr/>
-        <p:txBody>
-          <a:bodyPr/>
-          <a:lstStyle/>
-          <a:p>
-            <a:fld id="{F7021451-1387-4CA6-816F-3879F97B5CBC}" type="slidenum">
-              <a:rPr lang="en-US"/>
-              <a:t>25</a:t>
-            </a:fld>
-            <a:endParaRPr lang="en-US"/>
-          </a:p>
-        </p:txBody>
-      </p:sp>
-    </p:spTree>
-    <p:extLst>
-      <p:ext uri="{BB962C8B-B14F-4D97-AF65-F5344CB8AC3E}">
-        <p14:creationId xmlns:p14="http://schemas.microsoft.com/office/powerpoint/2010/main" val="1024086991"/>
-      </p:ext>
-    </p:extLst>
-  </p:cSld>
-  <p:clrMapOvr>
-    <a:masterClrMapping/>
-  </p:clrMapOvr>
-</p:notes>
-</file>
-
-<file path=ppt/notesSlides/notesSlide26.xml><?xml version="1.0" encoding="utf-8"?>
-<p:notes xmlns:a="http://schemas.openxmlformats.org/drawingml/2006/main" xmlns:r="http://schemas.openxmlformats.org/officeDocument/2006/relationships" xmlns:p="http://schemas.openxmlformats.org/presentationml/2006/main">
-  <p:cSld>
-    <p:spTree>
-      <p:nvGrpSpPr>
-        <p:cNvPr id="1" name=""/>
-        <p:cNvGrpSpPr/>
-        <p:nvPr/>
-      </p:nvGrpSpPr>
-      <p:grpSpPr>
-        <a:xfrm>
-          <a:off x="0" y="0"/>
-          <a:ext cx="0" cy="0"/>
-          <a:chOff x="0" y="0"/>
-          <a:chExt cx="0" cy="0"/>
-        </a:xfrm>
-      </p:grpSpPr>
-      <p:sp>
-        <p:nvSpPr>
-          <p:cNvPr id="2" name="Slide Image Placeholder 1"/>
-          <p:cNvSpPr>
-            <a:spLocks noGrp="1" noRot="1" noChangeAspect="1"/>
-          </p:cNvSpPr>
-          <p:nvPr>
-            <p:ph type="sldImg"/>
-          </p:nvPr>
-        </p:nvSpPr>
-        <p:spPr/>
-      </p:sp>
-      <p:sp>
-        <p:nvSpPr>
-          <p:cNvPr id="3" name="Notes Placeholder 2"/>
-          <p:cNvSpPr>
-            <a:spLocks noGrp="1"/>
-          </p:cNvSpPr>
-          <p:nvPr>
-            <p:ph type="body" idx="1"/>
-          </p:nvPr>
-        </p:nvSpPr>
-        <p:spPr/>
-        <p:txBody>
-          <a:bodyPr/>
-          <a:lstStyle/>
-          <a:p>
-            <a:r>
-              <a:rPr lang="en-US" dirty="0"/>
-              <a:t>References and Resources
-NIST AI Risk Management Framework: Foundational vocabulary for trustworthy AI risk management. https://www.nist.gov/itl/ai-risk-management-framework
-ASPPH AI Framework Report: Public health framing for responsible AI education, research, practice, governance, and workforce preparation. https://aspph.org/initiatives/ai-for-public-health/ai-framework-report/
-WHO: Ethics and governance of artificial intelligence for health: Health-sector principles for ethical and responsible AI use. https://www.who.int/publications/i/item/9789240029200
-NIH PubMed: Primary source for biomedical and public health literature searches. https://pubmed.ncbi.nlm.nih.gov/
-CDC Publications and Resources: Public health reports, guidance, and evidence sources for staff review. https://www.cdc.gov/publications/
-Application guidance: Connect the concept to public health purpose, responsible use, required safeguards, documentation, and the next action a department should take.</a:t>
-            </a:r>
-            <a:endParaRPr lang="en-US" dirty="0"/>
-          </a:p>
-        </p:txBody>
-      </p:sp>
-      <p:sp>
-        <p:nvSpPr>
-          <p:cNvPr id="4" name="Slide Number Placeholder 3"/>
-          <p:cNvSpPr>
-            <a:spLocks noGrp="1"/>
-          </p:cNvSpPr>
-          <p:nvPr>
-            <p:ph type="sldNum" sz="quarter" idx="10"/>
-          </p:nvPr>
-        </p:nvSpPr>
-        <p:spPr/>
-        <p:txBody>
-          <a:bodyPr/>
-          <a:lstStyle/>
-          <a:p>
-            <a:fld id="{F7021451-1387-4CA6-816F-3879F97B5CBC}" type="slidenum">
-              <a:rPr lang="en-US"/>
-              <a:t>26</a:t>
-            </a:fld>
-            <a:endParaRPr lang="en-US"/>
-          </a:p>
-        </p:txBody>
-      </p:sp>
-    </p:spTree>
-    <p:extLst>
-      <p:ext uri="{BB962C8B-B14F-4D97-AF65-F5344CB8AC3E}">
-        <p14:creationId xmlns:p14="http://schemas.microsoft.com/office/powerpoint/2010/main" val="1024086991"/>
-      </p:ext>
-    </p:extLst>
-  </p:cSld>
-  <p:clrMapOvr>
-    <a:masterClrMapping/>
-  </p:clrMapOvr>
-</p:notes>
-</file>
-
-<file path=ppt/notesSlides/notesSlide27.xml><?xml version="1.0" encoding="utf-8"?>
-<p:notes xmlns:a="http://schemas.openxmlformats.org/drawingml/2006/main" xmlns:r="http://schemas.openxmlformats.org/officeDocument/2006/relationships" xmlns:p="http://schemas.openxmlformats.org/presentationml/2006/main">
-  <p:cSld>
-    <p:spTree>
-      <p:nvGrpSpPr>
-        <p:cNvPr id="1" name=""/>
-        <p:cNvGrpSpPr/>
-        <p:nvPr/>
-      </p:nvGrpSpPr>
-      <p:grpSpPr>
-        <a:xfrm>
-          <a:off x="0" y="0"/>
-          <a:ext cx="0" cy="0"/>
-          <a:chOff x="0" y="0"/>
-          <a:chExt cx="0" cy="0"/>
-        </a:xfrm>
-      </p:grpSpPr>
-      <p:sp>
-        <p:nvSpPr>
-          <p:cNvPr id="2" name="Slide Image Placeholder 1"/>
-          <p:cNvSpPr>
-            <a:spLocks noGrp="1" noRot="1" noChangeAspect="1"/>
-          </p:cNvSpPr>
-          <p:nvPr>
-            <p:ph type="sldImg"/>
-          </p:nvPr>
-        </p:nvSpPr>
-        <p:spPr/>
-      </p:sp>
-      <p:sp>
-        <p:nvSpPr>
-          <p:cNvPr id="3" name="Notes Placeholder 2"/>
-          <p:cNvSpPr>
-            <a:spLocks noGrp="1"/>
-          </p:cNvSpPr>
-          <p:nvPr>
-            <p:ph type="body" idx="1"/>
-          </p:nvPr>
-        </p:nvSpPr>
-        <p:spPr/>
-        <p:txBody>
-          <a:bodyPr/>
-          <a:lstStyle/>
-          <a:p>
-            <a:r>
-              <a:rPr lang="en-US" dirty="0"/>
-              <a:t>References and Resources
-ASPPH AI Framework Report: Framework language for responsible use of AI-supported research and synthesis. https://aspph.org/initiatives/ai-for-public-health/ai-framework-report/
-Application guidance: Connect the concept to public health purpose, responsible use, required safeguards, documentation, and the next action a department should take.</a:t>
-            </a:r>
-            <a:endParaRPr lang="en-US" dirty="0"/>
-          </a:p>
-        </p:txBody>
-      </p:sp>
-      <p:sp>
-        <p:nvSpPr>
-          <p:cNvPr id="4" name="Slide Number Placeholder 3"/>
-          <p:cNvSpPr>
-            <a:spLocks noGrp="1"/>
-          </p:cNvSpPr>
-          <p:nvPr>
-            <p:ph type="sldNum" sz="quarter" idx="10"/>
-          </p:nvPr>
-        </p:nvSpPr>
-        <p:spPr/>
-        <p:txBody>
-          <a:bodyPr/>
-          <a:lstStyle/>
-          <a:p>
-            <a:fld id="{F7021451-1387-4CA6-816F-3879F97B5CBC}" type="slidenum">
-              <a:rPr lang="en-US"/>
-              <a:t>27</a:t>
             </a:fld>
             <a:endParaRPr lang="en-US"/>
           </a:p>
@@ -2354,10 +1888,13 @@
           <a:p>
             <a:r>
               <a:rPr lang="en-US" dirty="0"/>
-              <a:t>Related Playbook Plays
-Play 1: Vision &amp; Guardrails - This lesson informs Play 1 by helping learners connect the lesson topic to vision &amp; guardrails work in the AI Playbook sequence.
-Play 3: Establish AI Governance - This lesson informs Play 3 by helping learners connect the lesson topic to establish ai governance work in the AI Playbook sequence.
-Play 11: Build and Deploy AI Solutions - This lesson informs Play 11 by helping learners connect the lesson topic to build and deploy ai solutions work in the AI Playbook.</a:t>
+              <a:t>Learning Objectives
+Define artificial intelligence in practical public health terms.
+Distinguish predictive AI, generative AI, retrieval-augmented generation, deep research, and agentic AI.
+Explain why AI outputs require human review, governance, privacy protections, and equity review.
+Identify appropriate and inappropriate uses of AI in public health workflows.
+Describe the first questions to ask before an AI tool is used, procured, piloted, or deployed.
+Application guidance: Use the assignment to test whether you can explain the concept, apply it to a realistic public health situation, and identify what would need review before the work moves forward.</a:t>
             </a:r>
             <a:endParaRPr lang="en-US" dirty="0"/>
           </a:p>
@@ -2445,9 +1982,11 @@
           <a:p>
             <a:r>
               <a:rPr lang="en-US" dirty="0"/>
-              <a:t>Related Toolkit Resources
-Tool 1: AI Vision &amp; Principles Workshop (Workshop) - Use AI Vision &amp; Principles Workshop to translate this lesson into a documented public health AI planning, governance,.
-Tool 2: Responsible AI Policy Template (Template) - Use Responsible AI Policy Template to translate this lesson into a documented public health AI planning, governance,.</a:t>
+              <a:t>Module Overview
+Artificial intelligence is a broad family of computational methods that can recognize patterns, generate content, support prediction, retrieve information, or assist with multi-step workflows. In public health, AI is not a single product or a single capability. It may appear inside analytics platforms, dashboards, document tools, translation systems, vendor products, chatbots, surveillance workflows, or administrative systems.
+This module gives you the vocabulary and judgment needed to participate in AI discussions before a tool is selected or a pilot begins. The goal is not to turn every learner into a data scientist. The goal is to help you recognize different kinds of AI, ask the right implementation questions, and understand why governance, privacy, equity, security, and human review are necessary.
+You should use this module before completing the readiness assessment, reviewing vendors, prioritizing use cases, or participating in governance discussions. A shared foundation helps prevent confusion between predictive models, generative tools, retrieval systems, deep research, and agentic workflows.
+Application guidance: Connect the concept to public health purpose, responsible use, required safeguards, documentation, and the next action a department should take.</a:t>
             </a:r>
             <a:endParaRPr lang="en-US" dirty="0"/>
           </a:p>
@@ -2535,13 +2074,13 @@
           <a:p>
             <a:r>
               <a:rPr lang="en-US" dirty="0"/>
-              <a:t>Learning Objectives
-Define the concept in plain language for colleagues, leaders, partners, and community-facing discussions.
-Identify where the concept affects AI planning, governance, procurement, implementation, monitoring, public trust, or public health decision-making.
-Apply the concept to a concrete public health workflow using the linked plays, tools, safeguards, and documentation expectations.
-Complete a practical activity that produces an artifact you can use in readiness assessment, governance review, implementation planning, or monitoring.
-Produce or contribute to: Agency AI vocabulary list.
-Application guidance: Use the assignment to test whether you can explain the concept, apply it to a realistic public health situation, and identify what would need review before the work moves forward.</a:t>
+              <a:t>Definitions
+Artificial intelligence (AI): A broad set of computational methods that can recognize patterns, generate content, support prediction, or assist action toward defined goals.
+Predictive AI: AI that uses data patterns to estimate a future event, risk, classification, or outcome.
+Generative AI: AI that creates new text, images, code, summaries, translations, or other content from prompts and source material.
+Retrieval-augmented generation (RAG): A method that connects a generative AI system to approved source materials so responses can be grounded in specific documents or knowledge bases.
+Deep research: An AI-assisted research workflow that plans searches, reviews sources, synthesizes findings, and produces a structured report for human validation.
+Application guidance: Connect the concept to public health purpose, responsible use, required safeguards, documentation, and the next action a department should take.</a:t>
             </a:r>
             <a:endParaRPr lang="en-US" dirty="0"/>
           </a:p>
@@ -2629,10 +2168,10 @@
           <a:p>
             <a:r>
               <a:rPr lang="en-US" dirty="0"/>
-              <a:t>Learning Objectives
-Produce or contribute to: Initial inventory of known or suspected AI use.
-Produce or contribute to: Draft list of decisions that require human accountability.
-Application guidance: Use the assignment to test whether you can explain the concept, apply it to a realistic public health situation, and identify what would need review before the work moves forward.</a:t>
+              <a:t>Definitions
+Agentic AI: AI that can coordinate multiple steps or actions within defined boundaries, often across tools or systems, while still requiring human oversight.
+Human-in-the-loop: A workflow design in which a qualified person reviews, approves, corrects, or rejects AI outputs before consequential action occurs.
+Application guidance: Connect the concept to public health purpose, responsible use, required safeguards, documentation, and the next action a department should take.</a:t>
             </a:r>
             <a:endParaRPr lang="en-US" dirty="0"/>
           </a:p>
@@ -2720,9 +2259,10 @@
           <a:p>
             <a:r>
               <a:rPr lang="en-US" dirty="0"/>
-              <a:t>Module Overview
-You do not need to become a machine learning engineer to participate in responsible AI planning, but you do need a shared working understanding of what AI is, where it can fail, and what kinds of tasks are appropriate for different AI approaches. This module helps you distinguish pattern recognition, predictive analytics, generative AI, retrieval-augmented generation, and agentic workflows so planning discussions do not treat every AI product as the same kind of intervention. That distinction matters because a tool that drafts a message, a tool that predicts risk, and a tool that routes work across systems require different data protections, review steps, validation methods, and accountability controls.
-Application guidance: Connect the concept to public health purpose, responsible use, required safeguards, documentation, and the next action a department should take.</a:t>
+              <a:t>Jurisdiction and Agency Policy Note
+AI use must be interpreted within your own jurisdiction's legal, policy, privacy, procurement, public records, labor, civil rights, and data governance requirements. A use that is appropriate in one health department may require additional review or may be prohibited in another because of data sensitivity, statutory authority, vendor terms, local policy, or community context.
+If your department already has data governance, technology governance, privacy review, cybersecurity review, records management, procurement, accessibility, equity review, or quality improvement processes, AI governance should leverage those structures whenever possible. The playbook and tools are meant to fill gaps, not replace effective processes that already exist.
+Application guidance: Translate this concept into clear decision rights, review steps, documentation expectations, and escalation paths before an AI-supported workflow is approved.</a:t>
             </a:r>
             <a:endParaRPr lang="en-US" dirty="0"/>
           </a:p>
@@ -2810,12 +2350,9 @@
           <a:p>
             <a:r>
               <a:rPr lang="en-US" dirty="0"/>
-              <a:t>Definitions
-Agentic AI: AI configured to pursue a goal through multiple steps, such as gathering information, drafting a brief, updating a task list, or routing work for review. Agentic AI requires clear boundaries, permissions, monitoring, audit logs, and human approval for consequential actions.
-Artificial intelligence (AI): Computer-based methods that can recognize patterns, generate content, classify information, make predictions, or support action toward a defined goal. In public health, AI should support accountable human work rather than replace public health judgment.
-Deep Research: An agentic research capability that can plan a multi-step search, gather and compare sources, and draft a citation-based synthesis. Deep Research can accelerate evidence scans, policy scans, funding reviews, and comparative program research, but sources and conclusions still require human verification.
-Generative AI: AI that creates new content, such as text, summaries, images, code, translations, or synthetic examples. Generative AI can help draft or summarize materials, but its outputs can be incomplete, biased, fabricated, or out of date.
-Human-in-the-loop: A workflow design in which a person reviews, approves, corrects, or overrides AI outputs before they affect decisions, services, communications, or public health action.
+              <a:t>Public health agencies make decisions that affect communities, services, communications, surveillance, emergency response, and public trust. AI can support that work, but it can also introduce errors, bias, privacy exposure, automation over-trust, or confusion about accountability if it is adopted without a shared understanding.
+AI systems are often described with broad marketing language that hides important differences between tools. A chatbot that drafts plain-language material, a predictive model that estimates outbreak risk, a retrieval system that searches internal policy, and an agentic workflow that creates tasks across systems all require different safeguards.
+Understanding these differences helps you participate in responsible use case selection. It also helps you recognize when a proposed AI use belongs in learning and exploration, when it needs formal governance review, and when it should not proceed.
 Application guidance: Connect the concept to public health purpose, responsible use, required safeguards, documentation, and the next action a department should take.</a:t>
             </a:r>
             <a:endParaRPr lang="en-US" dirty="0"/>
@@ -2904,11 +2441,8 @@
           <a:p>
             <a:r>
               <a:rPr lang="en-US" dirty="0"/>
-              <a:t>Definitions
-Large language model (LLM): A generative AI model trained on large bodies of text to produce, summarize, classify, translate, or transform language. LLM outputs should be reviewed by qualified humans before use in consequential public health work.
-Machine learning: A type of AI that identifies patterns in data and uses those patterns to classify, predict, recommend, or detect unusual activity. Machine learning systems require careful validation because patterns in historical data may not hold in new settings.
-Predictive AI: AI that uses data patterns to estimate future events, risks, needs, trends, or outcomes. Predictive AI can support forecasting, prioritization, anomaly detection, or planning, but its outputs should be validated, monitored, and reviewed by humans before affecting consequential public health actions.
-Retrieval-augmented generation (RAG): A method that connects a generative AI system to selected source documents or databases so responses can be grounded in approved material. RAG can reduce unsupported answers, but users still need source review and quality checks.
+              <a:t>A preparedness team wants to use AI to help summarize after-action reports and identify recurring improvement themes. A generative AI tool might draft summaries from approved documents, while a retrieval system could point reviewers back to the relevant source passages. The team would still need a human reviewer to verify accuracy, remove sensitive information, identify local context, and decide which findings should become improvement actions.
+The same workflow could become riskier if staff entered confidential incident details into an unapproved public tool or accepted the summary without checking the source documents. This example shows why the first AI question is not simply whether the tool can produce a useful draft. The first question is whether the workflow, data, review process, and accountability structure are appropriate.
 Application guidance: Connect the concept to public health purpose, responsible use, required safeguards, documentation, and the next action a department should take.</a:t>
             </a:r>
             <a:endParaRPr lang="en-US" dirty="0"/>
@@ -3776,17 +3310,6 @@
             <a:pPr indent="0" marL="0">
               <a:buNone/>
             </a:pPr>
-            <a:r>
-              <a:rPr lang="en-US" sz="3400" b="1" dirty="0">
-                <a:solidFill>
-                  <a:srgbClr val="003A63"/>
-                </a:solidFill>
-                <a:latin typeface="Aptos Display" pitchFamily="34" charset="0"/>
-                <a:ea typeface="Aptos Display" pitchFamily="34" charset="-122"/>
-                <a:cs typeface="Aptos Display" pitchFamily="34" charset="-120"/>
-              </a:rPr>
-              <a:t>Additional Definitions</a:t>
-            </a:r>
             <a:endParaRPr lang="en-US" sz="3400" dirty="0"/>
           </a:p>
         </p:txBody>
@@ -3826,7 +3349,7 @@
                 <a:ea typeface="Aptos" pitchFamily="34" charset="-122"/>
                 <a:cs typeface="Aptos" pitchFamily="34" charset="-120"/>
               </a:rPr>
-              <a:t>• What AI Means for Public Health: Artificial intelligence is a family of.</a:t>
+              <a:t>• AI should be understood as a set of capabilities rather than a single.</a:t>
             </a:r>
             <a:endParaRPr lang="en-US" sz="1920" dirty="0"/>
           </a:p>
@@ -3843,7 +3366,24 @@
                 <a:ea typeface="Aptos" pitchFamily="34" charset="-122"/>
                 <a:cs typeface="Aptos" pitchFamily="34" charset="-120"/>
               </a:rPr>
-              <a:t>• For public health agencies, the most consequential near-term branches are.</a:t>
+              <a:t>• Predictive AI estimates patterns or outcomes, generative AI creates content,.</a:t>
+            </a:r>
+            <a:endParaRPr lang="en-US" sz="1920" dirty="0"/>
+          </a:p>
+          <a:p>
+            <a:pPr indent="0" marL="0">
+              <a:buNone/>
+            </a:pPr>
+            <a:r>
+              <a:rPr lang="en-US" sz="1920" dirty="0">
+                <a:solidFill>
+                  <a:srgbClr val="003A63"/>
+                </a:solidFill>
+                <a:latin typeface="Aptos" pitchFamily="34" charset="0"/>
+                <a:ea typeface="Aptos" pitchFamily="34" charset="-122"/>
+                <a:cs typeface="Aptos" pitchFamily="34" charset="-120"/>
+              </a:rPr>
+              <a:t>• Each capability can be useful, but each creates different risks and review.</a:t>
             </a:r>
             <a:endParaRPr lang="en-US" sz="1920" dirty="0"/>
           </a:p>
@@ -3950,7 +3490,7 @@
                 <a:ea typeface="Aptos" pitchFamily="34" charset="-122"/>
                 <a:cs typeface="Aptos" pitchFamily="34" charset="-120"/>
               </a:rPr>
-              <a:t>What AI Means for Public Health: Artificial intelligence is a family of methods.</a:t>
+              <a:t>AI should be understood as a set of capabilities rather than a single technology.</a:t>
             </a:r>
             <a:endParaRPr lang="en-US" sz="1220" dirty="0"/>
           </a:p>
@@ -4057,7 +3597,7 @@
                 <a:ea typeface="Aptos" pitchFamily="34" charset="-122"/>
                 <a:cs typeface="Aptos" pitchFamily="34" charset="-120"/>
               </a:rPr>
-              <a:t>What AI Means for Public Health: Artificial.</a:t>
+              <a:t>Predictive AI estimates patterns or outcomes,.</a:t>
             </a:r>
             <a:endParaRPr lang="en-US" sz="1140" dirty="0"/>
           </a:p>
@@ -4074,7 +3614,24 @@
                 <a:ea typeface="Aptos" pitchFamily="34" charset="-122"/>
                 <a:cs typeface="Aptos" pitchFamily="34" charset="-120"/>
               </a:rPr>
-              <a:t>For public health agencies, the most consequential.</a:t>
+              <a:t>The public health workflow matters as much as the.</a:t>
+            </a:r>
+            <a:endParaRPr lang="en-US" sz="1140" dirty="0"/>
+          </a:p>
+          <a:p>
+            <a:pPr indent="0" marL="0">
+              <a:buNone/>
+            </a:pPr>
+            <a:r>
+              <a:rPr lang="en-US" sz="1140" dirty="0">
+                <a:solidFill>
+                  <a:srgbClr val="17364A"/>
+                </a:solidFill>
+                <a:latin typeface="Aptos" pitchFamily="34" charset="0"/>
+                <a:ea typeface="Aptos" pitchFamily="34" charset="-122"/>
+                <a:cs typeface="Aptos" pitchFamily="34" charset="-120"/>
+              </a:rPr>
+              <a:t>A low-risk drafting task using public information.</a:t>
             </a:r>
             <a:endParaRPr lang="en-US" sz="1140" dirty="0"/>
           </a:p>
@@ -4460,7 +4017,7 @@
                 <a:ea typeface="Aptos Display" pitchFamily="34" charset="-122"/>
                 <a:cs typeface="Aptos Display" pitchFamily="34" charset="-120"/>
               </a:rPr>
-              <a:t>Lesson Context</a:t>
+              <a:t> Continued</a:t>
             </a:r>
             <a:endParaRPr lang="en-US" sz="3400" dirty="0"/>
           </a:p>
@@ -4501,7 +4058,7 @@
                 <a:ea typeface="Aptos" pitchFamily="34" charset="-122"/>
                 <a:cs typeface="Aptos" pitchFamily="34" charset="-120"/>
               </a:rPr>
-              <a:t>• Artificial intelligence should be introduced as a set of capabilities rather.</a:t>
+              <a:t>• Deep research tools deserve special attention because they can look like.</a:t>
             </a:r>
             <a:endParaRPr lang="en-US" sz="1920" dirty="0"/>
           </a:p>
@@ -4518,24 +4075,7 @@
                 <a:ea typeface="Aptos" pitchFamily="34" charset="-122"/>
                 <a:cs typeface="Aptos" pitchFamily="34" charset="-120"/>
               </a:rPr>
-              <a:t>• In public health, AI may appear as predictive analytics, classification,.</a:t>
-            </a:r>
-            <a:endParaRPr lang="en-US" sz="1920" dirty="0"/>
-          </a:p>
-          <a:p>
-            <a:pPr indent="0" marL="0">
-              <a:buNone/>
-            </a:pPr>
-            <a:r>
-              <a:rPr lang="en-US" sz="1920" dirty="0">
-                <a:solidFill>
-                  <a:srgbClr val="003A63"/>
-                </a:solidFill>
-                <a:latin typeface="Aptos" pitchFamily="34" charset="0"/>
-                <a:ea typeface="Aptos" pitchFamily="34" charset="-122"/>
-                <a:cs typeface="Aptos" pitchFamily="34" charset="-120"/>
-              </a:rPr>
-              <a:t>• You need to recognize these differences because each capability has.</a:t>
+              <a:t>• They may be useful for finding, organizing, and summarizing sources, but the.</a:t>
             </a:r>
             <a:endParaRPr lang="en-US" sz="1920" dirty="0"/>
           </a:p>
@@ -4642,7 +4182,7 @@
                 <a:ea typeface="Aptos" pitchFamily="34" charset="-122"/>
                 <a:cs typeface="Aptos" pitchFamily="34" charset="-120"/>
               </a:rPr>
-              <a:t>Artificial intelligence should be introduced as a set of capabilities rather.</a:t>
+              <a:t>Deep research tools deserve special attention because they can look like expert.</a:t>
             </a:r>
             <a:endParaRPr lang="en-US" sz="1220" dirty="0"/>
           </a:p>
@@ -4749,7 +4289,7 @@
                 <a:ea typeface="Aptos" pitchFamily="34" charset="-122"/>
                 <a:cs typeface="Aptos" pitchFamily="34" charset="-120"/>
               </a:rPr>
-              <a:t>In public health, AI may appear as predictive.</a:t>
+              <a:t>Deep research tools deserve special attention.</a:t>
             </a:r>
             <a:endParaRPr lang="en-US" sz="1140" dirty="0"/>
           </a:p>
@@ -4766,24 +4306,7 @@
                 <a:ea typeface="Aptos" pitchFamily="34" charset="-122"/>
                 <a:cs typeface="Aptos" pitchFamily="34" charset="-120"/>
               </a:rPr>
-              <a:t>You need to recognize these differences because.</a:t>
-            </a:r>
-            <a:endParaRPr lang="en-US" sz="1140" dirty="0"/>
-          </a:p>
-          <a:p>
-            <a:pPr indent="0" marL="0">
-              <a:buNone/>
-            </a:pPr>
-            <a:r>
-              <a:rPr lang="en-US" sz="1140" dirty="0">
-                <a:solidFill>
-                  <a:srgbClr val="17364A"/>
-                </a:solidFill>
-                <a:latin typeface="Aptos" pitchFamily="34" charset="0"/>
-                <a:ea typeface="Aptos" pitchFamily="34" charset="-122"/>
-                <a:cs typeface="Aptos" pitchFamily="34" charset="-120"/>
-              </a:rPr>
-              <a:t>A shared foundation also helps departments avoid.</a:t>
+              <a:t>They may be useful for finding, organizing, and.</a:t>
             </a:r>
             <a:endParaRPr lang="en-US" sz="1140" dirty="0"/>
           </a:p>
@@ -5160,17 +4683,6 @@
             <a:pPr indent="0" marL="0">
               <a:buNone/>
             </a:pPr>
-            <a:r>
-              <a:rPr lang="en-US" sz="3400" b="1" dirty="0">
-                <a:solidFill>
-                  <a:srgbClr val="003A63"/>
-                </a:solidFill>
-                <a:latin typeface="Aptos Display" pitchFamily="34" charset="0"/>
-                <a:ea typeface="Aptos Display" pitchFamily="34" charset="-122"/>
-                <a:cs typeface="Aptos Display" pitchFamily="34" charset="-120"/>
-              </a:rPr>
-              <a:t>Foundational concepts</a:t>
-            </a:r>
             <a:endParaRPr lang="en-US" sz="3400" dirty="0"/>
           </a:p>
         </p:txBody>
@@ -5210,7 +4722,7 @@
                 <a:ea typeface="Aptos" pitchFamily="34" charset="-122"/>
                 <a:cs typeface="Aptos" pitchFamily="34" charset="-120"/>
               </a:rPr>
-              <a:t>• AI is not one technology or one product category. In public health, the word.</a:t>
+              <a:t>• AI systems can generate inaccurate, incomplete, biased, outdated, or.</a:t>
             </a:r>
             <a:endParaRPr lang="en-US" sz="1920" dirty="0"/>
           </a:p>
@@ -5227,7 +4739,7 @@
                 <a:ea typeface="Aptos" pitchFamily="34" charset="-122"/>
                 <a:cs typeface="Aptos" pitchFamily="34" charset="-120"/>
               </a:rPr>
-              <a:t>• Generative AI produces new content from prompts and source material. It can.</a:t>
+              <a:t>• Generative tools can hallucinate.</a:t>
             </a:r>
             <a:endParaRPr lang="en-US" sz="1920" dirty="0"/>
           </a:p>
@@ -5244,7 +4756,7 @@
                 <a:ea typeface="Aptos" pitchFamily="34" charset="-122"/>
                 <a:cs typeface="Aptos" pitchFamily="34" charset="-120"/>
               </a:rPr>
-              <a:t>• Agentic AI can coordinate a sequence of actions across systems under defined.</a:t>
+              <a:t>• Predictive tools can perform poorly for underrepresented groups.</a:t>
             </a:r>
             <a:endParaRPr lang="en-US" sz="1920" dirty="0"/>
           </a:p>
@@ -5351,7 +4863,7 @@
                 <a:ea typeface="Aptos" pitchFamily="34" charset="-122"/>
                 <a:cs typeface="Aptos" pitchFamily="34" charset="-120"/>
               </a:rPr>
-              <a:t>AI is not one technology or one product category. In public health, the word AI.</a:t>
+              <a:t>AI systems can generate inaccurate, incomplete, biased, outdated, or misleading.</a:t>
             </a:r>
             <a:endParaRPr lang="en-US" sz="1220" dirty="0"/>
           </a:p>
@@ -5458,7 +4970,7 @@
                 <a:ea typeface="Aptos" pitchFamily="34" charset="-122"/>
                 <a:cs typeface="Aptos" pitchFamily="34" charset="-120"/>
               </a:rPr>
-              <a:t>AI is not one technology or one product category.</a:t>
+              <a:t>Agentic systems can take inappropriate actions if.</a:t>
             </a:r>
             <a:endParaRPr lang="en-US" sz="1140" dirty="0"/>
           </a:p>
@@ -5475,7 +4987,7 @@
                 <a:ea typeface="Aptos" pitchFamily="34" charset="-122"/>
                 <a:cs typeface="Aptos" pitchFamily="34" charset="-120"/>
               </a:rPr>
-              <a:t>In public health, the word AI may refer to.</a:t>
+              <a:t>Public health data can be sensitive even when it.</a:t>
             </a:r>
             <a:endParaRPr lang="en-US" sz="1140" dirty="0"/>
           </a:p>
@@ -5492,7 +5004,7 @@
                 <a:ea typeface="Aptos" pitchFamily="34" charset="-122"/>
                 <a:cs typeface="Aptos" pitchFamily="34" charset="-120"/>
               </a:rPr>
-              <a:t>Treating these as interchangeable can lead to poor.</a:t>
+              <a:t>Records may include small populations, geographic.</a:t>
             </a:r>
             <a:endParaRPr lang="en-US" sz="1140" dirty="0"/>
           </a:p>
@@ -5869,17 +5381,6 @@
             <a:pPr indent="0" marL="0">
               <a:buNone/>
             </a:pPr>
-            <a:r>
-              <a:rPr lang="en-US" sz="3400" b="1" dirty="0">
-                <a:solidFill>
-                  <a:srgbClr val="003A63"/>
-                </a:solidFill>
-                <a:latin typeface="Aptos Display" pitchFamily="34" charset="0"/>
-                <a:ea typeface="Aptos Display" pitchFamily="34" charset="-122"/>
-                <a:cs typeface="Aptos Display" pitchFamily="34" charset="-120"/>
-              </a:rPr>
-              <a:t>Core Concepts</a:t>
-            </a:r>
             <a:endParaRPr lang="en-US" sz="3400" dirty="0"/>
           </a:p>
         </p:txBody>
@@ -5919,7 +5420,7 @@
                 <a:ea typeface="Aptos" pitchFamily="34" charset="-122"/>
                 <a:cs typeface="Aptos" pitchFamily="34" charset="-120"/>
               </a:rPr>
-              <a:t>• Artificial intelligence is best understood as a family of capabilities.</a:t>
+              <a:t>• When you encounter a proposed AI use, start by describing the public health.</a:t>
             </a:r>
             <a:endParaRPr lang="en-US" sz="1920" dirty="0"/>
           </a:p>
@@ -5936,7 +5437,7 @@
                 <a:ea typeface="Aptos" pitchFamily="34" charset="-122"/>
                 <a:cs typeface="Aptos" pitchFamily="34" charset="-120"/>
               </a:rPr>
-              <a:t>• Some AI systems classify records, some detect patterns, some predict.</a:t>
+              <a:t>• Identify the problem, the current workflow, the proposed AI-supported step,.</a:t>
             </a:r>
             <a:endParaRPr lang="en-US" sz="1920" dirty="0"/>
           </a:p>
@@ -5953,7 +5454,7 @@
                 <a:ea typeface="Aptos" pitchFamily="34" charset="-122"/>
                 <a:cs typeface="Aptos" pitchFamily="34" charset="-120"/>
               </a:rPr>
-              <a:t>• This distinction matters because each capability has different data.</a:t>
+              <a:t>• Next, decide what type of AI is being proposed.</a:t>
             </a:r>
             <a:endParaRPr lang="en-US" sz="1920" dirty="0"/>
           </a:p>
@@ -6060,7 +5561,7 @@
                 <a:ea typeface="Aptos" pitchFamily="34" charset="-122"/>
                 <a:cs typeface="Aptos" pitchFamily="34" charset="-120"/>
               </a:rPr>
-              <a:t>Artificial intelligence is best understood as a family of capabilities rather.</a:t>
+              <a:t>When you encounter a proposed AI use, start by describing the public health task.</a:t>
             </a:r>
             <a:endParaRPr lang="en-US" sz="1220" dirty="0"/>
           </a:p>
@@ -6167,7 +5668,7 @@
                 <a:ea typeface="Aptos" pitchFamily="34" charset="-122"/>
                 <a:cs typeface="Aptos" pitchFamily="34" charset="-120"/>
               </a:rPr>
-              <a:t>Some AI systems classify records, some detect.</a:t>
+              <a:t>Identify the problem, the current workflow, the.</a:t>
             </a:r>
             <a:endParaRPr lang="en-US" sz="1140" dirty="0"/>
           </a:p>
@@ -6184,7 +5685,7 @@
                 <a:ea typeface="Aptos" pitchFamily="34" charset="-122"/>
                 <a:cs typeface="Aptos" pitchFamily="34" charset="-120"/>
               </a:rPr>
-              <a:t>This distinction matters because each capability.</a:t>
+              <a:t>Predictive, generative, retrieval, deep research,.</a:t>
             </a:r>
             <a:endParaRPr lang="en-US" sz="1140" dirty="0"/>
           </a:p>
@@ -6201,7 +5702,7 @@
                 <a:ea typeface="Aptos" pitchFamily="34" charset="-122"/>
                 <a:cs typeface="Aptos" pitchFamily="34" charset="-120"/>
               </a:rPr>
-              <a:t>A responsible public health discussion starts by.</a:t>
+              <a:t>The review pathway should match the risk, data.</a:t>
             </a:r>
             <a:endParaRPr lang="en-US" sz="1140" dirty="0"/>
           </a:p>
@@ -6578,17 +6079,6 @@
             <a:pPr indent="0" marL="0">
               <a:buNone/>
             </a:pPr>
-            <a:r>
-              <a:rPr lang="en-US" sz="3400" b="1" dirty="0">
-                <a:solidFill>
-                  <a:srgbClr val="003A63"/>
-                </a:solidFill>
-                <a:latin typeface="Aptos Display" pitchFamily="34" charset="0"/>
-                <a:ea typeface="Aptos Display" pitchFamily="34" charset="-122"/>
-                <a:cs typeface="Aptos Display" pitchFamily="34" charset="-120"/>
-              </a:rPr>
-              <a:t>Core Concepts Continued</a:t>
-            </a:r>
             <a:endParaRPr lang="en-US" sz="3400" dirty="0"/>
           </a:p>
         </p:txBody>
@@ -6628,7 +6118,7 @@
                 <a:ea typeface="Aptos" pitchFamily="34" charset="-122"/>
                 <a:cs typeface="Aptos" pitchFamily="34" charset="-120"/>
               </a:rPr>
-              <a:t>• Retrieval-augmented generation combines generative AI with a defined set of.</a:t>
+              <a:t>• What AI tools or AI-enabled features are already being used informally in.</a:t>
             </a:r>
             <a:endParaRPr lang="en-US" sz="1920" dirty="0"/>
           </a:p>
@@ -6645,7 +6135,7 @@
                 <a:ea typeface="Aptos" pitchFamily="34" charset="-122"/>
                 <a:cs typeface="Aptos" pitchFamily="34" charset="-120"/>
               </a:rPr>
-              <a:t>• Instead of relying only on a model's general training, the system retrieves.</a:t>
+              <a:t>• Which public health workflows in your area involve drafting, summarizing,.</a:t>
             </a:r>
             <a:endParaRPr lang="en-US" sz="1920" dirty="0"/>
           </a:p>
@@ -6662,7 +6152,7 @@
                 <a:ea typeface="Aptos" pitchFamily="34" charset="-122"/>
                 <a:cs typeface="Aptos" pitchFamily="34" charset="-120"/>
               </a:rPr>
-              <a:t>• This approach can be useful for policy summaries, inspection documentation,.</a:t>
+              <a:t>• What information should never be entered into an unapproved AI tool in your.</a:t>
             </a:r>
             <a:endParaRPr lang="en-US" sz="1920" dirty="0"/>
           </a:p>
@@ -6769,7 +6259,7 @@
                 <a:ea typeface="Aptos" pitchFamily="34" charset="-122"/>
                 <a:cs typeface="Aptos" pitchFamily="34" charset="-120"/>
               </a:rPr>
-              <a:t>Retrieval-augmented generation combines generative AI with a defined set of.</a:t>
+              <a:t>What AI tools or AI-enabled features are already being used informally in your.</a:t>
             </a:r>
             <a:endParaRPr lang="en-US" sz="1220" dirty="0"/>
           </a:p>
@@ -6876,7 +6366,7 @@
                 <a:ea typeface="Aptos" pitchFamily="34" charset="-122"/>
                 <a:cs typeface="Aptos" pitchFamily="34" charset="-120"/>
               </a:rPr>
-              <a:t>Instead of relying only on a model's general.</a:t>
+              <a:t>What AI tools or AI-enabled features are already.</a:t>
             </a:r>
             <a:endParaRPr lang="en-US" sz="1140" dirty="0"/>
           </a:p>
@@ -6893,7 +6383,7 @@
                 <a:ea typeface="Aptos" pitchFamily="34" charset="-122"/>
                 <a:cs typeface="Aptos" pitchFamily="34" charset="-120"/>
               </a:rPr>
-              <a:t>This approach can be useful for policy summaries,.</a:t>
+              <a:t>Which public health workflows in your area involve.</a:t>
             </a:r>
             <a:endParaRPr lang="en-US" sz="1140" dirty="0"/>
           </a:p>
@@ -6910,7 +6400,7 @@
                 <a:ea typeface="Aptos" pitchFamily="34" charset="-122"/>
                 <a:cs typeface="Aptos" pitchFamily="34" charset="-120"/>
               </a:rPr>
-              <a:t>It still requires review because retrieval can.</a:t>
+              <a:t>What information should never be entered into an.</a:t>
             </a:r>
             <a:endParaRPr lang="en-US" sz="1140" dirty="0"/>
           </a:p>
@@ -7296,7 +6786,7 @@
                 <a:ea typeface="Aptos Display" pitchFamily="34" charset="-122"/>
                 <a:cs typeface="Aptos Display" pitchFamily="34" charset="-120"/>
               </a:rPr>
-              <a:t>Public Health Application</a:t>
+              <a:t> Continued</a:t>
             </a:r>
             <a:endParaRPr lang="en-US" sz="3400" dirty="0"/>
           </a:p>
@@ -7337,7 +6827,7 @@
                 <a:ea typeface="Aptos" pitchFamily="34" charset="-122"/>
                 <a:cs typeface="Aptos" pitchFamily="34" charset="-120"/>
               </a:rPr>
-              <a:t>• Use these AI concepts to identify where AI may already be present in your.</a:t>
+              <a:t>• Who would need to review an AI output before it influenced communication,.</a:t>
             </a:r>
             <a:endParaRPr lang="en-US" sz="1920" dirty="0"/>
           </a:p>
@@ -7354,24 +6844,7 @@
                 <a:ea typeface="Aptos" pitchFamily="34" charset="-122"/>
                 <a:cs typeface="Aptos" pitchFamily="34" charset="-120"/>
               </a:rPr>
-              <a:t>• Informal use can include staff drafting emails or public messages with.</a:t>
-            </a:r>
-            <a:endParaRPr lang="en-US" sz="1920" dirty="0"/>
-          </a:p>
-          <a:p>
-            <a:pPr indent="0" marL="0">
-              <a:buNone/>
-            </a:pPr>
-            <a:r>
-              <a:rPr lang="en-US" sz="1920" dirty="0">
-                <a:solidFill>
-                  <a:srgbClr val="003A63"/>
-                </a:solidFill>
-                <a:latin typeface="Aptos" pitchFamily="34" charset="0"/>
-                <a:ea typeface="Aptos" pitchFamily="34" charset="-122"/>
-                <a:cs typeface="Aptos" pitchFamily="34" charset="-120"/>
-              </a:rPr>
-              <a:t>• An early inventory does not need to be punitive.</a:t>
+              <a:t>• What existing governance, privacy, security, procurement, or equity review.</a:t>
             </a:r>
             <a:endParaRPr lang="en-US" sz="1920" dirty="0"/>
           </a:p>
@@ -7478,7 +6951,7 @@
                 <a:ea typeface="Aptos" pitchFamily="34" charset="-122"/>
                 <a:cs typeface="Aptos" pitchFamily="34" charset="-120"/>
               </a:rPr>
-              <a:t>Use these AI concepts to identify where AI may already be present in your.</a:t>
+              <a:t>Who would need to review an AI output before it influenced communication,.</a:t>
             </a:r>
             <a:endParaRPr lang="en-US" sz="1220" dirty="0"/>
           </a:p>
@@ -7585,7 +7058,7 @@
                 <a:ea typeface="Aptos" pitchFamily="34" charset="-122"/>
                 <a:cs typeface="Aptos" pitchFamily="34" charset="-120"/>
               </a:rPr>
-              <a:t>Informal use can include staff drafting emails or.</a:t>
+              <a:t>Who would need to review an AI output before it.</a:t>
             </a:r>
             <a:endParaRPr lang="en-US" sz="1140" dirty="0"/>
           </a:p>
@@ -7602,24 +7075,7 @@
                 <a:ea typeface="Aptos" pitchFamily="34" charset="-122"/>
                 <a:cs typeface="Aptos" pitchFamily="34" charset="-120"/>
               </a:rPr>
-              <a:t>Its purpose is to understand what is already.</a:t>
-            </a:r>
-            <a:endParaRPr lang="en-US" sz="1140" dirty="0"/>
-          </a:p>
-          <a:p>
-            <a:pPr indent="0" marL="0">
-              <a:buNone/>
-            </a:pPr>
-            <a:r>
-              <a:rPr lang="en-US" sz="1140" dirty="0">
-                <a:solidFill>
-                  <a:srgbClr val="17364A"/>
-                </a:solidFill>
-                <a:latin typeface="Aptos" pitchFamily="34" charset="0"/>
-                <a:ea typeface="Aptos" pitchFamily="34" charset="-122"/>
-                <a:cs typeface="Aptos" pitchFamily="34" charset="-120"/>
-              </a:rPr>
-              <a:t>A common vocabulary helps different roles evaluate.</a:t>
+              <a:t>What existing governance, privacy, security,.</a:t>
             </a:r>
             <a:endParaRPr lang="en-US" sz="1140" dirty="0"/>
           </a:p>
@@ -7996,17 +7452,6 @@
             <a:pPr indent="0" marL="0">
               <a:buNone/>
             </a:pPr>
-            <a:r>
-              <a:rPr lang="en-US" sz="3400" b="1" dirty="0">
-                <a:solidFill>
-                  <a:srgbClr val="003A63"/>
-                </a:solidFill>
-                <a:latin typeface="Aptos Display" pitchFamily="34" charset="0"/>
-                <a:ea typeface="Aptos Display" pitchFamily="34" charset="-122"/>
-                <a:cs typeface="Aptos Display" pitchFamily="34" charset="-120"/>
-              </a:rPr>
-              <a:t>Implementation Check</a:t>
-            </a:r>
             <a:endParaRPr lang="en-US" sz="3400" dirty="0"/>
           </a:p>
         </p:txBody>
@@ -8046,7 +7491,7 @@
                 <a:ea typeface="Aptos" pitchFamily="34" charset="-122"/>
                 <a:cs typeface="Aptos" pitchFamily="34" charset="-120"/>
               </a:rPr>
-              <a:t>• Before any AI project begins, confirm the purpose of the use, the data.</a:t>
+              <a:t>• Choose one public health workflow where AI might be proposed.</a:t>
             </a:r>
             <a:endParaRPr lang="en-US" sz="1920" dirty="0"/>
           </a:p>
@@ -8063,7 +7508,7 @@
                 <a:ea typeface="Aptos" pitchFamily="34" charset="-122"/>
                 <a:cs typeface="Aptos" pitchFamily="34" charset="-120"/>
               </a:rPr>
-              <a:t>• These questions should be answered before procurement, pilot approval, or.</a:t>
+              <a:t>• Write a short description of the current workflow, the AI-supported step,.</a:t>
             </a:r>
             <a:endParaRPr lang="en-US" sz="1920" dirty="0"/>
           </a:p>
@@ -8080,7 +7525,7 @@
                 <a:ea typeface="Aptos" pitchFamily="34" charset="-122"/>
                 <a:cs typeface="Aptos" pitchFamily="34" charset="-120"/>
               </a:rPr>
-              <a:t>• If the department cannot explain what the AI will do and how people will.</a:t>
+              <a:t>• Then identify at least three safeguards that would be needed before the.</a:t>
             </a:r>
             <a:endParaRPr lang="en-US" sz="1920" dirty="0"/>
           </a:p>
@@ -8146,7 +7591,7 @@
                 <a:ea typeface="Aptos" pitchFamily="34" charset="-122"/>
                 <a:cs typeface="Aptos" pitchFamily="34" charset="-120"/>
               </a:rPr>
-              <a:t>Implementation cue</a:t>
+              <a:t>Core concept</a:t>
             </a:r>
             <a:endParaRPr lang="en-US" sz="1220" dirty="0"/>
           </a:p>
@@ -8187,7 +7632,7 @@
                 <a:ea typeface="Aptos" pitchFamily="34" charset="-122"/>
                 <a:cs typeface="Aptos" pitchFamily="34" charset="-120"/>
               </a:rPr>
-              <a:t>Before any AI project begins, confirm the purpose of the use, the data involved,.</a:t>
+              <a:t>Choose one public health workflow where AI might be proposed.</a:t>
             </a:r>
             <a:endParaRPr lang="en-US" sz="1220" dirty="0"/>
           </a:p>
@@ -8294,7 +7739,7 @@
                 <a:ea typeface="Aptos" pitchFamily="34" charset="-122"/>
                 <a:cs typeface="Aptos" pitchFamily="34" charset="-120"/>
               </a:rPr>
-              <a:t>Before any AI project begins, confirm the purpose.</a:t>
+              <a:t>Write a short description of the current workflow,.</a:t>
             </a:r>
             <a:endParaRPr lang="en-US" sz="1140" dirty="0"/>
           </a:p>
@@ -8311,7 +7756,7 @@
                 <a:ea typeface="Aptos" pitchFamily="34" charset="-122"/>
                 <a:cs typeface="Aptos" pitchFamily="34" charset="-120"/>
               </a:rPr>
-              <a:t>If the department cannot explain what the AI will.</a:t>
+              <a:t>Then identify at least three safeguards that would.</a:t>
             </a:r>
             <a:endParaRPr lang="en-US" sz="1140" dirty="0"/>
           </a:p>
@@ -8328,7 +7773,7 @@
                 <a:ea typeface="Aptos" pitchFamily="34" charset="-122"/>
                 <a:cs typeface="Aptos" pitchFamily="34" charset="-120"/>
               </a:rPr>
-              <a:t>Document what the AI is allowed to do and what.</a:t>
+              <a:t>Your safeguards should address human review, data.</a:t>
             </a:r>
             <a:endParaRPr lang="en-US" sz="1140" dirty="0"/>
           </a:p>
@@ -8394,7 +7839,7 @@
                 <a:ea typeface="Aptos" pitchFamily="34" charset="-122"/>
                 <a:cs typeface="Aptos" pitchFamily="34" charset="-120"/>
               </a:rPr>
-              <a:t>Next action</a:t>
+              <a:t>Apply it</a:t>
             </a:r>
             <a:endParaRPr lang="en-US" sz="1220" dirty="0"/>
           </a:p>
@@ -8435,7 +7880,7 @@
                 <a:ea typeface="Aptos" pitchFamily="34" charset="-122"/>
                 <a:cs typeface="Aptos" pitchFamily="34" charset="-120"/>
               </a:rPr>
-              <a:t>Use the concept to clarify workflow changes, dependencies, staffing, procurement.</a:t>
+              <a:t>Connect the concept to public health purpose, responsible use, required.</a:t>
             </a:r>
             <a:endParaRPr lang="en-US" sz="1220" dirty="0"/>
           </a:p>
@@ -8705,17 +8150,6 @@
             <a:pPr indent="0" marL="0">
               <a:buNone/>
             </a:pPr>
-            <a:r>
-              <a:rPr lang="en-US" sz="3400" b="1" dirty="0">
-                <a:solidFill>
-                  <a:srgbClr val="003A63"/>
-                </a:solidFill>
-                <a:latin typeface="Aptos Display" pitchFamily="34" charset="0"/>
-                <a:ea typeface="Aptos Display" pitchFamily="34" charset="-122"/>
-                <a:cs typeface="Aptos Display" pitchFamily="34" charset="-120"/>
-              </a:rPr>
-              <a:t>Why This Comes First</a:t>
-            </a:r>
             <a:endParaRPr lang="en-US" sz="3400" dirty="0"/>
           </a:p>
         </p:txBody>
@@ -8755,7 +8189,7 @@
                 <a:ea typeface="Aptos" pitchFamily="34" charset="-122"/>
                 <a:cs typeface="Aptos" pitchFamily="34" charset="-120"/>
               </a:rPr>
-              <a:t>• Understanding what these systems can and cannot do is the starting point for.</a:t>
+              <a:t>• Upload or paste a one- to two-page AI workflow concept note.</a:t>
             </a:r>
             <a:endParaRPr lang="en-US" sz="1920" dirty="0"/>
           </a:p>
@@ -8772,7 +8206,24 @@
                 <a:ea typeface="Aptos" pitchFamily="34" charset="-122"/>
                 <a:cs typeface="Aptos" pitchFamily="34" charset="-120"/>
               </a:rPr>
-              <a:t>• Agencies need a shared vocabulary before they can set guardrails, evaluate.</a:t>
+              <a:t>• The concept note should identify the proposed AI type, workflow step, data.</a:t>
+            </a:r>
+            <a:endParaRPr lang="en-US" sz="1920" dirty="0"/>
+          </a:p>
+          <a:p>
+            <a:pPr indent="0" marL="0">
+              <a:buNone/>
+            </a:pPr>
+            <a:r>
+              <a:rPr lang="en-US" sz="1920" dirty="0">
+                <a:solidFill>
+                  <a:srgbClr val="003A63"/>
+                </a:solidFill>
+                <a:latin typeface="Aptos" pitchFamily="34" charset="0"/>
+                <a:ea typeface="Aptos" pitchFamily="34" charset="-122"/>
+                <a:cs typeface="Aptos" pitchFamily="34" charset="-120"/>
+              </a:rPr>
+              <a:t>• It should also list the governance, privacy, equity, security, procurement,.</a:t>
             </a:r>
             <a:endParaRPr lang="en-US" sz="1920" dirty="0"/>
           </a:p>
@@ -8879,7 +8330,7 @@
                 <a:ea typeface="Aptos" pitchFamily="34" charset="-122"/>
                 <a:cs typeface="Aptos" pitchFamily="34" charset="-120"/>
               </a:rPr>
-              <a:t>Understanding what these systems can and cannot do is the starting point for.</a:t>
+              <a:t>Upload or paste a one- to two-page AI workflow concept note.</a:t>
             </a:r>
             <a:endParaRPr lang="en-US" sz="1220" dirty="0"/>
           </a:p>
@@ -8986,7 +8437,7 @@
                 <a:ea typeface="Aptos" pitchFamily="34" charset="-122"/>
                 <a:cs typeface="Aptos" pitchFamily="34" charset="-120"/>
               </a:rPr>
-              <a:t>Understanding what these systems can and cannot do.</a:t>
+              <a:t>The concept note should identify the proposed AI.</a:t>
             </a:r>
             <a:endParaRPr lang="en-US" sz="1140" dirty="0"/>
           </a:p>
@@ -9003,7 +8454,7 @@
                 <a:ea typeface="Aptos" pitchFamily="34" charset="-122"/>
                 <a:cs typeface="Aptos" pitchFamily="34" charset="-120"/>
               </a:rPr>
-              <a:t>Agencies need a shared vocabulary before they can.</a:t>
+              <a:t>It should also list the governance, privacy,.</a:t>
             </a:r>
             <a:endParaRPr lang="en-US" sz="1140" dirty="0"/>
           </a:p>
@@ -9389,7 +8840,7 @@
                 <a:ea typeface="Aptos Display" pitchFamily="34" charset="-122"/>
                 <a:cs typeface="Aptos Display" pitchFamily="34" charset="-120"/>
               </a:rPr>
-              <a:t>Deep Research</a:t>
+              <a:t> Continued</a:t>
             </a:r>
             <a:endParaRPr lang="en-US" sz="3400" dirty="0"/>
           </a:p>
@@ -9430,24 +8881,7 @@
                 <a:ea typeface="Aptos" pitchFamily="34" charset="-122"/>
                 <a:cs typeface="Aptos" pitchFamily="34" charset="-120"/>
               </a:rPr>
-              <a:t>• Deep Research is an agentic research capability that can plan a multi-step.</a:t>
-            </a:r>
-            <a:endParaRPr lang="en-US" sz="1920" dirty="0"/>
-          </a:p>
-          <a:p>
-            <a:pPr indent="0" marL="0">
-              <a:buNone/>
-            </a:pPr>
-            <a:r>
-              <a:rPr lang="en-US" sz="1920" dirty="0">
-                <a:solidFill>
-                  <a:srgbClr val="003A63"/>
-                </a:solidFill>
-                <a:latin typeface="Aptos" pitchFamily="34" charset="0"/>
-                <a:ea typeface="Aptos" pitchFamily="34" charset="-122"/>
-                <a:cs typeface="Aptos" pitchFamily="34" charset="-120"/>
-              </a:rPr>
-              <a:t>• It can help with literature scans, policy scans, funding reviews, and.</a:t>
+              <a:t>• Use AI-assisted feedback to help you identify strengths, missing elements,.</a:t>
             </a:r>
             <a:endParaRPr lang="en-US" sz="1920" dirty="0"/>
           </a:p>
@@ -9554,7 +8988,7 @@
                 <a:ea typeface="Aptos" pitchFamily="34" charset="-122"/>
                 <a:cs typeface="Aptos" pitchFamily="34" charset="-120"/>
               </a:rPr>
-              <a:t>Deep Research is an agentic research capability that can plan a multi-step.</a:t>
+              <a:t>Use AI-assisted feedback to help you identify strengths, missing elements,.</a:t>
             </a:r>
             <a:endParaRPr lang="en-US" sz="1220" dirty="0"/>
           </a:p>
@@ -9661,24 +9095,7 @@
                 <a:ea typeface="Aptos" pitchFamily="34" charset="-122"/>
                 <a:cs typeface="Aptos" pitchFamily="34" charset="-120"/>
               </a:rPr>
-              <a:t>Deep Research is an agentic research capability.</a:t>
-            </a:r>
-            <a:endParaRPr lang="en-US" sz="1140" dirty="0"/>
-          </a:p>
-          <a:p>
-            <a:pPr indent="0" marL="0">
-              <a:buNone/>
-            </a:pPr>
-            <a:r>
-              <a:rPr lang="en-US" sz="1140" dirty="0">
-                <a:solidFill>
-                  <a:srgbClr val="17364A"/>
-                </a:solidFill>
-                <a:latin typeface="Aptos" pitchFamily="34" charset="0"/>
-                <a:ea typeface="Aptos" pitchFamily="34" charset="-122"/>
-                <a:cs typeface="Aptos" pitchFamily="34" charset="-120"/>
-              </a:rPr>
-              <a:t>It can help with literature scans, policy scans,.</a:t>
+              <a:t>Use AI-assisted feedback to help you identify.</a:t>
             </a:r>
             <a:endParaRPr lang="en-US" sz="1140" dirty="0"/>
           </a:p>
@@ -10064,7 +9481,7 @@
                 <a:ea typeface="Aptos Display" pitchFamily="34" charset="-122"/>
                 <a:cs typeface="Aptos Display" pitchFamily="34" charset="-120"/>
               </a:rPr>
-              <a:t>How to Apply This Module</a:t>
+              <a:t>Expected Assignment</a:t>
             </a:r>
             <a:endParaRPr lang="en-US" sz="3400" dirty="0"/>
           </a:p>
@@ -10105,7 +9522,7 @@
                 <a:ea typeface="Aptos" pitchFamily="34" charset="-122"/>
                 <a:cs typeface="Aptos" pitchFamily="34" charset="-120"/>
               </a:rPr>
-              <a:t>• Use the linked plays to decide who should be involved, what decisions need.</a:t>
+              <a:t>• A short description of a public health workflow where AI might be used.</a:t>
             </a:r>
             <a:endParaRPr lang="en-US" sz="1920" dirty="0"/>
           </a:p>
@@ -10122,7 +9539,24 @@
                 <a:ea typeface="Aptos" pitchFamily="34" charset="-122"/>
                 <a:cs typeface="Aptos" pitchFamily="34" charset="-120"/>
               </a:rPr>
-              <a:t>• Use the linked tools to turn the concept into an agency artifact that can be.</a:t>
+              <a:t>• A list of the data, users, affected populations, and human decision points.</a:t>
+            </a:r>
+            <a:endParaRPr lang="en-US" sz="1920" dirty="0"/>
+          </a:p>
+          <a:p>
+            <a:pPr indent="0" marL="0">
+              <a:buNone/>
+            </a:pPr>
+            <a:r>
+              <a:rPr lang="en-US" sz="1920" dirty="0">
+                <a:solidFill>
+                  <a:srgbClr val="003A63"/>
+                </a:solidFill>
+                <a:latin typeface="Aptos" pitchFamily="34" charset="0"/>
+                <a:ea typeface="Aptos" pitchFamily="34" charset="-122"/>
+                <a:cs typeface="Aptos" pitchFamily="34" charset="-120"/>
+              </a:rPr>
+              <a:t>• A preliminary note describing why the use case may need governance, privacy,.</a:t>
             </a:r>
             <a:endParaRPr lang="en-US" sz="1920" dirty="0"/>
           </a:p>
@@ -10188,7 +9622,7 @@
                 <a:ea typeface="Aptos" pitchFamily="34" charset="-122"/>
                 <a:cs typeface="Aptos" pitchFamily="34" charset="-120"/>
               </a:rPr>
-              <a:t>Core concept</a:t>
+              <a:t>Practice focus</a:t>
             </a:r>
             <a:endParaRPr lang="en-US" sz="1220" dirty="0"/>
           </a:p>
@@ -10229,7 +9663,7 @@
                 <a:ea typeface="Aptos" pitchFamily="34" charset="-122"/>
                 <a:cs typeface="Aptos" pitchFamily="34" charset="-120"/>
               </a:rPr>
-              <a:t>Use the linked plays to decide who should be involved, what decisions need to be.</a:t>
+              <a:t>A short description of a public health workflow where AI might be used.</a:t>
             </a:r>
             <a:endParaRPr lang="en-US" sz="1220" dirty="0"/>
           </a:p>
@@ -10336,7 +9770,7 @@
                 <a:ea typeface="Aptos" pitchFamily="34" charset="-122"/>
                 <a:cs typeface="Aptos" pitchFamily="34" charset="-120"/>
               </a:rPr>
-              <a:t>Use the linked plays to decide who should be.</a:t>
+              <a:t>A preliminary note describing why the use case may.</a:t>
             </a:r>
             <a:endParaRPr lang="en-US" sz="1140" dirty="0"/>
           </a:p>
@@ -10353,7 +9787,7 @@
                 <a:ea typeface="Aptos" pitchFamily="34" charset="-122"/>
                 <a:cs typeface="Aptos" pitchFamily="34" charset="-120"/>
               </a:rPr>
-              <a:t>Use the linked tools to turn the concept into an.</a:t>
+              <a:t>A reflection on where AI should not be used or.</a:t>
             </a:r>
             <a:endParaRPr lang="en-US" sz="1140" dirty="0"/>
           </a:p>
@@ -10419,7 +9853,7 @@
                 <a:ea typeface="Aptos" pitchFamily="34" charset="-122"/>
                 <a:cs typeface="Aptos" pitchFamily="34" charset="-120"/>
               </a:rPr>
-              <a:t>Apply it</a:t>
+              <a:t>What to produce</a:t>
             </a:r>
             <a:endParaRPr lang="en-US" sz="1220" dirty="0"/>
           </a:p>
@@ -10460,7 +9894,7 @@
                 <a:ea typeface="Aptos" pitchFamily="34" charset="-122"/>
                 <a:cs typeface="Aptos" pitchFamily="34" charset="-120"/>
               </a:rPr>
-              <a:t>Connect the concept to public health purpose, responsible use, required.</a:t>
+              <a:t>Use the assignment to test whether you can explain the concept, apply it to a.</a:t>
             </a:r>
             <a:endParaRPr lang="en-US" sz="1220" dirty="0"/>
           </a:p>
@@ -10780,7 +10214,7 @@
                 <a:ea typeface="Aptos" pitchFamily="34" charset="-122"/>
                 <a:cs typeface="Aptos" pitchFamily="34" charset="-120"/>
               </a:rPr>
-              <a:t>• Use this lesson to build a practical foundation in AI, including predictive.</a:t>
+              <a:t>• Artificial intelligence is a broad family of computational methods that can.</a:t>
             </a:r>
             <a:endParaRPr lang="en-US" sz="2100" dirty="0"/>
           </a:p>
@@ -10797,7 +10231,24 @@
                 <a:ea typeface="Aptos" pitchFamily="34" charset="-122"/>
                 <a:cs typeface="Aptos" pitchFamily="34" charset="-120"/>
               </a:rPr>
-              <a:t>• The goal is to understand what each capability can support, where it can.</a:t>
+              <a:t>• In public health, AI is not a single product or a single capability.</a:t>
+            </a:r>
+            <a:endParaRPr lang="en-US" sz="2100" dirty="0"/>
+          </a:p>
+          <a:p>
+            <a:pPr indent="0" marL="0">
+              <a:buNone/>
+            </a:pPr>
+            <a:r>
+              <a:rPr lang="en-US" sz="2100" dirty="0">
+                <a:solidFill>
+                  <a:srgbClr val="003A63"/>
+                </a:solidFill>
+                <a:latin typeface="Aptos" pitchFamily="34" charset="0"/>
+                <a:ea typeface="Aptos" pitchFamily="34" charset="-122"/>
+                <a:cs typeface="Aptos" pitchFamily="34" charset="-120"/>
+              </a:rPr>
+              <a:t>• It may appear inside analytics platforms, dashboards, document tools,.</a:t>
             </a:r>
             <a:endParaRPr lang="en-US" sz="2100" dirty="0"/>
           </a:p>
@@ -10904,7 +10355,7 @@
                 <a:ea typeface="Aptos" pitchFamily="34" charset="-122"/>
                 <a:cs typeface="Aptos" pitchFamily="34" charset="-120"/>
               </a:rPr>
-              <a:t>Level: Foundational Module Appears in tracks: shared-foundational</a:t>
+              <a:t>Level: Foundational Module Primary track: Foundational Modules Appears in.</a:t>
             </a:r>
             <a:endParaRPr lang="en-US" sz="1220" dirty="0"/>
           </a:p>
@@ -11324,7 +10775,7 @@
                 <a:ea typeface="Aptos Display" pitchFamily="34" charset="-122"/>
                 <a:cs typeface="Aptos Display" pitchFamily="34" charset="-120"/>
               </a:rPr>
-              <a:t>Risk or Guardrail</a:t>
+              <a:t>Knowledge Check</a:t>
             </a:r>
             <a:endParaRPr lang="en-US" sz="3400" dirty="0"/>
           </a:p>
@@ -11365,7 +10816,41 @@
                 <a:ea typeface="Aptos" pitchFamily="34" charset="-122"/>
                 <a:cs typeface="Aptos" pitchFamily="34" charset="-120"/>
               </a:rPr>
-              <a:t>• Do not treat AI as a single tool or assume one model fits every public.</a:t>
+              <a:t>1. What is the most important first step after completing the Introduction.</a:t>
+            </a:r>
+            <a:endParaRPr lang="en-US" sz="1920" dirty="0"/>
+          </a:p>
+          <a:p>
+            <a:pPr indent="0" marL="0">
+              <a:buNone/>
+            </a:pPr>
+            <a:r>
+              <a:rPr lang="en-US" sz="1920" dirty="0">
+                <a:solidFill>
+                  <a:srgbClr val="003A63"/>
+                </a:solidFill>
+                <a:latin typeface="Aptos" pitchFamily="34" charset="0"/>
+                <a:ea typeface="Aptos" pitchFamily="34" charset="-122"/>
+                <a:cs typeface="Aptos" pitchFamily="34" charset="-120"/>
+              </a:rPr>
+              <a:t>2. Which practice best supports responsible AI use in public health?</a:t>
+            </a:r>
+            <a:endParaRPr lang="en-US" sz="1920" dirty="0"/>
+          </a:p>
+          <a:p>
+            <a:pPr indent="0" marL="0">
+              <a:buNone/>
+            </a:pPr>
+            <a:r>
+              <a:rPr lang="en-US" sz="1920" dirty="0">
+                <a:solidFill>
+                  <a:srgbClr val="003A63"/>
+                </a:solidFill>
+                <a:latin typeface="Aptos" pitchFamily="34" charset="0"/>
+                <a:ea typeface="Aptos" pitchFamily="34" charset="-122"/>
+                <a:cs typeface="Aptos" pitchFamily="34" charset="-120"/>
+              </a:rPr>
+              <a:t>3. Which statement best reflects the risk or guardrail for this module: AI.</a:t>
             </a:r>
             <a:endParaRPr lang="en-US" sz="1920" dirty="0"/>
           </a:p>
@@ -11431,7 +10916,7 @@
                 <a:ea typeface="Aptos" pitchFamily="34" charset="-122"/>
                 <a:cs typeface="Aptos" pitchFamily="34" charset="-120"/>
               </a:rPr>
-              <a:t>Risk check</a:t>
+              <a:t>Practice focus</a:t>
             </a:r>
             <a:endParaRPr lang="en-US" sz="1220" dirty="0"/>
           </a:p>
@@ -11472,7 +10957,7 @@
                 <a:ea typeface="Aptos" pitchFamily="34" charset="-122"/>
                 <a:cs typeface="Aptos" pitchFamily="34" charset="-120"/>
               </a:rPr>
-              <a:t>Do not treat AI as a single tool or assume one model fits every public health.</a:t>
+              <a:t>What is the most important first step after completing the Introduction to AI.</a:t>
             </a:r>
             <a:endParaRPr lang="en-US" sz="1220" dirty="0"/>
           </a:p>
@@ -11579,7 +11064,7 @@
                 <a:ea typeface="Aptos" pitchFamily="34" charset="-122"/>
                 <a:cs typeface="Aptos" pitchFamily="34" charset="-120"/>
               </a:rPr>
-              <a:t>Do not treat AI as a single tool or assume one.</a:t>
+              <a:t>What is the most important first step after.</a:t>
             </a:r>
             <a:endParaRPr lang="en-US" sz="1140" dirty="0"/>
           </a:p>
@@ -11645,7 +11130,7 @@
                 <a:ea typeface="Aptos" pitchFamily="34" charset="-122"/>
                 <a:cs typeface="Aptos" pitchFamily="34" charset="-120"/>
               </a:rPr>
-              <a:t>Safeguard to plan</a:t>
+              <a:t>What to produce</a:t>
             </a:r>
             <a:endParaRPr lang="en-US" sz="1220" dirty="0"/>
           </a:p>
@@ -11686,7 +11171,7 @@
                 <a:ea typeface="Aptos" pitchFamily="34" charset="-122"/>
                 <a:cs typeface="Aptos" pitchFamily="34" charset="-120"/>
               </a:rPr>
-              <a:t>Identify what could go wrong, who could be affected, what safeguards are needed,.</a:t>
+              <a:t>Use the assignment to test whether you can explain the concept, apply it to a.</a:t>
             </a:r>
             <a:endParaRPr lang="en-US" sz="1220" dirty="0"/>
           </a:p>
@@ -11965,7 +11450,7 @@
                 <a:ea typeface="Aptos Display" pitchFamily="34" charset="-122"/>
                 <a:cs typeface="Aptos Display" pitchFamily="34" charset="-120"/>
               </a:rPr>
-              <a:t>Why This Matters for Your Practice</a:t>
+              <a:t>Knowledge Check Continued</a:t>
             </a:r>
             <a:endParaRPr lang="en-US" sz="3400" dirty="0"/>
           </a:p>
@@ -12006,7 +11491,7 @@
                 <a:ea typeface="Aptos" pitchFamily="34" charset="-122"/>
                 <a:cs typeface="Aptos" pitchFamily="34" charset="-120"/>
               </a:rPr>
-              <a:t>• A shared AI vocabulary prevents agencies from approving tools before they.</a:t>
+              <a:t>4. When should a staff member escalate an AI-related concern?</a:t>
             </a:r>
             <a:endParaRPr lang="en-US" sz="1920" dirty="0"/>
           </a:p>
@@ -12023,7 +11508,7 @@
                 <a:ea typeface="Aptos" pitchFamily="34" charset="-122"/>
                 <a:cs typeface="Aptos" pitchFamily="34" charset="-120"/>
               </a:rPr>
-              <a:t>• This is especially important for STLT public health departments because AI.</a:t>
+              <a:t>5. What counts as stronger completion evidence for a training module?</a:t>
             </a:r>
             <a:endParaRPr lang="en-US" sz="1920" dirty="0"/>
           </a:p>
@@ -12130,7 +11615,7 @@
                 <a:ea typeface="Aptos" pitchFamily="34" charset="-122"/>
                 <a:cs typeface="Aptos" pitchFamily="34" charset="-120"/>
               </a:rPr>
-              <a:t>A shared AI vocabulary prevents agencies from approving tools before they.</a:t>
+              <a:t>When should a staff member escalate an AI-related concern?</a:t>
             </a:r>
             <a:endParaRPr lang="en-US" sz="1220" dirty="0"/>
           </a:p>
@@ -12237,24 +11722,7 @@
                 <a:ea typeface="Aptos" pitchFamily="34" charset="-122"/>
                 <a:cs typeface="Aptos" pitchFamily="34" charset="-120"/>
               </a:rPr>
-              <a:t>A shared AI vocabulary prevents agencies from.</a:t>
-            </a:r>
-            <a:endParaRPr lang="en-US" sz="1140" dirty="0"/>
-          </a:p>
-          <a:p>
-            <a:pPr indent="0" marL="0">
-              <a:buNone/>
-            </a:pPr>
-            <a:r>
-              <a:rPr lang="en-US" sz="1140" dirty="0">
-                <a:solidFill>
-                  <a:srgbClr val="17364A"/>
-                </a:solidFill>
-                <a:latin typeface="Aptos" pitchFamily="34" charset="0"/>
-                <a:ea typeface="Aptos" pitchFamily="34" charset="-122"/>
-                <a:cs typeface="Aptos" pitchFamily="34" charset="-120"/>
-              </a:rPr>
-              <a:t>This is especially important for STLT public.</a:t>
+              <a:t>When should a staff member escalate an AI-related.</a:t>
             </a:r>
             <a:endParaRPr lang="en-US" sz="1140" dirty="0"/>
           </a:p>
@@ -12640,7 +12108,7 @@
                 <a:ea typeface="Aptos Display" pitchFamily="34" charset="-122"/>
                 <a:cs typeface="Aptos Display" pitchFamily="34" charset="-120"/>
               </a:rPr>
-              <a:t>Reflection Questions</a:t>
+              <a:t>References and Resources</a:t>
             </a:r>
             <a:endParaRPr lang="en-US" sz="3400" dirty="0"/>
           </a:p>
@@ -12681,7 +12149,7 @@
                 <a:ea typeface="Aptos" pitchFamily="34" charset="-122"/>
                 <a:cs typeface="Aptos" pitchFamily="34" charset="-120"/>
               </a:rPr>
-              <a:t>• What AI tools or AI-enabled vendor products are already being used informally?</a:t>
+              <a:t>• [object Object]</a:t>
             </a:r>
             <a:endParaRPr lang="en-US" sz="1920" dirty="0"/>
           </a:p>
@@ -12698,7 +12166,7 @@
                 <a:ea typeface="Aptos" pitchFamily="34" charset="-122"/>
                 <a:cs typeface="Aptos" pitchFamily="34" charset="-120"/>
               </a:rPr>
-              <a:t>• Which public health decisions should never be delegated to an AI system?</a:t>
+              <a:t>• [object Object]</a:t>
             </a:r>
             <a:endParaRPr lang="en-US" sz="1920" dirty="0"/>
           </a:p>
@@ -12715,7 +12183,7 @@
                 <a:ea typeface="Aptos" pitchFamily="34" charset="-122"/>
                 <a:cs typeface="Aptos" pitchFamily="34" charset="-120"/>
               </a:rPr>
-              <a:t>• Who needs enough AI literacy to participate in governance, procurement, or.</a:t>
+              <a:t>• [object Object]</a:t>
             </a:r>
             <a:endParaRPr lang="en-US" sz="1920" dirty="0"/>
           </a:p>
@@ -12822,7 +12290,7 @@
                 <a:ea typeface="Aptos" pitchFamily="34" charset="-122"/>
                 <a:cs typeface="Aptos" pitchFamily="34" charset="-120"/>
               </a:rPr>
-              <a:t>What AI tools or AI-enabled vendor products are already being used informally?</a:t>
+              <a:t>[object Object]</a:t>
             </a:r>
             <a:endParaRPr lang="en-US" sz="1220" dirty="0"/>
           </a:p>
@@ -12929,7 +12397,7 @@
                 <a:ea typeface="Aptos" pitchFamily="34" charset="-122"/>
                 <a:cs typeface="Aptos" pitchFamily="34" charset="-120"/>
               </a:rPr>
-              <a:t>What AI tools or AI-enabled vendor products are.</a:t>
+              <a:t>[object Object]</a:t>
             </a:r>
             <a:endParaRPr lang="en-US" sz="1140" dirty="0"/>
           </a:p>
@@ -12946,7 +12414,7 @@
                 <a:ea typeface="Aptos" pitchFamily="34" charset="-122"/>
                 <a:cs typeface="Aptos" pitchFamily="34" charset="-120"/>
               </a:rPr>
-              <a:t>Which public health decisions should never be.</a:t>
+              <a:t>[object Object]</a:t>
             </a:r>
             <a:endParaRPr lang="en-US" sz="1140" dirty="0"/>
           </a:p>
@@ -12963,3365 +12431,7 @@
                 <a:ea typeface="Aptos" pitchFamily="34" charset="-122"/>
                 <a:cs typeface="Aptos" pitchFamily="34" charset="-120"/>
               </a:rPr>
-              <a:t>Who needs enough AI literacy to participate in.</a:t>
-            </a:r>
-            <a:endParaRPr lang="en-US" sz="1140" dirty="0"/>
-          </a:p>
-        </p:txBody>
-      </p:sp>
-      <p:sp>
-        <p:nvSpPr>
-          <p:cNvPr id="16" name="Shape 14"/>
-          <p:cNvSpPr/>
-          <p:nvPr/>
-        </p:nvSpPr>
-        <p:spPr>
-          <a:xfrm>
-            <a:off x="7543800" y="4389120"/>
-            <a:ext cx="3611880" cy="1261872"/>
-          </a:xfrm>
-          <a:prstGeom prst="roundRect">
-            <a:avLst>
-              <a:gd name="adj" fmla="val 8696"/>
-            </a:avLst>
-          </a:prstGeom>
-          <a:solidFill>
-            <a:srgbClr val="EAF6F8"/>
-          </a:solidFill>
-          <a:ln w="12700">
-            <a:solidFill>
-              <a:srgbClr val="B9D7E6"/>
-            </a:solidFill>
-            <a:prstDash val="solid"/>
-          </a:ln>
-        </p:spPr>
-      </p:sp>
-      <p:sp>
-        <p:nvSpPr>
-          <p:cNvPr id="17" name="Text 15"/>
-          <p:cNvSpPr/>
-          <p:nvPr/>
-        </p:nvSpPr>
-        <p:spPr>
-          <a:xfrm>
-            <a:off x="7708392" y="4517136"/>
-            <a:ext cx="3282696" cy="228600"/>
-          </a:xfrm>
-          <a:prstGeom prst="rect">
-            <a:avLst/>
-          </a:prstGeom>
-          <a:noFill/>
-          <a:ln/>
-        </p:spPr>
-        <p:txBody>
-          <a:bodyPr wrap="square" lIns="0" tIns="0" rIns="0" bIns="0" rtlCol="0" anchor="ctr"/>
-          <a:lstStyle/>
-          <a:p>
-            <a:pPr indent="0" marL="0">
-              <a:buNone/>
-            </a:pPr>
-            <a:r>
-              <a:rPr lang="en-US" sz="1220" b="1" dirty="0">
-                <a:solidFill>
-                  <a:srgbClr val="0068B7"/>
-                </a:solidFill>
-                <a:latin typeface="Aptos" pitchFamily="34" charset="0"/>
-                <a:ea typeface="Aptos" pitchFamily="34" charset="-122"/>
-                <a:cs typeface="Aptos" pitchFamily="34" charset="-120"/>
-              </a:rPr>
-              <a:t>Apply it</a:t>
-            </a:r>
-            <a:endParaRPr lang="en-US" sz="1220" dirty="0"/>
-          </a:p>
-        </p:txBody>
-      </p:sp>
-      <p:sp>
-        <p:nvSpPr>
-          <p:cNvPr id="18" name="Text 16"/>
-          <p:cNvSpPr/>
-          <p:nvPr/>
-        </p:nvSpPr>
-        <p:spPr>
-          <a:xfrm>
-            <a:off x="7708392" y="4828032"/>
-            <a:ext cx="3282696" cy="749808"/>
-          </a:xfrm>
-          <a:prstGeom prst="rect">
-            <a:avLst/>
-          </a:prstGeom>
-          <a:noFill/>
-          <a:ln/>
-        </p:spPr>
-        <p:txBody>
-          <a:bodyPr wrap="square" lIns="254" tIns="254" rIns="254" bIns="254" rtlCol="0" anchor="t">
-            <a:normAutofit/>
-          </a:bodyPr>
-          <a:lstStyle/>
-          <a:p>
-            <a:pPr indent="0" marL="0">
-              <a:buNone/>
-            </a:pPr>
-            <a:r>
-              <a:rPr lang="en-US" sz="1220" dirty="0">
-                <a:solidFill>
-                  <a:srgbClr val="17364A"/>
-                </a:solidFill>
-                <a:latin typeface="Aptos" pitchFamily="34" charset="0"/>
-                <a:ea typeface="Aptos" pitchFamily="34" charset="-122"/>
-                <a:cs typeface="Aptos" pitchFamily="34" charset="-120"/>
-              </a:rPr>
-              <a:t>Connect the concept to public health purpose, responsible use, required.</a:t>
-            </a:r>
-            <a:endParaRPr lang="en-US" sz="1220" dirty="0"/>
-          </a:p>
-        </p:txBody>
-      </p:sp>
-    </p:spTree>
-  </p:cSld>
-  <p:clrMapOvr>
-    <a:masterClrMapping/>
-  </p:clrMapOvr>
-</p:sld>
-</file>
-
-<file path=ppt/slides/slide23.xml><?xml version="1.0" encoding="utf-8"?>
-<p:sld xmlns:a="http://schemas.openxmlformats.org/drawingml/2006/main" xmlns:r="http://schemas.openxmlformats.org/officeDocument/2006/relationships" xmlns:p="http://schemas.openxmlformats.org/presentationml/2006/main">
-  <p:cSld name="Slide 23">
-    <p:bg>
-      <p:bgPr>
-        <a:solidFill>
-          <a:srgbClr val="F7FBFD"/>
-        </a:solidFill>
-      </p:bgPr>
-    </p:bg>
-    <p:spTree>
-      <p:nvGrpSpPr>
-        <p:cNvPr id="1" name=""/>
-        <p:cNvGrpSpPr/>
-        <p:nvPr/>
-      </p:nvGrpSpPr>
-      <p:grpSpPr>
-        <a:xfrm>
-          <a:off x="0" y="0"/>
-          <a:ext cx="0" cy="0"/>
-          <a:chOff x="0" y="0"/>
-          <a:chExt cx="0" cy="0"/>
-        </a:xfrm>
-      </p:grpSpPr>
-      <p:sp>
-        <p:nvSpPr>
-          <p:cNvPr id="2" name="Shape 0"/>
-          <p:cNvSpPr/>
-          <p:nvPr/>
-        </p:nvSpPr>
-        <p:spPr>
-          <a:xfrm>
-            <a:off x="0" y="0"/>
-            <a:ext cx="12191695" cy="164592"/>
-          </a:xfrm>
-          <a:prstGeom prst="rect">
-            <a:avLst/>
-          </a:prstGeom>
-          <a:solidFill>
-            <a:srgbClr val="0068B7"/>
-          </a:solidFill>
-          <a:ln w="12700">
-            <a:solidFill>
-              <a:srgbClr val="0068B7"/>
-            </a:solidFill>
-            <a:prstDash val="solid"/>
-          </a:ln>
-        </p:spPr>
-      </p:sp>
-      <p:sp>
-        <p:nvSpPr>
-          <p:cNvPr id="3" name="Shape 1"/>
-          <p:cNvSpPr/>
-          <p:nvPr/>
-        </p:nvSpPr>
-        <p:spPr>
-          <a:xfrm>
-            <a:off x="0" y="164592"/>
-            <a:ext cx="146304" cy="6693408"/>
-          </a:xfrm>
-          <a:prstGeom prst="rect">
-            <a:avLst/>
-          </a:prstGeom>
-          <a:solidFill>
-            <a:srgbClr val="2F8A28"/>
-          </a:solidFill>
-          <a:ln w="12700">
-            <a:solidFill>
-              <a:srgbClr val="2F8A28"/>
-            </a:solidFill>
-            <a:prstDash val="solid"/>
-          </a:ln>
-        </p:spPr>
-      </p:sp>
-      <p:sp>
-        <p:nvSpPr>
-          <p:cNvPr id="4" name="Text 2"/>
-          <p:cNvSpPr/>
-          <p:nvPr/>
-        </p:nvSpPr>
-        <p:spPr>
-          <a:xfrm>
-            <a:off x="502920" y="292608"/>
-            <a:ext cx="10149840" cy="256032"/>
-          </a:xfrm>
-          <a:prstGeom prst="rect">
-            <a:avLst/>
-          </a:prstGeom>
-          <a:noFill/>
-          <a:ln/>
-        </p:spPr>
-        <p:txBody>
-          <a:bodyPr wrap="square" lIns="0" tIns="0" rIns="0" bIns="0" rtlCol="0" anchor="ctr"/>
-          <a:lstStyle/>
-          <a:p>
-            <a:pPr indent="0" marL="0">
-              <a:buNone/>
-            </a:pPr>
-            <a:r>
-              <a:rPr lang="en-US" sz="900" b="1" dirty="0">
-                <a:solidFill>
-                  <a:srgbClr val="5F7181"/>
-                </a:solidFill>
-                <a:latin typeface="Aptos" pitchFamily="34" charset="0"/>
-                <a:ea typeface="Aptos" pitchFamily="34" charset="-122"/>
-                <a:cs typeface="Aptos" pitchFamily="34" charset="-120"/>
-              </a:rPr>
-              <a:t>Introduction to AI for Public Health</a:t>
-            </a:r>
-            <a:endParaRPr lang="en-US" sz="900" dirty="0"/>
-          </a:p>
-        </p:txBody>
-      </p:sp>
-      <p:sp>
-        <p:nvSpPr>
-          <p:cNvPr id="5" name="Text 3"/>
-          <p:cNvSpPr/>
-          <p:nvPr/>
-        </p:nvSpPr>
-        <p:spPr>
-          <a:xfrm>
-            <a:off x="502920" y="6537960"/>
-            <a:ext cx="7772400" cy="201168"/>
-          </a:xfrm>
-          <a:prstGeom prst="rect">
-            <a:avLst/>
-          </a:prstGeom>
-          <a:noFill/>
-          <a:ln/>
-        </p:spPr>
-        <p:txBody>
-          <a:bodyPr wrap="square" lIns="0" tIns="0" rIns="0" bIns="0" rtlCol="0" anchor="ctr"/>
-          <a:lstStyle/>
-          <a:p>
-            <a:pPr indent="0" marL="0">
-              <a:buNone/>
-            </a:pPr>
-            <a:r>
-              <a:rPr lang="en-US" sz="800" dirty="0">
-                <a:solidFill>
-                  <a:srgbClr val="5F7181"/>
-                </a:solidFill>
-                <a:latin typeface="Aptos" pitchFamily="34" charset="0"/>
-                <a:ea typeface="Aptos" pitchFamily="34" charset="-122"/>
-                <a:cs typeface="Aptos" pitchFamily="34" charset="-120"/>
-              </a:rPr>
-              <a:t>AI Playbook and Toolkit for Public Health Departments</a:t>
-            </a:r>
-            <a:endParaRPr lang="en-US" sz="800" dirty="0"/>
-          </a:p>
-        </p:txBody>
-      </p:sp>
-      <p:sp>
-        <p:nvSpPr>
-          <p:cNvPr id="6" name="Text 4"/>
-          <p:cNvSpPr/>
-          <p:nvPr/>
-        </p:nvSpPr>
-        <p:spPr>
-          <a:xfrm>
-            <a:off x="9646920" y="6537960"/>
-            <a:ext cx="1965960" cy="201168"/>
-          </a:xfrm>
-          <a:prstGeom prst="rect">
-            <a:avLst/>
-          </a:prstGeom>
-          <a:noFill/>
-          <a:ln/>
-        </p:spPr>
-        <p:txBody>
-          <a:bodyPr wrap="square" lIns="0" tIns="0" rIns="0" bIns="0" rtlCol="0" anchor="ctr"/>
-          <a:lstStyle/>
-          <a:p>
-            <a:pPr algn="r" indent="0" marL="0">
-              <a:buNone/>
-            </a:pPr>
-            <a:r>
-              <a:rPr lang="en-US" sz="800" dirty="0">
-                <a:solidFill>
-                  <a:srgbClr val="5F7181"/>
-                </a:solidFill>
-                <a:latin typeface="Aptos" pitchFamily="34" charset="0"/>
-                <a:ea typeface="Aptos" pitchFamily="34" charset="-122"/>
-                <a:cs typeface="Aptos" pitchFamily="34" charset="-120"/>
-              </a:rPr>
-              <a:t>Copyright Paula Soper</a:t>
-            </a:r>
-            <a:endParaRPr lang="en-US" sz="800" dirty="0"/>
-          </a:p>
-        </p:txBody>
-      </p:sp>
-      <p:sp>
-        <p:nvSpPr>
-          <p:cNvPr id="7" name="Text 5"/>
-          <p:cNvSpPr/>
-          <p:nvPr/>
-        </p:nvSpPr>
-        <p:spPr>
-          <a:xfrm>
-            <a:off x="11137392" y="6510528"/>
-            <a:ext cx="411480" cy="201168"/>
-          </a:xfrm>
-          <a:prstGeom prst="rect">
-            <a:avLst/>
-          </a:prstGeom>
-          <a:noFill/>
-          <a:ln/>
-        </p:spPr>
-        <p:txBody>
-          <a:bodyPr wrap="square" lIns="0" tIns="0" rIns="0" bIns="0" rtlCol="0" anchor="ctr"/>
-          <a:lstStyle/>
-          <a:p>
-            <a:pPr algn="r" indent="0" marL="0">
-              <a:buNone/>
-            </a:pPr>
-            <a:r>
-              <a:rPr lang="en-US" sz="900" dirty="0">
-                <a:solidFill>
-                  <a:srgbClr val="5F7181"/>
-                </a:solidFill>
-                <a:latin typeface="Aptos" pitchFamily="34" charset="0"/>
-                <a:ea typeface="Aptos" pitchFamily="34" charset="-122"/>
-                <a:cs typeface="Aptos" pitchFamily="34" charset="-120"/>
-              </a:rPr>
-              <a:t>23</a:t>
-            </a:r>
-            <a:endParaRPr lang="en-US" sz="900" dirty="0"/>
-          </a:p>
-        </p:txBody>
-      </p:sp>
-      <p:sp>
-        <p:nvSpPr>
-          <p:cNvPr id="8" name="Text 6"/>
-          <p:cNvSpPr/>
-          <p:nvPr/>
-        </p:nvSpPr>
-        <p:spPr>
-          <a:xfrm>
-            <a:off x="640080" y="658368"/>
-            <a:ext cx="10881360" cy="713232"/>
-          </a:xfrm>
-          <a:prstGeom prst="rect">
-            <a:avLst/>
-          </a:prstGeom>
-          <a:noFill/>
-          <a:ln/>
-        </p:spPr>
-        <p:txBody>
-          <a:bodyPr wrap="square" lIns="0" tIns="0" rIns="0" bIns="0" rtlCol="0" anchor="ctr">
-            <a:normAutofit/>
-          </a:bodyPr>
-          <a:lstStyle/>
-          <a:p>
-            <a:pPr indent="0" marL="0">
-              <a:buNone/>
-            </a:pPr>
-            <a:r>
-              <a:rPr lang="en-US" sz="3400" b="1" dirty="0">
-                <a:solidFill>
-                  <a:srgbClr val="003A63"/>
-                </a:solidFill>
-                <a:latin typeface="Aptos Display" pitchFamily="34" charset="0"/>
-                <a:ea typeface="Aptos Display" pitchFamily="34" charset="-122"/>
-                <a:cs typeface="Aptos Display" pitchFamily="34" charset="-120"/>
-              </a:rPr>
-              <a:t>Practical Exercise</a:t>
-            </a:r>
-            <a:endParaRPr lang="en-US" sz="3400" dirty="0"/>
-          </a:p>
-        </p:txBody>
-      </p:sp>
-      <p:sp>
-        <p:nvSpPr>
-          <p:cNvPr id="9" name="Text 7"/>
-          <p:cNvSpPr/>
-          <p:nvPr/>
-        </p:nvSpPr>
-        <p:spPr>
-          <a:xfrm>
-            <a:off x="822960" y="1463040"/>
-            <a:ext cx="6565392" cy="4343400"/>
-          </a:xfrm>
-          <a:prstGeom prst="rect">
-            <a:avLst/>
-          </a:prstGeom>
-          <a:noFill/>
-          <a:ln/>
-        </p:spPr>
-        <p:txBody>
-          <a:bodyPr wrap="square" lIns="1016" tIns="1016" rIns="1016" bIns="1016" rtlCol="0" anchor="t">
-            <a:normAutofit/>
-          </a:bodyPr>
-          <a:lstStyle/>
-          <a:p>
-            <a:pPr indent="0" marL="0">
-              <a:buNone/>
-            </a:pPr>
-            <a:r>
-              <a:rPr lang="en-US" sz="1920" dirty="0">
-                <a:solidFill>
-                  <a:srgbClr val="003A63"/>
-                </a:solidFill>
-                <a:latin typeface="Aptos" pitchFamily="34" charset="0"/>
-                <a:ea typeface="Aptos" pitchFamily="34" charset="-122"/>
-                <a:cs typeface="Aptos" pitchFamily="34" charset="-120"/>
-              </a:rPr>
-              <a:t>• Ask each program area to list one current task that involves searching,.</a:t>
-            </a:r>
-            <a:endParaRPr lang="en-US" sz="1920" dirty="0"/>
-          </a:p>
-          <a:p>
-            <a:pPr indent="0" marL="0">
-              <a:buNone/>
-            </a:pPr>
-            <a:r>
-              <a:rPr lang="en-US" sz="1920" dirty="0">
-                <a:solidFill>
-                  <a:srgbClr val="003A63"/>
-                </a:solidFill>
-                <a:latin typeface="Aptos" pitchFamily="34" charset="0"/>
-                <a:ea typeface="Aptos" pitchFamily="34" charset="-122"/>
-                <a:cs typeface="Aptos" pitchFamily="34" charset="-120"/>
-              </a:rPr>
-              <a:t>• Classify each task by AI type and identify the human decision owner.</a:t>
-            </a:r>
-            <a:endParaRPr lang="en-US" sz="1920" dirty="0"/>
-          </a:p>
-          <a:p>
-            <a:pPr indent="0" marL="0">
-              <a:buNone/>
-            </a:pPr>
-            <a:r>
-              <a:rPr lang="en-US" sz="1920" dirty="0">
-                <a:solidFill>
-                  <a:srgbClr val="003A63"/>
-                </a:solidFill>
-                <a:latin typeface="Aptos" pitchFamily="34" charset="0"/>
-                <a:ea typeface="Aptos" pitchFamily="34" charset="-122"/>
-                <a:cs typeface="Aptos" pitchFamily="34" charset="-120"/>
-              </a:rPr>
-              <a:t>• Expected assignment: Agency AI vocabulary list</a:t>
-            </a:r>
-            <a:endParaRPr lang="en-US" sz="1920" dirty="0"/>
-          </a:p>
-        </p:txBody>
-      </p:sp>
-      <p:sp>
-        <p:nvSpPr>
-          <p:cNvPr id="10" name="Shape 8"/>
-          <p:cNvSpPr/>
-          <p:nvPr/>
-        </p:nvSpPr>
-        <p:spPr>
-          <a:xfrm>
-            <a:off x="7543800" y="1325880"/>
-            <a:ext cx="3611880" cy="1261872"/>
-          </a:xfrm>
-          <a:prstGeom prst="roundRect">
-            <a:avLst>
-              <a:gd name="adj" fmla="val 8696"/>
-            </a:avLst>
-          </a:prstGeom>
-          <a:solidFill>
-            <a:srgbClr val="EEF8ED"/>
-          </a:solidFill>
-          <a:ln w="12700">
-            <a:solidFill>
-              <a:srgbClr val="B9D7E6"/>
-            </a:solidFill>
-            <a:prstDash val="solid"/>
-          </a:ln>
-        </p:spPr>
-      </p:sp>
-      <p:sp>
-        <p:nvSpPr>
-          <p:cNvPr id="11" name="Text 9"/>
-          <p:cNvSpPr/>
-          <p:nvPr/>
-        </p:nvSpPr>
-        <p:spPr>
-          <a:xfrm>
-            <a:off x="7708392" y="1453896"/>
-            <a:ext cx="3282696" cy="228600"/>
-          </a:xfrm>
-          <a:prstGeom prst="rect">
-            <a:avLst/>
-          </a:prstGeom>
-          <a:noFill/>
-          <a:ln/>
-        </p:spPr>
-        <p:txBody>
-          <a:bodyPr wrap="square" lIns="0" tIns="0" rIns="0" bIns="0" rtlCol="0" anchor="ctr"/>
-          <a:lstStyle/>
-          <a:p>
-            <a:pPr indent="0" marL="0">
-              <a:buNone/>
-            </a:pPr>
-            <a:r>
-              <a:rPr lang="en-US" sz="1220" b="1" dirty="0">
-                <a:solidFill>
-                  <a:srgbClr val="0068B7"/>
-                </a:solidFill>
-                <a:latin typeface="Aptos" pitchFamily="34" charset="0"/>
-                <a:ea typeface="Aptos" pitchFamily="34" charset="-122"/>
-                <a:cs typeface="Aptos" pitchFamily="34" charset="-120"/>
-              </a:rPr>
-              <a:t>Practice focus</a:t>
-            </a:r>
-            <a:endParaRPr lang="en-US" sz="1220" dirty="0"/>
-          </a:p>
-        </p:txBody>
-      </p:sp>
-      <p:sp>
-        <p:nvSpPr>
-          <p:cNvPr id="12" name="Text 10"/>
-          <p:cNvSpPr/>
-          <p:nvPr/>
-        </p:nvSpPr>
-        <p:spPr>
-          <a:xfrm>
-            <a:off x="7708392" y="1764792"/>
-            <a:ext cx="3282696" cy="749808"/>
-          </a:xfrm>
-          <a:prstGeom prst="rect">
-            <a:avLst/>
-          </a:prstGeom>
-          <a:noFill/>
-          <a:ln/>
-        </p:spPr>
-        <p:txBody>
-          <a:bodyPr wrap="square" lIns="254" tIns="254" rIns="254" bIns="254" rtlCol="0" anchor="t">
-            <a:normAutofit/>
-          </a:bodyPr>
-          <a:lstStyle/>
-          <a:p>
-            <a:pPr indent="0" marL="0">
-              <a:buNone/>
-            </a:pPr>
-            <a:r>
-              <a:rPr lang="en-US" sz="1220" dirty="0">
-                <a:solidFill>
-                  <a:srgbClr val="17364A"/>
-                </a:solidFill>
-                <a:latin typeface="Aptos" pitchFamily="34" charset="0"/>
-                <a:ea typeface="Aptos" pitchFamily="34" charset="-122"/>
-                <a:cs typeface="Aptos" pitchFamily="34" charset="-120"/>
-              </a:rPr>
-              <a:t>Ask each program area to list one current task that involves searching,.</a:t>
-            </a:r>
-            <a:endParaRPr lang="en-US" sz="1220" dirty="0"/>
-          </a:p>
-        </p:txBody>
-      </p:sp>
-      <p:sp>
-        <p:nvSpPr>
-          <p:cNvPr id="13" name="Shape 11"/>
-          <p:cNvSpPr/>
-          <p:nvPr/>
-        </p:nvSpPr>
-        <p:spPr>
-          <a:xfrm>
-            <a:off x="7543800" y="2724912"/>
-            <a:ext cx="3611880" cy="1527048"/>
-          </a:xfrm>
-          <a:prstGeom prst="roundRect">
-            <a:avLst>
-              <a:gd name="adj" fmla="val 7186"/>
-            </a:avLst>
-          </a:prstGeom>
-          <a:solidFill>
-            <a:srgbClr val="FFFFFF"/>
-          </a:solidFill>
-          <a:ln w="12700">
-            <a:solidFill>
-              <a:srgbClr val="B9D7E6"/>
-            </a:solidFill>
-            <a:prstDash val="solid"/>
-          </a:ln>
-        </p:spPr>
-      </p:sp>
-      <p:sp>
-        <p:nvSpPr>
-          <p:cNvPr id="14" name="Text 12"/>
-          <p:cNvSpPr/>
-          <p:nvPr/>
-        </p:nvSpPr>
-        <p:spPr>
-          <a:xfrm>
-            <a:off x="7708392" y="2852928"/>
-            <a:ext cx="3282696" cy="228600"/>
-          </a:xfrm>
-          <a:prstGeom prst="rect">
-            <a:avLst/>
-          </a:prstGeom>
-          <a:noFill/>
-          <a:ln/>
-        </p:spPr>
-        <p:txBody>
-          <a:bodyPr wrap="square" lIns="0" tIns="0" rIns="0" bIns="0" rtlCol="0" anchor="ctr"/>
-          <a:lstStyle/>
-          <a:p>
-            <a:pPr indent="0" marL="0">
-              <a:buNone/>
-            </a:pPr>
-            <a:r>
-              <a:rPr lang="en-US" sz="1220" b="1" dirty="0">
-                <a:solidFill>
-                  <a:srgbClr val="0068B7"/>
-                </a:solidFill>
-                <a:latin typeface="Aptos" pitchFamily="34" charset="0"/>
-                <a:ea typeface="Aptos" pitchFamily="34" charset="-122"/>
-                <a:cs typeface="Aptos" pitchFamily="34" charset="-120"/>
-              </a:rPr>
-              <a:t>Concept checkpoints</a:t>
-            </a:r>
-            <a:endParaRPr lang="en-US" sz="1220" dirty="0"/>
-          </a:p>
-        </p:txBody>
-      </p:sp>
-      <p:sp>
-        <p:nvSpPr>
-          <p:cNvPr id="15" name="Text 13"/>
-          <p:cNvSpPr/>
-          <p:nvPr/>
-        </p:nvSpPr>
-        <p:spPr>
-          <a:xfrm>
-            <a:off x="7726680" y="3182112"/>
-            <a:ext cx="3227832" cy="960120"/>
-          </a:xfrm>
-          <a:prstGeom prst="rect">
-            <a:avLst/>
-          </a:prstGeom>
-          <a:noFill/>
-          <a:ln/>
-        </p:spPr>
-        <p:txBody>
-          <a:bodyPr wrap="square" lIns="508" tIns="508" rIns="508" bIns="508" rtlCol="0" anchor="t">
-            <a:normAutofit/>
-          </a:bodyPr>
-          <a:lstStyle/>
-          <a:p>
-            <a:pPr indent="0" marL="0">
-              <a:buNone/>
-            </a:pPr>
-            <a:r>
-              <a:rPr lang="en-US" sz="1140" dirty="0">
-                <a:solidFill>
-                  <a:srgbClr val="17364A"/>
-                </a:solidFill>
-                <a:latin typeface="Aptos" pitchFamily="34" charset="0"/>
-                <a:ea typeface="Aptos" pitchFamily="34" charset="-122"/>
-                <a:cs typeface="Aptos" pitchFamily="34" charset="-120"/>
-              </a:rPr>
-              <a:t>Ask each program area to list one current task.</a:t>
-            </a:r>
-            <a:endParaRPr lang="en-US" sz="1140" dirty="0"/>
-          </a:p>
-          <a:p>
-            <a:pPr indent="0" marL="0">
-              <a:buNone/>
-            </a:pPr>
-            <a:r>
-              <a:rPr lang="en-US" sz="1140" dirty="0">
-                <a:solidFill>
-                  <a:srgbClr val="17364A"/>
-                </a:solidFill>
-                <a:latin typeface="Aptos" pitchFamily="34" charset="0"/>
-                <a:ea typeface="Aptos" pitchFamily="34" charset="-122"/>
-                <a:cs typeface="Aptos" pitchFamily="34" charset="-120"/>
-              </a:rPr>
-              <a:t>Expected assignment: Initial inventory of known or.</a:t>
-            </a:r>
-            <a:endParaRPr lang="en-US" sz="1140" dirty="0"/>
-          </a:p>
-        </p:txBody>
-      </p:sp>
-      <p:sp>
-        <p:nvSpPr>
-          <p:cNvPr id="16" name="Shape 14"/>
-          <p:cNvSpPr/>
-          <p:nvPr/>
-        </p:nvSpPr>
-        <p:spPr>
-          <a:xfrm>
-            <a:off x="7543800" y="4389120"/>
-            <a:ext cx="3611880" cy="1261872"/>
-          </a:xfrm>
-          <a:prstGeom prst="roundRect">
-            <a:avLst>
-              <a:gd name="adj" fmla="val 8696"/>
-            </a:avLst>
-          </a:prstGeom>
-          <a:solidFill>
-            <a:srgbClr val="EAF6F8"/>
-          </a:solidFill>
-          <a:ln w="12700">
-            <a:solidFill>
-              <a:srgbClr val="B9D7E6"/>
-            </a:solidFill>
-            <a:prstDash val="solid"/>
-          </a:ln>
-        </p:spPr>
-      </p:sp>
-      <p:sp>
-        <p:nvSpPr>
-          <p:cNvPr id="17" name="Text 15"/>
-          <p:cNvSpPr/>
-          <p:nvPr/>
-        </p:nvSpPr>
-        <p:spPr>
-          <a:xfrm>
-            <a:off x="7708392" y="4517136"/>
-            <a:ext cx="3282696" cy="228600"/>
-          </a:xfrm>
-          <a:prstGeom prst="rect">
-            <a:avLst/>
-          </a:prstGeom>
-          <a:noFill/>
-          <a:ln/>
-        </p:spPr>
-        <p:txBody>
-          <a:bodyPr wrap="square" lIns="0" tIns="0" rIns="0" bIns="0" rtlCol="0" anchor="ctr"/>
-          <a:lstStyle/>
-          <a:p>
-            <a:pPr indent="0" marL="0">
-              <a:buNone/>
-            </a:pPr>
-            <a:r>
-              <a:rPr lang="en-US" sz="1220" b="1" dirty="0">
-                <a:solidFill>
-                  <a:srgbClr val="0068B7"/>
-                </a:solidFill>
-                <a:latin typeface="Aptos" pitchFamily="34" charset="0"/>
-                <a:ea typeface="Aptos" pitchFamily="34" charset="-122"/>
-                <a:cs typeface="Aptos" pitchFamily="34" charset="-120"/>
-              </a:rPr>
-              <a:t>What to produce</a:t>
-            </a:r>
-            <a:endParaRPr lang="en-US" sz="1220" dirty="0"/>
-          </a:p>
-        </p:txBody>
-      </p:sp>
-      <p:sp>
-        <p:nvSpPr>
-          <p:cNvPr id="18" name="Text 16"/>
-          <p:cNvSpPr/>
-          <p:nvPr/>
-        </p:nvSpPr>
-        <p:spPr>
-          <a:xfrm>
-            <a:off x="7708392" y="4828032"/>
-            <a:ext cx="3282696" cy="749808"/>
-          </a:xfrm>
-          <a:prstGeom prst="rect">
-            <a:avLst/>
-          </a:prstGeom>
-          <a:noFill/>
-          <a:ln/>
-        </p:spPr>
-        <p:txBody>
-          <a:bodyPr wrap="square" lIns="254" tIns="254" rIns="254" bIns="254" rtlCol="0" anchor="t">
-            <a:normAutofit/>
-          </a:bodyPr>
-          <a:lstStyle/>
-          <a:p>
-            <a:pPr indent="0" marL="0">
-              <a:buNone/>
-            </a:pPr>
-            <a:r>
-              <a:rPr lang="en-US" sz="1220" dirty="0">
-                <a:solidFill>
-                  <a:srgbClr val="17364A"/>
-                </a:solidFill>
-                <a:latin typeface="Aptos" pitchFamily="34" charset="0"/>
-                <a:ea typeface="Aptos" pitchFamily="34" charset="-122"/>
-                <a:cs typeface="Aptos" pitchFamily="34" charset="-120"/>
-              </a:rPr>
-              <a:t>Use the assignment to test whether you can explain the concept, apply it to a.</a:t>
-            </a:r>
-            <a:endParaRPr lang="en-US" sz="1220" dirty="0"/>
-          </a:p>
-        </p:txBody>
-      </p:sp>
-    </p:spTree>
-  </p:cSld>
-  <p:clrMapOvr>
-    <a:masterClrMapping/>
-  </p:clrMapOvr>
-</p:sld>
-</file>
-
-<file path=ppt/slides/slide24.xml><?xml version="1.0" encoding="utf-8"?>
-<p:sld xmlns:a="http://schemas.openxmlformats.org/drawingml/2006/main" xmlns:r="http://schemas.openxmlformats.org/officeDocument/2006/relationships" xmlns:p="http://schemas.openxmlformats.org/presentationml/2006/main">
-  <p:cSld name="Slide 24">
-    <p:bg>
-      <p:bgPr>
-        <a:solidFill>
-          <a:srgbClr val="F7FBFD"/>
-        </a:solidFill>
-      </p:bgPr>
-    </p:bg>
-    <p:spTree>
-      <p:nvGrpSpPr>
-        <p:cNvPr id="1" name=""/>
-        <p:cNvGrpSpPr/>
-        <p:nvPr/>
-      </p:nvGrpSpPr>
-      <p:grpSpPr>
-        <a:xfrm>
-          <a:off x="0" y="0"/>
-          <a:ext cx="0" cy="0"/>
-          <a:chOff x="0" y="0"/>
-          <a:chExt cx="0" cy="0"/>
-        </a:xfrm>
-      </p:grpSpPr>
-      <p:sp>
-        <p:nvSpPr>
-          <p:cNvPr id="2" name="Shape 0"/>
-          <p:cNvSpPr/>
-          <p:nvPr/>
-        </p:nvSpPr>
-        <p:spPr>
-          <a:xfrm>
-            <a:off x="0" y="0"/>
-            <a:ext cx="12191695" cy="164592"/>
-          </a:xfrm>
-          <a:prstGeom prst="rect">
-            <a:avLst/>
-          </a:prstGeom>
-          <a:solidFill>
-            <a:srgbClr val="0068B7"/>
-          </a:solidFill>
-          <a:ln w="12700">
-            <a:solidFill>
-              <a:srgbClr val="0068B7"/>
-            </a:solidFill>
-            <a:prstDash val="solid"/>
-          </a:ln>
-        </p:spPr>
-      </p:sp>
-      <p:sp>
-        <p:nvSpPr>
-          <p:cNvPr id="3" name="Shape 1"/>
-          <p:cNvSpPr/>
-          <p:nvPr/>
-        </p:nvSpPr>
-        <p:spPr>
-          <a:xfrm>
-            <a:off x="0" y="164592"/>
-            <a:ext cx="146304" cy="6693408"/>
-          </a:xfrm>
-          <a:prstGeom prst="rect">
-            <a:avLst/>
-          </a:prstGeom>
-          <a:solidFill>
-            <a:srgbClr val="2F8A28"/>
-          </a:solidFill>
-          <a:ln w="12700">
-            <a:solidFill>
-              <a:srgbClr val="2F8A28"/>
-            </a:solidFill>
-            <a:prstDash val="solid"/>
-          </a:ln>
-        </p:spPr>
-      </p:sp>
-      <p:sp>
-        <p:nvSpPr>
-          <p:cNvPr id="4" name="Text 2"/>
-          <p:cNvSpPr/>
-          <p:nvPr/>
-        </p:nvSpPr>
-        <p:spPr>
-          <a:xfrm>
-            <a:off x="502920" y="292608"/>
-            <a:ext cx="10149840" cy="256032"/>
-          </a:xfrm>
-          <a:prstGeom prst="rect">
-            <a:avLst/>
-          </a:prstGeom>
-          <a:noFill/>
-          <a:ln/>
-        </p:spPr>
-        <p:txBody>
-          <a:bodyPr wrap="square" lIns="0" tIns="0" rIns="0" bIns="0" rtlCol="0" anchor="ctr"/>
-          <a:lstStyle/>
-          <a:p>
-            <a:pPr indent="0" marL="0">
-              <a:buNone/>
-            </a:pPr>
-            <a:r>
-              <a:rPr lang="en-US" sz="900" b="1" dirty="0">
-                <a:solidFill>
-                  <a:srgbClr val="5F7181"/>
-                </a:solidFill>
-                <a:latin typeface="Aptos" pitchFamily="34" charset="0"/>
-                <a:ea typeface="Aptos" pitchFamily="34" charset="-122"/>
-                <a:cs typeface="Aptos" pitchFamily="34" charset="-120"/>
-              </a:rPr>
-              <a:t>Introduction to AI for Public Health</a:t>
-            </a:r>
-            <a:endParaRPr lang="en-US" sz="900" dirty="0"/>
-          </a:p>
-        </p:txBody>
-      </p:sp>
-      <p:sp>
-        <p:nvSpPr>
-          <p:cNvPr id="5" name="Text 3"/>
-          <p:cNvSpPr/>
-          <p:nvPr/>
-        </p:nvSpPr>
-        <p:spPr>
-          <a:xfrm>
-            <a:off x="502920" y="6537960"/>
-            <a:ext cx="7772400" cy="201168"/>
-          </a:xfrm>
-          <a:prstGeom prst="rect">
-            <a:avLst/>
-          </a:prstGeom>
-          <a:noFill/>
-          <a:ln/>
-        </p:spPr>
-        <p:txBody>
-          <a:bodyPr wrap="square" lIns="0" tIns="0" rIns="0" bIns="0" rtlCol="0" anchor="ctr"/>
-          <a:lstStyle/>
-          <a:p>
-            <a:pPr indent="0" marL="0">
-              <a:buNone/>
-            </a:pPr>
-            <a:r>
-              <a:rPr lang="en-US" sz="800" dirty="0">
-                <a:solidFill>
-                  <a:srgbClr val="5F7181"/>
-                </a:solidFill>
-                <a:latin typeface="Aptos" pitchFamily="34" charset="0"/>
-                <a:ea typeface="Aptos" pitchFamily="34" charset="-122"/>
-                <a:cs typeface="Aptos" pitchFamily="34" charset="-120"/>
-              </a:rPr>
-              <a:t>AI Playbook and Toolkit for Public Health Departments</a:t>
-            </a:r>
-            <a:endParaRPr lang="en-US" sz="800" dirty="0"/>
-          </a:p>
-        </p:txBody>
-      </p:sp>
-      <p:sp>
-        <p:nvSpPr>
-          <p:cNvPr id="6" name="Text 4"/>
-          <p:cNvSpPr/>
-          <p:nvPr/>
-        </p:nvSpPr>
-        <p:spPr>
-          <a:xfrm>
-            <a:off x="9646920" y="6537960"/>
-            <a:ext cx="1965960" cy="201168"/>
-          </a:xfrm>
-          <a:prstGeom prst="rect">
-            <a:avLst/>
-          </a:prstGeom>
-          <a:noFill/>
-          <a:ln/>
-        </p:spPr>
-        <p:txBody>
-          <a:bodyPr wrap="square" lIns="0" tIns="0" rIns="0" bIns="0" rtlCol="0" anchor="ctr"/>
-          <a:lstStyle/>
-          <a:p>
-            <a:pPr algn="r" indent="0" marL="0">
-              <a:buNone/>
-            </a:pPr>
-            <a:r>
-              <a:rPr lang="en-US" sz="800" dirty="0">
-                <a:solidFill>
-                  <a:srgbClr val="5F7181"/>
-                </a:solidFill>
-                <a:latin typeface="Aptos" pitchFamily="34" charset="0"/>
-                <a:ea typeface="Aptos" pitchFamily="34" charset="-122"/>
-                <a:cs typeface="Aptos" pitchFamily="34" charset="-120"/>
-              </a:rPr>
-              <a:t>Copyright Paula Soper</a:t>
-            </a:r>
-            <a:endParaRPr lang="en-US" sz="800" dirty="0"/>
-          </a:p>
-        </p:txBody>
-      </p:sp>
-      <p:sp>
-        <p:nvSpPr>
-          <p:cNvPr id="7" name="Text 5"/>
-          <p:cNvSpPr/>
-          <p:nvPr/>
-        </p:nvSpPr>
-        <p:spPr>
-          <a:xfrm>
-            <a:off x="11137392" y="6510528"/>
-            <a:ext cx="411480" cy="201168"/>
-          </a:xfrm>
-          <a:prstGeom prst="rect">
-            <a:avLst/>
-          </a:prstGeom>
-          <a:noFill/>
-          <a:ln/>
-        </p:spPr>
-        <p:txBody>
-          <a:bodyPr wrap="square" lIns="0" tIns="0" rIns="0" bIns="0" rtlCol="0" anchor="ctr"/>
-          <a:lstStyle/>
-          <a:p>
-            <a:pPr algn="r" indent="0" marL="0">
-              <a:buNone/>
-            </a:pPr>
-            <a:r>
-              <a:rPr lang="en-US" sz="900" dirty="0">
-                <a:solidFill>
-                  <a:srgbClr val="5F7181"/>
-                </a:solidFill>
-                <a:latin typeface="Aptos" pitchFamily="34" charset="0"/>
-                <a:ea typeface="Aptos" pitchFamily="34" charset="-122"/>
-                <a:cs typeface="Aptos" pitchFamily="34" charset="-120"/>
-              </a:rPr>
-              <a:t>24</a:t>
-            </a:r>
-            <a:endParaRPr lang="en-US" sz="900" dirty="0"/>
-          </a:p>
-        </p:txBody>
-      </p:sp>
-      <p:sp>
-        <p:nvSpPr>
-          <p:cNvPr id="8" name="Text 6"/>
-          <p:cNvSpPr/>
-          <p:nvPr/>
-        </p:nvSpPr>
-        <p:spPr>
-          <a:xfrm>
-            <a:off x="640080" y="658368"/>
-            <a:ext cx="10881360" cy="713232"/>
-          </a:xfrm>
-          <a:prstGeom prst="rect">
-            <a:avLst/>
-          </a:prstGeom>
-          <a:noFill/>
-          <a:ln/>
-        </p:spPr>
-        <p:txBody>
-          <a:bodyPr wrap="square" lIns="0" tIns="0" rIns="0" bIns="0" rtlCol="0" anchor="ctr">
-            <a:normAutofit/>
-          </a:bodyPr>
-          <a:lstStyle/>
-          <a:p>
-            <a:pPr indent="0" marL="0">
-              <a:buNone/>
-            </a:pPr>
-            <a:r>
-              <a:rPr lang="en-US" sz="3400" b="1" dirty="0">
-                <a:solidFill>
-                  <a:srgbClr val="003A63"/>
-                </a:solidFill>
-                <a:latin typeface="Aptos Display" pitchFamily="34" charset="0"/>
-                <a:ea typeface="Aptos Display" pitchFamily="34" charset="-122"/>
-                <a:cs typeface="Aptos Display" pitchFamily="34" charset="-120"/>
-              </a:rPr>
-              <a:t>Practical Exercise Continued</a:t>
-            </a:r>
-            <a:endParaRPr lang="en-US" sz="3400" dirty="0"/>
-          </a:p>
-        </p:txBody>
-      </p:sp>
-      <p:sp>
-        <p:nvSpPr>
-          <p:cNvPr id="9" name="Text 7"/>
-          <p:cNvSpPr/>
-          <p:nvPr/>
-        </p:nvSpPr>
-        <p:spPr>
-          <a:xfrm>
-            <a:off x="822960" y="1463040"/>
-            <a:ext cx="6565392" cy="4343400"/>
-          </a:xfrm>
-          <a:prstGeom prst="rect">
-            <a:avLst/>
-          </a:prstGeom>
-          <a:noFill/>
-          <a:ln/>
-        </p:spPr>
-        <p:txBody>
-          <a:bodyPr wrap="square" lIns="1016" tIns="1016" rIns="1016" bIns="1016" rtlCol="0" anchor="t">
-            <a:normAutofit/>
-          </a:bodyPr>
-          <a:lstStyle/>
-          <a:p>
-            <a:pPr indent="0" marL="0">
-              <a:buNone/>
-            </a:pPr>
-            <a:r>
-              <a:rPr lang="en-US" sz="1920" dirty="0">
-                <a:solidFill>
-                  <a:srgbClr val="003A63"/>
-                </a:solidFill>
-                <a:latin typeface="Aptos" pitchFamily="34" charset="0"/>
-                <a:ea typeface="Aptos" pitchFamily="34" charset="-122"/>
-                <a:cs typeface="Aptos" pitchFamily="34" charset="-120"/>
-              </a:rPr>
-              <a:t>• Expected assignment: Draft list of decisions that require human accountability</a:t>
-            </a:r>
-            <a:endParaRPr lang="en-US" sz="1920" dirty="0"/>
-          </a:p>
-        </p:txBody>
-      </p:sp>
-      <p:sp>
-        <p:nvSpPr>
-          <p:cNvPr id="10" name="Shape 8"/>
-          <p:cNvSpPr/>
-          <p:nvPr/>
-        </p:nvSpPr>
-        <p:spPr>
-          <a:xfrm>
-            <a:off x="7543800" y="1325880"/>
-            <a:ext cx="3611880" cy="1261872"/>
-          </a:xfrm>
-          <a:prstGeom prst="roundRect">
-            <a:avLst>
-              <a:gd name="adj" fmla="val 8696"/>
-            </a:avLst>
-          </a:prstGeom>
-          <a:solidFill>
-            <a:srgbClr val="EEF8ED"/>
-          </a:solidFill>
-          <a:ln w="12700">
-            <a:solidFill>
-              <a:srgbClr val="B9D7E6"/>
-            </a:solidFill>
-            <a:prstDash val="solid"/>
-          </a:ln>
-        </p:spPr>
-      </p:sp>
-      <p:sp>
-        <p:nvSpPr>
-          <p:cNvPr id="11" name="Text 9"/>
-          <p:cNvSpPr/>
-          <p:nvPr/>
-        </p:nvSpPr>
-        <p:spPr>
-          <a:xfrm>
-            <a:off x="7708392" y="1453896"/>
-            <a:ext cx="3282696" cy="228600"/>
-          </a:xfrm>
-          <a:prstGeom prst="rect">
-            <a:avLst/>
-          </a:prstGeom>
-          <a:noFill/>
-          <a:ln/>
-        </p:spPr>
-        <p:txBody>
-          <a:bodyPr wrap="square" lIns="0" tIns="0" rIns="0" bIns="0" rtlCol="0" anchor="ctr"/>
-          <a:lstStyle/>
-          <a:p>
-            <a:pPr indent="0" marL="0">
-              <a:buNone/>
-            </a:pPr>
-            <a:r>
-              <a:rPr lang="en-US" sz="1220" b="1" dirty="0">
-                <a:solidFill>
-                  <a:srgbClr val="0068B7"/>
-                </a:solidFill>
-                <a:latin typeface="Aptos" pitchFamily="34" charset="0"/>
-                <a:ea typeface="Aptos" pitchFamily="34" charset="-122"/>
-                <a:cs typeface="Aptos" pitchFamily="34" charset="-120"/>
-              </a:rPr>
-              <a:t>Practice focus</a:t>
-            </a:r>
-            <a:endParaRPr lang="en-US" sz="1220" dirty="0"/>
-          </a:p>
-        </p:txBody>
-      </p:sp>
-      <p:sp>
-        <p:nvSpPr>
-          <p:cNvPr id="12" name="Text 10"/>
-          <p:cNvSpPr/>
-          <p:nvPr/>
-        </p:nvSpPr>
-        <p:spPr>
-          <a:xfrm>
-            <a:off x="7708392" y="1764792"/>
-            <a:ext cx="3282696" cy="749808"/>
-          </a:xfrm>
-          <a:prstGeom prst="rect">
-            <a:avLst/>
-          </a:prstGeom>
-          <a:noFill/>
-          <a:ln/>
-        </p:spPr>
-        <p:txBody>
-          <a:bodyPr wrap="square" lIns="254" tIns="254" rIns="254" bIns="254" rtlCol="0" anchor="t">
-            <a:normAutofit/>
-          </a:bodyPr>
-          <a:lstStyle/>
-          <a:p>
-            <a:pPr indent="0" marL="0">
-              <a:buNone/>
-            </a:pPr>
-            <a:r>
-              <a:rPr lang="en-US" sz="1220" dirty="0">
-                <a:solidFill>
-                  <a:srgbClr val="17364A"/>
-                </a:solidFill>
-                <a:latin typeface="Aptos" pitchFamily="34" charset="0"/>
-                <a:ea typeface="Aptos" pitchFamily="34" charset="-122"/>
-                <a:cs typeface="Aptos" pitchFamily="34" charset="-120"/>
-              </a:rPr>
-              <a:t>Expected assignment: Draft list of decisions that require human accountability</a:t>
-            </a:r>
-            <a:endParaRPr lang="en-US" sz="1220" dirty="0"/>
-          </a:p>
-        </p:txBody>
-      </p:sp>
-      <p:sp>
-        <p:nvSpPr>
-          <p:cNvPr id="13" name="Shape 11"/>
-          <p:cNvSpPr/>
-          <p:nvPr/>
-        </p:nvSpPr>
-        <p:spPr>
-          <a:xfrm>
-            <a:off x="7543800" y="2724912"/>
-            <a:ext cx="3611880" cy="1527048"/>
-          </a:xfrm>
-          <a:prstGeom prst="roundRect">
-            <a:avLst>
-              <a:gd name="adj" fmla="val 7186"/>
-            </a:avLst>
-          </a:prstGeom>
-          <a:solidFill>
-            <a:srgbClr val="FFFFFF"/>
-          </a:solidFill>
-          <a:ln w="12700">
-            <a:solidFill>
-              <a:srgbClr val="B9D7E6"/>
-            </a:solidFill>
-            <a:prstDash val="solid"/>
-          </a:ln>
-        </p:spPr>
-      </p:sp>
-      <p:sp>
-        <p:nvSpPr>
-          <p:cNvPr id="14" name="Text 12"/>
-          <p:cNvSpPr/>
-          <p:nvPr/>
-        </p:nvSpPr>
-        <p:spPr>
-          <a:xfrm>
-            <a:off x="7708392" y="2852928"/>
-            <a:ext cx="3282696" cy="228600"/>
-          </a:xfrm>
-          <a:prstGeom prst="rect">
-            <a:avLst/>
-          </a:prstGeom>
-          <a:noFill/>
-          <a:ln/>
-        </p:spPr>
-        <p:txBody>
-          <a:bodyPr wrap="square" lIns="0" tIns="0" rIns="0" bIns="0" rtlCol="0" anchor="ctr"/>
-          <a:lstStyle/>
-          <a:p>
-            <a:pPr indent="0" marL="0">
-              <a:buNone/>
-            </a:pPr>
-            <a:r>
-              <a:rPr lang="en-US" sz="1220" b="1" dirty="0">
-                <a:solidFill>
-                  <a:srgbClr val="0068B7"/>
-                </a:solidFill>
-                <a:latin typeface="Aptos" pitchFamily="34" charset="0"/>
-                <a:ea typeface="Aptos" pitchFamily="34" charset="-122"/>
-                <a:cs typeface="Aptos" pitchFamily="34" charset="-120"/>
-              </a:rPr>
-              <a:t>Concept checkpoints</a:t>
-            </a:r>
-            <a:endParaRPr lang="en-US" sz="1220" dirty="0"/>
-          </a:p>
-        </p:txBody>
-      </p:sp>
-      <p:sp>
-        <p:nvSpPr>
-          <p:cNvPr id="15" name="Text 13"/>
-          <p:cNvSpPr/>
-          <p:nvPr/>
-        </p:nvSpPr>
-        <p:spPr>
-          <a:xfrm>
-            <a:off x="7726680" y="3182112"/>
-            <a:ext cx="3227832" cy="960120"/>
-          </a:xfrm>
-          <a:prstGeom prst="rect">
-            <a:avLst/>
-          </a:prstGeom>
-          <a:noFill/>
-          <a:ln/>
-        </p:spPr>
-        <p:txBody>
-          <a:bodyPr wrap="square" lIns="508" tIns="508" rIns="508" bIns="508" rtlCol="0" anchor="t">
-            <a:normAutofit/>
-          </a:bodyPr>
-          <a:lstStyle/>
-          <a:p>
-            <a:pPr indent="0" marL="0">
-              <a:buNone/>
-            </a:pPr>
-            <a:r>
-              <a:rPr lang="en-US" sz="1140" dirty="0">
-                <a:solidFill>
-                  <a:srgbClr val="17364A"/>
-                </a:solidFill>
-                <a:latin typeface="Aptos" pitchFamily="34" charset="0"/>
-                <a:ea typeface="Aptos" pitchFamily="34" charset="-122"/>
-                <a:cs typeface="Aptos" pitchFamily="34" charset="-120"/>
-              </a:rPr>
-              <a:t>Expected assignment: Draft list of decisions that.</a:t>
-            </a:r>
-            <a:endParaRPr lang="en-US" sz="1140" dirty="0"/>
-          </a:p>
-        </p:txBody>
-      </p:sp>
-      <p:sp>
-        <p:nvSpPr>
-          <p:cNvPr id="16" name="Shape 14"/>
-          <p:cNvSpPr/>
-          <p:nvPr/>
-        </p:nvSpPr>
-        <p:spPr>
-          <a:xfrm>
-            <a:off x="7543800" y="4389120"/>
-            <a:ext cx="3611880" cy="1261872"/>
-          </a:xfrm>
-          <a:prstGeom prst="roundRect">
-            <a:avLst>
-              <a:gd name="adj" fmla="val 8696"/>
-            </a:avLst>
-          </a:prstGeom>
-          <a:solidFill>
-            <a:srgbClr val="EAF6F8"/>
-          </a:solidFill>
-          <a:ln w="12700">
-            <a:solidFill>
-              <a:srgbClr val="B9D7E6"/>
-            </a:solidFill>
-            <a:prstDash val="solid"/>
-          </a:ln>
-        </p:spPr>
-      </p:sp>
-      <p:sp>
-        <p:nvSpPr>
-          <p:cNvPr id="17" name="Text 15"/>
-          <p:cNvSpPr/>
-          <p:nvPr/>
-        </p:nvSpPr>
-        <p:spPr>
-          <a:xfrm>
-            <a:off x="7708392" y="4517136"/>
-            <a:ext cx="3282696" cy="228600"/>
-          </a:xfrm>
-          <a:prstGeom prst="rect">
-            <a:avLst/>
-          </a:prstGeom>
-          <a:noFill/>
-          <a:ln/>
-        </p:spPr>
-        <p:txBody>
-          <a:bodyPr wrap="square" lIns="0" tIns="0" rIns="0" bIns="0" rtlCol="0" anchor="ctr"/>
-          <a:lstStyle/>
-          <a:p>
-            <a:pPr indent="0" marL="0">
-              <a:buNone/>
-            </a:pPr>
-            <a:r>
-              <a:rPr lang="en-US" sz="1220" b="1" dirty="0">
-                <a:solidFill>
-                  <a:srgbClr val="0068B7"/>
-                </a:solidFill>
-                <a:latin typeface="Aptos" pitchFamily="34" charset="0"/>
-                <a:ea typeface="Aptos" pitchFamily="34" charset="-122"/>
-                <a:cs typeface="Aptos" pitchFamily="34" charset="-120"/>
-              </a:rPr>
-              <a:t>What to produce</a:t>
-            </a:r>
-            <a:endParaRPr lang="en-US" sz="1220" dirty="0"/>
-          </a:p>
-        </p:txBody>
-      </p:sp>
-      <p:sp>
-        <p:nvSpPr>
-          <p:cNvPr id="18" name="Text 16"/>
-          <p:cNvSpPr/>
-          <p:nvPr/>
-        </p:nvSpPr>
-        <p:spPr>
-          <a:xfrm>
-            <a:off x="7708392" y="4828032"/>
-            <a:ext cx="3282696" cy="749808"/>
-          </a:xfrm>
-          <a:prstGeom prst="rect">
-            <a:avLst/>
-          </a:prstGeom>
-          <a:noFill/>
-          <a:ln/>
-        </p:spPr>
-        <p:txBody>
-          <a:bodyPr wrap="square" lIns="254" tIns="254" rIns="254" bIns="254" rtlCol="0" anchor="t">
-            <a:normAutofit/>
-          </a:bodyPr>
-          <a:lstStyle/>
-          <a:p>
-            <a:pPr indent="0" marL="0">
-              <a:buNone/>
-            </a:pPr>
-            <a:r>
-              <a:rPr lang="en-US" sz="1220" dirty="0">
-                <a:solidFill>
-                  <a:srgbClr val="17364A"/>
-                </a:solidFill>
-                <a:latin typeface="Aptos" pitchFamily="34" charset="0"/>
-                <a:ea typeface="Aptos" pitchFamily="34" charset="-122"/>
-                <a:cs typeface="Aptos" pitchFamily="34" charset="-120"/>
-              </a:rPr>
-              <a:t>Use the assignment to test whether you can explain the concept, apply it to a.</a:t>
-            </a:r>
-            <a:endParaRPr lang="en-US" sz="1220" dirty="0"/>
-          </a:p>
-        </p:txBody>
-      </p:sp>
-    </p:spTree>
-  </p:cSld>
-  <p:clrMapOvr>
-    <a:masterClrMapping/>
-  </p:clrMapOvr>
-</p:sld>
-</file>
-
-<file path=ppt/slides/slide25.xml><?xml version="1.0" encoding="utf-8"?>
-<p:sld xmlns:a="http://schemas.openxmlformats.org/drawingml/2006/main" xmlns:r="http://schemas.openxmlformats.org/officeDocument/2006/relationships" xmlns:p="http://schemas.openxmlformats.org/presentationml/2006/main">
-  <p:cSld name="Slide 25">
-    <p:bg>
-      <p:bgPr>
-        <a:solidFill>
-          <a:srgbClr val="F7FBFD"/>
-        </a:solidFill>
-      </p:bgPr>
-    </p:bg>
-    <p:spTree>
-      <p:nvGrpSpPr>
-        <p:cNvPr id="1" name=""/>
-        <p:cNvGrpSpPr/>
-        <p:nvPr/>
-      </p:nvGrpSpPr>
-      <p:grpSpPr>
-        <a:xfrm>
-          <a:off x="0" y="0"/>
-          <a:ext cx="0" cy="0"/>
-          <a:chOff x="0" y="0"/>
-          <a:chExt cx="0" cy="0"/>
-        </a:xfrm>
-      </p:grpSpPr>
-      <p:sp>
-        <p:nvSpPr>
-          <p:cNvPr id="2" name="Shape 0"/>
-          <p:cNvSpPr/>
-          <p:nvPr/>
-        </p:nvSpPr>
-        <p:spPr>
-          <a:xfrm>
-            <a:off x="0" y="0"/>
-            <a:ext cx="12191695" cy="164592"/>
-          </a:xfrm>
-          <a:prstGeom prst="rect">
-            <a:avLst/>
-          </a:prstGeom>
-          <a:solidFill>
-            <a:srgbClr val="0068B7"/>
-          </a:solidFill>
-          <a:ln w="12700">
-            <a:solidFill>
-              <a:srgbClr val="0068B7"/>
-            </a:solidFill>
-            <a:prstDash val="solid"/>
-          </a:ln>
-        </p:spPr>
-      </p:sp>
-      <p:sp>
-        <p:nvSpPr>
-          <p:cNvPr id="3" name="Shape 1"/>
-          <p:cNvSpPr/>
-          <p:nvPr/>
-        </p:nvSpPr>
-        <p:spPr>
-          <a:xfrm>
-            <a:off x="0" y="164592"/>
-            <a:ext cx="146304" cy="6693408"/>
-          </a:xfrm>
-          <a:prstGeom prst="rect">
-            <a:avLst/>
-          </a:prstGeom>
-          <a:solidFill>
-            <a:srgbClr val="2F8A28"/>
-          </a:solidFill>
-          <a:ln w="12700">
-            <a:solidFill>
-              <a:srgbClr val="2F8A28"/>
-            </a:solidFill>
-            <a:prstDash val="solid"/>
-          </a:ln>
-        </p:spPr>
-      </p:sp>
-      <p:sp>
-        <p:nvSpPr>
-          <p:cNvPr id="4" name="Text 2"/>
-          <p:cNvSpPr/>
-          <p:nvPr/>
-        </p:nvSpPr>
-        <p:spPr>
-          <a:xfrm>
-            <a:off x="502920" y="292608"/>
-            <a:ext cx="10149840" cy="256032"/>
-          </a:xfrm>
-          <a:prstGeom prst="rect">
-            <a:avLst/>
-          </a:prstGeom>
-          <a:noFill/>
-          <a:ln/>
-        </p:spPr>
-        <p:txBody>
-          <a:bodyPr wrap="square" lIns="0" tIns="0" rIns="0" bIns="0" rtlCol="0" anchor="ctr"/>
-          <a:lstStyle/>
-          <a:p>
-            <a:pPr indent="0" marL="0">
-              <a:buNone/>
-            </a:pPr>
-            <a:r>
-              <a:rPr lang="en-US" sz="900" b="1" dirty="0">
-                <a:solidFill>
-                  <a:srgbClr val="5F7181"/>
-                </a:solidFill>
-                <a:latin typeface="Aptos" pitchFamily="34" charset="0"/>
-                <a:ea typeface="Aptos" pitchFamily="34" charset="-122"/>
-                <a:cs typeface="Aptos" pitchFamily="34" charset="-120"/>
-              </a:rPr>
-              <a:t>Introduction to AI for Public Health</a:t>
-            </a:r>
-            <a:endParaRPr lang="en-US" sz="900" dirty="0"/>
-          </a:p>
-        </p:txBody>
-      </p:sp>
-      <p:sp>
-        <p:nvSpPr>
-          <p:cNvPr id="5" name="Text 3"/>
-          <p:cNvSpPr/>
-          <p:nvPr/>
-        </p:nvSpPr>
-        <p:spPr>
-          <a:xfrm>
-            <a:off x="502920" y="6537960"/>
-            <a:ext cx="7772400" cy="201168"/>
-          </a:xfrm>
-          <a:prstGeom prst="rect">
-            <a:avLst/>
-          </a:prstGeom>
-          <a:noFill/>
-          <a:ln/>
-        </p:spPr>
-        <p:txBody>
-          <a:bodyPr wrap="square" lIns="0" tIns="0" rIns="0" bIns="0" rtlCol="0" anchor="ctr"/>
-          <a:lstStyle/>
-          <a:p>
-            <a:pPr indent="0" marL="0">
-              <a:buNone/>
-            </a:pPr>
-            <a:r>
-              <a:rPr lang="en-US" sz="800" dirty="0">
-                <a:solidFill>
-                  <a:srgbClr val="5F7181"/>
-                </a:solidFill>
-                <a:latin typeface="Aptos" pitchFamily="34" charset="0"/>
-                <a:ea typeface="Aptos" pitchFamily="34" charset="-122"/>
-                <a:cs typeface="Aptos" pitchFamily="34" charset="-120"/>
-              </a:rPr>
-              <a:t>AI Playbook and Toolkit for Public Health Departments</a:t>
-            </a:r>
-            <a:endParaRPr lang="en-US" sz="800" dirty="0"/>
-          </a:p>
-        </p:txBody>
-      </p:sp>
-      <p:sp>
-        <p:nvSpPr>
-          <p:cNvPr id="6" name="Text 4"/>
-          <p:cNvSpPr/>
-          <p:nvPr/>
-        </p:nvSpPr>
-        <p:spPr>
-          <a:xfrm>
-            <a:off x="9646920" y="6537960"/>
-            <a:ext cx="1965960" cy="201168"/>
-          </a:xfrm>
-          <a:prstGeom prst="rect">
-            <a:avLst/>
-          </a:prstGeom>
-          <a:noFill/>
-          <a:ln/>
-        </p:spPr>
-        <p:txBody>
-          <a:bodyPr wrap="square" lIns="0" tIns="0" rIns="0" bIns="0" rtlCol="0" anchor="ctr"/>
-          <a:lstStyle/>
-          <a:p>
-            <a:pPr algn="r" indent="0" marL="0">
-              <a:buNone/>
-            </a:pPr>
-            <a:r>
-              <a:rPr lang="en-US" sz="800" dirty="0">
-                <a:solidFill>
-                  <a:srgbClr val="5F7181"/>
-                </a:solidFill>
-                <a:latin typeface="Aptos" pitchFamily="34" charset="0"/>
-                <a:ea typeface="Aptos" pitchFamily="34" charset="-122"/>
-                <a:cs typeface="Aptos" pitchFamily="34" charset="-120"/>
-              </a:rPr>
-              <a:t>Copyright Paula Soper</a:t>
-            </a:r>
-            <a:endParaRPr lang="en-US" sz="800" dirty="0"/>
-          </a:p>
-        </p:txBody>
-      </p:sp>
-      <p:sp>
-        <p:nvSpPr>
-          <p:cNvPr id="7" name="Text 5"/>
-          <p:cNvSpPr/>
-          <p:nvPr/>
-        </p:nvSpPr>
-        <p:spPr>
-          <a:xfrm>
-            <a:off x="11137392" y="6510528"/>
-            <a:ext cx="411480" cy="201168"/>
-          </a:xfrm>
-          <a:prstGeom prst="rect">
-            <a:avLst/>
-          </a:prstGeom>
-          <a:noFill/>
-          <a:ln/>
-        </p:spPr>
-        <p:txBody>
-          <a:bodyPr wrap="square" lIns="0" tIns="0" rIns="0" bIns="0" rtlCol="0" anchor="ctr"/>
-          <a:lstStyle/>
-          <a:p>
-            <a:pPr algn="r" indent="0" marL="0">
-              <a:buNone/>
-            </a:pPr>
-            <a:r>
-              <a:rPr lang="en-US" sz="900" dirty="0">
-                <a:solidFill>
-                  <a:srgbClr val="5F7181"/>
-                </a:solidFill>
-                <a:latin typeface="Aptos" pitchFamily="34" charset="0"/>
-                <a:ea typeface="Aptos" pitchFamily="34" charset="-122"/>
-                <a:cs typeface="Aptos" pitchFamily="34" charset="-120"/>
-              </a:rPr>
-              <a:t>25</a:t>
-            </a:r>
-            <a:endParaRPr lang="en-US" sz="900" dirty="0"/>
-          </a:p>
-        </p:txBody>
-      </p:sp>
-      <p:sp>
-        <p:nvSpPr>
-          <p:cNvPr id="8" name="Text 6"/>
-          <p:cNvSpPr/>
-          <p:nvPr/>
-        </p:nvSpPr>
-        <p:spPr>
-          <a:xfrm>
-            <a:off x="640080" y="658368"/>
-            <a:ext cx="10881360" cy="713232"/>
-          </a:xfrm>
-          <a:prstGeom prst="rect">
-            <a:avLst/>
-          </a:prstGeom>
-          <a:noFill/>
-          <a:ln/>
-        </p:spPr>
-        <p:txBody>
-          <a:bodyPr wrap="square" lIns="0" tIns="0" rIns="0" bIns="0" rtlCol="0" anchor="ctr">
-            <a:normAutofit/>
-          </a:bodyPr>
-          <a:lstStyle/>
-          <a:p>
-            <a:pPr indent="0" marL="0">
-              <a:buNone/>
-            </a:pPr>
-            <a:r>
-              <a:rPr lang="en-US" sz="3400" b="1" dirty="0">
-                <a:solidFill>
-                  <a:srgbClr val="003A63"/>
-                </a:solidFill>
-                <a:latin typeface="Aptos Display" pitchFamily="34" charset="0"/>
-                <a:ea typeface="Aptos Display" pitchFamily="34" charset="-122"/>
-                <a:cs typeface="Aptos Display" pitchFamily="34" charset="-120"/>
-              </a:rPr>
-              <a:t>Knowledge Check</a:t>
-            </a:r>
-            <a:endParaRPr lang="en-US" sz="3400" dirty="0"/>
-          </a:p>
-        </p:txBody>
-      </p:sp>
-      <p:sp>
-        <p:nvSpPr>
-          <p:cNvPr id="9" name="Text 7"/>
-          <p:cNvSpPr/>
-          <p:nvPr/>
-        </p:nvSpPr>
-        <p:spPr>
-          <a:xfrm>
-            <a:off x="822960" y="1463040"/>
-            <a:ext cx="6565392" cy="4343400"/>
-          </a:xfrm>
-          <a:prstGeom prst="rect">
-            <a:avLst/>
-          </a:prstGeom>
-          <a:noFill/>
-          <a:ln/>
-        </p:spPr>
-        <p:txBody>
-          <a:bodyPr wrap="square" lIns="1016" tIns="1016" rIns="1016" bIns="1016" rtlCol="0" anchor="t">
-            <a:normAutofit/>
-          </a:bodyPr>
-          <a:lstStyle/>
-          <a:p>
-            <a:pPr indent="0" marL="0">
-              <a:buNone/>
-            </a:pPr>
-            <a:r>
-              <a:rPr lang="en-US" sz="1920" dirty="0">
-                <a:solidFill>
-                  <a:srgbClr val="003A63"/>
-                </a:solidFill>
-                <a:latin typeface="Aptos" pitchFamily="34" charset="0"/>
-                <a:ea typeface="Aptos" pitchFamily="34" charset="-122"/>
-                <a:cs typeface="Aptos" pitchFamily="34" charset="-120"/>
-              </a:rPr>
-              <a:t>1. What is the most important first step after completing the Introduction.</a:t>
-            </a:r>
-            <a:endParaRPr lang="en-US" sz="1920" dirty="0"/>
-          </a:p>
-          <a:p>
-            <a:pPr indent="0" marL="0">
-              <a:buNone/>
-            </a:pPr>
-            <a:r>
-              <a:rPr lang="en-US" sz="1920" dirty="0">
-                <a:solidFill>
-                  <a:srgbClr val="003A63"/>
-                </a:solidFill>
-                <a:latin typeface="Aptos" pitchFamily="34" charset="0"/>
-                <a:ea typeface="Aptos" pitchFamily="34" charset="-122"/>
-                <a:cs typeface="Aptos" pitchFamily="34" charset="-120"/>
-              </a:rPr>
-              <a:t>2. Which practice best supports responsible AI use in public health?</a:t>
-            </a:r>
-            <a:endParaRPr lang="en-US" sz="1920" dirty="0"/>
-          </a:p>
-          <a:p>
-            <a:pPr indent="0" marL="0">
-              <a:buNone/>
-            </a:pPr>
-            <a:r>
-              <a:rPr lang="en-US" sz="1920" dirty="0">
-                <a:solidFill>
-                  <a:srgbClr val="003A63"/>
-                </a:solidFill>
-                <a:latin typeface="Aptos" pitchFamily="34" charset="0"/>
-                <a:ea typeface="Aptos" pitchFamily="34" charset="-122"/>
-                <a:cs typeface="Aptos" pitchFamily="34" charset="-120"/>
-              </a:rPr>
-              <a:t>3. Which statement best reflects the risk or guardrail for this module: Do.</a:t>
-            </a:r>
-            <a:endParaRPr lang="en-US" sz="1920" dirty="0"/>
-          </a:p>
-        </p:txBody>
-      </p:sp>
-      <p:sp>
-        <p:nvSpPr>
-          <p:cNvPr id="10" name="Shape 8"/>
-          <p:cNvSpPr/>
-          <p:nvPr/>
-        </p:nvSpPr>
-        <p:spPr>
-          <a:xfrm>
-            <a:off x="7543800" y="1325880"/>
-            <a:ext cx="3611880" cy="1261872"/>
-          </a:xfrm>
-          <a:prstGeom prst="roundRect">
-            <a:avLst>
-              <a:gd name="adj" fmla="val 8696"/>
-            </a:avLst>
-          </a:prstGeom>
-          <a:solidFill>
-            <a:srgbClr val="EEF8ED"/>
-          </a:solidFill>
-          <a:ln w="12700">
-            <a:solidFill>
-              <a:srgbClr val="B9D7E6"/>
-            </a:solidFill>
-            <a:prstDash val="solid"/>
-          </a:ln>
-        </p:spPr>
-      </p:sp>
-      <p:sp>
-        <p:nvSpPr>
-          <p:cNvPr id="11" name="Text 9"/>
-          <p:cNvSpPr/>
-          <p:nvPr/>
-        </p:nvSpPr>
-        <p:spPr>
-          <a:xfrm>
-            <a:off x="7708392" y="1453896"/>
-            <a:ext cx="3282696" cy="228600"/>
-          </a:xfrm>
-          <a:prstGeom prst="rect">
-            <a:avLst/>
-          </a:prstGeom>
-          <a:noFill/>
-          <a:ln/>
-        </p:spPr>
-        <p:txBody>
-          <a:bodyPr wrap="square" lIns="0" tIns="0" rIns="0" bIns="0" rtlCol="0" anchor="ctr"/>
-          <a:lstStyle/>
-          <a:p>
-            <a:pPr indent="0" marL="0">
-              <a:buNone/>
-            </a:pPr>
-            <a:r>
-              <a:rPr lang="en-US" sz="1220" b="1" dirty="0">
-                <a:solidFill>
-                  <a:srgbClr val="0068B7"/>
-                </a:solidFill>
-                <a:latin typeface="Aptos" pitchFamily="34" charset="0"/>
-                <a:ea typeface="Aptos" pitchFamily="34" charset="-122"/>
-                <a:cs typeface="Aptos" pitchFamily="34" charset="-120"/>
-              </a:rPr>
-              <a:t>Practice focus</a:t>
-            </a:r>
-            <a:endParaRPr lang="en-US" sz="1220" dirty="0"/>
-          </a:p>
-        </p:txBody>
-      </p:sp>
-      <p:sp>
-        <p:nvSpPr>
-          <p:cNvPr id="12" name="Text 10"/>
-          <p:cNvSpPr/>
-          <p:nvPr/>
-        </p:nvSpPr>
-        <p:spPr>
-          <a:xfrm>
-            <a:off x="7708392" y="1764792"/>
-            <a:ext cx="3282696" cy="749808"/>
-          </a:xfrm>
-          <a:prstGeom prst="rect">
-            <a:avLst/>
-          </a:prstGeom>
-          <a:noFill/>
-          <a:ln/>
-        </p:spPr>
-        <p:txBody>
-          <a:bodyPr wrap="square" lIns="254" tIns="254" rIns="254" bIns="254" rtlCol="0" anchor="t">
-            <a:normAutofit/>
-          </a:bodyPr>
-          <a:lstStyle/>
-          <a:p>
-            <a:pPr indent="0" marL="0">
-              <a:buNone/>
-            </a:pPr>
-            <a:r>
-              <a:rPr lang="en-US" sz="1220" dirty="0">
-                <a:solidFill>
-                  <a:srgbClr val="17364A"/>
-                </a:solidFill>
-                <a:latin typeface="Aptos" pitchFamily="34" charset="0"/>
-                <a:ea typeface="Aptos" pitchFamily="34" charset="-122"/>
-                <a:cs typeface="Aptos" pitchFamily="34" charset="-120"/>
-              </a:rPr>
-              <a:t>What is the most important first step after completing the Introduction to AI.</a:t>
-            </a:r>
-            <a:endParaRPr lang="en-US" sz="1220" dirty="0"/>
-          </a:p>
-        </p:txBody>
-      </p:sp>
-      <p:sp>
-        <p:nvSpPr>
-          <p:cNvPr id="13" name="Shape 11"/>
-          <p:cNvSpPr/>
-          <p:nvPr/>
-        </p:nvSpPr>
-        <p:spPr>
-          <a:xfrm>
-            <a:off x="7543800" y="2724912"/>
-            <a:ext cx="3611880" cy="1527048"/>
-          </a:xfrm>
-          <a:prstGeom prst="roundRect">
-            <a:avLst>
-              <a:gd name="adj" fmla="val 7186"/>
-            </a:avLst>
-          </a:prstGeom>
-          <a:solidFill>
-            <a:srgbClr val="FFFFFF"/>
-          </a:solidFill>
-          <a:ln w="12700">
-            <a:solidFill>
-              <a:srgbClr val="B9D7E6"/>
-            </a:solidFill>
-            <a:prstDash val="solid"/>
-          </a:ln>
-        </p:spPr>
-      </p:sp>
-      <p:sp>
-        <p:nvSpPr>
-          <p:cNvPr id="14" name="Text 12"/>
-          <p:cNvSpPr/>
-          <p:nvPr/>
-        </p:nvSpPr>
-        <p:spPr>
-          <a:xfrm>
-            <a:off x="7708392" y="2852928"/>
-            <a:ext cx="3282696" cy="228600"/>
-          </a:xfrm>
-          <a:prstGeom prst="rect">
-            <a:avLst/>
-          </a:prstGeom>
-          <a:noFill/>
-          <a:ln/>
-        </p:spPr>
-        <p:txBody>
-          <a:bodyPr wrap="square" lIns="0" tIns="0" rIns="0" bIns="0" rtlCol="0" anchor="ctr"/>
-          <a:lstStyle/>
-          <a:p>
-            <a:pPr indent="0" marL="0">
-              <a:buNone/>
-            </a:pPr>
-            <a:r>
-              <a:rPr lang="en-US" sz="1220" b="1" dirty="0">
-                <a:solidFill>
-                  <a:srgbClr val="0068B7"/>
-                </a:solidFill>
-                <a:latin typeface="Aptos" pitchFamily="34" charset="0"/>
-                <a:ea typeface="Aptos" pitchFamily="34" charset="-122"/>
-                <a:cs typeface="Aptos" pitchFamily="34" charset="-120"/>
-              </a:rPr>
-              <a:t>Concept checkpoints</a:t>
-            </a:r>
-            <a:endParaRPr lang="en-US" sz="1220" dirty="0"/>
-          </a:p>
-        </p:txBody>
-      </p:sp>
-      <p:sp>
-        <p:nvSpPr>
-          <p:cNvPr id="15" name="Text 13"/>
-          <p:cNvSpPr/>
-          <p:nvPr/>
-        </p:nvSpPr>
-        <p:spPr>
-          <a:xfrm>
-            <a:off x="7726680" y="3182112"/>
-            <a:ext cx="3227832" cy="960120"/>
-          </a:xfrm>
-          <a:prstGeom prst="rect">
-            <a:avLst/>
-          </a:prstGeom>
-          <a:noFill/>
-          <a:ln/>
-        </p:spPr>
-        <p:txBody>
-          <a:bodyPr wrap="square" lIns="508" tIns="508" rIns="508" bIns="508" rtlCol="0" anchor="t">
-            <a:normAutofit/>
-          </a:bodyPr>
-          <a:lstStyle/>
-          <a:p>
-            <a:pPr indent="0" marL="0">
-              <a:buNone/>
-            </a:pPr>
-            <a:r>
-              <a:rPr lang="en-US" sz="1140" dirty="0">
-                <a:solidFill>
-                  <a:srgbClr val="17364A"/>
-                </a:solidFill>
-                <a:latin typeface="Aptos" pitchFamily="34" charset="0"/>
-                <a:ea typeface="Aptos" pitchFamily="34" charset="-122"/>
-                <a:cs typeface="Aptos" pitchFamily="34" charset="-120"/>
-              </a:rPr>
-              <a:t>What is the most important first step after.</a:t>
-            </a:r>
-            <a:endParaRPr lang="en-US" sz="1140" dirty="0"/>
-          </a:p>
-        </p:txBody>
-      </p:sp>
-      <p:sp>
-        <p:nvSpPr>
-          <p:cNvPr id="16" name="Shape 14"/>
-          <p:cNvSpPr/>
-          <p:nvPr/>
-        </p:nvSpPr>
-        <p:spPr>
-          <a:xfrm>
-            <a:off x="7543800" y="4389120"/>
-            <a:ext cx="3611880" cy="1261872"/>
-          </a:xfrm>
-          <a:prstGeom prst="roundRect">
-            <a:avLst>
-              <a:gd name="adj" fmla="val 8696"/>
-            </a:avLst>
-          </a:prstGeom>
-          <a:solidFill>
-            <a:srgbClr val="EAF6F8"/>
-          </a:solidFill>
-          <a:ln w="12700">
-            <a:solidFill>
-              <a:srgbClr val="B9D7E6"/>
-            </a:solidFill>
-            <a:prstDash val="solid"/>
-          </a:ln>
-        </p:spPr>
-      </p:sp>
-      <p:sp>
-        <p:nvSpPr>
-          <p:cNvPr id="17" name="Text 15"/>
-          <p:cNvSpPr/>
-          <p:nvPr/>
-        </p:nvSpPr>
-        <p:spPr>
-          <a:xfrm>
-            <a:off x="7708392" y="4517136"/>
-            <a:ext cx="3282696" cy="228600"/>
-          </a:xfrm>
-          <a:prstGeom prst="rect">
-            <a:avLst/>
-          </a:prstGeom>
-          <a:noFill/>
-          <a:ln/>
-        </p:spPr>
-        <p:txBody>
-          <a:bodyPr wrap="square" lIns="0" tIns="0" rIns="0" bIns="0" rtlCol="0" anchor="ctr"/>
-          <a:lstStyle/>
-          <a:p>
-            <a:pPr indent="0" marL="0">
-              <a:buNone/>
-            </a:pPr>
-            <a:r>
-              <a:rPr lang="en-US" sz="1220" b="1" dirty="0">
-                <a:solidFill>
-                  <a:srgbClr val="0068B7"/>
-                </a:solidFill>
-                <a:latin typeface="Aptos" pitchFamily="34" charset="0"/>
-                <a:ea typeface="Aptos" pitchFamily="34" charset="-122"/>
-                <a:cs typeface="Aptos" pitchFamily="34" charset="-120"/>
-              </a:rPr>
-              <a:t>What to produce</a:t>
-            </a:r>
-            <a:endParaRPr lang="en-US" sz="1220" dirty="0"/>
-          </a:p>
-        </p:txBody>
-      </p:sp>
-      <p:sp>
-        <p:nvSpPr>
-          <p:cNvPr id="18" name="Text 16"/>
-          <p:cNvSpPr/>
-          <p:nvPr/>
-        </p:nvSpPr>
-        <p:spPr>
-          <a:xfrm>
-            <a:off x="7708392" y="4828032"/>
-            <a:ext cx="3282696" cy="749808"/>
-          </a:xfrm>
-          <a:prstGeom prst="rect">
-            <a:avLst/>
-          </a:prstGeom>
-          <a:noFill/>
-          <a:ln/>
-        </p:spPr>
-        <p:txBody>
-          <a:bodyPr wrap="square" lIns="254" tIns="254" rIns="254" bIns="254" rtlCol="0" anchor="t">
-            <a:normAutofit/>
-          </a:bodyPr>
-          <a:lstStyle/>
-          <a:p>
-            <a:pPr indent="0" marL="0">
-              <a:buNone/>
-            </a:pPr>
-            <a:r>
-              <a:rPr lang="en-US" sz="1220" dirty="0">
-                <a:solidFill>
-                  <a:srgbClr val="17364A"/>
-                </a:solidFill>
-                <a:latin typeface="Aptos" pitchFamily="34" charset="0"/>
-                <a:ea typeface="Aptos" pitchFamily="34" charset="-122"/>
-                <a:cs typeface="Aptos" pitchFamily="34" charset="-120"/>
-              </a:rPr>
-              <a:t>Use the assignment to test whether you can explain the concept, apply it to a.</a:t>
-            </a:r>
-            <a:endParaRPr lang="en-US" sz="1220" dirty="0"/>
-          </a:p>
-        </p:txBody>
-      </p:sp>
-    </p:spTree>
-  </p:cSld>
-  <p:clrMapOvr>
-    <a:masterClrMapping/>
-  </p:clrMapOvr>
-</p:sld>
-</file>
-
-<file path=ppt/slides/slide26.xml><?xml version="1.0" encoding="utf-8"?>
-<p:sld xmlns:a="http://schemas.openxmlformats.org/drawingml/2006/main" xmlns:r="http://schemas.openxmlformats.org/officeDocument/2006/relationships" xmlns:p="http://schemas.openxmlformats.org/presentationml/2006/main">
-  <p:cSld name="Slide 26">
-    <p:bg>
-      <p:bgPr>
-        <a:solidFill>
-          <a:srgbClr val="F7FBFD"/>
-        </a:solidFill>
-      </p:bgPr>
-    </p:bg>
-    <p:spTree>
-      <p:nvGrpSpPr>
-        <p:cNvPr id="1" name=""/>
-        <p:cNvGrpSpPr/>
-        <p:nvPr/>
-      </p:nvGrpSpPr>
-      <p:grpSpPr>
-        <a:xfrm>
-          <a:off x="0" y="0"/>
-          <a:ext cx="0" cy="0"/>
-          <a:chOff x="0" y="0"/>
-          <a:chExt cx="0" cy="0"/>
-        </a:xfrm>
-      </p:grpSpPr>
-      <p:sp>
-        <p:nvSpPr>
-          <p:cNvPr id="2" name="Shape 0"/>
-          <p:cNvSpPr/>
-          <p:nvPr/>
-        </p:nvSpPr>
-        <p:spPr>
-          <a:xfrm>
-            <a:off x="0" y="0"/>
-            <a:ext cx="12191695" cy="164592"/>
-          </a:xfrm>
-          <a:prstGeom prst="rect">
-            <a:avLst/>
-          </a:prstGeom>
-          <a:solidFill>
-            <a:srgbClr val="0068B7"/>
-          </a:solidFill>
-          <a:ln w="12700">
-            <a:solidFill>
-              <a:srgbClr val="0068B7"/>
-            </a:solidFill>
-            <a:prstDash val="solid"/>
-          </a:ln>
-        </p:spPr>
-      </p:sp>
-      <p:sp>
-        <p:nvSpPr>
-          <p:cNvPr id="3" name="Shape 1"/>
-          <p:cNvSpPr/>
-          <p:nvPr/>
-        </p:nvSpPr>
-        <p:spPr>
-          <a:xfrm>
-            <a:off x="0" y="164592"/>
-            <a:ext cx="146304" cy="6693408"/>
-          </a:xfrm>
-          <a:prstGeom prst="rect">
-            <a:avLst/>
-          </a:prstGeom>
-          <a:solidFill>
-            <a:srgbClr val="2F8A28"/>
-          </a:solidFill>
-          <a:ln w="12700">
-            <a:solidFill>
-              <a:srgbClr val="2F8A28"/>
-            </a:solidFill>
-            <a:prstDash val="solid"/>
-          </a:ln>
-        </p:spPr>
-      </p:sp>
-      <p:sp>
-        <p:nvSpPr>
-          <p:cNvPr id="4" name="Text 2"/>
-          <p:cNvSpPr/>
-          <p:nvPr/>
-        </p:nvSpPr>
-        <p:spPr>
-          <a:xfrm>
-            <a:off x="502920" y="292608"/>
-            <a:ext cx="10149840" cy="256032"/>
-          </a:xfrm>
-          <a:prstGeom prst="rect">
-            <a:avLst/>
-          </a:prstGeom>
-          <a:noFill/>
-          <a:ln/>
-        </p:spPr>
-        <p:txBody>
-          <a:bodyPr wrap="square" lIns="0" tIns="0" rIns="0" bIns="0" rtlCol="0" anchor="ctr"/>
-          <a:lstStyle/>
-          <a:p>
-            <a:pPr indent="0" marL="0">
-              <a:buNone/>
-            </a:pPr>
-            <a:r>
-              <a:rPr lang="en-US" sz="900" b="1" dirty="0">
-                <a:solidFill>
-                  <a:srgbClr val="5F7181"/>
-                </a:solidFill>
-                <a:latin typeface="Aptos" pitchFamily="34" charset="0"/>
-                <a:ea typeface="Aptos" pitchFamily="34" charset="-122"/>
-                <a:cs typeface="Aptos" pitchFamily="34" charset="-120"/>
-              </a:rPr>
-              <a:t>Introduction to AI for Public Health</a:t>
-            </a:r>
-            <a:endParaRPr lang="en-US" sz="900" dirty="0"/>
-          </a:p>
-        </p:txBody>
-      </p:sp>
-      <p:sp>
-        <p:nvSpPr>
-          <p:cNvPr id="5" name="Text 3"/>
-          <p:cNvSpPr/>
-          <p:nvPr/>
-        </p:nvSpPr>
-        <p:spPr>
-          <a:xfrm>
-            <a:off x="502920" y="6537960"/>
-            <a:ext cx="7772400" cy="201168"/>
-          </a:xfrm>
-          <a:prstGeom prst="rect">
-            <a:avLst/>
-          </a:prstGeom>
-          <a:noFill/>
-          <a:ln/>
-        </p:spPr>
-        <p:txBody>
-          <a:bodyPr wrap="square" lIns="0" tIns="0" rIns="0" bIns="0" rtlCol="0" anchor="ctr"/>
-          <a:lstStyle/>
-          <a:p>
-            <a:pPr indent="0" marL="0">
-              <a:buNone/>
-            </a:pPr>
-            <a:r>
-              <a:rPr lang="en-US" sz="800" dirty="0">
-                <a:solidFill>
-                  <a:srgbClr val="5F7181"/>
-                </a:solidFill>
-                <a:latin typeface="Aptos" pitchFamily="34" charset="0"/>
-                <a:ea typeface="Aptos" pitchFamily="34" charset="-122"/>
-                <a:cs typeface="Aptos" pitchFamily="34" charset="-120"/>
-              </a:rPr>
-              <a:t>AI Playbook and Toolkit for Public Health Departments</a:t>
-            </a:r>
-            <a:endParaRPr lang="en-US" sz="800" dirty="0"/>
-          </a:p>
-        </p:txBody>
-      </p:sp>
-      <p:sp>
-        <p:nvSpPr>
-          <p:cNvPr id="6" name="Text 4"/>
-          <p:cNvSpPr/>
-          <p:nvPr/>
-        </p:nvSpPr>
-        <p:spPr>
-          <a:xfrm>
-            <a:off x="9646920" y="6537960"/>
-            <a:ext cx="1965960" cy="201168"/>
-          </a:xfrm>
-          <a:prstGeom prst="rect">
-            <a:avLst/>
-          </a:prstGeom>
-          <a:noFill/>
-          <a:ln/>
-        </p:spPr>
-        <p:txBody>
-          <a:bodyPr wrap="square" lIns="0" tIns="0" rIns="0" bIns="0" rtlCol="0" anchor="ctr"/>
-          <a:lstStyle/>
-          <a:p>
-            <a:pPr algn="r" indent="0" marL="0">
-              <a:buNone/>
-            </a:pPr>
-            <a:r>
-              <a:rPr lang="en-US" sz="800" dirty="0">
-                <a:solidFill>
-                  <a:srgbClr val="5F7181"/>
-                </a:solidFill>
-                <a:latin typeface="Aptos" pitchFamily="34" charset="0"/>
-                <a:ea typeface="Aptos" pitchFamily="34" charset="-122"/>
-                <a:cs typeface="Aptos" pitchFamily="34" charset="-120"/>
-              </a:rPr>
-              <a:t>Copyright Paula Soper</a:t>
-            </a:r>
-            <a:endParaRPr lang="en-US" sz="800" dirty="0"/>
-          </a:p>
-        </p:txBody>
-      </p:sp>
-      <p:sp>
-        <p:nvSpPr>
-          <p:cNvPr id="7" name="Text 5"/>
-          <p:cNvSpPr/>
-          <p:nvPr/>
-        </p:nvSpPr>
-        <p:spPr>
-          <a:xfrm>
-            <a:off x="11137392" y="6510528"/>
-            <a:ext cx="411480" cy="201168"/>
-          </a:xfrm>
-          <a:prstGeom prst="rect">
-            <a:avLst/>
-          </a:prstGeom>
-          <a:noFill/>
-          <a:ln/>
-        </p:spPr>
-        <p:txBody>
-          <a:bodyPr wrap="square" lIns="0" tIns="0" rIns="0" bIns="0" rtlCol="0" anchor="ctr"/>
-          <a:lstStyle/>
-          <a:p>
-            <a:pPr algn="r" indent="0" marL="0">
-              <a:buNone/>
-            </a:pPr>
-            <a:r>
-              <a:rPr lang="en-US" sz="900" dirty="0">
-                <a:solidFill>
-                  <a:srgbClr val="5F7181"/>
-                </a:solidFill>
-                <a:latin typeface="Aptos" pitchFamily="34" charset="0"/>
-                <a:ea typeface="Aptos" pitchFamily="34" charset="-122"/>
-                <a:cs typeface="Aptos" pitchFamily="34" charset="-120"/>
-              </a:rPr>
-              <a:t>26</a:t>
-            </a:r>
-            <a:endParaRPr lang="en-US" sz="900" dirty="0"/>
-          </a:p>
-        </p:txBody>
-      </p:sp>
-      <p:sp>
-        <p:nvSpPr>
-          <p:cNvPr id="8" name="Text 6"/>
-          <p:cNvSpPr/>
-          <p:nvPr/>
-        </p:nvSpPr>
-        <p:spPr>
-          <a:xfrm>
-            <a:off x="640080" y="658368"/>
-            <a:ext cx="10881360" cy="713232"/>
-          </a:xfrm>
-          <a:prstGeom prst="rect">
-            <a:avLst/>
-          </a:prstGeom>
-          <a:noFill/>
-          <a:ln/>
-        </p:spPr>
-        <p:txBody>
-          <a:bodyPr wrap="square" lIns="0" tIns="0" rIns="0" bIns="0" rtlCol="0" anchor="ctr">
-            <a:normAutofit/>
-          </a:bodyPr>
-          <a:lstStyle/>
-          <a:p>
-            <a:pPr indent="0" marL="0">
-              <a:buNone/>
-            </a:pPr>
-            <a:r>
-              <a:rPr lang="en-US" sz="3400" b="1" dirty="0">
-                <a:solidFill>
-                  <a:srgbClr val="003A63"/>
-                </a:solidFill>
-                <a:latin typeface="Aptos Display" pitchFamily="34" charset="0"/>
-                <a:ea typeface="Aptos Display" pitchFamily="34" charset="-122"/>
-                <a:cs typeface="Aptos Display" pitchFamily="34" charset="-120"/>
-              </a:rPr>
-              <a:t>References and Resources</a:t>
-            </a:r>
-            <a:endParaRPr lang="en-US" sz="3400" dirty="0"/>
-          </a:p>
-        </p:txBody>
-      </p:sp>
-      <p:sp>
-        <p:nvSpPr>
-          <p:cNvPr id="9" name="Text 7"/>
-          <p:cNvSpPr/>
-          <p:nvPr/>
-        </p:nvSpPr>
-        <p:spPr>
-          <a:xfrm>
-            <a:off x="822960" y="1463040"/>
-            <a:ext cx="6565392" cy="4343400"/>
-          </a:xfrm>
-          <a:prstGeom prst="rect">
-            <a:avLst/>
-          </a:prstGeom>
-          <a:noFill/>
-          <a:ln/>
-        </p:spPr>
-        <p:txBody>
-          <a:bodyPr wrap="square" lIns="1016" tIns="1016" rIns="1016" bIns="1016" rtlCol="0" anchor="t">
-            <a:normAutofit/>
-          </a:bodyPr>
-          <a:lstStyle/>
-          <a:p>
-            <a:pPr indent="0" marL="0">
-              <a:buNone/>
-            </a:pPr>
-            <a:r>
-              <a:rPr lang="en-US" sz="1920" dirty="0">
-                <a:solidFill>
-                  <a:srgbClr val="003A63"/>
-                </a:solidFill>
-                <a:latin typeface="Aptos" pitchFamily="34" charset="0"/>
-                <a:ea typeface="Aptos" pitchFamily="34" charset="-122"/>
-                <a:cs typeface="Aptos" pitchFamily="34" charset="-120"/>
-              </a:rPr>
-              <a:t>• NIST AI Risk Management Framework: Foundational vocabulary for trustworthy.</a:t>
-            </a:r>
-            <a:endParaRPr lang="en-US" sz="1920" dirty="0"/>
-          </a:p>
-          <a:p>
-            <a:pPr indent="0" marL="0">
-              <a:buNone/>
-            </a:pPr>
-            <a:r>
-              <a:rPr lang="en-US" sz="1920" dirty="0">
-                <a:solidFill>
-                  <a:srgbClr val="003A63"/>
-                </a:solidFill>
-                <a:latin typeface="Aptos" pitchFamily="34" charset="0"/>
-                <a:ea typeface="Aptos" pitchFamily="34" charset="-122"/>
-                <a:cs typeface="Aptos" pitchFamily="34" charset="-120"/>
-              </a:rPr>
-              <a:t>• ASPPH AI Framework Report: Public health framing for responsible AI.</a:t>
-            </a:r>
-            <a:endParaRPr lang="en-US" sz="1920" dirty="0"/>
-          </a:p>
-          <a:p>
-            <a:pPr indent="0" marL="0">
-              <a:buNone/>
-            </a:pPr>
-            <a:r>
-              <a:rPr lang="en-US" sz="1920" dirty="0">
-                <a:solidFill>
-                  <a:srgbClr val="003A63"/>
-                </a:solidFill>
-                <a:latin typeface="Aptos" pitchFamily="34" charset="0"/>
-                <a:ea typeface="Aptos" pitchFamily="34" charset="-122"/>
-                <a:cs typeface="Aptos" pitchFamily="34" charset="-120"/>
-              </a:rPr>
-              <a:t>• WHO: Ethics and governance of artificial intelligence for health:.</a:t>
-            </a:r>
-            <a:endParaRPr lang="en-US" sz="1920" dirty="0"/>
-          </a:p>
-        </p:txBody>
-      </p:sp>
-      <p:sp>
-        <p:nvSpPr>
-          <p:cNvPr id="10" name="Shape 8"/>
-          <p:cNvSpPr/>
-          <p:nvPr/>
-        </p:nvSpPr>
-        <p:spPr>
-          <a:xfrm>
-            <a:off x="7543800" y="1325880"/>
-            <a:ext cx="3611880" cy="1261872"/>
-          </a:xfrm>
-          <a:prstGeom prst="roundRect">
-            <a:avLst>
-              <a:gd name="adj" fmla="val 8696"/>
-            </a:avLst>
-          </a:prstGeom>
-          <a:solidFill>
-            <a:srgbClr val="EEF8ED"/>
-          </a:solidFill>
-          <a:ln w="12700">
-            <a:solidFill>
-              <a:srgbClr val="B9D7E6"/>
-            </a:solidFill>
-            <a:prstDash val="solid"/>
-          </a:ln>
-        </p:spPr>
-      </p:sp>
-      <p:sp>
-        <p:nvSpPr>
-          <p:cNvPr id="11" name="Text 9"/>
-          <p:cNvSpPr/>
-          <p:nvPr/>
-        </p:nvSpPr>
-        <p:spPr>
-          <a:xfrm>
-            <a:off x="7708392" y="1453896"/>
-            <a:ext cx="3282696" cy="228600"/>
-          </a:xfrm>
-          <a:prstGeom prst="rect">
-            <a:avLst/>
-          </a:prstGeom>
-          <a:noFill/>
-          <a:ln/>
-        </p:spPr>
-        <p:txBody>
-          <a:bodyPr wrap="square" lIns="0" tIns="0" rIns="0" bIns="0" rtlCol="0" anchor="ctr"/>
-          <a:lstStyle/>
-          <a:p>
-            <a:pPr indent="0" marL="0">
-              <a:buNone/>
-            </a:pPr>
-            <a:r>
-              <a:rPr lang="en-US" sz="1220" b="1" dirty="0">
-                <a:solidFill>
-                  <a:srgbClr val="0068B7"/>
-                </a:solidFill>
-                <a:latin typeface="Aptos" pitchFamily="34" charset="0"/>
-                <a:ea typeface="Aptos" pitchFamily="34" charset="-122"/>
-                <a:cs typeface="Aptos" pitchFamily="34" charset="-120"/>
-              </a:rPr>
-              <a:t>Core concept</a:t>
-            </a:r>
-            <a:endParaRPr lang="en-US" sz="1220" dirty="0"/>
-          </a:p>
-        </p:txBody>
-      </p:sp>
-      <p:sp>
-        <p:nvSpPr>
-          <p:cNvPr id="12" name="Text 10"/>
-          <p:cNvSpPr/>
-          <p:nvPr/>
-        </p:nvSpPr>
-        <p:spPr>
-          <a:xfrm>
-            <a:off x="7708392" y="1764792"/>
-            <a:ext cx="3282696" cy="749808"/>
-          </a:xfrm>
-          <a:prstGeom prst="rect">
-            <a:avLst/>
-          </a:prstGeom>
-          <a:noFill/>
-          <a:ln/>
-        </p:spPr>
-        <p:txBody>
-          <a:bodyPr wrap="square" lIns="254" tIns="254" rIns="254" bIns="254" rtlCol="0" anchor="t">
-            <a:normAutofit/>
-          </a:bodyPr>
-          <a:lstStyle/>
-          <a:p>
-            <a:pPr indent="0" marL="0">
-              <a:buNone/>
-            </a:pPr>
-            <a:r>
-              <a:rPr lang="en-US" sz="1220" dirty="0">
-                <a:solidFill>
-                  <a:srgbClr val="17364A"/>
-                </a:solidFill>
-                <a:latin typeface="Aptos" pitchFamily="34" charset="0"/>
-                <a:ea typeface="Aptos" pitchFamily="34" charset="-122"/>
-                <a:cs typeface="Aptos" pitchFamily="34" charset="-120"/>
-              </a:rPr>
-              <a:t>NIST AI Risk Management Framework: Foundational vocabulary for trustworthy AI.</a:t>
-            </a:r>
-            <a:endParaRPr lang="en-US" sz="1220" dirty="0"/>
-          </a:p>
-        </p:txBody>
-      </p:sp>
-      <p:sp>
-        <p:nvSpPr>
-          <p:cNvPr id="13" name="Shape 11"/>
-          <p:cNvSpPr/>
-          <p:nvPr/>
-        </p:nvSpPr>
-        <p:spPr>
-          <a:xfrm>
-            <a:off x="7543800" y="2724912"/>
-            <a:ext cx="3611880" cy="1527048"/>
-          </a:xfrm>
-          <a:prstGeom prst="roundRect">
-            <a:avLst>
-              <a:gd name="adj" fmla="val 7186"/>
-            </a:avLst>
-          </a:prstGeom>
-          <a:solidFill>
-            <a:srgbClr val="FFFFFF"/>
-          </a:solidFill>
-          <a:ln w="12700">
-            <a:solidFill>
-              <a:srgbClr val="B9D7E6"/>
-            </a:solidFill>
-            <a:prstDash val="solid"/>
-          </a:ln>
-        </p:spPr>
-      </p:sp>
-      <p:sp>
-        <p:nvSpPr>
-          <p:cNvPr id="14" name="Text 12"/>
-          <p:cNvSpPr/>
-          <p:nvPr/>
-        </p:nvSpPr>
-        <p:spPr>
-          <a:xfrm>
-            <a:off x="7708392" y="2852928"/>
-            <a:ext cx="3282696" cy="228600"/>
-          </a:xfrm>
-          <a:prstGeom prst="rect">
-            <a:avLst/>
-          </a:prstGeom>
-          <a:noFill/>
-          <a:ln/>
-        </p:spPr>
-        <p:txBody>
-          <a:bodyPr wrap="square" lIns="0" tIns="0" rIns="0" bIns="0" rtlCol="0" anchor="ctr"/>
-          <a:lstStyle/>
-          <a:p>
-            <a:pPr indent="0" marL="0">
-              <a:buNone/>
-            </a:pPr>
-            <a:r>
-              <a:rPr lang="en-US" sz="1220" b="1" dirty="0">
-                <a:solidFill>
-                  <a:srgbClr val="0068B7"/>
-                </a:solidFill>
-                <a:latin typeface="Aptos" pitchFamily="34" charset="0"/>
-                <a:ea typeface="Aptos" pitchFamily="34" charset="-122"/>
-                <a:cs typeface="Aptos" pitchFamily="34" charset="-120"/>
-              </a:rPr>
-              <a:t>Concept checkpoints</a:t>
-            </a:r>
-            <a:endParaRPr lang="en-US" sz="1220" dirty="0"/>
-          </a:p>
-        </p:txBody>
-      </p:sp>
-      <p:sp>
-        <p:nvSpPr>
-          <p:cNvPr id="15" name="Text 13"/>
-          <p:cNvSpPr/>
-          <p:nvPr/>
-        </p:nvSpPr>
-        <p:spPr>
-          <a:xfrm>
-            <a:off x="7726680" y="3182112"/>
-            <a:ext cx="3227832" cy="960120"/>
-          </a:xfrm>
-          <a:prstGeom prst="rect">
-            <a:avLst/>
-          </a:prstGeom>
-          <a:noFill/>
-          <a:ln/>
-        </p:spPr>
-        <p:txBody>
-          <a:bodyPr wrap="square" lIns="508" tIns="508" rIns="508" bIns="508" rtlCol="0" anchor="t">
-            <a:normAutofit/>
-          </a:bodyPr>
-          <a:lstStyle/>
-          <a:p>
-            <a:pPr indent="0" marL="0">
-              <a:buNone/>
-            </a:pPr>
-            <a:r>
-              <a:rPr lang="en-US" sz="1140" dirty="0">
-                <a:solidFill>
-                  <a:srgbClr val="17364A"/>
-                </a:solidFill>
-                <a:latin typeface="Aptos" pitchFamily="34" charset="0"/>
-                <a:ea typeface="Aptos" pitchFamily="34" charset="-122"/>
-                <a:cs typeface="Aptos" pitchFamily="34" charset="-120"/>
-              </a:rPr>
-              <a:t>ASPPH AI Framework Report: Public health framing.</a:t>
-            </a:r>
-            <a:endParaRPr lang="en-US" sz="1140" dirty="0"/>
-          </a:p>
-          <a:p>
-            <a:pPr indent="0" marL="0">
-              <a:buNone/>
-            </a:pPr>
-            <a:r>
-              <a:rPr lang="en-US" sz="1140" dirty="0">
-                <a:solidFill>
-                  <a:srgbClr val="17364A"/>
-                </a:solidFill>
-                <a:latin typeface="Aptos" pitchFamily="34" charset="0"/>
-                <a:ea typeface="Aptos" pitchFamily="34" charset="-122"/>
-                <a:cs typeface="Aptos" pitchFamily="34" charset="-120"/>
-              </a:rPr>
-              <a:t>WHO: Ethics and governance of artificial.</a:t>
-            </a:r>
-            <a:endParaRPr lang="en-US" sz="1140" dirty="0"/>
-          </a:p>
-          <a:p>
-            <a:pPr indent="0" marL="0">
-              <a:buNone/>
-            </a:pPr>
-            <a:r>
-              <a:rPr lang="en-US" sz="1140" dirty="0">
-                <a:solidFill>
-                  <a:srgbClr val="17364A"/>
-                </a:solidFill>
-                <a:latin typeface="Aptos" pitchFamily="34" charset="0"/>
-                <a:ea typeface="Aptos" pitchFamily="34" charset="-122"/>
-                <a:cs typeface="Aptos" pitchFamily="34" charset="-120"/>
-              </a:rPr>
-              <a:t>NIH PubMed: Primary source for biomedical and.</a:t>
-            </a:r>
-            <a:endParaRPr lang="en-US" sz="1140" dirty="0"/>
-          </a:p>
-        </p:txBody>
-      </p:sp>
-      <p:sp>
-        <p:nvSpPr>
-          <p:cNvPr id="16" name="Shape 14"/>
-          <p:cNvSpPr/>
-          <p:nvPr/>
-        </p:nvSpPr>
-        <p:spPr>
-          <a:xfrm>
-            <a:off x="7543800" y="4389120"/>
-            <a:ext cx="3611880" cy="1261872"/>
-          </a:xfrm>
-          <a:prstGeom prst="roundRect">
-            <a:avLst>
-              <a:gd name="adj" fmla="val 8696"/>
-            </a:avLst>
-          </a:prstGeom>
-          <a:solidFill>
-            <a:srgbClr val="EAF6F8"/>
-          </a:solidFill>
-          <a:ln w="12700">
-            <a:solidFill>
-              <a:srgbClr val="B9D7E6"/>
-            </a:solidFill>
-            <a:prstDash val="solid"/>
-          </a:ln>
-        </p:spPr>
-      </p:sp>
-      <p:sp>
-        <p:nvSpPr>
-          <p:cNvPr id="17" name="Text 15"/>
-          <p:cNvSpPr/>
-          <p:nvPr/>
-        </p:nvSpPr>
-        <p:spPr>
-          <a:xfrm>
-            <a:off x="7708392" y="4517136"/>
-            <a:ext cx="3282696" cy="228600"/>
-          </a:xfrm>
-          <a:prstGeom prst="rect">
-            <a:avLst/>
-          </a:prstGeom>
-          <a:noFill/>
-          <a:ln/>
-        </p:spPr>
-        <p:txBody>
-          <a:bodyPr wrap="square" lIns="0" tIns="0" rIns="0" bIns="0" rtlCol="0" anchor="ctr"/>
-          <a:lstStyle/>
-          <a:p>
-            <a:pPr indent="0" marL="0">
-              <a:buNone/>
-            </a:pPr>
-            <a:r>
-              <a:rPr lang="en-US" sz="1220" b="1" dirty="0">
-                <a:solidFill>
-                  <a:srgbClr val="0068B7"/>
-                </a:solidFill>
-                <a:latin typeface="Aptos" pitchFamily="34" charset="0"/>
-                <a:ea typeface="Aptos" pitchFamily="34" charset="-122"/>
-                <a:cs typeface="Aptos" pitchFamily="34" charset="-120"/>
-              </a:rPr>
-              <a:t>Apply it</a:t>
-            </a:r>
-            <a:endParaRPr lang="en-US" sz="1220" dirty="0"/>
-          </a:p>
-        </p:txBody>
-      </p:sp>
-      <p:sp>
-        <p:nvSpPr>
-          <p:cNvPr id="18" name="Text 16"/>
-          <p:cNvSpPr/>
-          <p:nvPr/>
-        </p:nvSpPr>
-        <p:spPr>
-          <a:xfrm>
-            <a:off x="7708392" y="4828032"/>
-            <a:ext cx="3282696" cy="749808"/>
-          </a:xfrm>
-          <a:prstGeom prst="rect">
-            <a:avLst/>
-          </a:prstGeom>
-          <a:noFill/>
-          <a:ln/>
-        </p:spPr>
-        <p:txBody>
-          <a:bodyPr wrap="square" lIns="254" tIns="254" rIns="254" bIns="254" rtlCol="0" anchor="t">
-            <a:normAutofit/>
-          </a:bodyPr>
-          <a:lstStyle/>
-          <a:p>
-            <a:pPr indent="0" marL="0">
-              <a:buNone/>
-            </a:pPr>
-            <a:r>
-              <a:rPr lang="en-US" sz="1220" dirty="0">
-                <a:solidFill>
-                  <a:srgbClr val="17364A"/>
-                </a:solidFill>
-                <a:latin typeface="Aptos" pitchFamily="34" charset="0"/>
-                <a:ea typeface="Aptos" pitchFamily="34" charset="-122"/>
-                <a:cs typeface="Aptos" pitchFamily="34" charset="-120"/>
-              </a:rPr>
-              <a:t>Connect the concept to public health purpose, responsible use, required.</a:t>
-            </a:r>
-            <a:endParaRPr lang="en-US" sz="1220" dirty="0"/>
-          </a:p>
-        </p:txBody>
-      </p:sp>
-    </p:spTree>
-  </p:cSld>
-  <p:clrMapOvr>
-    <a:masterClrMapping/>
-  </p:clrMapOvr>
-</p:sld>
-</file>
-
-<file path=ppt/slides/slide27.xml><?xml version="1.0" encoding="utf-8"?>
-<p:sld xmlns:a="http://schemas.openxmlformats.org/drawingml/2006/main" xmlns:r="http://schemas.openxmlformats.org/officeDocument/2006/relationships" xmlns:p="http://schemas.openxmlformats.org/presentationml/2006/main">
-  <p:cSld name="Slide 27">
-    <p:bg>
-      <p:bgPr>
-        <a:solidFill>
-          <a:srgbClr val="F7FBFD"/>
-        </a:solidFill>
-      </p:bgPr>
-    </p:bg>
-    <p:spTree>
-      <p:nvGrpSpPr>
-        <p:cNvPr id="1" name=""/>
-        <p:cNvGrpSpPr/>
-        <p:nvPr/>
-      </p:nvGrpSpPr>
-      <p:grpSpPr>
-        <a:xfrm>
-          <a:off x="0" y="0"/>
-          <a:ext cx="0" cy="0"/>
-          <a:chOff x="0" y="0"/>
-          <a:chExt cx="0" cy="0"/>
-        </a:xfrm>
-      </p:grpSpPr>
-      <p:sp>
-        <p:nvSpPr>
-          <p:cNvPr id="2" name="Shape 0"/>
-          <p:cNvSpPr/>
-          <p:nvPr/>
-        </p:nvSpPr>
-        <p:spPr>
-          <a:xfrm>
-            <a:off x="0" y="0"/>
-            <a:ext cx="12191695" cy="164592"/>
-          </a:xfrm>
-          <a:prstGeom prst="rect">
-            <a:avLst/>
-          </a:prstGeom>
-          <a:solidFill>
-            <a:srgbClr val="0068B7"/>
-          </a:solidFill>
-          <a:ln w="12700">
-            <a:solidFill>
-              <a:srgbClr val="0068B7"/>
-            </a:solidFill>
-            <a:prstDash val="solid"/>
-          </a:ln>
-        </p:spPr>
-      </p:sp>
-      <p:sp>
-        <p:nvSpPr>
-          <p:cNvPr id="3" name="Shape 1"/>
-          <p:cNvSpPr/>
-          <p:nvPr/>
-        </p:nvSpPr>
-        <p:spPr>
-          <a:xfrm>
-            <a:off x="0" y="164592"/>
-            <a:ext cx="146304" cy="6693408"/>
-          </a:xfrm>
-          <a:prstGeom prst="rect">
-            <a:avLst/>
-          </a:prstGeom>
-          <a:solidFill>
-            <a:srgbClr val="2F8A28"/>
-          </a:solidFill>
-          <a:ln w="12700">
-            <a:solidFill>
-              <a:srgbClr val="2F8A28"/>
-            </a:solidFill>
-            <a:prstDash val="solid"/>
-          </a:ln>
-        </p:spPr>
-      </p:sp>
-      <p:sp>
-        <p:nvSpPr>
-          <p:cNvPr id="4" name="Text 2"/>
-          <p:cNvSpPr/>
-          <p:nvPr/>
-        </p:nvSpPr>
-        <p:spPr>
-          <a:xfrm>
-            <a:off x="502920" y="292608"/>
-            <a:ext cx="10149840" cy="256032"/>
-          </a:xfrm>
-          <a:prstGeom prst="rect">
-            <a:avLst/>
-          </a:prstGeom>
-          <a:noFill/>
-          <a:ln/>
-        </p:spPr>
-        <p:txBody>
-          <a:bodyPr wrap="square" lIns="0" tIns="0" rIns="0" bIns="0" rtlCol="0" anchor="ctr"/>
-          <a:lstStyle/>
-          <a:p>
-            <a:pPr indent="0" marL="0">
-              <a:buNone/>
-            </a:pPr>
-            <a:r>
-              <a:rPr lang="en-US" sz="900" b="1" dirty="0">
-                <a:solidFill>
-                  <a:srgbClr val="5F7181"/>
-                </a:solidFill>
-                <a:latin typeface="Aptos" pitchFamily="34" charset="0"/>
-                <a:ea typeface="Aptos" pitchFamily="34" charset="-122"/>
-                <a:cs typeface="Aptos" pitchFamily="34" charset="-120"/>
-              </a:rPr>
-              <a:t>Introduction to AI for Public Health</a:t>
-            </a:r>
-            <a:endParaRPr lang="en-US" sz="900" dirty="0"/>
-          </a:p>
-        </p:txBody>
-      </p:sp>
-      <p:sp>
-        <p:nvSpPr>
-          <p:cNvPr id="5" name="Text 3"/>
-          <p:cNvSpPr/>
-          <p:nvPr/>
-        </p:nvSpPr>
-        <p:spPr>
-          <a:xfrm>
-            <a:off x="502920" y="6537960"/>
-            <a:ext cx="7772400" cy="201168"/>
-          </a:xfrm>
-          <a:prstGeom prst="rect">
-            <a:avLst/>
-          </a:prstGeom>
-          <a:noFill/>
-          <a:ln/>
-        </p:spPr>
-        <p:txBody>
-          <a:bodyPr wrap="square" lIns="0" tIns="0" rIns="0" bIns="0" rtlCol="0" anchor="ctr"/>
-          <a:lstStyle/>
-          <a:p>
-            <a:pPr indent="0" marL="0">
-              <a:buNone/>
-            </a:pPr>
-            <a:r>
-              <a:rPr lang="en-US" sz="800" dirty="0">
-                <a:solidFill>
-                  <a:srgbClr val="5F7181"/>
-                </a:solidFill>
-                <a:latin typeface="Aptos" pitchFamily="34" charset="0"/>
-                <a:ea typeface="Aptos" pitchFamily="34" charset="-122"/>
-                <a:cs typeface="Aptos" pitchFamily="34" charset="-120"/>
-              </a:rPr>
-              <a:t>AI Playbook and Toolkit for Public Health Departments</a:t>
-            </a:r>
-            <a:endParaRPr lang="en-US" sz="800" dirty="0"/>
-          </a:p>
-        </p:txBody>
-      </p:sp>
-      <p:sp>
-        <p:nvSpPr>
-          <p:cNvPr id="6" name="Text 4"/>
-          <p:cNvSpPr/>
-          <p:nvPr/>
-        </p:nvSpPr>
-        <p:spPr>
-          <a:xfrm>
-            <a:off x="9646920" y="6537960"/>
-            <a:ext cx="1965960" cy="201168"/>
-          </a:xfrm>
-          <a:prstGeom prst="rect">
-            <a:avLst/>
-          </a:prstGeom>
-          <a:noFill/>
-          <a:ln/>
-        </p:spPr>
-        <p:txBody>
-          <a:bodyPr wrap="square" lIns="0" tIns="0" rIns="0" bIns="0" rtlCol="0" anchor="ctr"/>
-          <a:lstStyle/>
-          <a:p>
-            <a:pPr algn="r" indent="0" marL="0">
-              <a:buNone/>
-            </a:pPr>
-            <a:r>
-              <a:rPr lang="en-US" sz="800" dirty="0">
-                <a:solidFill>
-                  <a:srgbClr val="5F7181"/>
-                </a:solidFill>
-                <a:latin typeface="Aptos" pitchFamily="34" charset="0"/>
-                <a:ea typeface="Aptos" pitchFamily="34" charset="-122"/>
-                <a:cs typeface="Aptos" pitchFamily="34" charset="-120"/>
-              </a:rPr>
-              <a:t>Copyright Paula Soper</a:t>
-            </a:r>
-            <a:endParaRPr lang="en-US" sz="800" dirty="0"/>
-          </a:p>
-        </p:txBody>
-      </p:sp>
-      <p:sp>
-        <p:nvSpPr>
-          <p:cNvPr id="7" name="Text 5"/>
-          <p:cNvSpPr/>
-          <p:nvPr/>
-        </p:nvSpPr>
-        <p:spPr>
-          <a:xfrm>
-            <a:off x="11137392" y="6510528"/>
-            <a:ext cx="411480" cy="201168"/>
-          </a:xfrm>
-          <a:prstGeom prst="rect">
-            <a:avLst/>
-          </a:prstGeom>
-          <a:noFill/>
-          <a:ln/>
-        </p:spPr>
-        <p:txBody>
-          <a:bodyPr wrap="square" lIns="0" tIns="0" rIns="0" bIns="0" rtlCol="0" anchor="ctr"/>
-          <a:lstStyle/>
-          <a:p>
-            <a:pPr algn="r" indent="0" marL="0">
-              <a:buNone/>
-            </a:pPr>
-            <a:r>
-              <a:rPr lang="en-US" sz="900" dirty="0">
-                <a:solidFill>
-                  <a:srgbClr val="5F7181"/>
-                </a:solidFill>
-                <a:latin typeface="Aptos" pitchFamily="34" charset="0"/>
-                <a:ea typeface="Aptos" pitchFamily="34" charset="-122"/>
-                <a:cs typeface="Aptos" pitchFamily="34" charset="-120"/>
-              </a:rPr>
-              <a:t>27</a:t>
-            </a:r>
-            <a:endParaRPr lang="en-US" sz="900" dirty="0"/>
-          </a:p>
-        </p:txBody>
-      </p:sp>
-      <p:sp>
-        <p:nvSpPr>
-          <p:cNvPr id="8" name="Text 6"/>
-          <p:cNvSpPr/>
-          <p:nvPr/>
-        </p:nvSpPr>
-        <p:spPr>
-          <a:xfrm>
-            <a:off x="640080" y="658368"/>
-            <a:ext cx="10881360" cy="713232"/>
-          </a:xfrm>
-          <a:prstGeom prst="rect">
-            <a:avLst/>
-          </a:prstGeom>
-          <a:noFill/>
-          <a:ln/>
-        </p:spPr>
-        <p:txBody>
-          <a:bodyPr wrap="square" lIns="0" tIns="0" rIns="0" bIns="0" rtlCol="0" anchor="ctr">
-            <a:normAutofit/>
-          </a:bodyPr>
-          <a:lstStyle/>
-          <a:p>
-            <a:pPr indent="0" marL="0">
-              <a:buNone/>
-            </a:pPr>
-            <a:r>
-              <a:rPr lang="en-US" sz="3400" b="1" dirty="0">
-                <a:solidFill>
-                  <a:srgbClr val="003A63"/>
-                </a:solidFill>
-                <a:latin typeface="Aptos Display" pitchFamily="34" charset="0"/>
-                <a:ea typeface="Aptos Display" pitchFamily="34" charset="-122"/>
-                <a:cs typeface="Aptos Display" pitchFamily="34" charset="-120"/>
-              </a:rPr>
-              <a:t>References and Resources Continued</a:t>
-            </a:r>
-            <a:endParaRPr lang="en-US" sz="3400" dirty="0"/>
-          </a:p>
-        </p:txBody>
-      </p:sp>
-      <p:sp>
-        <p:nvSpPr>
-          <p:cNvPr id="9" name="Text 7"/>
-          <p:cNvSpPr/>
-          <p:nvPr/>
-        </p:nvSpPr>
-        <p:spPr>
-          <a:xfrm>
-            <a:off x="822960" y="1463040"/>
-            <a:ext cx="6565392" cy="4343400"/>
-          </a:xfrm>
-          <a:prstGeom prst="rect">
-            <a:avLst/>
-          </a:prstGeom>
-          <a:noFill/>
-          <a:ln/>
-        </p:spPr>
-        <p:txBody>
-          <a:bodyPr wrap="square" lIns="1016" tIns="1016" rIns="1016" bIns="1016" rtlCol="0" anchor="t">
-            <a:normAutofit/>
-          </a:bodyPr>
-          <a:lstStyle/>
-          <a:p>
-            <a:pPr indent="0" marL="0">
-              <a:buNone/>
-            </a:pPr>
-            <a:r>
-              <a:rPr lang="en-US" sz="1920" dirty="0">
-                <a:solidFill>
-                  <a:srgbClr val="003A63"/>
-                </a:solidFill>
-                <a:latin typeface="Aptos" pitchFamily="34" charset="0"/>
-                <a:ea typeface="Aptos" pitchFamily="34" charset="-122"/>
-                <a:cs typeface="Aptos" pitchFamily="34" charset="-120"/>
-              </a:rPr>
-              <a:t>• ASPPH AI Framework Report: Framework language for responsible use of.</a:t>
-            </a:r>
-            <a:endParaRPr lang="en-US" sz="1920" dirty="0"/>
-          </a:p>
-        </p:txBody>
-      </p:sp>
-      <p:sp>
-        <p:nvSpPr>
-          <p:cNvPr id="10" name="Shape 8"/>
-          <p:cNvSpPr/>
-          <p:nvPr/>
-        </p:nvSpPr>
-        <p:spPr>
-          <a:xfrm>
-            <a:off x="7543800" y="1325880"/>
-            <a:ext cx="3611880" cy="1261872"/>
-          </a:xfrm>
-          <a:prstGeom prst="roundRect">
-            <a:avLst>
-              <a:gd name="adj" fmla="val 8696"/>
-            </a:avLst>
-          </a:prstGeom>
-          <a:solidFill>
-            <a:srgbClr val="EEF8ED"/>
-          </a:solidFill>
-          <a:ln w="12700">
-            <a:solidFill>
-              <a:srgbClr val="B9D7E6"/>
-            </a:solidFill>
-            <a:prstDash val="solid"/>
-          </a:ln>
-        </p:spPr>
-      </p:sp>
-      <p:sp>
-        <p:nvSpPr>
-          <p:cNvPr id="11" name="Text 9"/>
-          <p:cNvSpPr/>
-          <p:nvPr/>
-        </p:nvSpPr>
-        <p:spPr>
-          <a:xfrm>
-            <a:off x="7708392" y="1453896"/>
-            <a:ext cx="3282696" cy="228600"/>
-          </a:xfrm>
-          <a:prstGeom prst="rect">
-            <a:avLst/>
-          </a:prstGeom>
-          <a:noFill/>
-          <a:ln/>
-        </p:spPr>
-        <p:txBody>
-          <a:bodyPr wrap="square" lIns="0" tIns="0" rIns="0" bIns="0" rtlCol="0" anchor="ctr"/>
-          <a:lstStyle/>
-          <a:p>
-            <a:pPr indent="0" marL="0">
-              <a:buNone/>
-            </a:pPr>
-            <a:r>
-              <a:rPr lang="en-US" sz="1220" b="1" dirty="0">
-                <a:solidFill>
-                  <a:srgbClr val="0068B7"/>
-                </a:solidFill>
-                <a:latin typeface="Aptos" pitchFamily="34" charset="0"/>
-                <a:ea typeface="Aptos" pitchFamily="34" charset="-122"/>
-                <a:cs typeface="Aptos" pitchFamily="34" charset="-120"/>
-              </a:rPr>
-              <a:t>Core concept</a:t>
-            </a:r>
-            <a:endParaRPr lang="en-US" sz="1220" dirty="0"/>
-          </a:p>
-        </p:txBody>
-      </p:sp>
-      <p:sp>
-        <p:nvSpPr>
-          <p:cNvPr id="12" name="Text 10"/>
-          <p:cNvSpPr/>
-          <p:nvPr/>
-        </p:nvSpPr>
-        <p:spPr>
-          <a:xfrm>
-            <a:off x="7708392" y="1764792"/>
-            <a:ext cx="3282696" cy="749808"/>
-          </a:xfrm>
-          <a:prstGeom prst="rect">
-            <a:avLst/>
-          </a:prstGeom>
-          <a:noFill/>
-          <a:ln/>
-        </p:spPr>
-        <p:txBody>
-          <a:bodyPr wrap="square" lIns="254" tIns="254" rIns="254" bIns="254" rtlCol="0" anchor="t">
-            <a:normAutofit/>
-          </a:bodyPr>
-          <a:lstStyle/>
-          <a:p>
-            <a:pPr indent="0" marL="0">
-              <a:buNone/>
-            </a:pPr>
-            <a:r>
-              <a:rPr lang="en-US" sz="1220" dirty="0">
-                <a:solidFill>
-                  <a:srgbClr val="17364A"/>
-                </a:solidFill>
-                <a:latin typeface="Aptos" pitchFamily="34" charset="0"/>
-                <a:ea typeface="Aptos" pitchFamily="34" charset="-122"/>
-                <a:cs typeface="Aptos" pitchFamily="34" charset="-120"/>
-              </a:rPr>
-              <a:t>ASPPH AI Framework Report: Framework language for responsible use of.</a:t>
-            </a:r>
-            <a:endParaRPr lang="en-US" sz="1220" dirty="0"/>
-          </a:p>
-        </p:txBody>
-      </p:sp>
-      <p:sp>
-        <p:nvSpPr>
-          <p:cNvPr id="13" name="Shape 11"/>
-          <p:cNvSpPr/>
-          <p:nvPr/>
-        </p:nvSpPr>
-        <p:spPr>
-          <a:xfrm>
-            <a:off x="7543800" y="2724912"/>
-            <a:ext cx="3611880" cy="1527048"/>
-          </a:xfrm>
-          <a:prstGeom prst="roundRect">
-            <a:avLst>
-              <a:gd name="adj" fmla="val 7186"/>
-            </a:avLst>
-          </a:prstGeom>
-          <a:solidFill>
-            <a:srgbClr val="FFFFFF"/>
-          </a:solidFill>
-          <a:ln w="12700">
-            <a:solidFill>
-              <a:srgbClr val="B9D7E6"/>
-            </a:solidFill>
-            <a:prstDash val="solid"/>
-          </a:ln>
-        </p:spPr>
-      </p:sp>
-      <p:sp>
-        <p:nvSpPr>
-          <p:cNvPr id="14" name="Text 12"/>
-          <p:cNvSpPr/>
-          <p:nvPr/>
-        </p:nvSpPr>
-        <p:spPr>
-          <a:xfrm>
-            <a:off x="7708392" y="2852928"/>
-            <a:ext cx="3282696" cy="228600"/>
-          </a:xfrm>
-          <a:prstGeom prst="rect">
-            <a:avLst/>
-          </a:prstGeom>
-          <a:noFill/>
-          <a:ln/>
-        </p:spPr>
-        <p:txBody>
-          <a:bodyPr wrap="square" lIns="0" tIns="0" rIns="0" bIns="0" rtlCol="0" anchor="ctr"/>
-          <a:lstStyle/>
-          <a:p>
-            <a:pPr indent="0" marL="0">
-              <a:buNone/>
-            </a:pPr>
-            <a:r>
-              <a:rPr lang="en-US" sz="1220" b="1" dirty="0">
-                <a:solidFill>
-                  <a:srgbClr val="0068B7"/>
-                </a:solidFill>
-                <a:latin typeface="Aptos" pitchFamily="34" charset="0"/>
-                <a:ea typeface="Aptos" pitchFamily="34" charset="-122"/>
-                <a:cs typeface="Aptos" pitchFamily="34" charset="-120"/>
-              </a:rPr>
-              <a:t>Concept checkpoints</a:t>
-            </a:r>
-            <a:endParaRPr lang="en-US" sz="1220" dirty="0"/>
-          </a:p>
-        </p:txBody>
-      </p:sp>
-      <p:sp>
-        <p:nvSpPr>
-          <p:cNvPr id="15" name="Text 13"/>
-          <p:cNvSpPr/>
-          <p:nvPr/>
-        </p:nvSpPr>
-        <p:spPr>
-          <a:xfrm>
-            <a:off x="7726680" y="3182112"/>
-            <a:ext cx="3227832" cy="960120"/>
-          </a:xfrm>
-          <a:prstGeom prst="rect">
-            <a:avLst/>
-          </a:prstGeom>
-          <a:noFill/>
-          <a:ln/>
-        </p:spPr>
-        <p:txBody>
-          <a:bodyPr wrap="square" lIns="508" tIns="508" rIns="508" bIns="508" rtlCol="0" anchor="t">
-            <a:normAutofit/>
-          </a:bodyPr>
-          <a:lstStyle/>
-          <a:p>
-            <a:pPr indent="0" marL="0">
-              <a:buNone/>
-            </a:pPr>
-            <a:r>
-              <a:rPr lang="en-US" sz="1140" dirty="0">
-                <a:solidFill>
-                  <a:srgbClr val="17364A"/>
-                </a:solidFill>
-                <a:latin typeface="Aptos" pitchFamily="34" charset="0"/>
-                <a:ea typeface="Aptos" pitchFamily="34" charset="-122"/>
-                <a:cs typeface="Aptos" pitchFamily="34" charset="-120"/>
-              </a:rPr>
-              <a:t>ASPPH AI Framework Report: Framework language for.</a:t>
+              <a:t>[object Object]</a:t>
             </a:r>
             <a:endParaRPr lang="en-US" sz="1140" dirty="0"/>
           </a:p>
@@ -16707,7 +12817,7 @@
                 <a:ea typeface="Aptos Display" pitchFamily="34" charset="-122"/>
                 <a:cs typeface="Aptos Display" pitchFamily="34" charset="-120"/>
               </a:rPr>
-              <a:t>How this module connects to the playbook</a:t>
+              <a:t>Learning Objectives</a:t>
             </a:r>
             <a:endParaRPr lang="en-US" sz="3400" dirty="0"/>
           </a:p>
@@ -16721,8 +12831,8 @@
         </p:nvSpPr>
         <p:spPr>
           <a:xfrm>
-            <a:off x="868680" y="1508760"/>
-            <a:ext cx="6812280" cy="3977640"/>
+            <a:off x="822960" y="1463040"/>
+            <a:ext cx="6565392" cy="4343400"/>
           </a:xfrm>
           <a:prstGeom prst="rect">
             <a:avLst/>
@@ -16740,7 +12850,7 @@
               <a:buNone/>
             </a:pPr>
             <a:r>
-              <a:rPr lang="en-US" sz="1900" dirty="0">
+              <a:rPr lang="en-US" sz="1920" dirty="0">
                 <a:solidFill>
                   <a:srgbClr val="003A63"/>
                 </a:solidFill>
@@ -16748,16 +12858,16 @@
                 <a:ea typeface="Aptos" pitchFamily="34" charset="-122"/>
                 <a:cs typeface="Aptos" pitchFamily="34" charset="-120"/>
               </a:rPr>
-              <a:t>• Play 1: Vision &amp; Guardrails - This lesson informs Play 1 by helping learners.</a:t>
-            </a:r>
-            <a:endParaRPr lang="en-US" sz="1900" dirty="0"/>
-          </a:p>
-          <a:p>
-            <a:pPr indent="0" marL="0">
-              <a:buNone/>
-            </a:pPr>
-            <a:r>
-              <a:rPr lang="en-US" sz="1900" dirty="0">
+              <a:t>• Define artificial intelligence in practical public health terms.</a:t>
+            </a:r>
+            <a:endParaRPr lang="en-US" sz="1920" dirty="0"/>
+          </a:p>
+          <a:p>
+            <a:pPr indent="0" marL="0">
+              <a:buNone/>
+            </a:pPr>
+            <a:r>
+              <a:rPr lang="en-US" sz="1920" dirty="0">
                 <a:solidFill>
                   <a:srgbClr val="003A63"/>
                 </a:solidFill>
@@ -16765,16 +12875,16 @@
                 <a:ea typeface="Aptos" pitchFamily="34" charset="-122"/>
                 <a:cs typeface="Aptos" pitchFamily="34" charset="-120"/>
               </a:rPr>
-              <a:t>• Play 3: Establish AI Governance - This lesson informs Play 3 by helping.</a:t>
-            </a:r>
-            <a:endParaRPr lang="en-US" sz="1900" dirty="0"/>
-          </a:p>
-          <a:p>
-            <a:pPr indent="0" marL="0">
-              <a:buNone/>
-            </a:pPr>
-            <a:r>
-              <a:rPr lang="en-US" sz="1900" dirty="0">
+              <a:t>• Distinguish predictive AI, generative AI, retrieval-augmented generation,.</a:t>
+            </a:r>
+            <a:endParaRPr lang="en-US" sz="1920" dirty="0"/>
+          </a:p>
+          <a:p>
+            <a:pPr indent="0" marL="0">
+              <a:buNone/>
+            </a:pPr>
+            <a:r>
+              <a:rPr lang="en-US" sz="1920" dirty="0">
                 <a:solidFill>
                   <a:srgbClr val="003A63"/>
                 </a:solidFill>
@@ -16782,9 +12892,9 @@
                 <a:ea typeface="Aptos" pitchFamily="34" charset="-122"/>
                 <a:cs typeface="Aptos" pitchFamily="34" charset="-120"/>
               </a:rPr>
-              <a:t>• Play 11: Build and Deploy AI Solutions - This lesson informs Play 11 by.</a:t>
-            </a:r>
-            <a:endParaRPr lang="en-US" sz="1900" dirty="0"/>
+              <a:t>• Explain why AI outputs require human review, governance, privacy.</a:t>
+            </a:r>
+            <a:endParaRPr lang="en-US" sz="1920" dirty="0"/>
           </a:p>
         </p:txBody>
       </p:sp>
@@ -16796,12 +12906,12 @@
         </p:nvSpPr>
         <p:spPr>
           <a:xfrm>
-            <a:off x="8046720" y="1417320"/>
-            <a:ext cx="3063240" cy="2103120"/>
+            <a:off x="7543800" y="1325880"/>
+            <a:ext cx="3611880" cy="1261872"/>
           </a:xfrm>
           <a:prstGeom prst="roundRect">
             <a:avLst>
-              <a:gd name="adj" fmla="val 5217"/>
+              <a:gd name="adj" fmla="val 8696"/>
             </a:avLst>
           </a:prstGeom>
           <a:solidFill>
@@ -16823,8 +12933,8 @@
         </p:nvSpPr>
         <p:spPr>
           <a:xfrm>
-            <a:off x="8211312" y="1545336"/>
-            <a:ext cx="2734056" cy="228600"/>
+            <a:off x="7708392" y="1453896"/>
+            <a:ext cx="3282696" cy="228600"/>
           </a:xfrm>
           <a:prstGeom prst="rect">
             <a:avLst/>
@@ -16848,7 +12958,7 @@
                 <a:ea typeface="Aptos" pitchFamily="34" charset="-122"/>
                 <a:cs typeface="Aptos" pitchFamily="34" charset="-120"/>
               </a:rPr>
-              <a:t>Apply the lesson</a:t>
+              <a:t>Practice focus</a:t>
             </a:r>
             <a:endParaRPr lang="en-US" sz="1220" dirty="0"/>
           </a:p>
@@ -16862,8 +12972,8 @@
         </p:nvSpPr>
         <p:spPr>
           <a:xfrm>
-            <a:off x="8211312" y="1856232"/>
-            <a:ext cx="2734056" cy="1591056"/>
+            <a:off x="7708392" y="1764792"/>
+            <a:ext cx="3282696" cy="749808"/>
           </a:xfrm>
           <a:prstGeom prst="rect">
             <a:avLst/>
@@ -16889,7 +12999,7 @@
                 <a:ea typeface="Aptos" pitchFamily="34" charset="-122"/>
                 <a:cs typeface="Aptos" pitchFamily="34" charset="-120"/>
               </a:rPr>
-              <a:t>Use the related plays to identify decisions, participants, timing, approvals,.</a:t>
+              <a:t>Define artificial intelligence in practical public health terms.</a:t>
             </a:r>
             <a:endParaRPr lang="en-US" sz="1220" dirty="0"/>
           </a:p>
@@ -16903,12 +13013,12 @@
         </p:nvSpPr>
         <p:spPr>
           <a:xfrm>
-            <a:off x="8046720" y="3794760"/>
-            <a:ext cx="3063240" cy="1600200"/>
+            <a:off x="7543800" y="2724912"/>
+            <a:ext cx="3611880" cy="1527048"/>
           </a:xfrm>
           <a:prstGeom prst="roundRect">
             <a:avLst>
-              <a:gd name="adj" fmla="val 6857"/>
+              <a:gd name="adj" fmla="val 7186"/>
             </a:avLst>
           </a:prstGeom>
           <a:solidFill>
@@ -16930,8 +13040,8 @@
         </p:nvSpPr>
         <p:spPr>
           <a:xfrm>
-            <a:off x="8211312" y="3922776"/>
-            <a:ext cx="2734056" cy="228600"/>
+            <a:off x="7708392" y="2852928"/>
+            <a:ext cx="3282696" cy="228600"/>
           </a:xfrm>
           <a:prstGeom prst="rect">
             <a:avLst/>
@@ -16955,7 +13065,7 @@
                 <a:ea typeface="Aptos" pitchFamily="34" charset="-122"/>
                 <a:cs typeface="Aptos" pitchFamily="34" charset="-120"/>
               </a:rPr>
-              <a:t>Use the play links to</a:t>
+              <a:t>Concept checkpoints</a:t>
             </a:r>
             <a:endParaRPr lang="en-US" sz="1220" dirty="0"/>
           </a:p>
@@ -16969,8 +13079,8 @@
         </p:nvSpPr>
         <p:spPr>
           <a:xfrm>
-            <a:off x="8229600" y="4251960"/>
-            <a:ext cx="2679192" cy="1033272"/>
+            <a:off x="7726680" y="3182112"/>
+            <a:ext cx="3227832" cy="960120"/>
           </a:xfrm>
           <a:prstGeom prst="rect">
             <a:avLst/>
@@ -16996,7 +13106,7 @@
                 <a:ea typeface="Aptos" pitchFamily="34" charset="-122"/>
                 <a:cs typeface="Aptos" pitchFamily="34" charset="-120"/>
               </a:rPr>
-              <a:t>Locate the decision point in the playbook sequence.</a:t>
+              <a:t>Identify appropriate and inappropriate uses of AI.</a:t>
             </a:r>
             <a:endParaRPr lang="en-US" sz="1140" dirty="0"/>
           </a:p>
@@ -17013,16 +13123,106 @@
                 <a:ea typeface="Aptos" pitchFamily="34" charset="-122"/>
                 <a:cs typeface="Aptos" pitchFamily="34" charset="-120"/>
               </a:rPr>
-              <a:t>Identify who should participate in the work.</a:t>
+              <a:t>Describe the first questions to ask before an AI.</a:t>
             </a:r>
             <a:endParaRPr lang="en-US" sz="1140" dirty="0"/>
           </a:p>
-          <a:p>
-            <a:pPr indent="0" marL="0">
-              <a:buNone/>
-            </a:pPr>
-            <a:r>
-              <a:rPr lang="en-US" sz="1140" dirty="0">
+        </p:txBody>
+      </p:sp>
+      <p:sp>
+        <p:nvSpPr>
+          <p:cNvPr id="16" name="Shape 14"/>
+          <p:cNvSpPr/>
+          <p:nvPr/>
+        </p:nvSpPr>
+        <p:spPr>
+          <a:xfrm>
+            <a:off x="7543800" y="4389120"/>
+            <a:ext cx="3611880" cy="1261872"/>
+          </a:xfrm>
+          <a:prstGeom prst="roundRect">
+            <a:avLst>
+              <a:gd name="adj" fmla="val 8696"/>
+            </a:avLst>
+          </a:prstGeom>
+          <a:solidFill>
+            <a:srgbClr val="EAF6F8"/>
+          </a:solidFill>
+          <a:ln w="12700">
+            <a:solidFill>
+              <a:srgbClr val="B9D7E6"/>
+            </a:solidFill>
+            <a:prstDash val="solid"/>
+          </a:ln>
+        </p:spPr>
+      </p:sp>
+      <p:sp>
+        <p:nvSpPr>
+          <p:cNvPr id="17" name="Text 15"/>
+          <p:cNvSpPr/>
+          <p:nvPr/>
+        </p:nvSpPr>
+        <p:spPr>
+          <a:xfrm>
+            <a:off x="7708392" y="4517136"/>
+            <a:ext cx="3282696" cy="228600"/>
+          </a:xfrm>
+          <a:prstGeom prst="rect">
+            <a:avLst/>
+          </a:prstGeom>
+          <a:noFill/>
+          <a:ln/>
+        </p:spPr>
+        <p:txBody>
+          <a:bodyPr wrap="square" lIns="0" tIns="0" rIns="0" bIns="0" rtlCol="0" anchor="ctr"/>
+          <a:lstStyle/>
+          <a:p>
+            <a:pPr indent="0" marL="0">
+              <a:buNone/>
+            </a:pPr>
+            <a:r>
+              <a:rPr lang="en-US" sz="1220" b="1" dirty="0">
+                <a:solidFill>
+                  <a:srgbClr val="0068B7"/>
+                </a:solidFill>
+                <a:latin typeface="Aptos" pitchFamily="34" charset="0"/>
+                <a:ea typeface="Aptos" pitchFamily="34" charset="-122"/>
+                <a:cs typeface="Aptos" pitchFamily="34" charset="-120"/>
+              </a:rPr>
+              <a:t>What to produce</a:t>
+            </a:r>
+            <a:endParaRPr lang="en-US" sz="1220" dirty="0"/>
+          </a:p>
+        </p:txBody>
+      </p:sp>
+      <p:sp>
+        <p:nvSpPr>
+          <p:cNvPr id="18" name="Text 16"/>
+          <p:cNvSpPr/>
+          <p:nvPr/>
+        </p:nvSpPr>
+        <p:spPr>
+          <a:xfrm>
+            <a:off x="7708392" y="4828032"/>
+            <a:ext cx="3282696" cy="749808"/>
+          </a:xfrm>
+          <a:prstGeom prst="rect">
+            <a:avLst/>
+          </a:prstGeom>
+          <a:noFill/>
+          <a:ln/>
+        </p:spPr>
+        <p:txBody>
+          <a:bodyPr wrap="square" lIns="254" tIns="254" rIns="254" bIns="254" rtlCol="0" anchor="t">
+            <a:normAutofit/>
+          </a:bodyPr>
+          <a:lstStyle/>
+          <a:p>
+            <a:pPr indent="0" marL="0">
+              <a:buNone/>
+            </a:pPr>
+            <a:r>
+              <a:rPr lang="en-US" sz="1220" dirty="0">
                 <a:solidFill>
                   <a:srgbClr val="17364A"/>
                 </a:solidFill>
@@ -17030,9 +13230,9 @@
                 <a:ea typeface="Aptos" pitchFamily="34" charset="-122"/>
                 <a:cs typeface="Aptos" pitchFamily="34" charset="-120"/>
               </a:rPr>
-              <a:t>Document the review, approval, or implementation.</a:t>
-            </a:r>
-            <a:endParaRPr lang="en-US" sz="1140" dirty="0"/>
+              <a:t>Use the assignment to test whether you can explain the concept, apply it to a.</a:t>
+            </a:r>
+            <a:endParaRPr lang="en-US" sz="1220" dirty="0"/>
           </a:p>
         </p:txBody>
       </p:sp>
@@ -17309,7 +13509,7 @@
                 <a:ea typeface="Aptos Display" pitchFamily="34" charset="-122"/>
                 <a:cs typeface="Aptos Display" pitchFamily="34" charset="-120"/>
               </a:rPr>
-              <a:t>Related toolkit resources</a:t>
+              <a:t>Module Overview</a:t>
             </a:r>
             <a:endParaRPr lang="en-US" sz="3400" dirty="0"/>
           </a:p>
@@ -17323,8 +13523,8 @@
         </p:nvSpPr>
         <p:spPr>
           <a:xfrm>
-            <a:off x="868680" y="1508760"/>
-            <a:ext cx="6812280" cy="3977640"/>
+            <a:off x="822960" y="1463040"/>
+            <a:ext cx="6565392" cy="4343400"/>
           </a:xfrm>
           <a:prstGeom prst="rect">
             <a:avLst/>
@@ -17342,7 +13542,7 @@
               <a:buNone/>
             </a:pPr>
             <a:r>
-              <a:rPr lang="en-US" sz="1850" dirty="0">
+              <a:rPr lang="en-US" sz="1920" dirty="0">
                 <a:solidFill>
                   <a:srgbClr val="003A63"/>
                 </a:solidFill>
@@ -17350,16 +13550,16 @@
                 <a:ea typeface="Aptos" pitchFamily="34" charset="-122"/>
                 <a:cs typeface="Aptos" pitchFamily="34" charset="-120"/>
               </a:rPr>
-              <a:t>• Tool 1: AI Vision &amp; Principles Workshop (Workshop) - Use AI Vision &amp;.</a:t>
-            </a:r>
-            <a:endParaRPr lang="en-US" sz="1850" dirty="0"/>
-          </a:p>
-          <a:p>
-            <a:pPr indent="0" marL="0">
-              <a:buNone/>
-            </a:pPr>
-            <a:r>
-              <a:rPr lang="en-US" sz="1850" dirty="0">
+              <a:t>• Artificial intelligence is a broad family of computational methods that can.</a:t>
+            </a:r>
+            <a:endParaRPr lang="en-US" sz="1920" dirty="0"/>
+          </a:p>
+          <a:p>
+            <a:pPr indent="0" marL="0">
+              <a:buNone/>
+            </a:pPr>
+            <a:r>
+              <a:rPr lang="en-US" sz="1920" dirty="0">
                 <a:solidFill>
                   <a:srgbClr val="003A63"/>
                 </a:solidFill>
@@ -17367,9 +13567,26 @@
                 <a:ea typeface="Aptos" pitchFamily="34" charset="-122"/>
                 <a:cs typeface="Aptos" pitchFamily="34" charset="-120"/>
               </a:rPr>
-              <a:t>• Tool 2: Responsible AI Policy Template (Template) - Use Responsible AI.</a:t>
-            </a:r>
-            <a:endParaRPr lang="en-US" sz="1850" dirty="0"/>
+              <a:t>• In public health, AI is not a single product or a single capability.</a:t>
+            </a:r>
+            <a:endParaRPr lang="en-US" sz="1920" dirty="0"/>
+          </a:p>
+          <a:p>
+            <a:pPr indent="0" marL="0">
+              <a:buNone/>
+            </a:pPr>
+            <a:r>
+              <a:rPr lang="en-US" sz="1920" dirty="0">
+                <a:solidFill>
+                  <a:srgbClr val="003A63"/>
+                </a:solidFill>
+                <a:latin typeface="Aptos" pitchFamily="34" charset="0"/>
+                <a:ea typeface="Aptos" pitchFamily="34" charset="-122"/>
+                <a:cs typeface="Aptos" pitchFamily="34" charset="-120"/>
+              </a:rPr>
+              <a:t>• It may appear inside analytics platforms, dashboards, document tools,.</a:t>
+            </a:r>
+            <a:endParaRPr lang="en-US" sz="1920" dirty="0"/>
           </a:p>
         </p:txBody>
       </p:sp>
@@ -17381,12 +13598,260 @@
         </p:nvSpPr>
         <p:spPr>
           <a:xfrm>
-            <a:off x="8046720" y="1417320"/>
-            <a:ext cx="3063240" cy="2103120"/>
+            <a:off x="7543800" y="1325880"/>
+            <a:ext cx="3611880" cy="1261872"/>
           </a:xfrm>
           <a:prstGeom prst="roundRect">
             <a:avLst>
-              <a:gd name="adj" fmla="val 5217"/>
+              <a:gd name="adj" fmla="val 8696"/>
+            </a:avLst>
+          </a:prstGeom>
+          <a:solidFill>
+            <a:srgbClr val="EEF8ED"/>
+          </a:solidFill>
+          <a:ln w="12700">
+            <a:solidFill>
+              <a:srgbClr val="B9D7E6"/>
+            </a:solidFill>
+            <a:prstDash val="solid"/>
+          </a:ln>
+        </p:spPr>
+      </p:sp>
+      <p:sp>
+        <p:nvSpPr>
+          <p:cNvPr id="11" name="Text 9"/>
+          <p:cNvSpPr/>
+          <p:nvPr/>
+        </p:nvSpPr>
+        <p:spPr>
+          <a:xfrm>
+            <a:off x="7708392" y="1453896"/>
+            <a:ext cx="3282696" cy="228600"/>
+          </a:xfrm>
+          <a:prstGeom prst="rect">
+            <a:avLst/>
+          </a:prstGeom>
+          <a:noFill/>
+          <a:ln/>
+        </p:spPr>
+        <p:txBody>
+          <a:bodyPr wrap="square" lIns="0" tIns="0" rIns="0" bIns="0" rtlCol="0" anchor="ctr"/>
+          <a:lstStyle/>
+          <a:p>
+            <a:pPr indent="0" marL="0">
+              <a:buNone/>
+            </a:pPr>
+            <a:r>
+              <a:rPr lang="en-US" sz="1220" b="1" dirty="0">
+                <a:solidFill>
+                  <a:srgbClr val="0068B7"/>
+                </a:solidFill>
+                <a:latin typeface="Aptos" pitchFamily="34" charset="0"/>
+                <a:ea typeface="Aptos" pitchFamily="34" charset="-122"/>
+                <a:cs typeface="Aptos" pitchFamily="34" charset="-120"/>
+              </a:rPr>
+              <a:t>Core concept</a:t>
+            </a:r>
+            <a:endParaRPr lang="en-US" sz="1220" dirty="0"/>
+          </a:p>
+        </p:txBody>
+      </p:sp>
+      <p:sp>
+        <p:nvSpPr>
+          <p:cNvPr id="12" name="Text 10"/>
+          <p:cNvSpPr/>
+          <p:nvPr/>
+        </p:nvSpPr>
+        <p:spPr>
+          <a:xfrm>
+            <a:off x="7708392" y="1764792"/>
+            <a:ext cx="3282696" cy="749808"/>
+          </a:xfrm>
+          <a:prstGeom prst="rect">
+            <a:avLst/>
+          </a:prstGeom>
+          <a:noFill/>
+          <a:ln/>
+        </p:spPr>
+        <p:txBody>
+          <a:bodyPr wrap="square" lIns="254" tIns="254" rIns="254" bIns="254" rtlCol="0" anchor="t">
+            <a:normAutofit/>
+          </a:bodyPr>
+          <a:lstStyle/>
+          <a:p>
+            <a:pPr indent="0" marL="0">
+              <a:buNone/>
+            </a:pPr>
+            <a:r>
+              <a:rPr lang="en-US" sz="1220" dirty="0">
+                <a:solidFill>
+                  <a:srgbClr val="17364A"/>
+                </a:solidFill>
+                <a:latin typeface="Aptos" pitchFamily="34" charset="0"/>
+                <a:ea typeface="Aptos" pitchFamily="34" charset="-122"/>
+                <a:cs typeface="Aptos" pitchFamily="34" charset="-120"/>
+              </a:rPr>
+              <a:t>Artificial intelligence is a broad family of computational methods that can.</a:t>
+            </a:r>
+            <a:endParaRPr lang="en-US" sz="1220" dirty="0"/>
+          </a:p>
+        </p:txBody>
+      </p:sp>
+      <p:sp>
+        <p:nvSpPr>
+          <p:cNvPr id="13" name="Shape 11"/>
+          <p:cNvSpPr/>
+          <p:nvPr/>
+        </p:nvSpPr>
+        <p:spPr>
+          <a:xfrm>
+            <a:off x="7543800" y="2724912"/>
+            <a:ext cx="3611880" cy="1527048"/>
+          </a:xfrm>
+          <a:prstGeom prst="roundRect">
+            <a:avLst>
+              <a:gd name="adj" fmla="val 7186"/>
+            </a:avLst>
+          </a:prstGeom>
+          <a:solidFill>
+            <a:srgbClr val="FFFFFF"/>
+          </a:solidFill>
+          <a:ln w="12700">
+            <a:solidFill>
+              <a:srgbClr val="B9D7E6"/>
+            </a:solidFill>
+            <a:prstDash val="solid"/>
+          </a:ln>
+        </p:spPr>
+      </p:sp>
+      <p:sp>
+        <p:nvSpPr>
+          <p:cNvPr id="14" name="Text 12"/>
+          <p:cNvSpPr/>
+          <p:nvPr/>
+        </p:nvSpPr>
+        <p:spPr>
+          <a:xfrm>
+            <a:off x="7708392" y="2852928"/>
+            <a:ext cx="3282696" cy="228600"/>
+          </a:xfrm>
+          <a:prstGeom prst="rect">
+            <a:avLst/>
+          </a:prstGeom>
+          <a:noFill/>
+          <a:ln/>
+        </p:spPr>
+        <p:txBody>
+          <a:bodyPr wrap="square" lIns="0" tIns="0" rIns="0" bIns="0" rtlCol="0" anchor="ctr"/>
+          <a:lstStyle/>
+          <a:p>
+            <a:pPr indent="0" marL="0">
+              <a:buNone/>
+            </a:pPr>
+            <a:r>
+              <a:rPr lang="en-US" sz="1220" b="1" dirty="0">
+                <a:solidFill>
+                  <a:srgbClr val="0068B7"/>
+                </a:solidFill>
+                <a:latin typeface="Aptos" pitchFamily="34" charset="0"/>
+                <a:ea typeface="Aptos" pitchFamily="34" charset="-122"/>
+                <a:cs typeface="Aptos" pitchFamily="34" charset="-120"/>
+              </a:rPr>
+              <a:t>Concept checkpoints</a:t>
+            </a:r>
+            <a:endParaRPr lang="en-US" sz="1220" dirty="0"/>
+          </a:p>
+        </p:txBody>
+      </p:sp>
+      <p:sp>
+        <p:nvSpPr>
+          <p:cNvPr id="15" name="Text 13"/>
+          <p:cNvSpPr/>
+          <p:nvPr/>
+        </p:nvSpPr>
+        <p:spPr>
+          <a:xfrm>
+            <a:off x="7726680" y="3182112"/>
+            <a:ext cx="3227832" cy="960120"/>
+          </a:xfrm>
+          <a:prstGeom prst="rect">
+            <a:avLst/>
+          </a:prstGeom>
+          <a:noFill/>
+          <a:ln/>
+        </p:spPr>
+        <p:txBody>
+          <a:bodyPr wrap="square" lIns="508" tIns="508" rIns="508" bIns="508" rtlCol="0" anchor="t">
+            <a:normAutofit/>
+          </a:bodyPr>
+          <a:lstStyle/>
+          <a:p>
+            <a:pPr indent="0" marL="0">
+              <a:buNone/>
+            </a:pPr>
+            <a:r>
+              <a:rPr lang="en-US" sz="1140" dirty="0">
+                <a:solidFill>
+                  <a:srgbClr val="17364A"/>
+                </a:solidFill>
+                <a:latin typeface="Aptos" pitchFamily="34" charset="0"/>
+                <a:ea typeface="Aptos" pitchFamily="34" charset="-122"/>
+                <a:cs typeface="Aptos" pitchFamily="34" charset="-120"/>
+              </a:rPr>
+              <a:t>Artificial intelligence is a broad family of.</a:t>
+            </a:r>
+            <a:endParaRPr lang="en-US" sz="1140" dirty="0"/>
+          </a:p>
+          <a:p>
+            <a:pPr indent="0" marL="0">
+              <a:buNone/>
+            </a:pPr>
+            <a:r>
+              <a:rPr lang="en-US" sz="1140" dirty="0">
+                <a:solidFill>
+                  <a:srgbClr val="17364A"/>
+                </a:solidFill>
+                <a:latin typeface="Aptos" pitchFamily="34" charset="0"/>
+                <a:ea typeface="Aptos" pitchFamily="34" charset="-122"/>
+                <a:cs typeface="Aptos" pitchFamily="34" charset="-120"/>
+              </a:rPr>
+              <a:t>It may appear inside analytics platforms,.</a:t>
+            </a:r>
+            <a:endParaRPr lang="en-US" sz="1140" dirty="0"/>
+          </a:p>
+          <a:p>
+            <a:pPr indent="0" marL="0">
+              <a:buNone/>
+            </a:pPr>
+            <a:r>
+              <a:rPr lang="en-US" sz="1140" dirty="0">
+                <a:solidFill>
+                  <a:srgbClr val="17364A"/>
+                </a:solidFill>
+                <a:latin typeface="Aptos" pitchFamily="34" charset="0"/>
+                <a:ea typeface="Aptos" pitchFamily="34" charset="-122"/>
+                <a:cs typeface="Aptos" pitchFamily="34" charset="-120"/>
+              </a:rPr>
+              <a:t>This module gives you the vocabulary and judgment.</a:t>
+            </a:r>
+            <a:endParaRPr lang="en-US" sz="1140" dirty="0"/>
+          </a:p>
+        </p:txBody>
+      </p:sp>
+      <p:sp>
+        <p:nvSpPr>
+          <p:cNvPr id="16" name="Shape 14"/>
+          <p:cNvSpPr/>
+          <p:nvPr/>
+        </p:nvSpPr>
+        <p:spPr>
+          <a:xfrm>
+            <a:off x="7543800" y="4389120"/>
+            <a:ext cx="3611880" cy="1261872"/>
+          </a:xfrm>
+          <a:prstGeom prst="roundRect">
+            <a:avLst>
+              <a:gd name="adj" fmla="val 8696"/>
             </a:avLst>
           </a:prstGeom>
           <a:solidFill>
@@ -17402,14 +13867,14 @@
       </p:sp>
       <p:sp>
         <p:nvSpPr>
-          <p:cNvPr id="11" name="Text 9"/>
-          <p:cNvSpPr/>
-          <p:nvPr/>
-        </p:nvSpPr>
-        <p:spPr>
-          <a:xfrm>
-            <a:off x="8211312" y="1545336"/>
-            <a:ext cx="2734056" cy="228600"/>
+          <p:cNvPr id="17" name="Text 15"/>
+          <p:cNvSpPr/>
+          <p:nvPr/>
+        </p:nvSpPr>
+        <p:spPr>
+          <a:xfrm>
+            <a:off x="7708392" y="4517136"/>
+            <a:ext cx="3282696" cy="228600"/>
           </a:xfrm>
           <a:prstGeom prst="rect">
             <a:avLst/>
@@ -17433,7 +13898,7 @@
                 <a:ea typeface="Aptos" pitchFamily="34" charset="-122"/>
                 <a:cs typeface="Aptos" pitchFamily="34" charset="-120"/>
               </a:rPr>
-              <a:t>Use the tools</a:t>
+              <a:t>Apply it</a:t>
             </a:r>
             <a:endParaRPr lang="en-US" sz="1220" dirty="0"/>
           </a:p>
@@ -17441,14 +13906,14 @@
       </p:sp>
       <p:sp>
         <p:nvSpPr>
-          <p:cNvPr id="12" name="Text 10"/>
-          <p:cNvSpPr/>
-          <p:nvPr/>
-        </p:nvSpPr>
-        <p:spPr>
-          <a:xfrm>
-            <a:off x="8211312" y="1856232"/>
-            <a:ext cx="2734056" cy="1591056"/>
+          <p:cNvPr id="18" name="Text 16"/>
+          <p:cNvSpPr/>
+          <p:nvPr/>
+        </p:nvSpPr>
+        <p:spPr>
+          <a:xfrm>
+            <a:off x="7708392" y="4828032"/>
+            <a:ext cx="3282696" cy="749808"/>
           </a:xfrm>
           <a:prstGeom prst="rect">
             <a:avLst/>
@@ -17474,150 +13939,9 @@
                 <a:ea typeface="Aptos" pitchFamily="34" charset="-122"/>
                 <a:cs typeface="Aptos" pitchFamily="34" charset="-120"/>
               </a:rPr>
-              <a:t>Use linked tools when your department needs a structured worksheet, template,.</a:t>
+              <a:t>Connect the concept to public health purpose, responsible use, required.</a:t>
             </a:r>
             <a:endParaRPr lang="en-US" sz="1220" dirty="0"/>
-          </a:p>
-        </p:txBody>
-      </p:sp>
-      <p:sp>
-        <p:nvSpPr>
-          <p:cNvPr id="13" name="Shape 11"/>
-          <p:cNvSpPr/>
-          <p:nvPr/>
-        </p:nvSpPr>
-        <p:spPr>
-          <a:xfrm>
-            <a:off x="8046720" y="3794760"/>
-            <a:ext cx="3063240" cy="1600200"/>
-          </a:xfrm>
-          <a:prstGeom prst="roundRect">
-            <a:avLst>
-              <a:gd name="adj" fmla="val 6857"/>
-            </a:avLst>
-          </a:prstGeom>
-          <a:solidFill>
-            <a:srgbClr val="FFFFFF"/>
-          </a:solidFill>
-          <a:ln w="12700">
-            <a:solidFill>
-              <a:srgbClr val="B9D7E6"/>
-            </a:solidFill>
-            <a:prstDash val="solid"/>
-          </a:ln>
-        </p:spPr>
-      </p:sp>
-      <p:sp>
-        <p:nvSpPr>
-          <p:cNvPr id="14" name="Text 12"/>
-          <p:cNvSpPr/>
-          <p:nvPr/>
-        </p:nvSpPr>
-        <p:spPr>
-          <a:xfrm>
-            <a:off x="8211312" y="3922776"/>
-            <a:ext cx="2734056" cy="228600"/>
-          </a:xfrm>
-          <a:prstGeom prst="rect">
-            <a:avLst/>
-          </a:prstGeom>
-          <a:noFill/>
-          <a:ln/>
-        </p:spPr>
-        <p:txBody>
-          <a:bodyPr wrap="square" lIns="0" tIns="0" rIns="0" bIns="0" rtlCol="0" anchor="ctr"/>
-          <a:lstStyle/>
-          <a:p>
-            <a:pPr indent="0" marL="0">
-              <a:buNone/>
-            </a:pPr>
-            <a:r>
-              <a:rPr lang="en-US" sz="1220" b="1" dirty="0">
-                <a:solidFill>
-                  <a:srgbClr val="0068B7"/>
-                </a:solidFill>
-                <a:latin typeface="Aptos" pitchFamily="34" charset="0"/>
-                <a:ea typeface="Aptos" pitchFamily="34" charset="-122"/>
-                <a:cs typeface="Aptos" pitchFamily="34" charset="-120"/>
-              </a:rPr>
-              <a:t>Tool selection cues</a:t>
-            </a:r>
-            <a:endParaRPr lang="en-US" sz="1220" dirty="0"/>
-          </a:p>
-        </p:txBody>
-      </p:sp>
-      <p:sp>
-        <p:nvSpPr>
-          <p:cNvPr id="15" name="Text 13"/>
-          <p:cNvSpPr/>
-          <p:nvPr/>
-        </p:nvSpPr>
-        <p:spPr>
-          <a:xfrm>
-            <a:off x="8229600" y="4251960"/>
-            <a:ext cx="2679192" cy="1033272"/>
-          </a:xfrm>
-          <a:prstGeom prst="rect">
-            <a:avLst/>
-          </a:prstGeom>
-          <a:noFill/>
-          <a:ln/>
-        </p:spPr>
-        <p:txBody>
-          <a:bodyPr wrap="square" lIns="508" tIns="508" rIns="508" bIns="508" rtlCol="0" anchor="t">
-            <a:normAutofit/>
-          </a:bodyPr>
-          <a:lstStyle/>
-          <a:p>
-            <a:pPr indent="0" marL="0">
-              <a:buNone/>
-            </a:pPr>
-            <a:r>
-              <a:rPr lang="en-US" sz="1140" dirty="0">
-                <a:solidFill>
-                  <a:srgbClr val="17364A"/>
-                </a:solidFill>
-                <a:latin typeface="Aptos" pitchFamily="34" charset="0"/>
-                <a:ea typeface="Aptos" pitchFamily="34" charset="-122"/>
-                <a:cs typeface="Aptos" pitchFamily="34" charset="-120"/>
-              </a:rPr>
-              <a:t>Use a tool when no comparable local process exists.</a:t>
-            </a:r>
-            <a:endParaRPr lang="en-US" sz="1140" dirty="0"/>
-          </a:p>
-          <a:p>
-            <a:pPr indent="0" marL="0">
-              <a:buNone/>
-            </a:pPr>
-            <a:r>
-              <a:rPr lang="en-US" sz="1140" dirty="0">
-                <a:solidFill>
-                  <a:srgbClr val="17364A"/>
-                </a:solidFill>
-                <a:latin typeface="Aptos" pitchFamily="34" charset="0"/>
-                <a:ea typeface="Aptos" pitchFamily="34" charset="-122"/>
-                <a:cs typeface="Aptos" pitchFamily="34" charset="-120"/>
-              </a:rPr>
-              <a:t>Adapt existing department templates when they.</a:t>
-            </a:r>
-            <a:endParaRPr lang="en-US" sz="1140" dirty="0"/>
-          </a:p>
-          <a:p>
-            <a:pPr indent="0" marL="0">
-              <a:buNone/>
-            </a:pPr>
-            <a:r>
-              <a:rPr lang="en-US" sz="1140" dirty="0">
-                <a:solidFill>
-                  <a:srgbClr val="17364A"/>
-                </a:solidFill>
-                <a:latin typeface="Aptos" pitchFamily="34" charset="0"/>
-                <a:ea typeface="Aptos" pitchFamily="34" charset="-122"/>
-                <a:cs typeface="Aptos" pitchFamily="34" charset="-120"/>
-              </a:rPr>
-              <a:t>Save the completed artifact as evidence of the.</a:t>
-            </a:r>
-            <a:endParaRPr lang="en-US" sz="1140" dirty="0"/>
           </a:p>
         </p:txBody>
       </p:sp>
@@ -17894,7 +14218,7 @@
                 <a:ea typeface="Aptos Display" pitchFamily="34" charset="-122"/>
                 <a:cs typeface="Aptos Display" pitchFamily="34" charset="-120"/>
               </a:rPr>
-              <a:t>Learning Objectives</a:t>
+              <a:t>Definitions</a:t>
             </a:r>
             <a:endParaRPr lang="en-US" sz="3400" dirty="0"/>
           </a:p>
@@ -17935,7 +14259,7 @@
                 <a:ea typeface="Aptos" pitchFamily="34" charset="-122"/>
                 <a:cs typeface="Aptos" pitchFamily="34" charset="-120"/>
               </a:rPr>
-              <a:t>• Define the concept in plain language for colleagues, leaders, partners, and.</a:t>
+              <a:t>• Artificial intelligence (AI): A broad set of computational methods that can.</a:t>
             </a:r>
             <a:endParaRPr lang="en-US" sz="1920" dirty="0"/>
           </a:p>
@@ -17952,7 +14276,7 @@
                 <a:ea typeface="Aptos" pitchFamily="34" charset="-122"/>
                 <a:cs typeface="Aptos" pitchFamily="34" charset="-120"/>
               </a:rPr>
-              <a:t>• Identify where the concept affects AI planning, governance, procurement,.</a:t>
+              <a:t>• Predictive AI: AI that uses data patterns to estimate a future event, risk,.</a:t>
             </a:r>
             <a:endParaRPr lang="en-US" sz="1920" dirty="0"/>
           </a:p>
@@ -17969,7 +14293,7 @@
                 <a:ea typeface="Aptos" pitchFamily="34" charset="-122"/>
                 <a:cs typeface="Aptos" pitchFamily="34" charset="-120"/>
               </a:rPr>
-              <a:t>• Apply the concept to a concrete public health workflow using the linked.</a:t>
+              <a:t>• Generative AI: AI that creates new text, images, code, summaries,.</a:t>
             </a:r>
             <a:endParaRPr lang="en-US" sz="1920" dirty="0"/>
           </a:p>
@@ -18035,7 +14359,7 @@
                 <a:ea typeface="Aptos" pitchFamily="34" charset="-122"/>
                 <a:cs typeface="Aptos" pitchFamily="34" charset="-120"/>
               </a:rPr>
-              <a:t>Practice focus</a:t>
+              <a:t>Core concept</a:t>
             </a:r>
             <a:endParaRPr lang="en-US" sz="1220" dirty="0"/>
           </a:p>
@@ -18076,7 +14400,7 @@
                 <a:ea typeface="Aptos" pitchFamily="34" charset="-122"/>
                 <a:cs typeface="Aptos" pitchFamily="34" charset="-120"/>
               </a:rPr>
-              <a:t>Define the concept in plain language for colleagues, leaders, partners, and.</a:t>
+              <a:t>Artificial intelligence (AI): A broad set of computational methods that can.</a:t>
             </a:r>
             <a:endParaRPr lang="en-US" sz="1220" dirty="0"/>
           </a:p>
@@ -18183,7 +14507,7 @@
                 <a:ea typeface="Aptos" pitchFamily="34" charset="-122"/>
                 <a:cs typeface="Aptos" pitchFamily="34" charset="-120"/>
               </a:rPr>
-              <a:t>Identify where the concept affects AI planning,.</a:t>
+              <a:t>Artificial intelligence (AI): A broad set of.</a:t>
             </a:r>
             <a:endParaRPr lang="en-US" sz="1140" dirty="0"/>
           </a:p>
@@ -18200,7 +14524,7 @@
                 <a:ea typeface="Aptos" pitchFamily="34" charset="-122"/>
                 <a:cs typeface="Aptos" pitchFamily="34" charset="-120"/>
               </a:rPr>
-              <a:t>Apply the concept to a concrete public health.</a:t>
+              <a:t>Generative AI: AI that creates new text, images,.</a:t>
             </a:r>
             <a:endParaRPr lang="en-US" sz="1140" dirty="0"/>
           </a:p>
@@ -18217,7 +14541,7 @@
                 <a:ea typeface="Aptos" pitchFamily="34" charset="-122"/>
                 <a:cs typeface="Aptos" pitchFamily="34" charset="-120"/>
               </a:rPr>
-              <a:t>Complete a practical activity that produces an.</a:t>
+              <a:t>Retrieval-augmented generation (RAG): A method.</a:t>
             </a:r>
             <a:endParaRPr lang="en-US" sz="1140" dirty="0"/>
           </a:p>
@@ -18283,7 +14607,7 @@
                 <a:ea typeface="Aptos" pitchFamily="34" charset="-122"/>
                 <a:cs typeface="Aptos" pitchFamily="34" charset="-120"/>
               </a:rPr>
-              <a:t>What to produce</a:t>
+              <a:t>Apply it</a:t>
             </a:r>
             <a:endParaRPr lang="en-US" sz="1220" dirty="0"/>
           </a:p>
@@ -18324,7 +14648,7 @@
                 <a:ea typeface="Aptos" pitchFamily="34" charset="-122"/>
                 <a:cs typeface="Aptos" pitchFamily="34" charset="-120"/>
               </a:rPr>
-              <a:t>Use the assignment to test whether you can explain the concept, apply it to a.</a:t>
+              <a:t>Connect the concept to public health purpose, responsible use, required.</a:t>
             </a:r>
             <a:endParaRPr lang="en-US" sz="1220" dirty="0"/>
           </a:p>
@@ -18603,7 +14927,7 @@
                 <a:ea typeface="Aptos Display" pitchFamily="34" charset="-122"/>
                 <a:cs typeface="Aptos Display" pitchFamily="34" charset="-120"/>
               </a:rPr>
-              <a:t>Learning Objectives Continued</a:t>
+              <a:t>Definitions Continued</a:t>
             </a:r>
             <a:endParaRPr lang="en-US" sz="3400" dirty="0"/>
           </a:p>
@@ -18644,7 +14968,7 @@
                 <a:ea typeface="Aptos" pitchFamily="34" charset="-122"/>
                 <a:cs typeface="Aptos" pitchFamily="34" charset="-120"/>
               </a:rPr>
-              <a:t>• Produce or contribute to: Initial inventory of known or suspected AI use.</a:t>
+              <a:t>• Agentic AI: AI that can coordinate multiple steps or actions within defined.</a:t>
             </a:r>
             <a:endParaRPr lang="en-US" sz="1920" dirty="0"/>
           </a:p>
@@ -18661,7 +14985,7 @@
                 <a:ea typeface="Aptos" pitchFamily="34" charset="-122"/>
                 <a:cs typeface="Aptos" pitchFamily="34" charset="-120"/>
               </a:rPr>
-              <a:t>• Produce or contribute to: Draft list of decisions that require human.</a:t>
+              <a:t>• Human-in-the-loop: A workflow design in which a qualified person reviews,.</a:t>
             </a:r>
             <a:endParaRPr lang="en-US" sz="1920" dirty="0"/>
           </a:p>
@@ -18727,7 +15051,7 @@
                 <a:ea typeface="Aptos" pitchFamily="34" charset="-122"/>
                 <a:cs typeface="Aptos" pitchFamily="34" charset="-120"/>
               </a:rPr>
-              <a:t>Practice focus</a:t>
+              <a:t>Core concept</a:t>
             </a:r>
             <a:endParaRPr lang="en-US" sz="1220" dirty="0"/>
           </a:p>
@@ -18768,7 +15092,7 @@
                 <a:ea typeface="Aptos" pitchFamily="34" charset="-122"/>
                 <a:cs typeface="Aptos" pitchFamily="34" charset="-120"/>
               </a:rPr>
-              <a:t>Produce or contribute to: Initial inventory of known or suspected AI use.</a:t>
+              <a:t>Agentic AI: AI that can coordinate multiple steps or actions within defined.</a:t>
             </a:r>
             <a:endParaRPr lang="en-US" sz="1220" dirty="0"/>
           </a:p>
@@ -18875,7 +15199,7 @@
                 <a:ea typeface="Aptos" pitchFamily="34" charset="-122"/>
                 <a:cs typeface="Aptos" pitchFamily="34" charset="-120"/>
               </a:rPr>
-              <a:t>Produce or contribute to: Initial inventory of.</a:t>
+              <a:t>Agentic AI: AI that can coordinate multiple steps.</a:t>
             </a:r>
             <a:endParaRPr lang="en-US" sz="1140" dirty="0"/>
           </a:p>
@@ -18892,7 +15216,7 @@
                 <a:ea typeface="Aptos" pitchFamily="34" charset="-122"/>
                 <a:cs typeface="Aptos" pitchFamily="34" charset="-120"/>
               </a:rPr>
-              <a:t>Produce or contribute to: Draft list of decisions.</a:t>
+              <a:t>Human-in-the-loop: A workflow design in which a.</a:t>
             </a:r>
             <a:endParaRPr lang="en-US" sz="1140" dirty="0"/>
           </a:p>
@@ -18958,7 +15282,7 @@
                 <a:ea typeface="Aptos" pitchFamily="34" charset="-122"/>
                 <a:cs typeface="Aptos" pitchFamily="34" charset="-120"/>
               </a:rPr>
-              <a:t>What to produce</a:t>
+              <a:t>Apply it</a:t>
             </a:r>
             <a:endParaRPr lang="en-US" sz="1220" dirty="0"/>
           </a:p>
@@ -18999,7 +15323,7 @@
                 <a:ea typeface="Aptos" pitchFamily="34" charset="-122"/>
                 <a:cs typeface="Aptos" pitchFamily="34" charset="-120"/>
               </a:rPr>
-              <a:t>Use the assignment to test whether you can explain the concept, apply it to a.</a:t>
+              <a:t>Connect the concept to public health purpose, responsible use, required.</a:t>
             </a:r>
             <a:endParaRPr lang="en-US" sz="1220" dirty="0"/>
           </a:p>
@@ -19278,7 +15602,7 @@
                 <a:ea typeface="Aptos Display" pitchFamily="34" charset="-122"/>
                 <a:cs typeface="Aptos Display" pitchFamily="34" charset="-120"/>
               </a:rPr>
-              <a:t>Module Overview</a:t>
+              <a:t>Jurisdiction and Agency Policy Note</a:t>
             </a:r>
             <a:endParaRPr lang="en-US" sz="3400" dirty="0"/>
           </a:p>
@@ -19319,7 +15643,7 @@
                 <a:ea typeface="Aptos" pitchFamily="34" charset="-122"/>
                 <a:cs typeface="Aptos" pitchFamily="34" charset="-120"/>
               </a:rPr>
-              <a:t>• You do not need to become a machine learning engineer to participate in.</a:t>
+              <a:t>• AI use must be interpreted within your own jurisdiction's legal, policy,.</a:t>
             </a:r>
             <a:endParaRPr lang="en-US" sz="1920" dirty="0"/>
           </a:p>
@@ -19336,7 +15660,7 @@
                 <a:ea typeface="Aptos" pitchFamily="34" charset="-122"/>
                 <a:cs typeface="Aptos" pitchFamily="34" charset="-120"/>
               </a:rPr>
-              <a:t>• This module helps you distinguish pattern recognition, predictive analytics,.</a:t>
+              <a:t>• A use that is appropriate in one health department may require additional.</a:t>
             </a:r>
             <a:endParaRPr lang="en-US" sz="1920" dirty="0"/>
           </a:p>
@@ -19353,7 +15677,7 @@
                 <a:ea typeface="Aptos" pitchFamily="34" charset="-122"/>
                 <a:cs typeface="Aptos" pitchFamily="34" charset="-120"/>
               </a:rPr>
-              <a:t>• That distinction matters because a tool that drafts a message, a tool that.</a:t>
+              <a:t>• If your department already has data governance, technology governance,.</a:t>
             </a:r>
             <a:endParaRPr lang="en-US" sz="1920" dirty="0"/>
           </a:p>
@@ -19419,7 +15743,7 @@
                 <a:ea typeface="Aptos" pitchFamily="34" charset="-122"/>
                 <a:cs typeface="Aptos" pitchFamily="34" charset="-120"/>
               </a:rPr>
-              <a:t>Core concept</a:t>
+              <a:t>Governance lens</a:t>
             </a:r>
             <a:endParaRPr lang="en-US" sz="1220" dirty="0"/>
           </a:p>
@@ -19460,7 +15784,7 @@
                 <a:ea typeface="Aptos" pitchFamily="34" charset="-122"/>
                 <a:cs typeface="Aptos" pitchFamily="34" charset="-120"/>
               </a:rPr>
-              <a:t>You do not need to become a machine learning engineer to participate in.</a:t>
+              <a:t>AI use must be interpreted within your own jurisdiction's legal, policy,.</a:t>
             </a:r>
             <a:endParaRPr lang="en-US" sz="1220" dirty="0"/>
           </a:p>
@@ -19502,55 +15826,16 @@
         <p:spPr>
           <a:xfrm>
             <a:off x="7708392" y="2852928"/>
-            <a:ext cx="3282696" cy="228600"/>
-          </a:xfrm>
-          <a:prstGeom prst="rect">
-            <a:avLst/>
-          </a:prstGeom>
-          <a:noFill/>
-          <a:ln/>
-        </p:spPr>
-        <p:txBody>
-          <a:bodyPr wrap="square" lIns="0" tIns="0" rIns="0" bIns="0" rtlCol="0" anchor="ctr"/>
-          <a:lstStyle/>
-          <a:p>
-            <a:pPr indent="0" marL="0">
-              <a:buNone/>
-            </a:pPr>
-            <a:r>
-              <a:rPr lang="en-US" sz="1220" b="1" dirty="0">
-                <a:solidFill>
-                  <a:srgbClr val="0068B7"/>
-                </a:solidFill>
-                <a:latin typeface="Aptos" pitchFamily="34" charset="0"/>
-                <a:ea typeface="Aptos" pitchFamily="34" charset="-122"/>
-                <a:cs typeface="Aptos" pitchFamily="34" charset="-120"/>
-              </a:rPr>
-              <a:t>Concept checkpoints</a:t>
-            </a:r>
-            <a:endParaRPr lang="en-US" sz="1220" dirty="0"/>
-          </a:p>
-        </p:txBody>
-      </p:sp>
-      <p:sp>
-        <p:nvSpPr>
-          <p:cNvPr id="15" name="Text 13"/>
-          <p:cNvSpPr/>
-          <p:nvPr/>
-        </p:nvSpPr>
-        <p:spPr>
-          <a:xfrm>
-            <a:off x="7726680" y="3182112"/>
-            <a:ext cx="3227832" cy="960120"/>
-          </a:xfrm>
-          <a:prstGeom prst="rect">
-            <a:avLst/>
-          </a:prstGeom>
-          <a:noFill/>
-          <a:ln/>
-        </p:spPr>
-        <p:txBody>
-          <a:bodyPr wrap="square" lIns="508" tIns="508" rIns="508" bIns="508" rtlCol="0" anchor="t">
+            <a:ext cx="3282696" cy="219456"/>
+          </a:xfrm>
+          <a:prstGeom prst="rect">
+            <a:avLst/>
+          </a:prstGeom>
+          <a:noFill/>
+          <a:ln/>
+        </p:spPr>
+        <p:txBody>
+          <a:bodyPr wrap="square" lIns="0" tIns="0" rIns="0" bIns="0" rtlCol="0" anchor="ctr">
             <a:normAutofit/>
           </a:bodyPr>
           <a:lstStyle/>
@@ -19559,7 +15844,298 @@
               <a:buNone/>
             </a:pPr>
             <a:r>
-              <a:rPr lang="en-US" sz="1140" dirty="0">
+              <a:rPr lang="en-US" sz="1160" b="1" dirty="0">
+                <a:solidFill>
+                  <a:srgbClr val="0068B7"/>
+                </a:solidFill>
+                <a:latin typeface="Aptos" pitchFamily="34" charset="0"/>
+                <a:ea typeface="Aptos" pitchFamily="34" charset="-122"/>
+                <a:cs typeface="Aptos" pitchFamily="34" charset="-120"/>
+              </a:rPr>
+              <a:t>Governance pathway</a:t>
+            </a:r>
+            <a:endParaRPr lang="en-US" sz="1160" dirty="0"/>
+          </a:p>
+        </p:txBody>
+      </p:sp>
+      <p:sp>
+        <p:nvSpPr>
+          <p:cNvPr id="15" name="Shape 13"/>
+          <p:cNvSpPr/>
+          <p:nvPr/>
+        </p:nvSpPr>
+        <p:spPr>
+          <a:xfrm>
+            <a:off x="8717280" y="3406140"/>
+            <a:ext cx="164592" cy="0"/>
+          </a:xfrm>
+          <a:prstGeom prst="line">
+            <a:avLst/>
+          </a:prstGeom>
+          <a:noFill/>
+          <a:ln w="15240">
+            <a:solidFill>
+              <a:srgbClr val="8ABBD8"/>
+            </a:solidFill>
+            <a:prstDash val="solid"/>
+          </a:ln>
+        </p:spPr>
+      </p:sp>
+      <p:sp>
+        <p:nvSpPr>
+          <p:cNvPr id="16" name="Shape 14"/>
+          <p:cNvSpPr/>
+          <p:nvPr/>
+        </p:nvSpPr>
+        <p:spPr>
+          <a:xfrm>
+            <a:off x="7781544" y="3255264"/>
+            <a:ext cx="935736" cy="301752"/>
+          </a:xfrm>
+          <a:prstGeom prst="roundRect">
+            <a:avLst>
+              <a:gd name="adj" fmla="val 24242"/>
+            </a:avLst>
+          </a:prstGeom>
+          <a:solidFill>
+            <a:srgbClr val="0068B7"/>
+          </a:solidFill>
+          <a:ln w="12700">
+            <a:solidFill>
+              <a:srgbClr val="0068B7"/>
+            </a:solidFill>
+            <a:prstDash val="solid"/>
+          </a:ln>
+        </p:spPr>
+      </p:sp>
+      <p:sp>
+        <p:nvSpPr>
+          <p:cNvPr id="17" name="Text 15"/>
+          <p:cNvSpPr/>
+          <p:nvPr/>
+        </p:nvSpPr>
+        <p:spPr>
+          <a:xfrm>
+            <a:off x="7818120" y="3328416"/>
+            <a:ext cx="862584" cy="146304"/>
+          </a:xfrm>
+          <a:prstGeom prst="rect">
+            <a:avLst/>
+          </a:prstGeom>
+          <a:noFill/>
+          <a:ln/>
+        </p:spPr>
+        <p:txBody>
+          <a:bodyPr wrap="square" lIns="0" tIns="0" rIns="0" bIns="0" rtlCol="0" anchor="ctr">
+            <a:normAutofit/>
+          </a:bodyPr>
+          <a:lstStyle/>
+          <a:p>
+            <a:pPr algn="ctr" indent="0" marL="0">
+              <a:buNone/>
+            </a:pPr>
+            <a:r>
+              <a:rPr lang="en-US" sz="880" b="1" dirty="0">
+                <a:solidFill>
+                  <a:srgbClr val="FFFFFF"/>
+                </a:solidFill>
+                <a:latin typeface="Aptos" pitchFamily="34" charset="0"/>
+                <a:ea typeface="Aptos" pitchFamily="34" charset="-122"/>
+                <a:cs typeface="Aptos" pitchFamily="34" charset="-120"/>
+              </a:rPr>
+              <a:t>Submit</a:t>
+            </a:r>
+            <a:endParaRPr lang="en-US" sz="880" dirty="0"/>
+          </a:p>
+        </p:txBody>
+      </p:sp>
+      <p:sp>
+        <p:nvSpPr>
+          <p:cNvPr id="18" name="Shape 16"/>
+          <p:cNvSpPr/>
+          <p:nvPr/>
+        </p:nvSpPr>
+        <p:spPr>
+          <a:xfrm>
+            <a:off x="9817608" y="3406140"/>
+            <a:ext cx="164592" cy="0"/>
+          </a:xfrm>
+          <a:prstGeom prst="line">
+            <a:avLst/>
+          </a:prstGeom>
+          <a:noFill/>
+          <a:ln w="15240">
+            <a:solidFill>
+              <a:srgbClr val="8ABBD8"/>
+            </a:solidFill>
+            <a:prstDash val="solid"/>
+          </a:ln>
+        </p:spPr>
+      </p:sp>
+      <p:sp>
+        <p:nvSpPr>
+          <p:cNvPr id="19" name="Shape 17"/>
+          <p:cNvSpPr/>
+          <p:nvPr/>
+        </p:nvSpPr>
+        <p:spPr>
+          <a:xfrm>
+            <a:off x="8881872" y="3255264"/>
+            <a:ext cx="935736" cy="301752"/>
+          </a:xfrm>
+          <a:prstGeom prst="roundRect">
+            <a:avLst>
+              <a:gd name="adj" fmla="val 24242"/>
+            </a:avLst>
+          </a:prstGeom>
+          <a:solidFill>
+            <a:srgbClr val="2F8A28"/>
+          </a:solidFill>
+          <a:ln w="12700">
+            <a:solidFill>
+              <a:srgbClr val="2F8A28"/>
+            </a:solidFill>
+            <a:prstDash val="solid"/>
+          </a:ln>
+        </p:spPr>
+      </p:sp>
+      <p:sp>
+        <p:nvSpPr>
+          <p:cNvPr id="20" name="Text 18"/>
+          <p:cNvSpPr/>
+          <p:nvPr/>
+        </p:nvSpPr>
+        <p:spPr>
+          <a:xfrm>
+            <a:off x="8918448" y="3328416"/>
+            <a:ext cx="862584" cy="146304"/>
+          </a:xfrm>
+          <a:prstGeom prst="rect">
+            <a:avLst/>
+          </a:prstGeom>
+          <a:noFill/>
+          <a:ln/>
+        </p:spPr>
+        <p:txBody>
+          <a:bodyPr wrap="square" lIns="0" tIns="0" rIns="0" bIns="0" rtlCol="0" anchor="ctr">
+            <a:normAutofit/>
+          </a:bodyPr>
+          <a:lstStyle/>
+          <a:p>
+            <a:pPr algn="ctr" indent="0" marL="0">
+              <a:buNone/>
+            </a:pPr>
+            <a:r>
+              <a:rPr lang="en-US" sz="880" b="1" dirty="0">
+                <a:solidFill>
+                  <a:srgbClr val="FFFFFF"/>
+                </a:solidFill>
+                <a:latin typeface="Aptos" pitchFamily="34" charset="0"/>
+                <a:ea typeface="Aptos" pitchFamily="34" charset="-122"/>
+                <a:cs typeface="Aptos" pitchFamily="34" charset="-120"/>
+              </a:rPr>
+              <a:t>Review</a:t>
+            </a:r>
+            <a:endParaRPr lang="en-US" sz="880" dirty="0"/>
+          </a:p>
+        </p:txBody>
+      </p:sp>
+      <p:sp>
+        <p:nvSpPr>
+          <p:cNvPr id="21" name="Shape 19"/>
+          <p:cNvSpPr/>
+          <p:nvPr/>
+        </p:nvSpPr>
+        <p:spPr>
+          <a:xfrm>
+            <a:off x="9982200" y="3255264"/>
+            <a:ext cx="935736" cy="301752"/>
+          </a:xfrm>
+          <a:prstGeom prst="roundRect">
+            <a:avLst>
+              <a:gd name="adj" fmla="val 24242"/>
+            </a:avLst>
+          </a:prstGeom>
+          <a:solidFill>
+            <a:srgbClr val="6A4CA3"/>
+          </a:solidFill>
+          <a:ln w="12700">
+            <a:solidFill>
+              <a:srgbClr val="6A4CA3"/>
+            </a:solidFill>
+            <a:prstDash val="solid"/>
+          </a:ln>
+        </p:spPr>
+      </p:sp>
+      <p:sp>
+        <p:nvSpPr>
+          <p:cNvPr id="22" name="Text 20"/>
+          <p:cNvSpPr/>
+          <p:nvPr/>
+        </p:nvSpPr>
+        <p:spPr>
+          <a:xfrm>
+            <a:off x="10018776" y="3328416"/>
+            <a:ext cx="862584" cy="146304"/>
+          </a:xfrm>
+          <a:prstGeom prst="rect">
+            <a:avLst/>
+          </a:prstGeom>
+          <a:noFill/>
+          <a:ln/>
+        </p:spPr>
+        <p:txBody>
+          <a:bodyPr wrap="square" lIns="0" tIns="0" rIns="0" bIns="0" rtlCol="0" anchor="ctr">
+            <a:normAutofit/>
+          </a:bodyPr>
+          <a:lstStyle/>
+          <a:p>
+            <a:pPr algn="ctr" indent="0" marL="0">
+              <a:buNone/>
+            </a:pPr>
+            <a:r>
+              <a:rPr lang="en-US" sz="880" b="1" dirty="0">
+                <a:solidFill>
+                  <a:srgbClr val="FFFFFF"/>
+                </a:solidFill>
+                <a:latin typeface="Aptos" pitchFamily="34" charset="0"/>
+                <a:ea typeface="Aptos" pitchFamily="34" charset="-122"/>
+                <a:cs typeface="Aptos" pitchFamily="34" charset="-120"/>
+              </a:rPr>
+              <a:t>Oversee</a:t>
+            </a:r>
+            <a:endParaRPr lang="en-US" sz="880" dirty="0"/>
+          </a:p>
+        </p:txBody>
+      </p:sp>
+      <p:sp>
+        <p:nvSpPr>
+          <p:cNvPr id="23" name="Text 21"/>
+          <p:cNvSpPr/>
+          <p:nvPr/>
+        </p:nvSpPr>
+        <p:spPr>
+          <a:xfrm>
+            <a:off x="7763256" y="3749040"/>
+            <a:ext cx="3172968" cy="356616"/>
+          </a:xfrm>
+          <a:prstGeom prst="rect">
+            <a:avLst/>
+          </a:prstGeom>
+          <a:noFill/>
+          <a:ln/>
+        </p:spPr>
+        <p:txBody>
+          <a:bodyPr wrap="square" lIns="254" tIns="254" rIns="254" bIns="254" rtlCol="0" anchor="t">
+            <a:normAutofit/>
+          </a:bodyPr>
+          <a:lstStyle/>
+          <a:p>
+            <a:pPr indent="0" marL="0">
+              <a:buNone/>
+            </a:pPr>
+            <a:r>
+              <a:rPr lang="en-US" sz="1040" dirty="0">
                 <a:solidFill>
                   <a:srgbClr val="17364A"/>
                 </a:solidFill>
@@ -19567,49 +16143,15 @@
                 <a:ea typeface="Aptos" pitchFamily="34" charset="-122"/>
                 <a:cs typeface="Aptos" pitchFamily="34" charset="-120"/>
               </a:rPr>
-              <a:t>You do not need to become a machine learning.</a:t>
-            </a:r>
-            <a:endParaRPr lang="en-US" sz="1140" dirty="0"/>
-          </a:p>
-          <a:p>
-            <a:pPr indent="0" marL="0">
-              <a:buNone/>
-            </a:pPr>
-            <a:r>
-              <a:rPr lang="en-US" sz="1140" dirty="0">
-                <a:solidFill>
-                  <a:srgbClr val="17364A"/>
-                </a:solidFill>
-                <a:latin typeface="Aptos" pitchFamily="34" charset="0"/>
-                <a:ea typeface="Aptos" pitchFamily="34" charset="-122"/>
-                <a:cs typeface="Aptos" pitchFamily="34" charset="-120"/>
-              </a:rPr>
-              <a:t>This module helps you distinguish pattern.</a:t>
-            </a:r>
-            <a:endParaRPr lang="en-US" sz="1140" dirty="0"/>
-          </a:p>
-          <a:p>
-            <a:pPr indent="0" marL="0">
-              <a:buNone/>
-            </a:pPr>
-            <a:r>
-              <a:rPr lang="en-US" sz="1140" dirty="0">
-                <a:solidFill>
-                  <a:srgbClr val="17364A"/>
-                </a:solidFill>
-                <a:latin typeface="Aptos" pitchFamily="34" charset="0"/>
-                <a:ea typeface="Aptos" pitchFamily="34" charset="-122"/>
-                <a:cs typeface="Aptos" pitchFamily="34" charset="-120"/>
-              </a:rPr>
-              <a:t>That distinction matters because a tool that.</a:t>
-            </a:r>
-            <a:endParaRPr lang="en-US" sz="1140" dirty="0"/>
-          </a:p>
-        </p:txBody>
-      </p:sp>
-      <p:sp>
-        <p:nvSpPr>
-          <p:cNvPr id="16" name="Shape 14"/>
+              <a:t>A proposed AI use should move through documented review before it.</a:t>
+            </a:r>
+            <a:endParaRPr lang="en-US" sz="1040" dirty="0"/>
+          </a:p>
+        </p:txBody>
+      </p:sp>
+      <p:sp>
+        <p:nvSpPr>
+          <p:cNvPr id="24" name="Shape 22"/>
           <p:cNvSpPr/>
           <p:nvPr/>
         </p:nvSpPr>
@@ -19636,7 +16178,7 @@
       </p:sp>
       <p:sp>
         <p:nvSpPr>
-          <p:cNvPr id="17" name="Text 15"/>
+          <p:cNvPr id="25" name="Text 23"/>
           <p:cNvSpPr/>
           <p:nvPr/>
         </p:nvSpPr>
@@ -19667,7 +16209,7 @@
                 <a:ea typeface="Aptos" pitchFamily="34" charset="-122"/>
                 <a:cs typeface="Aptos" pitchFamily="34" charset="-120"/>
               </a:rPr>
-              <a:t>Apply it</a:t>
+              <a:t>What to document</a:t>
             </a:r>
             <a:endParaRPr lang="en-US" sz="1220" dirty="0"/>
           </a:p>
@@ -19675,7 +16217,7 @@
       </p:sp>
       <p:sp>
         <p:nvSpPr>
-          <p:cNvPr id="18" name="Text 16"/>
+          <p:cNvPr id="26" name="Text 24"/>
           <p:cNvSpPr/>
           <p:nvPr/>
         </p:nvSpPr>
@@ -19708,7 +16250,7 @@
                 <a:ea typeface="Aptos" pitchFamily="34" charset="-122"/>
                 <a:cs typeface="Aptos" pitchFamily="34" charset="-120"/>
               </a:rPr>
-              <a:t>Connect the concept to public health purpose, responsible use, required.</a:t>
+              <a:t>Translate this concept into clear decision rights, review steps, documentation.</a:t>
             </a:r>
             <a:endParaRPr lang="en-US" sz="1220" dirty="0"/>
           </a:p>
@@ -19978,17 +16520,6 @@
             <a:pPr indent="0" marL="0">
               <a:buNone/>
             </a:pPr>
-            <a:r>
-              <a:rPr lang="en-US" sz="3400" b="1" dirty="0">
-                <a:solidFill>
-                  <a:srgbClr val="003A63"/>
-                </a:solidFill>
-                <a:latin typeface="Aptos Display" pitchFamily="34" charset="0"/>
-                <a:ea typeface="Aptos Display" pitchFamily="34" charset="-122"/>
-                <a:cs typeface="Aptos Display" pitchFamily="34" charset="-120"/>
-              </a:rPr>
-              <a:t>Definitions</a:t>
-            </a:r>
             <a:endParaRPr lang="en-US" sz="3400" dirty="0"/>
           </a:p>
         </p:txBody>
@@ -20028,7 +16559,7 @@
                 <a:ea typeface="Aptos" pitchFamily="34" charset="-122"/>
                 <a:cs typeface="Aptos" pitchFamily="34" charset="-120"/>
               </a:rPr>
-              <a:t>• Agentic AI: AI configured to pursue a goal through multiple steps, such as.</a:t>
+              <a:t>• Public health agencies make decisions that affect communities, services,.</a:t>
             </a:r>
             <a:endParaRPr lang="en-US" sz="1920" dirty="0"/>
           </a:p>
@@ -20045,7 +16576,7 @@
                 <a:ea typeface="Aptos" pitchFamily="34" charset="-122"/>
                 <a:cs typeface="Aptos" pitchFamily="34" charset="-120"/>
               </a:rPr>
-              <a:t>• Artificial intelligence (AI): Computer-based methods that can recognize.</a:t>
+              <a:t>• AI can support that work, but it can also introduce errors, bias, privacy.</a:t>
             </a:r>
             <a:endParaRPr lang="en-US" sz="1920" dirty="0"/>
           </a:p>
@@ -20062,7 +16593,7 @@
                 <a:ea typeface="Aptos" pitchFamily="34" charset="-122"/>
                 <a:cs typeface="Aptos" pitchFamily="34" charset="-120"/>
               </a:rPr>
-              <a:t>• Deep Research: An agentic research capability that can plan a multi-step.</a:t>
+              <a:t>• AI systems are often described with broad marketing language that hides.</a:t>
             </a:r>
             <a:endParaRPr lang="en-US" sz="1920" dirty="0"/>
           </a:p>
@@ -20169,7 +16700,7 @@
                 <a:ea typeface="Aptos" pitchFamily="34" charset="-122"/>
                 <a:cs typeface="Aptos" pitchFamily="34" charset="-120"/>
               </a:rPr>
-              <a:t>Agentic AI: AI configured to pursue a goal through multiple steps, such as.</a:t>
+              <a:t>Public health agencies make decisions that affect communities, services,.</a:t>
             </a:r>
             <a:endParaRPr lang="en-US" sz="1220" dirty="0"/>
           </a:p>
@@ -20276,7 +16807,7 @@
                 <a:ea typeface="Aptos" pitchFamily="34" charset="-122"/>
                 <a:cs typeface="Aptos" pitchFamily="34" charset="-120"/>
               </a:rPr>
-              <a:t>Agentic AI: AI configured to pursue a goal through.</a:t>
+              <a:t>Public health agencies make decisions that affect.</a:t>
             </a:r>
             <a:endParaRPr lang="en-US" sz="1140" dirty="0"/>
           </a:p>
@@ -20293,7 +16824,7 @@
                 <a:ea typeface="Aptos" pitchFamily="34" charset="-122"/>
                 <a:cs typeface="Aptos" pitchFamily="34" charset="-120"/>
               </a:rPr>
-              <a:t>Agentic AI requires clear boundaries, permissions,.</a:t>
+              <a:t>AI can support that work, but it can also.</a:t>
             </a:r>
             <a:endParaRPr lang="en-US" sz="1140" dirty="0"/>
           </a:p>
@@ -20310,7 +16841,7 @@
                 <a:ea typeface="Aptos" pitchFamily="34" charset="-122"/>
                 <a:cs typeface="Aptos" pitchFamily="34" charset="-120"/>
               </a:rPr>
-              <a:t>Artificial intelligence (AI): Computer-based.</a:t>
+              <a:t>AI systems are often described with broad.</a:t>
             </a:r>
             <a:endParaRPr lang="en-US" sz="1140" dirty="0"/>
           </a:p>
@@ -20687,17 +17218,6 @@
             <a:pPr indent="0" marL="0">
               <a:buNone/>
             </a:pPr>
-            <a:r>
-              <a:rPr lang="en-US" sz="3400" b="1" dirty="0">
-                <a:solidFill>
-                  <a:srgbClr val="003A63"/>
-                </a:solidFill>
-                <a:latin typeface="Aptos Display" pitchFamily="34" charset="0"/>
-                <a:ea typeface="Aptos Display" pitchFamily="34" charset="-122"/>
-                <a:cs typeface="Aptos Display" pitchFamily="34" charset="-120"/>
-              </a:rPr>
-              <a:t>Definitions Continued</a:t>
-            </a:r>
             <a:endParaRPr lang="en-US" sz="3400" dirty="0"/>
           </a:p>
         </p:txBody>
@@ -20737,7 +17257,7 @@
                 <a:ea typeface="Aptos" pitchFamily="34" charset="-122"/>
                 <a:cs typeface="Aptos" pitchFamily="34" charset="-120"/>
               </a:rPr>
-              <a:t>• Large language model (LLM): A generative AI model trained on large bodies of.</a:t>
+              <a:t>• A preparedness team wants to use AI to help summarize after-action reports.</a:t>
             </a:r>
             <a:endParaRPr lang="en-US" sz="1920" dirty="0"/>
           </a:p>
@@ -20754,7 +17274,7 @@
                 <a:ea typeface="Aptos" pitchFamily="34" charset="-122"/>
                 <a:cs typeface="Aptos" pitchFamily="34" charset="-120"/>
               </a:rPr>
-              <a:t>• Machine learning: A type of AI that identifies patterns in data and uses.</a:t>
+              <a:t>• A generative AI tool might draft summaries from approved documents, while a.</a:t>
             </a:r>
             <a:endParaRPr lang="en-US" sz="1920" dirty="0"/>
           </a:p>
@@ -20771,7 +17291,7 @@
                 <a:ea typeface="Aptos" pitchFamily="34" charset="-122"/>
                 <a:cs typeface="Aptos" pitchFamily="34" charset="-120"/>
               </a:rPr>
-              <a:t>• Predictive AI: AI that uses data patterns to estimate future events, risks,.</a:t>
+              <a:t>• The team would still need a human reviewer to verify accuracy, remove.</a:t>
             </a:r>
             <a:endParaRPr lang="en-US" sz="1920" dirty="0"/>
           </a:p>
@@ -20878,7 +17398,7 @@
                 <a:ea typeface="Aptos" pitchFamily="34" charset="-122"/>
                 <a:cs typeface="Aptos" pitchFamily="34" charset="-120"/>
               </a:rPr>
-              <a:t>Large language model (LLM): A generative AI model trained on large bodies of.</a:t>
+              <a:t>A preparedness team wants to use AI to help summarize after-action reports and.</a:t>
             </a:r>
             <a:endParaRPr lang="en-US" sz="1220" dirty="0"/>
           </a:p>
@@ -20985,7 +17505,7 @@
                 <a:ea typeface="Aptos" pitchFamily="34" charset="-122"/>
                 <a:cs typeface="Aptos" pitchFamily="34" charset="-120"/>
               </a:rPr>
-              <a:t>Large language model (LLM): A generative AI model.</a:t>
+              <a:t>A preparedness team wants to use AI to help.</a:t>
             </a:r>
             <a:endParaRPr lang="en-US" sz="1140" dirty="0"/>
           </a:p>
@@ -21002,7 +17522,7 @@
                 <a:ea typeface="Aptos" pitchFamily="34" charset="-122"/>
                 <a:cs typeface="Aptos" pitchFamily="34" charset="-120"/>
               </a:rPr>
-              <a:t>LLM outputs should be reviewed by qualified humans.</a:t>
+              <a:t>A generative AI tool might draft summaries from.</a:t>
             </a:r>
             <a:endParaRPr lang="en-US" sz="1140" dirty="0"/>
           </a:p>
@@ -21019,7 +17539,7 @@
                 <a:ea typeface="Aptos" pitchFamily="34" charset="-122"/>
                 <a:cs typeface="Aptos" pitchFamily="34" charset="-120"/>
               </a:rPr>
-              <a:t>Machine learning: A type of AI that identifies.</a:t>
+              <a:t>The team would still need a human reviewer to.</a:t>
             </a:r>
             <a:endParaRPr lang="en-US" sz="1140" dirty="0"/>
           </a:p>
